--- a/manuscript/革新ビジネスアワード2026_ファイナル_100億市場ストーリー整理.pptx
+++ b/manuscript/革新ビジネスアワード2026_ファイナル_100億市場ストーリー整理.pptx
@@ -16,9 +16,12 @@
     <p:sldId id="264" r:id="rId10"/>
     <p:sldId id="265" r:id="rId11"/>
     <p:sldId id="266" r:id="rId12"/>
+    <p:sldId id="267" r:id="rId13"/>
+    <p:sldId id="268" r:id="rId14"/>
+    <p:sldId id="269" r:id="rId15"/>
   </p:sldIdLst>
   <p:notesMasterIdLst>
-    <p:notesMasterId r:id="rId13"/>
+    <p:notesMasterId r:id="rId16"/>
   </p:notesMasterIdLst>
   <p:sldSz cx="12191695" cy="6858000"/>
   <p:notesSz cx="6858000" cy="12191695"/>
@@ -971,6 +974,270 @@
             <a:fld id="{F7021451-1387-4CA6-816F-3879F97B5CBC}" type="slidenum">
               <a:rPr lang="en-US"/>
               <a:t>11</a:t>
+            </a:fld>
+            <a:endParaRPr lang="en-US"/>
+          </a:p>
+        </p:txBody>
+      </p:sp>
+    </p:spTree>
+    <p:extLst>
+      <p:ext uri="{BB962C8B-B14F-4D97-AF65-F5344CB8AC3E}">
+        <p14:creationId xmlns:p14="http://schemas.microsoft.com/office/powerpoint/2010/main" val="1024086991"/>
+      </p:ext>
+    </p:extLst>
+  </p:cSld>
+  <p:clrMapOvr>
+    <a:masterClrMapping/>
+  </p:clrMapOvr>
+</p:notes>
+</file>
+
+<file path=ppt/notesSlides/notesSlide12.xml><?xml version="1.0" encoding="utf-8"?>
+<p:notes xmlns:a="http://schemas.openxmlformats.org/drawingml/2006/main" xmlns:r="http://schemas.openxmlformats.org/officeDocument/2006/relationships" xmlns:p="http://schemas.openxmlformats.org/presentationml/2006/main">
+  <p:cSld>
+    <p:spTree>
+      <p:nvGrpSpPr>
+        <p:cNvPr id="1" name=""/>
+        <p:cNvGrpSpPr/>
+        <p:nvPr/>
+      </p:nvGrpSpPr>
+      <p:grpSpPr>
+        <a:xfrm>
+          <a:off x="0" y="0"/>
+          <a:ext cx="0" cy="0"/>
+          <a:chOff x="0" y="0"/>
+          <a:chExt cx="0" cy="0"/>
+        </a:xfrm>
+      </p:grpSpPr>
+      <p:sp>
+        <p:nvSpPr>
+          <p:cNvPr id="2" name="Slide Image Placeholder 1"/>
+          <p:cNvSpPr>
+            <a:spLocks noGrp="1" noRot="1" noChangeAspect="1"/>
+          </p:cNvSpPr>
+          <p:nvPr>
+            <p:ph type="sldImg"/>
+          </p:nvPr>
+        </p:nvSpPr>
+        <p:spPr/>
+      </p:sp>
+      <p:sp>
+        <p:nvSpPr>
+          <p:cNvPr id="3" name="Notes Placeholder 2"/>
+          <p:cNvSpPr>
+            <a:spLocks noGrp="1"/>
+          </p:cNvSpPr>
+          <p:nvPr>
+            <p:ph type="body" idx="1"/>
+          </p:nvPr>
+        </p:nvSpPr>
+        <p:spPr/>
+        <p:txBody>
+          <a:bodyPr/>
+          <a:lstStyle/>
+          <a:p>
+            <a:r>
+              <a:rPr lang="en-US" dirty="0"/>
+              <a:t/>
+            </a:r>
+            <a:endParaRPr lang="en-US" dirty="0"/>
+          </a:p>
+        </p:txBody>
+      </p:sp>
+      <p:sp>
+        <p:nvSpPr>
+          <p:cNvPr id="4" name="Slide Number Placeholder 3"/>
+          <p:cNvSpPr>
+            <a:spLocks noGrp="1"/>
+          </p:cNvSpPr>
+          <p:nvPr>
+            <p:ph type="sldNum" sz="quarter" idx="10"/>
+          </p:nvPr>
+        </p:nvSpPr>
+        <p:spPr/>
+        <p:txBody>
+          <a:bodyPr/>
+          <a:lstStyle/>
+          <a:p>
+            <a:fld id="{F7021451-1387-4CA6-816F-3879F97B5CBC}" type="slidenum">
+              <a:rPr lang="en-US"/>
+              <a:t>12</a:t>
+            </a:fld>
+            <a:endParaRPr lang="en-US"/>
+          </a:p>
+        </p:txBody>
+      </p:sp>
+    </p:spTree>
+    <p:extLst>
+      <p:ext uri="{BB962C8B-B14F-4D97-AF65-F5344CB8AC3E}">
+        <p14:creationId xmlns:p14="http://schemas.microsoft.com/office/powerpoint/2010/main" val="1024086991"/>
+      </p:ext>
+    </p:extLst>
+  </p:cSld>
+  <p:clrMapOvr>
+    <a:masterClrMapping/>
+  </p:clrMapOvr>
+</p:notes>
+</file>
+
+<file path=ppt/notesSlides/notesSlide13.xml><?xml version="1.0" encoding="utf-8"?>
+<p:notes xmlns:a="http://schemas.openxmlformats.org/drawingml/2006/main" xmlns:r="http://schemas.openxmlformats.org/officeDocument/2006/relationships" xmlns:p="http://schemas.openxmlformats.org/presentationml/2006/main">
+  <p:cSld>
+    <p:spTree>
+      <p:nvGrpSpPr>
+        <p:cNvPr id="1" name=""/>
+        <p:cNvGrpSpPr/>
+        <p:nvPr/>
+      </p:nvGrpSpPr>
+      <p:grpSpPr>
+        <a:xfrm>
+          <a:off x="0" y="0"/>
+          <a:ext cx="0" cy="0"/>
+          <a:chOff x="0" y="0"/>
+          <a:chExt cx="0" cy="0"/>
+        </a:xfrm>
+      </p:grpSpPr>
+      <p:sp>
+        <p:nvSpPr>
+          <p:cNvPr id="2" name="Slide Image Placeholder 1"/>
+          <p:cNvSpPr>
+            <a:spLocks noGrp="1" noRot="1" noChangeAspect="1"/>
+          </p:cNvSpPr>
+          <p:nvPr>
+            <p:ph type="sldImg"/>
+          </p:nvPr>
+        </p:nvSpPr>
+        <p:spPr/>
+      </p:sp>
+      <p:sp>
+        <p:nvSpPr>
+          <p:cNvPr id="3" name="Notes Placeholder 2"/>
+          <p:cNvSpPr>
+            <a:spLocks noGrp="1"/>
+          </p:cNvSpPr>
+          <p:nvPr>
+            <p:ph type="body" idx="1"/>
+          </p:nvPr>
+        </p:nvSpPr>
+        <p:spPr/>
+        <p:txBody>
+          <a:bodyPr/>
+          <a:lstStyle/>
+          <a:p>
+            <a:r>
+              <a:rPr lang="en-US" dirty="0"/>
+              <a:t/>
+            </a:r>
+            <a:endParaRPr lang="en-US" dirty="0"/>
+          </a:p>
+        </p:txBody>
+      </p:sp>
+      <p:sp>
+        <p:nvSpPr>
+          <p:cNvPr id="4" name="Slide Number Placeholder 3"/>
+          <p:cNvSpPr>
+            <a:spLocks noGrp="1"/>
+          </p:cNvSpPr>
+          <p:nvPr>
+            <p:ph type="sldNum" sz="quarter" idx="10"/>
+          </p:nvPr>
+        </p:nvSpPr>
+        <p:spPr/>
+        <p:txBody>
+          <a:bodyPr/>
+          <a:lstStyle/>
+          <a:p>
+            <a:fld id="{F7021451-1387-4CA6-816F-3879F97B5CBC}" type="slidenum">
+              <a:rPr lang="en-US"/>
+              <a:t>13</a:t>
+            </a:fld>
+            <a:endParaRPr lang="en-US"/>
+          </a:p>
+        </p:txBody>
+      </p:sp>
+    </p:spTree>
+    <p:extLst>
+      <p:ext uri="{BB962C8B-B14F-4D97-AF65-F5344CB8AC3E}">
+        <p14:creationId xmlns:p14="http://schemas.microsoft.com/office/powerpoint/2010/main" val="1024086991"/>
+      </p:ext>
+    </p:extLst>
+  </p:cSld>
+  <p:clrMapOvr>
+    <a:masterClrMapping/>
+  </p:clrMapOvr>
+</p:notes>
+</file>
+
+<file path=ppt/notesSlides/notesSlide14.xml><?xml version="1.0" encoding="utf-8"?>
+<p:notes xmlns:a="http://schemas.openxmlformats.org/drawingml/2006/main" xmlns:r="http://schemas.openxmlformats.org/officeDocument/2006/relationships" xmlns:p="http://schemas.openxmlformats.org/presentationml/2006/main">
+  <p:cSld>
+    <p:spTree>
+      <p:nvGrpSpPr>
+        <p:cNvPr id="1" name=""/>
+        <p:cNvGrpSpPr/>
+        <p:nvPr/>
+      </p:nvGrpSpPr>
+      <p:grpSpPr>
+        <a:xfrm>
+          <a:off x="0" y="0"/>
+          <a:ext cx="0" cy="0"/>
+          <a:chOff x="0" y="0"/>
+          <a:chExt cx="0" cy="0"/>
+        </a:xfrm>
+      </p:grpSpPr>
+      <p:sp>
+        <p:nvSpPr>
+          <p:cNvPr id="2" name="Slide Image Placeholder 1"/>
+          <p:cNvSpPr>
+            <a:spLocks noGrp="1" noRot="1" noChangeAspect="1"/>
+          </p:cNvSpPr>
+          <p:nvPr>
+            <p:ph type="sldImg"/>
+          </p:nvPr>
+        </p:nvSpPr>
+        <p:spPr/>
+      </p:sp>
+      <p:sp>
+        <p:nvSpPr>
+          <p:cNvPr id="3" name="Notes Placeholder 2"/>
+          <p:cNvSpPr>
+            <a:spLocks noGrp="1"/>
+          </p:cNvSpPr>
+          <p:nvPr>
+            <p:ph type="body" idx="1"/>
+          </p:nvPr>
+        </p:nvSpPr>
+        <p:spPr/>
+        <p:txBody>
+          <a:bodyPr/>
+          <a:lstStyle/>
+          <a:p>
+            <a:r>
+              <a:rPr lang="en-US" dirty="0"/>
+              <a:t/>
+            </a:r>
+            <a:endParaRPr lang="en-US" dirty="0"/>
+          </a:p>
+        </p:txBody>
+      </p:sp>
+      <p:sp>
+        <p:nvSpPr>
+          <p:cNvPr id="4" name="Slide Number Placeholder 3"/>
+          <p:cNvSpPr>
+            <a:spLocks noGrp="1"/>
+          </p:cNvSpPr>
+          <p:nvPr>
+            <p:ph type="sldNum" sz="quarter" idx="10"/>
+          </p:nvPr>
+        </p:nvSpPr>
+        <p:spPr/>
+        <p:txBody>
+          <a:bodyPr/>
+          <a:lstStyle/>
+          <a:p>
+            <a:fld id="{F7021451-1387-4CA6-816F-3879F97B5CBC}" type="slidenum">
+              <a:rPr lang="en-US"/>
+              <a:t>14</a:t>
             </a:fld>
             <a:endParaRPr lang="en-US"/>
           </a:p>
@@ -2390,7 +2657,7 @@
                 <a:ea typeface="游ゴシック" pitchFamily="34" charset="-122"/>
                 <a:cs typeface="游ゴシック" pitchFamily="34" charset="-120"/>
               </a:rPr>
-              <a:t>06 / CONTRIBUTION</a:t>
+              <a:t>03 / GROWTH</a:t>
             </a:r>
             <a:endParaRPr lang="en-US" sz="1300" dirty="0"/>
           </a:p>
@@ -2429,7 +2696,7 @@
                 <a:ea typeface="游ゴシック" pitchFamily="34" charset="-122"/>
                 <a:cs typeface="游ゴシック" pitchFamily="34" charset="-120"/>
               </a:rPr>
-              <a:t>貢献性 ― 100億円の中身は、関わった全員への貢献</a:t>
+              <a:t>成長性 ― 二つのファネルが、経済圏をさらに広げる</a:t>
             </a:r>
             <a:endParaRPr lang="en-US" sz="2700" dirty="0"/>
           </a:p>
@@ -2495,7 +2762,7 @@
                 <a:ea typeface="游ゴシック" pitchFamily="34" charset="-122"/>
                 <a:cs typeface="游ゴシック" pitchFamily="34" charset="-120"/>
               </a:rPr>
-              <a:t>貢</a:t>
+              <a:t>成</a:t>
             </a:r>
             <a:endParaRPr lang="en-US" sz="2880" dirty="0"/>
           </a:p>
@@ -2541,7 +2808,7 @@
                 <a:ea typeface="游ゴシック" pitchFamily="34" charset="-122"/>
                 <a:cs typeface="游ゴシック" pitchFamily="34" charset="-120"/>
               </a:rPr>
-              <a:t>末端の顧客（本人・家族）：財産ではなく「対話」による安心と幸福度の向上（終活×幸福度の各種調査）</a:t>
+              <a:t>顧客ファネル：ACP（人生会議）をフロントに据え、相続対策に着手する母数を構造的に拡大する仕組み（素材②）</a:t>
             </a:r>
             <a:endParaRPr lang="en-US" sz="1500" dirty="0"/>
           </a:p>
@@ -2565,7 +2832,7 @@
                 <a:ea typeface="游ゴシック" pitchFamily="34" charset="-122"/>
                 <a:cs typeface="游ゴシック" pitchFamily="34" charset="-120"/>
               </a:rPr>
-              <a:t>周辺専門家（税理士・弁護士・不動産・金融等）：新たな受任機会・収益機会の創出（素材①）</a:t>
+              <a:t>人材ファネル：資格講座の卒業生が「講師デビュー」し、自ら次の集客・紹介導線を生み出す自己増殖構造（素材③）</a:t>
             </a:r>
             <a:endParaRPr lang="en-US" sz="1500" dirty="0"/>
           </a:p>
@@ -2589,31 +2856,7 @@
                 <a:ea typeface="游ゴシック" pitchFamily="34" charset="-122"/>
                 <a:cs typeface="游ゴシック" pitchFamily="34" charset="-120"/>
               </a:rPr>
-              <a:t>企業：福利厚生導入を通じ「従業員を大切にする法人」への進化を支援</a:t>
-            </a:r>
-            <a:endParaRPr lang="en-US" sz="1500" dirty="0"/>
-          </a:p>
-          <a:p>
-            <a:pPr marL="342900" indent="-342900">
-              <a:lnSpc>
-                <a:spcPct val="128000"/>
-              </a:lnSpc>
-              <a:spcAft>
-                <a:spcPts val="1200"/>
-              </a:spcAft>
-              <a:buSzPct val="100000"/>
-              <a:buChar char="●"/>
-            </a:pPr>
-            <a:r>
-              <a:rPr lang="en-US" sz="1500" dirty="0">
-                <a:solidFill>
-                  <a:srgbClr val="3A3A3A"/>
-                </a:solidFill>
-                <a:latin typeface="游ゴシック" pitchFamily="34" charset="0"/>
-                <a:ea typeface="游ゴシック" pitchFamily="34" charset="-122"/>
-                <a:cs typeface="游ゴシック" pitchFamily="34" charset="-120"/>
-              </a:rPr>
-              <a:t>行政・地域：朝来市 → 岸和田市など、一つの街で実証した連携モデルの横展開</a:t>
+              <a:t>二つのファネルが重なり合うことで、約100億円の経済圏をさらに拡大し、3年後FC100事業所という成長サイクルへつながる</a:t>
             </a:r>
             <a:endParaRPr lang="en-US" sz="1500" dirty="0"/>
           </a:p>
@@ -2628,11 +2871,11 @@
         <p:spPr>
           <a:xfrm>
             <a:off x="640080" y="4754880"/>
-            <a:ext cx="2468880" cy="1325880"/>
+            <a:ext cx="3383280" cy="1371600"/>
           </a:xfrm>
           <a:prstGeom prst="roundRect">
             <a:avLst>
-              <a:gd name="adj" fmla="val 6897"/>
+              <a:gd name="adj" fmla="val 6667"/>
             </a:avLst>
           </a:prstGeom>
           <a:solidFill>
@@ -2656,8 +2899,8 @@
         </p:nvSpPr>
         <p:spPr>
           <a:xfrm>
-            <a:off x="822960" y="4937760"/>
-            <a:ext cx="2103120" cy="365760"/>
+            <a:off x="868680" y="4956048"/>
+            <a:ext cx="2926080" cy="411480"/>
           </a:xfrm>
           <a:prstGeom prst="rect">
             <a:avLst/>
@@ -2673,17 +2916,17 @@
               <a:buNone/>
             </a:pPr>
             <a:r>
-              <a:rPr lang="en-US" sz="1500" b="1" dirty="0">
-                <a:solidFill>
-                  <a:srgbClr val="C9603F"/>
-                </a:solidFill>
-                <a:latin typeface="游ゴシック" pitchFamily="34" charset="0"/>
-                <a:ea typeface="游ゴシック" pitchFamily="34" charset="-122"/>
-                <a:cs typeface="游ゴシック" pitchFamily="34" charset="-120"/>
-              </a:rPr>
-              <a:t>顧客</a:t>
-            </a:r>
-            <a:endParaRPr lang="en-US" sz="1500" dirty="0"/>
+              <a:rPr lang="en-US" sz="1600" b="1" dirty="0">
+                <a:solidFill>
+                  <a:srgbClr val="1E3A5F"/>
+                </a:solidFill>
+                <a:latin typeface="游ゴシック" pitchFamily="34" charset="0"/>
+                <a:ea typeface="游ゴシック" pitchFamily="34" charset="-122"/>
+                <a:cs typeface="游ゴシック" pitchFamily="34" charset="-120"/>
+              </a:rPr>
+              <a:t>顧客ファネル</a:t>
+            </a:r>
+            <a:endParaRPr lang="en-US" sz="1600" dirty="0"/>
           </a:p>
         </p:txBody>
       </p:sp>
@@ -2695,8 +2938,8 @@
         </p:nvSpPr>
         <p:spPr>
           <a:xfrm>
-            <a:off x="822960" y="5349240"/>
-            <a:ext cx="2103120" cy="640080"/>
+            <a:off x="868680" y="5413248"/>
+            <a:ext cx="2926080" cy="594360"/>
           </a:xfrm>
           <a:prstGeom prst="rect">
             <a:avLst/>
@@ -2710,12 +2953,12 @@
           <a:p>
             <a:pPr indent="0" marL="0">
               <a:lnSpc>
-                <a:spcPct val="120000"/>
+                <a:spcPct val="125000"/>
               </a:lnSpc>
               <a:buNone/>
             </a:pPr>
             <a:r>
-              <a:rPr lang="en-US" sz="1150" dirty="0">
+              <a:rPr lang="en-US" sz="1250" dirty="0">
                 <a:solidFill>
                   <a:srgbClr val="3A3A3A"/>
                 </a:solidFill>
@@ -2723,9 +2966,9 @@
                 <a:ea typeface="游ゴシック" pitchFamily="34" charset="-122"/>
                 <a:cs typeface="游ゴシック" pitchFamily="34" charset="-120"/>
               </a:rPr>
-              <a:t>対話による安心</a:t>
-            </a:r>
-            <a:endParaRPr lang="en-US" sz="1150" dirty="0"/>
+              <a:t>ACP（人生会議）が入口</a:t>
+            </a:r>
+            <a:endParaRPr lang="en-US" sz="1250" dirty="0"/>
           </a:p>
         </p:txBody>
       </p:sp>
@@ -2737,12 +2980,12 @@
         </p:nvSpPr>
         <p:spPr>
           <a:xfrm>
-            <a:off x="3383280" y="4754880"/>
-            <a:ext cx="2468880" cy="1325880"/>
+            <a:off x="4297680" y="4754880"/>
+            <a:ext cx="3383280" cy="1371600"/>
           </a:xfrm>
           <a:prstGeom prst="roundRect">
             <a:avLst>
-              <a:gd name="adj" fmla="val 6897"/>
+              <a:gd name="adj" fmla="val 6667"/>
             </a:avLst>
           </a:prstGeom>
           <a:solidFill>
@@ -2766,8 +3009,8 @@
         </p:nvSpPr>
         <p:spPr>
           <a:xfrm>
-            <a:off x="3566160" y="4937760"/>
-            <a:ext cx="2103120" cy="365760"/>
+            <a:off x="4526280" y="4956048"/>
+            <a:ext cx="2926080" cy="411480"/>
           </a:xfrm>
           <a:prstGeom prst="rect">
             <a:avLst/>
@@ -2783,17 +3026,17 @@
               <a:buNone/>
             </a:pPr>
             <a:r>
-              <a:rPr lang="en-US" sz="1500" b="1" dirty="0">
-                <a:solidFill>
-                  <a:srgbClr val="C9603F"/>
-                </a:solidFill>
-                <a:latin typeface="游ゴシック" pitchFamily="34" charset="0"/>
-                <a:ea typeface="游ゴシック" pitchFamily="34" charset="-122"/>
-                <a:cs typeface="游ゴシック" pitchFamily="34" charset="-120"/>
-              </a:rPr>
-              <a:t>専門家</a:t>
-            </a:r>
-            <a:endParaRPr lang="en-US" sz="1500" dirty="0"/>
+              <a:rPr lang="en-US" sz="1600" b="1" dirty="0">
+                <a:solidFill>
+                  <a:srgbClr val="1E3A5F"/>
+                </a:solidFill>
+                <a:latin typeface="游ゴシック" pitchFamily="34" charset="0"/>
+                <a:ea typeface="游ゴシック" pitchFamily="34" charset="-122"/>
+                <a:cs typeface="游ゴシック" pitchFamily="34" charset="-120"/>
+              </a:rPr>
+              <a:t>人材ファネル</a:t>
+            </a:r>
+            <a:endParaRPr lang="en-US" sz="1600" dirty="0"/>
           </a:p>
         </p:txBody>
       </p:sp>
@@ -2805,8 +3048,8 @@
         </p:nvSpPr>
         <p:spPr>
           <a:xfrm>
-            <a:off x="3566160" y="5349240"/>
-            <a:ext cx="2103120" cy="640080"/>
+            <a:off x="4526280" y="5413248"/>
+            <a:ext cx="2926080" cy="594360"/>
           </a:xfrm>
           <a:prstGeom prst="rect">
             <a:avLst/>
@@ -2820,12 +3063,12 @@
           <a:p>
             <a:pPr indent="0" marL="0">
               <a:lnSpc>
-                <a:spcPct val="120000"/>
+                <a:spcPct val="125000"/>
               </a:lnSpc>
               <a:buNone/>
             </a:pPr>
             <a:r>
-              <a:rPr lang="en-US" sz="1150" dirty="0">
+              <a:rPr lang="en-US" sz="1250" dirty="0">
                 <a:solidFill>
                   <a:srgbClr val="3A3A3A"/>
                 </a:solidFill>
@@ -2833,30 +3076,108 @@
                 <a:ea typeface="游ゴシック" pitchFamily="34" charset="-122"/>
                 <a:cs typeface="游ゴシック" pitchFamily="34" charset="-120"/>
               </a:rPr>
-              <a:t>新たな受任機会</a:t>
-            </a:r>
-            <a:endParaRPr lang="en-US" sz="1150" dirty="0"/>
-          </a:p>
-        </p:txBody>
-      </p:sp>
-      <p:sp>
-        <p:nvSpPr>
-          <p:cNvPr id="13" name="Shape 11"/>
+              <a:t>講師デビューが入口</a:t>
+            </a:r>
+            <a:endParaRPr lang="en-US" sz="1250" dirty="0"/>
+          </a:p>
+        </p:txBody>
+      </p:sp>
+      <p:sp>
+        <p:nvSpPr>
+          <p:cNvPr id="13" name="Text 11"/>
+          <p:cNvSpPr txBox="1"/>
+          <p:nvPr/>
+        </p:nvSpPr>
+        <p:spPr>
+          <a:xfrm>
+            <a:off x="4023360" y="5074920"/>
+            <a:ext cx="274320" cy="731520"/>
+          </a:xfrm>
+          <a:prstGeom prst="rect">
+            <a:avLst/>
+          </a:prstGeom>
+          <a:noFill/>
+          <a:ln/>
+        </p:spPr>
+        <p:txBody>
+          <a:bodyPr wrap="square" lIns="0" tIns="0" rIns="0" bIns="0" rtlCol="0" anchor="ctr"/>
+          <a:lstStyle/>
+          <a:p>
+            <a:pPr algn="ctr" indent="0" marL="0">
+              <a:buNone/>
+            </a:pPr>
+            <a:r>
+              <a:rPr lang="en-US" sz="2000" b="1" dirty="0">
+                <a:solidFill>
+                  <a:srgbClr val="C9603F"/>
+                </a:solidFill>
+                <a:latin typeface="游ゴシック" pitchFamily="34" charset="0"/>
+                <a:ea typeface="游ゴシック" pitchFamily="34" charset="-122"/>
+                <a:cs typeface="游ゴシック" pitchFamily="34" charset="-120"/>
+              </a:rPr>
+              <a:t>＋</a:t>
+            </a:r>
+            <a:endParaRPr lang="en-US" sz="2000" dirty="0"/>
+          </a:p>
+        </p:txBody>
+      </p:sp>
+      <p:sp>
+        <p:nvSpPr>
+          <p:cNvPr id="14" name="Text 12"/>
+          <p:cNvSpPr txBox="1"/>
+          <p:nvPr/>
+        </p:nvSpPr>
+        <p:spPr>
+          <a:xfrm>
+            <a:off x="7680960" y="5074920"/>
+            <a:ext cx="548640" cy="731520"/>
+          </a:xfrm>
+          <a:prstGeom prst="rect">
+            <a:avLst/>
+          </a:prstGeom>
+          <a:noFill/>
+          <a:ln/>
+        </p:spPr>
+        <p:txBody>
+          <a:bodyPr wrap="square" lIns="0" tIns="0" rIns="0" bIns="0" rtlCol="0" anchor="ctr"/>
+          <a:lstStyle/>
+          <a:p>
+            <a:pPr algn="ctr" indent="0" marL="0">
+              <a:buNone/>
+            </a:pPr>
+            <a:r>
+              <a:rPr lang="en-US" sz="2400" b="1" dirty="0">
+                <a:solidFill>
+                  <a:srgbClr val="C9603F"/>
+                </a:solidFill>
+                <a:latin typeface="游ゴシック" pitchFamily="34" charset="0"/>
+                <a:ea typeface="游ゴシック" pitchFamily="34" charset="-122"/>
+                <a:cs typeface="游ゴシック" pitchFamily="34" charset="-120"/>
+              </a:rPr>
+              <a:t>→</a:t>
+            </a:r>
+            <a:endParaRPr lang="en-US" sz="2400" dirty="0"/>
+          </a:p>
+        </p:txBody>
+      </p:sp>
+      <p:sp>
+        <p:nvSpPr>
+          <p:cNvPr id="15" name="Shape 13"/>
           <p:cNvSpPr/>
           <p:nvPr/>
         </p:nvSpPr>
         <p:spPr>
           <a:xfrm>
-            <a:off x="6126480" y="4754880"/>
-            <a:ext cx="2468880" cy="1325880"/>
+            <a:off x="8229600" y="4754880"/>
+            <a:ext cx="3322015" cy="1371600"/>
           </a:xfrm>
           <a:prstGeom prst="roundRect">
             <a:avLst>
-              <a:gd name="adj" fmla="val 6897"/>
+              <a:gd name="adj" fmla="val 6667"/>
             </a:avLst>
           </a:prstGeom>
           <a:solidFill>
-            <a:srgbClr val="F6F1EA"/>
+            <a:srgbClr val="C9603F"/>
           </a:solidFill>
           <a:ln/>
           <a:effectLst>
@@ -2870,14 +3191,14 @@
       </p:sp>
       <p:sp>
         <p:nvSpPr>
-          <p:cNvPr id="14" name="Text 12"/>
-          <p:cNvSpPr txBox="1"/>
-          <p:nvPr/>
-        </p:nvSpPr>
-        <p:spPr>
-          <a:xfrm>
-            <a:off x="6309360" y="4937760"/>
-            <a:ext cx="2103120" cy="365760"/>
+          <p:cNvPr id="16" name="Text 14"/>
+          <p:cNvSpPr txBox="1"/>
+          <p:nvPr/>
+        </p:nvSpPr>
+        <p:spPr>
+          <a:xfrm>
+            <a:off x="8458200" y="4956048"/>
+            <a:ext cx="3093415" cy="411480"/>
           </a:xfrm>
           <a:prstGeom prst="rect">
             <a:avLst/>
@@ -2893,30 +3214,30 @@
               <a:buNone/>
             </a:pPr>
             <a:r>
-              <a:rPr lang="en-US" sz="1500" b="1" dirty="0">
-                <a:solidFill>
-                  <a:srgbClr val="C9603F"/>
-                </a:solidFill>
-                <a:latin typeface="游ゴシック" pitchFamily="34" charset="0"/>
-                <a:ea typeface="游ゴシック" pitchFamily="34" charset="-122"/>
-                <a:cs typeface="游ゴシック" pitchFamily="34" charset="-120"/>
-              </a:rPr>
-              <a:t>企業</a:t>
-            </a:r>
-            <a:endParaRPr lang="en-US" sz="1500" dirty="0"/>
-          </a:p>
-        </p:txBody>
-      </p:sp>
-      <p:sp>
-        <p:nvSpPr>
-          <p:cNvPr id="15" name="Text 13"/>
-          <p:cNvSpPr txBox="1"/>
-          <p:nvPr/>
-        </p:nvSpPr>
-        <p:spPr>
-          <a:xfrm>
-            <a:off x="6309360" y="5349240"/>
-            <a:ext cx="2103120" cy="640080"/>
+              <a:rPr lang="en-US" sz="1550" b="1" dirty="0">
+                <a:solidFill>
+                  <a:srgbClr val="FFFFFF"/>
+                </a:solidFill>
+                <a:latin typeface="游ゴシック" pitchFamily="34" charset="0"/>
+                <a:ea typeface="游ゴシック" pitchFamily="34" charset="-122"/>
+                <a:cs typeface="游ゴシック" pitchFamily="34" charset="-120"/>
+              </a:rPr>
+              <a:t>経済圏100億円のさらなる拡大</a:t>
+            </a:r>
+            <a:endParaRPr lang="en-US" sz="1550" dirty="0"/>
+          </a:p>
+        </p:txBody>
+      </p:sp>
+      <p:sp>
+        <p:nvSpPr>
+          <p:cNvPr id="17" name="Text 15"/>
+          <p:cNvSpPr txBox="1"/>
+          <p:nvPr/>
+        </p:nvSpPr>
+        <p:spPr>
+          <a:xfrm>
+            <a:off x="8458200" y="5413248"/>
+            <a:ext cx="3093415" cy="548640"/>
           </a:xfrm>
           <a:prstGeom prst="rect">
             <a:avLst/>
@@ -2929,139 +3250,26 @@
           <a:lstStyle/>
           <a:p>
             <a:pPr indent="0" marL="0">
-              <a:lnSpc>
-                <a:spcPct val="120000"/>
-              </a:lnSpc>
-              <a:buNone/>
-            </a:pPr>
-            <a:r>
-              <a:rPr lang="en-US" sz="1150" dirty="0">
-                <a:solidFill>
-                  <a:srgbClr val="3A3A3A"/>
-                </a:solidFill>
-                <a:latin typeface="游ゴシック" pitchFamily="34" charset="0"/>
-                <a:ea typeface="游ゴシック" pitchFamily="34" charset="-122"/>
-                <a:cs typeface="游ゴシック" pitchFamily="34" charset="-120"/>
-              </a:rPr>
-              <a:t>従業員を大切にする法人へ</a:t>
-            </a:r>
-            <a:endParaRPr lang="en-US" sz="1150" dirty="0"/>
-          </a:p>
-        </p:txBody>
-      </p:sp>
-      <p:sp>
-        <p:nvSpPr>
-          <p:cNvPr id="16" name="Shape 14"/>
-          <p:cNvSpPr/>
-          <p:nvPr/>
-        </p:nvSpPr>
-        <p:spPr>
-          <a:xfrm>
-            <a:off x="8869680" y="4754880"/>
-            <a:ext cx="2468880" cy="1325880"/>
-          </a:xfrm>
-          <a:prstGeom prst="roundRect">
-            <a:avLst>
-              <a:gd name="adj" fmla="val 6897"/>
-            </a:avLst>
-          </a:prstGeom>
-          <a:solidFill>
-            <a:srgbClr val="F6F1EA"/>
-          </a:solidFill>
-          <a:ln/>
-          <a:effectLst>
-            <a:outerShdw sx="100000" sy="100000" kx="0" ky="0" algn="bl" rotWithShape="0" blurRad="101600" dist="38100" dir="5400000">
-              <a:srgbClr val="10233A">
-                <a:alpha val="18000"/>
-              </a:srgbClr>
-            </a:outerShdw>
-          </a:effectLst>
-        </p:spPr>
-      </p:sp>
-      <p:sp>
-        <p:nvSpPr>
-          <p:cNvPr id="17" name="Text 15"/>
-          <p:cNvSpPr txBox="1"/>
-          <p:nvPr/>
-        </p:nvSpPr>
-        <p:spPr>
-          <a:xfrm>
-            <a:off x="9052560" y="4937760"/>
-            <a:ext cx="2103120" cy="365760"/>
-          </a:xfrm>
-          <a:prstGeom prst="rect">
-            <a:avLst/>
-          </a:prstGeom>
-          <a:noFill/>
-          <a:ln/>
-        </p:spPr>
-        <p:txBody>
-          <a:bodyPr wrap="square" lIns="0" tIns="0" rIns="0" bIns="0" rtlCol="0" anchor="ctr"/>
-          <a:lstStyle/>
-          <a:p>
-            <a:pPr indent="0" marL="0">
-              <a:buNone/>
-            </a:pPr>
-            <a:r>
-              <a:rPr lang="en-US" sz="1500" b="1" dirty="0">
-                <a:solidFill>
-                  <a:srgbClr val="C9603F"/>
-                </a:solidFill>
-                <a:latin typeface="游ゴシック" pitchFamily="34" charset="0"/>
-                <a:ea typeface="游ゴシック" pitchFamily="34" charset="-122"/>
-                <a:cs typeface="游ゴシック" pitchFamily="34" charset="-120"/>
-              </a:rPr>
-              <a:t>行政・地域</a:t>
-            </a:r>
-            <a:endParaRPr lang="en-US" sz="1500" dirty="0"/>
+              <a:buNone/>
+            </a:pPr>
+            <a:r>
+              <a:rPr lang="en-US" sz="1300" dirty="0">
+                <a:solidFill>
+                  <a:srgbClr val="F1DCCF"/>
+                </a:solidFill>
+                <a:latin typeface="游ゴシック" pitchFamily="34" charset="0"/>
+                <a:ea typeface="游ゴシック" pitchFamily="34" charset="-122"/>
+                <a:cs typeface="游ゴシック" pitchFamily="34" charset="-120"/>
+              </a:rPr>
+              <a:t>→ 3年後 FC100事業所</a:t>
+            </a:r>
+            <a:endParaRPr lang="en-US" sz="1300" dirty="0"/>
           </a:p>
         </p:txBody>
       </p:sp>
       <p:sp>
         <p:nvSpPr>
           <p:cNvPr id="18" name="Text 16"/>
-          <p:cNvSpPr txBox="1"/>
-          <p:nvPr/>
-        </p:nvSpPr>
-        <p:spPr>
-          <a:xfrm>
-            <a:off x="9052560" y="5349240"/>
-            <a:ext cx="2103120" cy="640080"/>
-          </a:xfrm>
-          <a:prstGeom prst="rect">
-            <a:avLst/>
-          </a:prstGeom>
-          <a:noFill/>
-          <a:ln/>
-        </p:spPr>
-        <p:txBody>
-          <a:bodyPr wrap="square" lIns="0" tIns="0" rIns="0" bIns="0" rtlCol="0" anchor="t"/>
-          <a:lstStyle/>
-          <a:p>
-            <a:pPr indent="0" marL="0">
-              <a:lnSpc>
-                <a:spcPct val="120000"/>
-              </a:lnSpc>
-              <a:buNone/>
-            </a:pPr>
-            <a:r>
-              <a:rPr lang="en-US" sz="1150" dirty="0">
-                <a:solidFill>
-                  <a:srgbClr val="3A3A3A"/>
-                </a:solidFill>
-                <a:latin typeface="游ゴシック" pitchFamily="34" charset="0"/>
-                <a:ea typeface="游ゴシック" pitchFamily="34" charset="-122"/>
-                <a:cs typeface="游ゴシック" pitchFamily="34" charset="-120"/>
-              </a:rPr>
-              <a:t>連携モデルの横展開</a:t>
-            </a:r>
-            <a:endParaRPr lang="en-US" sz="1150" dirty="0"/>
-          </a:p>
-        </p:txBody>
-      </p:sp>
-      <p:sp>
-        <p:nvSpPr>
-          <p:cNvPr id="19" name="Text 17"/>
           <p:cNvSpPr txBox="1"/>
           <p:nvPr/>
         </p:nvSpPr>
@@ -3109,6 +3317,1779 @@
 <file path=ppt/slides/slide11.xml><?xml version="1.0" encoding="utf-8"?>
 <p:sld xmlns:a="http://schemas.openxmlformats.org/drawingml/2006/main" xmlns:r="http://schemas.openxmlformats.org/officeDocument/2006/relationships" xmlns:p="http://schemas.openxmlformats.org/presentationml/2006/main">
   <p:cSld name="Slide 11">
+    <p:bg>
+      <p:bgPr>
+        <a:solidFill>
+          <a:srgbClr val="FFFFFF"/>
+        </a:solidFill>
+      </p:bgPr>
+    </p:bg>
+    <p:spTree>
+      <p:nvGrpSpPr>
+        <p:cNvPr id="1" name=""/>
+        <p:cNvGrpSpPr/>
+        <p:nvPr/>
+      </p:nvGrpSpPr>
+      <p:grpSpPr>
+        <a:xfrm>
+          <a:off x="0" y="0"/>
+          <a:ext cx="0" cy="0"/>
+          <a:chOff x="0" y="0"/>
+          <a:chExt cx="0" cy="0"/>
+        </a:xfrm>
+      </p:grpSpPr>
+      <p:sp>
+        <p:nvSpPr>
+          <p:cNvPr id="2" name="Text 0"/>
+          <p:cNvSpPr txBox="1"/>
+          <p:nvPr/>
+        </p:nvSpPr>
+        <p:spPr>
+          <a:xfrm>
+            <a:off x="640080" y="411480"/>
+            <a:ext cx="9144000" cy="320040"/>
+          </a:xfrm>
+          <a:prstGeom prst="rect">
+            <a:avLst/>
+          </a:prstGeom>
+          <a:noFill/>
+          <a:ln/>
+        </p:spPr>
+        <p:txBody>
+          <a:bodyPr wrap="square" lIns="0" tIns="0" rIns="0" bIns="0" rtlCol="0" anchor="ctr"/>
+          <a:lstStyle/>
+          <a:p>
+            <a:pPr indent="0" marL="0">
+              <a:buNone/>
+            </a:pPr>
+            <a:r>
+              <a:rPr lang="en-US" sz="1300" b="1" spc="100" kern="0" dirty="0">
+                <a:solidFill>
+                  <a:srgbClr val="C9603F"/>
+                </a:solidFill>
+                <a:latin typeface="游ゴシック" pitchFamily="34" charset="0"/>
+                <a:ea typeface="游ゴシック" pitchFamily="34" charset="-122"/>
+                <a:cs typeface="游ゴシック" pitchFamily="34" charset="-120"/>
+              </a:rPr>
+              <a:t>04 / MARKET</a:t>
+            </a:r>
+            <a:endParaRPr lang="en-US" sz="1300" dirty="0"/>
+          </a:p>
+        </p:txBody>
+      </p:sp>
+      <p:sp>
+        <p:nvSpPr>
+          <p:cNvPr id="3" name="Text 1"/>
+          <p:cNvSpPr txBox="1"/>
+          <p:nvPr/>
+        </p:nvSpPr>
+        <p:spPr>
+          <a:xfrm>
+            <a:off x="640080" y="713232"/>
+            <a:ext cx="10881360" cy="731520"/>
+          </a:xfrm>
+          <a:prstGeom prst="rect">
+            <a:avLst/>
+          </a:prstGeom>
+          <a:noFill/>
+          <a:ln/>
+        </p:spPr>
+        <p:txBody>
+          <a:bodyPr wrap="square" lIns="0" tIns="0" rIns="0" bIns="0" rtlCol="0" anchor="ctr"/>
+          <a:lstStyle/>
+          <a:p>
+            <a:pPr indent="0" marL="0">
+              <a:buNone/>
+            </a:pPr>
+            <a:r>
+              <a:rPr lang="en-US" sz="2700" b="1" dirty="0">
+                <a:solidFill>
+                  <a:srgbClr val="1E3A5F"/>
+                </a:solidFill>
+                <a:latin typeface="游ゴシック" pitchFamily="34" charset="0"/>
+                <a:ea typeface="游ゴシック" pitchFamily="34" charset="-122"/>
+                <a:cs typeface="游ゴシック" pitchFamily="34" charset="-120"/>
+              </a:rPr>
+              <a:t>市場性 ― 「財産がある人」から、全世代・全業種へ</a:t>
+            </a:r>
+            <a:endParaRPr lang="en-US" sz="2700" dirty="0"/>
+          </a:p>
+        </p:txBody>
+      </p:sp>
+      <p:sp>
+        <p:nvSpPr>
+          <p:cNvPr id="4" name="Shape 2"/>
+          <p:cNvSpPr/>
+          <p:nvPr/>
+        </p:nvSpPr>
+        <p:spPr>
+          <a:xfrm>
+            <a:off x="10607040" y="502920"/>
+            <a:ext cx="822960" cy="822960"/>
+          </a:xfrm>
+          <a:prstGeom prst="ellipse">
+            <a:avLst/>
+          </a:prstGeom>
+          <a:solidFill>
+            <a:srgbClr val="C9603F"/>
+          </a:solidFill>
+          <a:ln/>
+          <a:effectLst>
+            <a:outerShdw sx="100000" sy="100000" kx="0" ky="0" algn="bl" rotWithShape="0" blurRad="101600" dist="38100" dir="5400000">
+              <a:srgbClr val="10233A">
+                <a:alpha val="18000"/>
+              </a:srgbClr>
+            </a:outerShdw>
+          </a:effectLst>
+        </p:spPr>
+      </p:sp>
+      <p:sp>
+        <p:nvSpPr>
+          <p:cNvPr id="5" name="Text 3"/>
+          <p:cNvSpPr txBox="1"/>
+          <p:nvPr/>
+        </p:nvSpPr>
+        <p:spPr>
+          <a:xfrm>
+            <a:off x="10607040" y="502920"/>
+            <a:ext cx="822960" cy="822960"/>
+          </a:xfrm>
+          <a:prstGeom prst="rect">
+            <a:avLst/>
+          </a:prstGeom>
+          <a:noFill/>
+          <a:ln/>
+        </p:spPr>
+        <p:txBody>
+          <a:bodyPr wrap="square" lIns="0" tIns="0" rIns="0" bIns="0" rtlCol="0" anchor="ctr"/>
+          <a:lstStyle/>
+          <a:p>
+            <a:pPr algn="ctr" indent="0" marL="0">
+              <a:buNone/>
+            </a:pPr>
+            <a:r>
+              <a:rPr lang="en-US" sz="2880" b="1" dirty="0">
+                <a:solidFill>
+                  <a:srgbClr val="FFFFFF"/>
+                </a:solidFill>
+                <a:latin typeface="游ゴシック" pitchFamily="34" charset="0"/>
+                <a:ea typeface="游ゴシック" pitchFamily="34" charset="-122"/>
+                <a:cs typeface="游ゴシック" pitchFamily="34" charset="-120"/>
+              </a:rPr>
+              <a:t>市</a:t>
+            </a:r>
+            <a:endParaRPr lang="en-US" sz="2880" dirty="0"/>
+          </a:p>
+        </p:txBody>
+      </p:sp>
+      <p:sp>
+        <p:nvSpPr>
+          <p:cNvPr id="6" name="Text 4"/>
+          <p:cNvSpPr txBox="1"/>
+          <p:nvPr/>
+        </p:nvSpPr>
+        <p:spPr>
+          <a:xfrm>
+            <a:off x="640080" y="1783080"/>
+            <a:ext cx="10881360" cy="4206240"/>
+          </a:xfrm>
+          <a:prstGeom prst="rect">
+            <a:avLst/>
+          </a:prstGeom>
+          <a:noFill/>
+          <a:ln/>
+        </p:spPr>
+        <p:txBody>
+          <a:bodyPr wrap="square" lIns="0" tIns="0" rIns="0" bIns="0" rtlCol="0" anchor="t"/>
+          <a:lstStyle/>
+          <a:p>
+            <a:pPr marL="342900" indent="-342900">
+              <a:lnSpc>
+                <a:spcPct val="128000"/>
+              </a:lnSpc>
+              <a:spcAft>
+                <a:spcPts val="1200"/>
+              </a:spcAft>
+              <a:buSzPct val="100000"/>
+              <a:buChar char="●"/>
+            </a:pPr>
+            <a:r>
+              <a:rPr lang="en-US" sz="1500" dirty="0">
+                <a:solidFill>
+                  <a:srgbClr val="3A3A3A"/>
+                </a:solidFill>
+                <a:latin typeface="游ゴシック" pitchFamily="34" charset="0"/>
+                <a:ea typeface="游ゴシック" pitchFamily="34" charset="-122"/>
+                <a:cs typeface="游ゴシック" pitchFamily="34" charset="-120"/>
+              </a:rPr>
+              <a:t>直接のターゲット：資産5億円〜10億円超の富裕層・超富裕層（素材①）</a:t>
+            </a:r>
+            <a:endParaRPr lang="en-US" sz="1500" dirty="0"/>
+          </a:p>
+          <a:p>
+            <a:pPr marL="342900" indent="-342900">
+              <a:lnSpc>
+                <a:spcPct val="128000"/>
+              </a:lnSpc>
+              <a:spcAft>
+                <a:spcPts val="1200"/>
+              </a:spcAft>
+              <a:buSzPct val="100000"/>
+              <a:buChar char="●"/>
+            </a:pPr>
+            <a:r>
+              <a:rPr lang="en-US" sz="1500" dirty="0">
+                <a:solidFill>
+                  <a:srgbClr val="3A3A3A"/>
+                </a:solidFill>
+                <a:latin typeface="游ゴシック" pitchFamily="34" charset="0"/>
+                <a:ea typeface="游ゴシック" pitchFamily="34" charset="-122"/>
+                <a:cs typeface="游ゴシック" pitchFamily="34" charset="-120"/>
+              </a:rPr>
+              <a:t>ACPを入口にすることで、財産の有無に関わらず誰もがターゲットになる市場へ構造的に拡大（素材②）</a:t>
+            </a:r>
+            <a:endParaRPr lang="en-US" sz="1500" dirty="0"/>
+          </a:p>
+          <a:p>
+            <a:pPr marL="342900" indent="-342900">
+              <a:lnSpc>
+                <a:spcPct val="128000"/>
+              </a:lnSpc>
+              <a:spcAft>
+                <a:spcPts val="1200"/>
+              </a:spcAft>
+              <a:buSzPct val="100000"/>
+              <a:buChar char="●"/>
+            </a:pPr>
+            <a:r>
+              <a:rPr lang="en-US" sz="1500" dirty="0">
+                <a:solidFill>
+                  <a:srgbClr val="3A3A3A"/>
+                </a:solidFill>
+                <a:latin typeface="游ゴシック" pitchFamily="34" charset="0"/>
+                <a:ea typeface="游ゴシック" pitchFamily="34" charset="-122"/>
+                <a:cs typeface="游ゴシック" pitchFamily="34" charset="-120"/>
+              </a:rPr>
+              <a:t>周辺専門家（税理士・司法書士・行政書士・弁護士・不動産・金融・有料老人ホーム・M&amp;A）を含めれば、市場は相続業界単体にとどまらない</a:t>
+            </a:r>
+            <a:endParaRPr lang="en-US" sz="1500" dirty="0"/>
+          </a:p>
+        </p:txBody>
+      </p:sp>
+      <p:sp>
+        <p:nvSpPr>
+          <p:cNvPr id="7" name="Shape 5"/>
+          <p:cNvSpPr/>
+          <p:nvPr/>
+        </p:nvSpPr>
+        <p:spPr>
+          <a:xfrm>
+            <a:off x="640080" y="4709160"/>
+            <a:ext cx="3200400" cy="1280160"/>
+          </a:xfrm>
+          <a:prstGeom prst="roundRect">
+            <a:avLst>
+              <a:gd name="adj" fmla="val 7143"/>
+            </a:avLst>
+          </a:prstGeom>
+          <a:solidFill>
+            <a:srgbClr val="F6F1EA"/>
+          </a:solidFill>
+          <a:ln/>
+          <a:effectLst>
+            <a:outerShdw sx="100000" sy="100000" kx="0" ky="0" algn="bl" rotWithShape="0" blurRad="101600" dist="38100" dir="5400000">
+              <a:srgbClr val="10233A">
+                <a:alpha val="18000"/>
+              </a:srgbClr>
+            </a:outerShdw>
+          </a:effectLst>
+        </p:spPr>
+      </p:sp>
+      <p:sp>
+        <p:nvSpPr>
+          <p:cNvPr id="8" name="Text 6"/>
+          <p:cNvSpPr txBox="1"/>
+          <p:nvPr/>
+        </p:nvSpPr>
+        <p:spPr>
+          <a:xfrm>
+            <a:off x="777240" y="4873752"/>
+            <a:ext cx="2926080" cy="665683"/>
+          </a:xfrm>
+          <a:prstGeom prst="rect">
+            <a:avLst/>
+          </a:prstGeom>
+          <a:noFill/>
+          <a:ln/>
+        </p:spPr>
+        <p:txBody>
+          <a:bodyPr wrap="square" lIns="0" tIns="0" rIns="0" bIns="0" rtlCol="0" anchor="ctr"/>
+          <a:lstStyle/>
+          <a:p>
+            <a:pPr algn="ctr" indent="0" marL="0">
+              <a:buNone/>
+            </a:pPr>
+            <a:r>
+              <a:rPr lang="en-US" sz="2200" b="1" dirty="0">
+                <a:solidFill>
+                  <a:srgbClr val="C9603F"/>
+                </a:solidFill>
+                <a:latin typeface="游ゴシック" pitchFamily="34" charset="0"/>
+                <a:ea typeface="游ゴシック" pitchFamily="34" charset="-122"/>
+                <a:cs typeface="游ゴシック" pitchFamily="34" charset="-120"/>
+              </a:rPr>
+              <a:t>50事業所</a:t>
+            </a:r>
+            <a:endParaRPr lang="en-US" sz="2200" dirty="0"/>
+          </a:p>
+        </p:txBody>
+      </p:sp>
+      <p:sp>
+        <p:nvSpPr>
+          <p:cNvPr id="9" name="Text 7"/>
+          <p:cNvSpPr txBox="1"/>
+          <p:nvPr/>
+        </p:nvSpPr>
+        <p:spPr>
+          <a:xfrm>
+            <a:off x="731520" y="5426050"/>
+            <a:ext cx="3017520" cy="512064"/>
+          </a:xfrm>
+          <a:prstGeom prst="rect">
+            <a:avLst/>
+          </a:prstGeom>
+          <a:noFill/>
+          <a:ln/>
+        </p:spPr>
+        <p:txBody>
+          <a:bodyPr wrap="square" lIns="0" tIns="0" rIns="0" bIns="0" rtlCol="0" anchor="t"/>
+          <a:lstStyle/>
+          <a:p>
+            <a:pPr algn="ctr" indent="0" marL="0">
+              <a:buNone/>
+            </a:pPr>
+            <a:r>
+              <a:rPr lang="en-US" sz="1100" dirty="0">
+                <a:solidFill>
+                  <a:srgbClr val="1E3A5F"/>
+                </a:solidFill>
+                <a:latin typeface="游ゴシック" pitchFamily="34" charset="0"/>
+                <a:ea typeface="游ゴシック" pitchFamily="34" charset="-122"/>
+                <a:cs typeface="游ゴシック" pitchFamily="34" charset="-120"/>
+              </a:rPr>
+              <a:t>全国の拠点数</a:t>
+            </a:r>
+            <a:endParaRPr lang="en-US" sz="1100" dirty="0"/>
+          </a:p>
+        </p:txBody>
+      </p:sp>
+      <p:sp>
+        <p:nvSpPr>
+          <p:cNvPr id="10" name="Shape 8"/>
+          <p:cNvSpPr/>
+          <p:nvPr/>
+        </p:nvSpPr>
+        <p:spPr>
+          <a:xfrm>
+            <a:off x="4251960" y="4709160"/>
+            <a:ext cx="3200400" cy="1280160"/>
+          </a:xfrm>
+          <a:prstGeom prst="roundRect">
+            <a:avLst>
+              <a:gd name="adj" fmla="val 7143"/>
+            </a:avLst>
+          </a:prstGeom>
+          <a:solidFill>
+            <a:srgbClr val="F6F1EA"/>
+          </a:solidFill>
+          <a:ln/>
+          <a:effectLst>
+            <a:outerShdw sx="100000" sy="100000" kx="0" ky="0" algn="bl" rotWithShape="0" blurRad="101600" dist="38100" dir="5400000">
+              <a:srgbClr val="10233A">
+                <a:alpha val="18000"/>
+              </a:srgbClr>
+            </a:outerShdw>
+          </a:effectLst>
+        </p:spPr>
+      </p:sp>
+      <p:sp>
+        <p:nvSpPr>
+          <p:cNvPr id="11" name="Text 9"/>
+          <p:cNvSpPr txBox="1"/>
+          <p:nvPr/>
+        </p:nvSpPr>
+        <p:spPr>
+          <a:xfrm>
+            <a:off x="4389120" y="4873752"/>
+            <a:ext cx="2926080" cy="665683"/>
+          </a:xfrm>
+          <a:prstGeom prst="rect">
+            <a:avLst/>
+          </a:prstGeom>
+          <a:noFill/>
+          <a:ln/>
+        </p:spPr>
+        <p:txBody>
+          <a:bodyPr wrap="square" lIns="0" tIns="0" rIns="0" bIns="0" rtlCol="0" anchor="ctr"/>
+          <a:lstStyle/>
+          <a:p>
+            <a:pPr algn="ctr" indent="0" marL="0">
+              <a:buNone/>
+            </a:pPr>
+            <a:r>
+              <a:rPr lang="en-US" sz="2200" b="1" dirty="0">
+                <a:solidFill>
+                  <a:srgbClr val="C9603F"/>
+                </a:solidFill>
+                <a:latin typeface="游ゴシック" pitchFamily="34" charset="0"/>
+                <a:ea typeface="游ゴシック" pitchFamily="34" charset="-122"/>
+                <a:cs typeface="游ゴシック" pitchFamily="34" charset="-120"/>
+              </a:rPr>
+              <a:t>資産5〜10億円超</a:t>
+            </a:r>
+            <a:endParaRPr lang="en-US" sz="2200" dirty="0"/>
+          </a:p>
+        </p:txBody>
+      </p:sp>
+      <p:sp>
+        <p:nvSpPr>
+          <p:cNvPr id="12" name="Text 10"/>
+          <p:cNvSpPr txBox="1"/>
+          <p:nvPr/>
+        </p:nvSpPr>
+        <p:spPr>
+          <a:xfrm>
+            <a:off x="4343400" y="5426050"/>
+            <a:ext cx="3017520" cy="512064"/>
+          </a:xfrm>
+          <a:prstGeom prst="rect">
+            <a:avLst/>
+          </a:prstGeom>
+          <a:noFill/>
+          <a:ln/>
+        </p:spPr>
+        <p:txBody>
+          <a:bodyPr wrap="square" lIns="0" tIns="0" rIns="0" bIns="0" rtlCol="0" anchor="t"/>
+          <a:lstStyle/>
+          <a:p>
+            <a:pPr algn="ctr" indent="0" marL="0">
+              <a:buNone/>
+            </a:pPr>
+            <a:r>
+              <a:rPr lang="en-US" sz="1100" dirty="0">
+                <a:solidFill>
+                  <a:srgbClr val="1E3A5F"/>
+                </a:solidFill>
+                <a:latin typeface="游ゴシック" pitchFamily="34" charset="0"/>
+                <a:ea typeface="游ゴシック" pitchFamily="34" charset="-122"/>
+                <a:cs typeface="游ゴシック" pitchFamily="34" charset="-120"/>
+              </a:rPr>
+              <a:t>直接の顧客層</a:t>
+            </a:r>
+            <a:endParaRPr lang="en-US" sz="1100" dirty="0"/>
+          </a:p>
+        </p:txBody>
+      </p:sp>
+      <p:sp>
+        <p:nvSpPr>
+          <p:cNvPr id="13" name="Shape 11"/>
+          <p:cNvSpPr/>
+          <p:nvPr/>
+        </p:nvSpPr>
+        <p:spPr>
+          <a:xfrm>
+            <a:off x="7863840" y="4709160"/>
+            <a:ext cx="3200400" cy="1280160"/>
+          </a:xfrm>
+          <a:prstGeom prst="roundRect">
+            <a:avLst>
+              <a:gd name="adj" fmla="val 7143"/>
+            </a:avLst>
+          </a:prstGeom>
+          <a:solidFill>
+            <a:srgbClr val="F6F1EA"/>
+          </a:solidFill>
+          <a:ln/>
+          <a:effectLst>
+            <a:outerShdw sx="100000" sy="100000" kx="0" ky="0" algn="bl" rotWithShape="0" blurRad="101600" dist="38100" dir="5400000">
+              <a:srgbClr val="10233A">
+                <a:alpha val="18000"/>
+              </a:srgbClr>
+            </a:outerShdw>
+          </a:effectLst>
+        </p:spPr>
+      </p:sp>
+      <p:sp>
+        <p:nvSpPr>
+          <p:cNvPr id="14" name="Text 12"/>
+          <p:cNvSpPr txBox="1"/>
+          <p:nvPr/>
+        </p:nvSpPr>
+        <p:spPr>
+          <a:xfrm>
+            <a:off x="8001000" y="4873752"/>
+            <a:ext cx="2926080" cy="665683"/>
+          </a:xfrm>
+          <a:prstGeom prst="rect">
+            <a:avLst/>
+          </a:prstGeom>
+          <a:noFill/>
+          <a:ln/>
+        </p:spPr>
+        <p:txBody>
+          <a:bodyPr wrap="square" lIns="0" tIns="0" rIns="0" bIns="0" rtlCol="0" anchor="ctr"/>
+          <a:lstStyle/>
+          <a:p>
+            <a:pPr algn="ctr" indent="0" marL="0">
+              <a:buNone/>
+            </a:pPr>
+            <a:r>
+              <a:rPr lang="en-US" sz="2200" b="1" dirty="0">
+                <a:solidFill>
+                  <a:srgbClr val="C9603F"/>
+                </a:solidFill>
+                <a:latin typeface="游ゴシック" pitchFamily="34" charset="0"/>
+                <a:ea typeface="游ゴシック" pitchFamily="34" charset="-122"/>
+                <a:cs typeface="游ゴシック" pitchFamily="34" charset="-120"/>
+              </a:rPr>
+              <a:t>約100億円</a:t>
+            </a:r>
+            <a:endParaRPr lang="en-US" sz="2200" dirty="0"/>
+          </a:p>
+        </p:txBody>
+      </p:sp>
+      <p:sp>
+        <p:nvSpPr>
+          <p:cNvPr id="15" name="Text 13"/>
+          <p:cNvSpPr txBox="1"/>
+          <p:nvPr/>
+        </p:nvSpPr>
+        <p:spPr>
+          <a:xfrm>
+            <a:off x="7955280" y="5426050"/>
+            <a:ext cx="3017520" cy="512064"/>
+          </a:xfrm>
+          <a:prstGeom prst="rect">
+            <a:avLst/>
+          </a:prstGeom>
+          <a:noFill/>
+          <a:ln/>
+        </p:spPr>
+        <p:txBody>
+          <a:bodyPr wrap="square" lIns="0" tIns="0" rIns="0" bIns="0" rtlCol="0" anchor="t"/>
+          <a:lstStyle/>
+          <a:p>
+            <a:pPr algn="ctr" indent="0" marL="0">
+              <a:buNone/>
+            </a:pPr>
+            <a:r>
+              <a:rPr lang="en-US" sz="1100" dirty="0">
+                <a:solidFill>
+                  <a:srgbClr val="1E3A5F"/>
+                </a:solidFill>
+                <a:latin typeface="游ゴシック" pitchFamily="34" charset="0"/>
+                <a:ea typeface="游ゴシック" pitchFamily="34" charset="-122"/>
+                <a:cs typeface="游ゴシック" pitchFamily="34" charset="-120"/>
+              </a:rPr>
+              <a:t>周辺経済圏</a:t>
+            </a:r>
+            <a:endParaRPr lang="en-US" sz="1100" dirty="0"/>
+          </a:p>
+        </p:txBody>
+      </p:sp>
+      <p:sp>
+        <p:nvSpPr>
+          <p:cNvPr id="16" name="Text 14"/>
+          <p:cNvSpPr txBox="1"/>
+          <p:nvPr/>
+        </p:nvSpPr>
+        <p:spPr>
+          <a:xfrm>
+            <a:off x="11551615" y="6400800"/>
+            <a:ext cx="457200" cy="274320"/>
+          </a:xfrm>
+          <a:prstGeom prst="rect">
+            <a:avLst/>
+          </a:prstGeom>
+          <a:noFill/>
+          <a:ln/>
+        </p:spPr>
+        <p:txBody>
+          <a:bodyPr wrap="square" lIns="0" tIns="0" rIns="0" bIns="0" rtlCol="0" anchor="ctr"/>
+          <a:lstStyle/>
+          <a:p>
+            <a:pPr algn="r" indent="0" marL="0">
+              <a:buNone/>
+            </a:pPr>
+            <a:r>
+              <a:rPr lang="en-US" sz="1000" dirty="0">
+                <a:solidFill>
+                  <a:srgbClr val="6B6B6B"/>
+                </a:solidFill>
+                <a:latin typeface="游ゴシック" pitchFamily="34" charset="0"/>
+                <a:ea typeface="游ゴシック" pitchFamily="34" charset="-122"/>
+                <a:cs typeface="游ゴシック" pitchFamily="34" charset="-120"/>
+              </a:rPr>
+              <a:t>11</a:t>
+            </a:r>
+            <a:endParaRPr lang="en-US" sz="1000" dirty="0"/>
+          </a:p>
+        </p:txBody>
+      </p:sp>
+    </p:spTree>
+  </p:cSld>
+  <p:clrMapOvr>
+    <a:masterClrMapping/>
+  </p:clrMapOvr>
+</p:sld>
+</file>
+
+<file path=ppt/slides/slide12.xml><?xml version="1.0" encoding="utf-8"?>
+<p:sld xmlns:a="http://schemas.openxmlformats.org/drawingml/2006/main" xmlns:r="http://schemas.openxmlformats.org/officeDocument/2006/relationships" xmlns:p="http://schemas.openxmlformats.org/presentationml/2006/main">
+  <p:cSld name="Slide 12">
+    <p:bg>
+      <p:bgPr>
+        <a:solidFill>
+          <a:srgbClr val="FFFFFF"/>
+        </a:solidFill>
+      </p:bgPr>
+    </p:bg>
+    <p:spTree>
+      <p:nvGrpSpPr>
+        <p:cNvPr id="1" name=""/>
+        <p:cNvGrpSpPr/>
+        <p:nvPr/>
+      </p:nvGrpSpPr>
+      <p:grpSpPr>
+        <a:xfrm>
+          <a:off x="0" y="0"/>
+          <a:ext cx="0" cy="0"/>
+          <a:chOff x="0" y="0"/>
+          <a:chExt cx="0" cy="0"/>
+        </a:xfrm>
+      </p:grpSpPr>
+      <p:sp>
+        <p:nvSpPr>
+          <p:cNvPr id="2" name="Text 0"/>
+          <p:cNvSpPr txBox="1"/>
+          <p:nvPr/>
+        </p:nvSpPr>
+        <p:spPr>
+          <a:xfrm>
+            <a:off x="640080" y="411480"/>
+            <a:ext cx="9144000" cy="320040"/>
+          </a:xfrm>
+          <a:prstGeom prst="rect">
+            <a:avLst/>
+          </a:prstGeom>
+          <a:noFill/>
+          <a:ln/>
+        </p:spPr>
+        <p:txBody>
+          <a:bodyPr wrap="square" lIns="0" tIns="0" rIns="0" bIns="0" rtlCol="0" anchor="ctr"/>
+          <a:lstStyle/>
+          <a:p>
+            <a:pPr indent="0" marL="0">
+              <a:buNone/>
+            </a:pPr>
+            <a:r>
+              <a:rPr lang="en-US" sz="1300" b="1" spc="100" kern="0" dirty="0">
+                <a:solidFill>
+                  <a:srgbClr val="C9603F"/>
+                </a:solidFill>
+                <a:latin typeface="游ゴシック" pitchFamily="34" charset="0"/>
+                <a:ea typeface="游ゴシック" pitchFamily="34" charset="-122"/>
+                <a:cs typeface="游ゴシック" pitchFamily="34" charset="-120"/>
+              </a:rPr>
+              <a:t>05 / ADVANTAGE</a:t>
+            </a:r>
+            <a:endParaRPr lang="en-US" sz="1300" dirty="0"/>
+          </a:p>
+        </p:txBody>
+      </p:sp>
+      <p:sp>
+        <p:nvSpPr>
+          <p:cNvPr id="3" name="Text 1"/>
+          <p:cNvSpPr txBox="1"/>
+          <p:nvPr/>
+        </p:nvSpPr>
+        <p:spPr>
+          <a:xfrm>
+            <a:off x="640080" y="713232"/>
+            <a:ext cx="10881360" cy="731520"/>
+          </a:xfrm>
+          <a:prstGeom prst="rect">
+            <a:avLst/>
+          </a:prstGeom>
+          <a:noFill/>
+          <a:ln/>
+        </p:spPr>
+        <p:txBody>
+          <a:bodyPr wrap="square" lIns="0" tIns="0" rIns="0" bIns="0" rtlCol="0" anchor="ctr"/>
+          <a:lstStyle/>
+          <a:p>
+            <a:pPr indent="0" marL="0">
+              <a:buNone/>
+            </a:pPr>
+            <a:r>
+              <a:rPr lang="en-US" sz="2700" b="1" dirty="0">
+                <a:solidFill>
+                  <a:srgbClr val="1E3A5F"/>
+                </a:solidFill>
+                <a:latin typeface="游ゴシック" pitchFamily="34" charset="0"/>
+                <a:ea typeface="游ゴシック" pitchFamily="34" charset="-122"/>
+                <a:cs typeface="游ゴシック" pitchFamily="34" charset="-120"/>
+              </a:rPr>
+              <a:t>優位性 ― 「バッジのない」からこそ生まれた協業モデル</a:t>
+            </a:r>
+            <a:endParaRPr lang="en-US" sz="2700" dirty="0"/>
+          </a:p>
+        </p:txBody>
+      </p:sp>
+      <p:sp>
+        <p:nvSpPr>
+          <p:cNvPr id="4" name="Shape 2"/>
+          <p:cNvSpPr/>
+          <p:nvPr/>
+        </p:nvSpPr>
+        <p:spPr>
+          <a:xfrm>
+            <a:off x="10607040" y="502920"/>
+            <a:ext cx="822960" cy="822960"/>
+          </a:xfrm>
+          <a:prstGeom prst="ellipse">
+            <a:avLst/>
+          </a:prstGeom>
+          <a:solidFill>
+            <a:srgbClr val="C9603F"/>
+          </a:solidFill>
+          <a:ln/>
+          <a:effectLst>
+            <a:outerShdw sx="100000" sy="100000" kx="0" ky="0" algn="bl" rotWithShape="0" blurRad="101600" dist="38100" dir="5400000">
+              <a:srgbClr val="10233A">
+                <a:alpha val="18000"/>
+              </a:srgbClr>
+            </a:outerShdw>
+          </a:effectLst>
+        </p:spPr>
+      </p:sp>
+      <p:sp>
+        <p:nvSpPr>
+          <p:cNvPr id="5" name="Text 3"/>
+          <p:cNvSpPr txBox="1"/>
+          <p:nvPr/>
+        </p:nvSpPr>
+        <p:spPr>
+          <a:xfrm>
+            <a:off x="10607040" y="502920"/>
+            <a:ext cx="822960" cy="822960"/>
+          </a:xfrm>
+          <a:prstGeom prst="rect">
+            <a:avLst/>
+          </a:prstGeom>
+          <a:noFill/>
+          <a:ln/>
+        </p:spPr>
+        <p:txBody>
+          <a:bodyPr wrap="square" lIns="0" tIns="0" rIns="0" bIns="0" rtlCol="0" anchor="ctr"/>
+          <a:lstStyle/>
+          <a:p>
+            <a:pPr algn="ctr" indent="0" marL="0">
+              <a:buNone/>
+            </a:pPr>
+            <a:r>
+              <a:rPr lang="en-US" sz="2880" b="1" dirty="0">
+                <a:solidFill>
+                  <a:srgbClr val="FFFFFF"/>
+                </a:solidFill>
+                <a:latin typeface="游ゴシック" pitchFamily="34" charset="0"/>
+                <a:ea typeface="游ゴシック" pitchFamily="34" charset="-122"/>
+                <a:cs typeface="游ゴシック" pitchFamily="34" charset="-120"/>
+              </a:rPr>
+              <a:t>優</a:t>
+            </a:r>
+            <a:endParaRPr lang="en-US" sz="2880" dirty="0"/>
+          </a:p>
+        </p:txBody>
+      </p:sp>
+      <p:sp>
+        <p:nvSpPr>
+          <p:cNvPr id="6" name="Shape 4"/>
+          <p:cNvSpPr/>
+          <p:nvPr/>
+        </p:nvSpPr>
+        <p:spPr>
+          <a:xfrm>
+            <a:off x="640080" y="1783080"/>
+            <a:ext cx="10881360" cy="822960"/>
+          </a:xfrm>
+          <a:prstGeom prst="roundRect">
+            <a:avLst>
+              <a:gd name="adj" fmla="val 8889"/>
+            </a:avLst>
+          </a:prstGeom>
+          <a:solidFill>
+            <a:srgbClr val="1E3A5F"/>
+          </a:solidFill>
+          <a:ln/>
+        </p:spPr>
+      </p:sp>
+      <p:sp>
+        <p:nvSpPr>
+          <p:cNvPr id="7" name="Text 5"/>
+          <p:cNvSpPr txBox="1"/>
+          <p:nvPr/>
+        </p:nvSpPr>
+        <p:spPr>
+          <a:xfrm>
+            <a:off x="914400" y="1783080"/>
+            <a:ext cx="10332720" cy="822960"/>
+          </a:xfrm>
+          <a:prstGeom prst="rect">
+            <a:avLst/>
+          </a:prstGeom>
+          <a:noFill/>
+          <a:ln/>
+        </p:spPr>
+        <p:txBody>
+          <a:bodyPr wrap="square" lIns="0" tIns="0" rIns="0" bIns="0" rtlCol="0" anchor="ctr"/>
+          <a:lstStyle/>
+          <a:p>
+            <a:pPr algn="l" indent="0" marL="0">
+              <a:buNone/>
+            </a:pPr>
+            <a:r>
+              <a:rPr lang="en-US" sz="1450" i="1" dirty="0">
+                <a:solidFill>
+                  <a:srgbClr val="F1DCCF"/>
+                </a:solidFill>
+                <a:latin typeface="游ゴシック" pitchFamily="34" charset="0"/>
+                <a:ea typeface="游ゴシック" pitchFamily="34" charset="-122"/>
+                <a:cs typeface="游ゴシック" pitchFamily="34" charset="-120"/>
+              </a:rPr>
+              <a:t>『バッジのない、コンサルタントに、相続ビジネスの何ができるのか？』―起業当初、ある士業の先生に言われた言葉</a:t>
+            </a:r>
+            <a:endParaRPr lang="en-US" sz="1450" dirty="0"/>
+          </a:p>
+        </p:txBody>
+      </p:sp>
+      <p:sp>
+        <p:nvSpPr>
+          <p:cNvPr id="8" name="Text 6"/>
+          <p:cNvSpPr txBox="1"/>
+          <p:nvPr/>
+        </p:nvSpPr>
+        <p:spPr>
+          <a:xfrm>
+            <a:off x="640080" y="2834640"/>
+            <a:ext cx="10881360" cy="3154680"/>
+          </a:xfrm>
+          <a:prstGeom prst="rect">
+            <a:avLst/>
+          </a:prstGeom>
+          <a:noFill/>
+          <a:ln/>
+        </p:spPr>
+        <p:txBody>
+          <a:bodyPr wrap="square" lIns="0" tIns="0" rIns="0" bIns="0" rtlCol="0" anchor="t"/>
+          <a:lstStyle/>
+          <a:p>
+            <a:pPr marL="342900" indent="-342900">
+              <a:lnSpc>
+                <a:spcPct val="128000"/>
+              </a:lnSpc>
+              <a:spcAft>
+                <a:spcPts val="1200"/>
+              </a:spcAft>
+              <a:buSzPct val="100000"/>
+              <a:buChar char="●"/>
+            </a:pPr>
+            <a:r>
+              <a:rPr lang="en-US" sz="1500" dirty="0">
+                <a:solidFill>
+                  <a:srgbClr val="3A3A3A"/>
+                </a:solidFill>
+                <a:latin typeface="游ゴシック" pitchFamily="34" charset="0"/>
+                <a:ea typeface="游ゴシック" pitchFamily="34" charset="-122"/>
+                <a:cs typeface="游ゴシック" pitchFamily="34" charset="-120"/>
+              </a:rPr>
+              <a:t>その後、「士業の先生が私に足を向けて寝れないくらい」仕事を生み出し続け、自分の収益だけを追わない「本当の協業スタイル」を確立（素材①）</a:t>
+            </a:r>
+            <a:endParaRPr lang="en-US" sz="1500" dirty="0"/>
+          </a:p>
+          <a:p>
+            <a:pPr marL="342900" indent="-342900">
+              <a:lnSpc>
+                <a:spcPct val="128000"/>
+              </a:lnSpc>
+              <a:spcAft>
+                <a:spcPts val="1200"/>
+              </a:spcAft>
+              <a:buSzPct val="100000"/>
+              <a:buChar char="●"/>
+            </a:pPr>
+            <a:r>
+              <a:rPr lang="en-US" sz="1500" dirty="0">
+                <a:solidFill>
+                  <a:srgbClr val="3A3A3A"/>
+                </a:solidFill>
+                <a:latin typeface="游ゴシック" pitchFamily="34" charset="0"/>
+                <a:ea typeface="游ゴシック" pitchFamily="34" charset="-122"/>
+                <a:cs typeface="游ゴシック" pitchFamily="34" charset="-120"/>
+              </a:rPr>
+              <a:t>この協業の仕組みを、第3回（紹介構造）・第4回（“人生の指揮官”モデル）のカリキュラムとして教材化し、再現可能な技術にしている（素材③）</a:t>
+            </a:r>
+            <a:endParaRPr lang="en-US" sz="1500" dirty="0"/>
+          </a:p>
+          <a:p>
+            <a:pPr marL="342900" indent="-342900">
+              <a:lnSpc>
+                <a:spcPct val="128000"/>
+              </a:lnSpc>
+              <a:spcAft>
+                <a:spcPts val="1200"/>
+              </a:spcAft>
+              <a:buSzPct val="100000"/>
+              <a:buChar char="●"/>
+            </a:pPr>
+            <a:r>
+              <a:rPr lang="en-US" sz="1500" dirty="0">
+                <a:solidFill>
+                  <a:srgbClr val="3A3A3A"/>
+                </a:solidFill>
+                <a:latin typeface="游ゴシック" pitchFamily="34" charset="0"/>
+                <a:ea typeface="游ゴシック" pitchFamily="34" charset="-122"/>
+                <a:cs typeface="游ゴシック" pitchFamily="34" charset="-120"/>
+              </a:rPr>
+              <a:t>「財産に着目する」のではなく「家族の隠れた課題を見つけに行く」という視点そのものが、他の相続コンサル・士業・金融機関にはない方法論的な差別化</a:t>
+            </a:r>
+            <a:endParaRPr lang="en-US" sz="1500" dirty="0"/>
+          </a:p>
+        </p:txBody>
+      </p:sp>
+      <p:sp>
+        <p:nvSpPr>
+          <p:cNvPr id="9" name="Text 7"/>
+          <p:cNvSpPr txBox="1"/>
+          <p:nvPr/>
+        </p:nvSpPr>
+        <p:spPr>
+          <a:xfrm>
+            <a:off x="11551615" y="6400800"/>
+            <a:ext cx="457200" cy="274320"/>
+          </a:xfrm>
+          <a:prstGeom prst="rect">
+            <a:avLst/>
+          </a:prstGeom>
+          <a:noFill/>
+          <a:ln/>
+        </p:spPr>
+        <p:txBody>
+          <a:bodyPr wrap="square" lIns="0" tIns="0" rIns="0" bIns="0" rtlCol="0" anchor="ctr"/>
+          <a:lstStyle/>
+          <a:p>
+            <a:pPr algn="r" indent="0" marL="0">
+              <a:buNone/>
+            </a:pPr>
+            <a:r>
+              <a:rPr lang="en-US" sz="1000" dirty="0">
+                <a:solidFill>
+                  <a:srgbClr val="6B6B6B"/>
+                </a:solidFill>
+                <a:latin typeface="游ゴシック" pitchFamily="34" charset="0"/>
+                <a:ea typeface="游ゴシック" pitchFamily="34" charset="-122"/>
+                <a:cs typeface="游ゴシック" pitchFamily="34" charset="-120"/>
+              </a:rPr>
+              <a:t>12</a:t>
+            </a:r>
+            <a:endParaRPr lang="en-US" sz="1000" dirty="0"/>
+          </a:p>
+        </p:txBody>
+      </p:sp>
+    </p:spTree>
+  </p:cSld>
+  <p:clrMapOvr>
+    <a:masterClrMapping/>
+  </p:clrMapOvr>
+</p:sld>
+</file>
+
+<file path=ppt/slides/slide13.xml><?xml version="1.0" encoding="utf-8"?>
+<p:sld xmlns:a="http://schemas.openxmlformats.org/drawingml/2006/main" xmlns:r="http://schemas.openxmlformats.org/officeDocument/2006/relationships" xmlns:p="http://schemas.openxmlformats.org/presentationml/2006/main">
+  <p:cSld name="Slide 13">
+    <p:bg>
+      <p:bgPr>
+        <a:solidFill>
+          <a:srgbClr val="FFFFFF"/>
+        </a:solidFill>
+      </p:bgPr>
+    </p:bg>
+    <p:spTree>
+      <p:nvGrpSpPr>
+        <p:cNvPr id="1" name=""/>
+        <p:cNvGrpSpPr/>
+        <p:nvPr/>
+      </p:nvGrpSpPr>
+      <p:grpSpPr>
+        <a:xfrm>
+          <a:off x="0" y="0"/>
+          <a:ext cx="0" cy="0"/>
+          <a:chOff x="0" y="0"/>
+          <a:chExt cx="0" cy="0"/>
+        </a:xfrm>
+      </p:grpSpPr>
+      <p:sp>
+        <p:nvSpPr>
+          <p:cNvPr id="2" name="Text 0"/>
+          <p:cNvSpPr txBox="1"/>
+          <p:nvPr/>
+        </p:nvSpPr>
+        <p:spPr>
+          <a:xfrm>
+            <a:off x="640080" y="411480"/>
+            <a:ext cx="9144000" cy="320040"/>
+          </a:xfrm>
+          <a:prstGeom prst="rect">
+            <a:avLst/>
+          </a:prstGeom>
+          <a:noFill/>
+          <a:ln/>
+        </p:spPr>
+        <p:txBody>
+          <a:bodyPr wrap="square" lIns="0" tIns="0" rIns="0" bIns="0" rtlCol="0" anchor="ctr"/>
+          <a:lstStyle/>
+          <a:p>
+            <a:pPr indent="0" marL="0">
+              <a:buNone/>
+            </a:pPr>
+            <a:r>
+              <a:rPr lang="en-US" sz="1300" b="1" spc="100" kern="0" dirty="0">
+                <a:solidFill>
+                  <a:srgbClr val="C9603F"/>
+                </a:solidFill>
+                <a:latin typeface="游ゴシック" pitchFamily="34" charset="0"/>
+                <a:ea typeface="游ゴシック" pitchFamily="34" charset="-122"/>
+                <a:cs typeface="游ゴシック" pitchFamily="34" charset="-120"/>
+              </a:rPr>
+              <a:t>06 / CONTRIBUTION</a:t>
+            </a:r>
+            <a:endParaRPr lang="en-US" sz="1300" dirty="0"/>
+          </a:p>
+        </p:txBody>
+      </p:sp>
+      <p:sp>
+        <p:nvSpPr>
+          <p:cNvPr id="3" name="Text 1"/>
+          <p:cNvSpPr txBox="1"/>
+          <p:nvPr/>
+        </p:nvSpPr>
+        <p:spPr>
+          <a:xfrm>
+            <a:off x="640080" y="713232"/>
+            <a:ext cx="10881360" cy="731520"/>
+          </a:xfrm>
+          <a:prstGeom prst="rect">
+            <a:avLst/>
+          </a:prstGeom>
+          <a:noFill/>
+          <a:ln/>
+        </p:spPr>
+        <p:txBody>
+          <a:bodyPr wrap="square" lIns="0" tIns="0" rIns="0" bIns="0" rtlCol="0" anchor="ctr"/>
+          <a:lstStyle/>
+          <a:p>
+            <a:pPr indent="0" marL="0">
+              <a:buNone/>
+            </a:pPr>
+            <a:r>
+              <a:rPr lang="en-US" sz="2700" b="1" dirty="0">
+                <a:solidFill>
+                  <a:srgbClr val="1E3A5F"/>
+                </a:solidFill>
+                <a:latin typeface="游ゴシック" pitchFamily="34" charset="0"/>
+                <a:ea typeface="游ゴシック" pitchFamily="34" charset="-122"/>
+                <a:cs typeface="游ゴシック" pitchFamily="34" charset="-120"/>
+              </a:rPr>
+              <a:t>貢献性 ― 100億円の中身は、関わった全員への貢献</a:t>
+            </a:r>
+            <a:endParaRPr lang="en-US" sz="2700" dirty="0"/>
+          </a:p>
+        </p:txBody>
+      </p:sp>
+      <p:sp>
+        <p:nvSpPr>
+          <p:cNvPr id="4" name="Shape 2"/>
+          <p:cNvSpPr/>
+          <p:nvPr/>
+        </p:nvSpPr>
+        <p:spPr>
+          <a:xfrm>
+            <a:off x="10607040" y="502920"/>
+            <a:ext cx="822960" cy="822960"/>
+          </a:xfrm>
+          <a:prstGeom prst="ellipse">
+            <a:avLst/>
+          </a:prstGeom>
+          <a:solidFill>
+            <a:srgbClr val="C9603F"/>
+          </a:solidFill>
+          <a:ln/>
+          <a:effectLst>
+            <a:outerShdw sx="100000" sy="100000" kx="0" ky="0" algn="bl" rotWithShape="0" blurRad="101600" dist="38100" dir="5400000">
+              <a:srgbClr val="10233A">
+                <a:alpha val="18000"/>
+              </a:srgbClr>
+            </a:outerShdw>
+          </a:effectLst>
+        </p:spPr>
+      </p:sp>
+      <p:sp>
+        <p:nvSpPr>
+          <p:cNvPr id="5" name="Text 3"/>
+          <p:cNvSpPr txBox="1"/>
+          <p:nvPr/>
+        </p:nvSpPr>
+        <p:spPr>
+          <a:xfrm>
+            <a:off x="10607040" y="502920"/>
+            <a:ext cx="822960" cy="822960"/>
+          </a:xfrm>
+          <a:prstGeom prst="rect">
+            <a:avLst/>
+          </a:prstGeom>
+          <a:noFill/>
+          <a:ln/>
+        </p:spPr>
+        <p:txBody>
+          <a:bodyPr wrap="square" lIns="0" tIns="0" rIns="0" bIns="0" rtlCol="0" anchor="ctr"/>
+          <a:lstStyle/>
+          <a:p>
+            <a:pPr algn="ctr" indent="0" marL="0">
+              <a:buNone/>
+            </a:pPr>
+            <a:r>
+              <a:rPr lang="en-US" sz="2880" b="1" dirty="0">
+                <a:solidFill>
+                  <a:srgbClr val="FFFFFF"/>
+                </a:solidFill>
+                <a:latin typeface="游ゴシック" pitchFamily="34" charset="0"/>
+                <a:ea typeface="游ゴシック" pitchFamily="34" charset="-122"/>
+                <a:cs typeface="游ゴシック" pitchFamily="34" charset="-120"/>
+              </a:rPr>
+              <a:t>貢</a:t>
+            </a:r>
+            <a:endParaRPr lang="en-US" sz="2880" dirty="0"/>
+          </a:p>
+        </p:txBody>
+      </p:sp>
+      <p:sp>
+        <p:nvSpPr>
+          <p:cNvPr id="6" name="Text 4"/>
+          <p:cNvSpPr txBox="1"/>
+          <p:nvPr/>
+        </p:nvSpPr>
+        <p:spPr>
+          <a:xfrm>
+            <a:off x="640080" y="1783080"/>
+            <a:ext cx="10881360" cy="4206240"/>
+          </a:xfrm>
+          <a:prstGeom prst="rect">
+            <a:avLst/>
+          </a:prstGeom>
+          <a:noFill/>
+          <a:ln/>
+        </p:spPr>
+        <p:txBody>
+          <a:bodyPr wrap="square" lIns="0" tIns="0" rIns="0" bIns="0" rtlCol="0" anchor="t"/>
+          <a:lstStyle/>
+          <a:p>
+            <a:pPr marL="342900" indent="-342900">
+              <a:lnSpc>
+                <a:spcPct val="128000"/>
+              </a:lnSpc>
+              <a:spcAft>
+                <a:spcPts val="1200"/>
+              </a:spcAft>
+              <a:buSzPct val="100000"/>
+              <a:buChar char="●"/>
+            </a:pPr>
+            <a:r>
+              <a:rPr lang="en-US" sz="1500" dirty="0">
+                <a:solidFill>
+                  <a:srgbClr val="3A3A3A"/>
+                </a:solidFill>
+                <a:latin typeface="游ゴシック" pitchFamily="34" charset="0"/>
+                <a:ea typeface="游ゴシック" pitchFamily="34" charset="-122"/>
+                <a:cs typeface="游ゴシック" pitchFamily="34" charset="-120"/>
+              </a:rPr>
+              <a:t>末端の顧客（本人・家族）：財産ではなく「対話」による安心と幸福度の向上（終活×幸福度の各種調査）</a:t>
+            </a:r>
+            <a:endParaRPr lang="en-US" sz="1500" dirty="0"/>
+          </a:p>
+          <a:p>
+            <a:pPr marL="342900" indent="-342900">
+              <a:lnSpc>
+                <a:spcPct val="128000"/>
+              </a:lnSpc>
+              <a:spcAft>
+                <a:spcPts val="1200"/>
+              </a:spcAft>
+              <a:buSzPct val="100000"/>
+              <a:buChar char="●"/>
+            </a:pPr>
+            <a:r>
+              <a:rPr lang="en-US" sz="1500" dirty="0">
+                <a:solidFill>
+                  <a:srgbClr val="3A3A3A"/>
+                </a:solidFill>
+                <a:latin typeface="游ゴシック" pitchFamily="34" charset="0"/>
+                <a:ea typeface="游ゴシック" pitchFamily="34" charset="-122"/>
+                <a:cs typeface="游ゴシック" pitchFamily="34" charset="-120"/>
+              </a:rPr>
+              <a:t>周辺専門家（税理士・弁護士・不動産・金融等）：新たな受任機会・収益機会の創出（素材①）</a:t>
+            </a:r>
+            <a:endParaRPr lang="en-US" sz="1500" dirty="0"/>
+          </a:p>
+          <a:p>
+            <a:pPr marL="342900" indent="-342900">
+              <a:lnSpc>
+                <a:spcPct val="128000"/>
+              </a:lnSpc>
+              <a:spcAft>
+                <a:spcPts val="1200"/>
+              </a:spcAft>
+              <a:buSzPct val="100000"/>
+              <a:buChar char="●"/>
+            </a:pPr>
+            <a:r>
+              <a:rPr lang="en-US" sz="1500" dirty="0">
+                <a:solidFill>
+                  <a:srgbClr val="3A3A3A"/>
+                </a:solidFill>
+                <a:latin typeface="游ゴシック" pitchFamily="34" charset="0"/>
+                <a:ea typeface="游ゴシック" pitchFamily="34" charset="-122"/>
+                <a:cs typeface="游ゴシック" pitchFamily="34" charset="-120"/>
+              </a:rPr>
+              <a:t>企業：福利厚生導入を通じ「従業員を大切にする法人」への進化を支援</a:t>
+            </a:r>
+            <a:endParaRPr lang="en-US" sz="1500" dirty="0"/>
+          </a:p>
+          <a:p>
+            <a:pPr marL="342900" indent="-342900">
+              <a:lnSpc>
+                <a:spcPct val="128000"/>
+              </a:lnSpc>
+              <a:spcAft>
+                <a:spcPts val="1200"/>
+              </a:spcAft>
+              <a:buSzPct val="100000"/>
+              <a:buChar char="●"/>
+            </a:pPr>
+            <a:r>
+              <a:rPr lang="en-US" sz="1500" dirty="0">
+                <a:solidFill>
+                  <a:srgbClr val="3A3A3A"/>
+                </a:solidFill>
+                <a:latin typeface="游ゴシック" pitchFamily="34" charset="0"/>
+                <a:ea typeface="游ゴシック" pitchFamily="34" charset="-122"/>
+                <a:cs typeface="游ゴシック" pitchFamily="34" charset="-120"/>
+              </a:rPr>
+              <a:t>行政・地域：朝来市 → 岸和田市など、一つの街で実証した連携モデルの横展開</a:t>
+            </a:r>
+            <a:endParaRPr lang="en-US" sz="1500" dirty="0"/>
+          </a:p>
+        </p:txBody>
+      </p:sp>
+      <p:sp>
+        <p:nvSpPr>
+          <p:cNvPr id="7" name="Shape 5"/>
+          <p:cNvSpPr/>
+          <p:nvPr/>
+        </p:nvSpPr>
+        <p:spPr>
+          <a:xfrm>
+            <a:off x="640080" y="4754880"/>
+            <a:ext cx="2468880" cy="1325880"/>
+          </a:xfrm>
+          <a:prstGeom prst="roundRect">
+            <a:avLst>
+              <a:gd name="adj" fmla="val 6897"/>
+            </a:avLst>
+          </a:prstGeom>
+          <a:solidFill>
+            <a:srgbClr val="F6F1EA"/>
+          </a:solidFill>
+          <a:ln/>
+          <a:effectLst>
+            <a:outerShdw sx="100000" sy="100000" kx="0" ky="0" algn="bl" rotWithShape="0" blurRad="101600" dist="38100" dir="5400000">
+              <a:srgbClr val="10233A">
+                <a:alpha val="18000"/>
+              </a:srgbClr>
+            </a:outerShdw>
+          </a:effectLst>
+        </p:spPr>
+      </p:sp>
+      <p:sp>
+        <p:nvSpPr>
+          <p:cNvPr id="8" name="Text 6"/>
+          <p:cNvSpPr txBox="1"/>
+          <p:nvPr/>
+        </p:nvSpPr>
+        <p:spPr>
+          <a:xfrm>
+            <a:off x="822960" y="4937760"/>
+            <a:ext cx="2103120" cy="365760"/>
+          </a:xfrm>
+          <a:prstGeom prst="rect">
+            <a:avLst/>
+          </a:prstGeom>
+          <a:noFill/>
+          <a:ln/>
+        </p:spPr>
+        <p:txBody>
+          <a:bodyPr wrap="square" lIns="0" tIns="0" rIns="0" bIns="0" rtlCol="0" anchor="ctr"/>
+          <a:lstStyle/>
+          <a:p>
+            <a:pPr indent="0" marL="0">
+              <a:buNone/>
+            </a:pPr>
+            <a:r>
+              <a:rPr lang="en-US" sz="1500" b="1" dirty="0">
+                <a:solidFill>
+                  <a:srgbClr val="C9603F"/>
+                </a:solidFill>
+                <a:latin typeface="游ゴシック" pitchFamily="34" charset="0"/>
+                <a:ea typeface="游ゴシック" pitchFamily="34" charset="-122"/>
+                <a:cs typeface="游ゴシック" pitchFamily="34" charset="-120"/>
+              </a:rPr>
+              <a:t>顧客</a:t>
+            </a:r>
+            <a:endParaRPr lang="en-US" sz="1500" dirty="0"/>
+          </a:p>
+        </p:txBody>
+      </p:sp>
+      <p:sp>
+        <p:nvSpPr>
+          <p:cNvPr id="9" name="Text 7"/>
+          <p:cNvSpPr txBox="1"/>
+          <p:nvPr/>
+        </p:nvSpPr>
+        <p:spPr>
+          <a:xfrm>
+            <a:off x="822960" y="5349240"/>
+            <a:ext cx="2103120" cy="640080"/>
+          </a:xfrm>
+          <a:prstGeom prst="rect">
+            <a:avLst/>
+          </a:prstGeom>
+          <a:noFill/>
+          <a:ln/>
+        </p:spPr>
+        <p:txBody>
+          <a:bodyPr wrap="square" lIns="0" tIns="0" rIns="0" bIns="0" rtlCol="0" anchor="t"/>
+          <a:lstStyle/>
+          <a:p>
+            <a:pPr indent="0" marL="0">
+              <a:lnSpc>
+                <a:spcPct val="120000"/>
+              </a:lnSpc>
+              <a:buNone/>
+            </a:pPr>
+            <a:r>
+              <a:rPr lang="en-US" sz="1150" dirty="0">
+                <a:solidFill>
+                  <a:srgbClr val="3A3A3A"/>
+                </a:solidFill>
+                <a:latin typeface="游ゴシック" pitchFamily="34" charset="0"/>
+                <a:ea typeface="游ゴシック" pitchFamily="34" charset="-122"/>
+                <a:cs typeface="游ゴシック" pitchFamily="34" charset="-120"/>
+              </a:rPr>
+              <a:t>対話による安心</a:t>
+            </a:r>
+            <a:endParaRPr lang="en-US" sz="1150" dirty="0"/>
+          </a:p>
+        </p:txBody>
+      </p:sp>
+      <p:sp>
+        <p:nvSpPr>
+          <p:cNvPr id="10" name="Shape 8"/>
+          <p:cNvSpPr/>
+          <p:nvPr/>
+        </p:nvSpPr>
+        <p:spPr>
+          <a:xfrm>
+            <a:off x="3383280" y="4754880"/>
+            <a:ext cx="2468880" cy="1325880"/>
+          </a:xfrm>
+          <a:prstGeom prst="roundRect">
+            <a:avLst>
+              <a:gd name="adj" fmla="val 6897"/>
+            </a:avLst>
+          </a:prstGeom>
+          <a:solidFill>
+            <a:srgbClr val="F6F1EA"/>
+          </a:solidFill>
+          <a:ln/>
+          <a:effectLst>
+            <a:outerShdw sx="100000" sy="100000" kx="0" ky="0" algn="bl" rotWithShape="0" blurRad="101600" dist="38100" dir="5400000">
+              <a:srgbClr val="10233A">
+                <a:alpha val="18000"/>
+              </a:srgbClr>
+            </a:outerShdw>
+          </a:effectLst>
+        </p:spPr>
+      </p:sp>
+      <p:sp>
+        <p:nvSpPr>
+          <p:cNvPr id="11" name="Text 9"/>
+          <p:cNvSpPr txBox="1"/>
+          <p:nvPr/>
+        </p:nvSpPr>
+        <p:spPr>
+          <a:xfrm>
+            <a:off x="3566160" y="4937760"/>
+            <a:ext cx="2103120" cy="365760"/>
+          </a:xfrm>
+          <a:prstGeom prst="rect">
+            <a:avLst/>
+          </a:prstGeom>
+          <a:noFill/>
+          <a:ln/>
+        </p:spPr>
+        <p:txBody>
+          <a:bodyPr wrap="square" lIns="0" tIns="0" rIns="0" bIns="0" rtlCol="0" anchor="ctr"/>
+          <a:lstStyle/>
+          <a:p>
+            <a:pPr indent="0" marL="0">
+              <a:buNone/>
+            </a:pPr>
+            <a:r>
+              <a:rPr lang="en-US" sz="1500" b="1" dirty="0">
+                <a:solidFill>
+                  <a:srgbClr val="C9603F"/>
+                </a:solidFill>
+                <a:latin typeface="游ゴシック" pitchFamily="34" charset="0"/>
+                <a:ea typeface="游ゴシック" pitchFamily="34" charset="-122"/>
+                <a:cs typeface="游ゴシック" pitchFamily="34" charset="-120"/>
+              </a:rPr>
+              <a:t>専門家</a:t>
+            </a:r>
+            <a:endParaRPr lang="en-US" sz="1500" dirty="0"/>
+          </a:p>
+        </p:txBody>
+      </p:sp>
+      <p:sp>
+        <p:nvSpPr>
+          <p:cNvPr id="12" name="Text 10"/>
+          <p:cNvSpPr txBox="1"/>
+          <p:nvPr/>
+        </p:nvSpPr>
+        <p:spPr>
+          <a:xfrm>
+            <a:off x="3566160" y="5349240"/>
+            <a:ext cx="2103120" cy="640080"/>
+          </a:xfrm>
+          <a:prstGeom prst="rect">
+            <a:avLst/>
+          </a:prstGeom>
+          <a:noFill/>
+          <a:ln/>
+        </p:spPr>
+        <p:txBody>
+          <a:bodyPr wrap="square" lIns="0" tIns="0" rIns="0" bIns="0" rtlCol="0" anchor="t"/>
+          <a:lstStyle/>
+          <a:p>
+            <a:pPr indent="0" marL="0">
+              <a:lnSpc>
+                <a:spcPct val="120000"/>
+              </a:lnSpc>
+              <a:buNone/>
+            </a:pPr>
+            <a:r>
+              <a:rPr lang="en-US" sz="1150" dirty="0">
+                <a:solidFill>
+                  <a:srgbClr val="3A3A3A"/>
+                </a:solidFill>
+                <a:latin typeface="游ゴシック" pitchFamily="34" charset="0"/>
+                <a:ea typeface="游ゴシック" pitchFamily="34" charset="-122"/>
+                <a:cs typeface="游ゴシック" pitchFamily="34" charset="-120"/>
+              </a:rPr>
+              <a:t>新たな受任機会</a:t>
+            </a:r>
+            <a:endParaRPr lang="en-US" sz="1150" dirty="0"/>
+          </a:p>
+        </p:txBody>
+      </p:sp>
+      <p:sp>
+        <p:nvSpPr>
+          <p:cNvPr id="13" name="Shape 11"/>
+          <p:cNvSpPr/>
+          <p:nvPr/>
+        </p:nvSpPr>
+        <p:spPr>
+          <a:xfrm>
+            <a:off x="6126480" y="4754880"/>
+            <a:ext cx="2468880" cy="1325880"/>
+          </a:xfrm>
+          <a:prstGeom prst="roundRect">
+            <a:avLst>
+              <a:gd name="adj" fmla="val 6897"/>
+            </a:avLst>
+          </a:prstGeom>
+          <a:solidFill>
+            <a:srgbClr val="F6F1EA"/>
+          </a:solidFill>
+          <a:ln/>
+          <a:effectLst>
+            <a:outerShdw sx="100000" sy="100000" kx="0" ky="0" algn="bl" rotWithShape="0" blurRad="101600" dist="38100" dir="5400000">
+              <a:srgbClr val="10233A">
+                <a:alpha val="18000"/>
+              </a:srgbClr>
+            </a:outerShdw>
+          </a:effectLst>
+        </p:spPr>
+      </p:sp>
+      <p:sp>
+        <p:nvSpPr>
+          <p:cNvPr id="14" name="Text 12"/>
+          <p:cNvSpPr txBox="1"/>
+          <p:nvPr/>
+        </p:nvSpPr>
+        <p:spPr>
+          <a:xfrm>
+            <a:off x="6309360" y="4937760"/>
+            <a:ext cx="2103120" cy="365760"/>
+          </a:xfrm>
+          <a:prstGeom prst="rect">
+            <a:avLst/>
+          </a:prstGeom>
+          <a:noFill/>
+          <a:ln/>
+        </p:spPr>
+        <p:txBody>
+          <a:bodyPr wrap="square" lIns="0" tIns="0" rIns="0" bIns="0" rtlCol="0" anchor="ctr"/>
+          <a:lstStyle/>
+          <a:p>
+            <a:pPr indent="0" marL="0">
+              <a:buNone/>
+            </a:pPr>
+            <a:r>
+              <a:rPr lang="en-US" sz="1500" b="1" dirty="0">
+                <a:solidFill>
+                  <a:srgbClr val="C9603F"/>
+                </a:solidFill>
+                <a:latin typeface="游ゴシック" pitchFamily="34" charset="0"/>
+                <a:ea typeface="游ゴシック" pitchFamily="34" charset="-122"/>
+                <a:cs typeface="游ゴシック" pitchFamily="34" charset="-120"/>
+              </a:rPr>
+              <a:t>企業</a:t>
+            </a:r>
+            <a:endParaRPr lang="en-US" sz="1500" dirty="0"/>
+          </a:p>
+        </p:txBody>
+      </p:sp>
+      <p:sp>
+        <p:nvSpPr>
+          <p:cNvPr id="15" name="Text 13"/>
+          <p:cNvSpPr txBox="1"/>
+          <p:nvPr/>
+        </p:nvSpPr>
+        <p:spPr>
+          <a:xfrm>
+            <a:off x="6309360" y="5349240"/>
+            <a:ext cx="2103120" cy="640080"/>
+          </a:xfrm>
+          <a:prstGeom prst="rect">
+            <a:avLst/>
+          </a:prstGeom>
+          <a:noFill/>
+          <a:ln/>
+        </p:spPr>
+        <p:txBody>
+          <a:bodyPr wrap="square" lIns="0" tIns="0" rIns="0" bIns="0" rtlCol="0" anchor="t"/>
+          <a:lstStyle/>
+          <a:p>
+            <a:pPr indent="0" marL="0">
+              <a:lnSpc>
+                <a:spcPct val="120000"/>
+              </a:lnSpc>
+              <a:buNone/>
+            </a:pPr>
+            <a:r>
+              <a:rPr lang="en-US" sz="1150" dirty="0">
+                <a:solidFill>
+                  <a:srgbClr val="3A3A3A"/>
+                </a:solidFill>
+                <a:latin typeface="游ゴシック" pitchFamily="34" charset="0"/>
+                <a:ea typeface="游ゴシック" pitchFamily="34" charset="-122"/>
+                <a:cs typeface="游ゴシック" pitchFamily="34" charset="-120"/>
+              </a:rPr>
+              <a:t>従業員を大切にする法人へ</a:t>
+            </a:r>
+            <a:endParaRPr lang="en-US" sz="1150" dirty="0"/>
+          </a:p>
+        </p:txBody>
+      </p:sp>
+      <p:sp>
+        <p:nvSpPr>
+          <p:cNvPr id="16" name="Shape 14"/>
+          <p:cNvSpPr/>
+          <p:nvPr/>
+        </p:nvSpPr>
+        <p:spPr>
+          <a:xfrm>
+            <a:off x="8869680" y="4754880"/>
+            <a:ext cx="2468880" cy="1325880"/>
+          </a:xfrm>
+          <a:prstGeom prst="roundRect">
+            <a:avLst>
+              <a:gd name="adj" fmla="val 6897"/>
+            </a:avLst>
+          </a:prstGeom>
+          <a:solidFill>
+            <a:srgbClr val="F6F1EA"/>
+          </a:solidFill>
+          <a:ln/>
+          <a:effectLst>
+            <a:outerShdw sx="100000" sy="100000" kx="0" ky="0" algn="bl" rotWithShape="0" blurRad="101600" dist="38100" dir="5400000">
+              <a:srgbClr val="10233A">
+                <a:alpha val="18000"/>
+              </a:srgbClr>
+            </a:outerShdw>
+          </a:effectLst>
+        </p:spPr>
+      </p:sp>
+      <p:sp>
+        <p:nvSpPr>
+          <p:cNvPr id="17" name="Text 15"/>
+          <p:cNvSpPr txBox="1"/>
+          <p:nvPr/>
+        </p:nvSpPr>
+        <p:spPr>
+          <a:xfrm>
+            <a:off x="9052560" y="4937760"/>
+            <a:ext cx="2103120" cy="365760"/>
+          </a:xfrm>
+          <a:prstGeom prst="rect">
+            <a:avLst/>
+          </a:prstGeom>
+          <a:noFill/>
+          <a:ln/>
+        </p:spPr>
+        <p:txBody>
+          <a:bodyPr wrap="square" lIns="0" tIns="0" rIns="0" bIns="0" rtlCol="0" anchor="ctr"/>
+          <a:lstStyle/>
+          <a:p>
+            <a:pPr indent="0" marL="0">
+              <a:buNone/>
+            </a:pPr>
+            <a:r>
+              <a:rPr lang="en-US" sz="1500" b="1" dirty="0">
+                <a:solidFill>
+                  <a:srgbClr val="C9603F"/>
+                </a:solidFill>
+                <a:latin typeface="游ゴシック" pitchFamily="34" charset="0"/>
+                <a:ea typeface="游ゴシック" pitchFamily="34" charset="-122"/>
+                <a:cs typeface="游ゴシック" pitchFamily="34" charset="-120"/>
+              </a:rPr>
+              <a:t>行政・地域</a:t>
+            </a:r>
+            <a:endParaRPr lang="en-US" sz="1500" dirty="0"/>
+          </a:p>
+        </p:txBody>
+      </p:sp>
+      <p:sp>
+        <p:nvSpPr>
+          <p:cNvPr id="18" name="Text 16"/>
+          <p:cNvSpPr txBox="1"/>
+          <p:nvPr/>
+        </p:nvSpPr>
+        <p:spPr>
+          <a:xfrm>
+            <a:off x="9052560" y="5349240"/>
+            <a:ext cx="2103120" cy="640080"/>
+          </a:xfrm>
+          <a:prstGeom prst="rect">
+            <a:avLst/>
+          </a:prstGeom>
+          <a:noFill/>
+          <a:ln/>
+        </p:spPr>
+        <p:txBody>
+          <a:bodyPr wrap="square" lIns="0" tIns="0" rIns="0" bIns="0" rtlCol="0" anchor="t"/>
+          <a:lstStyle/>
+          <a:p>
+            <a:pPr indent="0" marL="0">
+              <a:lnSpc>
+                <a:spcPct val="120000"/>
+              </a:lnSpc>
+              <a:buNone/>
+            </a:pPr>
+            <a:r>
+              <a:rPr lang="en-US" sz="1150" dirty="0">
+                <a:solidFill>
+                  <a:srgbClr val="3A3A3A"/>
+                </a:solidFill>
+                <a:latin typeface="游ゴシック" pitchFamily="34" charset="0"/>
+                <a:ea typeface="游ゴシック" pitchFamily="34" charset="-122"/>
+                <a:cs typeface="游ゴシック" pitchFamily="34" charset="-120"/>
+              </a:rPr>
+              <a:t>連携モデルの横展開</a:t>
+            </a:r>
+            <a:endParaRPr lang="en-US" sz="1150" dirty="0"/>
+          </a:p>
+        </p:txBody>
+      </p:sp>
+      <p:sp>
+        <p:nvSpPr>
+          <p:cNvPr id="19" name="Text 17"/>
+          <p:cNvSpPr txBox="1"/>
+          <p:nvPr/>
+        </p:nvSpPr>
+        <p:spPr>
+          <a:xfrm>
+            <a:off x="11551615" y="6400800"/>
+            <a:ext cx="457200" cy="274320"/>
+          </a:xfrm>
+          <a:prstGeom prst="rect">
+            <a:avLst/>
+          </a:prstGeom>
+          <a:noFill/>
+          <a:ln/>
+        </p:spPr>
+        <p:txBody>
+          <a:bodyPr wrap="square" lIns="0" tIns="0" rIns="0" bIns="0" rtlCol="0" anchor="ctr"/>
+          <a:lstStyle/>
+          <a:p>
+            <a:pPr algn="r" indent="0" marL="0">
+              <a:buNone/>
+            </a:pPr>
+            <a:r>
+              <a:rPr lang="en-US" sz="1000" dirty="0">
+                <a:solidFill>
+                  <a:srgbClr val="6B6B6B"/>
+                </a:solidFill>
+                <a:latin typeface="游ゴシック" pitchFamily="34" charset="0"/>
+                <a:ea typeface="游ゴシック" pitchFamily="34" charset="-122"/>
+                <a:cs typeface="游ゴシック" pitchFamily="34" charset="-120"/>
+              </a:rPr>
+              <a:t>13</a:t>
+            </a:r>
+            <a:endParaRPr lang="en-US" sz="1000" dirty="0"/>
+          </a:p>
+        </p:txBody>
+      </p:sp>
+    </p:spTree>
+  </p:cSld>
+  <p:clrMapOvr>
+    <a:masterClrMapping/>
+  </p:clrMapOvr>
+</p:sld>
+</file>
+
+<file path=ppt/slides/slide14.xml><?xml version="1.0" encoding="utf-8"?>
+<p:sld xmlns:a="http://schemas.openxmlformats.org/drawingml/2006/main" xmlns:r="http://schemas.openxmlformats.org/officeDocument/2006/relationships" xmlns:p="http://schemas.openxmlformats.org/presentationml/2006/main">
+  <p:cSld name="Slide 14">
     <p:bg>
       <p:bgPr>
         <a:solidFill>
@@ -3495,13 +5476,13 @@
                 <a:spcPct val="128000"/>
               </a:lnSpc>
               <a:spcAft>
-                <a:spcPts val="800"/>
+                <a:spcPts val="700"/>
               </a:spcAft>
               <a:buSzPct val="100000"/>
               <a:buChar char="●"/>
             </a:pPr>
             <a:r>
-              <a:rPr lang="en-US" sz="1350" dirty="0">
+              <a:rPr lang="en-US" sz="1300" dirty="0">
                 <a:solidFill>
                   <a:srgbClr val="DCE3EC"/>
                 </a:solidFill>
@@ -3509,9 +5490,9 @@
                 <a:ea typeface="游ゴシック" pitchFamily="34" charset="-122"/>
                 <a:cs typeface="游ゴシック" pitchFamily="34" charset="-120"/>
               </a:rPr>
-              <a:t>① 課題提起 ― 「相続＝財産がある人だけのカルチャー」の限界</a:t>
-            </a:r>
-            <a:endParaRPr lang="en-US" sz="1350" dirty="0"/>
+              <a:t>① 課題提起 ― 相続ビジネスのレッドオーシャン化と「財産がある人だけのカルチャー」の限界</a:t>
+            </a:r>
+            <a:endParaRPr lang="en-US" sz="1300" dirty="0"/>
           </a:p>
           <a:p>
             <a:pPr marL="342900" indent="-342900">
@@ -3519,13 +5500,13 @@
                 <a:spcPct val="128000"/>
               </a:lnSpc>
               <a:spcAft>
-                <a:spcPts val="800"/>
+                <a:spcPts val="700"/>
               </a:spcAft>
               <a:buSzPct val="100000"/>
               <a:buChar char="●"/>
             </a:pPr>
             <a:r>
-              <a:rPr lang="en-US" sz="1350" dirty="0">
+              <a:rPr lang="en-US" sz="1300" dirty="0">
                 <a:solidFill>
                   <a:srgbClr val="DCE3EC"/>
                 </a:solidFill>
@@ -3533,9 +5514,9 @@
                 <a:ea typeface="游ゴシック" pitchFamily="34" charset="-122"/>
                 <a:cs typeface="游ゴシック" pitchFamily="34" charset="-120"/>
               </a:rPr>
-              <a:t>② 事業紹介 ― hub理論・繋ぐノート・資格制度</a:t>
-            </a:r>
-            <a:endParaRPr lang="en-US" sz="1350" dirty="0"/>
+              <a:t>② 新・相続ビジネス ― 財産から人生へ。“心置きなく生ききる人生のプロデュース”とフロント比較（ブルーオーシャンの所在）</a:t>
+            </a:r>
+            <a:endParaRPr lang="en-US" sz="1300" dirty="0"/>
           </a:p>
           <a:p>
             <a:pPr marL="342900" indent="-342900">
@@ -3543,13 +5524,13 @@
                 <a:spcPct val="128000"/>
               </a:lnSpc>
               <a:spcAft>
-                <a:spcPts val="800"/>
+                <a:spcPts val="700"/>
               </a:spcAft>
               <a:buSzPct val="100000"/>
               <a:buChar char="●"/>
             </a:pPr>
             <a:r>
-              <a:rPr lang="en-US" sz="1350" dirty="0">
+              <a:rPr lang="en-US" sz="1300" dirty="0">
                 <a:solidFill>
                   <a:srgbClr val="DCE3EC"/>
                 </a:solidFill>
@@ -3557,9 +5538,9 @@
                 <a:ea typeface="游ゴシック" pitchFamily="34" charset="-122"/>
                 <a:cs typeface="游ゴシック" pitchFamily="34" charset="-120"/>
               </a:rPr>
-              <a:t>③ 実績 ― 約100億円の経済圏（内訳と象徴エピソード）</a:t>
-            </a:r>
-            <a:endParaRPr lang="en-US" sz="1350" dirty="0"/>
+              <a:t>③ 実績 ― hub理論に基づく約100億円の経済圏（内訳と象徴エピソード）</a:t>
+            </a:r>
+            <a:endParaRPr lang="en-US" sz="1300" dirty="0"/>
           </a:p>
           <a:p>
             <a:pPr marL="342900" indent="-342900">
@@ -3567,13 +5548,13 @@
                 <a:spcPct val="128000"/>
               </a:lnSpc>
               <a:spcAft>
-                <a:spcPts val="800"/>
+                <a:spcPts val="700"/>
               </a:spcAft>
               <a:buSzPct val="100000"/>
               <a:buChar char="●"/>
             </a:pPr>
             <a:r>
-              <a:rPr lang="en-US" sz="1350" dirty="0">
+              <a:rPr lang="en-US" sz="1300" dirty="0">
                 <a:solidFill>
                   <a:srgbClr val="DCE3EC"/>
                 </a:solidFill>
@@ -3583,7 +5564,7 @@
               </a:rPr>
               <a:t>④ 優位性・貢献性 ― 「隠れた課題」を見つける協業モデル</a:t>
             </a:r>
-            <a:endParaRPr lang="en-US" sz="1350" dirty="0"/>
+            <a:endParaRPr lang="en-US" sz="1300" dirty="0"/>
           </a:p>
           <a:p>
             <a:pPr marL="342900" indent="-342900">
@@ -3591,13 +5572,13 @@
                 <a:spcPct val="128000"/>
               </a:lnSpc>
               <a:spcAft>
-                <a:spcPts val="800"/>
+                <a:spcPts val="700"/>
               </a:spcAft>
               <a:buSzPct val="100000"/>
               <a:buChar char="●"/>
             </a:pPr>
             <a:r>
-              <a:rPr lang="en-US" sz="1350" dirty="0">
+              <a:rPr lang="en-US" sz="1300" dirty="0">
                 <a:solidFill>
                   <a:srgbClr val="DCE3EC"/>
                 </a:solidFill>
@@ -3607,7 +5588,7 @@
               </a:rPr>
               <a:t>⑤ 成長性・市場性 ― 二つのファネルとFC100事業所</a:t>
             </a:r>
-            <a:endParaRPr lang="en-US" sz="1350" dirty="0"/>
+            <a:endParaRPr lang="en-US" sz="1300" dirty="0"/>
           </a:p>
           <a:p>
             <a:pPr marL="342900" indent="-342900">
@@ -3615,13 +5596,13 @@
                 <a:spcPct val="128000"/>
               </a:lnSpc>
               <a:spcAft>
-                <a:spcPts val="800"/>
+                <a:spcPts val="700"/>
               </a:spcAft>
               <a:buSzPct val="100000"/>
               <a:buChar char="●"/>
             </a:pPr>
             <a:r>
-              <a:rPr lang="en-US" sz="1350" dirty="0">
+              <a:rPr lang="en-US" sz="1300" dirty="0">
                 <a:solidFill>
                   <a:srgbClr val="DCE3EC"/>
                 </a:solidFill>
@@ -3631,7 +5612,7 @@
               </a:rPr>
               <a:t>⑥ 展望・締め ― 心置きなく生ききる社会へ</a:t>
             </a:r>
-            <a:endParaRPr lang="en-US" sz="1350" dirty="0"/>
+            <a:endParaRPr lang="en-US" sz="1300" dirty="0"/>
           </a:p>
         </p:txBody>
       </p:sp>
@@ -4873,7 +6854,7 @@
                 <a:ea typeface="游ゴシック" pitchFamily="34" charset="-122"/>
                 <a:cs typeface="游ゴシック" pitchFamily="34" charset="-120"/>
               </a:rPr>
-              <a:t>すべての軸の起点になっているのが、次ページの「約100億円の経済圏」という実績です。</a:t>
+              <a:t>すべての軸の起点になっているのが、「新・相続ビジネス」という切り口と、約100億円の経済圏という実績です。</a:t>
             </a:r>
             <a:endParaRPr lang="en-US" sz="1250" dirty="0"/>
           </a:p>
@@ -4983,7 +6964,7 @@
                 <a:ea typeface="游ゴシック" pitchFamily="34" charset="-122"/>
                 <a:cs typeface="游ゴシック" pitchFamily="34" charset="-120"/>
               </a:rPr>
-              <a:t>MARKET WE CREATED</a:t>
+              <a:t>BLUE OCEAN</a:t>
             </a:r>
             <a:endParaRPr lang="en-US" sz="1300" dirty="0"/>
           </a:p>
@@ -5022,7 +7003,7 @@
                 <a:ea typeface="游ゴシック" pitchFamily="34" charset="-122"/>
                 <a:cs typeface="游ゴシック" pitchFamily="34" charset="-120"/>
               </a:rPr>
-              <a:t>hubとしての3年間 ― 創出した経済圏（想定内訳）</a:t>
+              <a:t>新・相続ビジネスとは ― 財産ではなく、人生をプロデュースする</a:t>
             </a:r>
             <a:endParaRPr lang="en-US" sz="2700" dirty="0"/>
           </a:p>
@@ -5030,26 +7011,97 @@
       </p:sp>
       <p:sp>
         <p:nvSpPr>
-          <p:cNvPr id="4" name="Shape 2"/>
-          <p:cNvSpPr/>
-          <p:nvPr/>
-        </p:nvSpPr>
-        <p:spPr>
-          <a:xfrm>
-            <a:off x="5943600" y="2560320"/>
-            <a:ext cx="9144" cy="1417320"/>
-          </a:xfrm>
-          <a:prstGeom prst="line">
-            <a:avLst/>
-          </a:prstGeom>
-          <a:noFill/>
-          <a:ln w="19050">
-            <a:solidFill>
-              <a:srgbClr val="C9C2B6"/>
-            </a:solidFill>
-            <a:prstDash val="sysDot"/>
-          </a:ln>
-        </p:spPr>
+          <p:cNvPr id="4" name="Text 2"/>
+          <p:cNvSpPr txBox="1"/>
+          <p:nvPr/>
+        </p:nvSpPr>
+        <p:spPr>
+          <a:xfrm>
+            <a:off x="640080" y="1783080"/>
+            <a:ext cx="10881360" cy="2377440"/>
+          </a:xfrm>
+          <a:prstGeom prst="rect">
+            <a:avLst/>
+          </a:prstGeom>
+          <a:noFill/>
+          <a:ln/>
+        </p:spPr>
+        <p:txBody>
+          <a:bodyPr wrap="square" lIns="0" tIns="0" rIns="0" bIns="0" rtlCol="0" anchor="t"/>
+          <a:lstStyle/>
+          <a:p>
+            <a:pPr marL="342900" indent="-342900">
+              <a:lnSpc>
+                <a:spcPct val="128000"/>
+              </a:lnSpc>
+              <a:spcAft>
+                <a:spcPts val="1200"/>
+              </a:spcAft>
+              <a:buSzPct val="100000"/>
+              <a:buChar char="●"/>
+            </a:pPr>
+            <a:r>
+              <a:rPr lang="en-US" sz="1500" dirty="0">
+                <a:solidFill>
+                  <a:srgbClr val="3A3A3A"/>
+                </a:solidFill>
+                <a:latin typeface="游ゴシック" pitchFamily="34" charset="0"/>
+                <a:ea typeface="游ゴシック" pitchFamily="34" charset="-122"/>
+                <a:cs typeface="游ゴシック" pitchFamily="34" charset="-120"/>
+              </a:rPr>
+              <a:t>相続ビジネスへの参入者は年々増加し、節税・遺産分割・保険など「財産をどう残すか」を軸にした競争が激化（レッドオーシャン化）</a:t>
+            </a:r>
+            <a:endParaRPr lang="en-US" sz="1500" dirty="0"/>
+          </a:p>
+          <a:p>
+            <a:pPr marL="342900" indent="-342900">
+              <a:lnSpc>
+                <a:spcPct val="128000"/>
+              </a:lnSpc>
+              <a:spcAft>
+                <a:spcPts val="1200"/>
+              </a:spcAft>
+              <a:buSzPct val="100000"/>
+              <a:buChar char="●"/>
+            </a:pPr>
+            <a:r>
+              <a:rPr lang="en-US" sz="1500" dirty="0">
+                <a:solidFill>
+                  <a:srgbClr val="3A3A3A"/>
+                </a:solidFill>
+                <a:latin typeface="游ゴシック" pitchFamily="34" charset="0"/>
+                <a:ea typeface="游ゴシック" pitchFamily="34" charset="-122"/>
+                <a:cs typeface="游ゴシック" pitchFamily="34" charset="-120"/>
+              </a:rPr>
+              <a:t>繋ぐグループは、相続の起点を「財産」から「人生」へ転換。テーマを“死ぬ準備”ではなく“生きる準備”に据え直した</a:t>
+            </a:r>
+            <a:endParaRPr lang="en-US" sz="1500" dirty="0"/>
+          </a:p>
+          <a:p>
+            <a:pPr marL="342900" indent="-342900">
+              <a:lnSpc>
+                <a:spcPct val="128000"/>
+              </a:lnSpc>
+              <a:spcAft>
+                <a:spcPts val="1200"/>
+              </a:spcAft>
+              <a:buSzPct val="100000"/>
+              <a:buChar char="●"/>
+            </a:pPr>
+            <a:r>
+              <a:rPr lang="en-US" sz="1500" dirty="0">
+                <a:solidFill>
+                  <a:srgbClr val="3A3A3A"/>
+                </a:solidFill>
+                <a:latin typeface="游ゴシック" pitchFamily="34" charset="0"/>
+                <a:ea typeface="游ゴシック" pitchFamily="34" charset="-122"/>
+                <a:cs typeface="游ゴシック" pitchFamily="34" charset="-120"/>
+              </a:rPr>
+              <a:t>他の相続ビジネスパーソンが「財産がある人」という狭いフロントを奪い合う一方、繋ぐグループは“生きる準備”を入口にすることで、競争相手のいない市場＝ブルーオーシャンを独自に切り拓いた</a:t>
+            </a:r>
+            <a:endParaRPr lang="en-US" sz="1500" dirty="0"/>
+          </a:p>
+        </p:txBody>
       </p:sp>
       <p:sp>
         <p:nvSpPr>
@@ -5059,895 +7111,16 @@
         </p:nvSpPr>
         <p:spPr>
           <a:xfrm>
-            <a:off x="5943600" y="2975443"/>
-            <a:ext cx="2263025" cy="1002197"/>
-          </a:xfrm>
-          <a:prstGeom prst="line">
-            <a:avLst/>
-          </a:prstGeom>
-          <a:noFill/>
-          <a:ln w="19050">
-            <a:solidFill>
-              <a:srgbClr val="C9C2B6"/>
-            </a:solidFill>
-            <a:prstDash val="sysDot"/>
-          </a:ln>
-        </p:spPr>
-      </p:sp>
-      <p:sp>
-        <p:nvSpPr>
-          <p:cNvPr id="6" name="Shape 4"/>
-          <p:cNvSpPr/>
-          <p:nvPr/>
-        </p:nvSpPr>
-        <p:spPr>
-          <a:xfrm>
-            <a:off x="5943600" y="3977640"/>
-            <a:ext cx="3200400" cy="9144"/>
-          </a:xfrm>
-          <a:prstGeom prst="line">
-            <a:avLst/>
-          </a:prstGeom>
-          <a:noFill/>
-          <a:ln w="19050">
-            <a:solidFill>
-              <a:srgbClr val="C9C2B6"/>
-            </a:solidFill>
-            <a:prstDash val="sysDot"/>
-          </a:ln>
-        </p:spPr>
-      </p:sp>
-      <p:sp>
-        <p:nvSpPr>
-          <p:cNvPr id="7" name="Shape 5"/>
-          <p:cNvSpPr/>
-          <p:nvPr/>
-        </p:nvSpPr>
-        <p:spPr>
-          <a:xfrm>
-            <a:off x="5943600" y="3977640"/>
-            <a:ext cx="2263025" cy="1002197"/>
-          </a:xfrm>
-          <a:prstGeom prst="line">
-            <a:avLst/>
-          </a:prstGeom>
-          <a:noFill/>
-          <a:ln w="19050">
-            <a:solidFill>
-              <a:srgbClr val="C9C2B6"/>
-            </a:solidFill>
-            <a:prstDash val="sysDot"/>
-          </a:ln>
-        </p:spPr>
-      </p:sp>
-      <p:sp>
-        <p:nvSpPr>
-          <p:cNvPr id="8" name="Shape 6"/>
-          <p:cNvSpPr/>
-          <p:nvPr/>
-        </p:nvSpPr>
-        <p:spPr>
-          <a:xfrm>
-            <a:off x="5943600" y="3977640"/>
-            <a:ext cx="9144" cy="1417320"/>
-          </a:xfrm>
-          <a:prstGeom prst="line">
-            <a:avLst/>
-          </a:prstGeom>
-          <a:noFill/>
-          <a:ln w="19050">
-            <a:solidFill>
-              <a:srgbClr val="C9C2B6"/>
-            </a:solidFill>
-            <a:prstDash val="sysDot"/>
-          </a:ln>
-        </p:spPr>
-      </p:sp>
-      <p:sp>
-        <p:nvSpPr>
-          <p:cNvPr id="9" name="Shape 7"/>
-          <p:cNvSpPr/>
-          <p:nvPr/>
-        </p:nvSpPr>
-        <p:spPr>
-          <a:xfrm>
-            <a:off x="3680575" y="3977640"/>
-            <a:ext cx="2263025" cy="1002197"/>
-          </a:xfrm>
-          <a:prstGeom prst="line">
-            <a:avLst/>
-          </a:prstGeom>
-          <a:noFill/>
-          <a:ln w="19050">
-            <a:solidFill>
-              <a:srgbClr val="C9C2B6"/>
-            </a:solidFill>
-            <a:prstDash val="sysDot"/>
-          </a:ln>
-        </p:spPr>
-      </p:sp>
-      <p:sp>
-        <p:nvSpPr>
-          <p:cNvPr id="10" name="Shape 8"/>
-          <p:cNvSpPr/>
-          <p:nvPr/>
-        </p:nvSpPr>
-        <p:spPr>
-          <a:xfrm>
-            <a:off x="2743200" y="3977640"/>
-            <a:ext cx="3200400" cy="9144"/>
-          </a:xfrm>
-          <a:prstGeom prst="line">
-            <a:avLst/>
-          </a:prstGeom>
-          <a:noFill/>
-          <a:ln w="19050">
-            <a:solidFill>
-              <a:srgbClr val="C9C2B6"/>
-            </a:solidFill>
-            <a:prstDash val="sysDot"/>
-          </a:ln>
-        </p:spPr>
-      </p:sp>
-      <p:sp>
-        <p:nvSpPr>
-          <p:cNvPr id="11" name="Shape 9"/>
-          <p:cNvSpPr/>
-          <p:nvPr/>
-        </p:nvSpPr>
-        <p:spPr>
-          <a:xfrm>
-            <a:off x="3680575" y="2975443"/>
-            <a:ext cx="2263025" cy="1002197"/>
-          </a:xfrm>
-          <a:prstGeom prst="line">
-            <a:avLst/>
-          </a:prstGeom>
-          <a:noFill/>
-          <a:ln w="19050">
-            <a:solidFill>
-              <a:srgbClr val="C9C2B6"/>
-            </a:solidFill>
-            <a:prstDash val="sysDot"/>
-          </a:ln>
-        </p:spPr>
-      </p:sp>
-      <p:sp>
-        <p:nvSpPr>
-          <p:cNvPr id="12" name="Shape 10"/>
-          <p:cNvSpPr/>
-          <p:nvPr/>
-        </p:nvSpPr>
-        <p:spPr>
-          <a:xfrm>
-            <a:off x="5052060" y="1668780"/>
-            <a:ext cx="1783080" cy="1783080"/>
-          </a:xfrm>
-          <a:prstGeom prst="ellipse">
-            <a:avLst/>
+            <a:off x="640080" y="4343400"/>
+            <a:ext cx="5257800" cy="1783080"/>
+          </a:xfrm>
+          <a:prstGeom prst="roundRect">
+            <a:avLst>
+              <a:gd name="adj" fmla="val 5128"/>
+            </a:avLst>
           </a:prstGeom>
           <a:solidFill>
             <a:srgbClr val="1E3A5F"/>
-          </a:solidFill>
-          <a:ln/>
-        </p:spPr>
-      </p:sp>
-      <p:sp>
-        <p:nvSpPr>
-          <p:cNvPr id="13" name="Text 11"/>
-          <p:cNvSpPr txBox="1"/>
-          <p:nvPr/>
-        </p:nvSpPr>
-        <p:spPr>
-          <a:xfrm>
-            <a:off x="4732020" y="1668780"/>
-            <a:ext cx="2423160" cy="1783080"/>
-          </a:xfrm>
-          <a:prstGeom prst="rect">
-            <a:avLst/>
-          </a:prstGeom>
-          <a:noFill/>
-          <a:ln/>
-        </p:spPr>
-        <p:txBody>
-          <a:bodyPr wrap="square" lIns="0" tIns="0" rIns="0" bIns="0" rtlCol="0" anchor="ctr"/>
-          <a:lstStyle/>
-          <a:p>
-            <a:pPr algn="ctr" indent="0" marL="0">
-              <a:buNone/>
-            </a:pPr>
-            <a:r>
-              <a:rPr lang="en-US" sz="1050" b="1" dirty="0">
-                <a:solidFill>
-                  <a:srgbClr val="FFFFFF"/>
-                </a:solidFill>
-                <a:latin typeface="游ゴシック" pitchFamily="34" charset="0"/>
-                <a:ea typeface="游ゴシック" pitchFamily="34" charset="-122"/>
-                <a:cs typeface="游ゴシック" pitchFamily="34" charset="-120"/>
-              </a:rPr>
-              <a:t>金融</a:t>
-            </a:r>
-            <a:endParaRPr lang="en-US" sz="1050" dirty="0"/>
-          </a:p>
-          <a:p>
-            <a:pPr algn="ctr" indent="0" marL="0">
-              <a:buNone/>
-            </a:pPr>
-            <a:r>
-              <a:rPr lang="en-US" sz="1050" b="1" dirty="0">
-                <a:solidFill>
-                  <a:srgbClr val="FFFFFF"/>
-                </a:solidFill>
-                <a:latin typeface="游ゴシック" pitchFamily="34" charset="0"/>
-                <a:ea typeface="游ゴシック" pitchFamily="34" charset="-122"/>
-                <a:cs typeface="游ゴシック" pitchFamily="34" charset="-120"/>
-              </a:rPr>
-              <a:t>50億円</a:t>
-            </a:r>
-            <a:endParaRPr lang="en-US" sz="1050" dirty="0"/>
-          </a:p>
-        </p:txBody>
-      </p:sp>
-      <p:sp>
-        <p:nvSpPr>
-          <p:cNvPr id="14" name="Shape 12"/>
-          <p:cNvSpPr/>
-          <p:nvPr/>
-        </p:nvSpPr>
-        <p:spPr>
-          <a:xfrm>
-            <a:off x="7406525" y="2175343"/>
-            <a:ext cx="1600200" cy="1600200"/>
-          </a:xfrm>
-          <a:prstGeom prst="ellipse">
-            <a:avLst/>
-          </a:prstGeom>
-          <a:solidFill>
-            <a:srgbClr val="1E3A5F"/>
-          </a:solidFill>
-          <a:ln/>
-        </p:spPr>
-      </p:sp>
-      <p:sp>
-        <p:nvSpPr>
-          <p:cNvPr id="15" name="Text 13"/>
-          <p:cNvSpPr txBox="1"/>
-          <p:nvPr/>
-        </p:nvSpPr>
-        <p:spPr>
-          <a:xfrm>
-            <a:off x="7086485" y="2175343"/>
-            <a:ext cx="2240280" cy="1600200"/>
-          </a:xfrm>
-          <a:prstGeom prst="rect">
-            <a:avLst/>
-          </a:prstGeom>
-          <a:noFill/>
-          <a:ln/>
-        </p:spPr>
-        <p:txBody>
-          <a:bodyPr wrap="square" lIns="0" tIns="0" rIns="0" bIns="0" rtlCol="0" anchor="ctr"/>
-          <a:lstStyle/>
-          <a:p>
-            <a:pPr algn="ctr" indent="0" marL="0">
-              <a:buNone/>
-            </a:pPr>
-            <a:r>
-              <a:rPr lang="en-US" sz="1050" b="1" dirty="0">
-                <a:solidFill>
-                  <a:srgbClr val="FFFFFF"/>
-                </a:solidFill>
-                <a:latin typeface="游ゴシック" pitchFamily="34" charset="0"/>
-                <a:ea typeface="游ゴシック" pitchFamily="34" charset="-122"/>
-                <a:cs typeface="游ゴシック" pitchFamily="34" charset="-120"/>
-              </a:rPr>
-              <a:t>不動産</a:t>
-            </a:r>
-            <a:endParaRPr lang="en-US" sz="1050" dirty="0"/>
-          </a:p>
-          <a:p>
-            <a:pPr algn="ctr" indent="0" marL="0">
-              <a:buNone/>
-            </a:pPr>
-            <a:r>
-              <a:rPr lang="en-US" sz="1050" b="1" dirty="0">
-                <a:solidFill>
-                  <a:srgbClr val="FFFFFF"/>
-                </a:solidFill>
-                <a:latin typeface="游ゴシック" pitchFamily="34" charset="0"/>
-                <a:ea typeface="游ゴシック" pitchFamily="34" charset="-122"/>
-                <a:cs typeface="游ゴシック" pitchFamily="34" charset="-120"/>
-              </a:rPr>
-              <a:t>30億円</a:t>
-            </a:r>
-            <a:endParaRPr lang="en-US" sz="1050" dirty="0"/>
-          </a:p>
-        </p:txBody>
-      </p:sp>
-      <p:sp>
-        <p:nvSpPr>
-          <p:cNvPr id="16" name="Shape 14"/>
-          <p:cNvSpPr/>
-          <p:nvPr/>
-        </p:nvSpPr>
-        <p:spPr>
-          <a:xfrm>
-            <a:off x="8549640" y="3383280"/>
-            <a:ext cx="1188720" cy="1188720"/>
-          </a:xfrm>
-          <a:prstGeom prst="ellipse">
-            <a:avLst/>
-          </a:prstGeom>
-          <a:solidFill>
-            <a:srgbClr val="1E3A5F"/>
-          </a:solidFill>
-          <a:ln/>
-        </p:spPr>
-      </p:sp>
-      <p:sp>
-        <p:nvSpPr>
-          <p:cNvPr id="17" name="Text 15"/>
-          <p:cNvSpPr txBox="1"/>
-          <p:nvPr/>
-        </p:nvSpPr>
-        <p:spPr>
-          <a:xfrm>
-            <a:off x="8229600" y="3383280"/>
-            <a:ext cx="1828800" cy="1188720"/>
-          </a:xfrm>
-          <a:prstGeom prst="rect">
-            <a:avLst/>
-          </a:prstGeom>
-          <a:noFill/>
-          <a:ln/>
-        </p:spPr>
-        <p:txBody>
-          <a:bodyPr wrap="square" lIns="0" tIns="0" rIns="0" bIns="0" rtlCol="0" anchor="ctr"/>
-          <a:lstStyle/>
-          <a:p>
-            <a:pPr algn="ctr" indent="0" marL="0">
-              <a:buNone/>
-            </a:pPr>
-            <a:r>
-              <a:rPr lang="en-US" sz="1050" b="1" dirty="0">
-                <a:solidFill>
-                  <a:srgbClr val="FFFFFF"/>
-                </a:solidFill>
-                <a:latin typeface="游ゴシック" pitchFamily="34" charset="0"/>
-                <a:ea typeface="游ゴシック" pitchFamily="34" charset="-122"/>
-                <a:cs typeface="游ゴシック" pitchFamily="34" charset="-120"/>
-              </a:rPr>
-              <a:t>M&amp;A</a:t>
-            </a:r>
-            <a:endParaRPr lang="en-US" sz="1050" dirty="0"/>
-          </a:p>
-          <a:p>
-            <a:pPr algn="ctr" indent="0" marL="0">
-              <a:buNone/>
-            </a:pPr>
-            <a:r>
-              <a:rPr lang="en-US" sz="1050" b="1" dirty="0">
-                <a:solidFill>
-                  <a:srgbClr val="FFFFFF"/>
-                </a:solidFill>
-                <a:latin typeface="游ゴシック" pitchFamily="34" charset="0"/>
-                <a:ea typeface="游ゴシック" pitchFamily="34" charset="-122"/>
-                <a:cs typeface="游ゴシック" pitchFamily="34" charset="-120"/>
-              </a:rPr>
-              <a:t>5億円</a:t>
-            </a:r>
-            <a:endParaRPr lang="en-US" sz="1050" dirty="0"/>
-          </a:p>
-        </p:txBody>
-      </p:sp>
-      <p:sp>
-        <p:nvSpPr>
-          <p:cNvPr id="18" name="Shape 16"/>
-          <p:cNvSpPr/>
-          <p:nvPr/>
-        </p:nvSpPr>
-        <p:spPr>
-          <a:xfrm>
-            <a:off x="7566545" y="4339757"/>
-            <a:ext cx="1280160" cy="1280160"/>
-          </a:xfrm>
-          <a:prstGeom prst="ellipse">
-            <a:avLst/>
-          </a:prstGeom>
-          <a:solidFill>
-            <a:srgbClr val="1E3A5F"/>
-          </a:solidFill>
-          <a:ln/>
-        </p:spPr>
-      </p:sp>
-      <p:sp>
-        <p:nvSpPr>
-          <p:cNvPr id="19" name="Text 17"/>
-          <p:cNvSpPr txBox="1"/>
-          <p:nvPr/>
-        </p:nvSpPr>
-        <p:spPr>
-          <a:xfrm>
-            <a:off x="7246505" y="4339757"/>
-            <a:ext cx="1920240" cy="1280160"/>
-          </a:xfrm>
-          <a:prstGeom prst="rect">
-            <a:avLst/>
-          </a:prstGeom>
-          <a:noFill/>
-          <a:ln/>
-        </p:spPr>
-        <p:txBody>
-          <a:bodyPr wrap="square" lIns="0" tIns="0" rIns="0" bIns="0" rtlCol="0" anchor="ctr"/>
-          <a:lstStyle/>
-          <a:p>
-            <a:pPr algn="ctr" indent="0" marL="0">
-              <a:buNone/>
-            </a:pPr>
-            <a:r>
-              <a:rPr lang="en-US" sz="1050" b="1" dirty="0">
-                <a:solidFill>
-                  <a:srgbClr val="FFFFFF"/>
-                </a:solidFill>
-                <a:latin typeface="游ゴシック" pitchFamily="34" charset="0"/>
-                <a:ea typeface="游ゴシック" pitchFamily="34" charset="-122"/>
-                <a:cs typeface="游ゴシック" pitchFamily="34" charset="-120"/>
-              </a:rPr>
-              <a:t>その他</a:t>
-            </a:r>
-            <a:endParaRPr lang="en-US" sz="1050" dirty="0"/>
-          </a:p>
-          <a:p>
-            <a:pPr algn="ctr" indent="0" marL="0">
-              <a:buNone/>
-            </a:pPr>
-            <a:r>
-              <a:rPr lang="en-US" sz="1050" b="1" dirty="0">
-                <a:solidFill>
-                  <a:srgbClr val="FFFFFF"/>
-                </a:solidFill>
-                <a:latin typeface="游ゴシック" pitchFamily="34" charset="0"/>
-                <a:ea typeface="游ゴシック" pitchFamily="34" charset="-122"/>
-                <a:cs typeface="游ゴシック" pitchFamily="34" charset="-120"/>
-              </a:rPr>
-              <a:t>7億円</a:t>
-            </a:r>
-            <a:endParaRPr lang="en-US" sz="1050" dirty="0"/>
-          </a:p>
-        </p:txBody>
-      </p:sp>
-      <p:sp>
-        <p:nvSpPr>
-          <p:cNvPr id="20" name="Shape 18"/>
-          <p:cNvSpPr/>
-          <p:nvPr/>
-        </p:nvSpPr>
-        <p:spPr>
-          <a:xfrm>
-            <a:off x="5372100" y="4823460"/>
-            <a:ext cx="1143000" cy="1143000"/>
-          </a:xfrm>
-          <a:prstGeom prst="ellipse">
-            <a:avLst/>
-          </a:prstGeom>
-          <a:solidFill>
-            <a:srgbClr val="1E3A5F"/>
-          </a:solidFill>
-          <a:ln/>
-        </p:spPr>
-      </p:sp>
-      <p:sp>
-        <p:nvSpPr>
-          <p:cNvPr id="21" name="Text 19"/>
-          <p:cNvSpPr txBox="1"/>
-          <p:nvPr/>
-        </p:nvSpPr>
-        <p:spPr>
-          <a:xfrm>
-            <a:off x="5052060" y="4823460"/>
-            <a:ext cx="1783080" cy="1143000"/>
-          </a:xfrm>
-          <a:prstGeom prst="rect">
-            <a:avLst/>
-          </a:prstGeom>
-          <a:noFill/>
-          <a:ln/>
-        </p:spPr>
-        <p:txBody>
-          <a:bodyPr wrap="square" lIns="0" tIns="0" rIns="0" bIns="0" rtlCol="0" anchor="ctr"/>
-          <a:lstStyle/>
-          <a:p>
-            <a:pPr algn="ctr" indent="0" marL="0">
-              <a:buNone/>
-            </a:pPr>
-            <a:r>
-              <a:rPr lang="en-US" sz="1050" b="1" dirty="0">
-                <a:solidFill>
-                  <a:srgbClr val="FFFFFF"/>
-                </a:solidFill>
-                <a:latin typeface="游ゴシック" pitchFamily="34" charset="0"/>
-                <a:ea typeface="游ゴシック" pitchFamily="34" charset="-122"/>
-                <a:cs typeface="游ゴシック" pitchFamily="34" charset="-120"/>
-              </a:rPr>
-              <a:t>有料老人</a:t>
-            </a:r>
-            <a:endParaRPr lang="en-US" sz="1050" dirty="0"/>
-          </a:p>
-          <a:p>
-            <a:pPr algn="ctr" indent="0" marL="0">
-              <a:buNone/>
-            </a:pPr>
-            <a:r>
-              <a:rPr lang="en-US" sz="1050" b="1" dirty="0">
-                <a:solidFill>
-                  <a:srgbClr val="FFFFFF"/>
-                </a:solidFill>
-                <a:latin typeface="游ゴシック" pitchFamily="34" charset="0"/>
-                <a:ea typeface="游ゴシック" pitchFamily="34" charset="-122"/>
-                <a:cs typeface="游ゴシック" pitchFamily="34" charset="-120"/>
-              </a:rPr>
-              <a:t>ホーム</a:t>
-            </a:r>
-            <a:endParaRPr lang="en-US" sz="1050" dirty="0"/>
-          </a:p>
-          <a:p>
-            <a:pPr algn="ctr" indent="0" marL="0">
-              <a:buNone/>
-            </a:pPr>
-            <a:r>
-              <a:rPr lang="en-US" sz="1050" b="1" dirty="0">
-                <a:solidFill>
-                  <a:srgbClr val="FFFFFF"/>
-                </a:solidFill>
-                <a:latin typeface="游ゴシック" pitchFamily="34" charset="0"/>
-                <a:ea typeface="游ゴシック" pitchFamily="34" charset="-122"/>
-                <a:cs typeface="游ゴシック" pitchFamily="34" charset="-120"/>
-              </a:rPr>
-              <a:t>3億円</a:t>
-            </a:r>
-            <a:endParaRPr lang="en-US" sz="1050" dirty="0"/>
-          </a:p>
-        </p:txBody>
-      </p:sp>
-      <p:sp>
-        <p:nvSpPr>
-          <p:cNvPr id="22" name="Shape 20"/>
-          <p:cNvSpPr/>
-          <p:nvPr/>
-        </p:nvSpPr>
-        <p:spPr>
-          <a:xfrm>
-            <a:off x="3200515" y="4499777"/>
-            <a:ext cx="960120" cy="960120"/>
-          </a:xfrm>
-          <a:prstGeom prst="ellipse">
-            <a:avLst/>
-          </a:prstGeom>
-          <a:solidFill>
-            <a:srgbClr val="1E3A5F"/>
-          </a:solidFill>
-          <a:ln/>
-        </p:spPr>
-      </p:sp>
-      <p:sp>
-        <p:nvSpPr>
-          <p:cNvPr id="23" name="Text 21"/>
-          <p:cNvSpPr txBox="1"/>
-          <p:nvPr/>
-        </p:nvSpPr>
-        <p:spPr>
-          <a:xfrm>
-            <a:off x="2880475" y="4499777"/>
-            <a:ext cx="1600200" cy="960120"/>
-          </a:xfrm>
-          <a:prstGeom prst="rect">
-            <a:avLst/>
-          </a:prstGeom>
-          <a:noFill/>
-          <a:ln/>
-        </p:spPr>
-        <p:txBody>
-          <a:bodyPr wrap="square" lIns="0" tIns="0" rIns="0" bIns="0" rtlCol="0" anchor="ctr"/>
-          <a:lstStyle/>
-          <a:p>
-            <a:pPr algn="ctr" indent="0" marL="0">
-              <a:buNone/>
-            </a:pPr>
-            <a:r>
-              <a:rPr lang="en-US" sz="1050" b="1" dirty="0">
-                <a:solidFill>
-                  <a:srgbClr val="FFFFFF"/>
-                </a:solidFill>
-                <a:latin typeface="游ゴシック" pitchFamily="34" charset="0"/>
-                <a:ea typeface="游ゴシック" pitchFamily="34" charset="-122"/>
-                <a:cs typeface="游ゴシック" pitchFamily="34" charset="-120"/>
-              </a:rPr>
-              <a:t>弁護士</a:t>
-            </a:r>
-            <a:endParaRPr lang="en-US" sz="1050" dirty="0"/>
-          </a:p>
-          <a:p>
-            <a:pPr algn="ctr" indent="0" marL="0">
-              <a:buNone/>
-            </a:pPr>
-            <a:r>
-              <a:rPr lang="en-US" sz="1050" b="1" dirty="0">
-                <a:solidFill>
-                  <a:srgbClr val="FFFFFF"/>
-                </a:solidFill>
-                <a:latin typeface="游ゴシック" pitchFamily="34" charset="0"/>
-                <a:ea typeface="游ゴシック" pitchFamily="34" charset="-122"/>
-                <a:cs typeface="游ゴシック" pitchFamily="34" charset="-120"/>
-              </a:rPr>
-              <a:t>1億円</a:t>
-            </a:r>
-            <a:endParaRPr lang="en-US" sz="1050" dirty="0"/>
-          </a:p>
-        </p:txBody>
-      </p:sp>
-      <p:sp>
-        <p:nvSpPr>
-          <p:cNvPr id="24" name="Shape 22"/>
-          <p:cNvSpPr/>
-          <p:nvPr/>
-        </p:nvSpPr>
-        <p:spPr>
-          <a:xfrm>
-            <a:off x="2217420" y="3451860"/>
-            <a:ext cx="1051560" cy="1051560"/>
-          </a:xfrm>
-          <a:prstGeom prst="ellipse">
-            <a:avLst/>
-          </a:prstGeom>
-          <a:solidFill>
-            <a:srgbClr val="1E3A5F"/>
-          </a:solidFill>
-          <a:ln/>
-        </p:spPr>
-      </p:sp>
-      <p:sp>
-        <p:nvSpPr>
-          <p:cNvPr id="25" name="Text 23"/>
-          <p:cNvSpPr txBox="1"/>
-          <p:nvPr/>
-        </p:nvSpPr>
-        <p:spPr>
-          <a:xfrm>
-            <a:off x="1897380" y="3451860"/>
-            <a:ext cx="1691640" cy="1051560"/>
-          </a:xfrm>
-          <a:prstGeom prst="rect">
-            <a:avLst/>
-          </a:prstGeom>
-          <a:noFill/>
-          <a:ln/>
-        </p:spPr>
-        <p:txBody>
-          <a:bodyPr wrap="square" lIns="0" tIns="0" rIns="0" bIns="0" rtlCol="0" anchor="ctr"/>
-          <a:lstStyle/>
-          <a:p>
-            <a:pPr algn="ctr" indent="0" marL="0">
-              <a:buNone/>
-            </a:pPr>
-            <a:r>
-              <a:rPr lang="en-US" sz="1050" b="1" dirty="0">
-                <a:solidFill>
-                  <a:srgbClr val="FFFFFF"/>
-                </a:solidFill>
-                <a:latin typeface="游ゴシック" pitchFamily="34" charset="0"/>
-                <a:ea typeface="游ゴシック" pitchFamily="34" charset="-122"/>
-                <a:cs typeface="游ゴシック" pitchFamily="34" charset="-120"/>
-              </a:rPr>
-              <a:t>司法書士・</a:t>
-            </a:r>
-            <a:endParaRPr lang="en-US" sz="1050" dirty="0"/>
-          </a:p>
-          <a:p>
-            <a:pPr algn="ctr" indent="0" marL="0">
-              <a:buNone/>
-            </a:pPr>
-            <a:r>
-              <a:rPr lang="en-US" sz="1050" b="1" dirty="0">
-                <a:solidFill>
-                  <a:srgbClr val="FFFFFF"/>
-                </a:solidFill>
-                <a:latin typeface="游ゴシック" pitchFamily="34" charset="0"/>
-                <a:ea typeface="游ゴシック" pitchFamily="34" charset="-122"/>
-                <a:cs typeface="游ゴシック" pitchFamily="34" charset="-120"/>
-              </a:rPr>
-              <a:t>行政書士</a:t>
-            </a:r>
-            <a:endParaRPr lang="en-US" sz="1050" dirty="0"/>
-          </a:p>
-          <a:p>
-            <a:pPr algn="ctr" indent="0" marL="0">
-              <a:buNone/>
-            </a:pPr>
-            <a:r>
-              <a:rPr lang="en-US" sz="1050" b="1" dirty="0">
-                <a:solidFill>
-                  <a:srgbClr val="FFFFFF"/>
-                </a:solidFill>
-                <a:latin typeface="游ゴシック" pitchFamily="34" charset="0"/>
-                <a:ea typeface="游ゴシック" pitchFamily="34" charset="-122"/>
-                <a:cs typeface="游ゴシック" pitchFamily="34" charset="-120"/>
-              </a:rPr>
-              <a:t>2億円</a:t>
-            </a:r>
-            <a:endParaRPr lang="en-US" sz="1050" dirty="0"/>
-          </a:p>
-        </p:txBody>
-      </p:sp>
-      <p:sp>
-        <p:nvSpPr>
-          <p:cNvPr id="26" name="Shape 24"/>
-          <p:cNvSpPr/>
-          <p:nvPr/>
-        </p:nvSpPr>
-        <p:spPr>
-          <a:xfrm>
-            <a:off x="3154795" y="2449663"/>
-            <a:ext cx="1051560" cy="1051560"/>
-          </a:xfrm>
-          <a:prstGeom prst="ellipse">
-            <a:avLst/>
-          </a:prstGeom>
-          <a:solidFill>
-            <a:srgbClr val="1E3A5F"/>
-          </a:solidFill>
-          <a:ln/>
-        </p:spPr>
-      </p:sp>
-      <p:sp>
-        <p:nvSpPr>
-          <p:cNvPr id="27" name="Text 25"/>
-          <p:cNvSpPr txBox="1"/>
-          <p:nvPr/>
-        </p:nvSpPr>
-        <p:spPr>
-          <a:xfrm>
-            <a:off x="2834755" y="2449663"/>
-            <a:ext cx="1691640" cy="1051560"/>
-          </a:xfrm>
-          <a:prstGeom prst="rect">
-            <a:avLst/>
-          </a:prstGeom>
-          <a:noFill/>
-          <a:ln/>
-        </p:spPr>
-        <p:txBody>
-          <a:bodyPr wrap="square" lIns="0" tIns="0" rIns="0" bIns="0" rtlCol="0" anchor="ctr"/>
-          <a:lstStyle/>
-          <a:p>
-            <a:pPr algn="ctr" indent="0" marL="0">
-              <a:buNone/>
-            </a:pPr>
-            <a:r>
-              <a:rPr lang="en-US" sz="1050" b="1" dirty="0">
-                <a:solidFill>
-                  <a:srgbClr val="FFFFFF"/>
-                </a:solidFill>
-                <a:latin typeface="游ゴシック" pitchFamily="34" charset="0"/>
-                <a:ea typeface="游ゴシック" pitchFamily="34" charset="-122"/>
-                <a:cs typeface="游ゴシック" pitchFamily="34" charset="-120"/>
-              </a:rPr>
-              <a:t>税理士</a:t>
-            </a:r>
-            <a:endParaRPr lang="en-US" sz="1050" dirty="0"/>
-          </a:p>
-          <a:p>
-            <a:pPr algn="ctr" indent="0" marL="0">
-              <a:buNone/>
-            </a:pPr>
-            <a:r>
-              <a:rPr lang="en-US" sz="1050" b="1" dirty="0">
-                <a:solidFill>
-                  <a:srgbClr val="FFFFFF"/>
-                </a:solidFill>
-                <a:latin typeface="游ゴシック" pitchFamily="34" charset="0"/>
-                <a:ea typeface="游ゴシック" pitchFamily="34" charset="-122"/>
-                <a:cs typeface="游ゴシック" pitchFamily="34" charset="-120"/>
-              </a:rPr>
-              <a:t>2億円</a:t>
-            </a:r>
-            <a:endParaRPr lang="en-US" sz="1050" dirty="0"/>
-          </a:p>
-        </p:txBody>
-      </p:sp>
-      <p:sp>
-        <p:nvSpPr>
-          <p:cNvPr id="28" name="Shape 26"/>
-          <p:cNvSpPr/>
-          <p:nvPr/>
-        </p:nvSpPr>
-        <p:spPr>
-          <a:xfrm>
-            <a:off x="5097780" y="3131820"/>
-            <a:ext cx="1691640" cy="1691640"/>
-          </a:xfrm>
-          <a:prstGeom prst="ellipse">
-            <a:avLst/>
-          </a:prstGeom>
-          <a:solidFill>
-            <a:srgbClr val="C9603F"/>
-          </a:solidFill>
-          <a:ln/>
-        </p:spPr>
-      </p:sp>
-      <p:sp>
-        <p:nvSpPr>
-          <p:cNvPr id="29" name="Text 27"/>
-          <p:cNvSpPr txBox="1"/>
-          <p:nvPr/>
-        </p:nvSpPr>
-        <p:spPr>
-          <a:xfrm>
-            <a:off x="4777740" y="3131820"/>
-            <a:ext cx="2331720" cy="1691640"/>
-          </a:xfrm>
-          <a:prstGeom prst="rect">
-            <a:avLst/>
-          </a:prstGeom>
-          <a:noFill/>
-          <a:ln/>
-        </p:spPr>
-        <p:txBody>
-          <a:bodyPr wrap="square" lIns="0" tIns="0" rIns="0" bIns="0" rtlCol="0" anchor="ctr"/>
-          <a:lstStyle/>
-          <a:p>
-            <a:pPr algn="ctr" indent="0" marL="0">
-              <a:buNone/>
-            </a:pPr>
-            <a:r>
-              <a:rPr lang="en-US" sz="1300" b="1" dirty="0">
-                <a:solidFill>
-                  <a:srgbClr val="FFFFFF"/>
-                </a:solidFill>
-                <a:latin typeface="游ゴシック" pitchFamily="34" charset="0"/>
-                <a:ea typeface="游ゴシック" pitchFamily="34" charset="-122"/>
-                <a:cs typeface="游ゴシック" pitchFamily="34" charset="-120"/>
-              </a:rPr>
-              <a:t>繋ぐグループ</a:t>
-            </a:r>
-            <a:endParaRPr lang="en-US" sz="1300" dirty="0"/>
-          </a:p>
-          <a:p>
-            <a:pPr algn="ctr" indent="0" marL="0">
-              <a:buNone/>
-            </a:pPr>
-            <a:r>
-              <a:rPr lang="en-US" sz="1300" b="1" dirty="0">
-                <a:solidFill>
-                  <a:srgbClr val="FFFFFF"/>
-                </a:solidFill>
-                <a:latin typeface="游ゴシック" pitchFamily="34" charset="0"/>
-                <a:ea typeface="游ゴシック" pitchFamily="34" charset="-122"/>
-                <a:cs typeface="游ゴシック" pitchFamily="34" charset="-120"/>
-              </a:rPr>
-              <a:t>（hub）</a:t>
-            </a:r>
-            <a:endParaRPr lang="en-US" sz="1300" dirty="0"/>
-          </a:p>
-        </p:txBody>
-      </p:sp>
-      <p:sp>
-        <p:nvSpPr>
-          <p:cNvPr id="30" name="Shape 28"/>
-          <p:cNvSpPr/>
-          <p:nvPr/>
-        </p:nvSpPr>
-        <p:spPr>
-          <a:xfrm>
-            <a:off x="9464040" y="1783080"/>
-            <a:ext cx="2103120" cy="1051560"/>
-          </a:xfrm>
-          <a:prstGeom prst="roundRect">
-            <a:avLst>
-              <a:gd name="adj" fmla="val 8696"/>
-            </a:avLst>
-          </a:prstGeom>
-          <a:solidFill>
-            <a:srgbClr val="10233A"/>
           </a:solidFill>
           <a:ln/>
           <a:effectLst>
@@ -5961,14 +7134,14 @@
       </p:sp>
       <p:sp>
         <p:nvSpPr>
-          <p:cNvPr id="31" name="Text 29"/>
-          <p:cNvSpPr txBox="1"/>
-          <p:nvPr/>
-        </p:nvSpPr>
-        <p:spPr>
-          <a:xfrm>
-            <a:off x="9646920" y="1901952"/>
-            <a:ext cx="1737360" cy="274320"/>
+          <p:cNvPr id="6" name="Text 4"/>
+          <p:cNvSpPr txBox="1"/>
+          <p:nvPr/>
+        </p:nvSpPr>
+        <p:spPr>
+          <a:xfrm>
+            <a:off x="914400" y="4544568"/>
+            <a:ext cx="4709160" cy="411480"/>
           </a:xfrm>
           <a:prstGeom prst="rect">
             <a:avLst/>
@@ -5984,7 +7157,7 @@
               <a:buNone/>
             </a:pPr>
             <a:r>
-              <a:rPr lang="en-US" sz="1100" dirty="0">
+              <a:rPr lang="en-US" sz="1700" b="1" dirty="0">
                 <a:solidFill>
                   <a:srgbClr val="F1DCCF"/>
                 </a:solidFill>
@@ -5992,38 +7165,109 @@
                 <a:ea typeface="游ゴシック" pitchFamily="34" charset="-122"/>
                 <a:cs typeface="游ゴシック" pitchFamily="34" charset="-120"/>
               </a:rPr>
-              <a:t>想定合計</a:t>
-            </a:r>
-            <a:endParaRPr lang="en-US" sz="1100" dirty="0"/>
-          </a:p>
-        </p:txBody>
-      </p:sp>
-      <p:sp>
-        <p:nvSpPr>
-          <p:cNvPr id="32" name="Text 30"/>
-          <p:cNvSpPr txBox="1"/>
-          <p:nvPr/>
-        </p:nvSpPr>
-        <p:spPr>
-          <a:xfrm>
-            <a:off x="9646920" y="2176272"/>
-            <a:ext cx="1737360" cy="548640"/>
-          </a:xfrm>
-          <a:prstGeom prst="rect">
-            <a:avLst/>
-          </a:prstGeom>
-          <a:noFill/>
-          <a:ln/>
-        </p:spPr>
-        <p:txBody>
-          <a:bodyPr wrap="square" lIns="0" tIns="0" rIns="0" bIns="0" rtlCol="0" anchor="ctr"/>
+              <a:t>レッドオーシャン</a:t>
+            </a:r>
+            <a:endParaRPr lang="en-US" sz="1700" dirty="0"/>
+          </a:p>
+        </p:txBody>
+      </p:sp>
+      <p:sp>
+        <p:nvSpPr>
+          <p:cNvPr id="7" name="Text 5"/>
+          <p:cNvSpPr txBox="1"/>
+          <p:nvPr/>
+        </p:nvSpPr>
+        <p:spPr>
+          <a:xfrm>
+            <a:off x="914400" y="5001768"/>
+            <a:ext cx="4709160" cy="1005840"/>
+          </a:xfrm>
+          <a:prstGeom prst="rect">
+            <a:avLst/>
+          </a:prstGeom>
+          <a:noFill/>
+          <a:ln/>
+        </p:spPr>
+        <p:txBody>
+          <a:bodyPr wrap="square" lIns="0" tIns="0" rIns="0" bIns="0" rtlCol="0" anchor="t"/>
           <a:lstStyle/>
           <a:p>
             <a:pPr indent="0" marL="0">
-              <a:buNone/>
-            </a:pPr>
-            <a:r>
-              <a:rPr lang="en-US" sz="2400" b="1" dirty="0">
+              <a:lnSpc>
+                <a:spcPct val="130000"/>
+              </a:lnSpc>
+              <a:buNone/>
+            </a:pPr>
+            <a:r>
+              <a:rPr lang="en-US" sz="1300" dirty="0">
+                <a:solidFill>
+                  <a:srgbClr val="DCE3EC"/>
+                </a:solidFill>
+                <a:latin typeface="游ゴシック" pitchFamily="34" charset="0"/>
+                <a:ea typeface="游ゴシック" pitchFamily="34" charset="-122"/>
+                <a:cs typeface="游ゴシック" pitchFamily="34" charset="-120"/>
+              </a:rPr>
+              <a:t>財産を巡る競争 ― 節税・遺産分割・保険など、“商品”を軸にした相続ビジネスパーソン同士の奪い合い</a:t>
+            </a:r>
+            <a:endParaRPr lang="en-US" sz="1300" dirty="0"/>
+          </a:p>
+        </p:txBody>
+      </p:sp>
+      <p:sp>
+        <p:nvSpPr>
+          <p:cNvPr id="8" name="Shape 6"/>
+          <p:cNvSpPr/>
+          <p:nvPr/>
+        </p:nvSpPr>
+        <p:spPr>
+          <a:xfrm>
+            <a:off x="6263640" y="4343400"/>
+            <a:ext cx="5257800" cy="1783080"/>
+          </a:xfrm>
+          <a:prstGeom prst="roundRect">
+            <a:avLst>
+              <a:gd name="adj" fmla="val 5128"/>
+            </a:avLst>
+          </a:prstGeom>
+          <a:solidFill>
+            <a:srgbClr val="C9603F"/>
+          </a:solidFill>
+          <a:ln/>
+          <a:effectLst>
+            <a:outerShdw sx="100000" sy="100000" kx="0" ky="0" algn="bl" rotWithShape="0" blurRad="101600" dist="38100" dir="5400000">
+              <a:srgbClr val="10233A">
+                <a:alpha val="18000"/>
+              </a:srgbClr>
+            </a:outerShdw>
+          </a:effectLst>
+        </p:spPr>
+      </p:sp>
+      <p:sp>
+        <p:nvSpPr>
+          <p:cNvPr id="9" name="Text 7"/>
+          <p:cNvSpPr txBox="1"/>
+          <p:nvPr/>
+        </p:nvSpPr>
+        <p:spPr>
+          <a:xfrm>
+            <a:off x="6537960" y="4544568"/>
+            <a:ext cx="4709160" cy="411480"/>
+          </a:xfrm>
+          <a:prstGeom prst="rect">
+            <a:avLst/>
+          </a:prstGeom>
+          <a:noFill/>
+          <a:ln/>
+        </p:spPr>
+        <p:txBody>
+          <a:bodyPr wrap="square" lIns="0" tIns="0" rIns="0" bIns="0" rtlCol="0" anchor="ctr"/>
+          <a:lstStyle/>
+          <a:p>
+            <a:pPr indent="0" marL="0">
+              <a:buNone/>
+            </a:pPr>
+            <a:r>
+              <a:rPr lang="en-US" sz="1700" b="1" dirty="0">
                 <a:solidFill>
                   <a:srgbClr val="FFFFFF"/>
                 </a:solidFill>
@@ -6031,54 +7275,57 @@
                 <a:ea typeface="游ゴシック" pitchFamily="34" charset="-122"/>
                 <a:cs typeface="游ゴシック" pitchFamily="34" charset="-120"/>
               </a:rPr>
-              <a:t>約100億円</a:t>
-            </a:r>
-            <a:endParaRPr lang="en-US" sz="2400" dirty="0"/>
-          </a:p>
-        </p:txBody>
-      </p:sp>
-      <p:sp>
-        <p:nvSpPr>
-          <p:cNvPr id="33" name="Text 31"/>
-          <p:cNvSpPr txBox="1"/>
-          <p:nvPr/>
-        </p:nvSpPr>
-        <p:spPr>
-          <a:xfrm>
-            <a:off x="640080" y="6263640"/>
-            <a:ext cx="10881360" cy="320040"/>
-          </a:xfrm>
-          <a:prstGeom prst="rect">
-            <a:avLst/>
-          </a:prstGeom>
-          <a:noFill/>
-          <a:ln/>
-        </p:spPr>
-        <p:txBody>
-          <a:bodyPr wrap="square" lIns="0" tIns="0" rIns="0" bIns="0" rtlCol="0" anchor="ctr"/>
+              <a:t>ブルーオーシャン</a:t>
+            </a:r>
+            <a:endParaRPr lang="en-US" sz="1700" dirty="0"/>
+          </a:p>
+        </p:txBody>
+      </p:sp>
+      <p:sp>
+        <p:nvSpPr>
+          <p:cNvPr id="10" name="Text 8"/>
+          <p:cNvSpPr txBox="1"/>
+          <p:nvPr/>
+        </p:nvSpPr>
+        <p:spPr>
+          <a:xfrm>
+            <a:off x="6537960" y="5001768"/>
+            <a:ext cx="4709160" cy="1005840"/>
+          </a:xfrm>
+          <a:prstGeom prst="rect">
+            <a:avLst/>
+          </a:prstGeom>
+          <a:noFill/>
+          <a:ln/>
+        </p:spPr>
+        <p:txBody>
+          <a:bodyPr wrap="square" lIns="0" tIns="0" rIns="0" bIns="0" rtlCol="0" anchor="t"/>
           <a:lstStyle/>
           <a:p>
             <a:pPr indent="0" marL="0">
-              <a:buNone/>
-            </a:pPr>
-            <a:r>
-              <a:rPr lang="en-US" sz="1050" i="1" dirty="0">
-                <a:solidFill>
-                  <a:srgbClr val="6B6B6B"/>
-                </a:solidFill>
-                <a:latin typeface="游ゴシック" pitchFamily="34" charset="0"/>
-                <a:ea typeface="游ゴシック" pitchFamily="34" charset="-122"/>
-                <a:cs typeface="游ゴシック" pitchFamily="34" charset="-120"/>
-              </a:rPr>
-              <a:t>金額は現時点の想定値。ファイナル資料で使う際は「概算」「エピソードとして」と位置づけ、根拠の精査を行う。</a:t>
-            </a:r>
-            <a:endParaRPr lang="en-US" sz="1050" dirty="0"/>
-          </a:p>
-        </p:txBody>
-      </p:sp>
-      <p:sp>
-        <p:nvSpPr>
-          <p:cNvPr id="34" name="Text 32"/>
+              <a:lnSpc>
+                <a:spcPct val="130000"/>
+              </a:lnSpc>
+              <a:buNone/>
+            </a:pPr>
+            <a:r>
+              <a:rPr lang="en-US" sz="1300" dirty="0">
+                <a:solidFill>
+                  <a:srgbClr val="FFFFFF"/>
+                </a:solidFill>
+                <a:latin typeface="游ゴシック" pitchFamily="34" charset="0"/>
+                <a:ea typeface="游ゴシック" pitchFamily="34" charset="-122"/>
+                <a:cs typeface="游ゴシック" pitchFamily="34" charset="-120"/>
+              </a:rPr>
+              <a:t>人生をプロデュースする市場 ― 「心置きなく生ききる人生のプロデュース」という、競合不在の独自領域</a:t>
+            </a:r>
+            <a:endParaRPr lang="en-US" sz="1300" dirty="0"/>
+          </a:p>
+        </p:txBody>
+      </p:sp>
+      <p:sp>
+        <p:nvSpPr>
+          <p:cNvPr id="11" name="Text 9"/>
           <p:cNvSpPr txBox="1"/>
           <p:nvPr/>
         </p:nvSpPr>
@@ -6180,7 +7427,7 @@
                 <a:ea typeface="游ゴシック" pitchFamily="34" charset="-122"/>
                 <a:cs typeface="游ゴシック" pitchFamily="34" charset="-120"/>
               </a:rPr>
-              <a:t>BREAKDOWN</a:t>
+              <a:t>OUR METHODOLOGY</a:t>
             </a:r>
             <a:endParaRPr lang="en-US" sz="1300" dirty="0"/>
           </a:p>
@@ -6219,46 +7466,191 @@
                 <a:ea typeface="游ゴシック" pitchFamily="34" charset="-122"/>
                 <a:cs typeface="游ゴシック" pitchFamily="34" charset="-120"/>
               </a:rPr>
-              <a:t>内訳ランキング ― 金融・不動産で全体の8割</a:t>
+              <a:t>「心置きなく生ききる人生のプロデュース」というメソッド</a:t>
             </a:r>
             <a:endParaRPr lang="en-US" sz="2700" dirty="0"/>
           </a:p>
         </p:txBody>
       </p:sp>
-      <p:graphicFrame>
-        <p:nvGraphicFramePr>
-          <p:cNvPr id="4" name="Chart 0" descr=""/>
-          <p:cNvGraphicFramePr/>
-          <p:nvPr/>
-        </p:nvGraphicFramePr>
-        <p:xfrm>
-          <a:off x="640080" y="1691640"/>
-          <a:ext cx="6675120" cy="4297680"/>
-        </p:xfrm>
-        <a:graphic xmlns:a="http://schemas.openxmlformats.org/drawingml/2006/main">
-          <a:graphicData uri="http://schemas.openxmlformats.org/drawingml/2006/chart">
-            <c:chart xmlns:c="http://schemas.openxmlformats.org/drawingml/2006/chart" r:id="rId1"/>
-          </a:graphicData>
-        </a:graphic>
-      </p:graphicFrame>
-      <p:sp>
-        <p:nvSpPr>
-          <p:cNvPr id="5" name="Shape 2"/>
+      <p:sp>
+        <p:nvSpPr>
+          <p:cNvPr id="4" name="Shape 2"/>
           <p:cNvSpPr/>
           <p:nvPr/>
         </p:nvSpPr>
         <p:spPr>
           <a:xfrm>
-            <a:off x="7635240" y="1783080"/>
-            <a:ext cx="3931920" cy="1828800"/>
+            <a:off x="640080" y="1783080"/>
+            <a:ext cx="1920240" cy="1051560"/>
           </a:xfrm>
           <a:prstGeom prst="roundRect">
             <a:avLst>
-              <a:gd name="adj" fmla="val 5000"/>
+              <a:gd name="adj" fmla="val 6957"/>
+            </a:avLst>
+          </a:prstGeom>
+          <a:solidFill>
+            <a:srgbClr val="10233A"/>
+          </a:solidFill>
+          <a:ln/>
+        </p:spPr>
+      </p:sp>
+      <p:sp>
+        <p:nvSpPr>
+          <p:cNvPr id="5" name="Text 3"/>
+          <p:cNvSpPr txBox="1"/>
+          <p:nvPr/>
+        </p:nvSpPr>
+        <p:spPr>
+          <a:xfrm>
+            <a:off x="640080" y="1783080"/>
+            <a:ext cx="1920240" cy="1051560"/>
+          </a:xfrm>
+          <a:prstGeom prst="rect">
+            <a:avLst/>
+          </a:prstGeom>
+          <a:noFill/>
+          <a:ln/>
+        </p:spPr>
+        <p:txBody>
+          <a:bodyPr wrap="square" lIns="0" tIns="0" rIns="0" bIns="0" rtlCol="0" anchor="ctr"/>
+          <a:lstStyle/>
+          <a:p>
+            <a:pPr algn="ctr" indent="0" marL="0">
+              <a:buNone/>
+            </a:pPr>
+            <a:r>
+              <a:rPr lang="en-US" sz="1400" b="1" dirty="0">
+                <a:solidFill>
+                  <a:srgbClr val="F1DCCF"/>
+                </a:solidFill>
+                <a:latin typeface="游ゴシック" pitchFamily="34" charset="0"/>
+                <a:ea typeface="游ゴシック" pitchFamily="34" charset="-122"/>
+                <a:cs typeface="游ゴシック" pitchFamily="34" charset="-120"/>
+              </a:rPr>
+              <a:t>テーマ</a:t>
+            </a:r>
+            <a:endParaRPr lang="en-US" sz="1400" dirty="0"/>
+          </a:p>
+        </p:txBody>
+      </p:sp>
+      <p:sp>
+        <p:nvSpPr>
+          <p:cNvPr id="6" name="Shape 4"/>
+          <p:cNvSpPr/>
+          <p:nvPr/>
+        </p:nvSpPr>
+        <p:spPr>
+          <a:xfrm>
+            <a:off x="2743200" y="1783080"/>
+            <a:ext cx="3200400" cy="1051560"/>
+          </a:xfrm>
+          <a:prstGeom prst="roundRect">
+            <a:avLst>
+              <a:gd name="adj" fmla="val 6957"/>
             </a:avLst>
           </a:prstGeom>
           <a:solidFill>
             <a:srgbClr val="F6F1EA"/>
+          </a:solidFill>
+          <a:ln/>
+        </p:spPr>
+      </p:sp>
+      <p:sp>
+        <p:nvSpPr>
+          <p:cNvPr id="7" name="Text 5"/>
+          <p:cNvSpPr txBox="1"/>
+          <p:nvPr/>
+        </p:nvSpPr>
+        <p:spPr>
+          <a:xfrm>
+            <a:off x="2743200" y="1783080"/>
+            <a:ext cx="3200400" cy="1051560"/>
+          </a:xfrm>
+          <a:prstGeom prst="rect">
+            <a:avLst/>
+          </a:prstGeom>
+          <a:noFill/>
+          <a:ln/>
+        </p:spPr>
+        <p:txBody>
+          <a:bodyPr wrap="square" lIns="0" tIns="0" rIns="0" bIns="0" rtlCol="0" anchor="ctr"/>
+          <a:lstStyle/>
+          <a:p>
+            <a:pPr algn="ctr" indent="0" marL="0">
+              <a:buNone/>
+            </a:pPr>
+            <a:r>
+              <a:rPr lang="en-US" sz="1600" dirty="0">
+                <a:solidFill>
+                  <a:srgbClr val="6B6B6B"/>
+                </a:solidFill>
+                <a:latin typeface="游ゴシック" pitchFamily="34" charset="0"/>
+                <a:ea typeface="游ゴシック" pitchFamily="34" charset="-122"/>
+                <a:cs typeface="游ゴシック" pitchFamily="34" charset="-120"/>
+              </a:rPr>
+              <a:t>死ぬ準備</a:t>
+            </a:r>
+            <a:endParaRPr lang="en-US" sz="1600" dirty="0"/>
+          </a:p>
+        </p:txBody>
+      </p:sp>
+      <p:sp>
+        <p:nvSpPr>
+          <p:cNvPr id="8" name="Text 6"/>
+          <p:cNvSpPr txBox="1"/>
+          <p:nvPr/>
+        </p:nvSpPr>
+        <p:spPr>
+          <a:xfrm>
+            <a:off x="5943600" y="1783080"/>
+            <a:ext cx="731520" cy="1051560"/>
+          </a:xfrm>
+          <a:prstGeom prst="rect">
+            <a:avLst/>
+          </a:prstGeom>
+          <a:noFill/>
+          <a:ln/>
+        </p:spPr>
+        <p:txBody>
+          <a:bodyPr wrap="square" lIns="0" tIns="0" rIns="0" bIns="0" rtlCol="0" anchor="ctr"/>
+          <a:lstStyle/>
+          <a:p>
+            <a:pPr algn="ctr" indent="0" marL="0">
+              <a:buNone/>
+            </a:pPr>
+            <a:r>
+              <a:rPr lang="en-US" sz="2200" b="1" dirty="0">
+                <a:solidFill>
+                  <a:srgbClr val="C9603F"/>
+                </a:solidFill>
+                <a:latin typeface="游ゴシック" pitchFamily="34" charset="0"/>
+                <a:ea typeface="游ゴシック" pitchFamily="34" charset="-122"/>
+                <a:cs typeface="游ゴシック" pitchFamily="34" charset="-120"/>
+              </a:rPr>
+              <a:t>→</a:t>
+            </a:r>
+            <a:endParaRPr lang="en-US" sz="2200" dirty="0"/>
+          </a:p>
+        </p:txBody>
+      </p:sp>
+      <p:sp>
+        <p:nvSpPr>
+          <p:cNvPr id="9" name="Shape 7"/>
+          <p:cNvSpPr/>
+          <p:nvPr/>
+        </p:nvSpPr>
+        <p:spPr>
+          <a:xfrm>
+            <a:off x="6675120" y="1783080"/>
+            <a:ext cx="4480560" cy="1051560"/>
+          </a:xfrm>
+          <a:prstGeom prst="roundRect">
+            <a:avLst>
+              <a:gd name="adj" fmla="val 6957"/>
+            </a:avLst>
+          </a:prstGeom>
+          <a:solidFill>
+            <a:srgbClr val="C9603F"/>
           </a:solidFill>
           <a:ln/>
           <a:effectLst>
@@ -6272,38 +7664,38 @@
       </p:sp>
       <p:sp>
         <p:nvSpPr>
-          <p:cNvPr id="6" name="Text 3"/>
-          <p:cNvSpPr txBox="1"/>
-          <p:nvPr/>
-        </p:nvSpPr>
-        <p:spPr>
-          <a:xfrm>
-            <a:off x="7863840" y="1965960"/>
-            <a:ext cx="3474720" cy="457200"/>
-          </a:xfrm>
-          <a:prstGeom prst="rect">
-            <a:avLst/>
-          </a:prstGeom>
-          <a:noFill/>
-          <a:ln/>
-        </p:spPr>
-        <p:txBody>
-          <a:bodyPr wrap="square" lIns="0" tIns="0" rIns="0" bIns="0" rtlCol="0" anchor="ctr"/>
-          <a:lstStyle/>
-          <a:p>
-            <a:pPr indent="0" marL="0">
+          <p:cNvPr id="10" name="Text 8"/>
+          <p:cNvSpPr txBox="1"/>
+          <p:nvPr/>
+        </p:nvSpPr>
+        <p:spPr>
+          <a:xfrm>
+            <a:off x="6675120" y="1783080"/>
+            <a:ext cx="4480560" cy="1051560"/>
+          </a:xfrm>
+          <a:prstGeom prst="rect">
+            <a:avLst/>
+          </a:prstGeom>
+          <a:noFill/>
+          <a:ln/>
+        </p:spPr>
+        <p:txBody>
+          <a:bodyPr wrap="square" lIns="0" tIns="0" rIns="0" bIns="0" rtlCol="0" anchor="ctr"/>
+          <a:lstStyle/>
+          <a:p>
+            <a:pPr algn="ctr" indent="0" marL="0">
               <a:buNone/>
             </a:pPr>
             <a:r>
               <a:rPr lang="en-US" sz="1600" b="1" dirty="0">
                 <a:solidFill>
-                  <a:srgbClr val="C9603F"/>
-                </a:solidFill>
-                <a:latin typeface="游ゴシック" pitchFamily="34" charset="0"/>
-                <a:ea typeface="游ゴシック" pitchFamily="34" charset="-122"/>
-                <a:cs typeface="游ゴシック" pitchFamily="34" charset="-120"/>
-              </a:rPr>
-              <a:t>金融＋不動産　＝　80億円</a:t>
+                  <a:srgbClr val="FFFFFF"/>
+                </a:solidFill>
+                <a:latin typeface="游ゴシック" pitchFamily="34" charset="0"/>
+                <a:ea typeface="游ゴシック" pitchFamily="34" charset="-122"/>
+                <a:cs typeface="游ゴシック" pitchFamily="34" charset="-120"/>
+              </a:rPr>
+              <a:t>生きる準備</a:t>
             </a:r>
             <a:endParaRPr lang="en-US" sz="1600" dirty="0"/>
           </a:p>
@@ -6311,64 +7703,183 @@
       </p:sp>
       <p:sp>
         <p:nvSpPr>
-          <p:cNvPr id="7" name="Text 4"/>
-          <p:cNvSpPr txBox="1"/>
-          <p:nvPr/>
-        </p:nvSpPr>
-        <p:spPr>
-          <a:xfrm>
-            <a:off x="7863840" y="2423160"/>
-            <a:ext cx="3474720" cy="1097280"/>
-          </a:xfrm>
-          <a:prstGeom prst="rect">
-            <a:avLst/>
-          </a:prstGeom>
-          <a:noFill/>
-          <a:ln/>
-        </p:spPr>
-        <p:txBody>
-          <a:bodyPr wrap="square" lIns="0" tIns="0" rIns="0" bIns="0" rtlCol="0" anchor="t"/>
-          <a:lstStyle/>
-          <a:p>
-            <a:pPr indent="0" marL="0">
-              <a:lnSpc>
-                <a:spcPct val="125000"/>
-              </a:lnSpc>
-              <a:buNone/>
-            </a:pPr>
-            <a:r>
-              <a:rPr lang="en-US" sz="1200" dirty="0">
-                <a:solidFill>
-                  <a:srgbClr val="3A3A3A"/>
-                </a:solidFill>
-                <a:latin typeface="游ゴシック" pitchFamily="34" charset="0"/>
-                <a:ea typeface="游ゴシック" pitchFamily="34" charset="-122"/>
-                <a:cs typeface="游ゴシック" pitchFamily="34" charset="-120"/>
-              </a:rPr>
-              <a:t>全体想定100億円のうち約8割を占める、資産性の高い意思決定支援（相続発生時の資産整理・組み換え）が中核であることを示す。</a:t>
-            </a:r>
-            <a:endParaRPr lang="en-US" sz="1200" dirty="0"/>
-          </a:p>
-        </p:txBody>
-      </p:sp>
-      <p:sp>
-        <p:nvSpPr>
-          <p:cNvPr id="8" name="Shape 5"/>
+          <p:cNvPr id="11" name="Shape 9"/>
           <p:cNvSpPr/>
           <p:nvPr/>
         </p:nvSpPr>
         <p:spPr>
           <a:xfrm>
-            <a:off x="7635240" y="3794760"/>
-            <a:ext cx="3931920" cy="2194560"/>
+            <a:off x="640080" y="2971800"/>
+            <a:ext cx="1920240" cy="1051560"/>
           </a:xfrm>
           <a:prstGeom prst="roundRect">
             <a:avLst>
-              <a:gd name="adj" fmla="val 4167"/>
+              <a:gd name="adj" fmla="val 6957"/>
+            </a:avLst>
+          </a:prstGeom>
+          <a:solidFill>
+            <a:srgbClr val="10233A"/>
+          </a:solidFill>
+          <a:ln/>
+        </p:spPr>
+      </p:sp>
+      <p:sp>
+        <p:nvSpPr>
+          <p:cNvPr id="12" name="Text 10"/>
+          <p:cNvSpPr txBox="1"/>
+          <p:nvPr/>
+        </p:nvSpPr>
+        <p:spPr>
+          <a:xfrm>
+            <a:off x="640080" y="2971800"/>
+            <a:ext cx="1920240" cy="1051560"/>
+          </a:xfrm>
+          <a:prstGeom prst="rect">
+            <a:avLst/>
+          </a:prstGeom>
+          <a:noFill/>
+          <a:ln/>
+        </p:spPr>
+        <p:txBody>
+          <a:bodyPr wrap="square" lIns="0" tIns="0" rIns="0" bIns="0" rtlCol="0" anchor="ctr"/>
+          <a:lstStyle/>
+          <a:p>
+            <a:pPr algn="ctr" indent="0" marL="0">
+              <a:buNone/>
+            </a:pPr>
+            <a:r>
+              <a:rPr lang="en-US" sz="1400" b="1" dirty="0">
+                <a:solidFill>
+                  <a:srgbClr val="F1DCCF"/>
+                </a:solidFill>
+                <a:latin typeface="游ゴシック" pitchFamily="34" charset="0"/>
+                <a:ea typeface="游ゴシック" pitchFamily="34" charset="-122"/>
+                <a:cs typeface="游ゴシック" pitchFamily="34" charset="-120"/>
+              </a:rPr>
+              <a:t>主語</a:t>
+            </a:r>
+            <a:endParaRPr lang="en-US" sz="1400" dirty="0"/>
+          </a:p>
+        </p:txBody>
+      </p:sp>
+      <p:sp>
+        <p:nvSpPr>
+          <p:cNvPr id="13" name="Shape 11"/>
+          <p:cNvSpPr/>
+          <p:nvPr/>
+        </p:nvSpPr>
+        <p:spPr>
+          <a:xfrm>
+            <a:off x="2743200" y="2971800"/>
+            <a:ext cx="3200400" cy="1051560"/>
+          </a:xfrm>
+          <a:prstGeom prst="roundRect">
+            <a:avLst>
+              <a:gd name="adj" fmla="val 6957"/>
             </a:avLst>
           </a:prstGeom>
           <a:solidFill>
             <a:srgbClr val="F6F1EA"/>
+          </a:solidFill>
+          <a:ln/>
+        </p:spPr>
+      </p:sp>
+      <p:sp>
+        <p:nvSpPr>
+          <p:cNvPr id="14" name="Text 12"/>
+          <p:cNvSpPr txBox="1"/>
+          <p:nvPr/>
+        </p:nvSpPr>
+        <p:spPr>
+          <a:xfrm>
+            <a:off x="2743200" y="2971800"/>
+            <a:ext cx="3200400" cy="1051560"/>
+          </a:xfrm>
+          <a:prstGeom prst="rect">
+            <a:avLst/>
+          </a:prstGeom>
+          <a:noFill/>
+          <a:ln/>
+        </p:spPr>
+        <p:txBody>
+          <a:bodyPr wrap="square" lIns="0" tIns="0" rIns="0" bIns="0" rtlCol="0" anchor="ctr"/>
+          <a:lstStyle/>
+          <a:p>
+            <a:pPr algn="ctr" indent="0" marL="0">
+              <a:buNone/>
+            </a:pPr>
+            <a:r>
+              <a:rPr lang="en-US" sz="1600" dirty="0">
+                <a:solidFill>
+                  <a:srgbClr val="6B6B6B"/>
+                </a:solidFill>
+                <a:latin typeface="游ゴシック" pitchFamily="34" charset="0"/>
+                <a:ea typeface="游ゴシック" pitchFamily="34" charset="-122"/>
+                <a:cs typeface="游ゴシック" pitchFamily="34" charset="-120"/>
+              </a:rPr>
+              <a:t>財産</a:t>
+            </a:r>
+            <a:endParaRPr lang="en-US" sz="1600" dirty="0"/>
+          </a:p>
+        </p:txBody>
+      </p:sp>
+      <p:sp>
+        <p:nvSpPr>
+          <p:cNvPr id="15" name="Text 13"/>
+          <p:cNvSpPr txBox="1"/>
+          <p:nvPr/>
+        </p:nvSpPr>
+        <p:spPr>
+          <a:xfrm>
+            <a:off x="5943600" y="2971800"/>
+            <a:ext cx="731520" cy="1051560"/>
+          </a:xfrm>
+          <a:prstGeom prst="rect">
+            <a:avLst/>
+          </a:prstGeom>
+          <a:noFill/>
+          <a:ln/>
+        </p:spPr>
+        <p:txBody>
+          <a:bodyPr wrap="square" lIns="0" tIns="0" rIns="0" bIns="0" rtlCol="0" anchor="ctr"/>
+          <a:lstStyle/>
+          <a:p>
+            <a:pPr algn="ctr" indent="0" marL="0">
+              <a:buNone/>
+            </a:pPr>
+            <a:r>
+              <a:rPr lang="en-US" sz="2200" b="1" dirty="0">
+                <a:solidFill>
+                  <a:srgbClr val="C9603F"/>
+                </a:solidFill>
+                <a:latin typeface="游ゴシック" pitchFamily="34" charset="0"/>
+                <a:ea typeface="游ゴシック" pitchFamily="34" charset="-122"/>
+                <a:cs typeface="游ゴシック" pitchFamily="34" charset="-120"/>
+              </a:rPr>
+              <a:t>→</a:t>
+            </a:r>
+            <a:endParaRPr lang="en-US" sz="2200" dirty="0"/>
+          </a:p>
+        </p:txBody>
+      </p:sp>
+      <p:sp>
+        <p:nvSpPr>
+          <p:cNvPr id="16" name="Shape 14"/>
+          <p:cNvSpPr/>
+          <p:nvPr/>
+        </p:nvSpPr>
+        <p:spPr>
+          <a:xfrm>
+            <a:off x="6675120" y="2971800"/>
+            <a:ext cx="4480560" cy="1051560"/>
+          </a:xfrm>
+          <a:prstGeom prst="roundRect">
+            <a:avLst>
+              <a:gd name="adj" fmla="val 6957"/>
+            </a:avLst>
+          </a:prstGeom>
+          <a:solidFill>
+            <a:srgbClr val="C9603F"/>
           </a:solidFill>
           <a:ln/>
           <a:effectLst>
@@ -6382,14 +7893,282 @@
       </p:sp>
       <p:sp>
         <p:nvSpPr>
-          <p:cNvPr id="9" name="Text 6"/>
-          <p:cNvSpPr txBox="1"/>
-          <p:nvPr/>
-        </p:nvSpPr>
-        <p:spPr>
-          <a:xfrm>
-            <a:off x="7863840" y="3977640"/>
-            <a:ext cx="3474720" cy="457200"/>
+          <p:cNvPr id="17" name="Text 15"/>
+          <p:cNvSpPr txBox="1"/>
+          <p:nvPr/>
+        </p:nvSpPr>
+        <p:spPr>
+          <a:xfrm>
+            <a:off x="6675120" y="2971800"/>
+            <a:ext cx="4480560" cy="1051560"/>
+          </a:xfrm>
+          <a:prstGeom prst="rect">
+            <a:avLst/>
+          </a:prstGeom>
+          <a:noFill/>
+          <a:ln/>
+        </p:spPr>
+        <p:txBody>
+          <a:bodyPr wrap="square" lIns="0" tIns="0" rIns="0" bIns="0" rtlCol="0" anchor="ctr"/>
+          <a:lstStyle/>
+          <a:p>
+            <a:pPr algn="ctr" indent="0" marL="0">
+              <a:buNone/>
+            </a:pPr>
+            <a:r>
+              <a:rPr lang="en-US" sz="1600" b="1" dirty="0">
+                <a:solidFill>
+                  <a:srgbClr val="FFFFFF"/>
+                </a:solidFill>
+                <a:latin typeface="游ゴシック" pitchFamily="34" charset="0"/>
+                <a:ea typeface="游ゴシック" pitchFamily="34" charset="-122"/>
+                <a:cs typeface="游ゴシック" pitchFamily="34" charset="-120"/>
+              </a:rPr>
+              <a:t>人生</a:t>
+            </a:r>
+            <a:endParaRPr lang="en-US" sz="1600" dirty="0"/>
+          </a:p>
+        </p:txBody>
+      </p:sp>
+      <p:sp>
+        <p:nvSpPr>
+          <p:cNvPr id="18" name="Shape 16"/>
+          <p:cNvSpPr/>
+          <p:nvPr/>
+        </p:nvSpPr>
+        <p:spPr>
+          <a:xfrm>
+            <a:off x="640080" y="4160520"/>
+            <a:ext cx="1920240" cy="1051560"/>
+          </a:xfrm>
+          <a:prstGeom prst="roundRect">
+            <a:avLst>
+              <a:gd name="adj" fmla="val 6957"/>
+            </a:avLst>
+          </a:prstGeom>
+          <a:solidFill>
+            <a:srgbClr val="10233A"/>
+          </a:solidFill>
+          <a:ln/>
+        </p:spPr>
+      </p:sp>
+      <p:sp>
+        <p:nvSpPr>
+          <p:cNvPr id="19" name="Text 17"/>
+          <p:cNvSpPr txBox="1"/>
+          <p:nvPr/>
+        </p:nvSpPr>
+        <p:spPr>
+          <a:xfrm>
+            <a:off x="640080" y="4160520"/>
+            <a:ext cx="1920240" cy="1051560"/>
+          </a:xfrm>
+          <a:prstGeom prst="rect">
+            <a:avLst/>
+          </a:prstGeom>
+          <a:noFill/>
+          <a:ln/>
+        </p:spPr>
+        <p:txBody>
+          <a:bodyPr wrap="square" lIns="0" tIns="0" rIns="0" bIns="0" rtlCol="0" anchor="ctr"/>
+          <a:lstStyle/>
+          <a:p>
+            <a:pPr algn="ctr" indent="0" marL="0">
+              <a:buNone/>
+            </a:pPr>
+            <a:r>
+              <a:rPr lang="en-US" sz="1400" b="1" dirty="0">
+                <a:solidFill>
+                  <a:srgbClr val="F1DCCF"/>
+                </a:solidFill>
+                <a:latin typeface="游ゴシック" pitchFamily="34" charset="0"/>
+                <a:ea typeface="游ゴシック" pitchFamily="34" charset="-122"/>
+                <a:cs typeface="游ゴシック" pitchFamily="34" charset="-120"/>
+              </a:rPr>
+              <a:t>関わり方</a:t>
+            </a:r>
+            <a:endParaRPr lang="en-US" sz="1400" dirty="0"/>
+          </a:p>
+        </p:txBody>
+      </p:sp>
+      <p:sp>
+        <p:nvSpPr>
+          <p:cNvPr id="20" name="Shape 18"/>
+          <p:cNvSpPr/>
+          <p:nvPr/>
+        </p:nvSpPr>
+        <p:spPr>
+          <a:xfrm>
+            <a:off x="2743200" y="4160520"/>
+            <a:ext cx="3200400" cy="1051560"/>
+          </a:xfrm>
+          <a:prstGeom prst="roundRect">
+            <a:avLst>
+              <a:gd name="adj" fmla="val 6957"/>
+            </a:avLst>
+          </a:prstGeom>
+          <a:solidFill>
+            <a:srgbClr val="F6F1EA"/>
+          </a:solidFill>
+          <a:ln/>
+        </p:spPr>
+      </p:sp>
+      <p:sp>
+        <p:nvSpPr>
+          <p:cNvPr id="21" name="Text 19"/>
+          <p:cNvSpPr txBox="1"/>
+          <p:nvPr/>
+        </p:nvSpPr>
+        <p:spPr>
+          <a:xfrm>
+            <a:off x="2743200" y="4160520"/>
+            <a:ext cx="3200400" cy="1051560"/>
+          </a:xfrm>
+          <a:prstGeom prst="rect">
+            <a:avLst/>
+          </a:prstGeom>
+          <a:noFill/>
+          <a:ln/>
+        </p:spPr>
+        <p:txBody>
+          <a:bodyPr wrap="square" lIns="0" tIns="0" rIns="0" bIns="0" rtlCol="0" anchor="ctr"/>
+          <a:lstStyle/>
+          <a:p>
+            <a:pPr algn="ctr" indent="0" marL="0">
+              <a:buNone/>
+            </a:pPr>
+            <a:r>
+              <a:rPr lang="en-US" sz="1600" dirty="0">
+                <a:solidFill>
+                  <a:srgbClr val="6B6B6B"/>
+                </a:solidFill>
+                <a:latin typeface="游ゴシック" pitchFamily="34" charset="0"/>
+                <a:ea typeface="游ゴシック" pitchFamily="34" charset="-122"/>
+                <a:cs typeface="游ゴシック" pitchFamily="34" charset="-120"/>
+              </a:rPr>
+              <a:t>相続の処理（点）</a:t>
+            </a:r>
+            <a:endParaRPr lang="en-US" sz="1600" dirty="0"/>
+          </a:p>
+        </p:txBody>
+      </p:sp>
+      <p:sp>
+        <p:nvSpPr>
+          <p:cNvPr id="22" name="Text 20"/>
+          <p:cNvSpPr txBox="1"/>
+          <p:nvPr/>
+        </p:nvSpPr>
+        <p:spPr>
+          <a:xfrm>
+            <a:off x="5943600" y="4160520"/>
+            <a:ext cx="731520" cy="1051560"/>
+          </a:xfrm>
+          <a:prstGeom prst="rect">
+            <a:avLst/>
+          </a:prstGeom>
+          <a:noFill/>
+          <a:ln/>
+        </p:spPr>
+        <p:txBody>
+          <a:bodyPr wrap="square" lIns="0" tIns="0" rIns="0" bIns="0" rtlCol="0" anchor="ctr"/>
+          <a:lstStyle/>
+          <a:p>
+            <a:pPr algn="ctr" indent="0" marL="0">
+              <a:buNone/>
+            </a:pPr>
+            <a:r>
+              <a:rPr lang="en-US" sz="2200" b="1" dirty="0">
+                <a:solidFill>
+                  <a:srgbClr val="C9603F"/>
+                </a:solidFill>
+                <a:latin typeface="游ゴシック" pitchFamily="34" charset="0"/>
+                <a:ea typeface="游ゴシック" pitchFamily="34" charset="-122"/>
+                <a:cs typeface="游ゴシック" pitchFamily="34" charset="-120"/>
+              </a:rPr>
+              <a:t>→</a:t>
+            </a:r>
+            <a:endParaRPr lang="en-US" sz="2200" dirty="0"/>
+          </a:p>
+        </p:txBody>
+      </p:sp>
+      <p:sp>
+        <p:nvSpPr>
+          <p:cNvPr id="23" name="Shape 21"/>
+          <p:cNvSpPr/>
+          <p:nvPr/>
+        </p:nvSpPr>
+        <p:spPr>
+          <a:xfrm>
+            <a:off x="6675120" y="4160520"/>
+            <a:ext cx="4480560" cy="1051560"/>
+          </a:xfrm>
+          <a:prstGeom prst="roundRect">
+            <a:avLst>
+              <a:gd name="adj" fmla="val 6957"/>
+            </a:avLst>
+          </a:prstGeom>
+          <a:solidFill>
+            <a:srgbClr val="C9603F"/>
+          </a:solidFill>
+          <a:ln/>
+          <a:effectLst>
+            <a:outerShdw sx="100000" sy="100000" kx="0" ky="0" algn="bl" rotWithShape="0" blurRad="101600" dist="38100" dir="5400000">
+              <a:srgbClr val="10233A">
+                <a:alpha val="18000"/>
+              </a:srgbClr>
+            </a:outerShdw>
+          </a:effectLst>
+        </p:spPr>
+      </p:sp>
+      <p:sp>
+        <p:nvSpPr>
+          <p:cNvPr id="24" name="Text 22"/>
+          <p:cNvSpPr txBox="1"/>
+          <p:nvPr/>
+        </p:nvSpPr>
+        <p:spPr>
+          <a:xfrm>
+            <a:off x="6675120" y="4160520"/>
+            <a:ext cx="4480560" cy="1051560"/>
+          </a:xfrm>
+          <a:prstGeom prst="rect">
+            <a:avLst/>
+          </a:prstGeom>
+          <a:noFill/>
+          <a:ln/>
+        </p:spPr>
+        <p:txBody>
+          <a:bodyPr wrap="square" lIns="0" tIns="0" rIns="0" bIns="0" rtlCol="0" anchor="ctr"/>
+          <a:lstStyle/>
+          <a:p>
+            <a:pPr algn="ctr" indent="0" marL="0">
+              <a:buNone/>
+            </a:pPr>
+            <a:r>
+              <a:rPr lang="en-US" sz="1600" b="1" dirty="0">
+                <a:solidFill>
+                  <a:srgbClr val="FFFFFF"/>
+                </a:solidFill>
+                <a:latin typeface="游ゴシック" pitchFamily="34" charset="0"/>
+                <a:ea typeface="游ゴシック" pitchFamily="34" charset="-122"/>
+                <a:cs typeface="游ゴシック" pitchFamily="34" charset="-120"/>
+              </a:rPr>
+              <a:t>人生との伴走（線）</a:t>
+            </a:r>
+            <a:endParaRPr lang="en-US" sz="1600" dirty="0"/>
+          </a:p>
+        </p:txBody>
+      </p:sp>
+      <p:sp>
+        <p:nvSpPr>
+          <p:cNvPr id="25" name="Text 23"/>
+          <p:cNvSpPr txBox="1"/>
+          <p:nvPr/>
+        </p:nvSpPr>
+        <p:spPr>
+          <a:xfrm>
+            <a:off x="640080" y="5257800"/>
+            <a:ext cx="10881360" cy="457200"/>
           </a:xfrm>
           <a:prstGeom prst="rect">
             <a:avLst/>
@@ -6405,53 +8184,7 @@
               <a:buNone/>
             </a:pPr>
             <a:r>
-              <a:rPr lang="en-US" sz="1500" b="1" dirty="0">
-                <a:solidFill>
-                  <a:srgbClr val="1E3A5F"/>
-                </a:solidFill>
-                <a:latin typeface="游ゴシック" pitchFamily="34" charset="0"/>
-                <a:ea typeface="游ゴシック" pitchFamily="34" charset="-122"/>
-                <a:cs typeface="游ゴシック" pitchFamily="34" charset="-120"/>
-              </a:rPr>
-              <a:t>残り2割＝士業・施設・M&amp;Aの裾野</a:t>
-            </a:r>
-            <a:endParaRPr lang="en-US" sz="1500" dirty="0"/>
-          </a:p>
-        </p:txBody>
-      </p:sp>
-      <p:sp>
-        <p:nvSpPr>
-          <p:cNvPr id="10" name="Text 7"/>
-          <p:cNvSpPr txBox="1"/>
-          <p:nvPr/>
-        </p:nvSpPr>
-        <p:spPr>
-          <a:xfrm>
-            <a:off x="7863840" y="4434840"/>
-            <a:ext cx="3474720" cy="1463040"/>
-          </a:xfrm>
-          <a:prstGeom prst="rect">
-            <a:avLst/>
-          </a:prstGeom>
-          <a:noFill/>
-          <a:ln/>
-        </p:spPr>
-        <p:txBody>
-          <a:bodyPr wrap="square" lIns="0" tIns="0" rIns="0" bIns="0" rtlCol="0" anchor="t"/>
-          <a:lstStyle/>
-          <a:p>
-            <a:pPr marL="342900" indent="-342900">
-              <a:lnSpc>
-                <a:spcPct val="128000"/>
-              </a:lnSpc>
-              <a:spcAft>
-                <a:spcPts val="800"/>
-              </a:spcAft>
-              <a:buSzPct val="100000"/>
-              <a:buChar char="●"/>
-            </a:pPr>
-            <a:r>
-              <a:rPr lang="en-US" sz="1150" dirty="0">
+              <a:rPr lang="en-US" sz="1400" i="1" dirty="0">
                 <a:solidFill>
                   <a:srgbClr val="3A3A3A"/>
                 </a:solidFill>
@@ -6459,63 +8192,54 @@
                 <a:ea typeface="游ゴシック" pitchFamily="34" charset="-122"/>
                 <a:cs typeface="游ゴシック" pitchFamily="34" charset="-120"/>
               </a:rPr>
-              <a:t>税理士・司法書士・行政書士・弁護士＝合計7億円</a:t>
-            </a:r>
-            <a:endParaRPr lang="en-US" sz="1150" dirty="0"/>
-          </a:p>
-          <a:p>
-            <a:pPr marL="342900" indent="-342900">
-              <a:lnSpc>
-                <a:spcPct val="128000"/>
-              </a:lnSpc>
-              <a:spcAft>
-                <a:spcPts val="800"/>
-              </a:spcAft>
-              <a:buSzPct val="100000"/>
-              <a:buChar char="●"/>
-            </a:pPr>
-            <a:r>
-              <a:rPr lang="en-US" sz="1150" dirty="0">
-                <a:solidFill>
-                  <a:srgbClr val="3A3A3A"/>
-                </a:solidFill>
-                <a:latin typeface="游ゴシック" pitchFamily="34" charset="0"/>
-                <a:ea typeface="游ゴシック" pitchFamily="34" charset="-122"/>
-                <a:cs typeface="游ゴシック" pitchFamily="34" charset="-120"/>
-              </a:rPr>
-              <a:t>有料老人ホーム3億円、法人バルクM&amp;A5億円</a:t>
-            </a:r>
-            <a:endParaRPr lang="en-US" sz="1150" dirty="0"/>
-          </a:p>
-          <a:p>
-            <a:pPr marL="342900" indent="-342900">
-              <a:lnSpc>
-                <a:spcPct val="128000"/>
-              </a:lnSpc>
-              <a:spcAft>
-                <a:spcPts val="800"/>
-              </a:spcAft>
-              <a:buSzPct val="100000"/>
-              <a:buChar char="●"/>
-            </a:pPr>
-            <a:r>
-              <a:rPr lang="en-US" sz="1150" dirty="0">
-                <a:solidFill>
-                  <a:srgbClr val="3A3A3A"/>
-                </a:solidFill>
-                <a:latin typeface="游ゴシック" pitchFamily="34" charset="0"/>
-                <a:ea typeface="游ゴシック" pitchFamily="34" charset="-122"/>
-                <a:cs typeface="游ゴシック" pitchFamily="34" charset="-120"/>
-              </a:rPr>
-              <a:t>単発の大型案件だけでなく、裾野の広い専門家連携が常時発生している</a:t>
-            </a:r>
-            <a:endParaRPr lang="en-US" sz="1150" dirty="0"/>
-          </a:p>
-        </p:txBody>
-      </p:sp>
-      <p:sp>
-        <p:nvSpPr>
-          <p:cNvPr id="11" name="Text 8"/>
+              <a:t>専門家だけが人生の最期を支えるのではなく、社会のさまざまな場所に「気づき、話し、必要な支援へ繋ぐ人」を増やしていく。</a:t>
+            </a:r>
+            <a:endParaRPr lang="en-US" sz="1400" dirty="0"/>
+          </a:p>
+        </p:txBody>
+      </p:sp>
+      <p:sp>
+        <p:nvSpPr>
+          <p:cNvPr id="26" name="Text 24"/>
+          <p:cNvSpPr txBox="1"/>
+          <p:nvPr/>
+        </p:nvSpPr>
+        <p:spPr>
+          <a:xfrm>
+            <a:off x="640080" y="5715000"/>
+            <a:ext cx="10881360" cy="457200"/>
+          </a:xfrm>
+          <a:prstGeom prst="rect">
+            <a:avLst/>
+          </a:prstGeom>
+          <a:noFill/>
+          <a:ln/>
+        </p:spPr>
+        <p:txBody>
+          <a:bodyPr wrap="square" lIns="0" tIns="0" rIns="0" bIns="0" rtlCol="0" anchor="ctr"/>
+          <a:lstStyle/>
+          <a:p>
+            <a:pPr indent="0" marL="0">
+              <a:buNone/>
+            </a:pPr>
+            <a:r>
+              <a:rPr lang="en-US" sz="1250" dirty="0">
+                <a:solidFill>
+                  <a:srgbClr val="6B6B6B"/>
+                </a:solidFill>
+                <a:latin typeface="游ゴシック" pitchFamily="34" charset="0"/>
+                <a:ea typeface="游ゴシック" pitchFamily="34" charset="-122"/>
+                <a:cs typeface="游ゴシック" pitchFamily="34" charset="-120"/>
+              </a:rPr>
+              <a:t>このメソッドを「繋ぐノート」「繋ぐノートサポートアドバイザー®資格制度」「エキスパートコース（育成カリキュラム）」として実装している（素材②③）。</a:t>
+            </a:r>
+            <a:endParaRPr lang="en-US" sz="1250" dirty="0"/>
+          </a:p>
+        </p:txBody>
+      </p:sp>
+      <p:sp>
+        <p:nvSpPr>
+          <p:cNvPr id="27" name="Text 25"/>
           <p:cNvSpPr txBox="1"/>
           <p:nvPr/>
         </p:nvSpPr>
@@ -6617,7 +8341,7 @@
                 <a:ea typeface="游ゴシック" pitchFamily="34" charset="-122"/>
                 <a:cs typeface="游ゴシック" pitchFamily="34" charset="-120"/>
               </a:rPr>
-              <a:t>01 / NOVELTY</a:t>
+              <a:t>FUNNEL COMPARISON</a:t>
             </a:r>
             <a:endParaRPr lang="en-US" sz="1300" dirty="0"/>
           </a:p>
@@ -6656,7 +8380,7 @@
                 <a:ea typeface="游ゴシック" pitchFamily="34" charset="-122"/>
                 <a:cs typeface="游ゴシック" pitchFamily="34" charset="-120"/>
               </a:rPr>
-              <a:t>斬新性 ― 「hub」として経済圏を創るという発想</a:t>
+              <a:t>フロントの囲い込みが、違う。</a:t>
             </a:r>
             <a:endParaRPr lang="en-US" sz="2700" dirty="0"/>
           </a:p>
@@ -6664,228 +8388,754 @@
       </p:sp>
       <p:sp>
         <p:nvSpPr>
-          <p:cNvPr id="4" name="Shape 2"/>
+          <p:cNvPr id="4" name="Text 2"/>
+          <p:cNvSpPr txBox="1"/>
+          <p:nvPr/>
+        </p:nvSpPr>
+        <p:spPr>
+          <a:xfrm>
+            <a:off x="457200" y="1627632"/>
+            <a:ext cx="3931920" cy="365760"/>
+          </a:xfrm>
+          <a:prstGeom prst="rect">
+            <a:avLst/>
+          </a:prstGeom>
+          <a:noFill/>
+          <a:ln/>
+        </p:spPr>
+        <p:txBody>
+          <a:bodyPr wrap="square" lIns="0" tIns="0" rIns="0" bIns="0" rtlCol="0" anchor="ctr"/>
+          <a:lstStyle/>
+          <a:p>
+            <a:pPr algn="ctr" indent="0" marL="0">
+              <a:buNone/>
+            </a:pPr>
+            <a:r>
+              <a:rPr lang="en-US" sz="1500" b="1" dirty="0">
+                <a:solidFill>
+                  <a:srgbClr val="1E3A5F"/>
+                </a:solidFill>
+                <a:latin typeface="游ゴシック" pitchFamily="34" charset="0"/>
+                <a:ea typeface="游ゴシック" pitchFamily="34" charset="-122"/>
+                <a:cs typeface="游ゴシック" pitchFamily="34" charset="-120"/>
+              </a:rPr>
+              <a:t>一般的な相続ビジネス</a:t>
+            </a:r>
+            <a:endParaRPr lang="en-US" sz="1500" dirty="0"/>
+          </a:p>
+        </p:txBody>
+      </p:sp>
+      <p:sp>
+        <p:nvSpPr>
+          <p:cNvPr id="5" name="Text 3"/>
+          <p:cNvSpPr txBox="1"/>
+          <p:nvPr/>
+        </p:nvSpPr>
+        <p:spPr>
+          <a:xfrm>
+            <a:off x="6492240" y="1627632"/>
+            <a:ext cx="5120640" cy="365760"/>
+          </a:xfrm>
+          <a:prstGeom prst="rect">
+            <a:avLst/>
+          </a:prstGeom>
+          <a:noFill/>
+          <a:ln/>
+        </p:spPr>
+        <p:txBody>
+          <a:bodyPr wrap="square" lIns="0" tIns="0" rIns="0" bIns="0" rtlCol="0" anchor="ctr"/>
+          <a:lstStyle/>
+          <a:p>
+            <a:pPr algn="ctr" indent="0" marL="0">
+              <a:buNone/>
+            </a:pPr>
+            <a:r>
+              <a:rPr lang="en-US" sz="1600" b="1" dirty="0">
+                <a:solidFill>
+                  <a:srgbClr val="C9603F"/>
+                </a:solidFill>
+                <a:latin typeface="游ゴシック" pitchFamily="34" charset="0"/>
+                <a:ea typeface="游ゴシック" pitchFamily="34" charset="-122"/>
+                <a:cs typeface="游ゴシック" pitchFamily="34" charset="-120"/>
+              </a:rPr>
+              <a:t>繋ぐグループメソッド</a:t>
+            </a:r>
+            <a:endParaRPr lang="en-US" sz="1600" dirty="0"/>
+          </a:p>
+        </p:txBody>
+      </p:sp>
+      <p:sp>
+        <p:nvSpPr>
+          <p:cNvPr id="6" name="Shape 4"/>
           <p:cNvSpPr/>
           <p:nvPr/>
         </p:nvSpPr>
         <p:spPr>
           <a:xfrm>
-            <a:off x="10607040" y="502920"/>
-            <a:ext cx="822960" cy="822960"/>
-          </a:xfrm>
-          <a:prstGeom prst="ellipse">
+            <a:off x="1508760" y="2103120"/>
+            <a:ext cx="1828800" cy="841248"/>
+          </a:xfrm>
+          <a:prstGeom prst="rect">
+            <a:avLst/>
+          </a:prstGeom>
+          <a:solidFill>
+            <a:srgbClr val="1E3A5F">
+              <a:alpha val="32000"/>
+            </a:srgbClr>
+          </a:solidFill>
+          <a:ln/>
+        </p:spPr>
+      </p:sp>
+      <p:sp>
+        <p:nvSpPr>
+          <p:cNvPr id="7" name="Text 5"/>
+          <p:cNvSpPr txBox="1"/>
+          <p:nvPr/>
+        </p:nvSpPr>
+        <p:spPr>
+          <a:xfrm>
+            <a:off x="1554480" y="2103120"/>
+            <a:ext cx="1737360" cy="841248"/>
+          </a:xfrm>
+          <a:prstGeom prst="rect">
+            <a:avLst/>
+          </a:prstGeom>
+          <a:noFill/>
+          <a:ln/>
+        </p:spPr>
+        <p:txBody>
+          <a:bodyPr wrap="square" lIns="0" tIns="0" rIns="0" bIns="0" rtlCol="0" anchor="ctr"/>
+          <a:lstStyle/>
+          <a:p>
+            <a:pPr algn="ctr" indent="0" marL="0">
+              <a:buNone/>
+            </a:pPr>
+            <a:r>
+              <a:rPr lang="en-US" sz="1050" b="1" dirty="0">
+                <a:solidFill>
+                  <a:srgbClr val="10233A"/>
+                </a:solidFill>
+                <a:latin typeface="游ゴシック" pitchFamily="34" charset="0"/>
+                <a:ea typeface="游ゴシック" pitchFamily="34" charset="-122"/>
+                <a:cs typeface="游ゴシック" pitchFamily="34" charset="-120"/>
+              </a:rPr>
+              <a:t>財産保有者のみ</a:t>
+            </a:r>
+            <a:endParaRPr lang="en-US" sz="1050" dirty="0"/>
+          </a:p>
+        </p:txBody>
+      </p:sp>
+      <p:sp>
+        <p:nvSpPr>
+          <p:cNvPr id="8" name="Text 6"/>
+          <p:cNvSpPr txBox="1"/>
+          <p:nvPr/>
+        </p:nvSpPr>
+        <p:spPr>
+          <a:xfrm>
+            <a:off x="4480560" y="2103120"/>
+            <a:ext cx="1920240" cy="841248"/>
+          </a:xfrm>
+          <a:prstGeom prst="rect">
+            <a:avLst/>
+          </a:prstGeom>
+          <a:noFill/>
+          <a:ln/>
+        </p:spPr>
+        <p:txBody>
+          <a:bodyPr wrap="square" lIns="0" tIns="0" rIns="0" bIns="0" rtlCol="0" anchor="ctr"/>
+          <a:lstStyle/>
+          <a:p>
+            <a:pPr algn="ctr" indent="0" marL="0">
+              <a:buNone/>
+            </a:pPr>
+            <a:r>
+              <a:rPr lang="en-US" sz="1200" b="1" dirty="0">
+                <a:solidFill>
+                  <a:srgbClr val="1E3A5F"/>
+                </a:solidFill>
+                <a:latin typeface="游ゴシック" pitchFamily="34" charset="0"/>
+                <a:ea typeface="游ゴシック" pitchFamily="34" charset="-122"/>
+                <a:cs typeface="游ゴシック" pitchFamily="34" charset="-120"/>
+              </a:rPr>
+              <a:t>①課題化前</a:t>
+            </a:r>
+            <a:endParaRPr lang="en-US" sz="1200" dirty="0"/>
+          </a:p>
+          <a:p>
+            <a:pPr algn="ctr" indent="0" marL="0">
+              <a:buNone/>
+            </a:pPr>
+            <a:r>
+              <a:rPr lang="en-US" sz="1200" b="1" dirty="0">
+                <a:solidFill>
+                  <a:srgbClr val="1E3A5F"/>
+                </a:solidFill>
+                <a:latin typeface="游ゴシック" pitchFamily="34" charset="0"/>
+                <a:ea typeface="游ゴシック" pitchFamily="34" charset="-122"/>
+                <a:cs typeface="游ゴシック" pitchFamily="34" charset="-120"/>
+              </a:rPr>
+              <a:t>（フロント）</a:t>
+            </a:r>
+            <a:endParaRPr lang="en-US" sz="1200" dirty="0"/>
+          </a:p>
+        </p:txBody>
+      </p:sp>
+      <p:sp>
+        <p:nvSpPr>
+          <p:cNvPr id="9" name="Shape 7"/>
+          <p:cNvSpPr/>
+          <p:nvPr/>
+        </p:nvSpPr>
+        <p:spPr>
+          <a:xfrm>
+            <a:off x="6583680" y="2103120"/>
+            <a:ext cx="4937760" cy="841248"/>
+          </a:xfrm>
+          <a:prstGeom prst="rect">
+            <a:avLst/>
+          </a:prstGeom>
+          <a:solidFill>
+            <a:srgbClr val="C9603F">
+              <a:alpha val="32000"/>
+            </a:srgbClr>
+          </a:solidFill>
+          <a:ln/>
+        </p:spPr>
+      </p:sp>
+      <p:sp>
+        <p:nvSpPr>
+          <p:cNvPr id="10" name="Text 8"/>
+          <p:cNvSpPr txBox="1"/>
+          <p:nvPr/>
+        </p:nvSpPr>
+        <p:spPr>
+          <a:xfrm>
+            <a:off x="6629400" y="2103120"/>
+            <a:ext cx="4846320" cy="841248"/>
+          </a:xfrm>
+          <a:prstGeom prst="rect">
+            <a:avLst/>
+          </a:prstGeom>
+          <a:noFill/>
+          <a:ln/>
+        </p:spPr>
+        <p:txBody>
+          <a:bodyPr wrap="square" lIns="0" tIns="0" rIns="0" bIns="0" rtlCol="0" anchor="ctr"/>
+          <a:lstStyle/>
+          <a:p>
+            <a:pPr algn="ctr" indent="0" marL="0">
+              <a:buNone/>
+            </a:pPr>
+            <a:r>
+              <a:rPr lang="en-US" sz="1100" b="1" dirty="0">
+                <a:solidFill>
+                  <a:srgbClr val="10233A"/>
+                </a:solidFill>
+                <a:latin typeface="游ゴシック" pitchFamily="34" charset="0"/>
+                <a:ea typeface="游ゴシック" pitchFamily="34" charset="-122"/>
+                <a:cs typeface="游ゴシック" pitchFamily="34" charset="-120"/>
+              </a:rPr>
+              <a:t>全世代・全資産層</a:t>
+            </a:r>
+            <a:endParaRPr lang="en-US" sz="1100" dirty="0"/>
+          </a:p>
+          <a:p>
+            <a:pPr algn="ctr" indent="0" marL="0">
+              <a:buNone/>
+            </a:pPr>
+            <a:r>
+              <a:rPr lang="en-US" sz="1100" b="1" dirty="0">
+                <a:solidFill>
+                  <a:srgbClr val="10233A"/>
+                </a:solidFill>
+                <a:latin typeface="游ゴシック" pitchFamily="34" charset="0"/>
+                <a:ea typeface="游ゴシック" pitchFamily="34" charset="-122"/>
+                <a:cs typeface="游ゴシック" pitchFamily="34" charset="-120"/>
+              </a:rPr>
+              <a:t>（ACP・人生会議）</a:t>
+            </a:r>
+            <a:endParaRPr lang="en-US" sz="1100" dirty="0"/>
+          </a:p>
+        </p:txBody>
+      </p:sp>
+      <p:sp>
+        <p:nvSpPr>
+          <p:cNvPr id="11" name="Shape 9"/>
+          <p:cNvSpPr/>
+          <p:nvPr/>
+        </p:nvSpPr>
+        <p:spPr>
+          <a:xfrm>
+            <a:off x="1737360" y="3035808"/>
+            <a:ext cx="1371600" cy="841248"/>
+          </a:xfrm>
+          <a:prstGeom prst="rect">
+            <a:avLst/>
+          </a:prstGeom>
+          <a:solidFill>
+            <a:srgbClr val="1E3A5F">
+              <a:alpha val="55000"/>
+            </a:srgbClr>
+          </a:solidFill>
+          <a:ln/>
+        </p:spPr>
+      </p:sp>
+      <p:sp>
+        <p:nvSpPr>
+          <p:cNvPr id="12" name="Text 10"/>
+          <p:cNvSpPr txBox="1"/>
+          <p:nvPr/>
+        </p:nvSpPr>
+        <p:spPr>
+          <a:xfrm>
+            <a:off x="1783080" y="3035808"/>
+            <a:ext cx="1280160" cy="841248"/>
+          </a:xfrm>
+          <a:prstGeom prst="rect">
+            <a:avLst/>
+          </a:prstGeom>
+          <a:noFill/>
+          <a:ln/>
+        </p:spPr>
+        <p:txBody>
+          <a:bodyPr wrap="square" lIns="0" tIns="0" rIns="0" bIns="0" rtlCol="0" anchor="ctr"/>
+          <a:lstStyle/>
+          <a:p>
+            <a:pPr algn="ctr" indent="0" marL="0">
+              <a:buNone/>
+            </a:pPr>
+            <a:r>
+              <a:rPr lang="en-US" sz="1050" b="1" dirty="0">
+                <a:solidFill>
+                  <a:srgbClr val="10233A"/>
+                </a:solidFill>
+                <a:latin typeface="游ゴシック" pitchFamily="34" charset="0"/>
+                <a:ea typeface="游ゴシック" pitchFamily="34" charset="-122"/>
+                <a:cs typeface="游ゴシック" pitchFamily="34" charset="-120"/>
+              </a:rPr>
+              <a:t>相続の悩みを自覚</a:t>
+            </a:r>
+            <a:endParaRPr lang="en-US" sz="1050" dirty="0"/>
+          </a:p>
+        </p:txBody>
+      </p:sp>
+      <p:sp>
+        <p:nvSpPr>
+          <p:cNvPr id="13" name="Text 11"/>
+          <p:cNvSpPr txBox="1"/>
+          <p:nvPr/>
+        </p:nvSpPr>
+        <p:spPr>
+          <a:xfrm>
+            <a:off x="4480560" y="3035808"/>
+            <a:ext cx="1920240" cy="841248"/>
+          </a:xfrm>
+          <a:prstGeom prst="rect">
+            <a:avLst/>
+          </a:prstGeom>
+          <a:noFill/>
+          <a:ln/>
+        </p:spPr>
+        <p:txBody>
+          <a:bodyPr wrap="square" lIns="0" tIns="0" rIns="0" bIns="0" rtlCol="0" anchor="ctr"/>
+          <a:lstStyle/>
+          <a:p>
+            <a:pPr algn="ctr" indent="0" marL="0">
+              <a:buNone/>
+            </a:pPr>
+            <a:r>
+              <a:rPr lang="en-US" sz="1200" b="1" dirty="0">
+                <a:solidFill>
+                  <a:srgbClr val="1E3A5F"/>
+                </a:solidFill>
+                <a:latin typeface="游ゴシック" pitchFamily="34" charset="0"/>
+                <a:ea typeface="游ゴシック" pitchFamily="34" charset="-122"/>
+                <a:cs typeface="游ゴシック" pitchFamily="34" charset="-120"/>
+              </a:rPr>
+              <a:t>②認知</a:t>
+            </a:r>
+            <a:endParaRPr lang="en-US" sz="1200" dirty="0"/>
+          </a:p>
+        </p:txBody>
+      </p:sp>
+      <p:sp>
+        <p:nvSpPr>
+          <p:cNvPr id="14" name="Shape 12"/>
+          <p:cNvSpPr/>
+          <p:nvPr/>
+        </p:nvSpPr>
+        <p:spPr>
+          <a:xfrm>
+            <a:off x="7452360" y="3035808"/>
+            <a:ext cx="3200400" cy="841248"/>
+          </a:xfrm>
+          <a:prstGeom prst="rect">
+            <a:avLst/>
+          </a:prstGeom>
+          <a:solidFill>
+            <a:srgbClr val="C9603F">
+              <a:alpha val="55000"/>
+            </a:srgbClr>
+          </a:solidFill>
+          <a:ln/>
+        </p:spPr>
+      </p:sp>
+      <p:sp>
+        <p:nvSpPr>
+          <p:cNvPr id="15" name="Text 13"/>
+          <p:cNvSpPr txBox="1"/>
+          <p:nvPr/>
+        </p:nvSpPr>
+        <p:spPr>
+          <a:xfrm>
+            <a:off x="7498080" y="3035808"/>
+            <a:ext cx="3108960" cy="841248"/>
+          </a:xfrm>
+          <a:prstGeom prst="rect">
+            <a:avLst/>
+          </a:prstGeom>
+          <a:noFill/>
+          <a:ln/>
+        </p:spPr>
+        <p:txBody>
+          <a:bodyPr wrap="square" lIns="0" tIns="0" rIns="0" bIns="0" rtlCol="0" anchor="ctr"/>
+          <a:lstStyle/>
+          <a:p>
+            <a:pPr algn="ctr" indent="0" marL="0">
+              <a:buNone/>
+            </a:pPr>
+            <a:r>
+              <a:rPr lang="en-US" sz="1100" b="1" dirty="0">
+                <a:solidFill>
+                  <a:srgbClr val="10233A"/>
+                </a:solidFill>
+                <a:latin typeface="游ゴシック" pitchFamily="34" charset="0"/>
+                <a:ea typeface="游ゴシック" pitchFamily="34" charset="-122"/>
+                <a:cs typeface="游ゴシック" pitchFamily="34" charset="-120"/>
+              </a:rPr>
+              <a:t>人生会議の実践者</a:t>
+            </a:r>
+            <a:endParaRPr lang="en-US" sz="1100" dirty="0"/>
+          </a:p>
+        </p:txBody>
+      </p:sp>
+      <p:sp>
+        <p:nvSpPr>
+          <p:cNvPr id="16" name="Shape 14"/>
+          <p:cNvSpPr/>
+          <p:nvPr/>
+        </p:nvSpPr>
+        <p:spPr>
+          <a:xfrm>
+            <a:off x="1943100" y="3968496"/>
+            <a:ext cx="960120" cy="841248"/>
+          </a:xfrm>
+          <a:prstGeom prst="rect">
+            <a:avLst/>
+          </a:prstGeom>
+          <a:solidFill>
+            <a:srgbClr val="1E3A5F">
+              <a:alpha val="77000"/>
+            </a:srgbClr>
+          </a:solidFill>
+          <a:ln/>
+        </p:spPr>
+      </p:sp>
+      <p:sp>
+        <p:nvSpPr>
+          <p:cNvPr id="17" name="Text 15"/>
+          <p:cNvSpPr txBox="1"/>
+          <p:nvPr/>
+        </p:nvSpPr>
+        <p:spPr>
+          <a:xfrm>
+            <a:off x="1988820" y="3968496"/>
+            <a:ext cx="868680" cy="841248"/>
+          </a:xfrm>
+          <a:prstGeom prst="rect">
+            <a:avLst/>
+          </a:prstGeom>
+          <a:noFill/>
+          <a:ln/>
+        </p:spPr>
+        <p:txBody>
+          <a:bodyPr wrap="square" lIns="0" tIns="0" rIns="0" bIns="0" rtlCol="0" anchor="ctr"/>
+          <a:lstStyle/>
+          <a:p>
+            <a:pPr algn="ctr" indent="0" marL="0">
+              <a:buNone/>
+            </a:pPr>
+            <a:r>
+              <a:rPr lang="en-US" sz="1050" b="1" dirty="0">
+                <a:solidFill>
+                  <a:srgbClr val="FFFFFF"/>
+                </a:solidFill>
+                <a:latin typeface="游ゴシック" pitchFamily="34" charset="0"/>
+                <a:ea typeface="游ゴシック" pitchFamily="34" charset="-122"/>
+                <a:cs typeface="游ゴシック" pitchFamily="34" charset="-120"/>
+              </a:rPr>
+              <a:t>士業へ相談</a:t>
+            </a:r>
+            <a:endParaRPr lang="en-US" sz="1050" dirty="0"/>
+          </a:p>
+        </p:txBody>
+      </p:sp>
+      <p:sp>
+        <p:nvSpPr>
+          <p:cNvPr id="18" name="Text 16"/>
+          <p:cNvSpPr txBox="1"/>
+          <p:nvPr/>
+        </p:nvSpPr>
+        <p:spPr>
+          <a:xfrm>
+            <a:off x="4480560" y="3968496"/>
+            <a:ext cx="1920240" cy="841248"/>
+          </a:xfrm>
+          <a:prstGeom prst="rect">
+            <a:avLst/>
+          </a:prstGeom>
+          <a:noFill/>
+          <a:ln/>
+        </p:spPr>
+        <p:txBody>
+          <a:bodyPr wrap="square" lIns="0" tIns="0" rIns="0" bIns="0" rtlCol="0" anchor="ctr"/>
+          <a:lstStyle/>
+          <a:p>
+            <a:pPr algn="ctr" indent="0" marL="0">
+              <a:buNone/>
+            </a:pPr>
+            <a:r>
+              <a:rPr lang="en-US" sz="1200" b="1" dirty="0">
+                <a:solidFill>
+                  <a:srgbClr val="1E3A5F"/>
+                </a:solidFill>
+                <a:latin typeface="游ゴシック" pitchFamily="34" charset="0"/>
+                <a:ea typeface="游ゴシック" pitchFamily="34" charset="-122"/>
+                <a:cs typeface="游ゴシック" pitchFamily="34" charset="-120"/>
+              </a:rPr>
+              <a:t>③情報収集</a:t>
+            </a:r>
+            <a:endParaRPr lang="en-US" sz="1200" dirty="0"/>
+          </a:p>
+        </p:txBody>
+      </p:sp>
+      <p:sp>
+        <p:nvSpPr>
+          <p:cNvPr id="19" name="Shape 17"/>
+          <p:cNvSpPr/>
+          <p:nvPr/>
+        </p:nvSpPr>
+        <p:spPr>
+          <a:xfrm>
+            <a:off x="8138160" y="3968496"/>
+            <a:ext cx="1828800" cy="841248"/>
+          </a:xfrm>
+          <a:prstGeom prst="rect">
+            <a:avLst/>
+          </a:prstGeom>
+          <a:solidFill>
+            <a:srgbClr val="C9603F">
+              <a:alpha val="77000"/>
+            </a:srgbClr>
+          </a:solidFill>
+          <a:ln/>
+        </p:spPr>
+      </p:sp>
+      <p:sp>
+        <p:nvSpPr>
+          <p:cNvPr id="20" name="Text 18"/>
+          <p:cNvSpPr txBox="1"/>
+          <p:nvPr/>
+        </p:nvSpPr>
+        <p:spPr>
+          <a:xfrm>
+            <a:off x="8183880" y="3968496"/>
+            <a:ext cx="1737360" cy="841248"/>
+          </a:xfrm>
+          <a:prstGeom prst="rect">
+            <a:avLst/>
+          </a:prstGeom>
+          <a:noFill/>
+          <a:ln/>
+        </p:spPr>
+        <p:txBody>
+          <a:bodyPr wrap="square" lIns="0" tIns="0" rIns="0" bIns="0" rtlCol="0" anchor="ctr"/>
+          <a:lstStyle/>
+          <a:p>
+            <a:pPr algn="ctr" indent="0" marL="0">
+              <a:buNone/>
+            </a:pPr>
+            <a:r>
+              <a:rPr lang="en-US" sz="1100" b="1" dirty="0">
+                <a:solidFill>
+                  <a:srgbClr val="FFFFFF"/>
+                </a:solidFill>
+                <a:latin typeface="游ゴシック" pitchFamily="34" charset="0"/>
+                <a:ea typeface="游ゴシック" pitchFamily="34" charset="-122"/>
+                <a:cs typeface="游ゴシック" pitchFamily="34" charset="-120"/>
+              </a:rPr>
+              <a:t>個別相談</a:t>
+            </a:r>
+            <a:endParaRPr lang="en-US" sz="1100" dirty="0"/>
+          </a:p>
+          <a:p>
+            <a:pPr algn="ctr" indent="0" marL="0">
+              <a:buNone/>
+            </a:pPr>
+            <a:r>
+              <a:rPr lang="en-US" sz="1100" b="1" dirty="0">
+                <a:solidFill>
+                  <a:srgbClr val="FFFFFF"/>
+                </a:solidFill>
+                <a:latin typeface="游ゴシック" pitchFamily="34" charset="0"/>
+                <a:ea typeface="游ゴシック" pitchFamily="34" charset="-122"/>
+                <a:cs typeface="游ゴシック" pitchFamily="34" charset="-120"/>
+              </a:rPr>
+              <a:t>サポートアドバイザー</a:t>
+            </a:r>
+            <a:endParaRPr lang="en-US" sz="1100" dirty="0"/>
+          </a:p>
+        </p:txBody>
+      </p:sp>
+      <p:sp>
+        <p:nvSpPr>
+          <p:cNvPr id="21" name="Shape 19"/>
+          <p:cNvSpPr/>
+          <p:nvPr/>
+        </p:nvSpPr>
+        <p:spPr>
+          <a:xfrm>
+            <a:off x="2125980" y="4901184"/>
+            <a:ext cx="594360" cy="841248"/>
+          </a:xfrm>
+          <a:prstGeom prst="rect">
+            <a:avLst/>
+          </a:prstGeom>
+          <a:solidFill>
+            <a:srgbClr val="1E3A5F"/>
+          </a:solidFill>
+          <a:ln/>
+        </p:spPr>
+      </p:sp>
+      <p:sp>
+        <p:nvSpPr>
+          <p:cNvPr id="22" name="Text 20"/>
+          <p:cNvSpPr txBox="1"/>
+          <p:nvPr/>
+        </p:nvSpPr>
+        <p:spPr>
+          <a:xfrm>
+            <a:off x="4480560" y="4901184"/>
+            <a:ext cx="1920240" cy="841248"/>
+          </a:xfrm>
+          <a:prstGeom prst="rect">
+            <a:avLst/>
+          </a:prstGeom>
+          <a:noFill/>
+          <a:ln/>
+        </p:spPr>
+        <p:txBody>
+          <a:bodyPr wrap="square" lIns="0" tIns="0" rIns="0" bIns="0" rtlCol="0" anchor="ctr"/>
+          <a:lstStyle/>
+          <a:p>
+            <a:pPr algn="ctr" indent="0" marL="0">
+              <a:buNone/>
+            </a:pPr>
+            <a:r>
+              <a:rPr lang="en-US" sz="1200" b="1" dirty="0">
+                <a:solidFill>
+                  <a:srgbClr val="1E3A5F"/>
+                </a:solidFill>
+                <a:latin typeface="游ゴシック" pitchFamily="34" charset="0"/>
+                <a:ea typeface="游ゴシック" pitchFamily="34" charset="-122"/>
+                <a:cs typeface="游ゴシック" pitchFamily="34" charset="-120"/>
+              </a:rPr>
+              <a:t>④比較検討</a:t>
+            </a:r>
+            <a:endParaRPr lang="en-US" sz="1200" dirty="0"/>
+          </a:p>
+          <a:p>
+            <a:pPr algn="ctr" indent="0" marL="0">
+              <a:buNone/>
+            </a:pPr>
+            <a:r>
+              <a:rPr lang="en-US" sz="1200" b="1" dirty="0">
+                <a:solidFill>
+                  <a:srgbClr val="1E3A5F"/>
+                </a:solidFill>
+                <a:latin typeface="游ゴシック" pitchFamily="34" charset="0"/>
+                <a:ea typeface="游ゴシック" pitchFamily="34" charset="-122"/>
+                <a:cs typeface="游ゴシック" pitchFamily="34" charset="-120"/>
+              </a:rPr>
+              <a:t>・成約</a:t>
+            </a:r>
+            <a:endParaRPr lang="en-US" sz="1200" dirty="0"/>
+          </a:p>
+        </p:txBody>
+      </p:sp>
+      <p:sp>
+        <p:nvSpPr>
+          <p:cNvPr id="23" name="Shape 21"/>
+          <p:cNvSpPr/>
+          <p:nvPr/>
+        </p:nvSpPr>
+        <p:spPr>
+          <a:xfrm>
+            <a:off x="8618220" y="4901184"/>
+            <a:ext cx="868680" cy="841248"/>
+          </a:xfrm>
+          <a:prstGeom prst="rect">
             <a:avLst/>
           </a:prstGeom>
           <a:solidFill>
             <a:srgbClr val="C9603F"/>
           </a:solidFill>
           <a:ln/>
-          <a:effectLst>
-            <a:outerShdw sx="100000" sy="100000" kx="0" ky="0" algn="bl" rotWithShape="0" blurRad="101600" dist="38100" dir="5400000">
-              <a:srgbClr val="10233A">
-                <a:alpha val="18000"/>
-              </a:srgbClr>
-            </a:outerShdw>
-          </a:effectLst>
-        </p:spPr>
-      </p:sp>
-      <p:sp>
-        <p:nvSpPr>
-          <p:cNvPr id="5" name="Text 3"/>
-          <p:cNvSpPr txBox="1"/>
-          <p:nvPr/>
-        </p:nvSpPr>
-        <p:spPr>
-          <a:xfrm>
-            <a:off x="10607040" y="502920"/>
-            <a:ext cx="822960" cy="822960"/>
-          </a:xfrm>
-          <a:prstGeom prst="rect">
-            <a:avLst/>
-          </a:prstGeom>
-          <a:noFill/>
-          <a:ln/>
-        </p:spPr>
-        <p:txBody>
-          <a:bodyPr wrap="square" lIns="0" tIns="0" rIns="0" bIns="0" rtlCol="0" anchor="ctr"/>
-          <a:lstStyle/>
-          <a:p>
-            <a:pPr algn="ctr" indent="0" marL="0">
-              <a:buNone/>
-            </a:pPr>
-            <a:r>
-              <a:rPr lang="en-US" sz="2880" b="1" dirty="0">
-                <a:solidFill>
-                  <a:srgbClr val="FFFFFF"/>
-                </a:solidFill>
-                <a:latin typeface="游ゴシック" pitchFamily="34" charset="0"/>
-                <a:ea typeface="游ゴシック" pitchFamily="34" charset="-122"/>
-                <a:cs typeface="游ゴシック" pitchFamily="34" charset="-120"/>
-              </a:rPr>
-              <a:t>斬</a:t>
-            </a:r>
-            <a:endParaRPr lang="en-US" sz="2880" dirty="0"/>
-          </a:p>
-        </p:txBody>
-      </p:sp>
-      <p:sp>
-        <p:nvSpPr>
-          <p:cNvPr id="6" name="Text 4"/>
-          <p:cNvSpPr txBox="1"/>
-          <p:nvPr/>
-        </p:nvSpPr>
-        <p:spPr>
-          <a:xfrm>
-            <a:off x="640080" y="1783080"/>
-            <a:ext cx="10881360" cy="4206240"/>
-          </a:xfrm>
-          <a:prstGeom prst="rect">
-            <a:avLst/>
-          </a:prstGeom>
-          <a:noFill/>
-          <a:ln/>
-        </p:spPr>
-        <p:txBody>
-          <a:bodyPr wrap="square" lIns="0" tIns="0" rIns="0" bIns="0" rtlCol="0" anchor="t"/>
-          <a:lstStyle/>
-          <a:p>
-            <a:pPr marL="342900" indent="-342900">
-              <a:lnSpc>
-                <a:spcPct val="128000"/>
-              </a:lnSpc>
-              <a:spcAft>
-                <a:spcPts val="1200"/>
-              </a:spcAft>
-              <a:buSzPct val="100000"/>
-              <a:buChar char="●"/>
-            </a:pPr>
-            <a:r>
-              <a:rPr lang="en-US" sz="1500" dirty="0">
-                <a:solidFill>
-                  <a:srgbClr val="3A3A3A"/>
-                </a:solidFill>
-                <a:latin typeface="游ゴシック" pitchFamily="34" charset="0"/>
-                <a:ea typeface="游ゴシック" pitchFamily="34" charset="-122"/>
-                <a:cs typeface="游ゴシック" pitchFamily="34" charset="-120"/>
-              </a:rPr>
-              <a:t>相続コンサルタントが自社の商品を売るのではなく、金融・不動産・士業など周辺専門家の収益の「結節点（hub）」になるという発想そのものが、他に類を見ない（素材①）</a:t>
-            </a:r>
-            <a:endParaRPr lang="en-US" sz="1500" dirty="0"/>
-          </a:p>
-          <a:p>
-            <a:pPr marL="342900" indent="-342900">
-              <a:lnSpc>
-                <a:spcPct val="128000"/>
-              </a:lnSpc>
-              <a:spcAft>
-                <a:spcPts val="1200"/>
-              </a:spcAft>
-              <a:buSzPct val="100000"/>
-              <a:buChar char="●"/>
-            </a:pPr>
-            <a:r>
-              <a:rPr lang="en-US" sz="1500" dirty="0">
-                <a:solidFill>
-                  <a:srgbClr val="3A3A3A"/>
-                </a:solidFill>
-                <a:latin typeface="游ゴシック" pitchFamily="34" charset="0"/>
-                <a:ea typeface="游ゴシック" pitchFamily="34" charset="-122"/>
-                <a:cs typeface="游ゴシック" pitchFamily="34" charset="-120"/>
-              </a:rPr>
-              <a:t>厚生労働省が既に推進している公的な枠組み（ACP＝人生会議）を、自社の“フロントエンド”として活用するという発想の転換（素材②）</a:t>
-            </a:r>
-            <a:endParaRPr lang="en-US" sz="1500" dirty="0"/>
-          </a:p>
-          <a:p>
-            <a:pPr marL="342900" indent="-342900">
-              <a:lnSpc>
-                <a:spcPct val="128000"/>
-              </a:lnSpc>
-              <a:spcAft>
-                <a:spcPts val="1200"/>
-              </a:spcAft>
-              <a:buSzPct val="100000"/>
-              <a:buChar char="●"/>
-            </a:pPr>
-            <a:r>
-              <a:rPr lang="en-US" sz="1500" dirty="0">
-                <a:solidFill>
-                  <a:srgbClr val="3A3A3A"/>
-                </a:solidFill>
-                <a:latin typeface="游ゴシック" pitchFamily="34" charset="0"/>
-                <a:ea typeface="游ゴシック" pitchFamily="34" charset="-122"/>
-                <a:cs typeface="游ゴシック" pitchFamily="34" charset="-120"/>
-              </a:rPr>
-              <a:t>「財産ではなく、家族の抱える“隠れた課題”を見つけに行く」という視点を、育成カリキュラムとして体系化・教材化している（素材③）</a:t>
-            </a:r>
-            <a:endParaRPr lang="en-US" sz="1500" dirty="0"/>
-          </a:p>
-        </p:txBody>
-      </p:sp>
-      <p:sp>
-        <p:nvSpPr>
-          <p:cNvPr id="7" name="Shape 5"/>
-          <p:cNvSpPr/>
-          <p:nvPr/>
-        </p:nvSpPr>
-        <p:spPr>
-          <a:xfrm>
-            <a:off x="640080" y="4846320"/>
-            <a:ext cx="10881360" cy="914400"/>
-          </a:xfrm>
-          <a:prstGeom prst="roundRect">
-            <a:avLst>
-              <a:gd name="adj" fmla="val 8000"/>
-            </a:avLst>
-          </a:prstGeom>
-          <a:solidFill>
-            <a:srgbClr val="1E3A5F"/>
-          </a:solidFill>
-          <a:ln/>
-        </p:spPr>
-      </p:sp>
-      <p:sp>
-        <p:nvSpPr>
-          <p:cNvPr id="8" name="Text 6"/>
-          <p:cNvSpPr txBox="1"/>
-          <p:nvPr/>
-        </p:nvSpPr>
-        <p:spPr>
-          <a:xfrm>
-            <a:off x="914400" y="4846320"/>
-            <a:ext cx="10332720" cy="914400"/>
-          </a:xfrm>
-          <a:prstGeom prst="rect">
-            <a:avLst/>
-          </a:prstGeom>
-          <a:noFill/>
-          <a:ln/>
-        </p:spPr>
-        <p:txBody>
-          <a:bodyPr wrap="square" lIns="0" tIns="0" rIns="0" bIns="0" rtlCol="0" anchor="ctr"/>
-          <a:lstStyle/>
-          <a:p>
-            <a:pPr algn="l" indent="0" marL="0">
-              <a:buNone/>
-            </a:pPr>
-            <a:r>
-              <a:rPr lang="en-US" sz="1700" b="1" dirty="0">
-                <a:solidFill>
-                  <a:srgbClr val="F1DCCF"/>
-                </a:solidFill>
-                <a:latin typeface="游ゴシック" pitchFamily="34" charset="0"/>
-                <a:ea typeface="游ゴシック" pitchFamily="34" charset="-122"/>
-                <a:cs typeface="游ゴシック" pitchFamily="34" charset="-120"/>
-              </a:rPr>
-              <a:t>「ノートを売る」会社ではなく、「専門家たちの収益の結節点になる」会社。</a:t>
-            </a:r>
-            <a:endParaRPr lang="en-US" sz="1700" dirty="0"/>
-          </a:p>
-        </p:txBody>
-      </p:sp>
-      <p:sp>
-        <p:nvSpPr>
-          <p:cNvPr id="9" name="Text 7"/>
+        </p:spPr>
+      </p:sp>
+      <p:sp>
+        <p:nvSpPr>
+          <p:cNvPr id="24" name="Text 22"/>
+          <p:cNvSpPr txBox="1"/>
+          <p:nvPr/>
+        </p:nvSpPr>
+        <p:spPr>
+          <a:xfrm>
+            <a:off x="640080" y="6172200"/>
+            <a:ext cx="10881360" cy="365760"/>
+          </a:xfrm>
+          <a:prstGeom prst="rect">
+            <a:avLst/>
+          </a:prstGeom>
+          <a:noFill/>
+          <a:ln/>
+        </p:spPr>
+        <p:txBody>
+          <a:bodyPr wrap="square" lIns="0" tIns="0" rIns="0" bIns="0" rtlCol="0" anchor="ctr"/>
+          <a:lstStyle/>
+          <a:p>
+            <a:pPr indent="0" marL="0">
+              <a:buNone/>
+            </a:pPr>
+            <a:r>
+              <a:rPr lang="en-US" sz="1300" i="1" dirty="0">
+                <a:solidFill>
+                  <a:srgbClr val="6B6B6B"/>
+                </a:solidFill>
+                <a:latin typeface="游ゴシック" pitchFamily="34" charset="0"/>
+                <a:ea typeface="游ゴシック" pitchFamily="34" charset="-122"/>
+                <a:cs typeface="游ゴシック" pitchFamily="34" charset="-120"/>
+              </a:rPr>
+              <a:t>入口を「財産」から「人生」に変えたことで、フロント（課題化前）の母数そのものを構造的に拡大している。</a:t>
+            </a:r>
+            <a:endParaRPr lang="en-US" sz="1300" dirty="0"/>
+          </a:p>
+        </p:txBody>
+      </p:sp>
+      <p:sp>
+        <p:nvSpPr>
+          <p:cNvPr id="25" name="Text 23"/>
           <p:cNvSpPr txBox="1"/>
           <p:nvPr/>
         </p:nvSpPr>
@@ -6987,7 +9237,7 @@
                 <a:ea typeface="游ゴシック" pitchFamily="34" charset="-122"/>
                 <a:cs typeface="游ゴシック" pitchFamily="34" charset="-120"/>
               </a:rPr>
-              <a:t>02 / PROFITABILITY</a:t>
+              <a:t>MARKET WE CREATED</a:t>
             </a:r>
             <a:endParaRPr lang="en-US" sz="1300" dirty="0"/>
           </a:p>
@@ -7026,7 +9276,7 @@
                 <a:ea typeface="游ゴシック" pitchFamily="34" charset="-122"/>
                 <a:cs typeface="游ゴシック" pitchFamily="34" charset="-120"/>
               </a:rPr>
-              <a:t>収益性 ― 自社の売上ではなく、創出した経済圏で語る</a:t>
+              <a:t>hubとしての3年間 ― 創出した経済圏（想定内訳）</a:t>
             </a:r>
             <a:endParaRPr lang="en-US" sz="2700" dirty="0"/>
           </a:p>
@@ -7040,14 +9290,918 @@
         </p:nvSpPr>
         <p:spPr>
           <a:xfrm>
-            <a:off x="10607040" y="502920"/>
-            <a:ext cx="822960" cy="822960"/>
+            <a:off x="5943600" y="2560320"/>
+            <a:ext cx="9144" cy="1417320"/>
+          </a:xfrm>
+          <a:prstGeom prst="line">
+            <a:avLst/>
+          </a:prstGeom>
+          <a:noFill/>
+          <a:ln w="19050">
+            <a:solidFill>
+              <a:srgbClr val="C9C2B6"/>
+            </a:solidFill>
+            <a:prstDash val="sysDot"/>
+          </a:ln>
+        </p:spPr>
+      </p:sp>
+      <p:sp>
+        <p:nvSpPr>
+          <p:cNvPr id="5" name="Shape 3"/>
+          <p:cNvSpPr/>
+          <p:nvPr/>
+        </p:nvSpPr>
+        <p:spPr>
+          <a:xfrm>
+            <a:off x="5943600" y="2975443"/>
+            <a:ext cx="2263025" cy="1002197"/>
+          </a:xfrm>
+          <a:prstGeom prst="line">
+            <a:avLst/>
+          </a:prstGeom>
+          <a:noFill/>
+          <a:ln w="19050">
+            <a:solidFill>
+              <a:srgbClr val="C9C2B6"/>
+            </a:solidFill>
+            <a:prstDash val="sysDot"/>
+          </a:ln>
+        </p:spPr>
+      </p:sp>
+      <p:sp>
+        <p:nvSpPr>
+          <p:cNvPr id="6" name="Shape 4"/>
+          <p:cNvSpPr/>
+          <p:nvPr/>
+        </p:nvSpPr>
+        <p:spPr>
+          <a:xfrm>
+            <a:off x="5943600" y="3977640"/>
+            <a:ext cx="3200400" cy="9144"/>
+          </a:xfrm>
+          <a:prstGeom prst="line">
+            <a:avLst/>
+          </a:prstGeom>
+          <a:noFill/>
+          <a:ln w="19050">
+            <a:solidFill>
+              <a:srgbClr val="C9C2B6"/>
+            </a:solidFill>
+            <a:prstDash val="sysDot"/>
+          </a:ln>
+        </p:spPr>
+      </p:sp>
+      <p:sp>
+        <p:nvSpPr>
+          <p:cNvPr id="7" name="Shape 5"/>
+          <p:cNvSpPr/>
+          <p:nvPr/>
+        </p:nvSpPr>
+        <p:spPr>
+          <a:xfrm>
+            <a:off x="5943600" y="3977640"/>
+            <a:ext cx="2263025" cy="1002197"/>
+          </a:xfrm>
+          <a:prstGeom prst="line">
+            <a:avLst/>
+          </a:prstGeom>
+          <a:noFill/>
+          <a:ln w="19050">
+            <a:solidFill>
+              <a:srgbClr val="C9C2B6"/>
+            </a:solidFill>
+            <a:prstDash val="sysDot"/>
+          </a:ln>
+        </p:spPr>
+      </p:sp>
+      <p:sp>
+        <p:nvSpPr>
+          <p:cNvPr id="8" name="Shape 6"/>
+          <p:cNvSpPr/>
+          <p:nvPr/>
+        </p:nvSpPr>
+        <p:spPr>
+          <a:xfrm>
+            <a:off x="5943600" y="3977640"/>
+            <a:ext cx="9144" cy="1417320"/>
+          </a:xfrm>
+          <a:prstGeom prst="line">
+            <a:avLst/>
+          </a:prstGeom>
+          <a:noFill/>
+          <a:ln w="19050">
+            <a:solidFill>
+              <a:srgbClr val="C9C2B6"/>
+            </a:solidFill>
+            <a:prstDash val="sysDot"/>
+          </a:ln>
+        </p:spPr>
+      </p:sp>
+      <p:sp>
+        <p:nvSpPr>
+          <p:cNvPr id="9" name="Shape 7"/>
+          <p:cNvSpPr/>
+          <p:nvPr/>
+        </p:nvSpPr>
+        <p:spPr>
+          <a:xfrm>
+            <a:off x="3680575" y="3977640"/>
+            <a:ext cx="2263025" cy="1002197"/>
+          </a:xfrm>
+          <a:prstGeom prst="line">
+            <a:avLst/>
+          </a:prstGeom>
+          <a:noFill/>
+          <a:ln w="19050">
+            <a:solidFill>
+              <a:srgbClr val="C9C2B6"/>
+            </a:solidFill>
+            <a:prstDash val="sysDot"/>
+          </a:ln>
+        </p:spPr>
+      </p:sp>
+      <p:sp>
+        <p:nvSpPr>
+          <p:cNvPr id="10" name="Shape 8"/>
+          <p:cNvSpPr/>
+          <p:nvPr/>
+        </p:nvSpPr>
+        <p:spPr>
+          <a:xfrm>
+            <a:off x="2743200" y="3977640"/>
+            <a:ext cx="3200400" cy="9144"/>
+          </a:xfrm>
+          <a:prstGeom prst="line">
+            <a:avLst/>
+          </a:prstGeom>
+          <a:noFill/>
+          <a:ln w="19050">
+            <a:solidFill>
+              <a:srgbClr val="C9C2B6"/>
+            </a:solidFill>
+            <a:prstDash val="sysDot"/>
+          </a:ln>
+        </p:spPr>
+      </p:sp>
+      <p:sp>
+        <p:nvSpPr>
+          <p:cNvPr id="11" name="Shape 9"/>
+          <p:cNvSpPr/>
+          <p:nvPr/>
+        </p:nvSpPr>
+        <p:spPr>
+          <a:xfrm>
+            <a:off x="3680575" y="2975443"/>
+            <a:ext cx="2263025" cy="1002197"/>
+          </a:xfrm>
+          <a:prstGeom prst="line">
+            <a:avLst/>
+          </a:prstGeom>
+          <a:noFill/>
+          <a:ln w="19050">
+            <a:solidFill>
+              <a:srgbClr val="C9C2B6"/>
+            </a:solidFill>
+            <a:prstDash val="sysDot"/>
+          </a:ln>
+        </p:spPr>
+      </p:sp>
+      <p:sp>
+        <p:nvSpPr>
+          <p:cNvPr id="12" name="Shape 10"/>
+          <p:cNvSpPr/>
+          <p:nvPr/>
+        </p:nvSpPr>
+        <p:spPr>
+          <a:xfrm>
+            <a:off x="5052060" y="1668780"/>
+            <a:ext cx="1783080" cy="1783080"/>
+          </a:xfrm>
+          <a:prstGeom prst="ellipse">
+            <a:avLst/>
+          </a:prstGeom>
+          <a:solidFill>
+            <a:srgbClr val="1E3A5F"/>
+          </a:solidFill>
+          <a:ln/>
+        </p:spPr>
+      </p:sp>
+      <p:sp>
+        <p:nvSpPr>
+          <p:cNvPr id="13" name="Text 11"/>
+          <p:cNvSpPr txBox="1"/>
+          <p:nvPr/>
+        </p:nvSpPr>
+        <p:spPr>
+          <a:xfrm>
+            <a:off x="4732020" y="1668780"/>
+            <a:ext cx="2423160" cy="1783080"/>
+          </a:xfrm>
+          <a:prstGeom prst="rect">
+            <a:avLst/>
+          </a:prstGeom>
+          <a:noFill/>
+          <a:ln/>
+        </p:spPr>
+        <p:txBody>
+          <a:bodyPr wrap="square" lIns="0" tIns="0" rIns="0" bIns="0" rtlCol="0" anchor="ctr"/>
+          <a:lstStyle/>
+          <a:p>
+            <a:pPr algn="ctr" indent="0" marL="0">
+              <a:buNone/>
+            </a:pPr>
+            <a:r>
+              <a:rPr lang="en-US" sz="1050" b="1" dirty="0">
+                <a:solidFill>
+                  <a:srgbClr val="FFFFFF"/>
+                </a:solidFill>
+                <a:latin typeface="游ゴシック" pitchFamily="34" charset="0"/>
+                <a:ea typeface="游ゴシック" pitchFamily="34" charset="-122"/>
+                <a:cs typeface="游ゴシック" pitchFamily="34" charset="-120"/>
+              </a:rPr>
+              <a:t>金融</a:t>
+            </a:r>
+            <a:endParaRPr lang="en-US" sz="1050" dirty="0"/>
+          </a:p>
+          <a:p>
+            <a:pPr algn="ctr" indent="0" marL="0">
+              <a:buNone/>
+            </a:pPr>
+            <a:r>
+              <a:rPr lang="en-US" sz="1050" b="1" dirty="0">
+                <a:solidFill>
+                  <a:srgbClr val="FFFFFF"/>
+                </a:solidFill>
+                <a:latin typeface="游ゴシック" pitchFamily="34" charset="0"/>
+                <a:ea typeface="游ゴシック" pitchFamily="34" charset="-122"/>
+                <a:cs typeface="游ゴシック" pitchFamily="34" charset="-120"/>
+              </a:rPr>
+              <a:t>50億円</a:t>
+            </a:r>
+            <a:endParaRPr lang="en-US" sz="1050" dirty="0"/>
+          </a:p>
+        </p:txBody>
+      </p:sp>
+      <p:sp>
+        <p:nvSpPr>
+          <p:cNvPr id="14" name="Shape 12"/>
+          <p:cNvSpPr/>
+          <p:nvPr/>
+        </p:nvSpPr>
+        <p:spPr>
+          <a:xfrm>
+            <a:off x="7406525" y="2175343"/>
+            <a:ext cx="1600200" cy="1600200"/>
+          </a:xfrm>
+          <a:prstGeom prst="ellipse">
+            <a:avLst/>
+          </a:prstGeom>
+          <a:solidFill>
+            <a:srgbClr val="1E3A5F"/>
+          </a:solidFill>
+          <a:ln/>
+        </p:spPr>
+      </p:sp>
+      <p:sp>
+        <p:nvSpPr>
+          <p:cNvPr id="15" name="Text 13"/>
+          <p:cNvSpPr txBox="1"/>
+          <p:nvPr/>
+        </p:nvSpPr>
+        <p:spPr>
+          <a:xfrm>
+            <a:off x="7086485" y="2175343"/>
+            <a:ext cx="2240280" cy="1600200"/>
+          </a:xfrm>
+          <a:prstGeom prst="rect">
+            <a:avLst/>
+          </a:prstGeom>
+          <a:noFill/>
+          <a:ln/>
+        </p:spPr>
+        <p:txBody>
+          <a:bodyPr wrap="square" lIns="0" tIns="0" rIns="0" bIns="0" rtlCol="0" anchor="ctr"/>
+          <a:lstStyle/>
+          <a:p>
+            <a:pPr algn="ctr" indent="0" marL="0">
+              <a:buNone/>
+            </a:pPr>
+            <a:r>
+              <a:rPr lang="en-US" sz="1050" b="1" dirty="0">
+                <a:solidFill>
+                  <a:srgbClr val="FFFFFF"/>
+                </a:solidFill>
+                <a:latin typeface="游ゴシック" pitchFamily="34" charset="0"/>
+                <a:ea typeface="游ゴシック" pitchFamily="34" charset="-122"/>
+                <a:cs typeface="游ゴシック" pitchFamily="34" charset="-120"/>
+              </a:rPr>
+              <a:t>不動産</a:t>
+            </a:r>
+            <a:endParaRPr lang="en-US" sz="1050" dirty="0"/>
+          </a:p>
+          <a:p>
+            <a:pPr algn="ctr" indent="0" marL="0">
+              <a:buNone/>
+            </a:pPr>
+            <a:r>
+              <a:rPr lang="en-US" sz="1050" b="1" dirty="0">
+                <a:solidFill>
+                  <a:srgbClr val="FFFFFF"/>
+                </a:solidFill>
+                <a:latin typeface="游ゴシック" pitchFamily="34" charset="0"/>
+                <a:ea typeface="游ゴシック" pitchFamily="34" charset="-122"/>
+                <a:cs typeface="游ゴシック" pitchFamily="34" charset="-120"/>
+              </a:rPr>
+              <a:t>30億円</a:t>
+            </a:r>
+            <a:endParaRPr lang="en-US" sz="1050" dirty="0"/>
+          </a:p>
+        </p:txBody>
+      </p:sp>
+      <p:sp>
+        <p:nvSpPr>
+          <p:cNvPr id="16" name="Shape 14"/>
+          <p:cNvSpPr/>
+          <p:nvPr/>
+        </p:nvSpPr>
+        <p:spPr>
+          <a:xfrm>
+            <a:off x="8549640" y="3383280"/>
+            <a:ext cx="1188720" cy="1188720"/>
+          </a:xfrm>
+          <a:prstGeom prst="ellipse">
+            <a:avLst/>
+          </a:prstGeom>
+          <a:solidFill>
+            <a:srgbClr val="1E3A5F"/>
+          </a:solidFill>
+          <a:ln/>
+        </p:spPr>
+      </p:sp>
+      <p:sp>
+        <p:nvSpPr>
+          <p:cNvPr id="17" name="Text 15"/>
+          <p:cNvSpPr txBox="1"/>
+          <p:nvPr/>
+        </p:nvSpPr>
+        <p:spPr>
+          <a:xfrm>
+            <a:off x="8229600" y="3383280"/>
+            <a:ext cx="1828800" cy="1188720"/>
+          </a:xfrm>
+          <a:prstGeom prst="rect">
+            <a:avLst/>
+          </a:prstGeom>
+          <a:noFill/>
+          <a:ln/>
+        </p:spPr>
+        <p:txBody>
+          <a:bodyPr wrap="square" lIns="0" tIns="0" rIns="0" bIns="0" rtlCol="0" anchor="ctr"/>
+          <a:lstStyle/>
+          <a:p>
+            <a:pPr algn="ctr" indent="0" marL="0">
+              <a:buNone/>
+            </a:pPr>
+            <a:r>
+              <a:rPr lang="en-US" sz="1050" b="1" dirty="0">
+                <a:solidFill>
+                  <a:srgbClr val="FFFFFF"/>
+                </a:solidFill>
+                <a:latin typeface="游ゴシック" pitchFamily="34" charset="0"/>
+                <a:ea typeface="游ゴシック" pitchFamily="34" charset="-122"/>
+                <a:cs typeface="游ゴシック" pitchFamily="34" charset="-120"/>
+              </a:rPr>
+              <a:t>M&amp;A</a:t>
+            </a:r>
+            <a:endParaRPr lang="en-US" sz="1050" dirty="0"/>
+          </a:p>
+          <a:p>
+            <a:pPr algn="ctr" indent="0" marL="0">
+              <a:buNone/>
+            </a:pPr>
+            <a:r>
+              <a:rPr lang="en-US" sz="1050" b="1" dirty="0">
+                <a:solidFill>
+                  <a:srgbClr val="FFFFFF"/>
+                </a:solidFill>
+                <a:latin typeface="游ゴシック" pitchFamily="34" charset="0"/>
+                <a:ea typeface="游ゴシック" pitchFamily="34" charset="-122"/>
+                <a:cs typeface="游ゴシック" pitchFamily="34" charset="-120"/>
+              </a:rPr>
+              <a:t>5億円</a:t>
+            </a:r>
+            <a:endParaRPr lang="en-US" sz="1050" dirty="0"/>
+          </a:p>
+        </p:txBody>
+      </p:sp>
+      <p:sp>
+        <p:nvSpPr>
+          <p:cNvPr id="18" name="Shape 16"/>
+          <p:cNvSpPr/>
+          <p:nvPr/>
+        </p:nvSpPr>
+        <p:spPr>
+          <a:xfrm>
+            <a:off x="7566545" y="4339757"/>
+            <a:ext cx="1280160" cy="1280160"/>
+          </a:xfrm>
+          <a:prstGeom prst="ellipse">
+            <a:avLst/>
+          </a:prstGeom>
+          <a:solidFill>
+            <a:srgbClr val="1E3A5F"/>
+          </a:solidFill>
+          <a:ln/>
+        </p:spPr>
+      </p:sp>
+      <p:sp>
+        <p:nvSpPr>
+          <p:cNvPr id="19" name="Text 17"/>
+          <p:cNvSpPr txBox="1"/>
+          <p:nvPr/>
+        </p:nvSpPr>
+        <p:spPr>
+          <a:xfrm>
+            <a:off x="7246505" y="4339757"/>
+            <a:ext cx="1920240" cy="1280160"/>
+          </a:xfrm>
+          <a:prstGeom prst="rect">
+            <a:avLst/>
+          </a:prstGeom>
+          <a:noFill/>
+          <a:ln/>
+        </p:spPr>
+        <p:txBody>
+          <a:bodyPr wrap="square" lIns="0" tIns="0" rIns="0" bIns="0" rtlCol="0" anchor="ctr"/>
+          <a:lstStyle/>
+          <a:p>
+            <a:pPr algn="ctr" indent="0" marL="0">
+              <a:buNone/>
+            </a:pPr>
+            <a:r>
+              <a:rPr lang="en-US" sz="1050" b="1" dirty="0">
+                <a:solidFill>
+                  <a:srgbClr val="FFFFFF"/>
+                </a:solidFill>
+                <a:latin typeface="游ゴシック" pitchFamily="34" charset="0"/>
+                <a:ea typeface="游ゴシック" pitchFamily="34" charset="-122"/>
+                <a:cs typeface="游ゴシック" pitchFamily="34" charset="-120"/>
+              </a:rPr>
+              <a:t>その他</a:t>
+            </a:r>
+            <a:endParaRPr lang="en-US" sz="1050" dirty="0"/>
+          </a:p>
+          <a:p>
+            <a:pPr algn="ctr" indent="0" marL="0">
+              <a:buNone/>
+            </a:pPr>
+            <a:r>
+              <a:rPr lang="en-US" sz="1050" b="1" dirty="0">
+                <a:solidFill>
+                  <a:srgbClr val="FFFFFF"/>
+                </a:solidFill>
+                <a:latin typeface="游ゴシック" pitchFamily="34" charset="0"/>
+                <a:ea typeface="游ゴシック" pitchFamily="34" charset="-122"/>
+                <a:cs typeface="游ゴシック" pitchFamily="34" charset="-120"/>
+              </a:rPr>
+              <a:t>7億円</a:t>
+            </a:r>
+            <a:endParaRPr lang="en-US" sz="1050" dirty="0"/>
+          </a:p>
+        </p:txBody>
+      </p:sp>
+      <p:sp>
+        <p:nvSpPr>
+          <p:cNvPr id="20" name="Shape 18"/>
+          <p:cNvSpPr/>
+          <p:nvPr/>
+        </p:nvSpPr>
+        <p:spPr>
+          <a:xfrm>
+            <a:off x="5372100" y="4823460"/>
+            <a:ext cx="1143000" cy="1143000"/>
+          </a:xfrm>
+          <a:prstGeom prst="ellipse">
+            <a:avLst/>
+          </a:prstGeom>
+          <a:solidFill>
+            <a:srgbClr val="1E3A5F"/>
+          </a:solidFill>
+          <a:ln/>
+        </p:spPr>
+      </p:sp>
+      <p:sp>
+        <p:nvSpPr>
+          <p:cNvPr id="21" name="Text 19"/>
+          <p:cNvSpPr txBox="1"/>
+          <p:nvPr/>
+        </p:nvSpPr>
+        <p:spPr>
+          <a:xfrm>
+            <a:off x="5052060" y="4823460"/>
+            <a:ext cx="1783080" cy="1143000"/>
+          </a:xfrm>
+          <a:prstGeom prst="rect">
+            <a:avLst/>
+          </a:prstGeom>
+          <a:noFill/>
+          <a:ln/>
+        </p:spPr>
+        <p:txBody>
+          <a:bodyPr wrap="square" lIns="0" tIns="0" rIns="0" bIns="0" rtlCol="0" anchor="ctr"/>
+          <a:lstStyle/>
+          <a:p>
+            <a:pPr algn="ctr" indent="0" marL="0">
+              <a:buNone/>
+            </a:pPr>
+            <a:r>
+              <a:rPr lang="en-US" sz="1050" b="1" dirty="0">
+                <a:solidFill>
+                  <a:srgbClr val="FFFFFF"/>
+                </a:solidFill>
+                <a:latin typeface="游ゴシック" pitchFamily="34" charset="0"/>
+                <a:ea typeface="游ゴシック" pitchFamily="34" charset="-122"/>
+                <a:cs typeface="游ゴシック" pitchFamily="34" charset="-120"/>
+              </a:rPr>
+              <a:t>有料老人</a:t>
+            </a:r>
+            <a:endParaRPr lang="en-US" sz="1050" dirty="0"/>
+          </a:p>
+          <a:p>
+            <a:pPr algn="ctr" indent="0" marL="0">
+              <a:buNone/>
+            </a:pPr>
+            <a:r>
+              <a:rPr lang="en-US" sz="1050" b="1" dirty="0">
+                <a:solidFill>
+                  <a:srgbClr val="FFFFFF"/>
+                </a:solidFill>
+                <a:latin typeface="游ゴシック" pitchFamily="34" charset="0"/>
+                <a:ea typeface="游ゴシック" pitchFamily="34" charset="-122"/>
+                <a:cs typeface="游ゴシック" pitchFamily="34" charset="-120"/>
+              </a:rPr>
+              <a:t>ホーム</a:t>
+            </a:r>
+            <a:endParaRPr lang="en-US" sz="1050" dirty="0"/>
+          </a:p>
+          <a:p>
+            <a:pPr algn="ctr" indent="0" marL="0">
+              <a:buNone/>
+            </a:pPr>
+            <a:r>
+              <a:rPr lang="en-US" sz="1050" b="1" dirty="0">
+                <a:solidFill>
+                  <a:srgbClr val="FFFFFF"/>
+                </a:solidFill>
+                <a:latin typeface="游ゴシック" pitchFamily="34" charset="0"/>
+                <a:ea typeface="游ゴシック" pitchFamily="34" charset="-122"/>
+                <a:cs typeface="游ゴシック" pitchFamily="34" charset="-120"/>
+              </a:rPr>
+              <a:t>3億円</a:t>
+            </a:r>
+            <a:endParaRPr lang="en-US" sz="1050" dirty="0"/>
+          </a:p>
+        </p:txBody>
+      </p:sp>
+      <p:sp>
+        <p:nvSpPr>
+          <p:cNvPr id="22" name="Shape 20"/>
+          <p:cNvSpPr/>
+          <p:nvPr/>
+        </p:nvSpPr>
+        <p:spPr>
+          <a:xfrm>
+            <a:off x="3200515" y="4499777"/>
+            <a:ext cx="960120" cy="960120"/>
+          </a:xfrm>
+          <a:prstGeom prst="ellipse">
+            <a:avLst/>
+          </a:prstGeom>
+          <a:solidFill>
+            <a:srgbClr val="1E3A5F"/>
+          </a:solidFill>
+          <a:ln/>
+        </p:spPr>
+      </p:sp>
+      <p:sp>
+        <p:nvSpPr>
+          <p:cNvPr id="23" name="Text 21"/>
+          <p:cNvSpPr txBox="1"/>
+          <p:nvPr/>
+        </p:nvSpPr>
+        <p:spPr>
+          <a:xfrm>
+            <a:off x="2880475" y="4499777"/>
+            <a:ext cx="1600200" cy="960120"/>
+          </a:xfrm>
+          <a:prstGeom prst="rect">
+            <a:avLst/>
+          </a:prstGeom>
+          <a:noFill/>
+          <a:ln/>
+        </p:spPr>
+        <p:txBody>
+          <a:bodyPr wrap="square" lIns="0" tIns="0" rIns="0" bIns="0" rtlCol="0" anchor="ctr"/>
+          <a:lstStyle/>
+          <a:p>
+            <a:pPr algn="ctr" indent="0" marL="0">
+              <a:buNone/>
+            </a:pPr>
+            <a:r>
+              <a:rPr lang="en-US" sz="1050" b="1" dirty="0">
+                <a:solidFill>
+                  <a:srgbClr val="FFFFFF"/>
+                </a:solidFill>
+                <a:latin typeface="游ゴシック" pitchFamily="34" charset="0"/>
+                <a:ea typeface="游ゴシック" pitchFamily="34" charset="-122"/>
+                <a:cs typeface="游ゴシック" pitchFamily="34" charset="-120"/>
+              </a:rPr>
+              <a:t>弁護士</a:t>
+            </a:r>
+            <a:endParaRPr lang="en-US" sz="1050" dirty="0"/>
+          </a:p>
+          <a:p>
+            <a:pPr algn="ctr" indent="0" marL="0">
+              <a:buNone/>
+            </a:pPr>
+            <a:r>
+              <a:rPr lang="en-US" sz="1050" b="1" dirty="0">
+                <a:solidFill>
+                  <a:srgbClr val="FFFFFF"/>
+                </a:solidFill>
+                <a:latin typeface="游ゴシック" pitchFamily="34" charset="0"/>
+                <a:ea typeface="游ゴシック" pitchFamily="34" charset="-122"/>
+                <a:cs typeface="游ゴシック" pitchFamily="34" charset="-120"/>
+              </a:rPr>
+              <a:t>1億円</a:t>
+            </a:r>
+            <a:endParaRPr lang="en-US" sz="1050" dirty="0"/>
+          </a:p>
+        </p:txBody>
+      </p:sp>
+      <p:sp>
+        <p:nvSpPr>
+          <p:cNvPr id="24" name="Shape 22"/>
+          <p:cNvSpPr/>
+          <p:nvPr/>
+        </p:nvSpPr>
+        <p:spPr>
+          <a:xfrm>
+            <a:off x="2217420" y="3451860"/>
+            <a:ext cx="1051560" cy="1051560"/>
+          </a:xfrm>
+          <a:prstGeom prst="ellipse">
+            <a:avLst/>
+          </a:prstGeom>
+          <a:solidFill>
+            <a:srgbClr val="1E3A5F"/>
+          </a:solidFill>
+          <a:ln/>
+        </p:spPr>
+      </p:sp>
+      <p:sp>
+        <p:nvSpPr>
+          <p:cNvPr id="25" name="Text 23"/>
+          <p:cNvSpPr txBox="1"/>
+          <p:nvPr/>
+        </p:nvSpPr>
+        <p:spPr>
+          <a:xfrm>
+            <a:off x="1897380" y="3451860"/>
+            <a:ext cx="1691640" cy="1051560"/>
+          </a:xfrm>
+          <a:prstGeom prst="rect">
+            <a:avLst/>
+          </a:prstGeom>
+          <a:noFill/>
+          <a:ln/>
+        </p:spPr>
+        <p:txBody>
+          <a:bodyPr wrap="square" lIns="0" tIns="0" rIns="0" bIns="0" rtlCol="0" anchor="ctr"/>
+          <a:lstStyle/>
+          <a:p>
+            <a:pPr algn="ctr" indent="0" marL="0">
+              <a:buNone/>
+            </a:pPr>
+            <a:r>
+              <a:rPr lang="en-US" sz="1050" b="1" dirty="0">
+                <a:solidFill>
+                  <a:srgbClr val="FFFFFF"/>
+                </a:solidFill>
+                <a:latin typeface="游ゴシック" pitchFamily="34" charset="0"/>
+                <a:ea typeface="游ゴシック" pitchFamily="34" charset="-122"/>
+                <a:cs typeface="游ゴシック" pitchFamily="34" charset="-120"/>
+              </a:rPr>
+              <a:t>司法書士・</a:t>
+            </a:r>
+            <a:endParaRPr lang="en-US" sz="1050" dirty="0"/>
+          </a:p>
+          <a:p>
+            <a:pPr algn="ctr" indent="0" marL="0">
+              <a:buNone/>
+            </a:pPr>
+            <a:r>
+              <a:rPr lang="en-US" sz="1050" b="1" dirty="0">
+                <a:solidFill>
+                  <a:srgbClr val="FFFFFF"/>
+                </a:solidFill>
+                <a:latin typeface="游ゴシック" pitchFamily="34" charset="0"/>
+                <a:ea typeface="游ゴシック" pitchFamily="34" charset="-122"/>
+                <a:cs typeface="游ゴシック" pitchFamily="34" charset="-120"/>
+              </a:rPr>
+              <a:t>行政書士</a:t>
+            </a:r>
+            <a:endParaRPr lang="en-US" sz="1050" dirty="0"/>
+          </a:p>
+          <a:p>
+            <a:pPr algn="ctr" indent="0" marL="0">
+              <a:buNone/>
+            </a:pPr>
+            <a:r>
+              <a:rPr lang="en-US" sz="1050" b="1" dirty="0">
+                <a:solidFill>
+                  <a:srgbClr val="FFFFFF"/>
+                </a:solidFill>
+                <a:latin typeface="游ゴシック" pitchFamily="34" charset="0"/>
+                <a:ea typeface="游ゴシック" pitchFamily="34" charset="-122"/>
+                <a:cs typeface="游ゴシック" pitchFamily="34" charset="-120"/>
+              </a:rPr>
+              <a:t>2億円</a:t>
+            </a:r>
+            <a:endParaRPr lang="en-US" sz="1050" dirty="0"/>
+          </a:p>
+        </p:txBody>
+      </p:sp>
+      <p:sp>
+        <p:nvSpPr>
+          <p:cNvPr id="26" name="Shape 24"/>
+          <p:cNvSpPr/>
+          <p:nvPr/>
+        </p:nvSpPr>
+        <p:spPr>
+          <a:xfrm>
+            <a:off x="3154795" y="2449663"/>
+            <a:ext cx="1051560" cy="1051560"/>
+          </a:xfrm>
+          <a:prstGeom prst="ellipse">
+            <a:avLst/>
+          </a:prstGeom>
+          <a:solidFill>
+            <a:srgbClr val="1E3A5F"/>
+          </a:solidFill>
+          <a:ln/>
+        </p:spPr>
+      </p:sp>
+      <p:sp>
+        <p:nvSpPr>
+          <p:cNvPr id="27" name="Text 25"/>
+          <p:cNvSpPr txBox="1"/>
+          <p:nvPr/>
+        </p:nvSpPr>
+        <p:spPr>
+          <a:xfrm>
+            <a:off x="2834755" y="2449663"/>
+            <a:ext cx="1691640" cy="1051560"/>
+          </a:xfrm>
+          <a:prstGeom prst="rect">
+            <a:avLst/>
+          </a:prstGeom>
+          <a:noFill/>
+          <a:ln/>
+        </p:spPr>
+        <p:txBody>
+          <a:bodyPr wrap="square" lIns="0" tIns="0" rIns="0" bIns="0" rtlCol="0" anchor="ctr"/>
+          <a:lstStyle/>
+          <a:p>
+            <a:pPr algn="ctr" indent="0" marL="0">
+              <a:buNone/>
+            </a:pPr>
+            <a:r>
+              <a:rPr lang="en-US" sz="1050" b="1" dirty="0">
+                <a:solidFill>
+                  <a:srgbClr val="FFFFFF"/>
+                </a:solidFill>
+                <a:latin typeface="游ゴシック" pitchFamily="34" charset="0"/>
+                <a:ea typeface="游ゴシック" pitchFamily="34" charset="-122"/>
+                <a:cs typeface="游ゴシック" pitchFamily="34" charset="-120"/>
+              </a:rPr>
+              <a:t>税理士</a:t>
+            </a:r>
+            <a:endParaRPr lang="en-US" sz="1050" dirty="0"/>
+          </a:p>
+          <a:p>
+            <a:pPr algn="ctr" indent="0" marL="0">
+              <a:buNone/>
+            </a:pPr>
+            <a:r>
+              <a:rPr lang="en-US" sz="1050" b="1" dirty="0">
+                <a:solidFill>
+                  <a:srgbClr val="FFFFFF"/>
+                </a:solidFill>
+                <a:latin typeface="游ゴシック" pitchFamily="34" charset="0"/>
+                <a:ea typeface="游ゴシック" pitchFamily="34" charset="-122"/>
+                <a:cs typeface="游ゴシック" pitchFamily="34" charset="-120"/>
+              </a:rPr>
+              <a:t>2億円</a:t>
+            </a:r>
+            <a:endParaRPr lang="en-US" sz="1050" dirty="0"/>
+          </a:p>
+        </p:txBody>
+      </p:sp>
+      <p:sp>
+        <p:nvSpPr>
+          <p:cNvPr id="28" name="Shape 26"/>
+          <p:cNvSpPr/>
+          <p:nvPr/>
+        </p:nvSpPr>
+        <p:spPr>
+          <a:xfrm>
+            <a:off x="5097780" y="3131820"/>
+            <a:ext cx="1691640" cy="1691640"/>
           </a:xfrm>
           <a:prstGeom prst="ellipse">
             <a:avLst/>
           </a:prstGeom>
           <a:solidFill>
             <a:srgbClr val="C9603F"/>
+          </a:solidFill>
+          <a:ln/>
+        </p:spPr>
+      </p:sp>
+      <p:sp>
+        <p:nvSpPr>
+          <p:cNvPr id="29" name="Text 27"/>
+          <p:cNvSpPr txBox="1"/>
+          <p:nvPr/>
+        </p:nvSpPr>
+        <p:spPr>
+          <a:xfrm>
+            <a:off x="4777740" y="3131820"/>
+            <a:ext cx="2331720" cy="1691640"/>
+          </a:xfrm>
+          <a:prstGeom prst="rect">
+            <a:avLst/>
+          </a:prstGeom>
+          <a:noFill/>
+          <a:ln/>
+        </p:spPr>
+        <p:txBody>
+          <a:bodyPr wrap="square" lIns="0" tIns="0" rIns="0" bIns="0" rtlCol="0" anchor="ctr"/>
+          <a:lstStyle/>
+          <a:p>
+            <a:pPr algn="ctr" indent="0" marL="0">
+              <a:buNone/>
+            </a:pPr>
+            <a:r>
+              <a:rPr lang="en-US" sz="1300" b="1" dirty="0">
+                <a:solidFill>
+                  <a:srgbClr val="FFFFFF"/>
+                </a:solidFill>
+                <a:latin typeface="游ゴシック" pitchFamily="34" charset="0"/>
+                <a:ea typeface="游ゴシック" pitchFamily="34" charset="-122"/>
+                <a:cs typeface="游ゴシック" pitchFamily="34" charset="-120"/>
+              </a:rPr>
+              <a:t>繋ぐグループ</a:t>
+            </a:r>
+            <a:endParaRPr lang="en-US" sz="1300" dirty="0"/>
+          </a:p>
+          <a:p>
+            <a:pPr algn="ctr" indent="0" marL="0">
+              <a:buNone/>
+            </a:pPr>
+            <a:r>
+              <a:rPr lang="en-US" sz="1300" b="1" dirty="0">
+                <a:solidFill>
+                  <a:srgbClr val="FFFFFF"/>
+                </a:solidFill>
+                <a:latin typeface="游ゴシック" pitchFamily="34" charset="0"/>
+                <a:ea typeface="游ゴシック" pitchFamily="34" charset="-122"/>
+                <a:cs typeface="游ゴシック" pitchFamily="34" charset="-120"/>
+              </a:rPr>
+              <a:t>（hub）</a:t>
+            </a:r>
+            <a:endParaRPr lang="en-US" sz="1300" dirty="0"/>
+          </a:p>
+        </p:txBody>
+      </p:sp>
+      <p:sp>
+        <p:nvSpPr>
+          <p:cNvPr id="30" name="Shape 28"/>
+          <p:cNvSpPr/>
+          <p:nvPr/>
+        </p:nvSpPr>
+        <p:spPr>
+          <a:xfrm>
+            <a:off x="9464040" y="1783080"/>
+            <a:ext cx="2103120" cy="1051560"/>
+          </a:xfrm>
+          <a:prstGeom prst="roundRect">
+            <a:avLst>
+              <a:gd name="adj" fmla="val 8696"/>
+            </a:avLst>
+          </a:prstGeom>
+          <a:solidFill>
+            <a:srgbClr val="10233A"/>
           </a:solidFill>
           <a:ln/>
           <a:effectLst>
@@ -7061,30 +10215,69 @@
       </p:sp>
       <p:sp>
         <p:nvSpPr>
-          <p:cNvPr id="5" name="Text 3"/>
-          <p:cNvSpPr txBox="1"/>
-          <p:nvPr/>
-        </p:nvSpPr>
-        <p:spPr>
-          <a:xfrm>
-            <a:off x="10607040" y="502920"/>
-            <a:ext cx="822960" cy="822960"/>
-          </a:xfrm>
-          <a:prstGeom prst="rect">
-            <a:avLst/>
-          </a:prstGeom>
-          <a:noFill/>
-          <a:ln/>
-        </p:spPr>
-        <p:txBody>
-          <a:bodyPr wrap="square" lIns="0" tIns="0" rIns="0" bIns="0" rtlCol="0" anchor="ctr"/>
-          <a:lstStyle/>
-          <a:p>
-            <a:pPr algn="ctr" indent="0" marL="0">
-              <a:buNone/>
-            </a:pPr>
-            <a:r>
-              <a:rPr lang="en-US" sz="2880" b="1" dirty="0">
+          <p:cNvPr id="31" name="Text 29"/>
+          <p:cNvSpPr txBox="1"/>
+          <p:nvPr/>
+        </p:nvSpPr>
+        <p:spPr>
+          <a:xfrm>
+            <a:off x="9646920" y="1901952"/>
+            <a:ext cx="1737360" cy="274320"/>
+          </a:xfrm>
+          <a:prstGeom prst="rect">
+            <a:avLst/>
+          </a:prstGeom>
+          <a:noFill/>
+          <a:ln/>
+        </p:spPr>
+        <p:txBody>
+          <a:bodyPr wrap="square" lIns="0" tIns="0" rIns="0" bIns="0" rtlCol="0" anchor="ctr"/>
+          <a:lstStyle/>
+          <a:p>
+            <a:pPr indent="0" marL="0">
+              <a:buNone/>
+            </a:pPr>
+            <a:r>
+              <a:rPr lang="en-US" sz="1100" dirty="0">
+                <a:solidFill>
+                  <a:srgbClr val="F1DCCF"/>
+                </a:solidFill>
+                <a:latin typeface="游ゴシック" pitchFamily="34" charset="0"/>
+                <a:ea typeface="游ゴシック" pitchFamily="34" charset="-122"/>
+                <a:cs typeface="游ゴシック" pitchFamily="34" charset="-120"/>
+              </a:rPr>
+              <a:t>想定合計</a:t>
+            </a:r>
+            <a:endParaRPr lang="en-US" sz="1100" dirty="0"/>
+          </a:p>
+        </p:txBody>
+      </p:sp>
+      <p:sp>
+        <p:nvSpPr>
+          <p:cNvPr id="32" name="Text 30"/>
+          <p:cNvSpPr txBox="1"/>
+          <p:nvPr/>
+        </p:nvSpPr>
+        <p:spPr>
+          <a:xfrm>
+            <a:off x="9646920" y="2176272"/>
+            <a:ext cx="1737360" cy="548640"/>
+          </a:xfrm>
+          <a:prstGeom prst="rect">
+            <a:avLst/>
+          </a:prstGeom>
+          <a:noFill/>
+          <a:ln/>
+        </p:spPr>
+        <p:txBody>
+          <a:bodyPr wrap="square" lIns="0" tIns="0" rIns="0" bIns="0" rtlCol="0" anchor="ctr"/>
+          <a:lstStyle/>
+          <a:p>
+            <a:pPr indent="0" marL="0">
+              <a:buNone/>
+            </a:pPr>
+            <a:r>
+              <a:rPr lang="en-US" sz="2400" b="1" dirty="0">
                 <a:solidFill>
                   <a:srgbClr val="FFFFFF"/>
                 </a:solidFill>
@@ -7092,169 +10285,7 @@
                 <a:ea typeface="游ゴシック" pitchFamily="34" charset="-122"/>
                 <a:cs typeface="游ゴシック" pitchFamily="34" charset="-120"/>
               </a:rPr>
-              <a:t>収</a:t>
-            </a:r>
-            <a:endParaRPr lang="en-US" sz="2880" dirty="0"/>
-          </a:p>
-        </p:txBody>
-      </p:sp>
-      <p:sp>
-        <p:nvSpPr>
-          <p:cNvPr id="6" name="Text 4"/>
-          <p:cNvSpPr txBox="1"/>
-          <p:nvPr/>
-        </p:nvSpPr>
-        <p:spPr>
-          <a:xfrm>
-            <a:off x="640080" y="1783080"/>
-            <a:ext cx="10881360" cy="4206240"/>
-          </a:xfrm>
-          <a:prstGeom prst="rect">
-            <a:avLst/>
-          </a:prstGeom>
-          <a:noFill/>
-          <a:ln/>
-        </p:spPr>
-        <p:txBody>
-          <a:bodyPr wrap="square" lIns="0" tIns="0" rIns="0" bIns="0" rtlCol="0" anchor="t"/>
-          <a:lstStyle/>
-          <a:p>
-            <a:pPr marL="342900" indent="-342900">
-              <a:lnSpc>
-                <a:spcPct val="128000"/>
-              </a:lnSpc>
-              <a:spcAft>
-                <a:spcPts val="1200"/>
-              </a:spcAft>
-              <a:buSzPct val="100000"/>
-              <a:buChar char="●"/>
-            </a:pPr>
-            <a:r>
-              <a:rPr lang="en-US" sz="1500" dirty="0">
-                <a:solidFill>
-                  <a:srgbClr val="3A3A3A"/>
-                </a:solidFill>
-                <a:latin typeface="游ゴシック" pitchFamily="34" charset="0"/>
-                <a:ea typeface="游ゴシック" pitchFamily="34" charset="-122"/>
-                <a:cs typeface="游ゴシック" pitchFamily="34" charset="-120"/>
-              </a:rPr>
-              <a:t>自社単体の売上（約5,000万円）だけを見れば小さく映るが、hubとして周辺専門家にもたらした経済圏は約100億円</a:t>
-            </a:r>
-            <a:endParaRPr lang="en-US" sz="1500" dirty="0"/>
-          </a:p>
-          <a:p>
-            <a:pPr marL="342900" indent="-342900">
-              <a:lnSpc>
-                <a:spcPct val="128000"/>
-              </a:lnSpc>
-              <a:spcAft>
-                <a:spcPts val="1200"/>
-              </a:spcAft>
-              <a:buSzPct val="100000"/>
-              <a:buChar char="●"/>
-            </a:pPr>
-            <a:r>
-              <a:rPr lang="en-US" sz="1500" dirty="0">
-                <a:solidFill>
-                  <a:srgbClr val="3A3A3A"/>
-                </a:solidFill>
-                <a:latin typeface="游ゴシック" pitchFamily="34" charset="0"/>
-                <a:ea typeface="游ゴシック" pitchFamily="34" charset="-122"/>
-                <a:cs typeface="游ゴシック" pitchFamily="34" charset="-120"/>
-              </a:rPr>
-              <a:t>信用金庫への新規資金導入 約7億円、法人バルクM&amp;A 2億円など、具体的な実例が裏付け（素材①）</a:t>
-            </a:r>
-            <a:endParaRPr lang="en-US" sz="1500" dirty="0"/>
-          </a:p>
-          <a:p>
-            <a:pPr marL="342900" indent="-342900">
-              <a:lnSpc>
-                <a:spcPct val="128000"/>
-              </a:lnSpc>
-              <a:spcAft>
-                <a:spcPts val="1200"/>
-              </a:spcAft>
-              <a:buSzPct val="100000"/>
-              <a:buChar char="●"/>
-            </a:pPr>
-            <a:r>
-              <a:rPr lang="en-US" sz="1500" dirty="0">
-                <a:solidFill>
-                  <a:srgbClr val="3A3A3A"/>
-                </a:solidFill>
-                <a:latin typeface="游ゴシック" pitchFamily="34" charset="0"/>
-                <a:ea typeface="游ゴシック" pitchFamily="34" charset="-122"/>
-                <a:cs typeface="游ゴシック" pitchFamily="34" charset="-120"/>
-              </a:rPr>
-              <a:t>「繋ぐグループ全体の売上」という表現は“事業間シナジー”の指標として使ってよいと事務局（加藤氏）からも確認済み</a:t>
-            </a:r>
-            <a:endParaRPr lang="en-US" sz="1500" dirty="0"/>
-          </a:p>
-        </p:txBody>
-      </p:sp>
-      <p:sp>
-        <p:nvSpPr>
-          <p:cNvPr id="7" name="Shape 5"/>
-          <p:cNvSpPr/>
-          <p:nvPr/>
-        </p:nvSpPr>
-        <p:spPr>
-          <a:xfrm>
-            <a:off x="640080" y="4572000"/>
-            <a:ext cx="3200400" cy="1371600"/>
-          </a:xfrm>
-          <a:prstGeom prst="roundRect">
-            <a:avLst>
-              <a:gd name="adj" fmla="val 6667"/>
-            </a:avLst>
-          </a:prstGeom>
-          <a:solidFill>
-            <a:srgbClr val="F6F1EA"/>
-          </a:solidFill>
-          <a:ln/>
-          <a:effectLst>
-            <a:outerShdw sx="100000" sy="100000" kx="0" ky="0" algn="bl" rotWithShape="0" blurRad="101600" dist="38100" dir="5400000">
-              <a:srgbClr val="10233A">
-                <a:alpha val="18000"/>
-              </a:srgbClr>
-            </a:outerShdw>
-          </a:effectLst>
-        </p:spPr>
-      </p:sp>
-      <p:sp>
-        <p:nvSpPr>
-          <p:cNvPr id="8" name="Text 6"/>
-          <p:cNvSpPr txBox="1"/>
-          <p:nvPr/>
-        </p:nvSpPr>
-        <p:spPr>
-          <a:xfrm>
-            <a:off x="777240" y="4754880"/>
-            <a:ext cx="2926080" cy="640080"/>
-          </a:xfrm>
-          <a:prstGeom prst="rect">
-            <a:avLst/>
-          </a:prstGeom>
-          <a:noFill/>
-          <a:ln/>
-        </p:spPr>
-        <p:txBody>
-          <a:bodyPr wrap="square" lIns="0" tIns="0" rIns="0" bIns="0" rtlCol="0" anchor="ctr"/>
-          <a:lstStyle/>
-          <a:p>
-            <a:pPr algn="ctr" indent="0" marL="0">
-              <a:buNone/>
-            </a:pPr>
-            <a:r>
-              <a:rPr lang="en-US" sz="2400" b="1" dirty="0">
-                <a:solidFill>
-                  <a:srgbClr val="1E3A5F"/>
-                </a:solidFill>
-                <a:latin typeface="游ゴシック" pitchFamily="34" charset="0"/>
-                <a:ea typeface="游ゴシック" pitchFamily="34" charset="-122"/>
-                <a:cs typeface="游ゴシック" pitchFamily="34" charset="-120"/>
-              </a:rPr>
-              <a:t>5,000万円</a:t>
+              <a:t>約100億円</a:t>
             </a:r>
             <a:endParaRPr lang="en-US" sz="2400" dirty="0"/>
           </a:p>
@@ -7262,30 +10293,30 @@
       </p:sp>
       <p:sp>
         <p:nvSpPr>
-          <p:cNvPr id="9" name="Text 7"/>
-          <p:cNvSpPr txBox="1"/>
-          <p:nvPr/>
-        </p:nvSpPr>
-        <p:spPr>
-          <a:xfrm>
-            <a:off x="777240" y="5440680"/>
-            <a:ext cx="2926080" cy="411480"/>
-          </a:xfrm>
-          <a:prstGeom prst="rect">
-            <a:avLst/>
-          </a:prstGeom>
-          <a:noFill/>
-          <a:ln/>
-        </p:spPr>
-        <p:txBody>
-          <a:bodyPr wrap="square" lIns="0" tIns="0" rIns="0" bIns="0" rtlCol="0" anchor="ctr"/>
-          <a:lstStyle/>
-          <a:p>
-            <a:pPr algn="ctr" indent="0" marL="0">
-              <a:buNone/>
-            </a:pPr>
-            <a:r>
-              <a:rPr lang="en-US" sz="1250" dirty="0">
+          <p:cNvPr id="33" name="Text 31"/>
+          <p:cNvSpPr txBox="1"/>
+          <p:nvPr/>
+        </p:nvSpPr>
+        <p:spPr>
+          <a:xfrm>
+            <a:off x="640080" y="6263640"/>
+            <a:ext cx="10881360" cy="320040"/>
+          </a:xfrm>
+          <a:prstGeom prst="rect">
+            <a:avLst/>
+          </a:prstGeom>
+          <a:noFill/>
+          <a:ln/>
+        </p:spPr>
+        <p:txBody>
+          <a:bodyPr wrap="square" lIns="0" tIns="0" rIns="0" bIns="0" rtlCol="0" anchor="ctr"/>
+          <a:lstStyle/>
+          <a:p>
+            <a:pPr indent="0" marL="0">
+              <a:buNone/>
+            </a:pPr>
+            <a:r>
+              <a:rPr lang="en-US" sz="1050" i="1" dirty="0">
                 <a:solidFill>
                   <a:srgbClr val="6B6B6B"/>
                 </a:solidFill>
@@ -7293,307 +10324,15 @@
                 <a:ea typeface="游ゴシック" pitchFamily="34" charset="-122"/>
                 <a:cs typeface="游ゴシック" pitchFamily="34" charset="-120"/>
               </a:rPr>
-              <a:t>自社単体</a:t>
-            </a:r>
-            <a:endParaRPr lang="en-US" sz="1250" dirty="0"/>
-          </a:p>
-        </p:txBody>
-      </p:sp>
-      <p:sp>
-        <p:nvSpPr>
-          <p:cNvPr id="10" name="Text 8"/>
-          <p:cNvSpPr txBox="1"/>
-          <p:nvPr/>
-        </p:nvSpPr>
-        <p:spPr>
-          <a:xfrm>
-            <a:off x="3858768" y="4983480"/>
-            <a:ext cx="374904" cy="548640"/>
-          </a:xfrm>
-          <a:prstGeom prst="rect">
-            <a:avLst/>
-          </a:prstGeom>
-          <a:noFill/>
-          <a:ln/>
-        </p:spPr>
-        <p:txBody>
-          <a:bodyPr wrap="square" lIns="0" tIns="0" rIns="0" bIns="0" rtlCol="0" anchor="ctr"/>
-          <a:lstStyle/>
-          <a:p>
-            <a:pPr algn="ctr" indent="0" marL="0">
-              <a:buNone/>
-            </a:pPr>
-            <a:r>
-              <a:rPr lang="en-US" sz="2000" b="1" dirty="0">
-                <a:solidFill>
-                  <a:srgbClr val="C9603F"/>
-                </a:solidFill>
-                <a:latin typeface="游ゴシック" pitchFamily="34" charset="0"/>
-                <a:ea typeface="游ゴシック" pitchFamily="34" charset="-122"/>
-                <a:cs typeface="游ゴシック" pitchFamily="34" charset="-120"/>
-              </a:rPr>
-              <a:t>→</a:t>
-            </a:r>
-            <a:endParaRPr lang="en-US" sz="2000" dirty="0"/>
-          </a:p>
-        </p:txBody>
-      </p:sp>
-      <p:sp>
-        <p:nvSpPr>
-          <p:cNvPr id="11" name="Shape 9"/>
-          <p:cNvSpPr/>
-          <p:nvPr/>
-        </p:nvSpPr>
-        <p:spPr>
-          <a:xfrm>
-            <a:off x="4251960" y="4572000"/>
-            <a:ext cx="3200400" cy="1371600"/>
-          </a:xfrm>
-          <a:prstGeom prst="roundRect">
-            <a:avLst>
-              <a:gd name="adj" fmla="val 6667"/>
-            </a:avLst>
-          </a:prstGeom>
-          <a:solidFill>
-            <a:srgbClr val="F6F1EA"/>
-          </a:solidFill>
-          <a:ln/>
-          <a:effectLst>
-            <a:outerShdw sx="100000" sy="100000" kx="0" ky="0" algn="bl" rotWithShape="0" blurRad="101600" dist="38100" dir="5400000">
-              <a:srgbClr val="10233A">
-                <a:alpha val="18000"/>
-              </a:srgbClr>
-            </a:outerShdw>
-          </a:effectLst>
-        </p:spPr>
-      </p:sp>
-      <p:sp>
-        <p:nvSpPr>
-          <p:cNvPr id="12" name="Text 10"/>
-          <p:cNvSpPr txBox="1"/>
-          <p:nvPr/>
-        </p:nvSpPr>
-        <p:spPr>
-          <a:xfrm>
-            <a:off x="4389120" y="4754880"/>
-            <a:ext cx="2926080" cy="640080"/>
-          </a:xfrm>
-          <a:prstGeom prst="rect">
-            <a:avLst/>
-          </a:prstGeom>
-          <a:noFill/>
-          <a:ln/>
-        </p:spPr>
-        <p:txBody>
-          <a:bodyPr wrap="square" lIns="0" tIns="0" rIns="0" bIns="0" rtlCol="0" anchor="ctr"/>
-          <a:lstStyle/>
-          <a:p>
-            <a:pPr algn="ctr" indent="0" marL="0">
-              <a:buNone/>
-            </a:pPr>
-            <a:r>
-              <a:rPr lang="en-US" sz="2400" b="1" dirty="0">
-                <a:solidFill>
-                  <a:srgbClr val="1E3A5F"/>
-                </a:solidFill>
-                <a:latin typeface="游ゴシック" pitchFamily="34" charset="0"/>
-                <a:ea typeface="游ゴシック" pitchFamily="34" charset="-122"/>
-                <a:cs typeface="游ゴシック" pitchFamily="34" charset="-120"/>
-              </a:rPr>
-              <a:t>3億円規模</a:t>
-            </a:r>
-            <a:endParaRPr lang="en-US" sz="2400" dirty="0"/>
-          </a:p>
-        </p:txBody>
-      </p:sp>
-      <p:sp>
-        <p:nvSpPr>
-          <p:cNvPr id="13" name="Text 11"/>
-          <p:cNvSpPr txBox="1"/>
-          <p:nvPr/>
-        </p:nvSpPr>
-        <p:spPr>
-          <a:xfrm>
-            <a:off x="4389120" y="5440680"/>
-            <a:ext cx="2926080" cy="411480"/>
-          </a:xfrm>
-          <a:prstGeom prst="rect">
-            <a:avLst/>
-          </a:prstGeom>
-          <a:noFill/>
-          <a:ln/>
-        </p:spPr>
-        <p:txBody>
-          <a:bodyPr wrap="square" lIns="0" tIns="0" rIns="0" bIns="0" rtlCol="0" anchor="ctr"/>
-          <a:lstStyle/>
-          <a:p>
-            <a:pPr algn="ctr" indent="0" marL="0">
-              <a:buNone/>
-            </a:pPr>
-            <a:r>
-              <a:rPr lang="en-US" sz="1250" dirty="0">
-                <a:solidFill>
-                  <a:srgbClr val="6B6B6B"/>
-                </a:solidFill>
-                <a:latin typeface="游ゴシック" pitchFamily="34" charset="0"/>
-                <a:ea typeface="游ゴシック" pitchFamily="34" charset="-122"/>
-                <a:cs typeface="游ゴシック" pitchFamily="34" charset="-120"/>
-              </a:rPr>
-              <a:t>グループ全体</a:t>
-            </a:r>
-            <a:endParaRPr lang="en-US" sz="1250" dirty="0"/>
-          </a:p>
-        </p:txBody>
-      </p:sp>
-      <p:sp>
-        <p:nvSpPr>
-          <p:cNvPr id="14" name="Text 12"/>
-          <p:cNvSpPr txBox="1"/>
-          <p:nvPr/>
-        </p:nvSpPr>
-        <p:spPr>
-          <a:xfrm>
-            <a:off x="7470648" y="4983480"/>
-            <a:ext cx="374904" cy="548640"/>
-          </a:xfrm>
-          <a:prstGeom prst="rect">
-            <a:avLst/>
-          </a:prstGeom>
-          <a:noFill/>
-          <a:ln/>
-        </p:spPr>
-        <p:txBody>
-          <a:bodyPr wrap="square" lIns="0" tIns="0" rIns="0" bIns="0" rtlCol="0" anchor="ctr"/>
-          <a:lstStyle/>
-          <a:p>
-            <a:pPr algn="ctr" indent="0" marL="0">
-              <a:buNone/>
-            </a:pPr>
-            <a:r>
-              <a:rPr lang="en-US" sz="2000" b="1" dirty="0">
-                <a:solidFill>
-                  <a:srgbClr val="C9603F"/>
-                </a:solidFill>
-                <a:latin typeface="游ゴシック" pitchFamily="34" charset="0"/>
-                <a:ea typeface="游ゴシック" pitchFamily="34" charset="-122"/>
-                <a:cs typeface="游ゴシック" pitchFamily="34" charset="-120"/>
-              </a:rPr>
-              <a:t>→</a:t>
-            </a:r>
-            <a:endParaRPr lang="en-US" sz="2000" dirty="0"/>
-          </a:p>
-        </p:txBody>
-      </p:sp>
-      <p:sp>
-        <p:nvSpPr>
-          <p:cNvPr id="15" name="Shape 13"/>
-          <p:cNvSpPr/>
-          <p:nvPr/>
-        </p:nvSpPr>
-        <p:spPr>
-          <a:xfrm>
-            <a:off x="7863840" y="4572000"/>
-            <a:ext cx="3200400" cy="1371600"/>
-          </a:xfrm>
-          <a:prstGeom prst="roundRect">
-            <a:avLst>
-              <a:gd name="adj" fmla="val 6667"/>
-            </a:avLst>
-          </a:prstGeom>
-          <a:solidFill>
-            <a:srgbClr val="C9603F"/>
-          </a:solidFill>
-          <a:ln/>
-          <a:effectLst>
-            <a:outerShdw sx="100000" sy="100000" kx="0" ky="0" algn="bl" rotWithShape="0" blurRad="101600" dist="38100" dir="5400000">
-              <a:srgbClr val="10233A">
-                <a:alpha val="18000"/>
-              </a:srgbClr>
-            </a:outerShdw>
-          </a:effectLst>
-        </p:spPr>
-      </p:sp>
-      <p:sp>
-        <p:nvSpPr>
-          <p:cNvPr id="16" name="Text 14"/>
-          <p:cNvSpPr txBox="1"/>
-          <p:nvPr/>
-        </p:nvSpPr>
-        <p:spPr>
-          <a:xfrm>
-            <a:off x="8001000" y="4754880"/>
-            <a:ext cx="2926080" cy="640080"/>
-          </a:xfrm>
-          <a:prstGeom prst="rect">
-            <a:avLst/>
-          </a:prstGeom>
-          <a:noFill/>
-          <a:ln/>
-        </p:spPr>
-        <p:txBody>
-          <a:bodyPr wrap="square" lIns="0" tIns="0" rIns="0" bIns="0" rtlCol="0" anchor="ctr"/>
-          <a:lstStyle/>
-          <a:p>
-            <a:pPr algn="ctr" indent="0" marL="0">
-              <a:buNone/>
-            </a:pPr>
-            <a:r>
-              <a:rPr lang="en-US" sz="2400" b="1" dirty="0">
-                <a:solidFill>
-                  <a:srgbClr val="FFFFFF"/>
-                </a:solidFill>
-                <a:latin typeface="游ゴシック" pitchFamily="34" charset="0"/>
-                <a:ea typeface="游ゴシック" pitchFamily="34" charset="-122"/>
-                <a:cs typeface="游ゴシック" pitchFamily="34" charset="-120"/>
-              </a:rPr>
-              <a:t>約100億円</a:t>
-            </a:r>
-            <a:endParaRPr lang="en-US" sz="2400" dirty="0"/>
-          </a:p>
-        </p:txBody>
-      </p:sp>
-      <p:sp>
-        <p:nvSpPr>
-          <p:cNvPr id="17" name="Text 15"/>
-          <p:cNvSpPr txBox="1"/>
-          <p:nvPr/>
-        </p:nvSpPr>
-        <p:spPr>
-          <a:xfrm>
-            <a:off x="8001000" y="5440680"/>
-            <a:ext cx="2926080" cy="411480"/>
-          </a:xfrm>
-          <a:prstGeom prst="rect">
-            <a:avLst/>
-          </a:prstGeom>
-          <a:noFill/>
-          <a:ln/>
-        </p:spPr>
-        <p:txBody>
-          <a:bodyPr wrap="square" lIns="0" tIns="0" rIns="0" bIns="0" rtlCol="0" anchor="ctr"/>
-          <a:lstStyle/>
-          <a:p>
-            <a:pPr algn="ctr" indent="0" marL="0">
-              <a:buNone/>
-            </a:pPr>
-            <a:r>
-              <a:rPr lang="en-US" sz="1250" dirty="0">
-                <a:solidFill>
-                  <a:srgbClr val="F1DCCF"/>
-                </a:solidFill>
-                <a:latin typeface="游ゴシック" pitchFamily="34" charset="0"/>
-                <a:ea typeface="游ゴシック" pitchFamily="34" charset="-122"/>
-                <a:cs typeface="游ゴシック" pitchFamily="34" charset="-120"/>
-              </a:rPr>
-              <a:t>周辺経済圏（hub）</a:t>
-            </a:r>
-            <a:endParaRPr lang="en-US" sz="1250" dirty="0"/>
-          </a:p>
-        </p:txBody>
-      </p:sp>
-      <p:sp>
-        <p:nvSpPr>
-          <p:cNvPr id="18" name="Text 16"/>
+              <a:t>金額は現時点の想定値。ファイナル資料で使う際は「概算」「エピソードとして」と位置づけ、根拠の精査を行う。</a:t>
+            </a:r>
+            <a:endParaRPr lang="en-US" sz="1050" dirty="0"/>
+          </a:p>
+        </p:txBody>
+      </p:sp>
+      <p:sp>
+        <p:nvSpPr>
+          <p:cNvPr id="34" name="Text 32"/>
           <p:cNvSpPr txBox="1"/>
           <p:nvPr/>
         </p:nvSpPr>
@@ -7695,7 +10434,7 @@
                 <a:ea typeface="游ゴシック" pitchFamily="34" charset="-122"/>
                 <a:cs typeface="游ゴシック" pitchFamily="34" charset="-120"/>
               </a:rPr>
-              <a:t>03 / GROWTH</a:t>
+              <a:t>BREAKDOWN</a:t>
             </a:r>
             <a:endParaRPr lang="en-US" sz="1300" dirty="0"/>
           </a:p>
@@ -7734,28 +10473,46 @@
                 <a:ea typeface="游ゴシック" pitchFamily="34" charset="-122"/>
                 <a:cs typeface="游ゴシック" pitchFamily="34" charset="-120"/>
               </a:rPr>
-              <a:t>成長性 ― 二つのファネルが、経済圏をさらに広げる</a:t>
+              <a:t>内訳ランキング ― 金融・不動産で全体の8割</a:t>
             </a:r>
             <a:endParaRPr lang="en-US" sz="2700" dirty="0"/>
           </a:p>
         </p:txBody>
       </p:sp>
-      <p:sp>
-        <p:nvSpPr>
-          <p:cNvPr id="4" name="Shape 2"/>
+      <p:graphicFrame>
+        <p:nvGraphicFramePr>
+          <p:cNvPr id="4" name="Chart 0" descr=""/>
+          <p:cNvGraphicFramePr/>
+          <p:nvPr/>
+        </p:nvGraphicFramePr>
+        <p:xfrm>
+          <a:off x="640080" y="1691640"/>
+          <a:ext cx="6675120" cy="4297680"/>
+        </p:xfrm>
+        <a:graphic xmlns:a="http://schemas.openxmlformats.org/drawingml/2006/main">
+          <a:graphicData uri="http://schemas.openxmlformats.org/drawingml/2006/chart">
+            <c:chart xmlns:c="http://schemas.openxmlformats.org/drawingml/2006/chart" r:id="rId1"/>
+          </a:graphicData>
+        </a:graphic>
+      </p:graphicFrame>
+      <p:sp>
+        <p:nvSpPr>
+          <p:cNvPr id="5" name="Shape 2"/>
           <p:cNvSpPr/>
           <p:nvPr/>
         </p:nvSpPr>
         <p:spPr>
           <a:xfrm>
-            <a:off x="10607040" y="502920"/>
-            <a:ext cx="822960" cy="822960"/>
-          </a:xfrm>
-          <a:prstGeom prst="ellipse">
-            <a:avLst/>
+            <a:off x="7635240" y="1783080"/>
+            <a:ext cx="3931920" cy="1828800"/>
+          </a:xfrm>
+          <a:prstGeom prst="roundRect">
+            <a:avLst>
+              <a:gd name="adj" fmla="val 5000"/>
+            </a:avLst>
           </a:prstGeom>
           <a:solidFill>
-            <a:srgbClr val="C9603F"/>
+            <a:srgbClr val="F6F1EA"/>
           </a:solidFill>
           <a:ln/>
           <a:effectLst>
@@ -7769,53 +10526,53 @@
       </p:sp>
       <p:sp>
         <p:nvSpPr>
-          <p:cNvPr id="5" name="Text 3"/>
-          <p:cNvSpPr txBox="1"/>
-          <p:nvPr/>
-        </p:nvSpPr>
-        <p:spPr>
-          <a:xfrm>
-            <a:off x="10607040" y="502920"/>
-            <a:ext cx="822960" cy="822960"/>
-          </a:xfrm>
-          <a:prstGeom prst="rect">
-            <a:avLst/>
-          </a:prstGeom>
-          <a:noFill/>
-          <a:ln/>
-        </p:spPr>
-        <p:txBody>
-          <a:bodyPr wrap="square" lIns="0" tIns="0" rIns="0" bIns="0" rtlCol="0" anchor="ctr"/>
-          <a:lstStyle/>
-          <a:p>
-            <a:pPr algn="ctr" indent="0" marL="0">
-              <a:buNone/>
-            </a:pPr>
-            <a:r>
-              <a:rPr lang="en-US" sz="2880" b="1" dirty="0">
-                <a:solidFill>
-                  <a:srgbClr val="FFFFFF"/>
-                </a:solidFill>
-                <a:latin typeface="游ゴシック" pitchFamily="34" charset="0"/>
-                <a:ea typeface="游ゴシック" pitchFamily="34" charset="-122"/>
-                <a:cs typeface="游ゴシック" pitchFamily="34" charset="-120"/>
-              </a:rPr>
-              <a:t>成</a:t>
-            </a:r>
-            <a:endParaRPr lang="en-US" sz="2880" dirty="0"/>
-          </a:p>
-        </p:txBody>
-      </p:sp>
-      <p:sp>
-        <p:nvSpPr>
-          <p:cNvPr id="6" name="Text 4"/>
-          <p:cNvSpPr txBox="1"/>
-          <p:nvPr/>
-        </p:nvSpPr>
-        <p:spPr>
-          <a:xfrm>
-            <a:off x="640080" y="1783080"/>
-            <a:ext cx="10881360" cy="4206240"/>
+          <p:cNvPr id="6" name="Text 3"/>
+          <p:cNvSpPr txBox="1"/>
+          <p:nvPr/>
+        </p:nvSpPr>
+        <p:spPr>
+          <a:xfrm>
+            <a:off x="7863840" y="1965960"/>
+            <a:ext cx="3474720" cy="457200"/>
+          </a:xfrm>
+          <a:prstGeom prst="rect">
+            <a:avLst/>
+          </a:prstGeom>
+          <a:noFill/>
+          <a:ln/>
+        </p:spPr>
+        <p:txBody>
+          <a:bodyPr wrap="square" lIns="0" tIns="0" rIns="0" bIns="0" rtlCol="0" anchor="ctr"/>
+          <a:lstStyle/>
+          <a:p>
+            <a:pPr indent="0" marL="0">
+              <a:buNone/>
+            </a:pPr>
+            <a:r>
+              <a:rPr lang="en-US" sz="1600" b="1" dirty="0">
+                <a:solidFill>
+                  <a:srgbClr val="C9603F"/>
+                </a:solidFill>
+                <a:latin typeface="游ゴシック" pitchFamily="34" charset="0"/>
+                <a:ea typeface="游ゴシック" pitchFamily="34" charset="-122"/>
+                <a:cs typeface="游ゴシック" pitchFamily="34" charset="-120"/>
+              </a:rPr>
+              <a:t>金融＋不動産　＝　80億円</a:t>
+            </a:r>
+            <a:endParaRPr lang="en-US" sz="1600" dirty="0"/>
+          </a:p>
+        </p:txBody>
+      </p:sp>
+      <p:sp>
+        <p:nvSpPr>
+          <p:cNvPr id="7" name="Text 4"/>
+          <p:cNvSpPr txBox="1"/>
+          <p:nvPr/>
+        </p:nvSpPr>
+        <p:spPr>
+          <a:xfrm>
+            <a:off x="7863840" y="2423160"/>
+            <a:ext cx="3474720" cy="1097280"/>
           </a:xfrm>
           <a:prstGeom prst="rect">
             <a:avLst/>
@@ -7827,18 +10584,14 @@
           <a:bodyPr wrap="square" lIns="0" tIns="0" rIns="0" bIns="0" rtlCol="0" anchor="t"/>
           <a:lstStyle/>
           <a:p>
-            <a:pPr marL="342900" indent="-342900">
+            <a:pPr indent="0" marL="0">
               <a:lnSpc>
-                <a:spcPct val="128000"/>
+                <a:spcPct val="125000"/>
               </a:lnSpc>
-              <a:spcAft>
-                <a:spcPts val="1200"/>
-              </a:spcAft>
-              <a:buSzPct val="100000"/>
-              <a:buChar char="●"/>
-            </a:pPr>
-            <a:r>
-              <a:rPr lang="en-US" sz="1500" dirty="0">
+              <a:buNone/>
+            </a:pPr>
+            <a:r>
+              <a:rPr lang="en-US" sz="1200" dirty="0">
                 <a:solidFill>
                   <a:srgbClr val="3A3A3A"/>
                 </a:solidFill>
@@ -7846,74 +10599,26 @@
                 <a:ea typeface="游ゴシック" pitchFamily="34" charset="-122"/>
                 <a:cs typeface="游ゴシック" pitchFamily="34" charset="-120"/>
               </a:rPr>
-              <a:t>顧客ファネル：ACP（人生会議）をフロントに据え、相続対策に着手する母数を構造的に拡大する仕組み（素材②）</a:t>
-            </a:r>
-            <a:endParaRPr lang="en-US" sz="1500" dirty="0"/>
-          </a:p>
-          <a:p>
-            <a:pPr marL="342900" indent="-342900">
-              <a:lnSpc>
-                <a:spcPct val="128000"/>
-              </a:lnSpc>
-              <a:spcAft>
-                <a:spcPts val="1200"/>
-              </a:spcAft>
-              <a:buSzPct val="100000"/>
-              <a:buChar char="●"/>
-            </a:pPr>
-            <a:r>
-              <a:rPr lang="en-US" sz="1500" dirty="0">
-                <a:solidFill>
-                  <a:srgbClr val="3A3A3A"/>
-                </a:solidFill>
-                <a:latin typeface="游ゴシック" pitchFamily="34" charset="0"/>
-                <a:ea typeface="游ゴシック" pitchFamily="34" charset="-122"/>
-                <a:cs typeface="游ゴシック" pitchFamily="34" charset="-120"/>
-              </a:rPr>
-              <a:t>人材ファネル：資格講座の卒業生が「講師デビュー」し、自ら次の集客・紹介導線を生み出す自己増殖構造（素材③）</a:t>
-            </a:r>
-            <a:endParaRPr lang="en-US" sz="1500" dirty="0"/>
-          </a:p>
-          <a:p>
-            <a:pPr marL="342900" indent="-342900">
-              <a:lnSpc>
-                <a:spcPct val="128000"/>
-              </a:lnSpc>
-              <a:spcAft>
-                <a:spcPts val="1200"/>
-              </a:spcAft>
-              <a:buSzPct val="100000"/>
-              <a:buChar char="●"/>
-            </a:pPr>
-            <a:r>
-              <a:rPr lang="en-US" sz="1500" dirty="0">
-                <a:solidFill>
-                  <a:srgbClr val="3A3A3A"/>
-                </a:solidFill>
-                <a:latin typeface="游ゴシック" pitchFamily="34" charset="0"/>
-                <a:ea typeface="游ゴシック" pitchFamily="34" charset="-122"/>
-                <a:cs typeface="游ゴシック" pitchFamily="34" charset="-120"/>
-              </a:rPr>
-              <a:t>二つのファネルが重なり合うことで、約100億円の経済圏をさらに拡大し、3年後FC100事業所という成長サイクルへつながる</a:t>
-            </a:r>
-            <a:endParaRPr lang="en-US" sz="1500" dirty="0"/>
-          </a:p>
-        </p:txBody>
-      </p:sp>
-      <p:sp>
-        <p:nvSpPr>
-          <p:cNvPr id="7" name="Shape 5"/>
+              <a:t>全体想定100億円のうち約8割を占める、資産性の高い意思決定支援（相続発生時の資産整理・組み換え）が中核であることを示す。</a:t>
+            </a:r>
+            <a:endParaRPr lang="en-US" sz="1200" dirty="0"/>
+          </a:p>
+        </p:txBody>
+      </p:sp>
+      <p:sp>
+        <p:nvSpPr>
+          <p:cNvPr id="8" name="Shape 5"/>
           <p:cNvSpPr/>
           <p:nvPr/>
         </p:nvSpPr>
         <p:spPr>
           <a:xfrm>
-            <a:off x="640080" y="4754880"/>
-            <a:ext cx="3383280" cy="1371600"/>
+            <a:off x="7635240" y="3794760"/>
+            <a:ext cx="3931920" cy="2194560"/>
           </a:xfrm>
           <a:prstGeom prst="roundRect">
             <a:avLst>
-              <a:gd name="adj" fmla="val 6667"/>
+              <a:gd name="adj" fmla="val 4167"/>
             </a:avLst>
           </a:prstGeom>
           <a:solidFill>
@@ -7931,14 +10636,14 @@
       </p:sp>
       <p:sp>
         <p:nvSpPr>
-          <p:cNvPr id="8" name="Text 6"/>
-          <p:cNvSpPr txBox="1"/>
-          <p:nvPr/>
-        </p:nvSpPr>
-        <p:spPr>
-          <a:xfrm>
-            <a:off x="868680" y="4956048"/>
-            <a:ext cx="2926080" cy="411480"/>
+          <p:cNvPr id="9" name="Text 6"/>
+          <p:cNvSpPr txBox="1"/>
+          <p:nvPr/>
+        </p:nvSpPr>
+        <p:spPr>
+          <a:xfrm>
+            <a:off x="7863840" y="3977640"/>
+            <a:ext cx="3474720" cy="457200"/>
           </a:xfrm>
           <a:prstGeom prst="rect">
             <a:avLst/>
@@ -7954,7 +10659,7 @@
               <a:buNone/>
             </a:pPr>
             <a:r>
-              <a:rPr lang="en-US" sz="1600" b="1" dirty="0">
+              <a:rPr lang="en-US" sz="1500" b="1" dirty="0">
                 <a:solidFill>
                   <a:srgbClr val="1E3A5F"/>
                 </a:solidFill>
@@ -7962,22 +10667,22 @@
                 <a:ea typeface="游ゴシック" pitchFamily="34" charset="-122"/>
                 <a:cs typeface="游ゴシック" pitchFamily="34" charset="-120"/>
               </a:rPr>
-              <a:t>顧客ファネル</a:t>
-            </a:r>
-            <a:endParaRPr lang="en-US" sz="1600" dirty="0"/>
-          </a:p>
-        </p:txBody>
-      </p:sp>
-      <p:sp>
-        <p:nvSpPr>
-          <p:cNvPr id="9" name="Text 7"/>
-          <p:cNvSpPr txBox="1"/>
-          <p:nvPr/>
-        </p:nvSpPr>
-        <p:spPr>
-          <a:xfrm>
-            <a:off x="868680" y="5413248"/>
-            <a:ext cx="2926080" cy="594360"/>
+              <a:t>残り2割＝士業・施設・M&amp;Aの裾野</a:t>
+            </a:r>
+            <a:endParaRPr lang="en-US" sz="1500" dirty="0"/>
+          </a:p>
+        </p:txBody>
+      </p:sp>
+      <p:sp>
+        <p:nvSpPr>
+          <p:cNvPr id="10" name="Text 7"/>
+          <p:cNvSpPr txBox="1"/>
+          <p:nvPr/>
+        </p:nvSpPr>
+        <p:spPr>
+          <a:xfrm>
+            <a:off x="7863840" y="4434840"/>
+            <a:ext cx="3474720" cy="1463040"/>
           </a:xfrm>
           <a:prstGeom prst="rect">
             <a:avLst/>
@@ -7989,14 +10694,18 @@
           <a:bodyPr wrap="square" lIns="0" tIns="0" rIns="0" bIns="0" rtlCol="0" anchor="t"/>
           <a:lstStyle/>
           <a:p>
-            <a:pPr indent="0" marL="0">
+            <a:pPr marL="342900" indent="-342900">
               <a:lnSpc>
-                <a:spcPct val="125000"/>
+                <a:spcPct val="128000"/>
               </a:lnSpc>
-              <a:buNone/>
-            </a:pPr>
-            <a:r>
-              <a:rPr lang="en-US" sz="1250" dirty="0">
+              <a:spcAft>
+                <a:spcPts val="800"/>
+              </a:spcAft>
+              <a:buSzPct val="100000"/>
+              <a:buChar char="●"/>
+            </a:pPr>
+            <a:r>
+              <a:rPr lang="en-US" sz="1150" dirty="0">
                 <a:solidFill>
                   <a:srgbClr val="3A3A3A"/>
                 </a:solidFill>
@@ -8004,109 +10713,23 @@
                 <a:ea typeface="游ゴシック" pitchFamily="34" charset="-122"/>
                 <a:cs typeface="游ゴシック" pitchFamily="34" charset="-120"/>
               </a:rPr>
-              <a:t>ACP（人生会議）が入口</a:t>
-            </a:r>
-            <a:endParaRPr lang="en-US" sz="1250" dirty="0"/>
-          </a:p>
-        </p:txBody>
-      </p:sp>
-      <p:sp>
-        <p:nvSpPr>
-          <p:cNvPr id="10" name="Shape 8"/>
-          <p:cNvSpPr/>
-          <p:nvPr/>
-        </p:nvSpPr>
-        <p:spPr>
-          <a:xfrm>
-            <a:off x="4297680" y="4754880"/>
-            <a:ext cx="3383280" cy="1371600"/>
-          </a:xfrm>
-          <a:prstGeom prst="roundRect">
-            <a:avLst>
-              <a:gd name="adj" fmla="val 6667"/>
-            </a:avLst>
-          </a:prstGeom>
-          <a:solidFill>
-            <a:srgbClr val="F6F1EA"/>
-          </a:solidFill>
-          <a:ln/>
-          <a:effectLst>
-            <a:outerShdw sx="100000" sy="100000" kx="0" ky="0" algn="bl" rotWithShape="0" blurRad="101600" dist="38100" dir="5400000">
-              <a:srgbClr val="10233A">
-                <a:alpha val="18000"/>
-              </a:srgbClr>
-            </a:outerShdw>
-          </a:effectLst>
-        </p:spPr>
-      </p:sp>
-      <p:sp>
-        <p:nvSpPr>
-          <p:cNvPr id="11" name="Text 9"/>
-          <p:cNvSpPr txBox="1"/>
-          <p:nvPr/>
-        </p:nvSpPr>
-        <p:spPr>
-          <a:xfrm>
-            <a:off x="4526280" y="4956048"/>
-            <a:ext cx="2926080" cy="411480"/>
-          </a:xfrm>
-          <a:prstGeom prst="rect">
-            <a:avLst/>
-          </a:prstGeom>
-          <a:noFill/>
-          <a:ln/>
-        </p:spPr>
-        <p:txBody>
-          <a:bodyPr wrap="square" lIns="0" tIns="0" rIns="0" bIns="0" rtlCol="0" anchor="ctr"/>
-          <a:lstStyle/>
-          <a:p>
-            <a:pPr indent="0" marL="0">
-              <a:buNone/>
-            </a:pPr>
-            <a:r>
-              <a:rPr lang="en-US" sz="1600" b="1" dirty="0">
-                <a:solidFill>
-                  <a:srgbClr val="1E3A5F"/>
-                </a:solidFill>
-                <a:latin typeface="游ゴシック" pitchFamily="34" charset="0"/>
-                <a:ea typeface="游ゴシック" pitchFamily="34" charset="-122"/>
-                <a:cs typeface="游ゴシック" pitchFamily="34" charset="-120"/>
-              </a:rPr>
-              <a:t>人材ファネル</a:t>
-            </a:r>
-            <a:endParaRPr lang="en-US" sz="1600" dirty="0"/>
-          </a:p>
-        </p:txBody>
-      </p:sp>
-      <p:sp>
-        <p:nvSpPr>
-          <p:cNvPr id="12" name="Text 10"/>
-          <p:cNvSpPr txBox="1"/>
-          <p:nvPr/>
-        </p:nvSpPr>
-        <p:spPr>
-          <a:xfrm>
-            <a:off x="4526280" y="5413248"/>
-            <a:ext cx="2926080" cy="594360"/>
-          </a:xfrm>
-          <a:prstGeom prst="rect">
-            <a:avLst/>
-          </a:prstGeom>
-          <a:noFill/>
-          <a:ln/>
-        </p:spPr>
-        <p:txBody>
-          <a:bodyPr wrap="square" lIns="0" tIns="0" rIns="0" bIns="0" rtlCol="0" anchor="t"/>
-          <a:lstStyle/>
-          <a:p>
-            <a:pPr indent="0" marL="0">
+              <a:t>税理士・司法書士・行政書士・弁護士＝合計7億円</a:t>
+            </a:r>
+            <a:endParaRPr lang="en-US" sz="1150" dirty="0"/>
+          </a:p>
+          <a:p>
+            <a:pPr marL="342900" indent="-342900">
               <a:lnSpc>
-                <a:spcPct val="125000"/>
+                <a:spcPct val="128000"/>
               </a:lnSpc>
-              <a:buNone/>
-            </a:pPr>
-            <a:r>
-              <a:rPr lang="en-US" sz="1250" dirty="0">
+              <a:spcAft>
+                <a:spcPts val="800"/>
+              </a:spcAft>
+              <a:buSzPct val="100000"/>
+              <a:buChar char="●"/>
+            </a:pPr>
+            <a:r>
+              <a:rPr lang="en-US" sz="1150" dirty="0">
                 <a:solidFill>
                   <a:srgbClr val="3A3A3A"/>
                 </a:solidFill>
@@ -8114,200 +10737,39 @@
                 <a:ea typeface="游ゴシック" pitchFamily="34" charset="-122"/>
                 <a:cs typeface="游ゴシック" pitchFamily="34" charset="-120"/>
               </a:rPr>
-              <a:t>講師デビューが入口</a:t>
-            </a:r>
-            <a:endParaRPr lang="en-US" sz="1250" dirty="0"/>
-          </a:p>
-        </p:txBody>
-      </p:sp>
-      <p:sp>
-        <p:nvSpPr>
-          <p:cNvPr id="13" name="Text 11"/>
-          <p:cNvSpPr txBox="1"/>
-          <p:nvPr/>
-        </p:nvSpPr>
-        <p:spPr>
-          <a:xfrm>
-            <a:off x="4023360" y="5074920"/>
-            <a:ext cx="274320" cy="731520"/>
-          </a:xfrm>
-          <a:prstGeom prst="rect">
-            <a:avLst/>
-          </a:prstGeom>
-          <a:noFill/>
-          <a:ln/>
-        </p:spPr>
-        <p:txBody>
-          <a:bodyPr wrap="square" lIns="0" tIns="0" rIns="0" bIns="0" rtlCol="0" anchor="ctr"/>
-          <a:lstStyle/>
-          <a:p>
-            <a:pPr algn="ctr" indent="0" marL="0">
-              <a:buNone/>
-            </a:pPr>
-            <a:r>
-              <a:rPr lang="en-US" sz="2000" b="1" dirty="0">
-                <a:solidFill>
-                  <a:srgbClr val="C9603F"/>
-                </a:solidFill>
-                <a:latin typeface="游ゴシック" pitchFamily="34" charset="0"/>
-                <a:ea typeface="游ゴシック" pitchFamily="34" charset="-122"/>
-                <a:cs typeface="游ゴシック" pitchFamily="34" charset="-120"/>
-              </a:rPr>
-              <a:t>＋</a:t>
-            </a:r>
-            <a:endParaRPr lang="en-US" sz="2000" dirty="0"/>
-          </a:p>
-        </p:txBody>
-      </p:sp>
-      <p:sp>
-        <p:nvSpPr>
-          <p:cNvPr id="14" name="Text 12"/>
-          <p:cNvSpPr txBox="1"/>
-          <p:nvPr/>
-        </p:nvSpPr>
-        <p:spPr>
-          <a:xfrm>
-            <a:off x="7680960" y="5074920"/>
-            <a:ext cx="548640" cy="731520"/>
-          </a:xfrm>
-          <a:prstGeom prst="rect">
-            <a:avLst/>
-          </a:prstGeom>
-          <a:noFill/>
-          <a:ln/>
-        </p:spPr>
-        <p:txBody>
-          <a:bodyPr wrap="square" lIns="0" tIns="0" rIns="0" bIns="0" rtlCol="0" anchor="ctr"/>
-          <a:lstStyle/>
-          <a:p>
-            <a:pPr algn="ctr" indent="0" marL="0">
-              <a:buNone/>
-            </a:pPr>
-            <a:r>
-              <a:rPr lang="en-US" sz="2400" b="1" dirty="0">
-                <a:solidFill>
-                  <a:srgbClr val="C9603F"/>
-                </a:solidFill>
-                <a:latin typeface="游ゴシック" pitchFamily="34" charset="0"/>
-                <a:ea typeface="游ゴシック" pitchFamily="34" charset="-122"/>
-                <a:cs typeface="游ゴシック" pitchFamily="34" charset="-120"/>
-              </a:rPr>
-              <a:t>→</a:t>
-            </a:r>
-            <a:endParaRPr lang="en-US" sz="2400" dirty="0"/>
-          </a:p>
-        </p:txBody>
-      </p:sp>
-      <p:sp>
-        <p:nvSpPr>
-          <p:cNvPr id="15" name="Shape 13"/>
-          <p:cNvSpPr/>
-          <p:nvPr/>
-        </p:nvSpPr>
-        <p:spPr>
-          <a:xfrm>
-            <a:off x="8229600" y="4754880"/>
-            <a:ext cx="3322015" cy="1371600"/>
-          </a:xfrm>
-          <a:prstGeom prst="roundRect">
-            <a:avLst>
-              <a:gd name="adj" fmla="val 6667"/>
-            </a:avLst>
-          </a:prstGeom>
-          <a:solidFill>
-            <a:srgbClr val="C9603F"/>
-          </a:solidFill>
-          <a:ln/>
-          <a:effectLst>
-            <a:outerShdw sx="100000" sy="100000" kx="0" ky="0" algn="bl" rotWithShape="0" blurRad="101600" dist="38100" dir="5400000">
-              <a:srgbClr val="10233A">
-                <a:alpha val="18000"/>
-              </a:srgbClr>
-            </a:outerShdw>
-          </a:effectLst>
-        </p:spPr>
-      </p:sp>
-      <p:sp>
-        <p:nvSpPr>
-          <p:cNvPr id="16" name="Text 14"/>
-          <p:cNvSpPr txBox="1"/>
-          <p:nvPr/>
-        </p:nvSpPr>
-        <p:spPr>
-          <a:xfrm>
-            <a:off x="8458200" y="4956048"/>
-            <a:ext cx="3093415" cy="411480"/>
-          </a:xfrm>
-          <a:prstGeom prst="rect">
-            <a:avLst/>
-          </a:prstGeom>
-          <a:noFill/>
-          <a:ln/>
-        </p:spPr>
-        <p:txBody>
-          <a:bodyPr wrap="square" lIns="0" tIns="0" rIns="0" bIns="0" rtlCol="0" anchor="ctr"/>
-          <a:lstStyle/>
-          <a:p>
-            <a:pPr indent="0" marL="0">
-              <a:buNone/>
-            </a:pPr>
-            <a:r>
-              <a:rPr lang="en-US" sz="1550" b="1" dirty="0">
-                <a:solidFill>
-                  <a:srgbClr val="FFFFFF"/>
-                </a:solidFill>
-                <a:latin typeface="游ゴシック" pitchFamily="34" charset="0"/>
-                <a:ea typeface="游ゴシック" pitchFamily="34" charset="-122"/>
-                <a:cs typeface="游ゴシック" pitchFamily="34" charset="-120"/>
-              </a:rPr>
-              <a:t>経済圏100億円のさらなる拡大</a:t>
-            </a:r>
-            <a:endParaRPr lang="en-US" sz="1550" dirty="0"/>
-          </a:p>
-        </p:txBody>
-      </p:sp>
-      <p:sp>
-        <p:nvSpPr>
-          <p:cNvPr id="17" name="Text 15"/>
-          <p:cNvSpPr txBox="1"/>
-          <p:nvPr/>
-        </p:nvSpPr>
-        <p:spPr>
-          <a:xfrm>
-            <a:off x="8458200" y="5413248"/>
-            <a:ext cx="3093415" cy="548640"/>
-          </a:xfrm>
-          <a:prstGeom prst="rect">
-            <a:avLst/>
-          </a:prstGeom>
-          <a:noFill/>
-          <a:ln/>
-        </p:spPr>
-        <p:txBody>
-          <a:bodyPr wrap="square" lIns="0" tIns="0" rIns="0" bIns="0" rtlCol="0" anchor="t"/>
-          <a:lstStyle/>
-          <a:p>
-            <a:pPr indent="0" marL="0">
-              <a:buNone/>
-            </a:pPr>
-            <a:r>
-              <a:rPr lang="en-US" sz="1300" dirty="0">
-                <a:solidFill>
-                  <a:srgbClr val="F1DCCF"/>
-                </a:solidFill>
-                <a:latin typeface="游ゴシック" pitchFamily="34" charset="0"/>
-                <a:ea typeface="游ゴシック" pitchFamily="34" charset="-122"/>
-                <a:cs typeface="游ゴシック" pitchFamily="34" charset="-120"/>
-              </a:rPr>
-              <a:t>→ 3年後 FC100事業所</a:t>
-            </a:r>
-            <a:endParaRPr lang="en-US" sz="1300" dirty="0"/>
-          </a:p>
-        </p:txBody>
-      </p:sp>
-      <p:sp>
-        <p:nvSpPr>
-          <p:cNvPr id="18" name="Text 16"/>
+              <a:t>有料老人ホーム3億円、法人バルクM&amp;A5億円</a:t>
+            </a:r>
+            <a:endParaRPr lang="en-US" sz="1150" dirty="0"/>
+          </a:p>
+          <a:p>
+            <a:pPr marL="342900" indent="-342900">
+              <a:lnSpc>
+                <a:spcPct val="128000"/>
+              </a:lnSpc>
+              <a:spcAft>
+                <a:spcPts val="800"/>
+              </a:spcAft>
+              <a:buSzPct val="100000"/>
+              <a:buChar char="●"/>
+            </a:pPr>
+            <a:r>
+              <a:rPr lang="en-US" sz="1150" dirty="0">
+                <a:solidFill>
+                  <a:srgbClr val="3A3A3A"/>
+                </a:solidFill>
+                <a:latin typeface="游ゴシック" pitchFamily="34" charset="0"/>
+                <a:ea typeface="游ゴシック" pitchFamily="34" charset="-122"/>
+                <a:cs typeface="游ゴシック" pitchFamily="34" charset="-120"/>
+              </a:rPr>
+              <a:t>単発の大型案件だけでなく、裾野の広い専門家連携が常時発生している</a:t>
+            </a:r>
+            <a:endParaRPr lang="en-US" sz="1150" dirty="0"/>
+          </a:p>
+        </p:txBody>
+      </p:sp>
+      <p:sp>
+        <p:nvSpPr>
+          <p:cNvPr id="11" name="Text 8"/>
           <p:cNvSpPr txBox="1"/>
           <p:nvPr/>
         </p:nvSpPr>
@@ -8409,7 +10871,7 @@
                 <a:ea typeface="游ゴシック" pitchFamily="34" charset="-122"/>
                 <a:cs typeface="游ゴシック" pitchFamily="34" charset="-120"/>
               </a:rPr>
-              <a:t>04 / MARKET</a:t>
+              <a:t>01 / NOVELTY</a:t>
             </a:r>
             <a:endParaRPr lang="en-US" sz="1300" dirty="0"/>
           </a:p>
@@ -8448,7 +10910,7 @@
                 <a:ea typeface="游ゴシック" pitchFamily="34" charset="-122"/>
                 <a:cs typeface="游ゴシック" pitchFamily="34" charset="-120"/>
               </a:rPr>
-              <a:t>市場性 ― 「財産がある人」から、全世代・全業種へ</a:t>
+              <a:t>斬新性 ― 「hub」として経済圏を創るという発想</a:t>
             </a:r>
             <a:endParaRPr lang="en-US" sz="2700" dirty="0"/>
           </a:p>
@@ -8514,7 +10976,7 @@
                 <a:ea typeface="游ゴシック" pitchFamily="34" charset="-122"/>
                 <a:cs typeface="游ゴシック" pitchFamily="34" charset="-120"/>
               </a:rPr>
-              <a:t>市</a:t>
+              <a:t>斬</a:t>
             </a:r>
             <a:endParaRPr lang="en-US" sz="2880" dirty="0"/>
           </a:p>
@@ -8560,7 +11022,7 @@
                 <a:ea typeface="游ゴシック" pitchFamily="34" charset="-122"/>
                 <a:cs typeface="游ゴシック" pitchFamily="34" charset="-120"/>
               </a:rPr>
-              <a:t>直接のターゲット：資産5億円〜10億円超の富裕層・超富裕層（素材①）</a:t>
+              <a:t>相続コンサルタントが自社の商品を売るのではなく、金融・不動産・士業など周辺専門家の収益の「結節点（hub）」になるという発想そのものが、他に類を見ない（素材①）</a:t>
             </a:r>
             <a:endParaRPr lang="en-US" sz="1500" dirty="0"/>
           </a:p>
@@ -8584,7 +11046,7 @@
                 <a:ea typeface="游ゴシック" pitchFamily="34" charset="-122"/>
                 <a:cs typeface="游ゴシック" pitchFamily="34" charset="-120"/>
               </a:rPr>
-              <a:t>ACPを入口にすることで、財産の有無に関わらず誰もがターゲットになる市場へ構造的に拡大（素材②）</a:t>
+              <a:t>厚生労働省が既に推進している公的な枠組み（ACP＝人生会議）を、自社の“フロントエンド”として活用するという発想の転換（素材②）</a:t>
             </a:r>
             <a:endParaRPr lang="en-US" sz="1500" dirty="0"/>
           </a:p>
@@ -8608,7 +11070,7 @@
                 <a:ea typeface="游ゴシック" pitchFamily="34" charset="-122"/>
                 <a:cs typeface="游ゴシック" pitchFamily="34" charset="-120"/>
               </a:rPr>
-              <a:t>周辺専門家（税理士・司法書士・行政書士・弁護士・不動産・金融・有料老人ホーム・M&amp;A）を含めれば、市場は相続業界単体にとどまらない</a:t>
+              <a:t>「財産ではなく、家族の抱える“隠れた課題”を見つけに行く」という視点を、育成カリキュラムとして体系化・教材化している（素材③）</a:t>
             </a:r>
             <a:endParaRPr lang="en-US" sz="1500" dirty="0"/>
           </a:p>
@@ -8622,25 +11084,18 @@
         </p:nvSpPr>
         <p:spPr>
           <a:xfrm>
-            <a:off x="640080" y="4709160"/>
-            <a:ext cx="3200400" cy="1280160"/>
+            <a:off x="640080" y="4846320"/>
+            <a:ext cx="10881360" cy="914400"/>
           </a:xfrm>
           <a:prstGeom prst="roundRect">
             <a:avLst>
-              <a:gd name="adj" fmla="val 7143"/>
+              <a:gd name="adj" fmla="val 8000"/>
             </a:avLst>
           </a:prstGeom>
           <a:solidFill>
-            <a:srgbClr val="F6F1EA"/>
+            <a:srgbClr val="1E3A5F"/>
           </a:solidFill>
           <a:ln/>
-          <a:effectLst>
-            <a:outerShdw sx="100000" sy="100000" kx="0" ky="0" algn="bl" rotWithShape="0" blurRad="101600" dist="38100" dir="5400000">
-              <a:srgbClr val="10233A">
-                <a:alpha val="18000"/>
-              </a:srgbClr>
-            </a:outerShdw>
-          </a:effectLst>
         </p:spPr>
       </p:sp>
       <p:sp>
@@ -8651,293 +11106,40 @@
         </p:nvSpPr>
         <p:spPr>
           <a:xfrm>
-            <a:off x="777240" y="4873752"/>
-            <a:ext cx="2926080" cy="665683"/>
-          </a:xfrm>
-          <a:prstGeom prst="rect">
-            <a:avLst/>
-          </a:prstGeom>
-          <a:noFill/>
-          <a:ln/>
-        </p:spPr>
-        <p:txBody>
-          <a:bodyPr wrap="square" lIns="0" tIns="0" rIns="0" bIns="0" rtlCol="0" anchor="ctr"/>
-          <a:lstStyle/>
-          <a:p>
-            <a:pPr algn="ctr" indent="0" marL="0">
-              <a:buNone/>
-            </a:pPr>
-            <a:r>
-              <a:rPr lang="en-US" sz="2200" b="1" dirty="0">
-                <a:solidFill>
-                  <a:srgbClr val="C9603F"/>
-                </a:solidFill>
-                <a:latin typeface="游ゴシック" pitchFamily="34" charset="0"/>
-                <a:ea typeface="游ゴシック" pitchFamily="34" charset="-122"/>
-                <a:cs typeface="游ゴシック" pitchFamily="34" charset="-120"/>
-              </a:rPr>
-              <a:t>50事業所</a:t>
-            </a:r>
-            <a:endParaRPr lang="en-US" sz="2200" dirty="0"/>
+            <a:off x="914400" y="4846320"/>
+            <a:ext cx="10332720" cy="914400"/>
+          </a:xfrm>
+          <a:prstGeom prst="rect">
+            <a:avLst/>
+          </a:prstGeom>
+          <a:noFill/>
+          <a:ln/>
+        </p:spPr>
+        <p:txBody>
+          <a:bodyPr wrap="square" lIns="0" tIns="0" rIns="0" bIns="0" rtlCol="0" anchor="ctr"/>
+          <a:lstStyle/>
+          <a:p>
+            <a:pPr algn="l" indent="0" marL="0">
+              <a:buNone/>
+            </a:pPr>
+            <a:r>
+              <a:rPr lang="en-US" sz="1700" b="1" dirty="0">
+                <a:solidFill>
+                  <a:srgbClr val="F1DCCF"/>
+                </a:solidFill>
+                <a:latin typeface="游ゴシック" pitchFamily="34" charset="0"/>
+                <a:ea typeface="游ゴシック" pitchFamily="34" charset="-122"/>
+                <a:cs typeface="游ゴシック" pitchFamily="34" charset="-120"/>
+              </a:rPr>
+              <a:t>「ノートを売る」会社ではなく、「専門家たちの収益の結節点になる」会社。</a:t>
+            </a:r>
+            <a:endParaRPr lang="en-US" sz="1700" dirty="0"/>
           </a:p>
         </p:txBody>
       </p:sp>
       <p:sp>
         <p:nvSpPr>
           <p:cNvPr id="9" name="Text 7"/>
-          <p:cNvSpPr txBox="1"/>
-          <p:nvPr/>
-        </p:nvSpPr>
-        <p:spPr>
-          <a:xfrm>
-            <a:off x="731520" y="5426050"/>
-            <a:ext cx="3017520" cy="512064"/>
-          </a:xfrm>
-          <a:prstGeom prst="rect">
-            <a:avLst/>
-          </a:prstGeom>
-          <a:noFill/>
-          <a:ln/>
-        </p:spPr>
-        <p:txBody>
-          <a:bodyPr wrap="square" lIns="0" tIns="0" rIns="0" bIns="0" rtlCol="0" anchor="t"/>
-          <a:lstStyle/>
-          <a:p>
-            <a:pPr algn="ctr" indent="0" marL="0">
-              <a:buNone/>
-            </a:pPr>
-            <a:r>
-              <a:rPr lang="en-US" sz="1100" dirty="0">
-                <a:solidFill>
-                  <a:srgbClr val="1E3A5F"/>
-                </a:solidFill>
-                <a:latin typeface="游ゴシック" pitchFamily="34" charset="0"/>
-                <a:ea typeface="游ゴシック" pitchFamily="34" charset="-122"/>
-                <a:cs typeface="游ゴシック" pitchFamily="34" charset="-120"/>
-              </a:rPr>
-              <a:t>全国の拠点数</a:t>
-            </a:r>
-            <a:endParaRPr lang="en-US" sz="1100" dirty="0"/>
-          </a:p>
-        </p:txBody>
-      </p:sp>
-      <p:sp>
-        <p:nvSpPr>
-          <p:cNvPr id="10" name="Shape 8"/>
-          <p:cNvSpPr/>
-          <p:nvPr/>
-        </p:nvSpPr>
-        <p:spPr>
-          <a:xfrm>
-            <a:off x="4251960" y="4709160"/>
-            <a:ext cx="3200400" cy="1280160"/>
-          </a:xfrm>
-          <a:prstGeom prst="roundRect">
-            <a:avLst>
-              <a:gd name="adj" fmla="val 7143"/>
-            </a:avLst>
-          </a:prstGeom>
-          <a:solidFill>
-            <a:srgbClr val="F6F1EA"/>
-          </a:solidFill>
-          <a:ln/>
-          <a:effectLst>
-            <a:outerShdw sx="100000" sy="100000" kx="0" ky="0" algn="bl" rotWithShape="0" blurRad="101600" dist="38100" dir="5400000">
-              <a:srgbClr val="10233A">
-                <a:alpha val="18000"/>
-              </a:srgbClr>
-            </a:outerShdw>
-          </a:effectLst>
-        </p:spPr>
-      </p:sp>
-      <p:sp>
-        <p:nvSpPr>
-          <p:cNvPr id="11" name="Text 9"/>
-          <p:cNvSpPr txBox="1"/>
-          <p:nvPr/>
-        </p:nvSpPr>
-        <p:spPr>
-          <a:xfrm>
-            <a:off x="4389120" y="4873752"/>
-            <a:ext cx="2926080" cy="665683"/>
-          </a:xfrm>
-          <a:prstGeom prst="rect">
-            <a:avLst/>
-          </a:prstGeom>
-          <a:noFill/>
-          <a:ln/>
-        </p:spPr>
-        <p:txBody>
-          <a:bodyPr wrap="square" lIns="0" tIns="0" rIns="0" bIns="0" rtlCol="0" anchor="ctr"/>
-          <a:lstStyle/>
-          <a:p>
-            <a:pPr algn="ctr" indent="0" marL="0">
-              <a:buNone/>
-            </a:pPr>
-            <a:r>
-              <a:rPr lang="en-US" sz="2200" b="1" dirty="0">
-                <a:solidFill>
-                  <a:srgbClr val="C9603F"/>
-                </a:solidFill>
-                <a:latin typeface="游ゴシック" pitchFamily="34" charset="0"/>
-                <a:ea typeface="游ゴシック" pitchFamily="34" charset="-122"/>
-                <a:cs typeface="游ゴシック" pitchFamily="34" charset="-120"/>
-              </a:rPr>
-              <a:t>資産5〜10億円超</a:t>
-            </a:r>
-            <a:endParaRPr lang="en-US" sz="2200" dirty="0"/>
-          </a:p>
-        </p:txBody>
-      </p:sp>
-      <p:sp>
-        <p:nvSpPr>
-          <p:cNvPr id="12" name="Text 10"/>
-          <p:cNvSpPr txBox="1"/>
-          <p:nvPr/>
-        </p:nvSpPr>
-        <p:spPr>
-          <a:xfrm>
-            <a:off x="4343400" y="5426050"/>
-            <a:ext cx="3017520" cy="512064"/>
-          </a:xfrm>
-          <a:prstGeom prst="rect">
-            <a:avLst/>
-          </a:prstGeom>
-          <a:noFill/>
-          <a:ln/>
-        </p:spPr>
-        <p:txBody>
-          <a:bodyPr wrap="square" lIns="0" tIns="0" rIns="0" bIns="0" rtlCol="0" anchor="t"/>
-          <a:lstStyle/>
-          <a:p>
-            <a:pPr algn="ctr" indent="0" marL="0">
-              <a:buNone/>
-            </a:pPr>
-            <a:r>
-              <a:rPr lang="en-US" sz="1100" dirty="0">
-                <a:solidFill>
-                  <a:srgbClr val="1E3A5F"/>
-                </a:solidFill>
-                <a:latin typeface="游ゴシック" pitchFamily="34" charset="0"/>
-                <a:ea typeface="游ゴシック" pitchFamily="34" charset="-122"/>
-                <a:cs typeface="游ゴシック" pitchFamily="34" charset="-120"/>
-              </a:rPr>
-              <a:t>直接の顧客層</a:t>
-            </a:r>
-            <a:endParaRPr lang="en-US" sz="1100" dirty="0"/>
-          </a:p>
-        </p:txBody>
-      </p:sp>
-      <p:sp>
-        <p:nvSpPr>
-          <p:cNvPr id="13" name="Shape 11"/>
-          <p:cNvSpPr/>
-          <p:nvPr/>
-        </p:nvSpPr>
-        <p:spPr>
-          <a:xfrm>
-            <a:off x="7863840" y="4709160"/>
-            <a:ext cx="3200400" cy="1280160"/>
-          </a:xfrm>
-          <a:prstGeom prst="roundRect">
-            <a:avLst>
-              <a:gd name="adj" fmla="val 7143"/>
-            </a:avLst>
-          </a:prstGeom>
-          <a:solidFill>
-            <a:srgbClr val="F6F1EA"/>
-          </a:solidFill>
-          <a:ln/>
-          <a:effectLst>
-            <a:outerShdw sx="100000" sy="100000" kx="0" ky="0" algn="bl" rotWithShape="0" blurRad="101600" dist="38100" dir="5400000">
-              <a:srgbClr val="10233A">
-                <a:alpha val="18000"/>
-              </a:srgbClr>
-            </a:outerShdw>
-          </a:effectLst>
-        </p:spPr>
-      </p:sp>
-      <p:sp>
-        <p:nvSpPr>
-          <p:cNvPr id="14" name="Text 12"/>
-          <p:cNvSpPr txBox="1"/>
-          <p:nvPr/>
-        </p:nvSpPr>
-        <p:spPr>
-          <a:xfrm>
-            <a:off x="8001000" y="4873752"/>
-            <a:ext cx="2926080" cy="665683"/>
-          </a:xfrm>
-          <a:prstGeom prst="rect">
-            <a:avLst/>
-          </a:prstGeom>
-          <a:noFill/>
-          <a:ln/>
-        </p:spPr>
-        <p:txBody>
-          <a:bodyPr wrap="square" lIns="0" tIns="0" rIns="0" bIns="0" rtlCol="0" anchor="ctr"/>
-          <a:lstStyle/>
-          <a:p>
-            <a:pPr algn="ctr" indent="0" marL="0">
-              <a:buNone/>
-            </a:pPr>
-            <a:r>
-              <a:rPr lang="en-US" sz="2200" b="1" dirty="0">
-                <a:solidFill>
-                  <a:srgbClr val="C9603F"/>
-                </a:solidFill>
-                <a:latin typeface="游ゴシック" pitchFamily="34" charset="0"/>
-                <a:ea typeface="游ゴシック" pitchFamily="34" charset="-122"/>
-                <a:cs typeface="游ゴシック" pitchFamily="34" charset="-120"/>
-              </a:rPr>
-              <a:t>約100億円</a:t>
-            </a:r>
-            <a:endParaRPr lang="en-US" sz="2200" dirty="0"/>
-          </a:p>
-        </p:txBody>
-      </p:sp>
-      <p:sp>
-        <p:nvSpPr>
-          <p:cNvPr id="15" name="Text 13"/>
-          <p:cNvSpPr txBox="1"/>
-          <p:nvPr/>
-        </p:nvSpPr>
-        <p:spPr>
-          <a:xfrm>
-            <a:off x="7955280" y="5426050"/>
-            <a:ext cx="3017520" cy="512064"/>
-          </a:xfrm>
-          <a:prstGeom prst="rect">
-            <a:avLst/>
-          </a:prstGeom>
-          <a:noFill/>
-          <a:ln/>
-        </p:spPr>
-        <p:txBody>
-          <a:bodyPr wrap="square" lIns="0" tIns="0" rIns="0" bIns="0" rtlCol="0" anchor="t"/>
-          <a:lstStyle/>
-          <a:p>
-            <a:pPr algn="ctr" indent="0" marL="0">
-              <a:buNone/>
-            </a:pPr>
-            <a:r>
-              <a:rPr lang="en-US" sz="1100" dirty="0">
-                <a:solidFill>
-                  <a:srgbClr val="1E3A5F"/>
-                </a:solidFill>
-                <a:latin typeface="游ゴシック" pitchFamily="34" charset="0"/>
-                <a:ea typeface="游ゴシック" pitchFamily="34" charset="-122"/>
-                <a:cs typeface="游ゴシック" pitchFamily="34" charset="-120"/>
-              </a:rPr>
-              <a:t>周辺経済圏</a:t>
-            </a:r>
-            <a:endParaRPr lang="en-US" sz="1100" dirty="0"/>
-          </a:p>
-        </p:txBody>
-      </p:sp>
-      <p:sp>
-        <p:nvSpPr>
-          <p:cNvPr id="16" name="Text 14"/>
           <p:cNvSpPr txBox="1"/>
           <p:nvPr/>
         </p:nvSpPr>
@@ -9039,7 +11241,7 @@
                 <a:ea typeface="游ゴシック" pitchFamily="34" charset="-122"/>
                 <a:cs typeface="游ゴシック" pitchFamily="34" charset="-120"/>
               </a:rPr>
-              <a:t>05 / ADVANTAGE</a:t>
+              <a:t>02 / PROFITABILITY</a:t>
             </a:r>
             <a:endParaRPr lang="en-US" sz="1300" dirty="0"/>
           </a:p>
@@ -9078,7 +11280,7 @@
                 <a:ea typeface="游ゴシック" pitchFamily="34" charset="-122"/>
                 <a:cs typeface="游ゴシック" pitchFamily="34" charset="-120"/>
               </a:rPr>
-              <a:t>優位性 ― 「バッジのない」からこそ生まれた協業モデル</a:t>
+              <a:t>収益性 ― 自社の売上ではなく、創出した経済圏で語る</a:t>
             </a:r>
             <a:endParaRPr lang="en-US" sz="2700" dirty="0"/>
           </a:p>
@@ -9144,7 +11346,7 @@
                 <a:ea typeface="游ゴシック" pitchFamily="34" charset="-122"/>
                 <a:cs typeface="游ゴシック" pitchFamily="34" charset="-120"/>
               </a:rPr>
-              <a:t>優</a:t>
+              <a:t>収</a:t>
             </a:r>
             <a:endParaRPr lang="en-US" sz="2880" dirty="0"/>
           </a:p>
@@ -9152,75 +11354,14 @@
       </p:sp>
       <p:sp>
         <p:nvSpPr>
-          <p:cNvPr id="6" name="Shape 4"/>
-          <p:cNvSpPr/>
+          <p:cNvPr id="6" name="Text 4"/>
+          <p:cNvSpPr txBox="1"/>
           <p:nvPr/>
         </p:nvSpPr>
         <p:spPr>
           <a:xfrm>
             <a:off x="640080" y="1783080"/>
-            <a:ext cx="10881360" cy="822960"/>
-          </a:xfrm>
-          <a:prstGeom prst="roundRect">
-            <a:avLst>
-              <a:gd name="adj" fmla="val 8889"/>
-            </a:avLst>
-          </a:prstGeom>
-          <a:solidFill>
-            <a:srgbClr val="1E3A5F"/>
-          </a:solidFill>
-          <a:ln/>
-        </p:spPr>
-      </p:sp>
-      <p:sp>
-        <p:nvSpPr>
-          <p:cNvPr id="7" name="Text 5"/>
-          <p:cNvSpPr txBox="1"/>
-          <p:nvPr/>
-        </p:nvSpPr>
-        <p:spPr>
-          <a:xfrm>
-            <a:off x="914400" y="1783080"/>
-            <a:ext cx="10332720" cy="822960"/>
-          </a:xfrm>
-          <a:prstGeom prst="rect">
-            <a:avLst/>
-          </a:prstGeom>
-          <a:noFill/>
-          <a:ln/>
-        </p:spPr>
-        <p:txBody>
-          <a:bodyPr wrap="square" lIns="0" tIns="0" rIns="0" bIns="0" rtlCol="0" anchor="ctr"/>
-          <a:lstStyle/>
-          <a:p>
-            <a:pPr algn="l" indent="0" marL="0">
-              <a:buNone/>
-            </a:pPr>
-            <a:r>
-              <a:rPr lang="en-US" sz="1450" i="1" dirty="0">
-                <a:solidFill>
-                  <a:srgbClr val="F1DCCF"/>
-                </a:solidFill>
-                <a:latin typeface="游ゴシック" pitchFamily="34" charset="0"/>
-                <a:ea typeface="游ゴシック" pitchFamily="34" charset="-122"/>
-                <a:cs typeface="游ゴシック" pitchFamily="34" charset="-120"/>
-              </a:rPr>
-              <a:t>『バッジのない、コンサルタントに、相続ビジネスの何ができるのか？』―起業当初、ある士業の先生に言われた言葉</a:t>
-            </a:r>
-            <a:endParaRPr lang="en-US" sz="1450" dirty="0"/>
-          </a:p>
-        </p:txBody>
-      </p:sp>
-      <p:sp>
-        <p:nvSpPr>
-          <p:cNvPr id="8" name="Text 6"/>
-          <p:cNvSpPr txBox="1"/>
-          <p:nvPr/>
-        </p:nvSpPr>
-        <p:spPr>
-          <a:xfrm>
-            <a:off x="640080" y="2834640"/>
-            <a:ext cx="10881360" cy="3154680"/>
+            <a:ext cx="10881360" cy="4206240"/>
           </a:xfrm>
           <a:prstGeom prst="rect">
             <a:avLst/>
@@ -9251,7 +11392,7 @@
                 <a:ea typeface="游ゴシック" pitchFamily="34" charset="-122"/>
                 <a:cs typeface="游ゴシック" pitchFamily="34" charset="-120"/>
               </a:rPr>
-              <a:t>その後、「士業の先生が私に足を向けて寝れないくらい」仕事を生み出し続け、自分の収益だけを追わない「本当の協業スタイル」を確立（素材①）</a:t>
+              <a:t>自社単体の売上（約5,000万円）だけを見れば小さく映るが、hubとして周辺専門家にもたらした経済圏は約100億円</a:t>
             </a:r>
             <a:endParaRPr lang="en-US" sz="1500" dirty="0"/>
           </a:p>
@@ -9275,7 +11416,7 @@
                 <a:ea typeface="游ゴシック" pitchFamily="34" charset="-122"/>
                 <a:cs typeface="游ゴシック" pitchFamily="34" charset="-120"/>
               </a:rPr>
-              <a:t>この協業の仕組みを、第3回（紹介構造）・第4回（“人生の指揮官”モデル）のカリキュラムとして教材化し、再現可能な技術にしている（素材③）</a:t>
+              <a:t>信用金庫への新規資金導入 約7億円、法人バルクM&amp;A 2億円など、具体的な実例が裏付け（素材①）</a:t>
             </a:r>
             <a:endParaRPr lang="en-US" sz="1500" dirty="0"/>
           </a:p>
@@ -9299,7 +11440,7 @@
                 <a:ea typeface="游ゴシック" pitchFamily="34" charset="-122"/>
                 <a:cs typeface="游ゴシック" pitchFamily="34" charset="-120"/>
               </a:rPr>
-              <a:t>「財産に着目する」のではなく「家族の隠れた課題を見つけに行く」という視点そのものが、他の相続コンサル・士業・金融機関にはない方法論的な差別化</a:t>
+              <a:t>「繋ぐグループ全体の売上」という表現は“事業間シナジー”の指標として使ってよいと事務局（加藤氏）からも確認済み</a:t>
             </a:r>
             <a:endParaRPr lang="en-US" sz="1500" dirty="0"/>
           </a:p>
@@ -9307,7 +11448,406 @@
       </p:sp>
       <p:sp>
         <p:nvSpPr>
+          <p:cNvPr id="7" name="Shape 5"/>
+          <p:cNvSpPr/>
+          <p:nvPr/>
+        </p:nvSpPr>
+        <p:spPr>
+          <a:xfrm>
+            <a:off x="640080" y="4572000"/>
+            <a:ext cx="3200400" cy="1371600"/>
+          </a:xfrm>
+          <a:prstGeom prst="roundRect">
+            <a:avLst>
+              <a:gd name="adj" fmla="val 6667"/>
+            </a:avLst>
+          </a:prstGeom>
+          <a:solidFill>
+            <a:srgbClr val="F6F1EA"/>
+          </a:solidFill>
+          <a:ln/>
+          <a:effectLst>
+            <a:outerShdw sx="100000" sy="100000" kx="0" ky="0" algn="bl" rotWithShape="0" blurRad="101600" dist="38100" dir="5400000">
+              <a:srgbClr val="10233A">
+                <a:alpha val="18000"/>
+              </a:srgbClr>
+            </a:outerShdw>
+          </a:effectLst>
+        </p:spPr>
+      </p:sp>
+      <p:sp>
+        <p:nvSpPr>
+          <p:cNvPr id="8" name="Text 6"/>
+          <p:cNvSpPr txBox="1"/>
+          <p:nvPr/>
+        </p:nvSpPr>
+        <p:spPr>
+          <a:xfrm>
+            <a:off x="777240" y="4754880"/>
+            <a:ext cx="2926080" cy="640080"/>
+          </a:xfrm>
+          <a:prstGeom prst="rect">
+            <a:avLst/>
+          </a:prstGeom>
+          <a:noFill/>
+          <a:ln/>
+        </p:spPr>
+        <p:txBody>
+          <a:bodyPr wrap="square" lIns="0" tIns="0" rIns="0" bIns="0" rtlCol="0" anchor="ctr"/>
+          <a:lstStyle/>
+          <a:p>
+            <a:pPr algn="ctr" indent="0" marL="0">
+              <a:buNone/>
+            </a:pPr>
+            <a:r>
+              <a:rPr lang="en-US" sz="2400" b="1" dirty="0">
+                <a:solidFill>
+                  <a:srgbClr val="1E3A5F"/>
+                </a:solidFill>
+                <a:latin typeface="游ゴシック" pitchFamily="34" charset="0"/>
+                <a:ea typeface="游ゴシック" pitchFamily="34" charset="-122"/>
+                <a:cs typeface="游ゴシック" pitchFamily="34" charset="-120"/>
+              </a:rPr>
+              <a:t>5,000万円</a:t>
+            </a:r>
+            <a:endParaRPr lang="en-US" sz="2400" dirty="0"/>
+          </a:p>
+        </p:txBody>
+      </p:sp>
+      <p:sp>
+        <p:nvSpPr>
           <p:cNvPr id="9" name="Text 7"/>
+          <p:cNvSpPr txBox="1"/>
+          <p:nvPr/>
+        </p:nvSpPr>
+        <p:spPr>
+          <a:xfrm>
+            <a:off x="777240" y="5440680"/>
+            <a:ext cx="2926080" cy="411480"/>
+          </a:xfrm>
+          <a:prstGeom prst="rect">
+            <a:avLst/>
+          </a:prstGeom>
+          <a:noFill/>
+          <a:ln/>
+        </p:spPr>
+        <p:txBody>
+          <a:bodyPr wrap="square" lIns="0" tIns="0" rIns="0" bIns="0" rtlCol="0" anchor="ctr"/>
+          <a:lstStyle/>
+          <a:p>
+            <a:pPr algn="ctr" indent="0" marL="0">
+              <a:buNone/>
+            </a:pPr>
+            <a:r>
+              <a:rPr lang="en-US" sz="1250" dirty="0">
+                <a:solidFill>
+                  <a:srgbClr val="6B6B6B"/>
+                </a:solidFill>
+                <a:latin typeface="游ゴシック" pitchFamily="34" charset="0"/>
+                <a:ea typeface="游ゴシック" pitchFamily="34" charset="-122"/>
+                <a:cs typeface="游ゴシック" pitchFamily="34" charset="-120"/>
+              </a:rPr>
+              <a:t>自社単体</a:t>
+            </a:r>
+            <a:endParaRPr lang="en-US" sz="1250" dirty="0"/>
+          </a:p>
+        </p:txBody>
+      </p:sp>
+      <p:sp>
+        <p:nvSpPr>
+          <p:cNvPr id="10" name="Text 8"/>
+          <p:cNvSpPr txBox="1"/>
+          <p:nvPr/>
+        </p:nvSpPr>
+        <p:spPr>
+          <a:xfrm>
+            <a:off x="3858768" y="4983480"/>
+            <a:ext cx="374904" cy="548640"/>
+          </a:xfrm>
+          <a:prstGeom prst="rect">
+            <a:avLst/>
+          </a:prstGeom>
+          <a:noFill/>
+          <a:ln/>
+        </p:spPr>
+        <p:txBody>
+          <a:bodyPr wrap="square" lIns="0" tIns="0" rIns="0" bIns="0" rtlCol="0" anchor="ctr"/>
+          <a:lstStyle/>
+          <a:p>
+            <a:pPr algn="ctr" indent="0" marL="0">
+              <a:buNone/>
+            </a:pPr>
+            <a:r>
+              <a:rPr lang="en-US" sz="2000" b="1" dirty="0">
+                <a:solidFill>
+                  <a:srgbClr val="C9603F"/>
+                </a:solidFill>
+                <a:latin typeface="游ゴシック" pitchFamily="34" charset="0"/>
+                <a:ea typeface="游ゴシック" pitchFamily="34" charset="-122"/>
+                <a:cs typeface="游ゴシック" pitchFamily="34" charset="-120"/>
+              </a:rPr>
+              <a:t>→</a:t>
+            </a:r>
+            <a:endParaRPr lang="en-US" sz="2000" dirty="0"/>
+          </a:p>
+        </p:txBody>
+      </p:sp>
+      <p:sp>
+        <p:nvSpPr>
+          <p:cNvPr id="11" name="Shape 9"/>
+          <p:cNvSpPr/>
+          <p:nvPr/>
+        </p:nvSpPr>
+        <p:spPr>
+          <a:xfrm>
+            <a:off x="4251960" y="4572000"/>
+            <a:ext cx="3200400" cy="1371600"/>
+          </a:xfrm>
+          <a:prstGeom prst="roundRect">
+            <a:avLst>
+              <a:gd name="adj" fmla="val 6667"/>
+            </a:avLst>
+          </a:prstGeom>
+          <a:solidFill>
+            <a:srgbClr val="F6F1EA"/>
+          </a:solidFill>
+          <a:ln/>
+          <a:effectLst>
+            <a:outerShdw sx="100000" sy="100000" kx="0" ky="0" algn="bl" rotWithShape="0" blurRad="101600" dist="38100" dir="5400000">
+              <a:srgbClr val="10233A">
+                <a:alpha val="18000"/>
+              </a:srgbClr>
+            </a:outerShdw>
+          </a:effectLst>
+        </p:spPr>
+      </p:sp>
+      <p:sp>
+        <p:nvSpPr>
+          <p:cNvPr id="12" name="Text 10"/>
+          <p:cNvSpPr txBox="1"/>
+          <p:nvPr/>
+        </p:nvSpPr>
+        <p:spPr>
+          <a:xfrm>
+            <a:off x="4389120" y="4754880"/>
+            <a:ext cx="2926080" cy="640080"/>
+          </a:xfrm>
+          <a:prstGeom prst="rect">
+            <a:avLst/>
+          </a:prstGeom>
+          <a:noFill/>
+          <a:ln/>
+        </p:spPr>
+        <p:txBody>
+          <a:bodyPr wrap="square" lIns="0" tIns="0" rIns="0" bIns="0" rtlCol="0" anchor="ctr"/>
+          <a:lstStyle/>
+          <a:p>
+            <a:pPr algn="ctr" indent="0" marL="0">
+              <a:buNone/>
+            </a:pPr>
+            <a:r>
+              <a:rPr lang="en-US" sz="2400" b="1" dirty="0">
+                <a:solidFill>
+                  <a:srgbClr val="1E3A5F"/>
+                </a:solidFill>
+                <a:latin typeface="游ゴシック" pitchFamily="34" charset="0"/>
+                <a:ea typeface="游ゴシック" pitchFamily="34" charset="-122"/>
+                <a:cs typeface="游ゴシック" pitchFamily="34" charset="-120"/>
+              </a:rPr>
+              <a:t>3億円規模</a:t>
+            </a:r>
+            <a:endParaRPr lang="en-US" sz="2400" dirty="0"/>
+          </a:p>
+        </p:txBody>
+      </p:sp>
+      <p:sp>
+        <p:nvSpPr>
+          <p:cNvPr id="13" name="Text 11"/>
+          <p:cNvSpPr txBox="1"/>
+          <p:nvPr/>
+        </p:nvSpPr>
+        <p:spPr>
+          <a:xfrm>
+            <a:off x="4389120" y="5440680"/>
+            <a:ext cx="2926080" cy="411480"/>
+          </a:xfrm>
+          <a:prstGeom prst="rect">
+            <a:avLst/>
+          </a:prstGeom>
+          <a:noFill/>
+          <a:ln/>
+        </p:spPr>
+        <p:txBody>
+          <a:bodyPr wrap="square" lIns="0" tIns="0" rIns="0" bIns="0" rtlCol="0" anchor="ctr"/>
+          <a:lstStyle/>
+          <a:p>
+            <a:pPr algn="ctr" indent="0" marL="0">
+              <a:buNone/>
+            </a:pPr>
+            <a:r>
+              <a:rPr lang="en-US" sz="1250" dirty="0">
+                <a:solidFill>
+                  <a:srgbClr val="6B6B6B"/>
+                </a:solidFill>
+                <a:latin typeface="游ゴシック" pitchFamily="34" charset="0"/>
+                <a:ea typeface="游ゴシック" pitchFamily="34" charset="-122"/>
+                <a:cs typeface="游ゴシック" pitchFamily="34" charset="-120"/>
+              </a:rPr>
+              <a:t>グループ全体</a:t>
+            </a:r>
+            <a:endParaRPr lang="en-US" sz="1250" dirty="0"/>
+          </a:p>
+        </p:txBody>
+      </p:sp>
+      <p:sp>
+        <p:nvSpPr>
+          <p:cNvPr id="14" name="Text 12"/>
+          <p:cNvSpPr txBox="1"/>
+          <p:nvPr/>
+        </p:nvSpPr>
+        <p:spPr>
+          <a:xfrm>
+            <a:off x="7470648" y="4983480"/>
+            <a:ext cx="374904" cy="548640"/>
+          </a:xfrm>
+          <a:prstGeom prst="rect">
+            <a:avLst/>
+          </a:prstGeom>
+          <a:noFill/>
+          <a:ln/>
+        </p:spPr>
+        <p:txBody>
+          <a:bodyPr wrap="square" lIns="0" tIns="0" rIns="0" bIns="0" rtlCol="0" anchor="ctr"/>
+          <a:lstStyle/>
+          <a:p>
+            <a:pPr algn="ctr" indent="0" marL="0">
+              <a:buNone/>
+            </a:pPr>
+            <a:r>
+              <a:rPr lang="en-US" sz="2000" b="1" dirty="0">
+                <a:solidFill>
+                  <a:srgbClr val="C9603F"/>
+                </a:solidFill>
+                <a:latin typeface="游ゴシック" pitchFamily="34" charset="0"/>
+                <a:ea typeface="游ゴシック" pitchFamily="34" charset="-122"/>
+                <a:cs typeface="游ゴシック" pitchFamily="34" charset="-120"/>
+              </a:rPr>
+              <a:t>→</a:t>
+            </a:r>
+            <a:endParaRPr lang="en-US" sz="2000" dirty="0"/>
+          </a:p>
+        </p:txBody>
+      </p:sp>
+      <p:sp>
+        <p:nvSpPr>
+          <p:cNvPr id="15" name="Shape 13"/>
+          <p:cNvSpPr/>
+          <p:nvPr/>
+        </p:nvSpPr>
+        <p:spPr>
+          <a:xfrm>
+            <a:off x="7863840" y="4572000"/>
+            <a:ext cx="3200400" cy="1371600"/>
+          </a:xfrm>
+          <a:prstGeom prst="roundRect">
+            <a:avLst>
+              <a:gd name="adj" fmla="val 6667"/>
+            </a:avLst>
+          </a:prstGeom>
+          <a:solidFill>
+            <a:srgbClr val="C9603F"/>
+          </a:solidFill>
+          <a:ln/>
+          <a:effectLst>
+            <a:outerShdw sx="100000" sy="100000" kx="0" ky="0" algn="bl" rotWithShape="0" blurRad="101600" dist="38100" dir="5400000">
+              <a:srgbClr val="10233A">
+                <a:alpha val="18000"/>
+              </a:srgbClr>
+            </a:outerShdw>
+          </a:effectLst>
+        </p:spPr>
+      </p:sp>
+      <p:sp>
+        <p:nvSpPr>
+          <p:cNvPr id="16" name="Text 14"/>
+          <p:cNvSpPr txBox="1"/>
+          <p:nvPr/>
+        </p:nvSpPr>
+        <p:spPr>
+          <a:xfrm>
+            <a:off x="8001000" y="4754880"/>
+            <a:ext cx="2926080" cy="640080"/>
+          </a:xfrm>
+          <a:prstGeom prst="rect">
+            <a:avLst/>
+          </a:prstGeom>
+          <a:noFill/>
+          <a:ln/>
+        </p:spPr>
+        <p:txBody>
+          <a:bodyPr wrap="square" lIns="0" tIns="0" rIns="0" bIns="0" rtlCol="0" anchor="ctr"/>
+          <a:lstStyle/>
+          <a:p>
+            <a:pPr algn="ctr" indent="0" marL="0">
+              <a:buNone/>
+            </a:pPr>
+            <a:r>
+              <a:rPr lang="en-US" sz="2400" b="1" dirty="0">
+                <a:solidFill>
+                  <a:srgbClr val="FFFFFF"/>
+                </a:solidFill>
+                <a:latin typeface="游ゴシック" pitchFamily="34" charset="0"/>
+                <a:ea typeface="游ゴシック" pitchFamily="34" charset="-122"/>
+                <a:cs typeface="游ゴシック" pitchFamily="34" charset="-120"/>
+              </a:rPr>
+              <a:t>約100億円</a:t>
+            </a:r>
+            <a:endParaRPr lang="en-US" sz="2400" dirty="0"/>
+          </a:p>
+        </p:txBody>
+      </p:sp>
+      <p:sp>
+        <p:nvSpPr>
+          <p:cNvPr id="17" name="Text 15"/>
+          <p:cNvSpPr txBox="1"/>
+          <p:nvPr/>
+        </p:nvSpPr>
+        <p:spPr>
+          <a:xfrm>
+            <a:off x="8001000" y="5440680"/>
+            <a:ext cx="2926080" cy="411480"/>
+          </a:xfrm>
+          <a:prstGeom prst="rect">
+            <a:avLst/>
+          </a:prstGeom>
+          <a:noFill/>
+          <a:ln/>
+        </p:spPr>
+        <p:txBody>
+          <a:bodyPr wrap="square" lIns="0" tIns="0" rIns="0" bIns="0" rtlCol="0" anchor="ctr"/>
+          <a:lstStyle/>
+          <a:p>
+            <a:pPr algn="ctr" indent="0" marL="0">
+              <a:buNone/>
+            </a:pPr>
+            <a:r>
+              <a:rPr lang="en-US" sz="1250" dirty="0">
+                <a:solidFill>
+                  <a:srgbClr val="F1DCCF"/>
+                </a:solidFill>
+                <a:latin typeface="游ゴシック" pitchFamily="34" charset="0"/>
+                <a:ea typeface="游ゴシック" pitchFamily="34" charset="-122"/>
+                <a:cs typeface="游ゴシック" pitchFamily="34" charset="-120"/>
+              </a:rPr>
+              <a:t>周辺経済圏（hub）</a:t>
+            </a:r>
+            <a:endParaRPr lang="en-US" sz="1250" dirty="0"/>
+          </a:p>
+        </p:txBody>
+      </p:sp>
+      <p:sp>
+        <p:nvSpPr>
+          <p:cNvPr id="18" name="Text 16"/>
           <p:cNvSpPr txBox="1"/>
           <p:nvPr/>
         </p:nvSpPr>

--- a/manuscript/革新ビジネスアワード2026_ファイナル_100億市場ストーリー整理.pptx
+++ b/manuscript/革新ビジネスアワード2026_ファイナル_100億市場ストーリー整理.pptx
@@ -19,9 +19,10 @@
     <p:sldId id="267" r:id="rId13"/>
     <p:sldId id="268" r:id="rId14"/>
     <p:sldId id="269" r:id="rId15"/>
+    <p:sldId id="270" r:id="rId16"/>
   </p:sldIdLst>
   <p:notesMasterIdLst>
-    <p:notesMasterId r:id="rId16"/>
+    <p:notesMasterId r:id="rId17"/>
   </p:notesMasterIdLst>
   <p:sldSz cx="12191695" cy="6858000"/>
   <p:notesSz cx="6858000" cy="12191695"/>
@@ -1238,6 +1239,94 @@
             <a:fld id="{F7021451-1387-4CA6-816F-3879F97B5CBC}" type="slidenum">
               <a:rPr lang="en-US"/>
               <a:t>14</a:t>
+            </a:fld>
+            <a:endParaRPr lang="en-US"/>
+          </a:p>
+        </p:txBody>
+      </p:sp>
+    </p:spTree>
+    <p:extLst>
+      <p:ext uri="{BB962C8B-B14F-4D97-AF65-F5344CB8AC3E}">
+        <p14:creationId xmlns:p14="http://schemas.microsoft.com/office/powerpoint/2010/main" val="1024086991"/>
+      </p:ext>
+    </p:extLst>
+  </p:cSld>
+  <p:clrMapOvr>
+    <a:masterClrMapping/>
+  </p:clrMapOvr>
+</p:notes>
+</file>
+
+<file path=ppt/notesSlides/notesSlide15.xml><?xml version="1.0" encoding="utf-8"?>
+<p:notes xmlns:a="http://schemas.openxmlformats.org/drawingml/2006/main" xmlns:r="http://schemas.openxmlformats.org/officeDocument/2006/relationships" xmlns:p="http://schemas.openxmlformats.org/presentationml/2006/main">
+  <p:cSld>
+    <p:spTree>
+      <p:nvGrpSpPr>
+        <p:cNvPr id="1" name=""/>
+        <p:cNvGrpSpPr/>
+        <p:nvPr/>
+      </p:nvGrpSpPr>
+      <p:grpSpPr>
+        <a:xfrm>
+          <a:off x="0" y="0"/>
+          <a:ext cx="0" cy="0"/>
+          <a:chOff x="0" y="0"/>
+          <a:chExt cx="0" cy="0"/>
+        </a:xfrm>
+      </p:grpSpPr>
+      <p:sp>
+        <p:nvSpPr>
+          <p:cNvPr id="2" name="Slide Image Placeholder 1"/>
+          <p:cNvSpPr>
+            <a:spLocks noGrp="1" noRot="1" noChangeAspect="1"/>
+          </p:cNvSpPr>
+          <p:nvPr>
+            <p:ph type="sldImg"/>
+          </p:nvPr>
+        </p:nvSpPr>
+        <p:spPr/>
+      </p:sp>
+      <p:sp>
+        <p:nvSpPr>
+          <p:cNvPr id="3" name="Notes Placeholder 2"/>
+          <p:cNvSpPr>
+            <a:spLocks noGrp="1"/>
+          </p:cNvSpPr>
+          <p:nvPr>
+            <p:ph type="body" idx="1"/>
+          </p:nvPr>
+        </p:nvSpPr>
+        <p:spPr/>
+        <p:txBody>
+          <a:bodyPr/>
+          <a:lstStyle/>
+          <a:p>
+            <a:r>
+              <a:rPr lang="en-US" dirty="0"/>
+              <a:t/>
+            </a:r>
+            <a:endParaRPr lang="en-US" dirty="0"/>
+          </a:p>
+        </p:txBody>
+      </p:sp>
+      <p:sp>
+        <p:nvSpPr>
+          <p:cNvPr id="4" name="Slide Number Placeholder 3"/>
+          <p:cNvSpPr>
+            <a:spLocks noGrp="1"/>
+          </p:cNvSpPr>
+          <p:nvPr>
+            <p:ph type="sldNum" sz="quarter" idx="10"/>
+          </p:nvPr>
+        </p:nvSpPr>
+        <p:spPr/>
+        <p:txBody>
+          <a:bodyPr/>
+          <a:lstStyle/>
+          <a:p>
+            <a:fld id="{F7021451-1387-4CA6-816F-3879F97B5CBC}" type="slidenum">
+              <a:rPr lang="en-US"/>
+              <a:t>15</a:t>
             </a:fld>
             <a:endParaRPr lang="en-US"/>
           </a:p>
@@ -3371,7 +3460,7 @@
                 <a:ea typeface="游ゴシック" pitchFamily="34" charset="-122"/>
                 <a:cs typeface="游ゴシック" pitchFamily="34" charset="-120"/>
               </a:rPr>
-              <a:t>04 / MARKET</a:t>
+              <a:t>BEYOND THE AWARD</a:t>
             </a:r>
             <a:endParaRPr lang="en-US" sz="1300" dirty="0"/>
           </a:p>
@@ -3410,7 +3499,7 @@
                 <a:ea typeface="游ゴシック" pitchFamily="34" charset="-122"/>
                 <a:cs typeface="游ゴシック" pitchFamily="34" charset="-120"/>
               </a:rPr>
-              <a:t>市場性 ― 「財産がある人」から、全世代・全業種へ</a:t>
+              <a:t>展望 ― 教育コンテンツ事業としての可能性</a:t>
             </a:r>
             <a:endParaRPr lang="en-US" sz="2700" dirty="0"/>
           </a:p>
@@ -3418,80 +3507,14 @@
       </p:sp>
       <p:sp>
         <p:nvSpPr>
-          <p:cNvPr id="4" name="Shape 2"/>
-          <p:cNvSpPr/>
-          <p:nvPr/>
-        </p:nvSpPr>
-        <p:spPr>
-          <a:xfrm>
-            <a:off x="10607040" y="502920"/>
-            <a:ext cx="822960" cy="822960"/>
-          </a:xfrm>
-          <a:prstGeom prst="ellipse">
-            <a:avLst/>
-          </a:prstGeom>
-          <a:solidFill>
-            <a:srgbClr val="C9603F"/>
-          </a:solidFill>
-          <a:ln/>
-          <a:effectLst>
-            <a:outerShdw sx="100000" sy="100000" kx="0" ky="0" algn="bl" rotWithShape="0" blurRad="101600" dist="38100" dir="5400000">
-              <a:srgbClr val="10233A">
-                <a:alpha val="18000"/>
-              </a:srgbClr>
-            </a:outerShdw>
-          </a:effectLst>
-        </p:spPr>
-      </p:sp>
-      <p:sp>
-        <p:nvSpPr>
-          <p:cNvPr id="5" name="Text 3"/>
-          <p:cNvSpPr txBox="1"/>
-          <p:nvPr/>
-        </p:nvSpPr>
-        <p:spPr>
-          <a:xfrm>
-            <a:off x="10607040" y="502920"/>
-            <a:ext cx="822960" cy="822960"/>
-          </a:xfrm>
-          <a:prstGeom prst="rect">
-            <a:avLst/>
-          </a:prstGeom>
-          <a:noFill/>
-          <a:ln/>
-        </p:spPr>
-        <p:txBody>
-          <a:bodyPr wrap="square" lIns="0" tIns="0" rIns="0" bIns="0" rtlCol="0" anchor="ctr"/>
-          <a:lstStyle/>
-          <a:p>
-            <a:pPr algn="ctr" indent="0" marL="0">
-              <a:buNone/>
-            </a:pPr>
-            <a:r>
-              <a:rPr lang="en-US" sz="2880" b="1" dirty="0">
-                <a:solidFill>
-                  <a:srgbClr val="FFFFFF"/>
-                </a:solidFill>
-                <a:latin typeface="游ゴシック" pitchFamily="34" charset="0"/>
-                <a:ea typeface="游ゴシック" pitchFamily="34" charset="-122"/>
-                <a:cs typeface="游ゴシック" pitchFamily="34" charset="-120"/>
-              </a:rPr>
-              <a:t>市</a:t>
-            </a:r>
-            <a:endParaRPr lang="en-US" sz="2880" dirty="0"/>
-          </a:p>
-        </p:txBody>
-      </p:sp>
-      <p:sp>
-        <p:nvSpPr>
-          <p:cNvPr id="6" name="Text 4"/>
+          <p:cNvPr id="4" name="Text 2"/>
           <p:cNvSpPr txBox="1"/>
           <p:nvPr/>
         </p:nvSpPr>
         <p:spPr>
           <a:xfrm>
             <a:off x="640080" y="1783080"/>
-            <a:ext cx="10881360" cy="4206240"/>
+            <a:ext cx="10881360" cy="1371600"/>
           </a:xfrm>
           <a:prstGeom prst="rect">
             <a:avLst/>
@@ -3514,7 +3537,7 @@
               <a:buChar char="●"/>
             </a:pPr>
             <a:r>
-              <a:rPr lang="en-US" sz="1500" dirty="0">
+              <a:rPr lang="en-US" sz="1450" dirty="0">
                 <a:solidFill>
                   <a:srgbClr val="3A3A3A"/>
                 </a:solidFill>
@@ -3522,9 +3545,9 @@
                 <a:ea typeface="游ゴシック" pitchFamily="34" charset="-122"/>
                 <a:cs typeface="游ゴシック" pitchFamily="34" charset="-120"/>
               </a:rPr>
-              <a:t>直接のターゲット：資産5億円〜10億円超の富裕層・超富裕層（素材①）</a:t>
-            </a:r>
-            <a:endParaRPr lang="en-US" sz="1500" dirty="0"/>
+              <a:t>大賞獲得を目指す先に、「繋ぐ相続サロン®」の人材育成メソッドそのものを、金融機関・不動産業界など相続ビジネスに関わるすべての専門家への教育コンテンツとして展開していく展望を持っている</a:t>
+            </a:r>
+            <a:endParaRPr lang="en-US" sz="1450" dirty="0"/>
           </a:p>
           <a:p>
             <a:pPr marL="342900" indent="-342900">
@@ -3538,7 +3561,7 @@
               <a:buChar char="●"/>
             </a:pPr>
             <a:r>
-              <a:rPr lang="en-US" sz="1500" dirty="0">
+              <a:rPr lang="en-US" sz="1450" dirty="0">
                 <a:solidFill>
                   <a:srgbClr val="3A3A3A"/>
                 </a:solidFill>
@@ -3546,54 +3569,30 @@
                 <a:ea typeface="游ゴシック" pitchFamily="34" charset="-122"/>
                 <a:cs typeface="游ゴシック" pitchFamily="34" charset="-120"/>
               </a:rPr>
-              <a:t>ACPを入口にすることで、財産の有無に関わらず誰もがターゲットになる市場へ構造的に拡大（素材②）</a:t>
-            </a:r>
-            <a:endParaRPr lang="en-US" sz="1500" dirty="0"/>
-          </a:p>
-          <a:p>
-            <a:pPr marL="342900" indent="-342900">
-              <a:lnSpc>
-                <a:spcPct val="128000"/>
-              </a:lnSpc>
-              <a:spcAft>
-                <a:spcPts val="1200"/>
-              </a:spcAft>
-              <a:buSzPct val="100000"/>
-              <a:buChar char="●"/>
-            </a:pPr>
-            <a:r>
-              <a:rPr lang="en-US" sz="1500" dirty="0">
-                <a:solidFill>
-                  <a:srgbClr val="3A3A3A"/>
-                </a:solidFill>
-                <a:latin typeface="游ゴシック" pitchFamily="34" charset="0"/>
-                <a:ea typeface="游ゴシック" pitchFamily="34" charset="-122"/>
-                <a:cs typeface="游ゴシック" pitchFamily="34" charset="-120"/>
-              </a:rPr>
-              <a:t>周辺専門家（税理士・司法書士・行政書士・弁護士・不動産・金融・有料老人ホーム・M&amp;A）を含めれば、市場は相続業界単体にとどまらない</a:t>
-            </a:r>
-            <a:endParaRPr lang="en-US" sz="1500" dirty="0"/>
-          </a:p>
-        </p:txBody>
-      </p:sp>
-      <p:sp>
-        <p:nvSpPr>
-          <p:cNvPr id="7" name="Shape 5"/>
+              <a:t>これはアイデアではない。「エキスパートコース」全6回分のカリキュラム（素材③）として、既に体系化・顕在化された教材が存在する</a:t>
+            </a:r>
+            <a:endParaRPr lang="en-US" sz="1450" dirty="0"/>
+          </a:p>
+        </p:txBody>
+      </p:sp>
+      <p:sp>
+        <p:nvSpPr>
+          <p:cNvPr id="5" name="Shape 3"/>
           <p:cNvSpPr/>
           <p:nvPr/>
         </p:nvSpPr>
         <p:spPr>
           <a:xfrm>
-            <a:off x="640080" y="4709160"/>
-            <a:ext cx="3200400" cy="1280160"/>
+            <a:off x="640080" y="3429000"/>
+            <a:ext cx="2487168" cy="1874520"/>
           </a:xfrm>
           <a:prstGeom prst="roundRect">
             <a:avLst>
-              <a:gd name="adj" fmla="val 7143"/>
+              <a:gd name="adj" fmla="val 4878"/>
             </a:avLst>
           </a:prstGeom>
           <a:solidFill>
-            <a:srgbClr val="F6F1EA"/>
+            <a:srgbClr val="C9603F"/>
           </a:solidFill>
           <a:ln/>
           <a:effectLst>
@@ -3607,14 +3606,154 @@
       </p:sp>
       <p:sp>
         <p:nvSpPr>
+          <p:cNvPr id="6" name="Text 4"/>
+          <p:cNvSpPr txBox="1"/>
+          <p:nvPr/>
+        </p:nvSpPr>
+        <p:spPr>
+          <a:xfrm>
+            <a:off x="804672" y="3593592"/>
+            <a:ext cx="2157984" cy="274320"/>
+          </a:xfrm>
+          <a:prstGeom prst="rect">
+            <a:avLst/>
+          </a:prstGeom>
+          <a:noFill/>
+          <a:ln/>
+        </p:spPr>
+        <p:txBody>
+          <a:bodyPr wrap="square" lIns="0" tIns="0" rIns="0" bIns="0" rtlCol="0" anchor="ctr"/>
+          <a:lstStyle/>
+          <a:p>
+            <a:pPr indent="0" marL="0">
+              <a:buNone/>
+            </a:pPr>
+            <a:r>
+              <a:rPr lang="en-US" sz="1050" b="1" dirty="0">
+                <a:solidFill>
+                  <a:srgbClr val="F1DCCF"/>
+                </a:solidFill>
+                <a:latin typeface="游ゴシック" pitchFamily="34" charset="0"/>
+                <a:ea typeface="游ゴシック" pitchFamily="34" charset="-122"/>
+                <a:cs typeface="游ゴシック" pitchFamily="34" charset="-120"/>
+              </a:rPr>
+              <a:t>実績（現在）</a:t>
+            </a:r>
+            <a:endParaRPr lang="en-US" sz="1050" dirty="0"/>
+          </a:p>
+        </p:txBody>
+      </p:sp>
+      <p:sp>
+        <p:nvSpPr>
+          <p:cNvPr id="7" name="Text 5"/>
+          <p:cNvSpPr txBox="1"/>
+          <p:nvPr/>
+        </p:nvSpPr>
+        <p:spPr>
+          <a:xfrm>
+            <a:off x="804672" y="3886200"/>
+            <a:ext cx="2157984" cy="594360"/>
+          </a:xfrm>
+          <a:prstGeom prst="rect">
+            <a:avLst/>
+          </a:prstGeom>
+          <a:noFill/>
+          <a:ln/>
+        </p:spPr>
+        <p:txBody>
+          <a:bodyPr wrap="square" lIns="0" tIns="0" rIns="0" bIns="0" rtlCol="0" anchor="t"/>
+          <a:lstStyle/>
+          <a:p>
+            <a:pPr indent="0" marL="0">
+              <a:buNone/>
+            </a:pPr>
+            <a:r>
+              <a:rPr lang="en-US" sz="1400" b="1" dirty="0">
+                <a:solidFill>
+                  <a:srgbClr val="FFFFFF"/>
+                </a:solidFill>
+                <a:latin typeface="游ゴシック" pitchFamily="34" charset="0"/>
+                <a:ea typeface="游ゴシック" pitchFamily="34" charset="-122"/>
+                <a:cs typeface="游ゴシック" pitchFamily="34" charset="-120"/>
+              </a:rPr>
+              <a:t>自社での育成</a:t>
+            </a:r>
+            <a:endParaRPr lang="en-US" sz="1400" dirty="0"/>
+          </a:p>
+        </p:txBody>
+      </p:sp>
+      <p:sp>
+        <p:nvSpPr>
           <p:cNvPr id="8" name="Text 6"/>
           <p:cNvSpPr txBox="1"/>
           <p:nvPr/>
         </p:nvSpPr>
         <p:spPr>
           <a:xfrm>
-            <a:off x="777240" y="4873752"/>
-            <a:ext cx="2926080" cy="665683"/>
+            <a:off x="804672" y="4526280"/>
+            <a:ext cx="2157984" cy="685800"/>
+          </a:xfrm>
+          <a:prstGeom prst="rect">
+            <a:avLst/>
+          </a:prstGeom>
+          <a:noFill/>
+          <a:ln/>
+        </p:spPr>
+        <p:txBody>
+          <a:bodyPr wrap="square" lIns="0" tIns="0" rIns="0" bIns="0" rtlCol="0" anchor="t"/>
+          <a:lstStyle/>
+          <a:p>
+            <a:pPr indent="0" marL="0">
+              <a:lnSpc>
+                <a:spcPct val="120000"/>
+              </a:lnSpc>
+              <a:buNone/>
+            </a:pPr>
+            <a:r>
+              <a:rPr lang="en-US" sz="1100" dirty="0">
+                <a:solidFill>
+                  <a:srgbClr val="F8E9DF"/>
+                </a:solidFill>
+                <a:latin typeface="游ゴシック" pitchFamily="34" charset="0"/>
+                <a:ea typeface="游ゴシック" pitchFamily="34" charset="-122"/>
+                <a:cs typeface="游ゴシック" pitchFamily="34" charset="-120"/>
+              </a:rPr>
+              <a:t>エキスパートコース全6回</a:t>
+            </a:r>
+            <a:endParaRPr lang="en-US" sz="1100" dirty="0"/>
+          </a:p>
+          <a:p>
+            <a:pPr indent="0" marL="0">
+              <a:lnSpc>
+                <a:spcPct val="120000"/>
+              </a:lnSpc>
+              <a:buNone/>
+            </a:pPr>
+            <a:r>
+              <a:rPr lang="en-US" sz="1100" dirty="0">
+                <a:solidFill>
+                  <a:srgbClr val="F8E9DF"/>
+                </a:solidFill>
+                <a:latin typeface="游ゴシック" pitchFamily="34" charset="0"/>
+                <a:ea typeface="游ゴシック" pitchFamily="34" charset="-122"/>
+                <a:cs typeface="游ゴシック" pitchFamily="34" charset="-120"/>
+              </a:rPr>
+              <a:t>資格者50名（2年）</a:t>
+            </a:r>
+            <a:endParaRPr lang="en-US" sz="1100" dirty="0"/>
+          </a:p>
+        </p:txBody>
+      </p:sp>
+      <p:sp>
+        <p:nvSpPr>
+          <p:cNvPr id="9" name="Text 7"/>
+          <p:cNvSpPr txBox="1"/>
+          <p:nvPr/>
+        </p:nvSpPr>
+        <p:spPr>
+          <a:xfrm>
+            <a:off x="3127248" y="4091940"/>
+            <a:ext cx="256032" cy="548640"/>
           </a:xfrm>
           <a:prstGeom prst="rect">
             <a:avLst/>
@@ -3630,7 +3769,7 @@
               <a:buNone/>
             </a:pPr>
             <a:r>
-              <a:rPr lang="en-US" sz="2200" b="1" dirty="0">
+              <a:rPr lang="en-US" sz="1600" b="1" dirty="0">
                 <a:solidFill>
                   <a:srgbClr val="C9603F"/>
                 </a:solidFill>
@@ -3638,48 +3777,9 @@
                 <a:ea typeface="游ゴシック" pitchFamily="34" charset="-122"/>
                 <a:cs typeface="游ゴシック" pitchFamily="34" charset="-120"/>
               </a:rPr>
-              <a:t>50事業所</a:t>
-            </a:r>
-            <a:endParaRPr lang="en-US" sz="2200" dirty="0"/>
-          </a:p>
-        </p:txBody>
-      </p:sp>
-      <p:sp>
-        <p:nvSpPr>
-          <p:cNvPr id="9" name="Text 7"/>
-          <p:cNvSpPr txBox="1"/>
-          <p:nvPr/>
-        </p:nvSpPr>
-        <p:spPr>
-          <a:xfrm>
-            <a:off x="731520" y="5426050"/>
-            <a:ext cx="3017520" cy="512064"/>
-          </a:xfrm>
-          <a:prstGeom prst="rect">
-            <a:avLst/>
-          </a:prstGeom>
-          <a:noFill/>
-          <a:ln/>
-        </p:spPr>
-        <p:txBody>
-          <a:bodyPr wrap="square" lIns="0" tIns="0" rIns="0" bIns="0" rtlCol="0" anchor="t"/>
-          <a:lstStyle/>
-          <a:p>
-            <a:pPr algn="ctr" indent="0" marL="0">
-              <a:buNone/>
-            </a:pPr>
-            <a:r>
-              <a:rPr lang="en-US" sz="1100" dirty="0">
-                <a:solidFill>
-                  <a:srgbClr val="1E3A5F"/>
-                </a:solidFill>
-                <a:latin typeface="游ゴシック" pitchFamily="34" charset="0"/>
-                <a:ea typeface="游ゴシック" pitchFamily="34" charset="-122"/>
-                <a:cs typeface="游ゴシック" pitchFamily="34" charset="-120"/>
-              </a:rPr>
-              <a:t>全国の拠点数</a:t>
-            </a:r>
-            <a:endParaRPr lang="en-US" sz="1100" dirty="0"/>
+              <a:t>→</a:t>
+            </a:r>
+            <a:endParaRPr lang="en-US" sz="1600" dirty="0"/>
           </a:p>
         </p:txBody>
       </p:sp>
@@ -3691,12 +3791,12 @@
         </p:nvSpPr>
         <p:spPr>
           <a:xfrm>
-            <a:off x="4251960" y="4709160"/>
-            <a:ext cx="3200400" cy="1280160"/>
+            <a:off x="3383280" y="3429000"/>
+            <a:ext cx="2487168" cy="1874520"/>
           </a:xfrm>
           <a:prstGeom prst="roundRect">
             <a:avLst>
-              <a:gd name="adj" fmla="val 7143"/>
+              <a:gd name="adj" fmla="val 4878"/>
             </a:avLst>
           </a:prstGeom>
           <a:solidFill>
@@ -3720,8 +3820,148 @@
         </p:nvSpPr>
         <p:spPr>
           <a:xfrm>
-            <a:off x="4389120" y="4873752"/>
-            <a:ext cx="2926080" cy="665683"/>
+            <a:off x="3547872" y="3593592"/>
+            <a:ext cx="2157984" cy="274320"/>
+          </a:xfrm>
+          <a:prstGeom prst="rect">
+            <a:avLst/>
+          </a:prstGeom>
+          <a:noFill/>
+          <a:ln/>
+        </p:spPr>
+        <p:txBody>
+          <a:bodyPr wrap="square" lIns="0" tIns="0" rIns="0" bIns="0" rtlCol="0" anchor="ctr"/>
+          <a:lstStyle/>
+          <a:p>
+            <a:pPr indent="0" marL="0">
+              <a:buNone/>
+            </a:pPr>
+            <a:r>
+              <a:rPr lang="en-US" sz="1050" b="1" dirty="0">
+                <a:solidFill>
+                  <a:srgbClr val="C9603F"/>
+                </a:solidFill>
+                <a:latin typeface="游ゴシック" pitchFamily="34" charset="0"/>
+                <a:ea typeface="游ゴシック" pitchFamily="34" charset="-122"/>
+                <a:cs typeface="游ゴシック" pitchFamily="34" charset="-120"/>
+              </a:rPr>
+              <a:t>展望①</a:t>
+            </a:r>
+            <a:endParaRPr lang="en-US" sz="1050" dirty="0"/>
+          </a:p>
+        </p:txBody>
+      </p:sp>
+      <p:sp>
+        <p:nvSpPr>
+          <p:cNvPr id="12" name="Text 10"/>
+          <p:cNvSpPr txBox="1"/>
+          <p:nvPr/>
+        </p:nvSpPr>
+        <p:spPr>
+          <a:xfrm>
+            <a:off x="3547872" y="3886200"/>
+            <a:ext cx="2157984" cy="594360"/>
+          </a:xfrm>
+          <a:prstGeom prst="rect">
+            <a:avLst/>
+          </a:prstGeom>
+          <a:noFill/>
+          <a:ln/>
+        </p:spPr>
+        <p:txBody>
+          <a:bodyPr wrap="square" lIns="0" tIns="0" rIns="0" bIns="0" rtlCol="0" anchor="t"/>
+          <a:lstStyle/>
+          <a:p>
+            <a:pPr indent="0" marL="0">
+              <a:buNone/>
+            </a:pPr>
+            <a:r>
+              <a:rPr lang="en-US" sz="1400" b="1" dirty="0">
+                <a:solidFill>
+                  <a:srgbClr val="1E3A5F"/>
+                </a:solidFill>
+                <a:latin typeface="游ゴシック" pitchFamily="34" charset="0"/>
+                <a:ea typeface="游ゴシック" pitchFamily="34" charset="-122"/>
+                <a:cs typeface="游ゴシック" pitchFamily="34" charset="-120"/>
+              </a:rPr>
+              <a:t>金融機関への採用</a:t>
+            </a:r>
+            <a:endParaRPr lang="en-US" sz="1400" dirty="0"/>
+          </a:p>
+        </p:txBody>
+      </p:sp>
+      <p:sp>
+        <p:nvSpPr>
+          <p:cNvPr id="13" name="Text 11"/>
+          <p:cNvSpPr txBox="1"/>
+          <p:nvPr/>
+        </p:nvSpPr>
+        <p:spPr>
+          <a:xfrm>
+            <a:off x="3547872" y="4526280"/>
+            <a:ext cx="2157984" cy="685800"/>
+          </a:xfrm>
+          <a:prstGeom prst="rect">
+            <a:avLst/>
+          </a:prstGeom>
+          <a:noFill/>
+          <a:ln/>
+        </p:spPr>
+        <p:txBody>
+          <a:bodyPr wrap="square" lIns="0" tIns="0" rIns="0" bIns="0" rtlCol="0" anchor="t"/>
+          <a:lstStyle/>
+          <a:p>
+            <a:pPr indent="0" marL="0">
+              <a:lnSpc>
+                <a:spcPct val="120000"/>
+              </a:lnSpc>
+              <a:buNone/>
+            </a:pPr>
+            <a:r>
+              <a:rPr lang="en-US" sz="1100" dirty="0">
+                <a:solidFill>
+                  <a:srgbClr val="6B6B6B"/>
+                </a:solidFill>
+                <a:latin typeface="游ゴシック" pitchFamily="34" charset="0"/>
+                <a:ea typeface="游ゴシック" pitchFamily="34" charset="-122"/>
+                <a:cs typeface="游ゴシック" pitchFamily="34" charset="-120"/>
+              </a:rPr>
+              <a:t>行員研修プログラム</a:t>
+            </a:r>
+            <a:endParaRPr lang="en-US" sz="1100" dirty="0"/>
+          </a:p>
+          <a:p>
+            <a:pPr indent="0" marL="0">
+              <a:lnSpc>
+                <a:spcPct val="120000"/>
+              </a:lnSpc>
+              <a:buNone/>
+            </a:pPr>
+            <a:r>
+              <a:rPr lang="en-US" sz="1100" dirty="0">
+                <a:solidFill>
+                  <a:srgbClr val="6B6B6B"/>
+                </a:solidFill>
+                <a:latin typeface="游ゴシック" pitchFamily="34" charset="0"/>
+                <a:ea typeface="游ゴシック" pitchFamily="34" charset="-122"/>
+                <a:cs typeface="游ゴシック" pitchFamily="34" charset="-120"/>
+              </a:rPr>
+              <a:t>として導入</a:t>
+            </a:r>
+            <a:endParaRPr lang="en-US" sz="1100" dirty="0"/>
+          </a:p>
+        </p:txBody>
+      </p:sp>
+      <p:sp>
+        <p:nvSpPr>
+          <p:cNvPr id="14" name="Text 12"/>
+          <p:cNvSpPr txBox="1"/>
+          <p:nvPr/>
+        </p:nvSpPr>
+        <p:spPr>
+          <a:xfrm>
+            <a:off x="5870448" y="4091940"/>
+            <a:ext cx="256032" cy="548640"/>
           </a:xfrm>
           <a:prstGeom prst="rect">
             <a:avLst/>
@@ -3737,7 +3977,7 @@
               <a:buNone/>
             </a:pPr>
             <a:r>
-              <a:rPr lang="en-US" sz="2200" b="1" dirty="0">
+              <a:rPr lang="en-US" sz="1600" b="1" dirty="0">
                 <a:solidFill>
                   <a:srgbClr val="C9603F"/>
                 </a:solidFill>
@@ -3745,65 +3985,26 @@
                 <a:ea typeface="游ゴシック" pitchFamily="34" charset="-122"/>
                 <a:cs typeface="游ゴシック" pitchFamily="34" charset="-120"/>
               </a:rPr>
-              <a:t>資産5〜10億円超</a:t>
-            </a:r>
-            <a:endParaRPr lang="en-US" sz="2200" dirty="0"/>
-          </a:p>
-        </p:txBody>
-      </p:sp>
-      <p:sp>
-        <p:nvSpPr>
-          <p:cNvPr id="12" name="Text 10"/>
-          <p:cNvSpPr txBox="1"/>
-          <p:nvPr/>
-        </p:nvSpPr>
-        <p:spPr>
-          <a:xfrm>
-            <a:off x="4343400" y="5426050"/>
-            <a:ext cx="3017520" cy="512064"/>
-          </a:xfrm>
-          <a:prstGeom prst="rect">
-            <a:avLst/>
-          </a:prstGeom>
-          <a:noFill/>
-          <a:ln/>
-        </p:spPr>
-        <p:txBody>
-          <a:bodyPr wrap="square" lIns="0" tIns="0" rIns="0" bIns="0" rtlCol="0" anchor="t"/>
-          <a:lstStyle/>
-          <a:p>
-            <a:pPr algn="ctr" indent="0" marL="0">
-              <a:buNone/>
-            </a:pPr>
-            <a:r>
-              <a:rPr lang="en-US" sz="1100" dirty="0">
-                <a:solidFill>
-                  <a:srgbClr val="1E3A5F"/>
-                </a:solidFill>
-                <a:latin typeface="游ゴシック" pitchFamily="34" charset="0"/>
-                <a:ea typeface="游ゴシック" pitchFamily="34" charset="-122"/>
-                <a:cs typeface="游ゴシック" pitchFamily="34" charset="-120"/>
-              </a:rPr>
-              <a:t>直接の顧客層</a:t>
-            </a:r>
-            <a:endParaRPr lang="en-US" sz="1100" dirty="0"/>
-          </a:p>
-        </p:txBody>
-      </p:sp>
-      <p:sp>
-        <p:nvSpPr>
-          <p:cNvPr id="13" name="Shape 11"/>
+              <a:t>→</a:t>
+            </a:r>
+            <a:endParaRPr lang="en-US" sz="1600" dirty="0"/>
+          </a:p>
+        </p:txBody>
+      </p:sp>
+      <p:sp>
+        <p:nvSpPr>
+          <p:cNvPr id="15" name="Shape 13"/>
           <p:cNvSpPr/>
           <p:nvPr/>
         </p:nvSpPr>
         <p:spPr>
           <a:xfrm>
-            <a:off x="7863840" y="4709160"/>
-            <a:ext cx="3200400" cy="1280160"/>
+            <a:off x="6126480" y="3429000"/>
+            <a:ext cx="2487168" cy="1874520"/>
           </a:xfrm>
           <a:prstGeom prst="roundRect">
             <a:avLst>
-              <a:gd name="adj" fmla="val 7143"/>
+              <a:gd name="adj" fmla="val 4878"/>
             </a:avLst>
           </a:prstGeom>
           <a:solidFill>
@@ -3821,14 +4022,154 @@
       </p:sp>
       <p:sp>
         <p:nvSpPr>
-          <p:cNvPr id="14" name="Text 12"/>
-          <p:cNvSpPr txBox="1"/>
-          <p:nvPr/>
-        </p:nvSpPr>
-        <p:spPr>
-          <a:xfrm>
-            <a:off x="8001000" y="4873752"/>
-            <a:ext cx="2926080" cy="665683"/>
+          <p:cNvPr id="16" name="Text 14"/>
+          <p:cNvSpPr txBox="1"/>
+          <p:nvPr/>
+        </p:nvSpPr>
+        <p:spPr>
+          <a:xfrm>
+            <a:off x="6291072" y="3593592"/>
+            <a:ext cx="2157984" cy="274320"/>
+          </a:xfrm>
+          <a:prstGeom prst="rect">
+            <a:avLst/>
+          </a:prstGeom>
+          <a:noFill/>
+          <a:ln/>
+        </p:spPr>
+        <p:txBody>
+          <a:bodyPr wrap="square" lIns="0" tIns="0" rIns="0" bIns="0" rtlCol="0" anchor="ctr"/>
+          <a:lstStyle/>
+          <a:p>
+            <a:pPr indent="0" marL="0">
+              <a:buNone/>
+            </a:pPr>
+            <a:r>
+              <a:rPr lang="en-US" sz="1050" b="1" dirty="0">
+                <a:solidFill>
+                  <a:srgbClr val="C9603F"/>
+                </a:solidFill>
+                <a:latin typeface="游ゴシック" pitchFamily="34" charset="0"/>
+                <a:ea typeface="游ゴシック" pitchFamily="34" charset="-122"/>
+                <a:cs typeface="游ゴシック" pitchFamily="34" charset="-120"/>
+              </a:rPr>
+              <a:t>展望②</a:t>
+            </a:r>
+            <a:endParaRPr lang="en-US" sz="1050" dirty="0"/>
+          </a:p>
+        </p:txBody>
+      </p:sp>
+      <p:sp>
+        <p:nvSpPr>
+          <p:cNvPr id="17" name="Text 15"/>
+          <p:cNvSpPr txBox="1"/>
+          <p:nvPr/>
+        </p:nvSpPr>
+        <p:spPr>
+          <a:xfrm>
+            <a:off x="6291072" y="3886200"/>
+            <a:ext cx="2157984" cy="594360"/>
+          </a:xfrm>
+          <a:prstGeom prst="rect">
+            <a:avLst/>
+          </a:prstGeom>
+          <a:noFill/>
+          <a:ln/>
+        </p:spPr>
+        <p:txBody>
+          <a:bodyPr wrap="square" lIns="0" tIns="0" rIns="0" bIns="0" rtlCol="0" anchor="t"/>
+          <a:lstStyle/>
+          <a:p>
+            <a:pPr indent="0" marL="0">
+              <a:buNone/>
+            </a:pPr>
+            <a:r>
+              <a:rPr lang="en-US" sz="1400" b="1" dirty="0">
+                <a:solidFill>
+                  <a:srgbClr val="1E3A5F"/>
+                </a:solidFill>
+                <a:latin typeface="游ゴシック" pitchFamily="34" charset="0"/>
+                <a:ea typeface="游ゴシック" pitchFamily="34" charset="-122"/>
+                <a:cs typeface="游ゴシック" pitchFamily="34" charset="-120"/>
+              </a:rPr>
+              <a:t>不動産・士業への展開</a:t>
+            </a:r>
+            <a:endParaRPr lang="en-US" sz="1400" dirty="0"/>
+          </a:p>
+        </p:txBody>
+      </p:sp>
+      <p:sp>
+        <p:nvSpPr>
+          <p:cNvPr id="18" name="Text 16"/>
+          <p:cNvSpPr txBox="1"/>
+          <p:nvPr/>
+        </p:nvSpPr>
+        <p:spPr>
+          <a:xfrm>
+            <a:off x="6291072" y="4526280"/>
+            <a:ext cx="2157984" cy="685800"/>
+          </a:xfrm>
+          <a:prstGeom prst="rect">
+            <a:avLst/>
+          </a:prstGeom>
+          <a:noFill/>
+          <a:ln/>
+        </p:spPr>
+        <p:txBody>
+          <a:bodyPr wrap="square" lIns="0" tIns="0" rIns="0" bIns="0" rtlCol="0" anchor="t"/>
+          <a:lstStyle/>
+          <a:p>
+            <a:pPr indent="0" marL="0">
+              <a:lnSpc>
+                <a:spcPct val="120000"/>
+              </a:lnSpc>
+              <a:buNone/>
+            </a:pPr>
+            <a:r>
+              <a:rPr lang="en-US" sz="1100" dirty="0">
+                <a:solidFill>
+                  <a:srgbClr val="6B6B6B"/>
+                </a:solidFill>
+                <a:latin typeface="游ゴシック" pitchFamily="34" charset="0"/>
+                <a:ea typeface="游ゴシック" pitchFamily="34" charset="-122"/>
+                <a:cs typeface="游ゴシック" pitchFamily="34" charset="-120"/>
+              </a:rPr>
+              <a:t>業界横断の</a:t>
+            </a:r>
+            <a:endParaRPr lang="en-US" sz="1100" dirty="0"/>
+          </a:p>
+          <a:p>
+            <a:pPr indent="0" marL="0">
+              <a:lnSpc>
+                <a:spcPct val="120000"/>
+              </a:lnSpc>
+              <a:buNone/>
+            </a:pPr>
+            <a:r>
+              <a:rPr lang="en-US" sz="1100" dirty="0">
+                <a:solidFill>
+                  <a:srgbClr val="6B6B6B"/>
+                </a:solidFill>
+                <a:latin typeface="游ゴシック" pitchFamily="34" charset="0"/>
+                <a:ea typeface="游ゴシック" pitchFamily="34" charset="-122"/>
+                <a:cs typeface="游ゴシック" pitchFamily="34" charset="-120"/>
+              </a:rPr>
+              <a:t>標準研修へ</a:t>
+            </a:r>
+            <a:endParaRPr lang="en-US" sz="1100" dirty="0"/>
+          </a:p>
+        </p:txBody>
+      </p:sp>
+      <p:sp>
+        <p:nvSpPr>
+          <p:cNvPr id="19" name="Text 17"/>
+          <p:cNvSpPr txBox="1"/>
+          <p:nvPr/>
+        </p:nvSpPr>
+        <p:spPr>
+          <a:xfrm>
+            <a:off x="8613648" y="4091940"/>
+            <a:ext cx="256032" cy="548640"/>
           </a:xfrm>
           <a:prstGeom prst="rect">
             <a:avLst/>
@@ -3844,7 +4185,7 @@
               <a:buNone/>
             </a:pPr>
             <a:r>
-              <a:rPr lang="en-US" sz="2200" b="1" dirty="0">
+              <a:rPr lang="en-US" sz="1600" b="1" dirty="0">
                 <a:solidFill>
                   <a:srgbClr val="C9603F"/>
                 </a:solidFill>
@@ -3852,22 +4193,90 @@
                 <a:ea typeface="游ゴシック" pitchFamily="34" charset="-122"/>
                 <a:cs typeface="游ゴシック" pitchFamily="34" charset="-120"/>
               </a:rPr>
-              <a:t>約100億円</a:t>
-            </a:r>
-            <a:endParaRPr lang="en-US" sz="2200" dirty="0"/>
-          </a:p>
-        </p:txBody>
-      </p:sp>
-      <p:sp>
-        <p:nvSpPr>
-          <p:cNvPr id="15" name="Text 13"/>
-          <p:cNvSpPr txBox="1"/>
-          <p:nvPr/>
-        </p:nvSpPr>
-        <p:spPr>
-          <a:xfrm>
-            <a:off x="7955280" y="5426050"/>
-            <a:ext cx="3017520" cy="512064"/>
+              <a:t>→</a:t>
+            </a:r>
+            <a:endParaRPr lang="en-US" sz="1600" dirty="0"/>
+          </a:p>
+        </p:txBody>
+      </p:sp>
+      <p:sp>
+        <p:nvSpPr>
+          <p:cNvPr id="20" name="Shape 18"/>
+          <p:cNvSpPr/>
+          <p:nvPr/>
+        </p:nvSpPr>
+        <p:spPr>
+          <a:xfrm>
+            <a:off x="8869680" y="3429000"/>
+            <a:ext cx="2487168" cy="1874520"/>
+          </a:xfrm>
+          <a:prstGeom prst="roundRect">
+            <a:avLst>
+              <a:gd name="adj" fmla="val 4878"/>
+            </a:avLst>
+          </a:prstGeom>
+          <a:solidFill>
+            <a:srgbClr val="F6F1EA"/>
+          </a:solidFill>
+          <a:ln/>
+          <a:effectLst>
+            <a:outerShdw sx="100000" sy="100000" kx="0" ky="0" algn="bl" rotWithShape="0" blurRad="101600" dist="38100" dir="5400000">
+              <a:srgbClr val="10233A">
+                <a:alpha val="18000"/>
+              </a:srgbClr>
+            </a:outerShdw>
+          </a:effectLst>
+        </p:spPr>
+      </p:sp>
+      <p:sp>
+        <p:nvSpPr>
+          <p:cNvPr id="21" name="Text 19"/>
+          <p:cNvSpPr txBox="1"/>
+          <p:nvPr/>
+        </p:nvSpPr>
+        <p:spPr>
+          <a:xfrm>
+            <a:off x="9034272" y="3593592"/>
+            <a:ext cx="2157984" cy="274320"/>
+          </a:xfrm>
+          <a:prstGeom prst="rect">
+            <a:avLst/>
+          </a:prstGeom>
+          <a:noFill/>
+          <a:ln/>
+        </p:spPr>
+        <p:txBody>
+          <a:bodyPr wrap="square" lIns="0" tIns="0" rIns="0" bIns="0" rtlCol="0" anchor="ctr"/>
+          <a:lstStyle/>
+          <a:p>
+            <a:pPr indent="0" marL="0">
+              <a:buNone/>
+            </a:pPr>
+            <a:r>
+              <a:rPr lang="en-US" sz="1050" b="1" dirty="0">
+                <a:solidFill>
+                  <a:srgbClr val="C9603F"/>
+                </a:solidFill>
+                <a:latin typeface="游ゴシック" pitchFamily="34" charset="0"/>
+                <a:ea typeface="游ゴシック" pitchFamily="34" charset="-122"/>
+                <a:cs typeface="游ゴシック" pitchFamily="34" charset="-120"/>
+              </a:rPr>
+              <a:t>展望③</a:t>
+            </a:r>
+            <a:endParaRPr lang="en-US" sz="1050" dirty="0"/>
+          </a:p>
+        </p:txBody>
+      </p:sp>
+      <p:sp>
+        <p:nvSpPr>
+          <p:cNvPr id="22" name="Text 20"/>
+          <p:cNvSpPr txBox="1"/>
+          <p:nvPr/>
+        </p:nvSpPr>
+        <p:spPr>
+          <a:xfrm>
+            <a:off x="9034272" y="3886200"/>
+            <a:ext cx="2157984" cy="594360"/>
           </a:xfrm>
           <a:prstGeom prst="rect">
             <a:avLst/>
@@ -3879,27 +4288,128 @@
           <a:bodyPr wrap="square" lIns="0" tIns="0" rIns="0" bIns="0" rtlCol="0" anchor="t"/>
           <a:lstStyle/>
           <a:p>
-            <a:pPr algn="ctr" indent="0" marL="0">
+            <a:pPr indent="0" marL="0">
+              <a:buNone/>
+            </a:pPr>
+            <a:r>
+              <a:rPr lang="en-US" sz="1400" b="1" dirty="0">
+                <a:solidFill>
+                  <a:srgbClr val="1E3A5F"/>
+                </a:solidFill>
+                <a:latin typeface="游ゴシック" pitchFamily="34" charset="0"/>
+                <a:ea typeface="游ゴシック" pitchFamily="34" charset="-122"/>
+                <a:cs typeface="游ゴシック" pitchFamily="34" charset="-120"/>
+              </a:rPr>
+              <a:t>全国教育インフラ化</a:t>
+            </a:r>
+            <a:endParaRPr lang="en-US" sz="1400" dirty="0"/>
+          </a:p>
+        </p:txBody>
+      </p:sp>
+      <p:sp>
+        <p:nvSpPr>
+          <p:cNvPr id="23" name="Text 21"/>
+          <p:cNvSpPr txBox="1"/>
+          <p:nvPr/>
+        </p:nvSpPr>
+        <p:spPr>
+          <a:xfrm>
+            <a:off x="9034272" y="4526280"/>
+            <a:ext cx="2157984" cy="685800"/>
+          </a:xfrm>
+          <a:prstGeom prst="rect">
+            <a:avLst/>
+          </a:prstGeom>
+          <a:noFill/>
+          <a:ln/>
+        </p:spPr>
+        <p:txBody>
+          <a:bodyPr wrap="square" lIns="0" tIns="0" rIns="0" bIns="0" rtlCol="0" anchor="t"/>
+          <a:lstStyle/>
+          <a:p>
+            <a:pPr indent="0" marL="0">
+              <a:lnSpc>
+                <a:spcPct val="120000"/>
+              </a:lnSpc>
               <a:buNone/>
             </a:pPr>
             <a:r>
               <a:rPr lang="en-US" sz="1100" dirty="0">
                 <a:solidFill>
-                  <a:srgbClr val="1E3A5F"/>
-                </a:solidFill>
-                <a:latin typeface="游ゴシック" pitchFamily="34" charset="0"/>
-                <a:ea typeface="游ゴシック" pitchFamily="34" charset="-122"/>
-                <a:cs typeface="游ゴシック" pitchFamily="34" charset="-120"/>
-              </a:rPr>
-              <a:t>周辺経済圏</a:t>
+                  <a:srgbClr val="6B6B6B"/>
+                </a:solidFill>
+                <a:latin typeface="游ゴシック" pitchFamily="34" charset="0"/>
+                <a:ea typeface="游ゴシック" pitchFamily="34" charset="-122"/>
+                <a:cs typeface="游ゴシック" pitchFamily="34" charset="-120"/>
+              </a:rPr>
+              <a:t>「生きる準備」を教える人</a:t>
             </a:r>
             <a:endParaRPr lang="en-US" sz="1100" dirty="0"/>
           </a:p>
-        </p:txBody>
-      </p:sp>
-      <p:sp>
-        <p:nvSpPr>
-          <p:cNvPr id="16" name="Text 14"/>
+          <a:p>
+            <a:pPr indent="0" marL="0">
+              <a:lnSpc>
+                <a:spcPct val="120000"/>
+              </a:lnSpc>
+              <a:buNone/>
+            </a:pPr>
+            <a:r>
+              <a:rPr lang="en-US" sz="1100" dirty="0">
+                <a:solidFill>
+                  <a:srgbClr val="6B6B6B"/>
+                </a:solidFill>
+                <a:latin typeface="游ゴシック" pitchFamily="34" charset="0"/>
+                <a:ea typeface="游ゴシック" pitchFamily="34" charset="-122"/>
+                <a:cs typeface="游ゴシック" pitchFamily="34" charset="-120"/>
+              </a:rPr>
+              <a:t>を全国に輩出</a:t>
+            </a:r>
+            <a:endParaRPr lang="en-US" sz="1100" dirty="0"/>
+          </a:p>
+        </p:txBody>
+      </p:sp>
+      <p:sp>
+        <p:nvSpPr>
+          <p:cNvPr id="24" name="Text 22"/>
+          <p:cNvSpPr txBox="1"/>
+          <p:nvPr/>
+        </p:nvSpPr>
+        <p:spPr>
+          <a:xfrm>
+            <a:off x="640080" y="5577840"/>
+            <a:ext cx="10881360" cy="457200"/>
+          </a:xfrm>
+          <a:prstGeom prst="rect">
+            <a:avLst/>
+          </a:prstGeom>
+          <a:noFill/>
+          <a:ln/>
+        </p:spPr>
+        <p:txBody>
+          <a:bodyPr wrap="square" lIns="0" tIns="0" rIns="0" bIns="0" rtlCol="0" anchor="ctr"/>
+          <a:lstStyle/>
+          <a:p>
+            <a:pPr indent="0" marL="0">
+              <a:buNone/>
+            </a:pPr>
+            <a:r>
+              <a:rPr lang="en-US" sz="1300" i="1" dirty="0">
+                <a:solidFill>
+                  <a:srgbClr val="6B6B6B"/>
+                </a:solidFill>
+                <a:latin typeface="游ゴシック" pitchFamily="34" charset="0"/>
+                <a:ea typeface="游ゴシック" pitchFamily="34" charset="-122"/>
+                <a:cs typeface="游ゴシック" pitchFamily="34" charset="-120"/>
+              </a:rPr>
+              <a:t>「教育コンテンツ」という形のある資産が、相続コンサルティングの提供だけでなく、採用・ライセンスという新しい収益源になりうる。</a:t>
+            </a:r>
+            <a:endParaRPr lang="en-US" sz="1300" dirty="0"/>
+          </a:p>
+        </p:txBody>
+      </p:sp>
+      <p:sp>
+        <p:nvSpPr>
+          <p:cNvPr id="25" name="Text 23"/>
           <p:cNvSpPr txBox="1"/>
           <p:nvPr/>
         </p:nvSpPr>
@@ -4001,7 +4511,7 @@
                 <a:ea typeface="游ゴシック" pitchFamily="34" charset="-122"/>
                 <a:cs typeface="游ゴシック" pitchFamily="34" charset="-120"/>
               </a:rPr>
-              <a:t>05 / ADVANTAGE</a:t>
+              <a:t>04 / MARKET</a:t>
             </a:r>
             <a:endParaRPr lang="en-US" sz="1300" dirty="0"/>
           </a:p>
@@ -4040,7 +4550,7 @@
                 <a:ea typeface="游ゴシック" pitchFamily="34" charset="-122"/>
                 <a:cs typeface="游ゴシック" pitchFamily="34" charset="-120"/>
               </a:rPr>
-              <a:t>優位性 ― 「バッジのない」からこそ生まれた協業モデル</a:t>
+              <a:t>市場性 ― 「財産がある人」から、全世代・全業種へ</a:t>
             </a:r>
             <a:endParaRPr lang="en-US" sz="2700" dirty="0"/>
           </a:p>
@@ -4106,7 +4616,7 @@
                 <a:ea typeface="游ゴシック" pitchFamily="34" charset="-122"/>
                 <a:cs typeface="游ゴシック" pitchFamily="34" charset="-120"/>
               </a:rPr>
-              <a:t>優</a:t>
+              <a:t>市</a:t>
             </a:r>
             <a:endParaRPr lang="en-US" sz="2880" dirty="0"/>
           </a:p>
@@ -4114,75 +4624,14 @@
       </p:sp>
       <p:sp>
         <p:nvSpPr>
-          <p:cNvPr id="6" name="Shape 4"/>
-          <p:cNvSpPr/>
+          <p:cNvPr id="6" name="Text 4"/>
+          <p:cNvSpPr txBox="1"/>
           <p:nvPr/>
         </p:nvSpPr>
         <p:spPr>
           <a:xfrm>
             <a:off x="640080" y="1783080"/>
-            <a:ext cx="10881360" cy="822960"/>
-          </a:xfrm>
-          <a:prstGeom prst="roundRect">
-            <a:avLst>
-              <a:gd name="adj" fmla="val 8889"/>
-            </a:avLst>
-          </a:prstGeom>
-          <a:solidFill>
-            <a:srgbClr val="1E3A5F"/>
-          </a:solidFill>
-          <a:ln/>
-        </p:spPr>
-      </p:sp>
-      <p:sp>
-        <p:nvSpPr>
-          <p:cNvPr id="7" name="Text 5"/>
-          <p:cNvSpPr txBox="1"/>
-          <p:nvPr/>
-        </p:nvSpPr>
-        <p:spPr>
-          <a:xfrm>
-            <a:off x="914400" y="1783080"/>
-            <a:ext cx="10332720" cy="822960"/>
-          </a:xfrm>
-          <a:prstGeom prst="rect">
-            <a:avLst/>
-          </a:prstGeom>
-          <a:noFill/>
-          <a:ln/>
-        </p:spPr>
-        <p:txBody>
-          <a:bodyPr wrap="square" lIns="0" tIns="0" rIns="0" bIns="0" rtlCol="0" anchor="ctr"/>
-          <a:lstStyle/>
-          <a:p>
-            <a:pPr algn="l" indent="0" marL="0">
-              <a:buNone/>
-            </a:pPr>
-            <a:r>
-              <a:rPr lang="en-US" sz="1450" i="1" dirty="0">
-                <a:solidFill>
-                  <a:srgbClr val="F1DCCF"/>
-                </a:solidFill>
-                <a:latin typeface="游ゴシック" pitchFamily="34" charset="0"/>
-                <a:ea typeface="游ゴシック" pitchFamily="34" charset="-122"/>
-                <a:cs typeface="游ゴシック" pitchFamily="34" charset="-120"/>
-              </a:rPr>
-              <a:t>『バッジのない、コンサルタントに、相続ビジネスの何ができるのか？』―起業当初、ある士業の先生に言われた言葉</a:t>
-            </a:r>
-            <a:endParaRPr lang="en-US" sz="1450" dirty="0"/>
-          </a:p>
-        </p:txBody>
-      </p:sp>
-      <p:sp>
-        <p:nvSpPr>
-          <p:cNvPr id="8" name="Text 6"/>
-          <p:cNvSpPr txBox="1"/>
-          <p:nvPr/>
-        </p:nvSpPr>
-        <p:spPr>
-          <a:xfrm>
-            <a:off x="640080" y="2834640"/>
-            <a:ext cx="10881360" cy="3154680"/>
+            <a:ext cx="10881360" cy="4206240"/>
           </a:xfrm>
           <a:prstGeom prst="rect">
             <a:avLst/>
@@ -4213,7 +4662,7 @@
                 <a:ea typeface="游ゴシック" pitchFamily="34" charset="-122"/>
                 <a:cs typeface="游ゴシック" pitchFamily="34" charset="-120"/>
               </a:rPr>
-              <a:t>その後、「士業の先生が私に足を向けて寝れないくらい」仕事を生み出し続け、自分の収益だけを追わない「本当の協業スタイル」を確立（素材①）</a:t>
+              <a:t>直接のターゲット：資産5億円〜10億円超の富裕層・超富裕層（素材①）</a:t>
             </a:r>
             <a:endParaRPr lang="en-US" sz="1500" dirty="0"/>
           </a:p>
@@ -4237,7 +4686,7 @@
                 <a:ea typeface="游ゴシック" pitchFamily="34" charset="-122"/>
                 <a:cs typeface="游ゴシック" pitchFamily="34" charset="-120"/>
               </a:rPr>
-              <a:t>この協業の仕組みを、第3回（紹介構造）・第4回（“人生の指揮官”モデル）のカリキュラムとして教材化し、再現可能な技術にしている（素材③）</a:t>
+              <a:t>ACPを入口にすることで、財産の有無に関わらず誰もがターゲットになる市場へ構造的に拡大（素材②）</a:t>
             </a:r>
             <a:endParaRPr lang="en-US" sz="1500" dirty="0"/>
           </a:p>
@@ -4261,7 +4710,7 @@
                 <a:ea typeface="游ゴシック" pitchFamily="34" charset="-122"/>
                 <a:cs typeface="游ゴシック" pitchFamily="34" charset="-120"/>
               </a:rPr>
-              <a:t>「財産に着目する」のではなく「家族の隠れた課題を見つけに行く」という視点そのものが、他の相続コンサル・士業・金融機関にはない方法論的な差別化</a:t>
+              <a:t>周辺専門家（税理士・司法書士・行政書士・弁護士・不動産・金融・有料老人ホーム・M&amp;A）を含めれば、市場は相続業界単体にとどまらない</a:t>
             </a:r>
             <a:endParaRPr lang="en-US" sz="1500" dirty="0"/>
           </a:p>
@@ -4269,7 +4718,328 @@
       </p:sp>
       <p:sp>
         <p:nvSpPr>
+          <p:cNvPr id="7" name="Shape 5"/>
+          <p:cNvSpPr/>
+          <p:nvPr/>
+        </p:nvSpPr>
+        <p:spPr>
+          <a:xfrm>
+            <a:off x="640080" y="4709160"/>
+            <a:ext cx="3200400" cy="1280160"/>
+          </a:xfrm>
+          <a:prstGeom prst="roundRect">
+            <a:avLst>
+              <a:gd name="adj" fmla="val 7143"/>
+            </a:avLst>
+          </a:prstGeom>
+          <a:solidFill>
+            <a:srgbClr val="F6F1EA"/>
+          </a:solidFill>
+          <a:ln/>
+          <a:effectLst>
+            <a:outerShdw sx="100000" sy="100000" kx="0" ky="0" algn="bl" rotWithShape="0" blurRad="101600" dist="38100" dir="5400000">
+              <a:srgbClr val="10233A">
+                <a:alpha val="18000"/>
+              </a:srgbClr>
+            </a:outerShdw>
+          </a:effectLst>
+        </p:spPr>
+      </p:sp>
+      <p:sp>
+        <p:nvSpPr>
+          <p:cNvPr id="8" name="Text 6"/>
+          <p:cNvSpPr txBox="1"/>
+          <p:nvPr/>
+        </p:nvSpPr>
+        <p:spPr>
+          <a:xfrm>
+            <a:off x="777240" y="4873752"/>
+            <a:ext cx="2926080" cy="665683"/>
+          </a:xfrm>
+          <a:prstGeom prst="rect">
+            <a:avLst/>
+          </a:prstGeom>
+          <a:noFill/>
+          <a:ln/>
+        </p:spPr>
+        <p:txBody>
+          <a:bodyPr wrap="square" lIns="0" tIns="0" rIns="0" bIns="0" rtlCol="0" anchor="ctr"/>
+          <a:lstStyle/>
+          <a:p>
+            <a:pPr algn="ctr" indent="0" marL="0">
+              <a:buNone/>
+            </a:pPr>
+            <a:r>
+              <a:rPr lang="en-US" sz="2200" b="1" dirty="0">
+                <a:solidFill>
+                  <a:srgbClr val="C9603F"/>
+                </a:solidFill>
+                <a:latin typeface="游ゴシック" pitchFamily="34" charset="0"/>
+                <a:ea typeface="游ゴシック" pitchFamily="34" charset="-122"/>
+                <a:cs typeface="游ゴシック" pitchFamily="34" charset="-120"/>
+              </a:rPr>
+              <a:t>50事業所</a:t>
+            </a:r>
+            <a:endParaRPr lang="en-US" sz="2200" dirty="0"/>
+          </a:p>
+        </p:txBody>
+      </p:sp>
+      <p:sp>
+        <p:nvSpPr>
           <p:cNvPr id="9" name="Text 7"/>
+          <p:cNvSpPr txBox="1"/>
+          <p:nvPr/>
+        </p:nvSpPr>
+        <p:spPr>
+          <a:xfrm>
+            <a:off x="731520" y="5426050"/>
+            <a:ext cx="3017520" cy="512064"/>
+          </a:xfrm>
+          <a:prstGeom prst="rect">
+            <a:avLst/>
+          </a:prstGeom>
+          <a:noFill/>
+          <a:ln/>
+        </p:spPr>
+        <p:txBody>
+          <a:bodyPr wrap="square" lIns="0" tIns="0" rIns="0" bIns="0" rtlCol="0" anchor="t"/>
+          <a:lstStyle/>
+          <a:p>
+            <a:pPr algn="ctr" indent="0" marL="0">
+              <a:buNone/>
+            </a:pPr>
+            <a:r>
+              <a:rPr lang="en-US" sz="1100" dirty="0">
+                <a:solidFill>
+                  <a:srgbClr val="1E3A5F"/>
+                </a:solidFill>
+                <a:latin typeface="游ゴシック" pitchFamily="34" charset="0"/>
+                <a:ea typeface="游ゴシック" pitchFamily="34" charset="-122"/>
+                <a:cs typeface="游ゴシック" pitchFamily="34" charset="-120"/>
+              </a:rPr>
+              <a:t>全国の拠点数</a:t>
+            </a:r>
+            <a:endParaRPr lang="en-US" sz="1100" dirty="0"/>
+          </a:p>
+        </p:txBody>
+      </p:sp>
+      <p:sp>
+        <p:nvSpPr>
+          <p:cNvPr id="10" name="Shape 8"/>
+          <p:cNvSpPr/>
+          <p:nvPr/>
+        </p:nvSpPr>
+        <p:spPr>
+          <a:xfrm>
+            <a:off x="4251960" y="4709160"/>
+            <a:ext cx="3200400" cy="1280160"/>
+          </a:xfrm>
+          <a:prstGeom prst="roundRect">
+            <a:avLst>
+              <a:gd name="adj" fmla="val 7143"/>
+            </a:avLst>
+          </a:prstGeom>
+          <a:solidFill>
+            <a:srgbClr val="F6F1EA"/>
+          </a:solidFill>
+          <a:ln/>
+          <a:effectLst>
+            <a:outerShdw sx="100000" sy="100000" kx="0" ky="0" algn="bl" rotWithShape="0" blurRad="101600" dist="38100" dir="5400000">
+              <a:srgbClr val="10233A">
+                <a:alpha val="18000"/>
+              </a:srgbClr>
+            </a:outerShdw>
+          </a:effectLst>
+        </p:spPr>
+      </p:sp>
+      <p:sp>
+        <p:nvSpPr>
+          <p:cNvPr id="11" name="Text 9"/>
+          <p:cNvSpPr txBox="1"/>
+          <p:nvPr/>
+        </p:nvSpPr>
+        <p:spPr>
+          <a:xfrm>
+            <a:off x="4389120" y="4873752"/>
+            <a:ext cx="2926080" cy="665683"/>
+          </a:xfrm>
+          <a:prstGeom prst="rect">
+            <a:avLst/>
+          </a:prstGeom>
+          <a:noFill/>
+          <a:ln/>
+        </p:spPr>
+        <p:txBody>
+          <a:bodyPr wrap="square" lIns="0" tIns="0" rIns="0" bIns="0" rtlCol="0" anchor="ctr"/>
+          <a:lstStyle/>
+          <a:p>
+            <a:pPr algn="ctr" indent="0" marL="0">
+              <a:buNone/>
+            </a:pPr>
+            <a:r>
+              <a:rPr lang="en-US" sz="2200" b="1" dirty="0">
+                <a:solidFill>
+                  <a:srgbClr val="C9603F"/>
+                </a:solidFill>
+                <a:latin typeface="游ゴシック" pitchFamily="34" charset="0"/>
+                <a:ea typeface="游ゴシック" pitchFamily="34" charset="-122"/>
+                <a:cs typeface="游ゴシック" pitchFamily="34" charset="-120"/>
+              </a:rPr>
+              <a:t>資産5〜10億円超</a:t>
+            </a:r>
+            <a:endParaRPr lang="en-US" sz="2200" dirty="0"/>
+          </a:p>
+        </p:txBody>
+      </p:sp>
+      <p:sp>
+        <p:nvSpPr>
+          <p:cNvPr id="12" name="Text 10"/>
+          <p:cNvSpPr txBox="1"/>
+          <p:nvPr/>
+        </p:nvSpPr>
+        <p:spPr>
+          <a:xfrm>
+            <a:off x="4343400" y="5426050"/>
+            <a:ext cx="3017520" cy="512064"/>
+          </a:xfrm>
+          <a:prstGeom prst="rect">
+            <a:avLst/>
+          </a:prstGeom>
+          <a:noFill/>
+          <a:ln/>
+        </p:spPr>
+        <p:txBody>
+          <a:bodyPr wrap="square" lIns="0" tIns="0" rIns="0" bIns="0" rtlCol="0" anchor="t"/>
+          <a:lstStyle/>
+          <a:p>
+            <a:pPr algn="ctr" indent="0" marL="0">
+              <a:buNone/>
+            </a:pPr>
+            <a:r>
+              <a:rPr lang="en-US" sz="1100" dirty="0">
+                <a:solidFill>
+                  <a:srgbClr val="1E3A5F"/>
+                </a:solidFill>
+                <a:latin typeface="游ゴシック" pitchFamily="34" charset="0"/>
+                <a:ea typeface="游ゴシック" pitchFamily="34" charset="-122"/>
+                <a:cs typeface="游ゴシック" pitchFamily="34" charset="-120"/>
+              </a:rPr>
+              <a:t>直接の顧客層</a:t>
+            </a:r>
+            <a:endParaRPr lang="en-US" sz="1100" dirty="0"/>
+          </a:p>
+        </p:txBody>
+      </p:sp>
+      <p:sp>
+        <p:nvSpPr>
+          <p:cNvPr id="13" name="Shape 11"/>
+          <p:cNvSpPr/>
+          <p:nvPr/>
+        </p:nvSpPr>
+        <p:spPr>
+          <a:xfrm>
+            <a:off x="7863840" y="4709160"/>
+            <a:ext cx="3200400" cy="1280160"/>
+          </a:xfrm>
+          <a:prstGeom prst="roundRect">
+            <a:avLst>
+              <a:gd name="adj" fmla="val 7143"/>
+            </a:avLst>
+          </a:prstGeom>
+          <a:solidFill>
+            <a:srgbClr val="F6F1EA"/>
+          </a:solidFill>
+          <a:ln/>
+          <a:effectLst>
+            <a:outerShdw sx="100000" sy="100000" kx="0" ky="0" algn="bl" rotWithShape="0" blurRad="101600" dist="38100" dir="5400000">
+              <a:srgbClr val="10233A">
+                <a:alpha val="18000"/>
+              </a:srgbClr>
+            </a:outerShdw>
+          </a:effectLst>
+        </p:spPr>
+      </p:sp>
+      <p:sp>
+        <p:nvSpPr>
+          <p:cNvPr id="14" name="Text 12"/>
+          <p:cNvSpPr txBox="1"/>
+          <p:nvPr/>
+        </p:nvSpPr>
+        <p:spPr>
+          <a:xfrm>
+            <a:off x="8001000" y="4873752"/>
+            <a:ext cx="2926080" cy="665683"/>
+          </a:xfrm>
+          <a:prstGeom prst="rect">
+            <a:avLst/>
+          </a:prstGeom>
+          <a:noFill/>
+          <a:ln/>
+        </p:spPr>
+        <p:txBody>
+          <a:bodyPr wrap="square" lIns="0" tIns="0" rIns="0" bIns="0" rtlCol="0" anchor="ctr"/>
+          <a:lstStyle/>
+          <a:p>
+            <a:pPr algn="ctr" indent="0" marL="0">
+              <a:buNone/>
+            </a:pPr>
+            <a:r>
+              <a:rPr lang="en-US" sz="2200" b="1" dirty="0">
+                <a:solidFill>
+                  <a:srgbClr val="C9603F"/>
+                </a:solidFill>
+                <a:latin typeface="游ゴシック" pitchFamily="34" charset="0"/>
+                <a:ea typeface="游ゴシック" pitchFamily="34" charset="-122"/>
+                <a:cs typeface="游ゴシック" pitchFamily="34" charset="-120"/>
+              </a:rPr>
+              <a:t>約100億円</a:t>
+            </a:r>
+            <a:endParaRPr lang="en-US" sz="2200" dirty="0"/>
+          </a:p>
+        </p:txBody>
+      </p:sp>
+      <p:sp>
+        <p:nvSpPr>
+          <p:cNvPr id="15" name="Text 13"/>
+          <p:cNvSpPr txBox="1"/>
+          <p:nvPr/>
+        </p:nvSpPr>
+        <p:spPr>
+          <a:xfrm>
+            <a:off x="7955280" y="5426050"/>
+            <a:ext cx="3017520" cy="512064"/>
+          </a:xfrm>
+          <a:prstGeom prst="rect">
+            <a:avLst/>
+          </a:prstGeom>
+          <a:noFill/>
+          <a:ln/>
+        </p:spPr>
+        <p:txBody>
+          <a:bodyPr wrap="square" lIns="0" tIns="0" rIns="0" bIns="0" rtlCol="0" anchor="t"/>
+          <a:lstStyle/>
+          <a:p>
+            <a:pPr algn="ctr" indent="0" marL="0">
+              <a:buNone/>
+            </a:pPr>
+            <a:r>
+              <a:rPr lang="en-US" sz="1100" dirty="0">
+                <a:solidFill>
+                  <a:srgbClr val="1E3A5F"/>
+                </a:solidFill>
+                <a:latin typeface="游ゴシック" pitchFamily="34" charset="0"/>
+                <a:ea typeface="游ゴシック" pitchFamily="34" charset="-122"/>
+                <a:cs typeface="游ゴシック" pitchFamily="34" charset="-120"/>
+              </a:rPr>
+              <a:t>周辺経済圏</a:t>
+            </a:r>
+            <a:endParaRPr lang="en-US" sz="1100" dirty="0"/>
+          </a:p>
+        </p:txBody>
+      </p:sp>
+      <p:sp>
+        <p:nvSpPr>
+          <p:cNvPr id="16" name="Text 14"/>
           <p:cNvSpPr txBox="1"/>
           <p:nvPr/>
         </p:nvSpPr>
@@ -4371,7 +5141,7 @@
                 <a:ea typeface="游ゴシック" pitchFamily="34" charset="-122"/>
                 <a:cs typeface="游ゴシック" pitchFamily="34" charset="-120"/>
               </a:rPr>
-              <a:t>06 / CONTRIBUTION</a:t>
+              <a:t>05 / ADVANTAGE</a:t>
             </a:r>
             <a:endParaRPr lang="en-US" sz="1300" dirty="0"/>
           </a:p>
@@ -4410,7 +5180,7 @@
                 <a:ea typeface="游ゴシック" pitchFamily="34" charset="-122"/>
                 <a:cs typeface="游ゴシック" pitchFamily="34" charset="-120"/>
               </a:rPr>
-              <a:t>貢献性 ― 100億円の中身は、関わった全員への貢献</a:t>
+              <a:t>優位性 ― 「バッジのない」からこそ生まれた協業モデル</a:t>
             </a:r>
             <a:endParaRPr lang="en-US" sz="2700" dirty="0"/>
           </a:p>
@@ -4476,7 +5246,7 @@
                 <a:ea typeface="游ゴシック" pitchFamily="34" charset="-122"/>
                 <a:cs typeface="游ゴシック" pitchFamily="34" charset="-120"/>
               </a:rPr>
-              <a:t>貢</a:t>
+              <a:t>優</a:t>
             </a:r>
             <a:endParaRPr lang="en-US" sz="2880" dirty="0"/>
           </a:p>
@@ -4484,14 +5254,75 @@
       </p:sp>
       <p:sp>
         <p:nvSpPr>
-          <p:cNvPr id="6" name="Text 4"/>
-          <p:cNvSpPr txBox="1"/>
+          <p:cNvPr id="6" name="Shape 4"/>
+          <p:cNvSpPr/>
           <p:nvPr/>
         </p:nvSpPr>
         <p:spPr>
           <a:xfrm>
             <a:off x="640080" y="1783080"/>
-            <a:ext cx="10881360" cy="4206240"/>
+            <a:ext cx="10881360" cy="822960"/>
+          </a:xfrm>
+          <a:prstGeom prst="roundRect">
+            <a:avLst>
+              <a:gd name="adj" fmla="val 8889"/>
+            </a:avLst>
+          </a:prstGeom>
+          <a:solidFill>
+            <a:srgbClr val="1E3A5F"/>
+          </a:solidFill>
+          <a:ln/>
+        </p:spPr>
+      </p:sp>
+      <p:sp>
+        <p:nvSpPr>
+          <p:cNvPr id="7" name="Text 5"/>
+          <p:cNvSpPr txBox="1"/>
+          <p:nvPr/>
+        </p:nvSpPr>
+        <p:spPr>
+          <a:xfrm>
+            <a:off x="914400" y="1783080"/>
+            <a:ext cx="10332720" cy="822960"/>
+          </a:xfrm>
+          <a:prstGeom prst="rect">
+            <a:avLst/>
+          </a:prstGeom>
+          <a:noFill/>
+          <a:ln/>
+        </p:spPr>
+        <p:txBody>
+          <a:bodyPr wrap="square" lIns="0" tIns="0" rIns="0" bIns="0" rtlCol="0" anchor="ctr"/>
+          <a:lstStyle/>
+          <a:p>
+            <a:pPr algn="l" indent="0" marL="0">
+              <a:buNone/>
+            </a:pPr>
+            <a:r>
+              <a:rPr lang="en-US" sz="1450" i="1" dirty="0">
+                <a:solidFill>
+                  <a:srgbClr val="F1DCCF"/>
+                </a:solidFill>
+                <a:latin typeface="游ゴシック" pitchFamily="34" charset="0"/>
+                <a:ea typeface="游ゴシック" pitchFamily="34" charset="-122"/>
+                <a:cs typeface="游ゴシック" pitchFamily="34" charset="-120"/>
+              </a:rPr>
+              <a:t>『バッジのない、コンサルタントに、相続ビジネスの何ができるのか？』―起業当初、ある士業の先生に言われた言葉</a:t>
+            </a:r>
+            <a:endParaRPr lang="en-US" sz="1450" dirty="0"/>
+          </a:p>
+        </p:txBody>
+      </p:sp>
+      <p:sp>
+        <p:nvSpPr>
+          <p:cNvPr id="8" name="Text 6"/>
+          <p:cNvSpPr txBox="1"/>
+          <p:nvPr/>
+        </p:nvSpPr>
+        <p:spPr>
+          <a:xfrm>
+            <a:off x="640080" y="2834640"/>
+            <a:ext cx="10881360" cy="3154680"/>
           </a:xfrm>
           <a:prstGeom prst="rect">
             <a:avLst/>
@@ -4522,7 +5353,7 @@
                 <a:ea typeface="游ゴシック" pitchFamily="34" charset="-122"/>
                 <a:cs typeface="游ゴシック" pitchFamily="34" charset="-120"/>
               </a:rPr>
-              <a:t>末端の顧客（本人・家族）：財産ではなく「対話」による安心と幸福度の向上（終活×幸福度の各種調査）</a:t>
+              <a:t>その後、「士業の先生が私に足を向けて寝れないくらい」仕事を生み出し続け、自分の収益だけを追わない「本当の協業スタイル」を確立（素材①）</a:t>
             </a:r>
             <a:endParaRPr lang="en-US" sz="1500" dirty="0"/>
           </a:p>
@@ -4546,7 +5377,7 @@
                 <a:ea typeface="游ゴシック" pitchFamily="34" charset="-122"/>
                 <a:cs typeface="游ゴシック" pitchFamily="34" charset="-120"/>
               </a:rPr>
-              <a:t>周辺専門家（税理士・弁護士・不動産・金融等）：新たな受任機会・収益機会の創出（素材①）</a:t>
+              <a:t>この協業の仕組みを、第3回（紹介構造）・第4回（“人生の指揮官”モデル）のカリキュラムとして教材化し、再現可能な技術にしている（素材③）</a:t>
             </a:r>
             <a:endParaRPr lang="en-US" sz="1500" dirty="0"/>
           </a:p>
@@ -4570,479 +5401,15 @@
                 <a:ea typeface="游ゴシック" pitchFamily="34" charset="-122"/>
                 <a:cs typeface="游ゴシック" pitchFamily="34" charset="-120"/>
               </a:rPr>
-              <a:t>企業：福利厚生導入を通じ「従業員を大切にする法人」への進化を支援</a:t>
+              <a:t>「財産に着目する」のではなく「家族の隠れた課題を見つけに行く」という視点そのものが、他の相続コンサル・士業・金融機関にはない方法論的な差別化</a:t>
             </a:r>
             <a:endParaRPr lang="en-US" sz="1500" dirty="0"/>
           </a:p>
-          <a:p>
-            <a:pPr marL="342900" indent="-342900">
-              <a:lnSpc>
-                <a:spcPct val="128000"/>
-              </a:lnSpc>
-              <a:spcAft>
-                <a:spcPts val="1200"/>
-              </a:spcAft>
-              <a:buSzPct val="100000"/>
-              <a:buChar char="●"/>
-            </a:pPr>
-            <a:r>
-              <a:rPr lang="en-US" sz="1500" dirty="0">
-                <a:solidFill>
-                  <a:srgbClr val="3A3A3A"/>
-                </a:solidFill>
-                <a:latin typeface="游ゴシック" pitchFamily="34" charset="0"/>
-                <a:ea typeface="游ゴシック" pitchFamily="34" charset="-122"/>
-                <a:cs typeface="游ゴシック" pitchFamily="34" charset="-120"/>
-              </a:rPr>
-              <a:t>行政・地域：朝来市 → 岸和田市など、一つの街で実証した連携モデルの横展開</a:t>
-            </a:r>
-            <a:endParaRPr lang="en-US" sz="1500" dirty="0"/>
-          </a:p>
-        </p:txBody>
-      </p:sp>
-      <p:sp>
-        <p:nvSpPr>
-          <p:cNvPr id="7" name="Shape 5"/>
-          <p:cNvSpPr/>
-          <p:nvPr/>
-        </p:nvSpPr>
-        <p:spPr>
-          <a:xfrm>
-            <a:off x="640080" y="4754880"/>
-            <a:ext cx="2468880" cy="1325880"/>
-          </a:xfrm>
-          <a:prstGeom prst="roundRect">
-            <a:avLst>
-              <a:gd name="adj" fmla="val 6897"/>
-            </a:avLst>
-          </a:prstGeom>
-          <a:solidFill>
-            <a:srgbClr val="F6F1EA"/>
-          </a:solidFill>
-          <a:ln/>
-          <a:effectLst>
-            <a:outerShdw sx="100000" sy="100000" kx="0" ky="0" algn="bl" rotWithShape="0" blurRad="101600" dist="38100" dir="5400000">
-              <a:srgbClr val="10233A">
-                <a:alpha val="18000"/>
-              </a:srgbClr>
-            </a:outerShdw>
-          </a:effectLst>
-        </p:spPr>
-      </p:sp>
-      <p:sp>
-        <p:nvSpPr>
-          <p:cNvPr id="8" name="Text 6"/>
-          <p:cNvSpPr txBox="1"/>
-          <p:nvPr/>
-        </p:nvSpPr>
-        <p:spPr>
-          <a:xfrm>
-            <a:off x="822960" y="4937760"/>
-            <a:ext cx="2103120" cy="365760"/>
-          </a:xfrm>
-          <a:prstGeom prst="rect">
-            <a:avLst/>
-          </a:prstGeom>
-          <a:noFill/>
-          <a:ln/>
-        </p:spPr>
-        <p:txBody>
-          <a:bodyPr wrap="square" lIns="0" tIns="0" rIns="0" bIns="0" rtlCol="0" anchor="ctr"/>
-          <a:lstStyle/>
-          <a:p>
-            <a:pPr indent="0" marL="0">
-              <a:buNone/>
-            </a:pPr>
-            <a:r>
-              <a:rPr lang="en-US" sz="1500" b="1" dirty="0">
-                <a:solidFill>
-                  <a:srgbClr val="C9603F"/>
-                </a:solidFill>
-                <a:latin typeface="游ゴシック" pitchFamily="34" charset="0"/>
-                <a:ea typeface="游ゴシック" pitchFamily="34" charset="-122"/>
-                <a:cs typeface="游ゴシック" pitchFamily="34" charset="-120"/>
-              </a:rPr>
-              <a:t>顧客</a:t>
-            </a:r>
-            <a:endParaRPr lang="en-US" sz="1500" dirty="0"/>
-          </a:p>
         </p:txBody>
       </p:sp>
       <p:sp>
         <p:nvSpPr>
           <p:cNvPr id="9" name="Text 7"/>
-          <p:cNvSpPr txBox="1"/>
-          <p:nvPr/>
-        </p:nvSpPr>
-        <p:spPr>
-          <a:xfrm>
-            <a:off x="822960" y="5349240"/>
-            <a:ext cx="2103120" cy="640080"/>
-          </a:xfrm>
-          <a:prstGeom prst="rect">
-            <a:avLst/>
-          </a:prstGeom>
-          <a:noFill/>
-          <a:ln/>
-        </p:spPr>
-        <p:txBody>
-          <a:bodyPr wrap="square" lIns="0" tIns="0" rIns="0" bIns="0" rtlCol="0" anchor="t"/>
-          <a:lstStyle/>
-          <a:p>
-            <a:pPr indent="0" marL="0">
-              <a:lnSpc>
-                <a:spcPct val="120000"/>
-              </a:lnSpc>
-              <a:buNone/>
-            </a:pPr>
-            <a:r>
-              <a:rPr lang="en-US" sz="1150" dirty="0">
-                <a:solidFill>
-                  <a:srgbClr val="3A3A3A"/>
-                </a:solidFill>
-                <a:latin typeface="游ゴシック" pitchFamily="34" charset="0"/>
-                <a:ea typeface="游ゴシック" pitchFamily="34" charset="-122"/>
-                <a:cs typeface="游ゴシック" pitchFamily="34" charset="-120"/>
-              </a:rPr>
-              <a:t>対話による安心</a:t>
-            </a:r>
-            <a:endParaRPr lang="en-US" sz="1150" dirty="0"/>
-          </a:p>
-        </p:txBody>
-      </p:sp>
-      <p:sp>
-        <p:nvSpPr>
-          <p:cNvPr id="10" name="Shape 8"/>
-          <p:cNvSpPr/>
-          <p:nvPr/>
-        </p:nvSpPr>
-        <p:spPr>
-          <a:xfrm>
-            <a:off x="3383280" y="4754880"/>
-            <a:ext cx="2468880" cy="1325880"/>
-          </a:xfrm>
-          <a:prstGeom prst="roundRect">
-            <a:avLst>
-              <a:gd name="adj" fmla="val 6897"/>
-            </a:avLst>
-          </a:prstGeom>
-          <a:solidFill>
-            <a:srgbClr val="F6F1EA"/>
-          </a:solidFill>
-          <a:ln/>
-          <a:effectLst>
-            <a:outerShdw sx="100000" sy="100000" kx="0" ky="0" algn="bl" rotWithShape="0" blurRad="101600" dist="38100" dir="5400000">
-              <a:srgbClr val="10233A">
-                <a:alpha val="18000"/>
-              </a:srgbClr>
-            </a:outerShdw>
-          </a:effectLst>
-        </p:spPr>
-      </p:sp>
-      <p:sp>
-        <p:nvSpPr>
-          <p:cNvPr id="11" name="Text 9"/>
-          <p:cNvSpPr txBox="1"/>
-          <p:nvPr/>
-        </p:nvSpPr>
-        <p:spPr>
-          <a:xfrm>
-            <a:off x="3566160" y="4937760"/>
-            <a:ext cx="2103120" cy="365760"/>
-          </a:xfrm>
-          <a:prstGeom prst="rect">
-            <a:avLst/>
-          </a:prstGeom>
-          <a:noFill/>
-          <a:ln/>
-        </p:spPr>
-        <p:txBody>
-          <a:bodyPr wrap="square" lIns="0" tIns="0" rIns="0" bIns="0" rtlCol="0" anchor="ctr"/>
-          <a:lstStyle/>
-          <a:p>
-            <a:pPr indent="0" marL="0">
-              <a:buNone/>
-            </a:pPr>
-            <a:r>
-              <a:rPr lang="en-US" sz="1500" b="1" dirty="0">
-                <a:solidFill>
-                  <a:srgbClr val="C9603F"/>
-                </a:solidFill>
-                <a:latin typeface="游ゴシック" pitchFamily="34" charset="0"/>
-                <a:ea typeface="游ゴシック" pitchFamily="34" charset="-122"/>
-                <a:cs typeface="游ゴシック" pitchFamily="34" charset="-120"/>
-              </a:rPr>
-              <a:t>専門家</a:t>
-            </a:r>
-            <a:endParaRPr lang="en-US" sz="1500" dirty="0"/>
-          </a:p>
-        </p:txBody>
-      </p:sp>
-      <p:sp>
-        <p:nvSpPr>
-          <p:cNvPr id="12" name="Text 10"/>
-          <p:cNvSpPr txBox="1"/>
-          <p:nvPr/>
-        </p:nvSpPr>
-        <p:spPr>
-          <a:xfrm>
-            <a:off x="3566160" y="5349240"/>
-            <a:ext cx="2103120" cy="640080"/>
-          </a:xfrm>
-          <a:prstGeom prst="rect">
-            <a:avLst/>
-          </a:prstGeom>
-          <a:noFill/>
-          <a:ln/>
-        </p:spPr>
-        <p:txBody>
-          <a:bodyPr wrap="square" lIns="0" tIns="0" rIns="0" bIns="0" rtlCol="0" anchor="t"/>
-          <a:lstStyle/>
-          <a:p>
-            <a:pPr indent="0" marL="0">
-              <a:lnSpc>
-                <a:spcPct val="120000"/>
-              </a:lnSpc>
-              <a:buNone/>
-            </a:pPr>
-            <a:r>
-              <a:rPr lang="en-US" sz="1150" dirty="0">
-                <a:solidFill>
-                  <a:srgbClr val="3A3A3A"/>
-                </a:solidFill>
-                <a:latin typeface="游ゴシック" pitchFamily="34" charset="0"/>
-                <a:ea typeface="游ゴシック" pitchFamily="34" charset="-122"/>
-                <a:cs typeface="游ゴシック" pitchFamily="34" charset="-120"/>
-              </a:rPr>
-              <a:t>新たな受任機会</a:t>
-            </a:r>
-            <a:endParaRPr lang="en-US" sz="1150" dirty="0"/>
-          </a:p>
-        </p:txBody>
-      </p:sp>
-      <p:sp>
-        <p:nvSpPr>
-          <p:cNvPr id="13" name="Shape 11"/>
-          <p:cNvSpPr/>
-          <p:nvPr/>
-        </p:nvSpPr>
-        <p:spPr>
-          <a:xfrm>
-            <a:off x="6126480" y="4754880"/>
-            <a:ext cx="2468880" cy="1325880"/>
-          </a:xfrm>
-          <a:prstGeom prst="roundRect">
-            <a:avLst>
-              <a:gd name="adj" fmla="val 6897"/>
-            </a:avLst>
-          </a:prstGeom>
-          <a:solidFill>
-            <a:srgbClr val="F6F1EA"/>
-          </a:solidFill>
-          <a:ln/>
-          <a:effectLst>
-            <a:outerShdw sx="100000" sy="100000" kx="0" ky="0" algn="bl" rotWithShape="0" blurRad="101600" dist="38100" dir="5400000">
-              <a:srgbClr val="10233A">
-                <a:alpha val="18000"/>
-              </a:srgbClr>
-            </a:outerShdw>
-          </a:effectLst>
-        </p:spPr>
-      </p:sp>
-      <p:sp>
-        <p:nvSpPr>
-          <p:cNvPr id="14" name="Text 12"/>
-          <p:cNvSpPr txBox="1"/>
-          <p:nvPr/>
-        </p:nvSpPr>
-        <p:spPr>
-          <a:xfrm>
-            <a:off x="6309360" y="4937760"/>
-            <a:ext cx="2103120" cy="365760"/>
-          </a:xfrm>
-          <a:prstGeom prst="rect">
-            <a:avLst/>
-          </a:prstGeom>
-          <a:noFill/>
-          <a:ln/>
-        </p:spPr>
-        <p:txBody>
-          <a:bodyPr wrap="square" lIns="0" tIns="0" rIns="0" bIns="0" rtlCol="0" anchor="ctr"/>
-          <a:lstStyle/>
-          <a:p>
-            <a:pPr indent="0" marL="0">
-              <a:buNone/>
-            </a:pPr>
-            <a:r>
-              <a:rPr lang="en-US" sz="1500" b="1" dirty="0">
-                <a:solidFill>
-                  <a:srgbClr val="C9603F"/>
-                </a:solidFill>
-                <a:latin typeface="游ゴシック" pitchFamily="34" charset="0"/>
-                <a:ea typeface="游ゴシック" pitchFamily="34" charset="-122"/>
-                <a:cs typeface="游ゴシック" pitchFamily="34" charset="-120"/>
-              </a:rPr>
-              <a:t>企業</a:t>
-            </a:r>
-            <a:endParaRPr lang="en-US" sz="1500" dirty="0"/>
-          </a:p>
-        </p:txBody>
-      </p:sp>
-      <p:sp>
-        <p:nvSpPr>
-          <p:cNvPr id="15" name="Text 13"/>
-          <p:cNvSpPr txBox="1"/>
-          <p:nvPr/>
-        </p:nvSpPr>
-        <p:spPr>
-          <a:xfrm>
-            <a:off x="6309360" y="5349240"/>
-            <a:ext cx="2103120" cy="640080"/>
-          </a:xfrm>
-          <a:prstGeom prst="rect">
-            <a:avLst/>
-          </a:prstGeom>
-          <a:noFill/>
-          <a:ln/>
-        </p:spPr>
-        <p:txBody>
-          <a:bodyPr wrap="square" lIns="0" tIns="0" rIns="0" bIns="0" rtlCol="0" anchor="t"/>
-          <a:lstStyle/>
-          <a:p>
-            <a:pPr indent="0" marL="0">
-              <a:lnSpc>
-                <a:spcPct val="120000"/>
-              </a:lnSpc>
-              <a:buNone/>
-            </a:pPr>
-            <a:r>
-              <a:rPr lang="en-US" sz="1150" dirty="0">
-                <a:solidFill>
-                  <a:srgbClr val="3A3A3A"/>
-                </a:solidFill>
-                <a:latin typeface="游ゴシック" pitchFamily="34" charset="0"/>
-                <a:ea typeface="游ゴシック" pitchFamily="34" charset="-122"/>
-                <a:cs typeface="游ゴシック" pitchFamily="34" charset="-120"/>
-              </a:rPr>
-              <a:t>従業員を大切にする法人へ</a:t>
-            </a:r>
-            <a:endParaRPr lang="en-US" sz="1150" dirty="0"/>
-          </a:p>
-        </p:txBody>
-      </p:sp>
-      <p:sp>
-        <p:nvSpPr>
-          <p:cNvPr id="16" name="Shape 14"/>
-          <p:cNvSpPr/>
-          <p:nvPr/>
-        </p:nvSpPr>
-        <p:spPr>
-          <a:xfrm>
-            <a:off x="8869680" y="4754880"/>
-            <a:ext cx="2468880" cy="1325880"/>
-          </a:xfrm>
-          <a:prstGeom prst="roundRect">
-            <a:avLst>
-              <a:gd name="adj" fmla="val 6897"/>
-            </a:avLst>
-          </a:prstGeom>
-          <a:solidFill>
-            <a:srgbClr val="F6F1EA"/>
-          </a:solidFill>
-          <a:ln/>
-          <a:effectLst>
-            <a:outerShdw sx="100000" sy="100000" kx="0" ky="0" algn="bl" rotWithShape="0" blurRad="101600" dist="38100" dir="5400000">
-              <a:srgbClr val="10233A">
-                <a:alpha val="18000"/>
-              </a:srgbClr>
-            </a:outerShdw>
-          </a:effectLst>
-        </p:spPr>
-      </p:sp>
-      <p:sp>
-        <p:nvSpPr>
-          <p:cNvPr id="17" name="Text 15"/>
-          <p:cNvSpPr txBox="1"/>
-          <p:nvPr/>
-        </p:nvSpPr>
-        <p:spPr>
-          <a:xfrm>
-            <a:off x="9052560" y="4937760"/>
-            <a:ext cx="2103120" cy="365760"/>
-          </a:xfrm>
-          <a:prstGeom prst="rect">
-            <a:avLst/>
-          </a:prstGeom>
-          <a:noFill/>
-          <a:ln/>
-        </p:spPr>
-        <p:txBody>
-          <a:bodyPr wrap="square" lIns="0" tIns="0" rIns="0" bIns="0" rtlCol="0" anchor="ctr"/>
-          <a:lstStyle/>
-          <a:p>
-            <a:pPr indent="0" marL="0">
-              <a:buNone/>
-            </a:pPr>
-            <a:r>
-              <a:rPr lang="en-US" sz="1500" b="1" dirty="0">
-                <a:solidFill>
-                  <a:srgbClr val="C9603F"/>
-                </a:solidFill>
-                <a:latin typeface="游ゴシック" pitchFamily="34" charset="0"/>
-                <a:ea typeface="游ゴシック" pitchFamily="34" charset="-122"/>
-                <a:cs typeface="游ゴシック" pitchFamily="34" charset="-120"/>
-              </a:rPr>
-              <a:t>行政・地域</a:t>
-            </a:r>
-            <a:endParaRPr lang="en-US" sz="1500" dirty="0"/>
-          </a:p>
-        </p:txBody>
-      </p:sp>
-      <p:sp>
-        <p:nvSpPr>
-          <p:cNvPr id="18" name="Text 16"/>
-          <p:cNvSpPr txBox="1"/>
-          <p:nvPr/>
-        </p:nvSpPr>
-        <p:spPr>
-          <a:xfrm>
-            <a:off x="9052560" y="5349240"/>
-            <a:ext cx="2103120" cy="640080"/>
-          </a:xfrm>
-          <a:prstGeom prst="rect">
-            <a:avLst/>
-          </a:prstGeom>
-          <a:noFill/>
-          <a:ln/>
-        </p:spPr>
-        <p:txBody>
-          <a:bodyPr wrap="square" lIns="0" tIns="0" rIns="0" bIns="0" rtlCol="0" anchor="t"/>
-          <a:lstStyle/>
-          <a:p>
-            <a:pPr indent="0" marL="0">
-              <a:lnSpc>
-                <a:spcPct val="120000"/>
-              </a:lnSpc>
-              <a:buNone/>
-            </a:pPr>
-            <a:r>
-              <a:rPr lang="en-US" sz="1150" dirty="0">
-                <a:solidFill>
-                  <a:srgbClr val="3A3A3A"/>
-                </a:solidFill>
-                <a:latin typeface="游ゴシック" pitchFamily="34" charset="0"/>
-                <a:ea typeface="游ゴシック" pitchFamily="34" charset="-122"/>
-                <a:cs typeface="游ゴシック" pitchFamily="34" charset="-120"/>
-              </a:rPr>
-              <a:t>連携モデルの横展開</a:t>
-            </a:r>
-            <a:endParaRPr lang="en-US" sz="1150" dirty="0"/>
-          </a:p>
-        </p:txBody>
-      </p:sp>
-      <p:sp>
-        <p:nvSpPr>
-          <p:cNvPr id="19" name="Text 17"/>
           <p:cNvSpPr txBox="1"/>
           <p:nvPr/>
         </p:nvSpPr>
@@ -5090,6 +5457,779 @@
 <file path=ppt/slides/slide14.xml><?xml version="1.0" encoding="utf-8"?>
 <p:sld xmlns:a="http://schemas.openxmlformats.org/drawingml/2006/main" xmlns:r="http://schemas.openxmlformats.org/officeDocument/2006/relationships" xmlns:p="http://schemas.openxmlformats.org/presentationml/2006/main">
   <p:cSld name="Slide 14">
+    <p:bg>
+      <p:bgPr>
+        <a:solidFill>
+          <a:srgbClr val="FFFFFF"/>
+        </a:solidFill>
+      </p:bgPr>
+    </p:bg>
+    <p:spTree>
+      <p:nvGrpSpPr>
+        <p:cNvPr id="1" name=""/>
+        <p:cNvGrpSpPr/>
+        <p:nvPr/>
+      </p:nvGrpSpPr>
+      <p:grpSpPr>
+        <a:xfrm>
+          <a:off x="0" y="0"/>
+          <a:ext cx="0" cy="0"/>
+          <a:chOff x="0" y="0"/>
+          <a:chExt cx="0" cy="0"/>
+        </a:xfrm>
+      </p:grpSpPr>
+      <p:sp>
+        <p:nvSpPr>
+          <p:cNvPr id="2" name="Text 0"/>
+          <p:cNvSpPr txBox="1"/>
+          <p:nvPr/>
+        </p:nvSpPr>
+        <p:spPr>
+          <a:xfrm>
+            <a:off x="640080" y="411480"/>
+            <a:ext cx="9144000" cy="320040"/>
+          </a:xfrm>
+          <a:prstGeom prst="rect">
+            <a:avLst/>
+          </a:prstGeom>
+          <a:noFill/>
+          <a:ln/>
+        </p:spPr>
+        <p:txBody>
+          <a:bodyPr wrap="square" lIns="0" tIns="0" rIns="0" bIns="0" rtlCol="0" anchor="ctr"/>
+          <a:lstStyle/>
+          <a:p>
+            <a:pPr indent="0" marL="0">
+              <a:buNone/>
+            </a:pPr>
+            <a:r>
+              <a:rPr lang="en-US" sz="1300" b="1" spc="100" kern="0" dirty="0">
+                <a:solidFill>
+                  <a:srgbClr val="C9603F"/>
+                </a:solidFill>
+                <a:latin typeface="游ゴシック" pitchFamily="34" charset="0"/>
+                <a:ea typeface="游ゴシック" pitchFamily="34" charset="-122"/>
+                <a:cs typeface="游ゴシック" pitchFamily="34" charset="-120"/>
+              </a:rPr>
+              <a:t>06 / CONTRIBUTION</a:t>
+            </a:r>
+            <a:endParaRPr lang="en-US" sz="1300" dirty="0"/>
+          </a:p>
+        </p:txBody>
+      </p:sp>
+      <p:sp>
+        <p:nvSpPr>
+          <p:cNvPr id="3" name="Text 1"/>
+          <p:cNvSpPr txBox="1"/>
+          <p:nvPr/>
+        </p:nvSpPr>
+        <p:spPr>
+          <a:xfrm>
+            <a:off x="640080" y="713232"/>
+            <a:ext cx="10881360" cy="731520"/>
+          </a:xfrm>
+          <a:prstGeom prst="rect">
+            <a:avLst/>
+          </a:prstGeom>
+          <a:noFill/>
+          <a:ln/>
+        </p:spPr>
+        <p:txBody>
+          <a:bodyPr wrap="square" lIns="0" tIns="0" rIns="0" bIns="0" rtlCol="0" anchor="ctr"/>
+          <a:lstStyle/>
+          <a:p>
+            <a:pPr indent="0" marL="0">
+              <a:buNone/>
+            </a:pPr>
+            <a:r>
+              <a:rPr lang="en-US" sz="2700" b="1" dirty="0">
+                <a:solidFill>
+                  <a:srgbClr val="1E3A5F"/>
+                </a:solidFill>
+                <a:latin typeface="游ゴシック" pitchFamily="34" charset="0"/>
+                <a:ea typeface="游ゴシック" pitchFamily="34" charset="-122"/>
+                <a:cs typeface="游ゴシック" pitchFamily="34" charset="-120"/>
+              </a:rPr>
+              <a:t>貢献性 ― 100億円の中身は、関わった全員への貢献</a:t>
+            </a:r>
+            <a:endParaRPr lang="en-US" sz="2700" dirty="0"/>
+          </a:p>
+        </p:txBody>
+      </p:sp>
+      <p:sp>
+        <p:nvSpPr>
+          <p:cNvPr id="4" name="Shape 2"/>
+          <p:cNvSpPr/>
+          <p:nvPr/>
+        </p:nvSpPr>
+        <p:spPr>
+          <a:xfrm>
+            <a:off x="10607040" y="502920"/>
+            <a:ext cx="822960" cy="822960"/>
+          </a:xfrm>
+          <a:prstGeom prst="ellipse">
+            <a:avLst/>
+          </a:prstGeom>
+          <a:solidFill>
+            <a:srgbClr val="C9603F"/>
+          </a:solidFill>
+          <a:ln/>
+          <a:effectLst>
+            <a:outerShdw sx="100000" sy="100000" kx="0" ky="0" algn="bl" rotWithShape="0" blurRad="101600" dist="38100" dir="5400000">
+              <a:srgbClr val="10233A">
+                <a:alpha val="18000"/>
+              </a:srgbClr>
+            </a:outerShdw>
+          </a:effectLst>
+        </p:spPr>
+      </p:sp>
+      <p:sp>
+        <p:nvSpPr>
+          <p:cNvPr id="5" name="Text 3"/>
+          <p:cNvSpPr txBox="1"/>
+          <p:nvPr/>
+        </p:nvSpPr>
+        <p:spPr>
+          <a:xfrm>
+            <a:off x="10607040" y="502920"/>
+            <a:ext cx="822960" cy="822960"/>
+          </a:xfrm>
+          <a:prstGeom prst="rect">
+            <a:avLst/>
+          </a:prstGeom>
+          <a:noFill/>
+          <a:ln/>
+        </p:spPr>
+        <p:txBody>
+          <a:bodyPr wrap="square" lIns="0" tIns="0" rIns="0" bIns="0" rtlCol="0" anchor="ctr"/>
+          <a:lstStyle/>
+          <a:p>
+            <a:pPr algn="ctr" indent="0" marL="0">
+              <a:buNone/>
+            </a:pPr>
+            <a:r>
+              <a:rPr lang="en-US" sz="2880" b="1" dirty="0">
+                <a:solidFill>
+                  <a:srgbClr val="FFFFFF"/>
+                </a:solidFill>
+                <a:latin typeface="游ゴシック" pitchFamily="34" charset="0"/>
+                <a:ea typeface="游ゴシック" pitchFamily="34" charset="-122"/>
+                <a:cs typeface="游ゴシック" pitchFamily="34" charset="-120"/>
+              </a:rPr>
+              <a:t>貢</a:t>
+            </a:r>
+            <a:endParaRPr lang="en-US" sz="2880" dirty="0"/>
+          </a:p>
+        </p:txBody>
+      </p:sp>
+      <p:sp>
+        <p:nvSpPr>
+          <p:cNvPr id="6" name="Text 4"/>
+          <p:cNvSpPr txBox="1"/>
+          <p:nvPr/>
+        </p:nvSpPr>
+        <p:spPr>
+          <a:xfrm>
+            <a:off x="640080" y="1783080"/>
+            <a:ext cx="10881360" cy="4206240"/>
+          </a:xfrm>
+          <a:prstGeom prst="rect">
+            <a:avLst/>
+          </a:prstGeom>
+          <a:noFill/>
+          <a:ln/>
+        </p:spPr>
+        <p:txBody>
+          <a:bodyPr wrap="square" lIns="0" tIns="0" rIns="0" bIns="0" rtlCol="0" anchor="t"/>
+          <a:lstStyle/>
+          <a:p>
+            <a:pPr marL="342900" indent="-342900">
+              <a:lnSpc>
+                <a:spcPct val="128000"/>
+              </a:lnSpc>
+              <a:spcAft>
+                <a:spcPts val="1200"/>
+              </a:spcAft>
+              <a:buSzPct val="100000"/>
+              <a:buChar char="●"/>
+            </a:pPr>
+            <a:r>
+              <a:rPr lang="en-US" sz="1500" dirty="0">
+                <a:solidFill>
+                  <a:srgbClr val="3A3A3A"/>
+                </a:solidFill>
+                <a:latin typeface="游ゴシック" pitchFamily="34" charset="0"/>
+                <a:ea typeface="游ゴシック" pitchFamily="34" charset="-122"/>
+                <a:cs typeface="游ゴシック" pitchFamily="34" charset="-120"/>
+              </a:rPr>
+              <a:t>末端の顧客（本人・家族）：財産ではなく「対話」による安心と幸福度の向上（終活×幸福度の各種調査）</a:t>
+            </a:r>
+            <a:endParaRPr lang="en-US" sz="1500" dirty="0"/>
+          </a:p>
+          <a:p>
+            <a:pPr marL="342900" indent="-342900">
+              <a:lnSpc>
+                <a:spcPct val="128000"/>
+              </a:lnSpc>
+              <a:spcAft>
+                <a:spcPts val="1200"/>
+              </a:spcAft>
+              <a:buSzPct val="100000"/>
+              <a:buChar char="●"/>
+            </a:pPr>
+            <a:r>
+              <a:rPr lang="en-US" sz="1500" dirty="0">
+                <a:solidFill>
+                  <a:srgbClr val="3A3A3A"/>
+                </a:solidFill>
+                <a:latin typeface="游ゴシック" pitchFamily="34" charset="0"/>
+                <a:ea typeface="游ゴシック" pitchFamily="34" charset="-122"/>
+                <a:cs typeface="游ゴシック" pitchFamily="34" charset="-120"/>
+              </a:rPr>
+              <a:t>周辺専門家（税理士・弁護士・不動産・金融等）：新たな受任機会・収益機会の創出（素材①）</a:t>
+            </a:r>
+            <a:endParaRPr lang="en-US" sz="1500" dirty="0"/>
+          </a:p>
+          <a:p>
+            <a:pPr marL="342900" indent="-342900">
+              <a:lnSpc>
+                <a:spcPct val="128000"/>
+              </a:lnSpc>
+              <a:spcAft>
+                <a:spcPts val="1200"/>
+              </a:spcAft>
+              <a:buSzPct val="100000"/>
+              <a:buChar char="●"/>
+            </a:pPr>
+            <a:r>
+              <a:rPr lang="en-US" sz="1500" dirty="0">
+                <a:solidFill>
+                  <a:srgbClr val="3A3A3A"/>
+                </a:solidFill>
+                <a:latin typeface="游ゴシック" pitchFamily="34" charset="0"/>
+                <a:ea typeface="游ゴシック" pitchFamily="34" charset="-122"/>
+                <a:cs typeface="游ゴシック" pitchFamily="34" charset="-120"/>
+              </a:rPr>
+              <a:t>企業：福利厚生導入を通じ「従業員を大切にする法人」への進化を支援</a:t>
+            </a:r>
+            <a:endParaRPr lang="en-US" sz="1500" dirty="0"/>
+          </a:p>
+          <a:p>
+            <a:pPr marL="342900" indent="-342900">
+              <a:lnSpc>
+                <a:spcPct val="128000"/>
+              </a:lnSpc>
+              <a:spcAft>
+                <a:spcPts val="1200"/>
+              </a:spcAft>
+              <a:buSzPct val="100000"/>
+              <a:buChar char="●"/>
+            </a:pPr>
+            <a:r>
+              <a:rPr lang="en-US" sz="1500" dirty="0">
+                <a:solidFill>
+                  <a:srgbClr val="3A3A3A"/>
+                </a:solidFill>
+                <a:latin typeface="游ゴシック" pitchFamily="34" charset="0"/>
+                <a:ea typeface="游ゴシック" pitchFamily="34" charset="-122"/>
+                <a:cs typeface="游ゴシック" pitchFamily="34" charset="-120"/>
+              </a:rPr>
+              <a:t>行政・地域：朝来市 → 岸和田市など、一つの街で実証した連携モデルの横展開</a:t>
+            </a:r>
+            <a:endParaRPr lang="en-US" sz="1500" dirty="0"/>
+          </a:p>
+        </p:txBody>
+      </p:sp>
+      <p:sp>
+        <p:nvSpPr>
+          <p:cNvPr id="7" name="Shape 5"/>
+          <p:cNvSpPr/>
+          <p:nvPr/>
+        </p:nvSpPr>
+        <p:spPr>
+          <a:xfrm>
+            <a:off x="640080" y="4754880"/>
+            <a:ext cx="2468880" cy="1325880"/>
+          </a:xfrm>
+          <a:prstGeom prst="roundRect">
+            <a:avLst>
+              <a:gd name="adj" fmla="val 6897"/>
+            </a:avLst>
+          </a:prstGeom>
+          <a:solidFill>
+            <a:srgbClr val="F6F1EA"/>
+          </a:solidFill>
+          <a:ln/>
+          <a:effectLst>
+            <a:outerShdw sx="100000" sy="100000" kx="0" ky="0" algn="bl" rotWithShape="0" blurRad="101600" dist="38100" dir="5400000">
+              <a:srgbClr val="10233A">
+                <a:alpha val="18000"/>
+              </a:srgbClr>
+            </a:outerShdw>
+          </a:effectLst>
+        </p:spPr>
+      </p:sp>
+      <p:sp>
+        <p:nvSpPr>
+          <p:cNvPr id="8" name="Text 6"/>
+          <p:cNvSpPr txBox="1"/>
+          <p:nvPr/>
+        </p:nvSpPr>
+        <p:spPr>
+          <a:xfrm>
+            <a:off x="822960" y="4937760"/>
+            <a:ext cx="2103120" cy="365760"/>
+          </a:xfrm>
+          <a:prstGeom prst="rect">
+            <a:avLst/>
+          </a:prstGeom>
+          <a:noFill/>
+          <a:ln/>
+        </p:spPr>
+        <p:txBody>
+          <a:bodyPr wrap="square" lIns="0" tIns="0" rIns="0" bIns="0" rtlCol="0" anchor="ctr"/>
+          <a:lstStyle/>
+          <a:p>
+            <a:pPr indent="0" marL="0">
+              <a:buNone/>
+            </a:pPr>
+            <a:r>
+              <a:rPr lang="en-US" sz="1500" b="1" dirty="0">
+                <a:solidFill>
+                  <a:srgbClr val="C9603F"/>
+                </a:solidFill>
+                <a:latin typeface="游ゴシック" pitchFamily="34" charset="0"/>
+                <a:ea typeface="游ゴシック" pitchFamily="34" charset="-122"/>
+                <a:cs typeface="游ゴシック" pitchFamily="34" charset="-120"/>
+              </a:rPr>
+              <a:t>顧客</a:t>
+            </a:r>
+            <a:endParaRPr lang="en-US" sz="1500" dirty="0"/>
+          </a:p>
+        </p:txBody>
+      </p:sp>
+      <p:sp>
+        <p:nvSpPr>
+          <p:cNvPr id="9" name="Text 7"/>
+          <p:cNvSpPr txBox="1"/>
+          <p:nvPr/>
+        </p:nvSpPr>
+        <p:spPr>
+          <a:xfrm>
+            <a:off x="822960" y="5349240"/>
+            <a:ext cx="2103120" cy="640080"/>
+          </a:xfrm>
+          <a:prstGeom prst="rect">
+            <a:avLst/>
+          </a:prstGeom>
+          <a:noFill/>
+          <a:ln/>
+        </p:spPr>
+        <p:txBody>
+          <a:bodyPr wrap="square" lIns="0" tIns="0" rIns="0" bIns="0" rtlCol="0" anchor="t"/>
+          <a:lstStyle/>
+          <a:p>
+            <a:pPr indent="0" marL="0">
+              <a:lnSpc>
+                <a:spcPct val="120000"/>
+              </a:lnSpc>
+              <a:buNone/>
+            </a:pPr>
+            <a:r>
+              <a:rPr lang="en-US" sz="1150" dirty="0">
+                <a:solidFill>
+                  <a:srgbClr val="3A3A3A"/>
+                </a:solidFill>
+                <a:latin typeface="游ゴシック" pitchFamily="34" charset="0"/>
+                <a:ea typeface="游ゴシック" pitchFamily="34" charset="-122"/>
+                <a:cs typeface="游ゴシック" pitchFamily="34" charset="-120"/>
+              </a:rPr>
+              <a:t>対話による安心</a:t>
+            </a:r>
+            <a:endParaRPr lang="en-US" sz="1150" dirty="0"/>
+          </a:p>
+        </p:txBody>
+      </p:sp>
+      <p:sp>
+        <p:nvSpPr>
+          <p:cNvPr id="10" name="Shape 8"/>
+          <p:cNvSpPr/>
+          <p:nvPr/>
+        </p:nvSpPr>
+        <p:spPr>
+          <a:xfrm>
+            <a:off x="3383280" y="4754880"/>
+            <a:ext cx="2468880" cy="1325880"/>
+          </a:xfrm>
+          <a:prstGeom prst="roundRect">
+            <a:avLst>
+              <a:gd name="adj" fmla="val 6897"/>
+            </a:avLst>
+          </a:prstGeom>
+          <a:solidFill>
+            <a:srgbClr val="F6F1EA"/>
+          </a:solidFill>
+          <a:ln/>
+          <a:effectLst>
+            <a:outerShdw sx="100000" sy="100000" kx="0" ky="0" algn="bl" rotWithShape="0" blurRad="101600" dist="38100" dir="5400000">
+              <a:srgbClr val="10233A">
+                <a:alpha val="18000"/>
+              </a:srgbClr>
+            </a:outerShdw>
+          </a:effectLst>
+        </p:spPr>
+      </p:sp>
+      <p:sp>
+        <p:nvSpPr>
+          <p:cNvPr id="11" name="Text 9"/>
+          <p:cNvSpPr txBox="1"/>
+          <p:nvPr/>
+        </p:nvSpPr>
+        <p:spPr>
+          <a:xfrm>
+            <a:off x="3566160" y="4937760"/>
+            <a:ext cx="2103120" cy="365760"/>
+          </a:xfrm>
+          <a:prstGeom prst="rect">
+            <a:avLst/>
+          </a:prstGeom>
+          <a:noFill/>
+          <a:ln/>
+        </p:spPr>
+        <p:txBody>
+          <a:bodyPr wrap="square" lIns="0" tIns="0" rIns="0" bIns="0" rtlCol="0" anchor="ctr"/>
+          <a:lstStyle/>
+          <a:p>
+            <a:pPr indent="0" marL="0">
+              <a:buNone/>
+            </a:pPr>
+            <a:r>
+              <a:rPr lang="en-US" sz="1500" b="1" dirty="0">
+                <a:solidFill>
+                  <a:srgbClr val="C9603F"/>
+                </a:solidFill>
+                <a:latin typeface="游ゴシック" pitchFamily="34" charset="0"/>
+                <a:ea typeface="游ゴシック" pitchFamily="34" charset="-122"/>
+                <a:cs typeface="游ゴシック" pitchFamily="34" charset="-120"/>
+              </a:rPr>
+              <a:t>専門家</a:t>
+            </a:r>
+            <a:endParaRPr lang="en-US" sz="1500" dirty="0"/>
+          </a:p>
+        </p:txBody>
+      </p:sp>
+      <p:sp>
+        <p:nvSpPr>
+          <p:cNvPr id="12" name="Text 10"/>
+          <p:cNvSpPr txBox="1"/>
+          <p:nvPr/>
+        </p:nvSpPr>
+        <p:spPr>
+          <a:xfrm>
+            <a:off x="3566160" y="5349240"/>
+            <a:ext cx="2103120" cy="640080"/>
+          </a:xfrm>
+          <a:prstGeom prst="rect">
+            <a:avLst/>
+          </a:prstGeom>
+          <a:noFill/>
+          <a:ln/>
+        </p:spPr>
+        <p:txBody>
+          <a:bodyPr wrap="square" lIns="0" tIns="0" rIns="0" bIns="0" rtlCol="0" anchor="t"/>
+          <a:lstStyle/>
+          <a:p>
+            <a:pPr indent="0" marL="0">
+              <a:lnSpc>
+                <a:spcPct val="120000"/>
+              </a:lnSpc>
+              <a:buNone/>
+            </a:pPr>
+            <a:r>
+              <a:rPr lang="en-US" sz="1150" dirty="0">
+                <a:solidFill>
+                  <a:srgbClr val="3A3A3A"/>
+                </a:solidFill>
+                <a:latin typeface="游ゴシック" pitchFamily="34" charset="0"/>
+                <a:ea typeface="游ゴシック" pitchFamily="34" charset="-122"/>
+                <a:cs typeface="游ゴシック" pitchFamily="34" charset="-120"/>
+              </a:rPr>
+              <a:t>新たな受任機会</a:t>
+            </a:r>
+            <a:endParaRPr lang="en-US" sz="1150" dirty="0"/>
+          </a:p>
+        </p:txBody>
+      </p:sp>
+      <p:sp>
+        <p:nvSpPr>
+          <p:cNvPr id="13" name="Shape 11"/>
+          <p:cNvSpPr/>
+          <p:nvPr/>
+        </p:nvSpPr>
+        <p:spPr>
+          <a:xfrm>
+            <a:off x="6126480" y="4754880"/>
+            <a:ext cx="2468880" cy="1325880"/>
+          </a:xfrm>
+          <a:prstGeom prst="roundRect">
+            <a:avLst>
+              <a:gd name="adj" fmla="val 6897"/>
+            </a:avLst>
+          </a:prstGeom>
+          <a:solidFill>
+            <a:srgbClr val="F6F1EA"/>
+          </a:solidFill>
+          <a:ln/>
+          <a:effectLst>
+            <a:outerShdw sx="100000" sy="100000" kx="0" ky="0" algn="bl" rotWithShape="0" blurRad="101600" dist="38100" dir="5400000">
+              <a:srgbClr val="10233A">
+                <a:alpha val="18000"/>
+              </a:srgbClr>
+            </a:outerShdw>
+          </a:effectLst>
+        </p:spPr>
+      </p:sp>
+      <p:sp>
+        <p:nvSpPr>
+          <p:cNvPr id="14" name="Text 12"/>
+          <p:cNvSpPr txBox="1"/>
+          <p:nvPr/>
+        </p:nvSpPr>
+        <p:spPr>
+          <a:xfrm>
+            <a:off x="6309360" y="4937760"/>
+            <a:ext cx="2103120" cy="365760"/>
+          </a:xfrm>
+          <a:prstGeom prst="rect">
+            <a:avLst/>
+          </a:prstGeom>
+          <a:noFill/>
+          <a:ln/>
+        </p:spPr>
+        <p:txBody>
+          <a:bodyPr wrap="square" lIns="0" tIns="0" rIns="0" bIns="0" rtlCol="0" anchor="ctr"/>
+          <a:lstStyle/>
+          <a:p>
+            <a:pPr indent="0" marL="0">
+              <a:buNone/>
+            </a:pPr>
+            <a:r>
+              <a:rPr lang="en-US" sz="1500" b="1" dirty="0">
+                <a:solidFill>
+                  <a:srgbClr val="C9603F"/>
+                </a:solidFill>
+                <a:latin typeface="游ゴシック" pitchFamily="34" charset="0"/>
+                <a:ea typeface="游ゴシック" pitchFamily="34" charset="-122"/>
+                <a:cs typeface="游ゴシック" pitchFamily="34" charset="-120"/>
+              </a:rPr>
+              <a:t>企業</a:t>
+            </a:r>
+            <a:endParaRPr lang="en-US" sz="1500" dirty="0"/>
+          </a:p>
+        </p:txBody>
+      </p:sp>
+      <p:sp>
+        <p:nvSpPr>
+          <p:cNvPr id="15" name="Text 13"/>
+          <p:cNvSpPr txBox="1"/>
+          <p:nvPr/>
+        </p:nvSpPr>
+        <p:spPr>
+          <a:xfrm>
+            <a:off x="6309360" y="5349240"/>
+            <a:ext cx="2103120" cy="640080"/>
+          </a:xfrm>
+          <a:prstGeom prst="rect">
+            <a:avLst/>
+          </a:prstGeom>
+          <a:noFill/>
+          <a:ln/>
+        </p:spPr>
+        <p:txBody>
+          <a:bodyPr wrap="square" lIns="0" tIns="0" rIns="0" bIns="0" rtlCol="0" anchor="t"/>
+          <a:lstStyle/>
+          <a:p>
+            <a:pPr indent="0" marL="0">
+              <a:lnSpc>
+                <a:spcPct val="120000"/>
+              </a:lnSpc>
+              <a:buNone/>
+            </a:pPr>
+            <a:r>
+              <a:rPr lang="en-US" sz="1150" dirty="0">
+                <a:solidFill>
+                  <a:srgbClr val="3A3A3A"/>
+                </a:solidFill>
+                <a:latin typeface="游ゴシック" pitchFamily="34" charset="0"/>
+                <a:ea typeface="游ゴシック" pitchFamily="34" charset="-122"/>
+                <a:cs typeface="游ゴシック" pitchFamily="34" charset="-120"/>
+              </a:rPr>
+              <a:t>従業員を大切にする法人へ</a:t>
+            </a:r>
+            <a:endParaRPr lang="en-US" sz="1150" dirty="0"/>
+          </a:p>
+        </p:txBody>
+      </p:sp>
+      <p:sp>
+        <p:nvSpPr>
+          <p:cNvPr id="16" name="Shape 14"/>
+          <p:cNvSpPr/>
+          <p:nvPr/>
+        </p:nvSpPr>
+        <p:spPr>
+          <a:xfrm>
+            <a:off x="8869680" y="4754880"/>
+            <a:ext cx="2468880" cy="1325880"/>
+          </a:xfrm>
+          <a:prstGeom prst="roundRect">
+            <a:avLst>
+              <a:gd name="adj" fmla="val 6897"/>
+            </a:avLst>
+          </a:prstGeom>
+          <a:solidFill>
+            <a:srgbClr val="F6F1EA"/>
+          </a:solidFill>
+          <a:ln/>
+          <a:effectLst>
+            <a:outerShdw sx="100000" sy="100000" kx="0" ky="0" algn="bl" rotWithShape="0" blurRad="101600" dist="38100" dir="5400000">
+              <a:srgbClr val="10233A">
+                <a:alpha val="18000"/>
+              </a:srgbClr>
+            </a:outerShdw>
+          </a:effectLst>
+        </p:spPr>
+      </p:sp>
+      <p:sp>
+        <p:nvSpPr>
+          <p:cNvPr id="17" name="Text 15"/>
+          <p:cNvSpPr txBox="1"/>
+          <p:nvPr/>
+        </p:nvSpPr>
+        <p:spPr>
+          <a:xfrm>
+            <a:off x="9052560" y="4937760"/>
+            <a:ext cx="2103120" cy="365760"/>
+          </a:xfrm>
+          <a:prstGeom prst="rect">
+            <a:avLst/>
+          </a:prstGeom>
+          <a:noFill/>
+          <a:ln/>
+        </p:spPr>
+        <p:txBody>
+          <a:bodyPr wrap="square" lIns="0" tIns="0" rIns="0" bIns="0" rtlCol="0" anchor="ctr"/>
+          <a:lstStyle/>
+          <a:p>
+            <a:pPr indent="0" marL="0">
+              <a:buNone/>
+            </a:pPr>
+            <a:r>
+              <a:rPr lang="en-US" sz="1500" b="1" dirty="0">
+                <a:solidFill>
+                  <a:srgbClr val="C9603F"/>
+                </a:solidFill>
+                <a:latin typeface="游ゴシック" pitchFamily="34" charset="0"/>
+                <a:ea typeface="游ゴシック" pitchFamily="34" charset="-122"/>
+                <a:cs typeface="游ゴシック" pitchFamily="34" charset="-120"/>
+              </a:rPr>
+              <a:t>行政・地域</a:t>
+            </a:r>
+            <a:endParaRPr lang="en-US" sz="1500" dirty="0"/>
+          </a:p>
+        </p:txBody>
+      </p:sp>
+      <p:sp>
+        <p:nvSpPr>
+          <p:cNvPr id="18" name="Text 16"/>
+          <p:cNvSpPr txBox="1"/>
+          <p:nvPr/>
+        </p:nvSpPr>
+        <p:spPr>
+          <a:xfrm>
+            <a:off x="9052560" y="5349240"/>
+            <a:ext cx="2103120" cy="640080"/>
+          </a:xfrm>
+          <a:prstGeom prst="rect">
+            <a:avLst/>
+          </a:prstGeom>
+          <a:noFill/>
+          <a:ln/>
+        </p:spPr>
+        <p:txBody>
+          <a:bodyPr wrap="square" lIns="0" tIns="0" rIns="0" bIns="0" rtlCol="0" anchor="t"/>
+          <a:lstStyle/>
+          <a:p>
+            <a:pPr indent="0" marL="0">
+              <a:lnSpc>
+                <a:spcPct val="120000"/>
+              </a:lnSpc>
+              <a:buNone/>
+            </a:pPr>
+            <a:r>
+              <a:rPr lang="en-US" sz="1150" dirty="0">
+                <a:solidFill>
+                  <a:srgbClr val="3A3A3A"/>
+                </a:solidFill>
+                <a:latin typeface="游ゴシック" pitchFamily="34" charset="0"/>
+                <a:ea typeface="游ゴシック" pitchFamily="34" charset="-122"/>
+                <a:cs typeface="游ゴシック" pitchFamily="34" charset="-120"/>
+              </a:rPr>
+              <a:t>連携モデルの横展開</a:t>
+            </a:r>
+            <a:endParaRPr lang="en-US" sz="1150" dirty="0"/>
+          </a:p>
+        </p:txBody>
+      </p:sp>
+      <p:sp>
+        <p:nvSpPr>
+          <p:cNvPr id="19" name="Text 17"/>
+          <p:cNvSpPr txBox="1"/>
+          <p:nvPr/>
+        </p:nvSpPr>
+        <p:spPr>
+          <a:xfrm>
+            <a:off x="11551615" y="6400800"/>
+            <a:ext cx="457200" cy="274320"/>
+          </a:xfrm>
+          <a:prstGeom prst="rect">
+            <a:avLst/>
+          </a:prstGeom>
+          <a:noFill/>
+          <a:ln/>
+        </p:spPr>
+        <p:txBody>
+          <a:bodyPr wrap="square" lIns="0" tIns="0" rIns="0" bIns="0" rtlCol="0" anchor="ctr"/>
+          <a:lstStyle/>
+          <a:p>
+            <a:pPr algn="r" indent="0" marL="0">
+              <a:buNone/>
+            </a:pPr>
+            <a:r>
+              <a:rPr lang="en-US" sz="1000" dirty="0">
+                <a:solidFill>
+                  <a:srgbClr val="6B6B6B"/>
+                </a:solidFill>
+                <a:latin typeface="游ゴシック" pitchFamily="34" charset="0"/>
+                <a:ea typeface="游ゴシック" pitchFamily="34" charset="-122"/>
+                <a:cs typeface="游ゴシック" pitchFamily="34" charset="-120"/>
+              </a:rPr>
+              <a:t>14</a:t>
+            </a:r>
+            <a:endParaRPr lang="en-US" sz="1000" dirty="0"/>
+          </a:p>
+        </p:txBody>
+      </p:sp>
+    </p:spTree>
+  </p:cSld>
+  <p:clrMapOvr>
+    <a:masterClrMapping/>
+  </p:clrMapOvr>
+</p:sld>
+</file>
+
+<file path=ppt/slides/slide15.xml><?xml version="1.0" encoding="utf-8"?>
+<p:sld xmlns:a="http://schemas.openxmlformats.org/drawingml/2006/main" xmlns:r="http://schemas.openxmlformats.org/officeDocument/2006/relationships" xmlns:p="http://schemas.openxmlformats.org/presentationml/2006/main">
+  <p:cSld name="Slide 15">
     <p:bg>
       <p:bgPr>
         <a:solidFill>
@@ -5397,7 +6537,7 @@
               <a:buNone/>
             </a:pPr>
             <a:r>
-              <a:rPr lang="en-US" sz="1700" b="1" dirty="0">
+              <a:rPr lang="en-US" sz="1550" b="1" dirty="0">
                 <a:solidFill>
                   <a:srgbClr val="FFFFFF"/>
                 </a:solidFill>
@@ -5405,9 +6545,9 @@
                 <a:ea typeface="游ゴシック" pitchFamily="34" charset="-122"/>
                 <a:cs typeface="游ゴシック" pitchFamily="34" charset="-120"/>
               </a:rPr>
-              <a:t>二つのファネル（顧客・人材）で、FC100事業所体制へ拡大</a:t>
-            </a:r>
-            <a:endParaRPr lang="en-US" sz="1700" dirty="0"/>
+              <a:t>二つのファネル（顧客・人材）でFC100事業所へ拡大 ＋ 教育コンテンツの金融機関等への採用展開</a:t>
+            </a:r>
+            <a:endParaRPr lang="en-US" sz="1550" dirty="0"/>
           </a:p>
         </p:txBody>
       </p:sp>
@@ -5586,7 +6726,7 @@
                 <a:ea typeface="游ゴシック" pitchFamily="34" charset="-122"/>
                 <a:cs typeface="游ゴシック" pitchFamily="34" charset="-120"/>
               </a:rPr>
-              <a:t>⑤ 成長性・市場性 ― 二つのファネルとFC100事業所</a:t>
+              <a:t>⑤ 成長性・市場性 ― 二つのファネルとFC100事業所、教育コンテンツの金融機関等への採用展開</a:t>
             </a:r>
             <a:endParaRPr lang="en-US" sz="1300" dirty="0"/>
           </a:p>

--- a/manuscript/革新ビジネスアワード2026_ファイナル_100億市場ストーリー整理.pptx
+++ b/manuscript/革新ビジネスアワード2026_ファイナル_100億市場ストーリー整理.pptx
@@ -4300,7 +4300,24 @@
                 <a:ea typeface="游ゴシック" pitchFamily="34" charset="-122"/>
                 <a:cs typeface="游ゴシック" pitchFamily="34" charset="-120"/>
               </a:rPr>
-              <a:t>全国教育インフラ化</a:t>
+              <a:t>繋ぐノートサポート</a:t>
+            </a:r>
+            <a:endParaRPr lang="en-US" sz="1400" dirty="0"/>
+          </a:p>
+          <a:p>
+            <a:pPr indent="0" marL="0">
+              <a:buNone/>
+            </a:pPr>
+            <a:r>
+              <a:rPr lang="en-US" sz="1400" b="1" dirty="0">
+                <a:solidFill>
+                  <a:srgbClr val="1E3A5F"/>
+                </a:solidFill>
+                <a:latin typeface="游ゴシック" pitchFamily="34" charset="0"/>
+                <a:ea typeface="游ゴシック" pitchFamily="34" charset="-122"/>
+                <a:cs typeface="游ゴシック" pitchFamily="34" charset="-120"/>
+              </a:rPr>
+              <a:t>アドバイザー®の輩出</a:t>
             </a:r>
             <a:endParaRPr lang="en-US" sz="1400" dirty="0"/>
           </a:p>
@@ -4342,7 +4359,7 @@
                 <a:ea typeface="游ゴシック" pitchFamily="34" charset="-122"/>
                 <a:cs typeface="游ゴシック" pitchFamily="34" charset="-120"/>
               </a:rPr>
-              <a:t>「生きる準備」を教える人</a:t>
+              <a:t>業種を越えて「生きる準備」</a:t>
             </a:r>
             <a:endParaRPr lang="en-US" sz="1100" dirty="0"/>
           </a:p>
@@ -4362,7 +4379,7 @@
                 <a:ea typeface="游ゴシック" pitchFamily="34" charset="-122"/>
                 <a:cs typeface="游ゴシック" pitchFamily="34" charset="-120"/>
               </a:rPr>
-              <a:t>を全国に輩出</a:t>
+              <a:t>を届ける人を全国に</a:t>
             </a:r>
             <a:endParaRPr lang="en-US" sz="1100" dirty="0"/>
           </a:p>

--- a/manuscript/革新ビジネスアワード2026_ファイナル_100億市場ストーリー整理.pptx
+++ b/manuscript/革新ビジネスアワード2026_ファイナル_100億市場ストーリー整理.pptx
@@ -20,9 +20,10 @@
     <p:sldId id="268" r:id="rId14"/>
     <p:sldId id="269" r:id="rId15"/>
     <p:sldId id="270" r:id="rId16"/>
+    <p:sldId id="271" r:id="rId17"/>
   </p:sldIdLst>
   <p:notesMasterIdLst>
-    <p:notesMasterId r:id="rId17"/>
+    <p:notesMasterId r:id="rId18"/>
   </p:notesMasterIdLst>
   <p:sldSz cx="12191695" cy="6858000"/>
   <p:notesSz cx="6858000" cy="12191695"/>
@@ -1327,6 +1328,94 @@
             <a:fld id="{F7021451-1387-4CA6-816F-3879F97B5CBC}" type="slidenum">
               <a:rPr lang="en-US"/>
               <a:t>15</a:t>
+            </a:fld>
+            <a:endParaRPr lang="en-US"/>
+          </a:p>
+        </p:txBody>
+      </p:sp>
+    </p:spTree>
+    <p:extLst>
+      <p:ext uri="{BB962C8B-B14F-4D97-AF65-F5344CB8AC3E}">
+        <p14:creationId xmlns:p14="http://schemas.microsoft.com/office/powerpoint/2010/main" val="1024086991"/>
+      </p:ext>
+    </p:extLst>
+  </p:cSld>
+  <p:clrMapOvr>
+    <a:masterClrMapping/>
+  </p:clrMapOvr>
+</p:notes>
+</file>
+
+<file path=ppt/notesSlides/notesSlide16.xml><?xml version="1.0" encoding="utf-8"?>
+<p:notes xmlns:a="http://schemas.openxmlformats.org/drawingml/2006/main" xmlns:r="http://schemas.openxmlformats.org/officeDocument/2006/relationships" xmlns:p="http://schemas.openxmlformats.org/presentationml/2006/main">
+  <p:cSld>
+    <p:spTree>
+      <p:nvGrpSpPr>
+        <p:cNvPr id="1" name=""/>
+        <p:cNvGrpSpPr/>
+        <p:nvPr/>
+      </p:nvGrpSpPr>
+      <p:grpSpPr>
+        <a:xfrm>
+          <a:off x="0" y="0"/>
+          <a:ext cx="0" cy="0"/>
+          <a:chOff x="0" y="0"/>
+          <a:chExt cx="0" cy="0"/>
+        </a:xfrm>
+      </p:grpSpPr>
+      <p:sp>
+        <p:nvSpPr>
+          <p:cNvPr id="2" name="Slide Image Placeholder 1"/>
+          <p:cNvSpPr>
+            <a:spLocks noGrp="1" noRot="1" noChangeAspect="1"/>
+          </p:cNvSpPr>
+          <p:nvPr>
+            <p:ph type="sldImg"/>
+          </p:nvPr>
+        </p:nvSpPr>
+        <p:spPr/>
+      </p:sp>
+      <p:sp>
+        <p:nvSpPr>
+          <p:cNvPr id="3" name="Notes Placeholder 2"/>
+          <p:cNvSpPr>
+            <a:spLocks noGrp="1"/>
+          </p:cNvSpPr>
+          <p:nvPr>
+            <p:ph type="body" idx="1"/>
+          </p:nvPr>
+        </p:nvSpPr>
+        <p:spPr/>
+        <p:txBody>
+          <a:bodyPr/>
+          <a:lstStyle/>
+          <a:p>
+            <a:r>
+              <a:rPr lang="en-US" dirty="0"/>
+              <a:t/>
+            </a:r>
+            <a:endParaRPr lang="en-US" dirty="0"/>
+          </a:p>
+        </p:txBody>
+      </p:sp>
+      <p:sp>
+        <p:nvSpPr>
+          <p:cNvPr id="4" name="Slide Number Placeholder 3"/>
+          <p:cNvSpPr>
+            <a:spLocks noGrp="1"/>
+          </p:cNvSpPr>
+          <p:nvPr>
+            <p:ph type="sldNum" sz="quarter" idx="10"/>
+          </p:nvPr>
+        </p:nvSpPr>
+        <p:spPr/>
+        <p:txBody>
+          <a:bodyPr/>
+          <a:lstStyle/>
+          <a:p>
+            <a:fld id="{F7021451-1387-4CA6-816F-3879F97B5CBC}" type="slidenum">
+              <a:rPr lang="en-US"/>
+              <a:t>16</a:t>
             </a:fld>
             <a:endParaRPr lang="en-US"/>
           </a:p>
@@ -2457,7 +2546,7 @@
                 <a:ea typeface="游ゴシック" pitchFamily="34" charset="-122"/>
                 <a:cs typeface="游ゴシック" pitchFamily="34" charset="-120"/>
               </a:rPr>
-              <a:t>革新ビジネスアワード2026　ファイナル　ストーリー整理資料</a:t>
+              <a:t>革新ビジネスアワード2026　ファイナル　プレゼンテーション資料（ドラフト）</a:t>
             </a:r>
             <a:endParaRPr lang="en-US" sz="1400" dirty="0"/>
           </a:p>
@@ -2675,7 +2764,7 @@
                 <a:ea typeface="游ゴシック" pitchFamily="34" charset="-122"/>
                 <a:cs typeface="游ゴシック" pitchFamily="34" charset="-120"/>
               </a:rPr>
-              <a:t>代表取締役　松本 恵　／　ストーリー整理用ドラフト（社内検討資料）</a:t>
+              <a:t>代表取締役　松本 恵　／　事務局（加藤様）事前共有用ドラフト</a:t>
             </a:r>
             <a:endParaRPr lang="en-US" sz="1300" dirty="0"/>
           </a:p>
@@ -2746,7 +2835,7 @@
                 <a:ea typeface="游ゴシック" pitchFamily="34" charset="-122"/>
                 <a:cs typeface="游ゴシック" pitchFamily="34" charset="-120"/>
               </a:rPr>
-              <a:t>03 / GROWTH</a:t>
+              <a:t>02 / PROFITABILITY</a:t>
             </a:r>
             <a:endParaRPr lang="en-US" sz="1300" dirty="0"/>
           </a:p>
@@ -2785,7 +2874,7 @@
                 <a:ea typeface="游ゴシック" pitchFamily="34" charset="-122"/>
                 <a:cs typeface="游ゴシック" pitchFamily="34" charset="-120"/>
               </a:rPr>
-              <a:t>成長性 ― 二つのファネルが、経済圏をさらに広げる</a:t>
+              <a:t>収益性 ― 自社の売上ではなく、創出した経済圏で語る</a:t>
             </a:r>
             <a:endParaRPr lang="en-US" sz="2700" dirty="0"/>
           </a:p>
@@ -2851,7 +2940,7 @@
                 <a:ea typeface="游ゴシック" pitchFamily="34" charset="-122"/>
                 <a:cs typeface="游ゴシック" pitchFamily="34" charset="-120"/>
               </a:rPr>
-              <a:t>成</a:t>
+              <a:t>収</a:t>
             </a:r>
             <a:endParaRPr lang="en-US" sz="2880" dirty="0"/>
           </a:p>
@@ -2897,7 +2986,7 @@
                 <a:ea typeface="游ゴシック" pitchFamily="34" charset="-122"/>
                 <a:cs typeface="游ゴシック" pitchFamily="34" charset="-120"/>
               </a:rPr>
-              <a:t>顧客ファネル：ACP（人生会議）をフロントに据え、相続対策に着手する母数を構造的に拡大する仕組み（素材②）</a:t>
+              <a:t>自社単体の売上（約5,000万円）だけを見れば小さく映るが、hubとして周辺専門家にもたらした経済圏は約100億円</a:t>
             </a:r>
             <a:endParaRPr lang="en-US" sz="1500" dirty="0"/>
           </a:p>
@@ -2921,7 +3010,7 @@
                 <a:ea typeface="游ゴシック" pitchFamily="34" charset="-122"/>
                 <a:cs typeface="游ゴシック" pitchFamily="34" charset="-120"/>
               </a:rPr>
-              <a:t>人材ファネル：資格講座の卒業生が「講師デビュー」し、自ら次の集客・紹介導線を生み出す自己増殖構造（素材③）</a:t>
+              <a:t>信用金庫への新規資金導入 約7億円、法人バルクM&amp;A 2億円など、具体的な実例が裏付け（素材①）</a:t>
             </a:r>
             <a:endParaRPr lang="en-US" sz="1500" dirty="0"/>
           </a:p>
@@ -2945,7 +3034,7 @@
                 <a:ea typeface="游ゴシック" pitchFamily="34" charset="-122"/>
                 <a:cs typeface="游ゴシック" pitchFamily="34" charset="-120"/>
               </a:rPr>
-              <a:t>二つのファネルが重なり合うことで、約100億円の経済圏をさらに拡大し、3年後FC100事業所という成長サイクルへつながる</a:t>
+              <a:t>「繋ぐグループ全体の売上」という表現は“事業間シナジー”の指標として使ってよいと事務局（加藤氏）からも確認済み</a:t>
             </a:r>
             <a:endParaRPr lang="en-US" sz="1500" dirty="0"/>
           </a:p>
@@ -2959,8 +3048,8 @@
         </p:nvSpPr>
         <p:spPr>
           <a:xfrm>
-            <a:off x="640080" y="4754880"/>
-            <a:ext cx="3383280" cy="1371600"/>
+            <a:off x="640080" y="4572000"/>
+            <a:ext cx="3200400" cy="1371600"/>
           </a:xfrm>
           <a:prstGeom prst="roundRect">
             <a:avLst>
@@ -2988,7 +3077,46 @@
         </p:nvSpPr>
         <p:spPr>
           <a:xfrm>
-            <a:off x="868680" y="4956048"/>
+            <a:off x="777240" y="4754880"/>
+            <a:ext cx="2926080" cy="640080"/>
+          </a:xfrm>
+          <a:prstGeom prst="rect">
+            <a:avLst/>
+          </a:prstGeom>
+          <a:noFill/>
+          <a:ln/>
+        </p:spPr>
+        <p:txBody>
+          <a:bodyPr wrap="square" lIns="0" tIns="0" rIns="0" bIns="0" rtlCol="0" anchor="ctr"/>
+          <a:lstStyle/>
+          <a:p>
+            <a:pPr algn="ctr" indent="0" marL="0">
+              <a:buNone/>
+            </a:pPr>
+            <a:r>
+              <a:rPr lang="en-US" sz="2400" b="1" dirty="0">
+                <a:solidFill>
+                  <a:srgbClr val="1E3A5F"/>
+                </a:solidFill>
+                <a:latin typeface="游ゴシック" pitchFamily="34" charset="0"/>
+                <a:ea typeface="游ゴシック" pitchFamily="34" charset="-122"/>
+                <a:cs typeface="游ゴシック" pitchFamily="34" charset="-120"/>
+              </a:rPr>
+              <a:t>5,000万円</a:t>
+            </a:r>
+            <a:endParaRPr lang="en-US" sz="2400" dirty="0"/>
+          </a:p>
+        </p:txBody>
+      </p:sp>
+      <p:sp>
+        <p:nvSpPr>
+          <p:cNvPr id="9" name="Text 7"/>
+          <p:cNvSpPr txBox="1"/>
+          <p:nvPr/>
+        </p:nvSpPr>
+        <p:spPr>
+          <a:xfrm>
+            <a:off x="777240" y="5440680"/>
             <a:ext cx="2926080" cy="411480"/>
           </a:xfrm>
           <a:prstGeom prst="rect">
@@ -3001,61 +3129,19 @@
           <a:bodyPr wrap="square" lIns="0" tIns="0" rIns="0" bIns="0" rtlCol="0" anchor="ctr"/>
           <a:lstStyle/>
           <a:p>
-            <a:pPr indent="0" marL="0">
-              <a:buNone/>
-            </a:pPr>
-            <a:r>
-              <a:rPr lang="en-US" sz="1600" b="1" dirty="0">
-                <a:solidFill>
-                  <a:srgbClr val="1E3A5F"/>
-                </a:solidFill>
-                <a:latin typeface="游ゴシック" pitchFamily="34" charset="0"/>
-                <a:ea typeface="游ゴシック" pitchFamily="34" charset="-122"/>
-                <a:cs typeface="游ゴシック" pitchFamily="34" charset="-120"/>
-              </a:rPr>
-              <a:t>顧客ファネル</a:t>
-            </a:r>
-            <a:endParaRPr lang="en-US" sz="1600" dirty="0"/>
-          </a:p>
-        </p:txBody>
-      </p:sp>
-      <p:sp>
-        <p:nvSpPr>
-          <p:cNvPr id="9" name="Text 7"/>
-          <p:cNvSpPr txBox="1"/>
-          <p:nvPr/>
-        </p:nvSpPr>
-        <p:spPr>
-          <a:xfrm>
-            <a:off x="868680" y="5413248"/>
-            <a:ext cx="2926080" cy="594360"/>
-          </a:xfrm>
-          <a:prstGeom prst="rect">
-            <a:avLst/>
-          </a:prstGeom>
-          <a:noFill/>
-          <a:ln/>
-        </p:spPr>
-        <p:txBody>
-          <a:bodyPr wrap="square" lIns="0" tIns="0" rIns="0" bIns="0" rtlCol="0" anchor="t"/>
-          <a:lstStyle/>
-          <a:p>
-            <a:pPr indent="0" marL="0">
-              <a:lnSpc>
-                <a:spcPct val="125000"/>
-              </a:lnSpc>
+            <a:pPr algn="ctr" indent="0" marL="0">
               <a:buNone/>
             </a:pPr>
             <a:r>
               <a:rPr lang="en-US" sz="1250" dirty="0">
                 <a:solidFill>
-                  <a:srgbClr val="3A3A3A"/>
-                </a:solidFill>
-                <a:latin typeface="游ゴシック" pitchFamily="34" charset="0"/>
-                <a:ea typeface="游ゴシック" pitchFamily="34" charset="-122"/>
-                <a:cs typeface="游ゴシック" pitchFamily="34" charset="-120"/>
-              </a:rPr>
-              <a:t>ACP（人生会議）が入口</a:t>
+                  <a:srgbClr val="6B6B6B"/>
+                </a:solidFill>
+                <a:latin typeface="游ゴシック" pitchFamily="34" charset="0"/>
+                <a:ea typeface="游ゴシック" pitchFamily="34" charset="-122"/>
+                <a:cs typeface="游ゴシック" pitchFamily="34" charset="-120"/>
+              </a:rPr>
+              <a:t>自社単体</a:t>
             </a:r>
             <a:endParaRPr lang="en-US" sz="1250" dirty="0"/>
           </a:p>
@@ -3063,14 +3149,53 @@
       </p:sp>
       <p:sp>
         <p:nvSpPr>
-          <p:cNvPr id="10" name="Shape 8"/>
+          <p:cNvPr id="10" name="Text 8"/>
+          <p:cNvSpPr txBox="1"/>
+          <p:nvPr/>
+        </p:nvSpPr>
+        <p:spPr>
+          <a:xfrm>
+            <a:off x="3858768" y="4983480"/>
+            <a:ext cx="374904" cy="548640"/>
+          </a:xfrm>
+          <a:prstGeom prst="rect">
+            <a:avLst/>
+          </a:prstGeom>
+          <a:noFill/>
+          <a:ln/>
+        </p:spPr>
+        <p:txBody>
+          <a:bodyPr wrap="square" lIns="0" tIns="0" rIns="0" bIns="0" rtlCol="0" anchor="ctr"/>
+          <a:lstStyle/>
+          <a:p>
+            <a:pPr algn="ctr" indent="0" marL="0">
+              <a:buNone/>
+            </a:pPr>
+            <a:r>
+              <a:rPr lang="en-US" sz="2000" b="1" dirty="0">
+                <a:solidFill>
+                  <a:srgbClr val="C9603F"/>
+                </a:solidFill>
+                <a:latin typeface="游ゴシック" pitchFamily="34" charset="0"/>
+                <a:ea typeface="游ゴシック" pitchFamily="34" charset="-122"/>
+                <a:cs typeface="游ゴシック" pitchFamily="34" charset="-120"/>
+              </a:rPr>
+              <a:t>→</a:t>
+            </a:r>
+            <a:endParaRPr lang="en-US" sz="2000" dirty="0"/>
+          </a:p>
+        </p:txBody>
+      </p:sp>
+      <p:sp>
+        <p:nvSpPr>
+          <p:cNvPr id="11" name="Shape 9"/>
           <p:cNvSpPr/>
           <p:nvPr/>
         </p:nvSpPr>
         <p:spPr>
           <a:xfrm>
-            <a:off x="4297680" y="4754880"/>
-            <a:ext cx="3383280" cy="1371600"/>
+            <a:off x="4251960" y="4572000"/>
+            <a:ext cx="3200400" cy="1371600"/>
           </a:xfrm>
           <a:prstGeom prst="roundRect">
             <a:avLst>
@@ -3092,13 +3217,52 @@
       </p:sp>
       <p:sp>
         <p:nvSpPr>
-          <p:cNvPr id="11" name="Text 9"/>
-          <p:cNvSpPr txBox="1"/>
-          <p:nvPr/>
-        </p:nvSpPr>
-        <p:spPr>
-          <a:xfrm>
-            <a:off x="4526280" y="4956048"/>
+          <p:cNvPr id="12" name="Text 10"/>
+          <p:cNvSpPr txBox="1"/>
+          <p:nvPr/>
+        </p:nvSpPr>
+        <p:spPr>
+          <a:xfrm>
+            <a:off x="4389120" y="4754880"/>
+            <a:ext cx="2926080" cy="640080"/>
+          </a:xfrm>
+          <a:prstGeom prst="rect">
+            <a:avLst/>
+          </a:prstGeom>
+          <a:noFill/>
+          <a:ln/>
+        </p:spPr>
+        <p:txBody>
+          <a:bodyPr wrap="square" lIns="0" tIns="0" rIns="0" bIns="0" rtlCol="0" anchor="ctr"/>
+          <a:lstStyle/>
+          <a:p>
+            <a:pPr algn="ctr" indent="0" marL="0">
+              <a:buNone/>
+            </a:pPr>
+            <a:r>
+              <a:rPr lang="en-US" sz="2400" b="1" dirty="0">
+                <a:solidFill>
+                  <a:srgbClr val="1E3A5F"/>
+                </a:solidFill>
+                <a:latin typeface="游ゴシック" pitchFamily="34" charset="0"/>
+                <a:ea typeface="游ゴシック" pitchFamily="34" charset="-122"/>
+                <a:cs typeface="游ゴシック" pitchFamily="34" charset="-120"/>
+              </a:rPr>
+              <a:t>3億円規模</a:t>
+            </a:r>
+            <a:endParaRPr lang="en-US" sz="2400" dirty="0"/>
+          </a:p>
+        </p:txBody>
+      </p:sp>
+      <p:sp>
+        <p:nvSpPr>
+          <p:cNvPr id="13" name="Text 11"/>
+          <p:cNvSpPr txBox="1"/>
+          <p:nvPr/>
+        </p:nvSpPr>
+        <p:spPr>
+          <a:xfrm>
+            <a:off x="4389120" y="5440680"/>
             <a:ext cx="2926080" cy="411480"/>
           </a:xfrm>
           <a:prstGeom prst="rect">
@@ -3111,61 +3275,19 @@
           <a:bodyPr wrap="square" lIns="0" tIns="0" rIns="0" bIns="0" rtlCol="0" anchor="ctr"/>
           <a:lstStyle/>
           <a:p>
-            <a:pPr indent="0" marL="0">
-              <a:buNone/>
-            </a:pPr>
-            <a:r>
-              <a:rPr lang="en-US" sz="1600" b="1" dirty="0">
-                <a:solidFill>
-                  <a:srgbClr val="1E3A5F"/>
-                </a:solidFill>
-                <a:latin typeface="游ゴシック" pitchFamily="34" charset="0"/>
-                <a:ea typeface="游ゴシック" pitchFamily="34" charset="-122"/>
-                <a:cs typeface="游ゴシック" pitchFamily="34" charset="-120"/>
-              </a:rPr>
-              <a:t>人材ファネル</a:t>
-            </a:r>
-            <a:endParaRPr lang="en-US" sz="1600" dirty="0"/>
-          </a:p>
-        </p:txBody>
-      </p:sp>
-      <p:sp>
-        <p:nvSpPr>
-          <p:cNvPr id="12" name="Text 10"/>
-          <p:cNvSpPr txBox="1"/>
-          <p:nvPr/>
-        </p:nvSpPr>
-        <p:spPr>
-          <a:xfrm>
-            <a:off x="4526280" y="5413248"/>
-            <a:ext cx="2926080" cy="594360"/>
-          </a:xfrm>
-          <a:prstGeom prst="rect">
-            <a:avLst/>
-          </a:prstGeom>
-          <a:noFill/>
-          <a:ln/>
-        </p:spPr>
-        <p:txBody>
-          <a:bodyPr wrap="square" lIns="0" tIns="0" rIns="0" bIns="0" rtlCol="0" anchor="t"/>
-          <a:lstStyle/>
-          <a:p>
-            <a:pPr indent="0" marL="0">
-              <a:lnSpc>
-                <a:spcPct val="125000"/>
-              </a:lnSpc>
+            <a:pPr algn="ctr" indent="0" marL="0">
               <a:buNone/>
             </a:pPr>
             <a:r>
               <a:rPr lang="en-US" sz="1250" dirty="0">
                 <a:solidFill>
-                  <a:srgbClr val="3A3A3A"/>
-                </a:solidFill>
-                <a:latin typeface="游ゴシック" pitchFamily="34" charset="0"/>
-                <a:ea typeface="游ゴシック" pitchFamily="34" charset="-122"/>
-                <a:cs typeface="游ゴシック" pitchFamily="34" charset="-120"/>
-              </a:rPr>
-              <a:t>講師デビューが入口</a:t>
+                  <a:srgbClr val="6B6B6B"/>
+                </a:solidFill>
+                <a:latin typeface="游ゴシック" pitchFamily="34" charset="0"/>
+                <a:ea typeface="游ゴシック" pitchFamily="34" charset="-122"/>
+                <a:cs typeface="游ゴシック" pitchFamily="34" charset="-120"/>
+              </a:rPr>
+              <a:t>グループ全体</a:t>
             </a:r>
             <a:endParaRPr lang="en-US" sz="1250" dirty="0"/>
           </a:p>
@@ -3173,14 +3295,14 @@
       </p:sp>
       <p:sp>
         <p:nvSpPr>
-          <p:cNvPr id="13" name="Text 11"/>
-          <p:cNvSpPr txBox="1"/>
-          <p:nvPr/>
-        </p:nvSpPr>
-        <p:spPr>
-          <a:xfrm>
-            <a:off x="4023360" y="5074920"/>
-            <a:ext cx="274320" cy="731520"/>
+          <p:cNvPr id="14" name="Text 12"/>
+          <p:cNvSpPr txBox="1"/>
+          <p:nvPr/>
+        </p:nvSpPr>
+        <p:spPr>
+          <a:xfrm>
+            <a:off x="7470648" y="4983480"/>
+            <a:ext cx="374904" cy="548640"/>
           </a:xfrm>
           <a:prstGeom prst="rect">
             <a:avLst/>
@@ -3204,48 +3326,9 @@
                 <a:ea typeface="游ゴシック" pitchFamily="34" charset="-122"/>
                 <a:cs typeface="游ゴシック" pitchFamily="34" charset="-120"/>
               </a:rPr>
-              <a:t>＋</a:t>
+              <a:t>→</a:t>
             </a:r>
             <a:endParaRPr lang="en-US" sz="2000" dirty="0"/>
-          </a:p>
-        </p:txBody>
-      </p:sp>
-      <p:sp>
-        <p:nvSpPr>
-          <p:cNvPr id="14" name="Text 12"/>
-          <p:cNvSpPr txBox="1"/>
-          <p:nvPr/>
-        </p:nvSpPr>
-        <p:spPr>
-          <a:xfrm>
-            <a:off x="7680960" y="5074920"/>
-            <a:ext cx="548640" cy="731520"/>
-          </a:xfrm>
-          <a:prstGeom prst="rect">
-            <a:avLst/>
-          </a:prstGeom>
-          <a:noFill/>
-          <a:ln/>
-        </p:spPr>
-        <p:txBody>
-          <a:bodyPr wrap="square" lIns="0" tIns="0" rIns="0" bIns="0" rtlCol="0" anchor="ctr"/>
-          <a:lstStyle/>
-          <a:p>
-            <a:pPr algn="ctr" indent="0" marL="0">
-              <a:buNone/>
-            </a:pPr>
-            <a:r>
-              <a:rPr lang="en-US" sz="2400" b="1" dirty="0">
-                <a:solidFill>
-                  <a:srgbClr val="C9603F"/>
-                </a:solidFill>
-                <a:latin typeface="游ゴシック" pitchFamily="34" charset="0"/>
-                <a:ea typeface="游ゴシック" pitchFamily="34" charset="-122"/>
-                <a:cs typeface="游ゴシック" pitchFamily="34" charset="-120"/>
-              </a:rPr>
-              <a:t>→</a:t>
-            </a:r>
-            <a:endParaRPr lang="en-US" sz="2400" dirty="0"/>
           </a:p>
         </p:txBody>
       </p:sp>
@@ -3257,8 +3340,8 @@
         </p:nvSpPr>
         <p:spPr>
           <a:xfrm>
-            <a:off x="8229600" y="4754880"/>
-            <a:ext cx="3322015" cy="1371600"/>
+            <a:off x="7863840" y="4572000"/>
+            <a:ext cx="3200400" cy="1371600"/>
           </a:xfrm>
           <a:prstGeom prst="roundRect">
             <a:avLst>
@@ -3286,24 +3369,24 @@
         </p:nvSpPr>
         <p:spPr>
           <a:xfrm>
-            <a:off x="8458200" y="4956048"/>
-            <a:ext cx="3093415" cy="411480"/>
-          </a:xfrm>
-          <a:prstGeom prst="rect">
-            <a:avLst/>
-          </a:prstGeom>
-          <a:noFill/>
-          <a:ln/>
-        </p:spPr>
-        <p:txBody>
-          <a:bodyPr wrap="square" lIns="0" tIns="0" rIns="0" bIns="0" rtlCol="0" anchor="ctr"/>
-          <a:lstStyle/>
-          <a:p>
-            <a:pPr indent="0" marL="0">
-              <a:buNone/>
-            </a:pPr>
-            <a:r>
-              <a:rPr lang="en-US" sz="1550" b="1" dirty="0">
+            <a:off x="8001000" y="4754880"/>
+            <a:ext cx="2926080" cy="640080"/>
+          </a:xfrm>
+          <a:prstGeom prst="rect">
+            <a:avLst/>
+          </a:prstGeom>
+          <a:noFill/>
+          <a:ln/>
+        </p:spPr>
+        <p:txBody>
+          <a:bodyPr wrap="square" lIns="0" tIns="0" rIns="0" bIns="0" rtlCol="0" anchor="ctr"/>
+          <a:lstStyle/>
+          <a:p>
+            <a:pPr algn="ctr" indent="0" marL="0">
+              <a:buNone/>
+            </a:pPr>
+            <a:r>
+              <a:rPr lang="en-US" sz="2400" b="1" dirty="0">
                 <a:solidFill>
                   <a:srgbClr val="FFFFFF"/>
                 </a:solidFill>
@@ -3311,9 +3394,9 @@
                 <a:ea typeface="游ゴシック" pitchFamily="34" charset="-122"/>
                 <a:cs typeface="游ゴシック" pitchFamily="34" charset="-120"/>
               </a:rPr>
-              <a:t>経済圏100億円のさらなる拡大</a:t>
-            </a:r>
-            <a:endParaRPr lang="en-US" sz="1550" dirty="0"/>
+              <a:t>約100億円</a:t>
+            </a:r>
+            <a:endParaRPr lang="en-US" sz="2400" dirty="0"/>
           </a:p>
         </p:txBody>
       </p:sp>
@@ -3325,24 +3408,24 @@
         </p:nvSpPr>
         <p:spPr>
           <a:xfrm>
-            <a:off x="8458200" y="5413248"/>
-            <a:ext cx="3093415" cy="548640"/>
-          </a:xfrm>
-          <a:prstGeom prst="rect">
-            <a:avLst/>
-          </a:prstGeom>
-          <a:noFill/>
-          <a:ln/>
-        </p:spPr>
-        <p:txBody>
-          <a:bodyPr wrap="square" lIns="0" tIns="0" rIns="0" bIns="0" rtlCol="0" anchor="t"/>
-          <a:lstStyle/>
-          <a:p>
-            <a:pPr indent="0" marL="0">
-              <a:buNone/>
-            </a:pPr>
-            <a:r>
-              <a:rPr lang="en-US" sz="1300" dirty="0">
+            <a:off x="8001000" y="5440680"/>
+            <a:ext cx="2926080" cy="411480"/>
+          </a:xfrm>
+          <a:prstGeom prst="rect">
+            <a:avLst/>
+          </a:prstGeom>
+          <a:noFill/>
+          <a:ln/>
+        </p:spPr>
+        <p:txBody>
+          <a:bodyPr wrap="square" lIns="0" tIns="0" rIns="0" bIns="0" rtlCol="0" anchor="ctr"/>
+          <a:lstStyle/>
+          <a:p>
+            <a:pPr algn="ctr" indent="0" marL="0">
+              <a:buNone/>
+            </a:pPr>
+            <a:r>
+              <a:rPr lang="en-US" sz="1250" dirty="0">
                 <a:solidFill>
                   <a:srgbClr val="F1DCCF"/>
                 </a:solidFill>
@@ -3350,9 +3433,9 @@
                 <a:ea typeface="游ゴシック" pitchFamily="34" charset="-122"/>
                 <a:cs typeface="游ゴシック" pitchFamily="34" charset="-120"/>
               </a:rPr>
-              <a:t>→ 3年後 FC100事業所</a:t>
-            </a:r>
-            <a:endParaRPr lang="en-US" sz="1300" dirty="0"/>
+              <a:t>周辺経済圏（hub）</a:t>
+            </a:r>
+            <a:endParaRPr lang="en-US" sz="1250" dirty="0"/>
           </a:p>
         </p:txBody>
       </p:sp>
@@ -3460,7 +3543,7 @@
                 <a:ea typeface="游ゴシック" pitchFamily="34" charset="-122"/>
                 <a:cs typeface="游ゴシック" pitchFamily="34" charset="-120"/>
               </a:rPr>
-              <a:t>BEYOND THE AWARD</a:t>
+              <a:t>03 / GROWTH</a:t>
             </a:r>
             <a:endParaRPr lang="en-US" sz="1300" dirty="0"/>
           </a:p>
@@ -3499,7 +3582,7 @@
                 <a:ea typeface="游ゴシック" pitchFamily="34" charset="-122"/>
                 <a:cs typeface="游ゴシック" pitchFamily="34" charset="-120"/>
               </a:rPr>
-              <a:t>展望 ― 教育コンテンツ事業としての可能性</a:t>
+              <a:t>成長性 ― 二つのファネルが、経済圏をさらに広げる</a:t>
             </a:r>
             <a:endParaRPr lang="en-US" sz="2700" dirty="0"/>
           </a:p>
@@ -3507,14 +3590,80 @@
       </p:sp>
       <p:sp>
         <p:nvSpPr>
-          <p:cNvPr id="4" name="Text 2"/>
+          <p:cNvPr id="4" name="Shape 2"/>
+          <p:cNvSpPr/>
+          <p:nvPr/>
+        </p:nvSpPr>
+        <p:spPr>
+          <a:xfrm>
+            <a:off x="10607040" y="502920"/>
+            <a:ext cx="822960" cy="822960"/>
+          </a:xfrm>
+          <a:prstGeom prst="ellipse">
+            <a:avLst/>
+          </a:prstGeom>
+          <a:solidFill>
+            <a:srgbClr val="C9603F"/>
+          </a:solidFill>
+          <a:ln/>
+          <a:effectLst>
+            <a:outerShdw sx="100000" sy="100000" kx="0" ky="0" algn="bl" rotWithShape="0" blurRad="101600" dist="38100" dir="5400000">
+              <a:srgbClr val="10233A">
+                <a:alpha val="18000"/>
+              </a:srgbClr>
+            </a:outerShdw>
+          </a:effectLst>
+        </p:spPr>
+      </p:sp>
+      <p:sp>
+        <p:nvSpPr>
+          <p:cNvPr id="5" name="Text 3"/>
+          <p:cNvSpPr txBox="1"/>
+          <p:nvPr/>
+        </p:nvSpPr>
+        <p:spPr>
+          <a:xfrm>
+            <a:off x="10607040" y="502920"/>
+            <a:ext cx="822960" cy="822960"/>
+          </a:xfrm>
+          <a:prstGeom prst="rect">
+            <a:avLst/>
+          </a:prstGeom>
+          <a:noFill/>
+          <a:ln/>
+        </p:spPr>
+        <p:txBody>
+          <a:bodyPr wrap="square" lIns="0" tIns="0" rIns="0" bIns="0" rtlCol="0" anchor="ctr"/>
+          <a:lstStyle/>
+          <a:p>
+            <a:pPr algn="ctr" indent="0" marL="0">
+              <a:buNone/>
+            </a:pPr>
+            <a:r>
+              <a:rPr lang="en-US" sz="2880" b="1" dirty="0">
+                <a:solidFill>
+                  <a:srgbClr val="FFFFFF"/>
+                </a:solidFill>
+                <a:latin typeface="游ゴシック" pitchFamily="34" charset="0"/>
+                <a:ea typeface="游ゴシック" pitchFamily="34" charset="-122"/>
+                <a:cs typeface="游ゴシック" pitchFamily="34" charset="-120"/>
+              </a:rPr>
+              <a:t>成</a:t>
+            </a:r>
+            <a:endParaRPr lang="en-US" sz="2880" dirty="0"/>
+          </a:p>
+        </p:txBody>
+      </p:sp>
+      <p:sp>
+        <p:nvSpPr>
+          <p:cNvPr id="6" name="Text 4"/>
           <p:cNvSpPr txBox="1"/>
           <p:nvPr/>
         </p:nvSpPr>
         <p:spPr>
           <a:xfrm>
             <a:off x="640080" y="1783080"/>
-            <a:ext cx="10881360" cy="1371600"/>
+            <a:ext cx="10881360" cy="4206240"/>
           </a:xfrm>
           <a:prstGeom prst="rect">
             <a:avLst/>
@@ -3537,7 +3686,7 @@
               <a:buChar char="●"/>
             </a:pPr>
             <a:r>
-              <a:rPr lang="en-US" sz="1450" dirty="0">
+              <a:rPr lang="en-US" sz="1500" dirty="0">
                 <a:solidFill>
                   <a:srgbClr val="3A3A3A"/>
                 </a:solidFill>
@@ -3545,9 +3694,9 @@
                 <a:ea typeface="游ゴシック" pitchFamily="34" charset="-122"/>
                 <a:cs typeface="游ゴシック" pitchFamily="34" charset="-120"/>
               </a:rPr>
-              <a:t>大賞獲得を目指す先に、「繋ぐ相続サロン®」の人材育成メソッドそのものを、金融機関・不動産業界など相続ビジネスに関わるすべての専門家への教育コンテンツとして展開していく展望を持っている</a:t>
-            </a:r>
-            <a:endParaRPr lang="en-US" sz="1450" dirty="0"/>
+              <a:t>顧客ファネル：ACP（人生会議）をフロントに据え、相続対策に着手する母数を構造的に拡大する仕組み（素材②）</a:t>
+            </a:r>
+            <a:endParaRPr lang="en-US" sz="1500" dirty="0"/>
           </a:p>
           <a:p>
             <a:pPr marL="342900" indent="-342900">
@@ -3561,7 +3710,7 @@
               <a:buChar char="●"/>
             </a:pPr>
             <a:r>
-              <a:rPr lang="en-US" sz="1450" dirty="0">
+              <a:rPr lang="en-US" sz="1500" dirty="0">
                 <a:solidFill>
                   <a:srgbClr val="3A3A3A"/>
                 </a:solidFill>
@@ -3569,30 +3718,54 @@
                 <a:ea typeface="游ゴシック" pitchFamily="34" charset="-122"/>
                 <a:cs typeface="游ゴシック" pitchFamily="34" charset="-120"/>
               </a:rPr>
-              <a:t>これはアイデアではない。「エキスパートコース」全6回分のカリキュラム（素材③）として、既に体系化・顕在化された教材が存在する</a:t>
-            </a:r>
-            <a:endParaRPr lang="en-US" sz="1450" dirty="0"/>
-          </a:p>
-        </p:txBody>
-      </p:sp>
-      <p:sp>
-        <p:nvSpPr>
-          <p:cNvPr id="5" name="Shape 3"/>
+              <a:t>人材ファネル：資格講座の卒業生が「講師デビュー」し、自ら次の集客・紹介導線を生み出す自己増殖構造（素材③）</a:t>
+            </a:r>
+            <a:endParaRPr lang="en-US" sz="1500" dirty="0"/>
+          </a:p>
+          <a:p>
+            <a:pPr marL="342900" indent="-342900">
+              <a:lnSpc>
+                <a:spcPct val="128000"/>
+              </a:lnSpc>
+              <a:spcAft>
+                <a:spcPts val="1200"/>
+              </a:spcAft>
+              <a:buSzPct val="100000"/>
+              <a:buChar char="●"/>
+            </a:pPr>
+            <a:r>
+              <a:rPr lang="en-US" sz="1500" dirty="0">
+                <a:solidFill>
+                  <a:srgbClr val="3A3A3A"/>
+                </a:solidFill>
+                <a:latin typeface="游ゴシック" pitchFamily="34" charset="0"/>
+                <a:ea typeface="游ゴシック" pitchFamily="34" charset="-122"/>
+                <a:cs typeface="游ゴシック" pitchFamily="34" charset="-120"/>
+              </a:rPr>
+              <a:t>二つのファネルが重なり合うことで、約100億円の経済圏をさらに拡大し、3年後FC100事業所という成長サイクルへつながる</a:t>
+            </a:r>
+            <a:endParaRPr lang="en-US" sz="1500" dirty="0"/>
+          </a:p>
+        </p:txBody>
+      </p:sp>
+      <p:sp>
+        <p:nvSpPr>
+          <p:cNvPr id="7" name="Shape 5"/>
           <p:cNvSpPr/>
           <p:nvPr/>
         </p:nvSpPr>
         <p:spPr>
           <a:xfrm>
-            <a:off x="640080" y="3429000"/>
-            <a:ext cx="2487168" cy="1874520"/>
+            <a:off x="640080" y="4754880"/>
+            <a:ext cx="3383280" cy="1371600"/>
           </a:xfrm>
           <a:prstGeom prst="roundRect">
             <a:avLst>
-              <a:gd name="adj" fmla="val 4878"/>
+              <a:gd name="adj" fmla="val 6667"/>
             </a:avLst>
           </a:prstGeom>
           <a:solidFill>
-            <a:srgbClr val="C9603F"/>
+            <a:srgbClr val="F6F1EA"/>
           </a:solidFill>
           <a:ln/>
           <a:effectLst>
@@ -3606,14 +3779,14 @@
       </p:sp>
       <p:sp>
         <p:nvSpPr>
-          <p:cNvPr id="6" name="Text 4"/>
-          <p:cNvSpPr txBox="1"/>
-          <p:nvPr/>
-        </p:nvSpPr>
-        <p:spPr>
-          <a:xfrm>
-            <a:off x="804672" y="3593592"/>
-            <a:ext cx="2157984" cy="274320"/>
+          <p:cNvPr id="8" name="Text 6"/>
+          <p:cNvSpPr txBox="1"/>
+          <p:nvPr/>
+        </p:nvSpPr>
+        <p:spPr>
+          <a:xfrm>
+            <a:off x="868680" y="4956048"/>
+            <a:ext cx="2926080" cy="411480"/>
           </a:xfrm>
           <a:prstGeom prst="rect">
             <a:avLst/>
@@ -3629,69 +3802,30 @@
               <a:buNone/>
             </a:pPr>
             <a:r>
-              <a:rPr lang="en-US" sz="1050" b="1" dirty="0">
-                <a:solidFill>
-                  <a:srgbClr val="F1DCCF"/>
-                </a:solidFill>
-                <a:latin typeface="游ゴシック" pitchFamily="34" charset="0"/>
-                <a:ea typeface="游ゴシック" pitchFamily="34" charset="-122"/>
-                <a:cs typeface="游ゴシック" pitchFamily="34" charset="-120"/>
-              </a:rPr>
-              <a:t>実績（現在）</a:t>
-            </a:r>
-            <a:endParaRPr lang="en-US" sz="1050" dirty="0"/>
-          </a:p>
-        </p:txBody>
-      </p:sp>
-      <p:sp>
-        <p:nvSpPr>
-          <p:cNvPr id="7" name="Text 5"/>
-          <p:cNvSpPr txBox="1"/>
-          <p:nvPr/>
-        </p:nvSpPr>
-        <p:spPr>
-          <a:xfrm>
-            <a:off x="804672" y="3886200"/>
-            <a:ext cx="2157984" cy="594360"/>
-          </a:xfrm>
-          <a:prstGeom prst="rect">
-            <a:avLst/>
-          </a:prstGeom>
-          <a:noFill/>
-          <a:ln/>
-        </p:spPr>
-        <p:txBody>
-          <a:bodyPr wrap="square" lIns="0" tIns="0" rIns="0" bIns="0" rtlCol="0" anchor="t"/>
-          <a:lstStyle/>
-          <a:p>
-            <a:pPr indent="0" marL="0">
-              <a:buNone/>
-            </a:pPr>
-            <a:r>
-              <a:rPr lang="en-US" sz="1400" b="1" dirty="0">
-                <a:solidFill>
-                  <a:srgbClr val="FFFFFF"/>
-                </a:solidFill>
-                <a:latin typeface="游ゴシック" pitchFamily="34" charset="0"/>
-                <a:ea typeface="游ゴシック" pitchFamily="34" charset="-122"/>
-                <a:cs typeface="游ゴシック" pitchFamily="34" charset="-120"/>
-              </a:rPr>
-              <a:t>自社での育成</a:t>
-            </a:r>
-            <a:endParaRPr lang="en-US" sz="1400" dirty="0"/>
-          </a:p>
-        </p:txBody>
-      </p:sp>
-      <p:sp>
-        <p:nvSpPr>
-          <p:cNvPr id="8" name="Text 6"/>
-          <p:cNvSpPr txBox="1"/>
-          <p:nvPr/>
-        </p:nvSpPr>
-        <p:spPr>
-          <a:xfrm>
-            <a:off x="804672" y="4526280"/>
-            <a:ext cx="2157984" cy="685800"/>
+              <a:rPr lang="en-US" sz="1600" b="1" dirty="0">
+                <a:solidFill>
+                  <a:srgbClr val="1E3A5F"/>
+                </a:solidFill>
+                <a:latin typeface="游ゴシック" pitchFamily="34" charset="0"/>
+                <a:ea typeface="游ゴシック" pitchFamily="34" charset="-122"/>
+                <a:cs typeface="游ゴシック" pitchFamily="34" charset="-120"/>
+              </a:rPr>
+              <a:t>顧客ファネル</a:t>
+            </a:r>
+            <a:endParaRPr lang="en-US" sz="1600" dirty="0"/>
+          </a:p>
+        </p:txBody>
+      </p:sp>
+      <p:sp>
+        <p:nvSpPr>
+          <p:cNvPr id="9" name="Text 7"/>
+          <p:cNvSpPr txBox="1"/>
+          <p:nvPr/>
+        </p:nvSpPr>
+        <p:spPr>
+          <a:xfrm>
+            <a:off x="868680" y="5413248"/>
+            <a:ext cx="2926080" cy="594360"/>
           </a:xfrm>
           <a:prstGeom prst="rect">
             <a:avLst/>
@@ -3705,81 +3839,22 @@
           <a:p>
             <a:pPr indent="0" marL="0">
               <a:lnSpc>
-                <a:spcPct val="120000"/>
+                <a:spcPct val="125000"/>
               </a:lnSpc>
               <a:buNone/>
             </a:pPr>
             <a:r>
-              <a:rPr lang="en-US" sz="1100" dirty="0">
-                <a:solidFill>
-                  <a:srgbClr val="F8E9DF"/>
-                </a:solidFill>
-                <a:latin typeface="游ゴシック" pitchFamily="34" charset="0"/>
-                <a:ea typeface="游ゴシック" pitchFamily="34" charset="-122"/>
-                <a:cs typeface="游ゴシック" pitchFamily="34" charset="-120"/>
-              </a:rPr>
-              <a:t>エキスパートコース全6回</a:t>
-            </a:r>
-            <a:endParaRPr lang="en-US" sz="1100" dirty="0"/>
-          </a:p>
-          <a:p>
-            <a:pPr indent="0" marL="0">
-              <a:lnSpc>
-                <a:spcPct val="120000"/>
-              </a:lnSpc>
-              <a:buNone/>
-            </a:pPr>
-            <a:r>
-              <a:rPr lang="en-US" sz="1100" dirty="0">
-                <a:solidFill>
-                  <a:srgbClr val="F8E9DF"/>
-                </a:solidFill>
-                <a:latin typeface="游ゴシック" pitchFamily="34" charset="0"/>
-                <a:ea typeface="游ゴシック" pitchFamily="34" charset="-122"/>
-                <a:cs typeface="游ゴシック" pitchFamily="34" charset="-120"/>
-              </a:rPr>
-              <a:t>資格者50名（2年）</a:t>
-            </a:r>
-            <a:endParaRPr lang="en-US" sz="1100" dirty="0"/>
-          </a:p>
-        </p:txBody>
-      </p:sp>
-      <p:sp>
-        <p:nvSpPr>
-          <p:cNvPr id="9" name="Text 7"/>
-          <p:cNvSpPr txBox="1"/>
-          <p:nvPr/>
-        </p:nvSpPr>
-        <p:spPr>
-          <a:xfrm>
-            <a:off x="3127248" y="4091940"/>
-            <a:ext cx="256032" cy="548640"/>
-          </a:xfrm>
-          <a:prstGeom prst="rect">
-            <a:avLst/>
-          </a:prstGeom>
-          <a:noFill/>
-          <a:ln/>
-        </p:spPr>
-        <p:txBody>
-          <a:bodyPr wrap="square" lIns="0" tIns="0" rIns="0" bIns="0" rtlCol="0" anchor="ctr"/>
-          <a:lstStyle/>
-          <a:p>
-            <a:pPr algn="ctr" indent="0" marL="0">
-              <a:buNone/>
-            </a:pPr>
-            <a:r>
-              <a:rPr lang="en-US" sz="1600" b="1" dirty="0">
-                <a:solidFill>
-                  <a:srgbClr val="C9603F"/>
-                </a:solidFill>
-                <a:latin typeface="游ゴシック" pitchFamily="34" charset="0"/>
-                <a:ea typeface="游ゴシック" pitchFamily="34" charset="-122"/>
-                <a:cs typeface="游ゴシック" pitchFamily="34" charset="-120"/>
-              </a:rPr>
-              <a:t>→</a:t>
-            </a:r>
-            <a:endParaRPr lang="en-US" sz="1600" dirty="0"/>
+              <a:rPr lang="en-US" sz="1250" dirty="0">
+                <a:solidFill>
+                  <a:srgbClr val="3A3A3A"/>
+                </a:solidFill>
+                <a:latin typeface="游ゴシック" pitchFamily="34" charset="0"/>
+                <a:ea typeface="游ゴシック" pitchFamily="34" charset="-122"/>
+                <a:cs typeface="游ゴシック" pitchFamily="34" charset="-120"/>
+              </a:rPr>
+              <a:t>ACP（人生会議）が入口</a:t>
+            </a:r>
+            <a:endParaRPr lang="en-US" sz="1250" dirty="0"/>
           </a:p>
         </p:txBody>
       </p:sp>
@@ -3791,12 +3866,12 @@
         </p:nvSpPr>
         <p:spPr>
           <a:xfrm>
-            <a:off x="3383280" y="3429000"/>
-            <a:ext cx="2487168" cy="1874520"/>
+            <a:off x="4297680" y="4754880"/>
+            <a:ext cx="3383280" cy="1371600"/>
           </a:xfrm>
           <a:prstGeom prst="roundRect">
             <a:avLst>
-              <a:gd name="adj" fmla="val 4878"/>
+              <a:gd name="adj" fmla="val 6667"/>
             </a:avLst>
           </a:prstGeom>
           <a:solidFill>
@@ -3820,8 +3895,8 @@
         </p:nvSpPr>
         <p:spPr>
           <a:xfrm>
-            <a:off x="3547872" y="3593592"/>
-            <a:ext cx="2157984" cy="274320"/>
+            <a:off x="4526280" y="4956048"/>
+            <a:ext cx="2926080" cy="411480"/>
           </a:xfrm>
           <a:prstGeom prst="rect">
             <a:avLst/>
@@ -3837,17 +3912,17 @@
               <a:buNone/>
             </a:pPr>
             <a:r>
-              <a:rPr lang="en-US" sz="1050" b="1" dirty="0">
-                <a:solidFill>
-                  <a:srgbClr val="C9603F"/>
-                </a:solidFill>
-                <a:latin typeface="游ゴシック" pitchFamily="34" charset="0"/>
-                <a:ea typeface="游ゴシック" pitchFamily="34" charset="-122"/>
-                <a:cs typeface="游ゴシック" pitchFamily="34" charset="-120"/>
-              </a:rPr>
-              <a:t>展望①</a:t>
-            </a:r>
-            <a:endParaRPr lang="en-US" sz="1050" dirty="0"/>
+              <a:rPr lang="en-US" sz="1600" b="1" dirty="0">
+                <a:solidFill>
+                  <a:srgbClr val="1E3A5F"/>
+                </a:solidFill>
+                <a:latin typeface="游ゴシック" pitchFamily="34" charset="0"/>
+                <a:ea typeface="游ゴシック" pitchFamily="34" charset="-122"/>
+                <a:cs typeface="游ゴシック" pitchFamily="34" charset="-120"/>
+              </a:rPr>
+              <a:t>人材ファネル</a:t>
+            </a:r>
+            <a:endParaRPr lang="en-US" sz="1600" dirty="0"/>
           </a:p>
         </p:txBody>
       </p:sp>
@@ -3859,47 +3934,8 @@
         </p:nvSpPr>
         <p:spPr>
           <a:xfrm>
-            <a:off x="3547872" y="3886200"/>
-            <a:ext cx="2157984" cy="594360"/>
-          </a:xfrm>
-          <a:prstGeom prst="rect">
-            <a:avLst/>
-          </a:prstGeom>
-          <a:noFill/>
-          <a:ln/>
-        </p:spPr>
-        <p:txBody>
-          <a:bodyPr wrap="square" lIns="0" tIns="0" rIns="0" bIns="0" rtlCol="0" anchor="t"/>
-          <a:lstStyle/>
-          <a:p>
-            <a:pPr indent="0" marL="0">
-              <a:buNone/>
-            </a:pPr>
-            <a:r>
-              <a:rPr lang="en-US" sz="1400" b="1" dirty="0">
-                <a:solidFill>
-                  <a:srgbClr val="1E3A5F"/>
-                </a:solidFill>
-                <a:latin typeface="游ゴシック" pitchFamily="34" charset="0"/>
-                <a:ea typeface="游ゴシック" pitchFamily="34" charset="-122"/>
-                <a:cs typeface="游ゴシック" pitchFamily="34" charset="-120"/>
-              </a:rPr>
-              <a:t>金融機関への採用</a:t>
-            </a:r>
-            <a:endParaRPr lang="en-US" sz="1400" dirty="0"/>
-          </a:p>
-        </p:txBody>
-      </p:sp>
-      <p:sp>
-        <p:nvSpPr>
-          <p:cNvPr id="13" name="Text 11"/>
-          <p:cNvSpPr txBox="1"/>
-          <p:nvPr/>
-        </p:nvSpPr>
-        <p:spPr>
-          <a:xfrm>
-            <a:off x="3547872" y="4526280"/>
-            <a:ext cx="2157984" cy="685800"/>
+            <a:off x="4526280" y="5413248"/>
+            <a:ext cx="2926080" cy="594360"/>
           </a:xfrm>
           <a:prstGeom prst="rect">
             <a:avLst/>
@@ -3913,42 +3949,61 @@
           <a:p>
             <a:pPr indent="0" marL="0">
               <a:lnSpc>
-                <a:spcPct val="120000"/>
+                <a:spcPct val="125000"/>
               </a:lnSpc>
               <a:buNone/>
             </a:pPr>
             <a:r>
-              <a:rPr lang="en-US" sz="1100" dirty="0">
-                <a:solidFill>
-                  <a:srgbClr val="6B6B6B"/>
-                </a:solidFill>
-                <a:latin typeface="游ゴシック" pitchFamily="34" charset="0"/>
-                <a:ea typeface="游ゴシック" pitchFamily="34" charset="-122"/>
-                <a:cs typeface="游ゴシック" pitchFamily="34" charset="-120"/>
-              </a:rPr>
-              <a:t>行員研修プログラム</a:t>
-            </a:r>
-            <a:endParaRPr lang="en-US" sz="1100" dirty="0"/>
-          </a:p>
-          <a:p>
-            <a:pPr indent="0" marL="0">
-              <a:lnSpc>
-                <a:spcPct val="120000"/>
-              </a:lnSpc>
-              <a:buNone/>
-            </a:pPr>
-            <a:r>
-              <a:rPr lang="en-US" sz="1100" dirty="0">
-                <a:solidFill>
-                  <a:srgbClr val="6B6B6B"/>
-                </a:solidFill>
-                <a:latin typeface="游ゴシック" pitchFamily="34" charset="0"/>
-                <a:ea typeface="游ゴシック" pitchFamily="34" charset="-122"/>
-                <a:cs typeface="游ゴシック" pitchFamily="34" charset="-120"/>
-              </a:rPr>
-              <a:t>として導入</a:t>
-            </a:r>
-            <a:endParaRPr lang="en-US" sz="1100" dirty="0"/>
+              <a:rPr lang="en-US" sz="1250" dirty="0">
+                <a:solidFill>
+                  <a:srgbClr val="3A3A3A"/>
+                </a:solidFill>
+                <a:latin typeface="游ゴシック" pitchFamily="34" charset="0"/>
+                <a:ea typeface="游ゴシック" pitchFamily="34" charset="-122"/>
+                <a:cs typeface="游ゴシック" pitchFamily="34" charset="-120"/>
+              </a:rPr>
+              <a:t>講師デビューが入口</a:t>
+            </a:r>
+            <a:endParaRPr lang="en-US" sz="1250" dirty="0"/>
+          </a:p>
+        </p:txBody>
+      </p:sp>
+      <p:sp>
+        <p:nvSpPr>
+          <p:cNvPr id="13" name="Text 11"/>
+          <p:cNvSpPr txBox="1"/>
+          <p:nvPr/>
+        </p:nvSpPr>
+        <p:spPr>
+          <a:xfrm>
+            <a:off x="4023360" y="5074920"/>
+            <a:ext cx="274320" cy="731520"/>
+          </a:xfrm>
+          <a:prstGeom prst="rect">
+            <a:avLst/>
+          </a:prstGeom>
+          <a:noFill/>
+          <a:ln/>
+        </p:spPr>
+        <p:txBody>
+          <a:bodyPr wrap="square" lIns="0" tIns="0" rIns="0" bIns="0" rtlCol="0" anchor="ctr"/>
+          <a:lstStyle/>
+          <a:p>
+            <a:pPr algn="ctr" indent="0" marL="0">
+              <a:buNone/>
+            </a:pPr>
+            <a:r>
+              <a:rPr lang="en-US" sz="2000" b="1" dirty="0">
+                <a:solidFill>
+                  <a:srgbClr val="C9603F"/>
+                </a:solidFill>
+                <a:latin typeface="游ゴシック" pitchFamily="34" charset="0"/>
+                <a:ea typeface="游ゴシック" pitchFamily="34" charset="-122"/>
+                <a:cs typeface="游ゴシック" pitchFamily="34" charset="-120"/>
+              </a:rPr>
+              <a:t>＋</a:t>
+            </a:r>
+            <a:endParaRPr lang="en-US" sz="2000" dirty="0"/>
           </a:p>
         </p:txBody>
       </p:sp>
@@ -3960,8 +4015,8 @@
         </p:nvSpPr>
         <p:spPr>
           <a:xfrm>
-            <a:off x="5870448" y="4091940"/>
-            <a:ext cx="256032" cy="548640"/>
+            <a:off x="7680960" y="5074920"/>
+            <a:ext cx="548640" cy="731520"/>
           </a:xfrm>
           <a:prstGeom prst="rect">
             <a:avLst/>
@@ -3977,7 +4032,7 @@
               <a:buNone/>
             </a:pPr>
             <a:r>
-              <a:rPr lang="en-US" sz="1600" b="1" dirty="0">
+              <a:rPr lang="en-US" sz="2400" b="1" dirty="0">
                 <a:solidFill>
                   <a:srgbClr val="C9603F"/>
                 </a:solidFill>
@@ -3987,7 +4042,7 @@
               </a:rPr>
               <a:t>→</a:t>
             </a:r>
-            <a:endParaRPr lang="en-US" sz="1600" dirty="0"/>
+            <a:endParaRPr lang="en-US" sz="2400" dirty="0"/>
           </a:p>
         </p:txBody>
       </p:sp>
@@ -3999,16 +4054,16 @@
         </p:nvSpPr>
         <p:spPr>
           <a:xfrm>
-            <a:off x="6126480" y="3429000"/>
-            <a:ext cx="2487168" cy="1874520"/>
+            <a:off x="8229600" y="4754880"/>
+            <a:ext cx="3322015" cy="1371600"/>
           </a:xfrm>
           <a:prstGeom prst="roundRect">
             <a:avLst>
-              <a:gd name="adj" fmla="val 4878"/>
+              <a:gd name="adj" fmla="val 6667"/>
             </a:avLst>
           </a:prstGeom>
           <a:solidFill>
-            <a:srgbClr val="F6F1EA"/>
+            <a:srgbClr val="C9603F"/>
           </a:solidFill>
           <a:ln/>
           <a:effectLst>
@@ -4028,8 +4083,8 @@
         </p:nvSpPr>
         <p:spPr>
           <a:xfrm>
-            <a:off x="6291072" y="3593592"/>
-            <a:ext cx="2157984" cy="274320"/>
+            <a:off x="8458200" y="4956048"/>
+            <a:ext cx="3093415" cy="411480"/>
           </a:xfrm>
           <a:prstGeom prst="rect">
             <a:avLst/>
@@ -4045,17 +4100,17 @@
               <a:buNone/>
             </a:pPr>
             <a:r>
-              <a:rPr lang="en-US" sz="1050" b="1" dirty="0">
-                <a:solidFill>
-                  <a:srgbClr val="C9603F"/>
-                </a:solidFill>
-                <a:latin typeface="游ゴシック" pitchFamily="34" charset="0"/>
-                <a:ea typeface="游ゴシック" pitchFamily="34" charset="-122"/>
-                <a:cs typeface="游ゴシック" pitchFamily="34" charset="-120"/>
-              </a:rPr>
-              <a:t>展望②</a:t>
-            </a:r>
-            <a:endParaRPr lang="en-US" sz="1050" dirty="0"/>
+              <a:rPr lang="en-US" sz="1550" b="1" dirty="0">
+                <a:solidFill>
+                  <a:srgbClr val="FFFFFF"/>
+                </a:solidFill>
+                <a:latin typeface="游ゴシック" pitchFamily="34" charset="0"/>
+                <a:ea typeface="游ゴシック" pitchFamily="34" charset="-122"/>
+                <a:cs typeface="游ゴシック" pitchFamily="34" charset="-120"/>
+              </a:rPr>
+              <a:t>経済圏100億円のさらなる拡大</a:t>
+            </a:r>
+            <a:endParaRPr lang="en-US" sz="1550" dirty="0"/>
           </a:p>
         </p:txBody>
       </p:sp>
@@ -4067,8 +4122,8 @@
         </p:nvSpPr>
         <p:spPr>
           <a:xfrm>
-            <a:off x="6291072" y="3886200"/>
-            <a:ext cx="2157984" cy="594360"/>
+            <a:off x="8458200" y="5413248"/>
+            <a:ext cx="3093415" cy="548640"/>
           </a:xfrm>
           <a:prstGeom prst="rect">
             <a:avLst/>
@@ -4084,349 +4139,23 @@
               <a:buNone/>
             </a:pPr>
             <a:r>
-              <a:rPr lang="en-US" sz="1400" b="1" dirty="0">
-                <a:solidFill>
-                  <a:srgbClr val="1E3A5F"/>
-                </a:solidFill>
-                <a:latin typeface="游ゴシック" pitchFamily="34" charset="0"/>
-                <a:ea typeface="游ゴシック" pitchFamily="34" charset="-122"/>
-                <a:cs typeface="游ゴシック" pitchFamily="34" charset="-120"/>
-              </a:rPr>
-              <a:t>不動産・士業への展開</a:t>
-            </a:r>
-            <a:endParaRPr lang="en-US" sz="1400" dirty="0"/>
+              <a:rPr lang="en-US" sz="1300" dirty="0">
+                <a:solidFill>
+                  <a:srgbClr val="F1DCCF"/>
+                </a:solidFill>
+                <a:latin typeface="游ゴシック" pitchFamily="34" charset="0"/>
+                <a:ea typeface="游ゴシック" pitchFamily="34" charset="-122"/>
+                <a:cs typeface="游ゴシック" pitchFamily="34" charset="-120"/>
+              </a:rPr>
+              <a:t>→ 3年後 FC100事業所</a:t>
+            </a:r>
+            <a:endParaRPr lang="en-US" sz="1300" dirty="0"/>
           </a:p>
         </p:txBody>
       </p:sp>
       <p:sp>
         <p:nvSpPr>
           <p:cNvPr id="18" name="Text 16"/>
-          <p:cNvSpPr txBox="1"/>
-          <p:nvPr/>
-        </p:nvSpPr>
-        <p:spPr>
-          <a:xfrm>
-            <a:off x="6291072" y="4526280"/>
-            <a:ext cx="2157984" cy="685800"/>
-          </a:xfrm>
-          <a:prstGeom prst="rect">
-            <a:avLst/>
-          </a:prstGeom>
-          <a:noFill/>
-          <a:ln/>
-        </p:spPr>
-        <p:txBody>
-          <a:bodyPr wrap="square" lIns="0" tIns="0" rIns="0" bIns="0" rtlCol="0" anchor="t"/>
-          <a:lstStyle/>
-          <a:p>
-            <a:pPr indent="0" marL="0">
-              <a:lnSpc>
-                <a:spcPct val="120000"/>
-              </a:lnSpc>
-              <a:buNone/>
-            </a:pPr>
-            <a:r>
-              <a:rPr lang="en-US" sz="1100" dirty="0">
-                <a:solidFill>
-                  <a:srgbClr val="6B6B6B"/>
-                </a:solidFill>
-                <a:latin typeface="游ゴシック" pitchFamily="34" charset="0"/>
-                <a:ea typeface="游ゴシック" pitchFamily="34" charset="-122"/>
-                <a:cs typeface="游ゴシック" pitchFamily="34" charset="-120"/>
-              </a:rPr>
-              <a:t>業界横断の</a:t>
-            </a:r>
-            <a:endParaRPr lang="en-US" sz="1100" dirty="0"/>
-          </a:p>
-          <a:p>
-            <a:pPr indent="0" marL="0">
-              <a:lnSpc>
-                <a:spcPct val="120000"/>
-              </a:lnSpc>
-              <a:buNone/>
-            </a:pPr>
-            <a:r>
-              <a:rPr lang="en-US" sz="1100" dirty="0">
-                <a:solidFill>
-                  <a:srgbClr val="6B6B6B"/>
-                </a:solidFill>
-                <a:latin typeface="游ゴシック" pitchFamily="34" charset="0"/>
-                <a:ea typeface="游ゴシック" pitchFamily="34" charset="-122"/>
-                <a:cs typeface="游ゴシック" pitchFamily="34" charset="-120"/>
-              </a:rPr>
-              <a:t>標準研修へ</a:t>
-            </a:r>
-            <a:endParaRPr lang="en-US" sz="1100" dirty="0"/>
-          </a:p>
-        </p:txBody>
-      </p:sp>
-      <p:sp>
-        <p:nvSpPr>
-          <p:cNvPr id="19" name="Text 17"/>
-          <p:cNvSpPr txBox="1"/>
-          <p:nvPr/>
-        </p:nvSpPr>
-        <p:spPr>
-          <a:xfrm>
-            <a:off x="8613648" y="4091940"/>
-            <a:ext cx="256032" cy="548640"/>
-          </a:xfrm>
-          <a:prstGeom prst="rect">
-            <a:avLst/>
-          </a:prstGeom>
-          <a:noFill/>
-          <a:ln/>
-        </p:spPr>
-        <p:txBody>
-          <a:bodyPr wrap="square" lIns="0" tIns="0" rIns="0" bIns="0" rtlCol="0" anchor="ctr"/>
-          <a:lstStyle/>
-          <a:p>
-            <a:pPr algn="ctr" indent="0" marL="0">
-              <a:buNone/>
-            </a:pPr>
-            <a:r>
-              <a:rPr lang="en-US" sz="1600" b="1" dirty="0">
-                <a:solidFill>
-                  <a:srgbClr val="C9603F"/>
-                </a:solidFill>
-                <a:latin typeface="游ゴシック" pitchFamily="34" charset="0"/>
-                <a:ea typeface="游ゴシック" pitchFamily="34" charset="-122"/>
-                <a:cs typeface="游ゴシック" pitchFamily="34" charset="-120"/>
-              </a:rPr>
-              <a:t>→</a:t>
-            </a:r>
-            <a:endParaRPr lang="en-US" sz="1600" dirty="0"/>
-          </a:p>
-        </p:txBody>
-      </p:sp>
-      <p:sp>
-        <p:nvSpPr>
-          <p:cNvPr id="20" name="Shape 18"/>
-          <p:cNvSpPr/>
-          <p:nvPr/>
-        </p:nvSpPr>
-        <p:spPr>
-          <a:xfrm>
-            <a:off x="8869680" y="3429000"/>
-            <a:ext cx="2487168" cy="1874520"/>
-          </a:xfrm>
-          <a:prstGeom prst="roundRect">
-            <a:avLst>
-              <a:gd name="adj" fmla="val 4878"/>
-            </a:avLst>
-          </a:prstGeom>
-          <a:solidFill>
-            <a:srgbClr val="F6F1EA"/>
-          </a:solidFill>
-          <a:ln/>
-          <a:effectLst>
-            <a:outerShdw sx="100000" sy="100000" kx="0" ky="0" algn="bl" rotWithShape="0" blurRad="101600" dist="38100" dir="5400000">
-              <a:srgbClr val="10233A">
-                <a:alpha val="18000"/>
-              </a:srgbClr>
-            </a:outerShdw>
-          </a:effectLst>
-        </p:spPr>
-      </p:sp>
-      <p:sp>
-        <p:nvSpPr>
-          <p:cNvPr id="21" name="Text 19"/>
-          <p:cNvSpPr txBox="1"/>
-          <p:nvPr/>
-        </p:nvSpPr>
-        <p:spPr>
-          <a:xfrm>
-            <a:off x="9034272" y="3593592"/>
-            <a:ext cx="2157984" cy="274320"/>
-          </a:xfrm>
-          <a:prstGeom prst="rect">
-            <a:avLst/>
-          </a:prstGeom>
-          <a:noFill/>
-          <a:ln/>
-        </p:spPr>
-        <p:txBody>
-          <a:bodyPr wrap="square" lIns="0" tIns="0" rIns="0" bIns="0" rtlCol="0" anchor="ctr"/>
-          <a:lstStyle/>
-          <a:p>
-            <a:pPr indent="0" marL="0">
-              <a:buNone/>
-            </a:pPr>
-            <a:r>
-              <a:rPr lang="en-US" sz="1050" b="1" dirty="0">
-                <a:solidFill>
-                  <a:srgbClr val="C9603F"/>
-                </a:solidFill>
-                <a:latin typeface="游ゴシック" pitchFamily="34" charset="0"/>
-                <a:ea typeface="游ゴシック" pitchFamily="34" charset="-122"/>
-                <a:cs typeface="游ゴシック" pitchFamily="34" charset="-120"/>
-              </a:rPr>
-              <a:t>展望③</a:t>
-            </a:r>
-            <a:endParaRPr lang="en-US" sz="1050" dirty="0"/>
-          </a:p>
-        </p:txBody>
-      </p:sp>
-      <p:sp>
-        <p:nvSpPr>
-          <p:cNvPr id="22" name="Text 20"/>
-          <p:cNvSpPr txBox="1"/>
-          <p:nvPr/>
-        </p:nvSpPr>
-        <p:spPr>
-          <a:xfrm>
-            <a:off x="9034272" y="3886200"/>
-            <a:ext cx="2157984" cy="594360"/>
-          </a:xfrm>
-          <a:prstGeom prst="rect">
-            <a:avLst/>
-          </a:prstGeom>
-          <a:noFill/>
-          <a:ln/>
-        </p:spPr>
-        <p:txBody>
-          <a:bodyPr wrap="square" lIns="0" tIns="0" rIns="0" bIns="0" rtlCol="0" anchor="t"/>
-          <a:lstStyle/>
-          <a:p>
-            <a:pPr indent="0" marL="0">
-              <a:buNone/>
-            </a:pPr>
-            <a:r>
-              <a:rPr lang="en-US" sz="1400" b="1" dirty="0">
-                <a:solidFill>
-                  <a:srgbClr val="1E3A5F"/>
-                </a:solidFill>
-                <a:latin typeface="游ゴシック" pitchFamily="34" charset="0"/>
-                <a:ea typeface="游ゴシック" pitchFamily="34" charset="-122"/>
-                <a:cs typeface="游ゴシック" pitchFamily="34" charset="-120"/>
-              </a:rPr>
-              <a:t>繋ぐノートサポート</a:t>
-            </a:r>
-            <a:endParaRPr lang="en-US" sz="1400" dirty="0"/>
-          </a:p>
-          <a:p>
-            <a:pPr indent="0" marL="0">
-              <a:buNone/>
-            </a:pPr>
-            <a:r>
-              <a:rPr lang="en-US" sz="1400" b="1" dirty="0">
-                <a:solidFill>
-                  <a:srgbClr val="1E3A5F"/>
-                </a:solidFill>
-                <a:latin typeface="游ゴシック" pitchFamily="34" charset="0"/>
-                <a:ea typeface="游ゴシック" pitchFamily="34" charset="-122"/>
-                <a:cs typeface="游ゴシック" pitchFamily="34" charset="-120"/>
-              </a:rPr>
-              <a:t>アドバイザー®の輩出</a:t>
-            </a:r>
-            <a:endParaRPr lang="en-US" sz="1400" dirty="0"/>
-          </a:p>
-        </p:txBody>
-      </p:sp>
-      <p:sp>
-        <p:nvSpPr>
-          <p:cNvPr id="23" name="Text 21"/>
-          <p:cNvSpPr txBox="1"/>
-          <p:nvPr/>
-        </p:nvSpPr>
-        <p:spPr>
-          <a:xfrm>
-            <a:off x="9034272" y="4526280"/>
-            <a:ext cx="2157984" cy="685800"/>
-          </a:xfrm>
-          <a:prstGeom prst="rect">
-            <a:avLst/>
-          </a:prstGeom>
-          <a:noFill/>
-          <a:ln/>
-        </p:spPr>
-        <p:txBody>
-          <a:bodyPr wrap="square" lIns="0" tIns="0" rIns="0" bIns="0" rtlCol="0" anchor="t"/>
-          <a:lstStyle/>
-          <a:p>
-            <a:pPr indent="0" marL="0">
-              <a:lnSpc>
-                <a:spcPct val="120000"/>
-              </a:lnSpc>
-              <a:buNone/>
-            </a:pPr>
-            <a:r>
-              <a:rPr lang="en-US" sz="1100" dirty="0">
-                <a:solidFill>
-                  <a:srgbClr val="6B6B6B"/>
-                </a:solidFill>
-                <a:latin typeface="游ゴシック" pitchFamily="34" charset="0"/>
-                <a:ea typeface="游ゴシック" pitchFamily="34" charset="-122"/>
-                <a:cs typeface="游ゴシック" pitchFamily="34" charset="-120"/>
-              </a:rPr>
-              <a:t>業種を越えて「生きる準備」</a:t>
-            </a:r>
-            <a:endParaRPr lang="en-US" sz="1100" dirty="0"/>
-          </a:p>
-          <a:p>
-            <a:pPr indent="0" marL="0">
-              <a:lnSpc>
-                <a:spcPct val="120000"/>
-              </a:lnSpc>
-              <a:buNone/>
-            </a:pPr>
-            <a:r>
-              <a:rPr lang="en-US" sz="1100" dirty="0">
-                <a:solidFill>
-                  <a:srgbClr val="6B6B6B"/>
-                </a:solidFill>
-                <a:latin typeface="游ゴシック" pitchFamily="34" charset="0"/>
-                <a:ea typeface="游ゴシック" pitchFamily="34" charset="-122"/>
-                <a:cs typeface="游ゴシック" pitchFamily="34" charset="-120"/>
-              </a:rPr>
-              <a:t>を届ける人を全国に</a:t>
-            </a:r>
-            <a:endParaRPr lang="en-US" sz="1100" dirty="0"/>
-          </a:p>
-        </p:txBody>
-      </p:sp>
-      <p:sp>
-        <p:nvSpPr>
-          <p:cNvPr id="24" name="Text 22"/>
-          <p:cNvSpPr txBox="1"/>
-          <p:nvPr/>
-        </p:nvSpPr>
-        <p:spPr>
-          <a:xfrm>
-            <a:off x="640080" y="5577840"/>
-            <a:ext cx="10881360" cy="457200"/>
-          </a:xfrm>
-          <a:prstGeom prst="rect">
-            <a:avLst/>
-          </a:prstGeom>
-          <a:noFill/>
-          <a:ln/>
-        </p:spPr>
-        <p:txBody>
-          <a:bodyPr wrap="square" lIns="0" tIns="0" rIns="0" bIns="0" rtlCol="0" anchor="ctr"/>
-          <a:lstStyle/>
-          <a:p>
-            <a:pPr indent="0" marL="0">
-              <a:buNone/>
-            </a:pPr>
-            <a:r>
-              <a:rPr lang="en-US" sz="1300" i="1" dirty="0">
-                <a:solidFill>
-                  <a:srgbClr val="6B6B6B"/>
-                </a:solidFill>
-                <a:latin typeface="游ゴシック" pitchFamily="34" charset="0"/>
-                <a:ea typeface="游ゴシック" pitchFamily="34" charset="-122"/>
-                <a:cs typeface="游ゴシック" pitchFamily="34" charset="-120"/>
-              </a:rPr>
-              <a:t>「教育コンテンツ」という形のある資産が、相続コンサルティングの提供だけでなく、採用・ライセンスという新しい収益源になりうる。</a:t>
-            </a:r>
-            <a:endParaRPr lang="en-US" sz="1300" dirty="0"/>
-          </a:p>
-        </p:txBody>
-      </p:sp>
-      <p:sp>
-        <p:nvSpPr>
-          <p:cNvPr id="25" name="Text 23"/>
           <p:cNvSpPr txBox="1"/>
           <p:nvPr/>
         </p:nvSpPr>
@@ -4528,7 +4257,7 @@
                 <a:ea typeface="游ゴシック" pitchFamily="34" charset="-122"/>
                 <a:cs typeface="游ゴシック" pitchFamily="34" charset="-120"/>
               </a:rPr>
-              <a:t>04 / MARKET</a:t>
+              <a:t>BEYOND THE AWARD</a:t>
             </a:r>
             <a:endParaRPr lang="en-US" sz="1300" dirty="0"/>
           </a:p>
@@ -4567,7 +4296,7 @@
                 <a:ea typeface="游ゴシック" pitchFamily="34" charset="-122"/>
                 <a:cs typeface="游ゴシック" pitchFamily="34" charset="-120"/>
               </a:rPr>
-              <a:t>市場性 ― 「財産がある人」から、全世代・全業種へ</a:t>
+              <a:t>展望 ― 教育コンテンツ事業としての可能性</a:t>
             </a:r>
             <a:endParaRPr lang="en-US" sz="2700" dirty="0"/>
           </a:p>
@@ -4575,80 +4304,14 @@
       </p:sp>
       <p:sp>
         <p:nvSpPr>
-          <p:cNvPr id="4" name="Shape 2"/>
-          <p:cNvSpPr/>
-          <p:nvPr/>
-        </p:nvSpPr>
-        <p:spPr>
-          <a:xfrm>
-            <a:off x="10607040" y="502920"/>
-            <a:ext cx="822960" cy="822960"/>
-          </a:xfrm>
-          <a:prstGeom prst="ellipse">
-            <a:avLst/>
-          </a:prstGeom>
-          <a:solidFill>
-            <a:srgbClr val="C9603F"/>
-          </a:solidFill>
-          <a:ln/>
-          <a:effectLst>
-            <a:outerShdw sx="100000" sy="100000" kx="0" ky="0" algn="bl" rotWithShape="0" blurRad="101600" dist="38100" dir="5400000">
-              <a:srgbClr val="10233A">
-                <a:alpha val="18000"/>
-              </a:srgbClr>
-            </a:outerShdw>
-          </a:effectLst>
-        </p:spPr>
-      </p:sp>
-      <p:sp>
-        <p:nvSpPr>
-          <p:cNvPr id="5" name="Text 3"/>
-          <p:cNvSpPr txBox="1"/>
-          <p:nvPr/>
-        </p:nvSpPr>
-        <p:spPr>
-          <a:xfrm>
-            <a:off x="10607040" y="502920"/>
-            <a:ext cx="822960" cy="822960"/>
-          </a:xfrm>
-          <a:prstGeom prst="rect">
-            <a:avLst/>
-          </a:prstGeom>
-          <a:noFill/>
-          <a:ln/>
-        </p:spPr>
-        <p:txBody>
-          <a:bodyPr wrap="square" lIns="0" tIns="0" rIns="0" bIns="0" rtlCol="0" anchor="ctr"/>
-          <a:lstStyle/>
-          <a:p>
-            <a:pPr algn="ctr" indent="0" marL="0">
-              <a:buNone/>
-            </a:pPr>
-            <a:r>
-              <a:rPr lang="en-US" sz="2880" b="1" dirty="0">
-                <a:solidFill>
-                  <a:srgbClr val="FFFFFF"/>
-                </a:solidFill>
-                <a:latin typeface="游ゴシック" pitchFamily="34" charset="0"/>
-                <a:ea typeface="游ゴシック" pitchFamily="34" charset="-122"/>
-                <a:cs typeface="游ゴシック" pitchFamily="34" charset="-120"/>
-              </a:rPr>
-              <a:t>市</a:t>
-            </a:r>
-            <a:endParaRPr lang="en-US" sz="2880" dirty="0"/>
-          </a:p>
-        </p:txBody>
-      </p:sp>
-      <p:sp>
-        <p:nvSpPr>
-          <p:cNvPr id="6" name="Text 4"/>
+          <p:cNvPr id="4" name="Text 2"/>
           <p:cNvSpPr txBox="1"/>
           <p:nvPr/>
         </p:nvSpPr>
         <p:spPr>
           <a:xfrm>
             <a:off x="640080" y="1783080"/>
-            <a:ext cx="10881360" cy="4206240"/>
+            <a:ext cx="10881360" cy="1371600"/>
           </a:xfrm>
           <a:prstGeom prst="rect">
             <a:avLst/>
@@ -4671,7 +4334,7 @@
               <a:buChar char="●"/>
             </a:pPr>
             <a:r>
-              <a:rPr lang="en-US" sz="1500" dirty="0">
+              <a:rPr lang="en-US" sz="1450" dirty="0">
                 <a:solidFill>
                   <a:srgbClr val="3A3A3A"/>
                 </a:solidFill>
@@ -4679,9 +4342,9 @@
                 <a:ea typeface="游ゴシック" pitchFamily="34" charset="-122"/>
                 <a:cs typeface="游ゴシック" pitchFamily="34" charset="-120"/>
               </a:rPr>
-              <a:t>直接のターゲット：資産5億円〜10億円超の富裕層・超富裕層（素材①）</a:t>
-            </a:r>
-            <a:endParaRPr lang="en-US" sz="1500" dirty="0"/>
+              <a:t>大賞獲得を目指す先に、「繋ぐ相続サロン®」の人材育成メソッドそのものを、金融機関・不動産業界など相続ビジネスに関わるすべての専門家への教育コンテンツとして展開していく展望を持っている</a:t>
+            </a:r>
+            <a:endParaRPr lang="en-US" sz="1450" dirty="0"/>
           </a:p>
           <a:p>
             <a:pPr marL="342900" indent="-342900">
@@ -4695,7 +4358,7 @@
               <a:buChar char="●"/>
             </a:pPr>
             <a:r>
-              <a:rPr lang="en-US" sz="1500" dirty="0">
+              <a:rPr lang="en-US" sz="1450" dirty="0">
                 <a:solidFill>
                   <a:srgbClr val="3A3A3A"/>
                 </a:solidFill>
@@ -4703,54 +4366,30 @@
                 <a:ea typeface="游ゴシック" pitchFamily="34" charset="-122"/>
                 <a:cs typeface="游ゴシック" pitchFamily="34" charset="-120"/>
               </a:rPr>
-              <a:t>ACPを入口にすることで、財産の有無に関わらず誰もがターゲットになる市場へ構造的に拡大（素材②）</a:t>
-            </a:r>
-            <a:endParaRPr lang="en-US" sz="1500" dirty="0"/>
-          </a:p>
-          <a:p>
-            <a:pPr marL="342900" indent="-342900">
-              <a:lnSpc>
-                <a:spcPct val="128000"/>
-              </a:lnSpc>
-              <a:spcAft>
-                <a:spcPts val="1200"/>
-              </a:spcAft>
-              <a:buSzPct val="100000"/>
-              <a:buChar char="●"/>
-            </a:pPr>
-            <a:r>
-              <a:rPr lang="en-US" sz="1500" dirty="0">
-                <a:solidFill>
-                  <a:srgbClr val="3A3A3A"/>
-                </a:solidFill>
-                <a:latin typeface="游ゴシック" pitchFamily="34" charset="0"/>
-                <a:ea typeface="游ゴシック" pitchFamily="34" charset="-122"/>
-                <a:cs typeface="游ゴシック" pitchFamily="34" charset="-120"/>
-              </a:rPr>
-              <a:t>周辺専門家（税理士・司法書士・行政書士・弁護士・不動産・金融・有料老人ホーム・M&amp;A）を含めれば、市場は相続業界単体にとどまらない</a:t>
-            </a:r>
-            <a:endParaRPr lang="en-US" sz="1500" dirty="0"/>
-          </a:p>
-        </p:txBody>
-      </p:sp>
-      <p:sp>
-        <p:nvSpPr>
-          <p:cNvPr id="7" name="Shape 5"/>
+              <a:t>これはアイデアではない。「エキスパートコース」全6回分のカリキュラム（素材③）として、既に体系化・顕在化された教材が存在する</a:t>
+            </a:r>
+            <a:endParaRPr lang="en-US" sz="1450" dirty="0"/>
+          </a:p>
+        </p:txBody>
+      </p:sp>
+      <p:sp>
+        <p:nvSpPr>
+          <p:cNvPr id="5" name="Shape 3"/>
           <p:cNvSpPr/>
           <p:nvPr/>
         </p:nvSpPr>
         <p:spPr>
           <a:xfrm>
-            <a:off x="640080" y="4709160"/>
-            <a:ext cx="3200400" cy="1280160"/>
+            <a:off x="640080" y="3429000"/>
+            <a:ext cx="2487168" cy="1874520"/>
           </a:xfrm>
           <a:prstGeom prst="roundRect">
             <a:avLst>
-              <a:gd name="adj" fmla="val 7143"/>
+              <a:gd name="adj" fmla="val 4878"/>
             </a:avLst>
           </a:prstGeom>
           <a:solidFill>
-            <a:srgbClr val="F6F1EA"/>
+            <a:srgbClr val="C9603F"/>
           </a:solidFill>
           <a:ln/>
           <a:effectLst>
@@ -4764,14 +4403,154 @@
       </p:sp>
       <p:sp>
         <p:nvSpPr>
+          <p:cNvPr id="6" name="Text 4"/>
+          <p:cNvSpPr txBox="1"/>
+          <p:nvPr/>
+        </p:nvSpPr>
+        <p:spPr>
+          <a:xfrm>
+            <a:off x="804672" y="3593592"/>
+            <a:ext cx="2157984" cy="274320"/>
+          </a:xfrm>
+          <a:prstGeom prst="rect">
+            <a:avLst/>
+          </a:prstGeom>
+          <a:noFill/>
+          <a:ln/>
+        </p:spPr>
+        <p:txBody>
+          <a:bodyPr wrap="square" lIns="0" tIns="0" rIns="0" bIns="0" rtlCol="0" anchor="ctr"/>
+          <a:lstStyle/>
+          <a:p>
+            <a:pPr indent="0" marL="0">
+              <a:buNone/>
+            </a:pPr>
+            <a:r>
+              <a:rPr lang="en-US" sz="1050" b="1" dirty="0">
+                <a:solidFill>
+                  <a:srgbClr val="F1DCCF"/>
+                </a:solidFill>
+                <a:latin typeface="游ゴシック" pitchFamily="34" charset="0"/>
+                <a:ea typeface="游ゴシック" pitchFamily="34" charset="-122"/>
+                <a:cs typeface="游ゴシック" pitchFamily="34" charset="-120"/>
+              </a:rPr>
+              <a:t>実績（現在）</a:t>
+            </a:r>
+            <a:endParaRPr lang="en-US" sz="1050" dirty="0"/>
+          </a:p>
+        </p:txBody>
+      </p:sp>
+      <p:sp>
+        <p:nvSpPr>
+          <p:cNvPr id="7" name="Text 5"/>
+          <p:cNvSpPr txBox="1"/>
+          <p:nvPr/>
+        </p:nvSpPr>
+        <p:spPr>
+          <a:xfrm>
+            <a:off x="804672" y="3886200"/>
+            <a:ext cx="2157984" cy="594360"/>
+          </a:xfrm>
+          <a:prstGeom prst="rect">
+            <a:avLst/>
+          </a:prstGeom>
+          <a:noFill/>
+          <a:ln/>
+        </p:spPr>
+        <p:txBody>
+          <a:bodyPr wrap="square" lIns="0" tIns="0" rIns="0" bIns="0" rtlCol="0" anchor="t"/>
+          <a:lstStyle/>
+          <a:p>
+            <a:pPr indent="0" marL="0">
+              <a:buNone/>
+            </a:pPr>
+            <a:r>
+              <a:rPr lang="en-US" sz="1400" b="1" dirty="0">
+                <a:solidFill>
+                  <a:srgbClr val="FFFFFF"/>
+                </a:solidFill>
+                <a:latin typeface="游ゴシック" pitchFamily="34" charset="0"/>
+                <a:ea typeface="游ゴシック" pitchFamily="34" charset="-122"/>
+                <a:cs typeface="游ゴシック" pitchFamily="34" charset="-120"/>
+              </a:rPr>
+              <a:t>自社での育成</a:t>
+            </a:r>
+            <a:endParaRPr lang="en-US" sz="1400" dirty="0"/>
+          </a:p>
+        </p:txBody>
+      </p:sp>
+      <p:sp>
+        <p:nvSpPr>
           <p:cNvPr id="8" name="Text 6"/>
           <p:cNvSpPr txBox="1"/>
           <p:nvPr/>
         </p:nvSpPr>
         <p:spPr>
           <a:xfrm>
-            <a:off x="777240" y="4873752"/>
-            <a:ext cx="2926080" cy="665683"/>
+            <a:off x="804672" y="4526280"/>
+            <a:ext cx="2157984" cy="685800"/>
+          </a:xfrm>
+          <a:prstGeom prst="rect">
+            <a:avLst/>
+          </a:prstGeom>
+          <a:noFill/>
+          <a:ln/>
+        </p:spPr>
+        <p:txBody>
+          <a:bodyPr wrap="square" lIns="0" tIns="0" rIns="0" bIns="0" rtlCol="0" anchor="t"/>
+          <a:lstStyle/>
+          <a:p>
+            <a:pPr indent="0" marL="0">
+              <a:lnSpc>
+                <a:spcPct val="120000"/>
+              </a:lnSpc>
+              <a:buNone/>
+            </a:pPr>
+            <a:r>
+              <a:rPr lang="en-US" sz="1100" dirty="0">
+                <a:solidFill>
+                  <a:srgbClr val="F8E9DF"/>
+                </a:solidFill>
+                <a:latin typeface="游ゴシック" pitchFamily="34" charset="0"/>
+                <a:ea typeface="游ゴシック" pitchFamily="34" charset="-122"/>
+                <a:cs typeface="游ゴシック" pitchFamily="34" charset="-120"/>
+              </a:rPr>
+              <a:t>エキスパートコース全6回</a:t>
+            </a:r>
+            <a:endParaRPr lang="en-US" sz="1100" dirty="0"/>
+          </a:p>
+          <a:p>
+            <a:pPr indent="0" marL="0">
+              <a:lnSpc>
+                <a:spcPct val="120000"/>
+              </a:lnSpc>
+              <a:buNone/>
+            </a:pPr>
+            <a:r>
+              <a:rPr lang="en-US" sz="1100" dirty="0">
+                <a:solidFill>
+                  <a:srgbClr val="F8E9DF"/>
+                </a:solidFill>
+                <a:latin typeface="游ゴシック" pitchFamily="34" charset="0"/>
+                <a:ea typeface="游ゴシック" pitchFamily="34" charset="-122"/>
+                <a:cs typeface="游ゴシック" pitchFamily="34" charset="-120"/>
+              </a:rPr>
+              <a:t>資格者50名（2年）</a:t>
+            </a:r>
+            <a:endParaRPr lang="en-US" sz="1100" dirty="0"/>
+          </a:p>
+        </p:txBody>
+      </p:sp>
+      <p:sp>
+        <p:nvSpPr>
+          <p:cNvPr id="9" name="Text 7"/>
+          <p:cNvSpPr txBox="1"/>
+          <p:nvPr/>
+        </p:nvSpPr>
+        <p:spPr>
+          <a:xfrm>
+            <a:off x="3127248" y="4091940"/>
+            <a:ext cx="256032" cy="548640"/>
           </a:xfrm>
           <a:prstGeom prst="rect">
             <a:avLst/>
@@ -4787,7 +4566,7 @@
               <a:buNone/>
             </a:pPr>
             <a:r>
-              <a:rPr lang="en-US" sz="2200" b="1" dirty="0">
+              <a:rPr lang="en-US" sz="1600" b="1" dirty="0">
                 <a:solidFill>
                   <a:srgbClr val="C9603F"/>
                 </a:solidFill>
@@ -4795,48 +4574,9 @@
                 <a:ea typeface="游ゴシック" pitchFamily="34" charset="-122"/>
                 <a:cs typeface="游ゴシック" pitchFamily="34" charset="-120"/>
               </a:rPr>
-              <a:t>50事業所</a:t>
-            </a:r>
-            <a:endParaRPr lang="en-US" sz="2200" dirty="0"/>
-          </a:p>
-        </p:txBody>
-      </p:sp>
-      <p:sp>
-        <p:nvSpPr>
-          <p:cNvPr id="9" name="Text 7"/>
-          <p:cNvSpPr txBox="1"/>
-          <p:nvPr/>
-        </p:nvSpPr>
-        <p:spPr>
-          <a:xfrm>
-            <a:off x="731520" y="5426050"/>
-            <a:ext cx="3017520" cy="512064"/>
-          </a:xfrm>
-          <a:prstGeom prst="rect">
-            <a:avLst/>
-          </a:prstGeom>
-          <a:noFill/>
-          <a:ln/>
-        </p:spPr>
-        <p:txBody>
-          <a:bodyPr wrap="square" lIns="0" tIns="0" rIns="0" bIns="0" rtlCol="0" anchor="t"/>
-          <a:lstStyle/>
-          <a:p>
-            <a:pPr algn="ctr" indent="0" marL="0">
-              <a:buNone/>
-            </a:pPr>
-            <a:r>
-              <a:rPr lang="en-US" sz="1100" dirty="0">
-                <a:solidFill>
-                  <a:srgbClr val="1E3A5F"/>
-                </a:solidFill>
-                <a:latin typeface="游ゴシック" pitchFamily="34" charset="0"/>
-                <a:ea typeface="游ゴシック" pitchFamily="34" charset="-122"/>
-                <a:cs typeface="游ゴシック" pitchFamily="34" charset="-120"/>
-              </a:rPr>
-              <a:t>全国の拠点数</a:t>
-            </a:r>
-            <a:endParaRPr lang="en-US" sz="1100" dirty="0"/>
+              <a:t>→</a:t>
+            </a:r>
+            <a:endParaRPr lang="en-US" sz="1600" dirty="0"/>
           </a:p>
         </p:txBody>
       </p:sp>
@@ -4848,12 +4588,12 @@
         </p:nvSpPr>
         <p:spPr>
           <a:xfrm>
-            <a:off x="4251960" y="4709160"/>
-            <a:ext cx="3200400" cy="1280160"/>
+            <a:off x="3383280" y="3429000"/>
+            <a:ext cx="2487168" cy="1874520"/>
           </a:xfrm>
           <a:prstGeom prst="roundRect">
             <a:avLst>
-              <a:gd name="adj" fmla="val 7143"/>
+              <a:gd name="adj" fmla="val 4878"/>
             </a:avLst>
           </a:prstGeom>
           <a:solidFill>
@@ -4877,8 +4617,148 @@
         </p:nvSpPr>
         <p:spPr>
           <a:xfrm>
-            <a:off x="4389120" y="4873752"/>
-            <a:ext cx="2926080" cy="665683"/>
+            <a:off x="3547872" y="3593592"/>
+            <a:ext cx="2157984" cy="274320"/>
+          </a:xfrm>
+          <a:prstGeom prst="rect">
+            <a:avLst/>
+          </a:prstGeom>
+          <a:noFill/>
+          <a:ln/>
+        </p:spPr>
+        <p:txBody>
+          <a:bodyPr wrap="square" lIns="0" tIns="0" rIns="0" bIns="0" rtlCol="0" anchor="ctr"/>
+          <a:lstStyle/>
+          <a:p>
+            <a:pPr indent="0" marL="0">
+              <a:buNone/>
+            </a:pPr>
+            <a:r>
+              <a:rPr lang="en-US" sz="1050" b="1" dirty="0">
+                <a:solidFill>
+                  <a:srgbClr val="C9603F"/>
+                </a:solidFill>
+                <a:latin typeface="游ゴシック" pitchFamily="34" charset="0"/>
+                <a:ea typeface="游ゴシック" pitchFamily="34" charset="-122"/>
+                <a:cs typeface="游ゴシック" pitchFamily="34" charset="-120"/>
+              </a:rPr>
+              <a:t>展望①</a:t>
+            </a:r>
+            <a:endParaRPr lang="en-US" sz="1050" dirty="0"/>
+          </a:p>
+        </p:txBody>
+      </p:sp>
+      <p:sp>
+        <p:nvSpPr>
+          <p:cNvPr id="12" name="Text 10"/>
+          <p:cNvSpPr txBox="1"/>
+          <p:nvPr/>
+        </p:nvSpPr>
+        <p:spPr>
+          <a:xfrm>
+            <a:off x="3547872" y="3886200"/>
+            <a:ext cx="2157984" cy="594360"/>
+          </a:xfrm>
+          <a:prstGeom prst="rect">
+            <a:avLst/>
+          </a:prstGeom>
+          <a:noFill/>
+          <a:ln/>
+        </p:spPr>
+        <p:txBody>
+          <a:bodyPr wrap="square" lIns="0" tIns="0" rIns="0" bIns="0" rtlCol="0" anchor="t"/>
+          <a:lstStyle/>
+          <a:p>
+            <a:pPr indent="0" marL="0">
+              <a:buNone/>
+            </a:pPr>
+            <a:r>
+              <a:rPr lang="en-US" sz="1400" b="1" dirty="0">
+                <a:solidFill>
+                  <a:srgbClr val="1E3A5F"/>
+                </a:solidFill>
+                <a:latin typeface="游ゴシック" pitchFamily="34" charset="0"/>
+                <a:ea typeface="游ゴシック" pitchFamily="34" charset="-122"/>
+                <a:cs typeface="游ゴシック" pitchFamily="34" charset="-120"/>
+              </a:rPr>
+              <a:t>金融機関への採用</a:t>
+            </a:r>
+            <a:endParaRPr lang="en-US" sz="1400" dirty="0"/>
+          </a:p>
+        </p:txBody>
+      </p:sp>
+      <p:sp>
+        <p:nvSpPr>
+          <p:cNvPr id="13" name="Text 11"/>
+          <p:cNvSpPr txBox="1"/>
+          <p:nvPr/>
+        </p:nvSpPr>
+        <p:spPr>
+          <a:xfrm>
+            <a:off x="3547872" y="4526280"/>
+            <a:ext cx="2157984" cy="685800"/>
+          </a:xfrm>
+          <a:prstGeom prst="rect">
+            <a:avLst/>
+          </a:prstGeom>
+          <a:noFill/>
+          <a:ln/>
+        </p:spPr>
+        <p:txBody>
+          <a:bodyPr wrap="square" lIns="0" tIns="0" rIns="0" bIns="0" rtlCol="0" anchor="t"/>
+          <a:lstStyle/>
+          <a:p>
+            <a:pPr indent="0" marL="0">
+              <a:lnSpc>
+                <a:spcPct val="120000"/>
+              </a:lnSpc>
+              <a:buNone/>
+            </a:pPr>
+            <a:r>
+              <a:rPr lang="en-US" sz="1100" dirty="0">
+                <a:solidFill>
+                  <a:srgbClr val="6B6B6B"/>
+                </a:solidFill>
+                <a:latin typeface="游ゴシック" pitchFamily="34" charset="0"/>
+                <a:ea typeface="游ゴシック" pitchFamily="34" charset="-122"/>
+                <a:cs typeface="游ゴシック" pitchFamily="34" charset="-120"/>
+              </a:rPr>
+              <a:t>行員研修プログラム</a:t>
+            </a:r>
+            <a:endParaRPr lang="en-US" sz="1100" dirty="0"/>
+          </a:p>
+          <a:p>
+            <a:pPr indent="0" marL="0">
+              <a:lnSpc>
+                <a:spcPct val="120000"/>
+              </a:lnSpc>
+              <a:buNone/>
+            </a:pPr>
+            <a:r>
+              <a:rPr lang="en-US" sz="1100" dirty="0">
+                <a:solidFill>
+                  <a:srgbClr val="6B6B6B"/>
+                </a:solidFill>
+                <a:latin typeface="游ゴシック" pitchFamily="34" charset="0"/>
+                <a:ea typeface="游ゴシック" pitchFamily="34" charset="-122"/>
+                <a:cs typeface="游ゴシック" pitchFamily="34" charset="-120"/>
+              </a:rPr>
+              <a:t>として導入</a:t>
+            </a:r>
+            <a:endParaRPr lang="en-US" sz="1100" dirty="0"/>
+          </a:p>
+        </p:txBody>
+      </p:sp>
+      <p:sp>
+        <p:nvSpPr>
+          <p:cNvPr id="14" name="Text 12"/>
+          <p:cNvSpPr txBox="1"/>
+          <p:nvPr/>
+        </p:nvSpPr>
+        <p:spPr>
+          <a:xfrm>
+            <a:off x="5870448" y="4091940"/>
+            <a:ext cx="256032" cy="548640"/>
           </a:xfrm>
           <a:prstGeom prst="rect">
             <a:avLst/>
@@ -4894,7 +4774,7 @@
               <a:buNone/>
             </a:pPr>
             <a:r>
-              <a:rPr lang="en-US" sz="2200" b="1" dirty="0">
+              <a:rPr lang="en-US" sz="1600" b="1" dirty="0">
                 <a:solidFill>
                   <a:srgbClr val="C9603F"/>
                 </a:solidFill>
@@ -4902,65 +4782,26 @@
                 <a:ea typeface="游ゴシック" pitchFamily="34" charset="-122"/>
                 <a:cs typeface="游ゴシック" pitchFamily="34" charset="-120"/>
               </a:rPr>
-              <a:t>資産5〜10億円超</a:t>
-            </a:r>
-            <a:endParaRPr lang="en-US" sz="2200" dirty="0"/>
-          </a:p>
-        </p:txBody>
-      </p:sp>
-      <p:sp>
-        <p:nvSpPr>
-          <p:cNvPr id="12" name="Text 10"/>
-          <p:cNvSpPr txBox="1"/>
-          <p:nvPr/>
-        </p:nvSpPr>
-        <p:spPr>
-          <a:xfrm>
-            <a:off x="4343400" y="5426050"/>
-            <a:ext cx="3017520" cy="512064"/>
-          </a:xfrm>
-          <a:prstGeom prst="rect">
-            <a:avLst/>
-          </a:prstGeom>
-          <a:noFill/>
-          <a:ln/>
-        </p:spPr>
-        <p:txBody>
-          <a:bodyPr wrap="square" lIns="0" tIns="0" rIns="0" bIns="0" rtlCol="0" anchor="t"/>
-          <a:lstStyle/>
-          <a:p>
-            <a:pPr algn="ctr" indent="0" marL="0">
-              <a:buNone/>
-            </a:pPr>
-            <a:r>
-              <a:rPr lang="en-US" sz="1100" dirty="0">
-                <a:solidFill>
-                  <a:srgbClr val="1E3A5F"/>
-                </a:solidFill>
-                <a:latin typeface="游ゴシック" pitchFamily="34" charset="0"/>
-                <a:ea typeface="游ゴシック" pitchFamily="34" charset="-122"/>
-                <a:cs typeface="游ゴシック" pitchFamily="34" charset="-120"/>
-              </a:rPr>
-              <a:t>直接の顧客層</a:t>
-            </a:r>
-            <a:endParaRPr lang="en-US" sz="1100" dirty="0"/>
-          </a:p>
-        </p:txBody>
-      </p:sp>
-      <p:sp>
-        <p:nvSpPr>
-          <p:cNvPr id="13" name="Shape 11"/>
+              <a:t>→</a:t>
+            </a:r>
+            <a:endParaRPr lang="en-US" sz="1600" dirty="0"/>
+          </a:p>
+        </p:txBody>
+      </p:sp>
+      <p:sp>
+        <p:nvSpPr>
+          <p:cNvPr id="15" name="Shape 13"/>
           <p:cNvSpPr/>
           <p:nvPr/>
         </p:nvSpPr>
         <p:spPr>
           <a:xfrm>
-            <a:off x="7863840" y="4709160"/>
-            <a:ext cx="3200400" cy="1280160"/>
+            <a:off x="6126480" y="3429000"/>
+            <a:ext cx="2487168" cy="1874520"/>
           </a:xfrm>
           <a:prstGeom prst="roundRect">
             <a:avLst>
-              <a:gd name="adj" fmla="val 7143"/>
+              <a:gd name="adj" fmla="val 4878"/>
             </a:avLst>
           </a:prstGeom>
           <a:solidFill>
@@ -4978,14 +4819,154 @@
       </p:sp>
       <p:sp>
         <p:nvSpPr>
-          <p:cNvPr id="14" name="Text 12"/>
-          <p:cNvSpPr txBox="1"/>
-          <p:nvPr/>
-        </p:nvSpPr>
-        <p:spPr>
-          <a:xfrm>
-            <a:off x="8001000" y="4873752"/>
-            <a:ext cx="2926080" cy="665683"/>
+          <p:cNvPr id="16" name="Text 14"/>
+          <p:cNvSpPr txBox="1"/>
+          <p:nvPr/>
+        </p:nvSpPr>
+        <p:spPr>
+          <a:xfrm>
+            <a:off x="6291072" y="3593592"/>
+            <a:ext cx="2157984" cy="274320"/>
+          </a:xfrm>
+          <a:prstGeom prst="rect">
+            <a:avLst/>
+          </a:prstGeom>
+          <a:noFill/>
+          <a:ln/>
+        </p:spPr>
+        <p:txBody>
+          <a:bodyPr wrap="square" lIns="0" tIns="0" rIns="0" bIns="0" rtlCol="0" anchor="ctr"/>
+          <a:lstStyle/>
+          <a:p>
+            <a:pPr indent="0" marL="0">
+              <a:buNone/>
+            </a:pPr>
+            <a:r>
+              <a:rPr lang="en-US" sz="1050" b="1" dirty="0">
+                <a:solidFill>
+                  <a:srgbClr val="C9603F"/>
+                </a:solidFill>
+                <a:latin typeface="游ゴシック" pitchFamily="34" charset="0"/>
+                <a:ea typeface="游ゴシック" pitchFamily="34" charset="-122"/>
+                <a:cs typeface="游ゴシック" pitchFamily="34" charset="-120"/>
+              </a:rPr>
+              <a:t>展望②</a:t>
+            </a:r>
+            <a:endParaRPr lang="en-US" sz="1050" dirty="0"/>
+          </a:p>
+        </p:txBody>
+      </p:sp>
+      <p:sp>
+        <p:nvSpPr>
+          <p:cNvPr id="17" name="Text 15"/>
+          <p:cNvSpPr txBox="1"/>
+          <p:nvPr/>
+        </p:nvSpPr>
+        <p:spPr>
+          <a:xfrm>
+            <a:off x="6291072" y="3886200"/>
+            <a:ext cx="2157984" cy="594360"/>
+          </a:xfrm>
+          <a:prstGeom prst="rect">
+            <a:avLst/>
+          </a:prstGeom>
+          <a:noFill/>
+          <a:ln/>
+        </p:spPr>
+        <p:txBody>
+          <a:bodyPr wrap="square" lIns="0" tIns="0" rIns="0" bIns="0" rtlCol="0" anchor="t"/>
+          <a:lstStyle/>
+          <a:p>
+            <a:pPr indent="0" marL="0">
+              <a:buNone/>
+            </a:pPr>
+            <a:r>
+              <a:rPr lang="en-US" sz="1400" b="1" dirty="0">
+                <a:solidFill>
+                  <a:srgbClr val="1E3A5F"/>
+                </a:solidFill>
+                <a:latin typeface="游ゴシック" pitchFamily="34" charset="0"/>
+                <a:ea typeface="游ゴシック" pitchFamily="34" charset="-122"/>
+                <a:cs typeface="游ゴシック" pitchFamily="34" charset="-120"/>
+              </a:rPr>
+              <a:t>不動産・士業への展開</a:t>
+            </a:r>
+            <a:endParaRPr lang="en-US" sz="1400" dirty="0"/>
+          </a:p>
+        </p:txBody>
+      </p:sp>
+      <p:sp>
+        <p:nvSpPr>
+          <p:cNvPr id="18" name="Text 16"/>
+          <p:cNvSpPr txBox="1"/>
+          <p:nvPr/>
+        </p:nvSpPr>
+        <p:spPr>
+          <a:xfrm>
+            <a:off x="6291072" y="4526280"/>
+            <a:ext cx="2157984" cy="685800"/>
+          </a:xfrm>
+          <a:prstGeom prst="rect">
+            <a:avLst/>
+          </a:prstGeom>
+          <a:noFill/>
+          <a:ln/>
+        </p:spPr>
+        <p:txBody>
+          <a:bodyPr wrap="square" lIns="0" tIns="0" rIns="0" bIns="0" rtlCol="0" anchor="t"/>
+          <a:lstStyle/>
+          <a:p>
+            <a:pPr indent="0" marL="0">
+              <a:lnSpc>
+                <a:spcPct val="120000"/>
+              </a:lnSpc>
+              <a:buNone/>
+            </a:pPr>
+            <a:r>
+              <a:rPr lang="en-US" sz="1100" dirty="0">
+                <a:solidFill>
+                  <a:srgbClr val="6B6B6B"/>
+                </a:solidFill>
+                <a:latin typeface="游ゴシック" pitchFamily="34" charset="0"/>
+                <a:ea typeface="游ゴシック" pitchFamily="34" charset="-122"/>
+                <a:cs typeface="游ゴシック" pitchFamily="34" charset="-120"/>
+              </a:rPr>
+              <a:t>業界横断の</a:t>
+            </a:r>
+            <a:endParaRPr lang="en-US" sz="1100" dirty="0"/>
+          </a:p>
+          <a:p>
+            <a:pPr indent="0" marL="0">
+              <a:lnSpc>
+                <a:spcPct val="120000"/>
+              </a:lnSpc>
+              <a:buNone/>
+            </a:pPr>
+            <a:r>
+              <a:rPr lang="en-US" sz="1100" dirty="0">
+                <a:solidFill>
+                  <a:srgbClr val="6B6B6B"/>
+                </a:solidFill>
+                <a:latin typeface="游ゴシック" pitchFamily="34" charset="0"/>
+                <a:ea typeface="游ゴシック" pitchFamily="34" charset="-122"/>
+                <a:cs typeface="游ゴシック" pitchFamily="34" charset="-120"/>
+              </a:rPr>
+              <a:t>標準研修へ</a:t>
+            </a:r>
+            <a:endParaRPr lang="en-US" sz="1100" dirty="0"/>
+          </a:p>
+        </p:txBody>
+      </p:sp>
+      <p:sp>
+        <p:nvSpPr>
+          <p:cNvPr id="19" name="Text 17"/>
+          <p:cNvSpPr txBox="1"/>
+          <p:nvPr/>
+        </p:nvSpPr>
+        <p:spPr>
+          <a:xfrm>
+            <a:off x="8613648" y="4091940"/>
+            <a:ext cx="256032" cy="548640"/>
           </a:xfrm>
           <a:prstGeom prst="rect">
             <a:avLst/>
@@ -5001,7 +4982,7 @@
               <a:buNone/>
             </a:pPr>
             <a:r>
-              <a:rPr lang="en-US" sz="2200" b="1" dirty="0">
+              <a:rPr lang="en-US" sz="1600" b="1" dirty="0">
                 <a:solidFill>
                   <a:srgbClr val="C9603F"/>
                 </a:solidFill>
@@ -5009,22 +4990,90 @@
                 <a:ea typeface="游ゴシック" pitchFamily="34" charset="-122"/>
                 <a:cs typeface="游ゴシック" pitchFamily="34" charset="-120"/>
               </a:rPr>
-              <a:t>約100億円</a:t>
-            </a:r>
-            <a:endParaRPr lang="en-US" sz="2200" dirty="0"/>
-          </a:p>
-        </p:txBody>
-      </p:sp>
-      <p:sp>
-        <p:nvSpPr>
-          <p:cNvPr id="15" name="Text 13"/>
-          <p:cNvSpPr txBox="1"/>
-          <p:nvPr/>
-        </p:nvSpPr>
-        <p:spPr>
-          <a:xfrm>
-            <a:off x="7955280" y="5426050"/>
-            <a:ext cx="3017520" cy="512064"/>
+              <a:t>→</a:t>
+            </a:r>
+            <a:endParaRPr lang="en-US" sz="1600" dirty="0"/>
+          </a:p>
+        </p:txBody>
+      </p:sp>
+      <p:sp>
+        <p:nvSpPr>
+          <p:cNvPr id="20" name="Shape 18"/>
+          <p:cNvSpPr/>
+          <p:nvPr/>
+        </p:nvSpPr>
+        <p:spPr>
+          <a:xfrm>
+            <a:off x="8869680" y="3429000"/>
+            <a:ext cx="2487168" cy="1874520"/>
+          </a:xfrm>
+          <a:prstGeom prst="roundRect">
+            <a:avLst>
+              <a:gd name="adj" fmla="val 4878"/>
+            </a:avLst>
+          </a:prstGeom>
+          <a:solidFill>
+            <a:srgbClr val="F6F1EA"/>
+          </a:solidFill>
+          <a:ln/>
+          <a:effectLst>
+            <a:outerShdw sx="100000" sy="100000" kx="0" ky="0" algn="bl" rotWithShape="0" blurRad="101600" dist="38100" dir="5400000">
+              <a:srgbClr val="10233A">
+                <a:alpha val="18000"/>
+              </a:srgbClr>
+            </a:outerShdw>
+          </a:effectLst>
+        </p:spPr>
+      </p:sp>
+      <p:sp>
+        <p:nvSpPr>
+          <p:cNvPr id="21" name="Text 19"/>
+          <p:cNvSpPr txBox="1"/>
+          <p:nvPr/>
+        </p:nvSpPr>
+        <p:spPr>
+          <a:xfrm>
+            <a:off x="9034272" y="3593592"/>
+            <a:ext cx="2157984" cy="274320"/>
+          </a:xfrm>
+          <a:prstGeom prst="rect">
+            <a:avLst/>
+          </a:prstGeom>
+          <a:noFill/>
+          <a:ln/>
+        </p:spPr>
+        <p:txBody>
+          <a:bodyPr wrap="square" lIns="0" tIns="0" rIns="0" bIns="0" rtlCol="0" anchor="ctr"/>
+          <a:lstStyle/>
+          <a:p>
+            <a:pPr indent="0" marL="0">
+              <a:buNone/>
+            </a:pPr>
+            <a:r>
+              <a:rPr lang="en-US" sz="1050" b="1" dirty="0">
+                <a:solidFill>
+                  <a:srgbClr val="C9603F"/>
+                </a:solidFill>
+                <a:latin typeface="游ゴシック" pitchFamily="34" charset="0"/>
+                <a:ea typeface="游ゴシック" pitchFamily="34" charset="-122"/>
+                <a:cs typeface="游ゴシック" pitchFamily="34" charset="-120"/>
+              </a:rPr>
+              <a:t>展望③</a:t>
+            </a:r>
+            <a:endParaRPr lang="en-US" sz="1050" dirty="0"/>
+          </a:p>
+        </p:txBody>
+      </p:sp>
+      <p:sp>
+        <p:nvSpPr>
+          <p:cNvPr id="22" name="Text 20"/>
+          <p:cNvSpPr txBox="1"/>
+          <p:nvPr/>
+        </p:nvSpPr>
+        <p:spPr>
+          <a:xfrm>
+            <a:off x="9034272" y="3886200"/>
+            <a:ext cx="2157984" cy="594360"/>
           </a:xfrm>
           <a:prstGeom prst="rect">
             <a:avLst/>
@@ -5036,27 +5085,145 @@
           <a:bodyPr wrap="square" lIns="0" tIns="0" rIns="0" bIns="0" rtlCol="0" anchor="t"/>
           <a:lstStyle/>
           <a:p>
-            <a:pPr algn="ctr" indent="0" marL="0">
+            <a:pPr indent="0" marL="0">
+              <a:buNone/>
+            </a:pPr>
+            <a:r>
+              <a:rPr lang="en-US" sz="1400" b="1" dirty="0">
+                <a:solidFill>
+                  <a:srgbClr val="1E3A5F"/>
+                </a:solidFill>
+                <a:latin typeface="游ゴシック" pitchFamily="34" charset="0"/>
+                <a:ea typeface="游ゴシック" pitchFamily="34" charset="-122"/>
+                <a:cs typeface="游ゴシック" pitchFamily="34" charset="-120"/>
+              </a:rPr>
+              <a:t>繋ぐノートサポート</a:t>
+            </a:r>
+            <a:endParaRPr lang="en-US" sz="1400" dirty="0"/>
+          </a:p>
+          <a:p>
+            <a:pPr indent="0" marL="0">
+              <a:buNone/>
+            </a:pPr>
+            <a:r>
+              <a:rPr lang="en-US" sz="1400" b="1" dirty="0">
+                <a:solidFill>
+                  <a:srgbClr val="1E3A5F"/>
+                </a:solidFill>
+                <a:latin typeface="游ゴシック" pitchFamily="34" charset="0"/>
+                <a:ea typeface="游ゴシック" pitchFamily="34" charset="-122"/>
+                <a:cs typeface="游ゴシック" pitchFamily="34" charset="-120"/>
+              </a:rPr>
+              <a:t>アドバイザー®の輩出</a:t>
+            </a:r>
+            <a:endParaRPr lang="en-US" sz="1400" dirty="0"/>
+          </a:p>
+        </p:txBody>
+      </p:sp>
+      <p:sp>
+        <p:nvSpPr>
+          <p:cNvPr id="23" name="Text 21"/>
+          <p:cNvSpPr txBox="1"/>
+          <p:nvPr/>
+        </p:nvSpPr>
+        <p:spPr>
+          <a:xfrm>
+            <a:off x="9034272" y="4526280"/>
+            <a:ext cx="2157984" cy="685800"/>
+          </a:xfrm>
+          <a:prstGeom prst="rect">
+            <a:avLst/>
+          </a:prstGeom>
+          <a:noFill/>
+          <a:ln/>
+        </p:spPr>
+        <p:txBody>
+          <a:bodyPr wrap="square" lIns="0" tIns="0" rIns="0" bIns="0" rtlCol="0" anchor="t"/>
+          <a:lstStyle/>
+          <a:p>
+            <a:pPr indent="0" marL="0">
+              <a:lnSpc>
+                <a:spcPct val="120000"/>
+              </a:lnSpc>
               <a:buNone/>
             </a:pPr>
             <a:r>
               <a:rPr lang="en-US" sz="1100" dirty="0">
                 <a:solidFill>
-                  <a:srgbClr val="1E3A5F"/>
-                </a:solidFill>
-                <a:latin typeface="游ゴシック" pitchFamily="34" charset="0"/>
-                <a:ea typeface="游ゴシック" pitchFamily="34" charset="-122"/>
-                <a:cs typeface="游ゴシック" pitchFamily="34" charset="-120"/>
-              </a:rPr>
-              <a:t>周辺経済圏</a:t>
+                  <a:srgbClr val="6B6B6B"/>
+                </a:solidFill>
+                <a:latin typeface="游ゴシック" pitchFamily="34" charset="0"/>
+                <a:ea typeface="游ゴシック" pitchFamily="34" charset="-122"/>
+                <a:cs typeface="游ゴシック" pitchFamily="34" charset="-120"/>
+              </a:rPr>
+              <a:t>業種を越えて「生きる準備」</a:t>
             </a:r>
             <a:endParaRPr lang="en-US" sz="1100" dirty="0"/>
           </a:p>
-        </p:txBody>
-      </p:sp>
-      <p:sp>
-        <p:nvSpPr>
-          <p:cNvPr id="16" name="Text 14"/>
+          <a:p>
+            <a:pPr indent="0" marL="0">
+              <a:lnSpc>
+                <a:spcPct val="120000"/>
+              </a:lnSpc>
+              <a:buNone/>
+            </a:pPr>
+            <a:r>
+              <a:rPr lang="en-US" sz="1100" dirty="0">
+                <a:solidFill>
+                  <a:srgbClr val="6B6B6B"/>
+                </a:solidFill>
+                <a:latin typeface="游ゴシック" pitchFamily="34" charset="0"/>
+                <a:ea typeface="游ゴシック" pitchFamily="34" charset="-122"/>
+                <a:cs typeface="游ゴシック" pitchFamily="34" charset="-120"/>
+              </a:rPr>
+              <a:t>を届ける人を全国に</a:t>
+            </a:r>
+            <a:endParaRPr lang="en-US" sz="1100" dirty="0"/>
+          </a:p>
+        </p:txBody>
+      </p:sp>
+      <p:sp>
+        <p:nvSpPr>
+          <p:cNvPr id="24" name="Text 22"/>
+          <p:cNvSpPr txBox="1"/>
+          <p:nvPr/>
+        </p:nvSpPr>
+        <p:spPr>
+          <a:xfrm>
+            <a:off x="640080" y="5577840"/>
+            <a:ext cx="10881360" cy="457200"/>
+          </a:xfrm>
+          <a:prstGeom prst="rect">
+            <a:avLst/>
+          </a:prstGeom>
+          <a:noFill/>
+          <a:ln/>
+        </p:spPr>
+        <p:txBody>
+          <a:bodyPr wrap="square" lIns="0" tIns="0" rIns="0" bIns="0" rtlCol="0" anchor="ctr"/>
+          <a:lstStyle/>
+          <a:p>
+            <a:pPr indent="0" marL="0">
+              <a:buNone/>
+            </a:pPr>
+            <a:r>
+              <a:rPr lang="en-US" sz="1300" i="1" dirty="0">
+                <a:solidFill>
+                  <a:srgbClr val="6B6B6B"/>
+                </a:solidFill>
+                <a:latin typeface="游ゴシック" pitchFamily="34" charset="0"/>
+                <a:ea typeface="游ゴシック" pitchFamily="34" charset="-122"/>
+                <a:cs typeface="游ゴシック" pitchFamily="34" charset="-120"/>
+              </a:rPr>
+              <a:t>「教育コンテンツ」という形のある資産が、相続コンサルティングの提供だけでなく、採用・ライセンスという新しい収益源になりうる。</a:t>
+            </a:r>
+            <a:endParaRPr lang="en-US" sz="1300" dirty="0"/>
+          </a:p>
+        </p:txBody>
+      </p:sp>
+      <p:sp>
+        <p:nvSpPr>
+          <p:cNvPr id="25" name="Text 23"/>
           <p:cNvSpPr txBox="1"/>
           <p:nvPr/>
         </p:nvSpPr>
@@ -5158,7 +5325,7 @@
                 <a:ea typeface="游ゴシック" pitchFamily="34" charset="-122"/>
                 <a:cs typeface="游ゴシック" pitchFamily="34" charset="-120"/>
               </a:rPr>
-              <a:t>05 / ADVANTAGE</a:t>
+              <a:t>04 / MARKET</a:t>
             </a:r>
             <a:endParaRPr lang="en-US" sz="1300" dirty="0"/>
           </a:p>
@@ -5197,7 +5364,7 @@
                 <a:ea typeface="游ゴシック" pitchFamily="34" charset="-122"/>
                 <a:cs typeface="游ゴシック" pitchFamily="34" charset="-120"/>
               </a:rPr>
-              <a:t>優位性 ― 「バッジのない」からこそ生まれた協業モデル</a:t>
+              <a:t>市場性 ― 「財産がある人」から、全世代・全業種へ</a:t>
             </a:r>
             <a:endParaRPr lang="en-US" sz="2700" dirty="0"/>
           </a:p>
@@ -5263,7 +5430,7 @@
                 <a:ea typeface="游ゴシック" pitchFamily="34" charset="-122"/>
                 <a:cs typeface="游ゴシック" pitchFamily="34" charset="-120"/>
               </a:rPr>
-              <a:t>優</a:t>
+              <a:t>市</a:t>
             </a:r>
             <a:endParaRPr lang="en-US" sz="2880" dirty="0"/>
           </a:p>
@@ -5271,75 +5438,14 @@
       </p:sp>
       <p:sp>
         <p:nvSpPr>
-          <p:cNvPr id="6" name="Shape 4"/>
-          <p:cNvSpPr/>
+          <p:cNvPr id="6" name="Text 4"/>
+          <p:cNvSpPr txBox="1"/>
           <p:nvPr/>
         </p:nvSpPr>
         <p:spPr>
           <a:xfrm>
             <a:off x="640080" y="1783080"/>
-            <a:ext cx="10881360" cy="822960"/>
-          </a:xfrm>
-          <a:prstGeom prst="roundRect">
-            <a:avLst>
-              <a:gd name="adj" fmla="val 8889"/>
-            </a:avLst>
-          </a:prstGeom>
-          <a:solidFill>
-            <a:srgbClr val="1E3A5F"/>
-          </a:solidFill>
-          <a:ln/>
-        </p:spPr>
-      </p:sp>
-      <p:sp>
-        <p:nvSpPr>
-          <p:cNvPr id="7" name="Text 5"/>
-          <p:cNvSpPr txBox="1"/>
-          <p:nvPr/>
-        </p:nvSpPr>
-        <p:spPr>
-          <a:xfrm>
-            <a:off x="914400" y="1783080"/>
-            <a:ext cx="10332720" cy="822960"/>
-          </a:xfrm>
-          <a:prstGeom prst="rect">
-            <a:avLst/>
-          </a:prstGeom>
-          <a:noFill/>
-          <a:ln/>
-        </p:spPr>
-        <p:txBody>
-          <a:bodyPr wrap="square" lIns="0" tIns="0" rIns="0" bIns="0" rtlCol="0" anchor="ctr"/>
-          <a:lstStyle/>
-          <a:p>
-            <a:pPr algn="l" indent="0" marL="0">
-              <a:buNone/>
-            </a:pPr>
-            <a:r>
-              <a:rPr lang="en-US" sz="1450" i="1" dirty="0">
-                <a:solidFill>
-                  <a:srgbClr val="F1DCCF"/>
-                </a:solidFill>
-                <a:latin typeface="游ゴシック" pitchFamily="34" charset="0"/>
-                <a:ea typeface="游ゴシック" pitchFamily="34" charset="-122"/>
-                <a:cs typeface="游ゴシック" pitchFamily="34" charset="-120"/>
-              </a:rPr>
-              <a:t>『バッジのない、コンサルタントに、相続ビジネスの何ができるのか？』―起業当初、ある士業の先生に言われた言葉</a:t>
-            </a:r>
-            <a:endParaRPr lang="en-US" sz="1450" dirty="0"/>
-          </a:p>
-        </p:txBody>
-      </p:sp>
-      <p:sp>
-        <p:nvSpPr>
-          <p:cNvPr id="8" name="Text 6"/>
-          <p:cNvSpPr txBox="1"/>
-          <p:nvPr/>
-        </p:nvSpPr>
-        <p:spPr>
-          <a:xfrm>
-            <a:off x="640080" y="2834640"/>
-            <a:ext cx="10881360" cy="3154680"/>
+            <a:ext cx="10881360" cy="4206240"/>
           </a:xfrm>
           <a:prstGeom prst="rect">
             <a:avLst/>
@@ -5370,7 +5476,7 @@
                 <a:ea typeface="游ゴシック" pitchFamily="34" charset="-122"/>
                 <a:cs typeface="游ゴシック" pitchFamily="34" charset="-120"/>
               </a:rPr>
-              <a:t>その後、「士業の先生が私に足を向けて寝れないくらい」仕事を生み出し続け、自分の収益だけを追わない「本当の協業スタイル」を確立（素材①）</a:t>
+              <a:t>直接のターゲット：資産5億円〜10億円超の富裕層・超富裕層（素材①）</a:t>
             </a:r>
             <a:endParaRPr lang="en-US" sz="1500" dirty="0"/>
           </a:p>
@@ -5394,7 +5500,7 @@
                 <a:ea typeface="游ゴシック" pitchFamily="34" charset="-122"/>
                 <a:cs typeface="游ゴシック" pitchFamily="34" charset="-120"/>
               </a:rPr>
-              <a:t>この協業の仕組みを、第3回（紹介構造）・第4回（“人生の指揮官”モデル）のカリキュラムとして教材化し、再現可能な技術にしている（素材③）</a:t>
+              <a:t>ACPを入口にすることで、財産の有無に関わらず誰もがターゲットになる市場へ構造的に拡大（素材②）</a:t>
             </a:r>
             <a:endParaRPr lang="en-US" sz="1500" dirty="0"/>
           </a:p>
@@ -5418,7 +5524,7 @@
                 <a:ea typeface="游ゴシック" pitchFamily="34" charset="-122"/>
                 <a:cs typeface="游ゴシック" pitchFamily="34" charset="-120"/>
               </a:rPr>
-              <a:t>「財産に着目する」のではなく「家族の隠れた課題を見つけに行く」という視点そのものが、他の相続コンサル・士業・金融機関にはない方法論的な差別化</a:t>
+              <a:t>周辺専門家（税理士・司法書士・行政書士・弁護士・不動産・金融・有料老人ホーム・M&amp;A）を含めれば、市場は相続業界単体にとどまらない</a:t>
             </a:r>
             <a:endParaRPr lang="en-US" sz="1500" dirty="0"/>
           </a:p>
@@ -5426,7 +5532,328 @@
       </p:sp>
       <p:sp>
         <p:nvSpPr>
+          <p:cNvPr id="7" name="Shape 5"/>
+          <p:cNvSpPr/>
+          <p:nvPr/>
+        </p:nvSpPr>
+        <p:spPr>
+          <a:xfrm>
+            <a:off x="640080" y="4709160"/>
+            <a:ext cx="3200400" cy="1280160"/>
+          </a:xfrm>
+          <a:prstGeom prst="roundRect">
+            <a:avLst>
+              <a:gd name="adj" fmla="val 7143"/>
+            </a:avLst>
+          </a:prstGeom>
+          <a:solidFill>
+            <a:srgbClr val="F6F1EA"/>
+          </a:solidFill>
+          <a:ln/>
+          <a:effectLst>
+            <a:outerShdw sx="100000" sy="100000" kx="0" ky="0" algn="bl" rotWithShape="0" blurRad="101600" dist="38100" dir="5400000">
+              <a:srgbClr val="10233A">
+                <a:alpha val="18000"/>
+              </a:srgbClr>
+            </a:outerShdw>
+          </a:effectLst>
+        </p:spPr>
+      </p:sp>
+      <p:sp>
+        <p:nvSpPr>
+          <p:cNvPr id="8" name="Text 6"/>
+          <p:cNvSpPr txBox="1"/>
+          <p:nvPr/>
+        </p:nvSpPr>
+        <p:spPr>
+          <a:xfrm>
+            <a:off x="777240" y="4873752"/>
+            <a:ext cx="2926080" cy="665683"/>
+          </a:xfrm>
+          <a:prstGeom prst="rect">
+            <a:avLst/>
+          </a:prstGeom>
+          <a:noFill/>
+          <a:ln/>
+        </p:spPr>
+        <p:txBody>
+          <a:bodyPr wrap="square" lIns="0" tIns="0" rIns="0" bIns="0" rtlCol="0" anchor="ctr"/>
+          <a:lstStyle/>
+          <a:p>
+            <a:pPr algn="ctr" indent="0" marL="0">
+              <a:buNone/>
+            </a:pPr>
+            <a:r>
+              <a:rPr lang="en-US" sz="2200" b="1" dirty="0">
+                <a:solidFill>
+                  <a:srgbClr val="C9603F"/>
+                </a:solidFill>
+                <a:latin typeface="游ゴシック" pitchFamily="34" charset="0"/>
+                <a:ea typeface="游ゴシック" pitchFamily="34" charset="-122"/>
+                <a:cs typeface="游ゴシック" pitchFamily="34" charset="-120"/>
+              </a:rPr>
+              <a:t>50事業所</a:t>
+            </a:r>
+            <a:endParaRPr lang="en-US" sz="2200" dirty="0"/>
+          </a:p>
+        </p:txBody>
+      </p:sp>
+      <p:sp>
+        <p:nvSpPr>
           <p:cNvPr id="9" name="Text 7"/>
+          <p:cNvSpPr txBox="1"/>
+          <p:nvPr/>
+        </p:nvSpPr>
+        <p:spPr>
+          <a:xfrm>
+            <a:off x="731520" y="5426050"/>
+            <a:ext cx="3017520" cy="512064"/>
+          </a:xfrm>
+          <a:prstGeom prst="rect">
+            <a:avLst/>
+          </a:prstGeom>
+          <a:noFill/>
+          <a:ln/>
+        </p:spPr>
+        <p:txBody>
+          <a:bodyPr wrap="square" lIns="0" tIns="0" rIns="0" bIns="0" rtlCol="0" anchor="t"/>
+          <a:lstStyle/>
+          <a:p>
+            <a:pPr algn="ctr" indent="0" marL="0">
+              <a:buNone/>
+            </a:pPr>
+            <a:r>
+              <a:rPr lang="en-US" sz="1100" dirty="0">
+                <a:solidFill>
+                  <a:srgbClr val="1E3A5F"/>
+                </a:solidFill>
+                <a:latin typeface="游ゴシック" pitchFamily="34" charset="0"/>
+                <a:ea typeface="游ゴシック" pitchFamily="34" charset="-122"/>
+                <a:cs typeface="游ゴシック" pitchFamily="34" charset="-120"/>
+              </a:rPr>
+              <a:t>全国の拠点数</a:t>
+            </a:r>
+            <a:endParaRPr lang="en-US" sz="1100" dirty="0"/>
+          </a:p>
+        </p:txBody>
+      </p:sp>
+      <p:sp>
+        <p:nvSpPr>
+          <p:cNvPr id="10" name="Shape 8"/>
+          <p:cNvSpPr/>
+          <p:nvPr/>
+        </p:nvSpPr>
+        <p:spPr>
+          <a:xfrm>
+            <a:off x="4251960" y="4709160"/>
+            <a:ext cx="3200400" cy="1280160"/>
+          </a:xfrm>
+          <a:prstGeom prst="roundRect">
+            <a:avLst>
+              <a:gd name="adj" fmla="val 7143"/>
+            </a:avLst>
+          </a:prstGeom>
+          <a:solidFill>
+            <a:srgbClr val="F6F1EA"/>
+          </a:solidFill>
+          <a:ln/>
+          <a:effectLst>
+            <a:outerShdw sx="100000" sy="100000" kx="0" ky="0" algn="bl" rotWithShape="0" blurRad="101600" dist="38100" dir="5400000">
+              <a:srgbClr val="10233A">
+                <a:alpha val="18000"/>
+              </a:srgbClr>
+            </a:outerShdw>
+          </a:effectLst>
+        </p:spPr>
+      </p:sp>
+      <p:sp>
+        <p:nvSpPr>
+          <p:cNvPr id="11" name="Text 9"/>
+          <p:cNvSpPr txBox="1"/>
+          <p:nvPr/>
+        </p:nvSpPr>
+        <p:spPr>
+          <a:xfrm>
+            <a:off x="4389120" y="4873752"/>
+            <a:ext cx="2926080" cy="665683"/>
+          </a:xfrm>
+          <a:prstGeom prst="rect">
+            <a:avLst/>
+          </a:prstGeom>
+          <a:noFill/>
+          <a:ln/>
+        </p:spPr>
+        <p:txBody>
+          <a:bodyPr wrap="square" lIns="0" tIns="0" rIns="0" bIns="0" rtlCol="0" anchor="ctr"/>
+          <a:lstStyle/>
+          <a:p>
+            <a:pPr algn="ctr" indent="0" marL="0">
+              <a:buNone/>
+            </a:pPr>
+            <a:r>
+              <a:rPr lang="en-US" sz="2200" b="1" dirty="0">
+                <a:solidFill>
+                  <a:srgbClr val="C9603F"/>
+                </a:solidFill>
+                <a:latin typeface="游ゴシック" pitchFamily="34" charset="0"/>
+                <a:ea typeface="游ゴシック" pitchFamily="34" charset="-122"/>
+                <a:cs typeface="游ゴシック" pitchFamily="34" charset="-120"/>
+              </a:rPr>
+              <a:t>資産5〜10億円超</a:t>
+            </a:r>
+            <a:endParaRPr lang="en-US" sz="2200" dirty="0"/>
+          </a:p>
+        </p:txBody>
+      </p:sp>
+      <p:sp>
+        <p:nvSpPr>
+          <p:cNvPr id="12" name="Text 10"/>
+          <p:cNvSpPr txBox="1"/>
+          <p:nvPr/>
+        </p:nvSpPr>
+        <p:spPr>
+          <a:xfrm>
+            <a:off x="4343400" y="5426050"/>
+            <a:ext cx="3017520" cy="512064"/>
+          </a:xfrm>
+          <a:prstGeom prst="rect">
+            <a:avLst/>
+          </a:prstGeom>
+          <a:noFill/>
+          <a:ln/>
+        </p:spPr>
+        <p:txBody>
+          <a:bodyPr wrap="square" lIns="0" tIns="0" rIns="0" bIns="0" rtlCol="0" anchor="t"/>
+          <a:lstStyle/>
+          <a:p>
+            <a:pPr algn="ctr" indent="0" marL="0">
+              <a:buNone/>
+            </a:pPr>
+            <a:r>
+              <a:rPr lang="en-US" sz="1100" dirty="0">
+                <a:solidFill>
+                  <a:srgbClr val="1E3A5F"/>
+                </a:solidFill>
+                <a:latin typeface="游ゴシック" pitchFamily="34" charset="0"/>
+                <a:ea typeface="游ゴシック" pitchFamily="34" charset="-122"/>
+                <a:cs typeface="游ゴシック" pitchFamily="34" charset="-120"/>
+              </a:rPr>
+              <a:t>直接の顧客層</a:t>
+            </a:r>
+            <a:endParaRPr lang="en-US" sz="1100" dirty="0"/>
+          </a:p>
+        </p:txBody>
+      </p:sp>
+      <p:sp>
+        <p:nvSpPr>
+          <p:cNvPr id="13" name="Shape 11"/>
+          <p:cNvSpPr/>
+          <p:nvPr/>
+        </p:nvSpPr>
+        <p:spPr>
+          <a:xfrm>
+            <a:off x="7863840" y="4709160"/>
+            <a:ext cx="3200400" cy="1280160"/>
+          </a:xfrm>
+          <a:prstGeom prst="roundRect">
+            <a:avLst>
+              <a:gd name="adj" fmla="val 7143"/>
+            </a:avLst>
+          </a:prstGeom>
+          <a:solidFill>
+            <a:srgbClr val="F6F1EA"/>
+          </a:solidFill>
+          <a:ln/>
+          <a:effectLst>
+            <a:outerShdw sx="100000" sy="100000" kx="0" ky="0" algn="bl" rotWithShape="0" blurRad="101600" dist="38100" dir="5400000">
+              <a:srgbClr val="10233A">
+                <a:alpha val="18000"/>
+              </a:srgbClr>
+            </a:outerShdw>
+          </a:effectLst>
+        </p:spPr>
+      </p:sp>
+      <p:sp>
+        <p:nvSpPr>
+          <p:cNvPr id="14" name="Text 12"/>
+          <p:cNvSpPr txBox="1"/>
+          <p:nvPr/>
+        </p:nvSpPr>
+        <p:spPr>
+          <a:xfrm>
+            <a:off x="8001000" y="4873752"/>
+            <a:ext cx="2926080" cy="665683"/>
+          </a:xfrm>
+          <a:prstGeom prst="rect">
+            <a:avLst/>
+          </a:prstGeom>
+          <a:noFill/>
+          <a:ln/>
+        </p:spPr>
+        <p:txBody>
+          <a:bodyPr wrap="square" lIns="0" tIns="0" rIns="0" bIns="0" rtlCol="0" anchor="ctr"/>
+          <a:lstStyle/>
+          <a:p>
+            <a:pPr algn="ctr" indent="0" marL="0">
+              <a:buNone/>
+            </a:pPr>
+            <a:r>
+              <a:rPr lang="en-US" sz="2200" b="1" dirty="0">
+                <a:solidFill>
+                  <a:srgbClr val="C9603F"/>
+                </a:solidFill>
+                <a:latin typeface="游ゴシック" pitchFamily="34" charset="0"/>
+                <a:ea typeface="游ゴシック" pitchFamily="34" charset="-122"/>
+                <a:cs typeface="游ゴシック" pitchFamily="34" charset="-120"/>
+              </a:rPr>
+              <a:t>約100億円</a:t>
+            </a:r>
+            <a:endParaRPr lang="en-US" sz="2200" dirty="0"/>
+          </a:p>
+        </p:txBody>
+      </p:sp>
+      <p:sp>
+        <p:nvSpPr>
+          <p:cNvPr id="15" name="Text 13"/>
+          <p:cNvSpPr txBox="1"/>
+          <p:nvPr/>
+        </p:nvSpPr>
+        <p:spPr>
+          <a:xfrm>
+            <a:off x="7955280" y="5426050"/>
+            <a:ext cx="3017520" cy="512064"/>
+          </a:xfrm>
+          <a:prstGeom prst="rect">
+            <a:avLst/>
+          </a:prstGeom>
+          <a:noFill/>
+          <a:ln/>
+        </p:spPr>
+        <p:txBody>
+          <a:bodyPr wrap="square" lIns="0" tIns="0" rIns="0" bIns="0" rtlCol="0" anchor="t"/>
+          <a:lstStyle/>
+          <a:p>
+            <a:pPr algn="ctr" indent="0" marL="0">
+              <a:buNone/>
+            </a:pPr>
+            <a:r>
+              <a:rPr lang="en-US" sz="1100" dirty="0">
+                <a:solidFill>
+                  <a:srgbClr val="1E3A5F"/>
+                </a:solidFill>
+                <a:latin typeface="游ゴシック" pitchFamily="34" charset="0"/>
+                <a:ea typeface="游ゴシック" pitchFamily="34" charset="-122"/>
+                <a:cs typeface="游ゴシック" pitchFamily="34" charset="-120"/>
+              </a:rPr>
+              <a:t>周辺経済圏</a:t>
+            </a:r>
+            <a:endParaRPr lang="en-US" sz="1100" dirty="0"/>
+          </a:p>
+        </p:txBody>
+      </p:sp>
+      <p:sp>
+        <p:nvSpPr>
+          <p:cNvPr id="16" name="Text 14"/>
           <p:cNvSpPr txBox="1"/>
           <p:nvPr/>
         </p:nvSpPr>
@@ -5528,7 +5955,7 @@
                 <a:ea typeface="游ゴシック" pitchFamily="34" charset="-122"/>
                 <a:cs typeface="游ゴシック" pitchFamily="34" charset="-120"/>
               </a:rPr>
-              <a:t>06 / CONTRIBUTION</a:t>
+              <a:t>05 / ADVANTAGE</a:t>
             </a:r>
             <a:endParaRPr lang="en-US" sz="1300" dirty="0"/>
           </a:p>
@@ -5567,7 +5994,7 @@
                 <a:ea typeface="游ゴシック" pitchFamily="34" charset="-122"/>
                 <a:cs typeface="游ゴシック" pitchFamily="34" charset="-120"/>
               </a:rPr>
-              <a:t>貢献性 ― 100億円の中身は、関わった全員への貢献</a:t>
+              <a:t>優位性 ― 「バッジのない」からこそ生まれた協業モデル</a:t>
             </a:r>
             <a:endParaRPr lang="en-US" sz="2700" dirty="0"/>
           </a:p>
@@ -5633,7 +6060,7 @@
                 <a:ea typeface="游ゴシック" pitchFamily="34" charset="-122"/>
                 <a:cs typeface="游ゴシック" pitchFamily="34" charset="-120"/>
               </a:rPr>
-              <a:t>貢</a:t>
+              <a:t>優</a:t>
             </a:r>
             <a:endParaRPr lang="en-US" sz="2880" dirty="0"/>
           </a:p>
@@ -5641,14 +6068,75 @@
       </p:sp>
       <p:sp>
         <p:nvSpPr>
-          <p:cNvPr id="6" name="Text 4"/>
-          <p:cNvSpPr txBox="1"/>
+          <p:cNvPr id="6" name="Shape 4"/>
+          <p:cNvSpPr/>
           <p:nvPr/>
         </p:nvSpPr>
         <p:spPr>
           <a:xfrm>
             <a:off x="640080" y="1783080"/>
-            <a:ext cx="10881360" cy="4206240"/>
+            <a:ext cx="10881360" cy="822960"/>
+          </a:xfrm>
+          <a:prstGeom prst="roundRect">
+            <a:avLst>
+              <a:gd name="adj" fmla="val 8889"/>
+            </a:avLst>
+          </a:prstGeom>
+          <a:solidFill>
+            <a:srgbClr val="1E3A5F"/>
+          </a:solidFill>
+          <a:ln/>
+        </p:spPr>
+      </p:sp>
+      <p:sp>
+        <p:nvSpPr>
+          <p:cNvPr id="7" name="Text 5"/>
+          <p:cNvSpPr txBox="1"/>
+          <p:nvPr/>
+        </p:nvSpPr>
+        <p:spPr>
+          <a:xfrm>
+            <a:off x="914400" y="1783080"/>
+            <a:ext cx="10332720" cy="822960"/>
+          </a:xfrm>
+          <a:prstGeom prst="rect">
+            <a:avLst/>
+          </a:prstGeom>
+          <a:noFill/>
+          <a:ln/>
+        </p:spPr>
+        <p:txBody>
+          <a:bodyPr wrap="square" lIns="0" tIns="0" rIns="0" bIns="0" rtlCol="0" anchor="ctr"/>
+          <a:lstStyle/>
+          <a:p>
+            <a:pPr algn="l" indent="0" marL="0">
+              <a:buNone/>
+            </a:pPr>
+            <a:r>
+              <a:rPr lang="en-US" sz="1450" i="1" dirty="0">
+                <a:solidFill>
+                  <a:srgbClr val="F1DCCF"/>
+                </a:solidFill>
+                <a:latin typeface="游ゴシック" pitchFamily="34" charset="0"/>
+                <a:ea typeface="游ゴシック" pitchFamily="34" charset="-122"/>
+                <a:cs typeface="游ゴシック" pitchFamily="34" charset="-120"/>
+              </a:rPr>
+              <a:t>『バッジのない、コンサルタントに、相続ビジネスの何ができるのか？』―起業当初、ある士業の先生に言われた言葉</a:t>
+            </a:r>
+            <a:endParaRPr lang="en-US" sz="1450" dirty="0"/>
+          </a:p>
+        </p:txBody>
+      </p:sp>
+      <p:sp>
+        <p:nvSpPr>
+          <p:cNvPr id="8" name="Text 6"/>
+          <p:cNvSpPr txBox="1"/>
+          <p:nvPr/>
+        </p:nvSpPr>
+        <p:spPr>
+          <a:xfrm>
+            <a:off x="640080" y="2834640"/>
+            <a:ext cx="10881360" cy="3154680"/>
           </a:xfrm>
           <a:prstGeom prst="rect">
             <a:avLst/>
@@ -5679,7 +6167,7 @@
                 <a:ea typeface="游ゴシック" pitchFamily="34" charset="-122"/>
                 <a:cs typeface="游ゴシック" pitchFamily="34" charset="-120"/>
               </a:rPr>
-              <a:t>末端の顧客（本人・家族）：財産ではなく「対話」による安心と幸福度の向上（終活×幸福度の各種調査）</a:t>
+              <a:t>その後、「士業の先生が私に足を向けて寝れないくらい」仕事を生み出し続け、自分の収益だけを追わない「本当の協業スタイル」を確立（素材①）</a:t>
             </a:r>
             <a:endParaRPr lang="en-US" sz="1500" dirty="0"/>
           </a:p>
@@ -5703,7 +6191,7 @@
                 <a:ea typeface="游ゴシック" pitchFamily="34" charset="-122"/>
                 <a:cs typeface="游ゴシック" pitchFamily="34" charset="-120"/>
               </a:rPr>
-              <a:t>周辺専門家（税理士・弁護士・不動産・金融等）：新たな受任機会・収益機会の創出（素材①）</a:t>
+              <a:t>この協業の仕組みを、第3回（紹介構造）・第4回（“人生の指揮官”モデル）のカリキュラムとして教材化し、再現可能な技術にしている（素材③）</a:t>
             </a:r>
             <a:endParaRPr lang="en-US" sz="1500" dirty="0"/>
           </a:p>
@@ -5727,479 +6215,15 @@
                 <a:ea typeface="游ゴシック" pitchFamily="34" charset="-122"/>
                 <a:cs typeface="游ゴシック" pitchFamily="34" charset="-120"/>
               </a:rPr>
-              <a:t>企業：福利厚生導入を通じ「従業員を大切にする法人」への進化を支援</a:t>
+              <a:t>「財産に着目する」のではなく「家族の隠れた課題を見つけに行く」という視点そのものが、他の相続コンサル・士業・金融機関にはない方法論的な差別化</a:t>
             </a:r>
             <a:endParaRPr lang="en-US" sz="1500" dirty="0"/>
           </a:p>
-          <a:p>
-            <a:pPr marL="342900" indent="-342900">
-              <a:lnSpc>
-                <a:spcPct val="128000"/>
-              </a:lnSpc>
-              <a:spcAft>
-                <a:spcPts val="1200"/>
-              </a:spcAft>
-              <a:buSzPct val="100000"/>
-              <a:buChar char="●"/>
-            </a:pPr>
-            <a:r>
-              <a:rPr lang="en-US" sz="1500" dirty="0">
-                <a:solidFill>
-                  <a:srgbClr val="3A3A3A"/>
-                </a:solidFill>
-                <a:latin typeface="游ゴシック" pitchFamily="34" charset="0"/>
-                <a:ea typeface="游ゴシック" pitchFamily="34" charset="-122"/>
-                <a:cs typeface="游ゴシック" pitchFamily="34" charset="-120"/>
-              </a:rPr>
-              <a:t>行政・地域：朝来市 → 岸和田市など、一つの街で実証した連携モデルの横展開</a:t>
-            </a:r>
-            <a:endParaRPr lang="en-US" sz="1500" dirty="0"/>
-          </a:p>
-        </p:txBody>
-      </p:sp>
-      <p:sp>
-        <p:nvSpPr>
-          <p:cNvPr id="7" name="Shape 5"/>
-          <p:cNvSpPr/>
-          <p:nvPr/>
-        </p:nvSpPr>
-        <p:spPr>
-          <a:xfrm>
-            <a:off x="640080" y="4754880"/>
-            <a:ext cx="2468880" cy="1325880"/>
-          </a:xfrm>
-          <a:prstGeom prst="roundRect">
-            <a:avLst>
-              <a:gd name="adj" fmla="val 6897"/>
-            </a:avLst>
-          </a:prstGeom>
-          <a:solidFill>
-            <a:srgbClr val="F6F1EA"/>
-          </a:solidFill>
-          <a:ln/>
-          <a:effectLst>
-            <a:outerShdw sx="100000" sy="100000" kx="0" ky="0" algn="bl" rotWithShape="0" blurRad="101600" dist="38100" dir="5400000">
-              <a:srgbClr val="10233A">
-                <a:alpha val="18000"/>
-              </a:srgbClr>
-            </a:outerShdw>
-          </a:effectLst>
-        </p:spPr>
-      </p:sp>
-      <p:sp>
-        <p:nvSpPr>
-          <p:cNvPr id="8" name="Text 6"/>
-          <p:cNvSpPr txBox="1"/>
-          <p:nvPr/>
-        </p:nvSpPr>
-        <p:spPr>
-          <a:xfrm>
-            <a:off x="822960" y="4937760"/>
-            <a:ext cx="2103120" cy="365760"/>
-          </a:xfrm>
-          <a:prstGeom prst="rect">
-            <a:avLst/>
-          </a:prstGeom>
-          <a:noFill/>
-          <a:ln/>
-        </p:spPr>
-        <p:txBody>
-          <a:bodyPr wrap="square" lIns="0" tIns="0" rIns="0" bIns="0" rtlCol="0" anchor="ctr"/>
-          <a:lstStyle/>
-          <a:p>
-            <a:pPr indent="0" marL="0">
-              <a:buNone/>
-            </a:pPr>
-            <a:r>
-              <a:rPr lang="en-US" sz="1500" b="1" dirty="0">
-                <a:solidFill>
-                  <a:srgbClr val="C9603F"/>
-                </a:solidFill>
-                <a:latin typeface="游ゴシック" pitchFamily="34" charset="0"/>
-                <a:ea typeface="游ゴシック" pitchFamily="34" charset="-122"/>
-                <a:cs typeface="游ゴシック" pitchFamily="34" charset="-120"/>
-              </a:rPr>
-              <a:t>顧客</a:t>
-            </a:r>
-            <a:endParaRPr lang="en-US" sz="1500" dirty="0"/>
-          </a:p>
         </p:txBody>
       </p:sp>
       <p:sp>
         <p:nvSpPr>
           <p:cNvPr id="9" name="Text 7"/>
-          <p:cNvSpPr txBox="1"/>
-          <p:nvPr/>
-        </p:nvSpPr>
-        <p:spPr>
-          <a:xfrm>
-            <a:off x="822960" y="5349240"/>
-            <a:ext cx="2103120" cy="640080"/>
-          </a:xfrm>
-          <a:prstGeom prst="rect">
-            <a:avLst/>
-          </a:prstGeom>
-          <a:noFill/>
-          <a:ln/>
-        </p:spPr>
-        <p:txBody>
-          <a:bodyPr wrap="square" lIns="0" tIns="0" rIns="0" bIns="0" rtlCol="0" anchor="t"/>
-          <a:lstStyle/>
-          <a:p>
-            <a:pPr indent="0" marL="0">
-              <a:lnSpc>
-                <a:spcPct val="120000"/>
-              </a:lnSpc>
-              <a:buNone/>
-            </a:pPr>
-            <a:r>
-              <a:rPr lang="en-US" sz="1150" dirty="0">
-                <a:solidFill>
-                  <a:srgbClr val="3A3A3A"/>
-                </a:solidFill>
-                <a:latin typeface="游ゴシック" pitchFamily="34" charset="0"/>
-                <a:ea typeface="游ゴシック" pitchFamily="34" charset="-122"/>
-                <a:cs typeface="游ゴシック" pitchFamily="34" charset="-120"/>
-              </a:rPr>
-              <a:t>対話による安心</a:t>
-            </a:r>
-            <a:endParaRPr lang="en-US" sz="1150" dirty="0"/>
-          </a:p>
-        </p:txBody>
-      </p:sp>
-      <p:sp>
-        <p:nvSpPr>
-          <p:cNvPr id="10" name="Shape 8"/>
-          <p:cNvSpPr/>
-          <p:nvPr/>
-        </p:nvSpPr>
-        <p:spPr>
-          <a:xfrm>
-            <a:off x="3383280" y="4754880"/>
-            <a:ext cx="2468880" cy="1325880"/>
-          </a:xfrm>
-          <a:prstGeom prst="roundRect">
-            <a:avLst>
-              <a:gd name="adj" fmla="val 6897"/>
-            </a:avLst>
-          </a:prstGeom>
-          <a:solidFill>
-            <a:srgbClr val="F6F1EA"/>
-          </a:solidFill>
-          <a:ln/>
-          <a:effectLst>
-            <a:outerShdw sx="100000" sy="100000" kx="0" ky="0" algn="bl" rotWithShape="0" blurRad="101600" dist="38100" dir="5400000">
-              <a:srgbClr val="10233A">
-                <a:alpha val="18000"/>
-              </a:srgbClr>
-            </a:outerShdw>
-          </a:effectLst>
-        </p:spPr>
-      </p:sp>
-      <p:sp>
-        <p:nvSpPr>
-          <p:cNvPr id="11" name="Text 9"/>
-          <p:cNvSpPr txBox="1"/>
-          <p:nvPr/>
-        </p:nvSpPr>
-        <p:spPr>
-          <a:xfrm>
-            <a:off x="3566160" y="4937760"/>
-            <a:ext cx="2103120" cy="365760"/>
-          </a:xfrm>
-          <a:prstGeom prst="rect">
-            <a:avLst/>
-          </a:prstGeom>
-          <a:noFill/>
-          <a:ln/>
-        </p:spPr>
-        <p:txBody>
-          <a:bodyPr wrap="square" lIns="0" tIns="0" rIns="0" bIns="0" rtlCol="0" anchor="ctr"/>
-          <a:lstStyle/>
-          <a:p>
-            <a:pPr indent="0" marL="0">
-              <a:buNone/>
-            </a:pPr>
-            <a:r>
-              <a:rPr lang="en-US" sz="1500" b="1" dirty="0">
-                <a:solidFill>
-                  <a:srgbClr val="C9603F"/>
-                </a:solidFill>
-                <a:latin typeface="游ゴシック" pitchFamily="34" charset="0"/>
-                <a:ea typeface="游ゴシック" pitchFamily="34" charset="-122"/>
-                <a:cs typeface="游ゴシック" pitchFamily="34" charset="-120"/>
-              </a:rPr>
-              <a:t>専門家</a:t>
-            </a:r>
-            <a:endParaRPr lang="en-US" sz="1500" dirty="0"/>
-          </a:p>
-        </p:txBody>
-      </p:sp>
-      <p:sp>
-        <p:nvSpPr>
-          <p:cNvPr id="12" name="Text 10"/>
-          <p:cNvSpPr txBox="1"/>
-          <p:nvPr/>
-        </p:nvSpPr>
-        <p:spPr>
-          <a:xfrm>
-            <a:off x="3566160" y="5349240"/>
-            <a:ext cx="2103120" cy="640080"/>
-          </a:xfrm>
-          <a:prstGeom prst="rect">
-            <a:avLst/>
-          </a:prstGeom>
-          <a:noFill/>
-          <a:ln/>
-        </p:spPr>
-        <p:txBody>
-          <a:bodyPr wrap="square" lIns="0" tIns="0" rIns="0" bIns="0" rtlCol="0" anchor="t"/>
-          <a:lstStyle/>
-          <a:p>
-            <a:pPr indent="0" marL="0">
-              <a:lnSpc>
-                <a:spcPct val="120000"/>
-              </a:lnSpc>
-              <a:buNone/>
-            </a:pPr>
-            <a:r>
-              <a:rPr lang="en-US" sz="1150" dirty="0">
-                <a:solidFill>
-                  <a:srgbClr val="3A3A3A"/>
-                </a:solidFill>
-                <a:latin typeface="游ゴシック" pitchFamily="34" charset="0"/>
-                <a:ea typeface="游ゴシック" pitchFamily="34" charset="-122"/>
-                <a:cs typeface="游ゴシック" pitchFamily="34" charset="-120"/>
-              </a:rPr>
-              <a:t>新たな受任機会</a:t>
-            </a:r>
-            <a:endParaRPr lang="en-US" sz="1150" dirty="0"/>
-          </a:p>
-        </p:txBody>
-      </p:sp>
-      <p:sp>
-        <p:nvSpPr>
-          <p:cNvPr id="13" name="Shape 11"/>
-          <p:cNvSpPr/>
-          <p:nvPr/>
-        </p:nvSpPr>
-        <p:spPr>
-          <a:xfrm>
-            <a:off x="6126480" y="4754880"/>
-            <a:ext cx="2468880" cy="1325880"/>
-          </a:xfrm>
-          <a:prstGeom prst="roundRect">
-            <a:avLst>
-              <a:gd name="adj" fmla="val 6897"/>
-            </a:avLst>
-          </a:prstGeom>
-          <a:solidFill>
-            <a:srgbClr val="F6F1EA"/>
-          </a:solidFill>
-          <a:ln/>
-          <a:effectLst>
-            <a:outerShdw sx="100000" sy="100000" kx="0" ky="0" algn="bl" rotWithShape="0" blurRad="101600" dist="38100" dir="5400000">
-              <a:srgbClr val="10233A">
-                <a:alpha val="18000"/>
-              </a:srgbClr>
-            </a:outerShdw>
-          </a:effectLst>
-        </p:spPr>
-      </p:sp>
-      <p:sp>
-        <p:nvSpPr>
-          <p:cNvPr id="14" name="Text 12"/>
-          <p:cNvSpPr txBox="1"/>
-          <p:nvPr/>
-        </p:nvSpPr>
-        <p:spPr>
-          <a:xfrm>
-            <a:off x="6309360" y="4937760"/>
-            <a:ext cx="2103120" cy="365760"/>
-          </a:xfrm>
-          <a:prstGeom prst="rect">
-            <a:avLst/>
-          </a:prstGeom>
-          <a:noFill/>
-          <a:ln/>
-        </p:spPr>
-        <p:txBody>
-          <a:bodyPr wrap="square" lIns="0" tIns="0" rIns="0" bIns="0" rtlCol="0" anchor="ctr"/>
-          <a:lstStyle/>
-          <a:p>
-            <a:pPr indent="0" marL="0">
-              <a:buNone/>
-            </a:pPr>
-            <a:r>
-              <a:rPr lang="en-US" sz="1500" b="1" dirty="0">
-                <a:solidFill>
-                  <a:srgbClr val="C9603F"/>
-                </a:solidFill>
-                <a:latin typeface="游ゴシック" pitchFamily="34" charset="0"/>
-                <a:ea typeface="游ゴシック" pitchFamily="34" charset="-122"/>
-                <a:cs typeface="游ゴシック" pitchFamily="34" charset="-120"/>
-              </a:rPr>
-              <a:t>企業</a:t>
-            </a:r>
-            <a:endParaRPr lang="en-US" sz="1500" dirty="0"/>
-          </a:p>
-        </p:txBody>
-      </p:sp>
-      <p:sp>
-        <p:nvSpPr>
-          <p:cNvPr id="15" name="Text 13"/>
-          <p:cNvSpPr txBox="1"/>
-          <p:nvPr/>
-        </p:nvSpPr>
-        <p:spPr>
-          <a:xfrm>
-            <a:off x="6309360" y="5349240"/>
-            <a:ext cx="2103120" cy="640080"/>
-          </a:xfrm>
-          <a:prstGeom prst="rect">
-            <a:avLst/>
-          </a:prstGeom>
-          <a:noFill/>
-          <a:ln/>
-        </p:spPr>
-        <p:txBody>
-          <a:bodyPr wrap="square" lIns="0" tIns="0" rIns="0" bIns="0" rtlCol="0" anchor="t"/>
-          <a:lstStyle/>
-          <a:p>
-            <a:pPr indent="0" marL="0">
-              <a:lnSpc>
-                <a:spcPct val="120000"/>
-              </a:lnSpc>
-              <a:buNone/>
-            </a:pPr>
-            <a:r>
-              <a:rPr lang="en-US" sz="1150" dirty="0">
-                <a:solidFill>
-                  <a:srgbClr val="3A3A3A"/>
-                </a:solidFill>
-                <a:latin typeface="游ゴシック" pitchFamily="34" charset="0"/>
-                <a:ea typeface="游ゴシック" pitchFamily="34" charset="-122"/>
-                <a:cs typeface="游ゴシック" pitchFamily="34" charset="-120"/>
-              </a:rPr>
-              <a:t>従業員を大切にする法人へ</a:t>
-            </a:r>
-            <a:endParaRPr lang="en-US" sz="1150" dirty="0"/>
-          </a:p>
-        </p:txBody>
-      </p:sp>
-      <p:sp>
-        <p:nvSpPr>
-          <p:cNvPr id="16" name="Shape 14"/>
-          <p:cNvSpPr/>
-          <p:nvPr/>
-        </p:nvSpPr>
-        <p:spPr>
-          <a:xfrm>
-            <a:off x="8869680" y="4754880"/>
-            <a:ext cx="2468880" cy="1325880"/>
-          </a:xfrm>
-          <a:prstGeom prst="roundRect">
-            <a:avLst>
-              <a:gd name="adj" fmla="val 6897"/>
-            </a:avLst>
-          </a:prstGeom>
-          <a:solidFill>
-            <a:srgbClr val="F6F1EA"/>
-          </a:solidFill>
-          <a:ln/>
-          <a:effectLst>
-            <a:outerShdw sx="100000" sy="100000" kx="0" ky="0" algn="bl" rotWithShape="0" blurRad="101600" dist="38100" dir="5400000">
-              <a:srgbClr val="10233A">
-                <a:alpha val="18000"/>
-              </a:srgbClr>
-            </a:outerShdw>
-          </a:effectLst>
-        </p:spPr>
-      </p:sp>
-      <p:sp>
-        <p:nvSpPr>
-          <p:cNvPr id="17" name="Text 15"/>
-          <p:cNvSpPr txBox="1"/>
-          <p:nvPr/>
-        </p:nvSpPr>
-        <p:spPr>
-          <a:xfrm>
-            <a:off x="9052560" y="4937760"/>
-            <a:ext cx="2103120" cy="365760"/>
-          </a:xfrm>
-          <a:prstGeom prst="rect">
-            <a:avLst/>
-          </a:prstGeom>
-          <a:noFill/>
-          <a:ln/>
-        </p:spPr>
-        <p:txBody>
-          <a:bodyPr wrap="square" lIns="0" tIns="0" rIns="0" bIns="0" rtlCol="0" anchor="ctr"/>
-          <a:lstStyle/>
-          <a:p>
-            <a:pPr indent="0" marL="0">
-              <a:buNone/>
-            </a:pPr>
-            <a:r>
-              <a:rPr lang="en-US" sz="1500" b="1" dirty="0">
-                <a:solidFill>
-                  <a:srgbClr val="C9603F"/>
-                </a:solidFill>
-                <a:latin typeface="游ゴシック" pitchFamily="34" charset="0"/>
-                <a:ea typeface="游ゴシック" pitchFamily="34" charset="-122"/>
-                <a:cs typeface="游ゴシック" pitchFamily="34" charset="-120"/>
-              </a:rPr>
-              <a:t>行政・地域</a:t>
-            </a:r>
-            <a:endParaRPr lang="en-US" sz="1500" dirty="0"/>
-          </a:p>
-        </p:txBody>
-      </p:sp>
-      <p:sp>
-        <p:nvSpPr>
-          <p:cNvPr id="18" name="Text 16"/>
-          <p:cNvSpPr txBox="1"/>
-          <p:nvPr/>
-        </p:nvSpPr>
-        <p:spPr>
-          <a:xfrm>
-            <a:off x="9052560" y="5349240"/>
-            <a:ext cx="2103120" cy="640080"/>
-          </a:xfrm>
-          <a:prstGeom prst="rect">
-            <a:avLst/>
-          </a:prstGeom>
-          <a:noFill/>
-          <a:ln/>
-        </p:spPr>
-        <p:txBody>
-          <a:bodyPr wrap="square" lIns="0" tIns="0" rIns="0" bIns="0" rtlCol="0" anchor="t"/>
-          <a:lstStyle/>
-          <a:p>
-            <a:pPr indent="0" marL="0">
-              <a:lnSpc>
-                <a:spcPct val="120000"/>
-              </a:lnSpc>
-              <a:buNone/>
-            </a:pPr>
-            <a:r>
-              <a:rPr lang="en-US" sz="1150" dirty="0">
-                <a:solidFill>
-                  <a:srgbClr val="3A3A3A"/>
-                </a:solidFill>
-                <a:latin typeface="游ゴシック" pitchFamily="34" charset="0"/>
-                <a:ea typeface="游ゴシック" pitchFamily="34" charset="-122"/>
-                <a:cs typeface="游ゴシック" pitchFamily="34" charset="-120"/>
-              </a:rPr>
-              <a:t>連携モデルの横展開</a:t>
-            </a:r>
-            <a:endParaRPr lang="en-US" sz="1150" dirty="0"/>
-          </a:p>
-        </p:txBody>
-      </p:sp>
-      <p:sp>
-        <p:nvSpPr>
-          <p:cNvPr id="19" name="Text 17"/>
           <p:cNvSpPr txBox="1"/>
           <p:nvPr/>
         </p:nvSpPr>
@@ -6247,6 +6271,779 @@
 <file path=ppt/slides/slide15.xml><?xml version="1.0" encoding="utf-8"?>
 <p:sld xmlns:a="http://schemas.openxmlformats.org/drawingml/2006/main" xmlns:r="http://schemas.openxmlformats.org/officeDocument/2006/relationships" xmlns:p="http://schemas.openxmlformats.org/presentationml/2006/main">
   <p:cSld name="Slide 15">
+    <p:bg>
+      <p:bgPr>
+        <a:solidFill>
+          <a:srgbClr val="FFFFFF"/>
+        </a:solidFill>
+      </p:bgPr>
+    </p:bg>
+    <p:spTree>
+      <p:nvGrpSpPr>
+        <p:cNvPr id="1" name=""/>
+        <p:cNvGrpSpPr/>
+        <p:nvPr/>
+      </p:nvGrpSpPr>
+      <p:grpSpPr>
+        <a:xfrm>
+          <a:off x="0" y="0"/>
+          <a:ext cx="0" cy="0"/>
+          <a:chOff x="0" y="0"/>
+          <a:chExt cx="0" cy="0"/>
+        </a:xfrm>
+      </p:grpSpPr>
+      <p:sp>
+        <p:nvSpPr>
+          <p:cNvPr id="2" name="Text 0"/>
+          <p:cNvSpPr txBox="1"/>
+          <p:nvPr/>
+        </p:nvSpPr>
+        <p:spPr>
+          <a:xfrm>
+            <a:off x="640080" y="411480"/>
+            <a:ext cx="9144000" cy="320040"/>
+          </a:xfrm>
+          <a:prstGeom prst="rect">
+            <a:avLst/>
+          </a:prstGeom>
+          <a:noFill/>
+          <a:ln/>
+        </p:spPr>
+        <p:txBody>
+          <a:bodyPr wrap="square" lIns="0" tIns="0" rIns="0" bIns="0" rtlCol="0" anchor="ctr"/>
+          <a:lstStyle/>
+          <a:p>
+            <a:pPr indent="0" marL="0">
+              <a:buNone/>
+            </a:pPr>
+            <a:r>
+              <a:rPr lang="en-US" sz="1300" b="1" spc="100" kern="0" dirty="0">
+                <a:solidFill>
+                  <a:srgbClr val="C9603F"/>
+                </a:solidFill>
+                <a:latin typeface="游ゴシック" pitchFamily="34" charset="0"/>
+                <a:ea typeface="游ゴシック" pitchFamily="34" charset="-122"/>
+                <a:cs typeface="游ゴシック" pitchFamily="34" charset="-120"/>
+              </a:rPr>
+              <a:t>06 / CONTRIBUTION</a:t>
+            </a:r>
+            <a:endParaRPr lang="en-US" sz="1300" dirty="0"/>
+          </a:p>
+        </p:txBody>
+      </p:sp>
+      <p:sp>
+        <p:nvSpPr>
+          <p:cNvPr id="3" name="Text 1"/>
+          <p:cNvSpPr txBox="1"/>
+          <p:nvPr/>
+        </p:nvSpPr>
+        <p:spPr>
+          <a:xfrm>
+            <a:off x="640080" y="713232"/>
+            <a:ext cx="10881360" cy="731520"/>
+          </a:xfrm>
+          <a:prstGeom prst="rect">
+            <a:avLst/>
+          </a:prstGeom>
+          <a:noFill/>
+          <a:ln/>
+        </p:spPr>
+        <p:txBody>
+          <a:bodyPr wrap="square" lIns="0" tIns="0" rIns="0" bIns="0" rtlCol="0" anchor="ctr"/>
+          <a:lstStyle/>
+          <a:p>
+            <a:pPr indent="0" marL="0">
+              <a:buNone/>
+            </a:pPr>
+            <a:r>
+              <a:rPr lang="en-US" sz="2700" b="1" dirty="0">
+                <a:solidFill>
+                  <a:srgbClr val="1E3A5F"/>
+                </a:solidFill>
+                <a:latin typeface="游ゴシック" pitchFamily="34" charset="0"/>
+                <a:ea typeface="游ゴシック" pitchFamily="34" charset="-122"/>
+                <a:cs typeface="游ゴシック" pitchFamily="34" charset="-120"/>
+              </a:rPr>
+              <a:t>貢献性 ― 100億円の中身は、関わった全員への貢献</a:t>
+            </a:r>
+            <a:endParaRPr lang="en-US" sz="2700" dirty="0"/>
+          </a:p>
+        </p:txBody>
+      </p:sp>
+      <p:sp>
+        <p:nvSpPr>
+          <p:cNvPr id="4" name="Shape 2"/>
+          <p:cNvSpPr/>
+          <p:nvPr/>
+        </p:nvSpPr>
+        <p:spPr>
+          <a:xfrm>
+            <a:off x="10607040" y="502920"/>
+            <a:ext cx="822960" cy="822960"/>
+          </a:xfrm>
+          <a:prstGeom prst="ellipse">
+            <a:avLst/>
+          </a:prstGeom>
+          <a:solidFill>
+            <a:srgbClr val="C9603F"/>
+          </a:solidFill>
+          <a:ln/>
+          <a:effectLst>
+            <a:outerShdw sx="100000" sy="100000" kx="0" ky="0" algn="bl" rotWithShape="0" blurRad="101600" dist="38100" dir="5400000">
+              <a:srgbClr val="10233A">
+                <a:alpha val="18000"/>
+              </a:srgbClr>
+            </a:outerShdw>
+          </a:effectLst>
+        </p:spPr>
+      </p:sp>
+      <p:sp>
+        <p:nvSpPr>
+          <p:cNvPr id="5" name="Text 3"/>
+          <p:cNvSpPr txBox="1"/>
+          <p:nvPr/>
+        </p:nvSpPr>
+        <p:spPr>
+          <a:xfrm>
+            <a:off x="10607040" y="502920"/>
+            <a:ext cx="822960" cy="822960"/>
+          </a:xfrm>
+          <a:prstGeom prst="rect">
+            <a:avLst/>
+          </a:prstGeom>
+          <a:noFill/>
+          <a:ln/>
+        </p:spPr>
+        <p:txBody>
+          <a:bodyPr wrap="square" lIns="0" tIns="0" rIns="0" bIns="0" rtlCol="0" anchor="ctr"/>
+          <a:lstStyle/>
+          <a:p>
+            <a:pPr algn="ctr" indent="0" marL="0">
+              <a:buNone/>
+            </a:pPr>
+            <a:r>
+              <a:rPr lang="en-US" sz="2880" b="1" dirty="0">
+                <a:solidFill>
+                  <a:srgbClr val="FFFFFF"/>
+                </a:solidFill>
+                <a:latin typeface="游ゴシック" pitchFamily="34" charset="0"/>
+                <a:ea typeface="游ゴシック" pitchFamily="34" charset="-122"/>
+                <a:cs typeface="游ゴシック" pitchFamily="34" charset="-120"/>
+              </a:rPr>
+              <a:t>貢</a:t>
+            </a:r>
+            <a:endParaRPr lang="en-US" sz="2880" dirty="0"/>
+          </a:p>
+        </p:txBody>
+      </p:sp>
+      <p:sp>
+        <p:nvSpPr>
+          <p:cNvPr id="6" name="Text 4"/>
+          <p:cNvSpPr txBox="1"/>
+          <p:nvPr/>
+        </p:nvSpPr>
+        <p:spPr>
+          <a:xfrm>
+            <a:off x="640080" y="1783080"/>
+            <a:ext cx="10881360" cy="4206240"/>
+          </a:xfrm>
+          <a:prstGeom prst="rect">
+            <a:avLst/>
+          </a:prstGeom>
+          <a:noFill/>
+          <a:ln/>
+        </p:spPr>
+        <p:txBody>
+          <a:bodyPr wrap="square" lIns="0" tIns="0" rIns="0" bIns="0" rtlCol="0" anchor="t"/>
+          <a:lstStyle/>
+          <a:p>
+            <a:pPr marL="342900" indent="-342900">
+              <a:lnSpc>
+                <a:spcPct val="128000"/>
+              </a:lnSpc>
+              <a:spcAft>
+                <a:spcPts val="1200"/>
+              </a:spcAft>
+              <a:buSzPct val="100000"/>
+              <a:buChar char="●"/>
+            </a:pPr>
+            <a:r>
+              <a:rPr lang="en-US" sz="1500" dirty="0">
+                <a:solidFill>
+                  <a:srgbClr val="3A3A3A"/>
+                </a:solidFill>
+                <a:latin typeface="游ゴシック" pitchFamily="34" charset="0"/>
+                <a:ea typeface="游ゴシック" pitchFamily="34" charset="-122"/>
+                <a:cs typeface="游ゴシック" pitchFamily="34" charset="-120"/>
+              </a:rPr>
+              <a:t>末端の顧客（本人・家族）：財産ではなく「対話」による安心と幸福度の向上（終活×幸福度の各種調査）</a:t>
+            </a:r>
+            <a:endParaRPr lang="en-US" sz="1500" dirty="0"/>
+          </a:p>
+          <a:p>
+            <a:pPr marL="342900" indent="-342900">
+              <a:lnSpc>
+                <a:spcPct val="128000"/>
+              </a:lnSpc>
+              <a:spcAft>
+                <a:spcPts val="1200"/>
+              </a:spcAft>
+              <a:buSzPct val="100000"/>
+              <a:buChar char="●"/>
+            </a:pPr>
+            <a:r>
+              <a:rPr lang="en-US" sz="1500" dirty="0">
+                <a:solidFill>
+                  <a:srgbClr val="3A3A3A"/>
+                </a:solidFill>
+                <a:latin typeface="游ゴシック" pitchFamily="34" charset="0"/>
+                <a:ea typeface="游ゴシック" pitchFamily="34" charset="-122"/>
+                <a:cs typeface="游ゴシック" pitchFamily="34" charset="-120"/>
+              </a:rPr>
+              <a:t>周辺専門家（税理士・弁護士・不動産・金融等）：新たな受任機会・収益機会の創出（素材①）</a:t>
+            </a:r>
+            <a:endParaRPr lang="en-US" sz="1500" dirty="0"/>
+          </a:p>
+          <a:p>
+            <a:pPr marL="342900" indent="-342900">
+              <a:lnSpc>
+                <a:spcPct val="128000"/>
+              </a:lnSpc>
+              <a:spcAft>
+                <a:spcPts val="1200"/>
+              </a:spcAft>
+              <a:buSzPct val="100000"/>
+              <a:buChar char="●"/>
+            </a:pPr>
+            <a:r>
+              <a:rPr lang="en-US" sz="1500" dirty="0">
+                <a:solidFill>
+                  <a:srgbClr val="3A3A3A"/>
+                </a:solidFill>
+                <a:latin typeface="游ゴシック" pitchFamily="34" charset="0"/>
+                <a:ea typeface="游ゴシック" pitchFamily="34" charset="-122"/>
+                <a:cs typeface="游ゴシック" pitchFamily="34" charset="-120"/>
+              </a:rPr>
+              <a:t>企業：福利厚生導入を通じ「従業員を大切にする法人」への進化を支援</a:t>
+            </a:r>
+            <a:endParaRPr lang="en-US" sz="1500" dirty="0"/>
+          </a:p>
+          <a:p>
+            <a:pPr marL="342900" indent="-342900">
+              <a:lnSpc>
+                <a:spcPct val="128000"/>
+              </a:lnSpc>
+              <a:spcAft>
+                <a:spcPts val="1200"/>
+              </a:spcAft>
+              <a:buSzPct val="100000"/>
+              <a:buChar char="●"/>
+            </a:pPr>
+            <a:r>
+              <a:rPr lang="en-US" sz="1500" dirty="0">
+                <a:solidFill>
+                  <a:srgbClr val="3A3A3A"/>
+                </a:solidFill>
+                <a:latin typeface="游ゴシック" pitchFamily="34" charset="0"/>
+                <a:ea typeface="游ゴシック" pitchFamily="34" charset="-122"/>
+                <a:cs typeface="游ゴシック" pitchFamily="34" charset="-120"/>
+              </a:rPr>
+              <a:t>行政・地域：朝来市 → 岸和田市など、一つの街で実証した連携モデルの横展開</a:t>
+            </a:r>
+            <a:endParaRPr lang="en-US" sz="1500" dirty="0"/>
+          </a:p>
+        </p:txBody>
+      </p:sp>
+      <p:sp>
+        <p:nvSpPr>
+          <p:cNvPr id="7" name="Shape 5"/>
+          <p:cNvSpPr/>
+          <p:nvPr/>
+        </p:nvSpPr>
+        <p:spPr>
+          <a:xfrm>
+            <a:off x="640080" y="4754880"/>
+            <a:ext cx="2468880" cy="1325880"/>
+          </a:xfrm>
+          <a:prstGeom prst="roundRect">
+            <a:avLst>
+              <a:gd name="adj" fmla="val 6897"/>
+            </a:avLst>
+          </a:prstGeom>
+          <a:solidFill>
+            <a:srgbClr val="F6F1EA"/>
+          </a:solidFill>
+          <a:ln/>
+          <a:effectLst>
+            <a:outerShdw sx="100000" sy="100000" kx="0" ky="0" algn="bl" rotWithShape="0" blurRad="101600" dist="38100" dir="5400000">
+              <a:srgbClr val="10233A">
+                <a:alpha val="18000"/>
+              </a:srgbClr>
+            </a:outerShdw>
+          </a:effectLst>
+        </p:spPr>
+      </p:sp>
+      <p:sp>
+        <p:nvSpPr>
+          <p:cNvPr id="8" name="Text 6"/>
+          <p:cNvSpPr txBox="1"/>
+          <p:nvPr/>
+        </p:nvSpPr>
+        <p:spPr>
+          <a:xfrm>
+            <a:off x="822960" y="4937760"/>
+            <a:ext cx="2103120" cy="365760"/>
+          </a:xfrm>
+          <a:prstGeom prst="rect">
+            <a:avLst/>
+          </a:prstGeom>
+          <a:noFill/>
+          <a:ln/>
+        </p:spPr>
+        <p:txBody>
+          <a:bodyPr wrap="square" lIns="0" tIns="0" rIns="0" bIns="0" rtlCol="0" anchor="ctr"/>
+          <a:lstStyle/>
+          <a:p>
+            <a:pPr indent="0" marL="0">
+              <a:buNone/>
+            </a:pPr>
+            <a:r>
+              <a:rPr lang="en-US" sz="1500" b="1" dirty="0">
+                <a:solidFill>
+                  <a:srgbClr val="C9603F"/>
+                </a:solidFill>
+                <a:latin typeface="游ゴシック" pitchFamily="34" charset="0"/>
+                <a:ea typeface="游ゴシック" pitchFamily="34" charset="-122"/>
+                <a:cs typeface="游ゴシック" pitchFamily="34" charset="-120"/>
+              </a:rPr>
+              <a:t>顧客</a:t>
+            </a:r>
+            <a:endParaRPr lang="en-US" sz="1500" dirty="0"/>
+          </a:p>
+        </p:txBody>
+      </p:sp>
+      <p:sp>
+        <p:nvSpPr>
+          <p:cNvPr id="9" name="Text 7"/>
+          <p:cNvSpPr txBox="1"/>
+          <p:nvPr/>
+        </p:nvSpPr>
+        <p:spPr>
+          <a:xfrm>
+            <a:off x="822960" y="5349240"/>
+            <a:ext cx="2103120" cy="640080"/>
+          </a:xfrm>
+          <a:prstGeom prst="rect">
+            <a:avLst/>
+          </a:prstGeom>
+          <a:noFill/>
+          <a:ln/>
+        </p:spPr>
+        <p:txBody>
+          <a:bodyPr wrap="square" lIns="0" tIns="0" rIns="0" bIns="0" rtlCol="0" anchor="t"/>
+          <a:lstStyle/>
+          <a:p>
+            <a:pPr indent="0" marL="0">
+              <a:lnSpc>
+                <a:spcPct val="120000"/>
+              </a:lnSpc>
+              <a:buNone/>
+            </a:pPr>
+            <a:r>
+              <a:rPr lang="en-US" sz="1150" dirty="0">
+                <a:solidFill>
+                  <a:srgbClr val="3A3A3A"/>
+                </a:solidFill>
+                <a:latin typeface="游ゴシック" pitchFamily="34" charset="0"/>
+                <a:ea typeface="游ゴシック" pitchFamily="34" charset="-122"/>
+                <a:cs typeface="游ゴシック" pitchFamily="34" charset="-120"/>
+              </a:rPr>
+              <a:t>対話による安心</a:t>
+            </a:r>
+            <a:endParaRPr lang="en-US" sz="1150" dirty="0"/>
+          </a:p>
+        </p:txBody>
+      </p:sp>
+      <p:sp>
+        <p:nvSpPr>
+          <p:cNvPr id="10" name="Shape 8"/>
+          <p:cNvSpPr/>
+          <p:nvPr/>
+        </p:nvSpPr>
+        <p:spPr>
+          <a:xfrm>
+            <a:off x="3383280" y="4754880"/>
+            <a:ext cx="2468880" cy="1325880"/>
+          </a:xfrm>
+          <a:prstGeom prst="roundRect">
+            <a:avLst>
+              <a:gd name="adj" fmla="val 6897"/>
+            </a:avLst>
+          </a:prstGeom>
+          <a:solidFill>
+            <a:srgbClr val="F6F1EA"/>
+          </a:solidFill>
+          <a:ln/>
+          <a:effectLst>
+            <a:outerShdw sx="100000" sy="100000" kx="0" ky="0" algn="bl" rotWithShape="0" blurRad="101600" dist="38100" dir="5400000">
+              <a:srgbClr val="10233A">
+                <a:alpha val="18000"/>
+              </a:srgbClr>
+            </a:outerShdw>
+          </a:effectLst>
+        </p:spPr>
+      </p:sp>
+      <p:sp>
+        <p:nvSpPr>
+          <p:cNvPr id="11" name="Text 9"/>
+          <p:cNvSpPr txBox="1"/>
+          <p:nvPr/>
+        </p:nvSpPr>
+        <p:spPr>
+          <a:xfrm>
+            <a:off x="3566160" y="4937760"/>
+            <a:ext cx="2103120" cy="365760"/>
+          </a:xfrm>
+          <a:prstGeom prst="rect">
+            <a:avLst/>
+          </a:prstGeom>
+          <a:noFill/>
+          <a:ln/>
+        </p:spPr>
+        <p:txBody>
+          <a:bodyPr wrap="square" lIns="0" tIns="0" rIns="0" bIns="0" rtlCol="0" anchor="ctr"/>
+          <a:lstStyle/>
+          <a:p>
+            <a:pPr indent="0" marL="0">
+              <a:buNone/>
+            </a:pPr>
+            <a:r>
+              <a:rPr lang="en-US" sz="1500" b="1" dirty="0">
+                <a:solidFill>
+                  <a:srgbClr val="C9603F"/>
+                </a:solidFill>
+                <a:latin typeface="游ゴシック" pitchFamily="34" charset="0"/>
+                <a:ea typeface="游ゴシック" pitchFamily="34" charset="-122"/>
+                <a:cs typeface="游ゴシック" pitchFamily="34" charset="-120"/>
+              </a:rPr>
+              <a:t>専門家</a:t>
+            </a:r>
+            <a:endParaRPr lang="en-US" sz="1500" dirty="0"/>
+          </a:p>
+        </p:txBody>
+      </p:sp>
+      <p:sp>
+        <p:nvSpPr>
+          <p:cNvPr id="12" name="Text 10"/>
+          <p:cNvSpPr txBox="1"/>
+          <p:nvPr/>
+        </p:nvSpPr>
+        <p:spPr>
+          <a:xfrm>
+            <a:off x="3566160" y="5349240"/>
+            <a:ext cx="2103120" cy="640080"/>
+          </a:xfrm>
+          <a:prstGeom prst="rect">
+            <a:avLst/>
+          </a:prstGeom>
+          <a:noFill/>
+          <a:ln/>
+        </p:spPr>
+        <p:txBody>
+          <a:bodyPr wrap="square" lIns="0" tIns="0" rIns="0" bIns="0" rtlCol="0" anchor="t"/>
+          <a:lstStyle/>
+          <a:p>
+            <a:pPr indent="0" marL="0">
+              <a:lnSpc>
+                <a:spcPct val="120000"/>
+              </a:lnSpc>
+              <a:buNone/>
+            </a:pPr>
+            <a:r>
+              <a:rPr lang="en-US" sz="1150" dirty="0">
+                <a:solidFill>
+                  <a:srgbClr val="3A3A3A"/>
+                </a:solidFill>
+                <a:latin typeface="游ゴシック" pitchFamily="34" charset="0"/>
+                <a:ea typeface="游ゴシック" pitchFamily="34" charset="-122"/>
+                <a:cs typeface="游ゴシック" pitchFamily="34" charset="-120"/>
+              </a:rPr>
+              <a:t>新たな受任機会</a:t>
+            </a:r>
+            <a:endParaRPr lang="en-US" sz="1150" dirty="0"/>
+          </a:p>
+        </p:txBody>
+      </p:sp>
+      <p:sp>
+        <p:nvSpPr>
+          <p:cNvPr id="13" name="Shape 11"/>
+          <p:cNvSpPr/>
+          <p:nvPr/>
+        </p:nvSpPr>
+        <p:spPr>
+          <a:xfrm>
+            <a:off x="6126480" y="4754880"/>
+            <a:ext cx="2468880" cy="1325880"/>
+          </a:xfrm>
+          <a:prstGeom prst="roundRect">
+            <a:avLst>
+              <a:gd name="adj" fmla="val 6897"/>
+            </a:avLst>
+          </a:prstGeom>
+          <a:solidFill>
+            <a:srgbClr val="F6F1EA"/>
+          </a:solidFill>
+          <a:ln/>
+          <a:effectLst>
+            <a:outerShdw sx="100000" sy="100000" kx="0" ky="0" algn="bl" rotWithShape="0" blurRad="101600" dist="38100" dir="5400000">
+              <a:srgbClr val="10233A">
+                <a:alpha val="18000"/>
+              </a:srgbClr>
+            </a:outerShdw>
+          </a:effectLst>
+        </p:spPr>
+      </p:sp>
+      <p:sp>
+        <p:nvSpPr>
+          <p:cNvPr id="14" name="Text 12"/>
+          <p:cNvSpPr txBox="1"/>
+          <p:nvPr/>
+        </p:nvSpPr>
+        <p:spPr>
+          <a:xfrm>
+            <a:off x="6309360" y="4937760"/>
+            <a:ext cx="2103120" cy="365760"/>
+          </a:xfrm>
+          <a:prstGeom prst="rect">
+            <a:avLst/>
+          </a:prstGeom>
+          <a:noFill/>
+          <a:ln/>
+        </p:spPr>
+        <p:txBody>
+          <a:bodyPr wrap="square" lIns="0" tIns="0" rIns="0" bIns="0" rtlCol="0" anchor="ctr"/>
+          <a:lstStyle/>
+          <a:p>
+            <a:pPr indent="0" marL="0">
+              <a:buNone/>
+            </a:pPr>
+            <a:r>
+              <a:rPr lang="en-US" sz="1500" b="1" dirty="0">
+                <a:solidFill>
+                  <a:srgbClr val="C9603F"/>
+                </a:solidFill>
+                <a:latin typeface="游ゴシック" pitchFamily="34" charset="0"/>
+                <a:ea typeface="游ゴシック" pitchFamily="34" charset="-122"/>
+                <a:cs typeface="游ゴシック" pitchFamily="34" charset="-120"/>
+              </a:rPr>
+              <a:t>企業</a:t>
+            </a:r>
+            <a:endParaRPr lang="en-US" sz="1500" dirty="0"/>
+          </a:p>
+        </p:txBody>
+      </p:sp>
+      <p:sp>
+        <p:nvSpPr>
+          <p:cNvPr id="15" name="Text 13"/>
+          <p:cNvSpPr txBox="1"/>
+          <p:nvPr/>
+        </p:nvSpPr>
+        <p:spPr>
+          <a:xfrm>
+            <a:off x="6309360" y="5349240"/>
+            <a:ext cx="2103120" cy="640080"/>
+          </a:xfrm>
+          <a:prstGeom prst="rect">
+            <a:avLst/>
+          </a:prstGeom>
+          <a:noFill/>
+          <a:ln/>
+        </p:spPr>
+        <p:txBody>
+          <a:bodyPr wrap="square" lIns="0" tIns="0" rIns="0" bIns="0" rtlCol="0" anchor="t"/>
+          <a:lstStyle/>
+          <a:p>
+            <a:pPr indent="0" marL="0">
+              <a:lnSpc>
+                <a:spcPct val="120000"/>
+              </a:lnSpc>
+              <a:buNone/>
+            </a:pPr>
+            <a:r>
+              <a:rPr lang="en-US" sz="1150" dirty="0">
+                <a:solidFill>
+                  <a:srgbClr val="3A3A3A"/>
+                </a:solidFill>
+                <a:latin typeface="游ゴシック" pitchFamily="34" charset="0"/>
+                <a:ea typeface="游ゴシック" pitchFamily="34" charset="-122"/>
+                <a:cs typeface="游ゴシック" pitchFamily="34" charset="-120"/>
+              </a:rPr>
+              <a:t>従業員を大切にする法人へ</a:t>
+            </a:r>
+            <a:endParaRPr lang="en-US" sz="1150" dirty="0"/>
+          </a:p>
+        </p:txBody>
+      </p:sp>
+      <p:sp>
+        <p:nvSpPr>
+          <p:cNvPr id="16" name="Shape 14"/>
+          <p:cNvSpPr/>
+          <p:nvPr/>
+        </p:nvSpPr>
+        <p:spPr>
+          <a:xfrm>
+            <a:off x="8869680" y="4754880"/>
+            <a:ext cx="2468880" cy="1325880"/>
+          </a:xfrm>
+          <a:prstGeom prst="roundRect">
+            <a:avLst>
+              <a:gd name="adj" fmla="val 6897"/>
+            </a:avLst>
+          </a:prstGeom>
+          <a:solidFill>
+            <a:srgbClr val="F6F1EA"/>
+          </a:solidFill>
+          <a:ln/>
+          <a:effectLst>
+            <a:outerShdw sx="100000" sy="100000" kx="0" ky="0" algn="bl" rotWithShape="0" blurRad="101600" dist="38100" dir="5400000">
+              <a:srgbClr val="10233A">
+                <a:alpha val="18000"/>
+              </a:srgbClr>
+            </a:outerShdw>
+          </a:effectLst>
+        </p:spPr>
+      </p:sp>
+      <p:sp>
+        <p:nvSpPr>
+          <p:cNvPr id="17" name="Text 15"/>
+          <p:cNvSpPr txBox="1"/>
+          <p:nvPr/>
+        </p:nvSpPr>
+        <p:spPr>
+          <a:xfrm>
+            <a:off x="9052560" y="4937760"/>
+            <a:ext cx="2103120" cy="365760"/>
+          </a:xfrm>
+          <a:prstGeom prst="rect">
+            <a:avLst/>
+          </a:prstGeom>
+          <a:noFill/>
+          <a:ln/>
+        </p:spPr>
+        <p:txBody>
+          <a:bodyPr wrap="square" lIns="0" tIns="0" rIns="0" bIns="0" rtlCol="0" anchor="ctr"/>
+          <a:lstStyle/>
+          <a:p>
+            <a:pPr indent="0" marL="0">
+              <a:buNone/>
+            </a:pPr>
+            <a:r>
+              <a:rPr lang="en-US" sz="1500" b="1" dirty="0">
+                <a:solidFill>
+                  <a:srgbClr val="C9603F"/>
+                </a:solidFill>
+                <a:latin typeface="游ゴシック" pitchFamily="34" charset="0"/>
+                <a:ea typeface="游ゴシック" pitchFamily="34" charset="-122"/>
+                <a:cs typeface="游ゴシック" pitchFamily="34" charset="-120"/>
+              </a:rPr>
+              <a:t>行政・地域</a:t>
+            </a:r>
+            <a:endParaRPr lang="en-US" sz="1500" dirty="0"/>
+          </a:p>
+        </p:txBody>
+      </p:sp>
+      <p:sp>
+        <p:nvSpPr>
+          <p:cNvPr id="18" name="Text 16"/>
+          <p:cNvSpPr txBox="1"/>
+          <p:nvPr/>
+        </p:nvSpPr>
+        <p:spPr>
+          <a:xfrm>
+            <a:off x="9052560" y="5349240"/>
+            <a:ext cx="2103120" cy="640080"/>
+          </a:xfrm>
+          <a:prstGeom prst="rect">
+            <a:avLst/>
+          </a:prstGeom>
+          <a:noFill/>
+          <a:ln/>
+        </p:spPr>
+        <p:txBody>
+          <a:bodyPr wrap="square" lIns="0" tIns="0" rIns="0" bIns="0" rtlCol="0" anchor="t"/>
+          <a:lstStyle/>
+          <a:p>
+            <a:pPr indent="0" marL="0">
+              <a:lnSpc>
+                <a:spcPct val="120000"/>
+              </a:lnSpc>
+              <a:buNone/>
+            </a:pPr>
+            <a:r>
+              <a:rPr lang="en-US" sz="1150" dirty="0">
+                <a:solidFill>
+                  <a:srgbClr val="3A3A3A"/>
+                </a:solidFill>
+                <a:latin typeface="游ゴシック" pitchFamily="34" charset="0"/>
+                <a:ea typeface="游ゴシック" pitchFamily="34" charset="-122"/>
+                <a:cs typeface="游ゴシック" pitchFamily="34" charset="-120"/>
+              </a:rPr>
+              <a:t>連携モデルの横展開</a:t>
+            </a:r>
+            <a:endParaRPr lang="en-US" sz="1150" dirty="0"/>
+          </a:p>
+        </p:txBody>
+      </p:sp>
+      <p:sp>
+        <p:nvSpPr>
+          <p:cNvPr id="19" name="Text 17"/>
+          <p:cNvSpPr txBox="1"/>
+          <p:nvPr/>
+        </p:nvSpPr>
+        <p:spPr>
+          <a:xfrm>
+            <a:off x="11551615" y="6400800"/>
+            <a:ext cx="457200" cy="274320"/>
+          </a:xfrm>
+          <a:prstGeom prst="rect">
+            <a:avLst/>
+          </a:prstGeom>
+          <a:noFill/>
+          <a:ln/>
+        </p:spPr>
+        <p:txBody>
+          <a:bodyPr wrap="square" lIns="0" tIns="0" rIns="0" bIns="0" rtlCol="0" anchor="ctr"/>
+          <a:lstStyle/>
+          <a:p>
+            <a:pPr algn="r" indent="0" marL="0">
+              <a:buNone/>
+            </a:pPr>
+            <a:r>
+              <a:rPr lang="en-US" sz="1000" dirty="0">
+                <a:solidFill>
+                  <a:srgbClr val="6B6B6B"/>
+                </a:solidFill>
+                <a:latin typeface="游ゴシック" pitchFamily="34" charset="0"/>
+                <a:ea typeface="游ゴシック" pitchFamily="34" charset="-122"/>
+                <a:cs typeface="游ゴシック" pitchFamily="34" charset="-120"/>
+              </a:rPr>
+              <a:t>15</a:t>
+            </a:r>
+            <a:endParaRPr lang="en-US" sz="1000" dirty="0"/>
+          </a:p>
+        </p:txBody>
+      </p:sp>
+    </p:spTree>
+  </p:cSld>
+  <p:clrMapOvr>
+    <a:masterClrMapping/>
+  </p:clrMapOvr>
+</p:sld>
+</file>
+
+<file path=ppt/slides/slide16.xml><?xml version="1.0" encoding="utf-8"?>
+<p:sld xmlns:a="http://schemas.openxmlformats.org/drawingml/2006/main" xmlns:r="http://schemas.openxmlformats.org/officeDocument/2006/relationships" xmlns:p="http://schemas.openxmlformats.org/presentationml/2006/main">
+  <p:cSld name="Slide 16">
     <p:bg>
       <p:bgPr>
         <a:solidFill>
@@ -9498,7 +10295,7 @@
                 <a:ea typeface="游ゴシック" pitchFamily="34" charset="-122"/>
                 <a:cs typeface="游ゴシック" pitchFamily="34" charset="-120"/>
               </a:rPr>
-              <a:t>FUNNEL COMPARISON</a:t>
+              <a:t>OUR PRODUCT</a:t>
             </a:r>
             <a:endParaRPr lang="en-US" sz="1300" dirty="0"/>
           </a:p>
@@ -9537,7 +10334,7 @@
                 <a:ea typeface="游ゴシック" pitchFamily="34" charset="-122"/>
                 <a:cs typeface="游ゴシック" pitchFamily="34" charset="-120"/>
               </a:rPr>
-              <a:t>フロントの囲い込みが、違う。</a:t>
+              <a:t>繋ぐノートとは ― “生きる準備”を書き込む、たった一冊</a:t>
             </a:r>
             <a:endParaRPr lang="en-US" sz="2700" dirty="0"/>
           </a:p>
@@ -9545,30 +10342,122 @@
       </p:sp>
       <p:sp>
         <p:nvSpPr>
-          <p:cNvPr id="4" name="Text 2"/>
-          <p:cNvSpPr txBox="1"/>
-          <p:nvPr/>
-        </p:nvSpPr>
-        <p:spPr>
-          <a:xfrm>
-            <a:off x="457200" y="1627632"/>
-            <a:ext cx="3931920" cy="365760"/>
-          </a:xfrm>
-          <a:prstGeom prst="rect">
-            <a:avLst/>
-          </a:prstGeom>
-          <a:noFill/>
-          <a:ln/>
-        </p:spPr>
-        <p:txBody>
-          <a:bodyPr wrap="square" lIns="0" tIns="0" rIns="0" bIns="0" rtlCol="0" anchor="ctr"/>
-          <a:lstStyle/>
-          <a:p>
-            <a:pPr algn="ctr" indent="0" marL="0">
-              <a:buNone/>
-            </a:pPr>
-            <a:r>
-              <a:rPr lang="en-US" sz="1500" b="1" dirty="0">
+          <p:cNvPr id="4" name="Shape 2"/>
+          <p:cNvSpPr/>
+          <p:nvPr/>
+        </p:nvSpPr>
+        <p:spPr>
+          <a:xfrm>
+            <a:off x="566928" y="1801368"/>
+            <a:ext cx="5632704" cy="4535424"/>
+          </a:xfrm>
+          <a:prstGeom prst="roundRect">
+            <a:avLst>
+              <a:gd name="adj" fmla="val 1613"/>
+            </a:avLst>
+          </a:prstGeom>
+          <a:solidFill>
+            <a:srgbClr val="FFFFFF"/>
+          </a:solidFill>
+          <a:ln/>
+          <a:effectLst>
+            <a:outerShdw sx="100000" sy="100000" kx="0" ky="0" algn="bl" rotWithShape="0" blurRad="101600" dist="38100" dir="5400000">
+              <a:srgbClr val="10233A">
+                <a:alpha val="18000"/>
+              </a:srgbClr>
+            </a:outerShdw>
+          </a:effectLst>
+        </p:spPr>
+      </p:sp>
+      <p:pic>
+        <p:nvPicPr>
+          <p:cNvPr id="5" name="Image 0" descr="tsunagu_note_photo.png">    </p:cNvPr>
+          <p:cNvPicPr>
+            <a:picLocks noChangeAspect="1"/>
+          </p:cNvPicPr>
+          <p:nvPr/>
+        </p:nvPicPr>
+        <p:blipFill>
+          <a:blip r:embed="rId1"/>
+          <a:stretch>
+            <a:fillRect/>
+          </a:stretch>
+        </p:blipFill>
+        <p:spPr>
+          <a:xfrm>
+            <a:off x="640080" y="1874520"/>
+            <a:ext cx="5486400" cy="4389120"/>
+          </a:xfrm>
+          <a:prstGeom prst="rect">
+            <a:avLst/>
+          </a:prstGeom>
+        </p:spPr>
+      </p:pic>
+      <p:sp>
+        <p:nvSpPr>
+          <p:cNvPr id="6" name="Text 3"/>
+          <p:cNvSpPr txBox="1"/>
+          <p:nvPr/>
+        </p:nvSpPr>
+        <p:spPr>
+          <a:xfrm>
+            <a:off x="640080" y="6400800"/>
+            <a:ext cx="5486400" cy="457200"/>
+          </a:xfrm>
+          <a:prstGeom prst="rect">
+            <a:avLst/>
+          </a:prstGeom>
+          <a:noFill/>
+          <a:ln/>
+        </p:spPr>
+        <p:txBody>
+          <a:bodyPr wrap="square" lIns="0" tIns="0" rIns="0" bIns="0" rtlCol="0" anchor="ctr"/>
+          <a:lstStyle/>
+          <a:p>
+            <a:pPr indent="0" marL="0">
+              <a:buNone/>
+            </a:pPr>
+            <a:r>
+              <a:rPr lang="en-US" sz="1050" i="1" dirty="0">
+                <a:solidFill>
+                  <a:srgbClr val="6B6B6B"/>
+                </a:solidFill>
+                <a:latin typeface="游ゴシック" pitchFamily="34" charset="0"/>
+                <a:ea typeface="游ゴシック" pitchFamily="34" charset="-122"/>
+                <a:cs typeface="游ゴシック" pitchFamily="34" charset="-120"/>
+              </a:rPr>
+              <a:t>実物：首から下げる携帯用ケースと、ノート内ページ（サポートしてくれる人の連絡先／お薬の管理方法 等）</a:t>
+            </a:r>
+            <a:endParaRPr lang="en-US" sz="1050" dirty="0"/>
+          </a:p>
+        </p:txBody>
+      </p:sp>
+      <p:sp>
+        <p:nvSpPr>
+          <p:cNvPr id="7" name="Text 4"/>
+          <p:cNvSpPr txBox="1"/>
+          <p:nvPr/>
+        </p:nvSpPr>
+        <p:spPr>
+          <a:xfrm>
+            <a:off x="6492240" y="1828800"/>
+            <a:ext cx="5029200" cy="548640"/>
+          </a:xfrm>
+          <a:prstGeom prst="rect">
+            <a:avLst/>
+          </a:prstGeom>
+          <a:noFill/>
+          <a:ln/>
+        </p:spPr>
+        <p:txBody>
+          <a:bodyPr wrap="square" lIns="0" tIns="0" rIns="0" bIns="0" rtlCol="0" anchor="ctr"/>
+          <a:lstStyle/>
+          <a:p>
+            <a:pPr indent="0" marL="0">
+              <a:buNone/>
+            </a:pPr>
+            <a:r>
+              <a:rPr lang="en-US" sz="1600" b="1" dirty="0">
                 <a:solidFill>
                   <a:srgbClr val="1E3A5F"/>
                 </a:solidFill>
@@ -9576,46 +10465,7 @@
                 <a:ea typeface="游ゴシック" pitchFamily="34" charset="-122"/>
                 <a:cs typeface="游ゴシック" pitchFamily="34" charset="-120"/>
               </a:rPr>
-              <a:t>一般的な相続ビジネス</a:t>
-            </a:r>
-            <a:endParaRPr lang="en-US" sz="1500" dirty="0"/>
-          </a:p>
-        </p:txBody>
-      </p:sp>
-      <p:sp>
-        <p:nvSpPr>
-          <p:cNvPr id="5" name="Text 3"/>
-          <p:cNvSpPr txBox="1"/>
-          <p:nvPr/>
-        </p:nvSpPr>
-        <p:spPr>
-          <a:xfrm>
-            <a:off x="6492240" y="1627632"/>
-            <a:ext cx="5120640" cy="365760"/>
-          </a:xfrm>
-          <a:prstGeom prst="rect">
-            <a:avLst/>
-          </a:prstGeom>
-          <a:noFill/>
-          <a:ln/>
-        </p:spPr>
-        <p:txBody>
-          <a:bodyPr wrap="square" lIns="0" tIns="0" rIns="0" bIns="0" rtlCol="0" anchor="ctr"/>
-          <a:lstStyle/>
-          <a:p>
-            <a:pPr algn="ctr" indent="0" marL="0">
-              <a:buNone/>
-            </a:pPr>
-            <a:r>
-              <a:rPr lang="en-US" sz="1600" b="1" dirty="0">
-                <a:solidFill>
-                  <a:srgbClr val="C9603F"/>
-                </a:solidFill>
-                <a:latin typeface="游ゴシック" pitchFamily="34" charset="0"/>
-                <a:ea typeface="游ゴシック" pitchFamily="34" charset="-122"/>
-                <a:cs typeface="游ゴシック" pitchFamily="34" charset="-120"/>
-              </a:rPr>
-              <a:t>繋ぐグループメソッド</a:t>
+              <a:t>“財産”ではなく、“生きる準備”を書き込むノート</a:t>
             </a:r>
             <a:endParaRPr lang="en-US" sz="1600" dirty="0"/>
           </a:p>
@@ -9623,551 +10473,137 @@
       </p:sp>
       <p:sp>
         <p:nvSpPr>
-          <p:cNvPr id="6" name="Shape 4"/>
+          <p:cNvPr id="8" name="Text 5"/>
+          <p:cNvSpPr txBox="1"/>
+          <p:nvPr/>
+        </p:nvSpPr>
+        <p:spPr>
+          <a:xfrm>
+            <a:off x="6492240" y="2423160"/>
+            <a:ext cx="5029200" cy="2743200"/>
+          </a:xfrm>
+          <a:prstGeom prst="rect">
+            <a:avLst/>
+          </a:prstGeom>
+          <a:noFill/>
+          <a:ln/>
+        </p:spPr>
+        <p:txBody>
+          <a:bodyPr wrap="square" lIns="0" tIns="0" rIns="0" bIns="0" rtlCol="0" anchor="t"/>
+          <a:lstStyle/>
+          <a:p>
+            <a:pPr marL="342900" indent="-342900">
+              <a:lnSpc>
+                <a:spcPct val="128000"/>
+              </a:lnSpc>
+              <a:spcAft>
+                <a:spcPts val="1100"/>
+              </a:spcAft>
+              <a:buSzPct val="100000"/>
+              <a:buChar char="●"/>
+            </a:pPr>
+            <a:r>
+              <a:rPr lang="en-US" sz="1350" dirty="0">
+                <a:solidFill>
+                  <a:srgbClr val="3A3A3A"/>
+                </a:solidFill>
+                <a:latin typeface="游ゴシック" pitchFamily="34" charset="0"/>
+                <a:ea typeface="游ゴシック" pitchFamily="34" charset="-122"/>
+                <a:cs typeface="游ゴシック" pitchFamily="34" charset="-120"/>
+              </a:rPr>
+              <a:t>首から下げるケース型。救急隊員・医療従事者が、もしもの時にすぐ見つけられる設計</a:t>
+            </a:r>
+            <a:endParaRPr lang="en-US" sz="1350" dirty="0"/>
+          </a:p>
+          <a:p>
+            <a:pPr marL="342900" indent="-342900">
+              <a:lnSpc>
+                <a:spcPct val="128000"/>
+              </a:lnSpc>
+              <a:spcAft>
+                <a:spcPts val="1100"/>
+              </a:spcAft>
+              <a:buSzPct val="100000"/>
+              <a:buChar char="●"/>
+            </a:pPr>
+            <a:r>
+              <a:rPr lang="en-US" sz="1350" dirty="0">
+                <a:solidFill>
+                  <a:srgbClr val="3A3A3A"/>
+                </a:solidFill>
+                <a:latin typeface="游ゴシック" pitchFamily="34" charset="0"/>
+                <a:ea typeface="游ゴシック" pitchFamily="34" charset="-122"/>
+                <a:cs typeface="游ゴシック" pitchFamily="34" charset="-120"/>
+              </a:rPr>
+              <a:t>日常をサポートしてくれる家族・友人・地域の仲間の連絡先を記録</a:t>
+            </a:r>
+            <a:endParaRPr lang="en-US" sz="1350" dirty="0"/>
+          </a:p>
+          <a:p>
+            <a:pPr marL="342900" indent="-342900">
+              <a:lnSpc>
+                <a:spcPct val="128000"/>
+              </a:lnSpc>
+              <a:spcAft>
+                <a:spcPts val="1100"/>
+              </a:spcAft>
+              <a:buSzPct val="100000"/>
+              <a:buChar char="●"/>
+            </a:pPr>
+            <a:r>
+              <a:rPr lang="en-US" sz="1350" dirty="0">
+                <a:solidFill>
+                  <a:srgbClr val="3A3A3A"/>
+                </a:solidFill>
+                <a:latin typeface="游ゴシック" pitchFamily="34" charset="0"/>
+                <a:ea typeface="游ゴシック" pitchFamily="34" charset="-122"/>
+                <a:cs typeface="游ゴシック" pitchFamily="34" charset="-120"/>
+              </a:rPr>
+              <a:t>お薬の管理方法など、「もしもの時」に必要な情報を一冊に集約</a:t>
+            </a:r>
+            <a:endParaRPr lang="en-US" sz="1350" dirty="0"/>
+          </a:p>
+          <a:p>
+            <a:pPr marL="342900" indent="-342900">
+              <a:lnSpc>
+                <a:spcPct val="128000"/>
+              </a:lnSpc>
+              <a:spcAft>
+                <a:spcPts val="1100"/>
+              </a:spcAft>
+              <a:buSzPct val="100000"/>
+              <a:buChar char="●"/>
+            </a:pPr>
+            <a:r>
+              <a:rPr lang="en-US" sz="1350" dirty="0">
+                <a:solidFill>
+                  <a:srgbClr val="3A3A3A"/>
+                </a:solidFill>
+                <a:latin typeface="游ゴシック" pitchFamily="34" charset="0"/>
+                <a:ea typeface="游ゴシック" pitchFamily="34" charset="-122"/>
+                <a:cs typeface="游ゴシック" pitchFamily="34" charset="-120"/>
+              </a:rPr>
+              <a:t>ACP（人生会議）を「書いて、話すきっかけ」に変える、まさに“フロント”そのもの</a:t>
+            </a:r>
+            <a:endParaRPr lang="en-US" sz="1350" dirty="0"/>
+          </a:p>
+        </p:txBody>
+      </p:sp>
+      <p:sp>
+        <p:nvSpPr>
+          <p:cNvPr id="9" name="Shape 6"/>
           <p:cNvSpPr/>
           <p:nvPr/>
         </p:nvSpPr>
         <p:spPr>
           <a:xfrm>
-            <a:off x="1508760" y="2103120"/>
-            <a:ext cx="1828800" cy="841248"/>
-          </a:xfrm>
-          <a:prstGeom prst="rect">
-            <a:avLst/>
-          </a:prstGeom>
-          <a:solidFill>
-            <a:srgbClr val="1E3A5F">
-              <a:alpha val="32000"/>
-            </a:srgbClr>
-          </a:solidFill>
-          <a:ln/>
-        </p:spPr>
-      </p:sp>
-      <p:sp>
-        <p:nvSpPr>
-          <p:cNvPr id="7" name="Text 5"/>
-          <p:cNvSpPr txBox="1"/>
-          <p:nvPr/>
-        </p:nvSpPr>
-        <p:spPr>
-          <a:xfrm>
-            <a:off x="1554480" y="2103120"/>
-            <a:ext cx="1737360" cy="841248"/>
-          </a:xfrm>
-          <a:prstGeom prst="rect">
-            <a:avLst/>
-          </a:prstGeom>
-          <a:noFill/>
-          <a:ln/>
-        </p:spPr>
-        <p:txBody>
-          <a:bodyPr wrap="square" lIns="0" tIns="0" rIns="0" bIns="0" rtlCol="0" anchor="ctr"/>
-          <a:lstStyle/>
-          <a:p>
-            <a:pPr algn="ctr" indent="0" marL="0">
-              <a:buNone/>
-            </a:pPr>
-            <a:r>
-              <a:rPr lang="en-US" sz="1050" b="1" dirty="0">
-                <a:solidFill>
-                  <a:srgbClr val="10233A"/>
-                </a:solidFill>
-                <a:latin typeface="游ゴシック" pitchFamily="34" charset="0"/>
-                <a:ea typeface="游ゴシック" pitchFamily="34" charset="-122"/>
-                <a:cs typeface="游ゴシック" pitchFamily="34" charset="-120"/>
-              </a:rPr>
-              <a:t>財産保有者のみ</a:t>
-            </a:r>
-            <a:endParaRPr lang="en-US" sz="1050" dirty="0"/>
-          </a:p>
-        </p:txBody>
-      </p:sp>
-      <p:sp>
-        <p:nvSpPr>
-          <p:cNvPr id="8" name="Text 6"/>
-          <p:cNvSpPr txBox="1"/>
-          <p:nvPr/>
-        </p:nvSpPr>
-        <p:spPr>
-          <a:xfrm>
-            <a:off x="4480560" y="2103120"/>
-            <a:ext cx="1920240" cy="841248"/>
-          </a:xfrm>
-          <a:prstGeom prst="rect">
-            <a:avLst/>
-          </a:prstGeom>
-          <a:noFill/>
-          <a:ln/>
-        </p:spPr>
-        <p:txBody>
-          <a:bodyPr wrap="square" lIns="0" tIns="0" rIns="0" bIns="0" rtlCol="0" anchor="ctr"/>
-          <a:lstStyle/>
-          <a:p>
-            <a:pPr algn="ctr" indent="0" marL="0">
-              <a:buNone/>
-            </a:pPr>
-            <a:r>
-              <a:rPr lang="en-US" sz="1200" b="1" dirty="0">
-                <a:solidFill>
-                  <a:srgbClr val="1E3A5F"/>
-                </a:solidFill>
-                <a:latin typeface="游ゴシック" pitchFamily="34" charset="0"/>
-                <a:ea typeface="游ゴシック" pitchFamily="34" charset="-122"/>
-                <a:cs typeface="游ゴシック" pitchFamily="34" charset="-120"/>
-              </a:rPr>
-              <a:t>①課題化前</a:t>
-            </a:r>
-            <a:endParaRPr lang="en-US" sz="1200" dirty="0"/>
-          </a:p>
-          <a:p>
-            <a:pPr algn="ctr" indent="0" marL="0">
-              <a:buNone/>
-            </a:pPr>
-            <a:r>
-              <a:rPr lang="en-US" sz="1200" b="1" dirty="0">
-                <a:solidFill>
-                  <a:srgbClr val="1E3A5F"/>
-                </a:solidFill>
-                <a:latin typeface="游ゴシック" pitchFamily="34" charset="0"/>
-                <a:ea typeface="游ゴシック" pitchFamily="34" charset="-122"/>
-                <a:cs typeface="游ゴシック" pitchFamily="34" charset="-120"/>
-              </a:rPr>
-              <a:t>（フロント）</a:t>
-            </a:r>
-            <a:endParaRPr lang="en-US" sz="1200" dirty="0"/>
-          </a:p>
-        </p:txBody>
-      </p:sp>
-      <p:sp>
-        <p:nvSpPr>
-          <p:cNvPr id="9" name="Shape 7"/>
-          <p:cNvSpPr/>
-          <p:nvPr/>
-        </p:nvSpPr>
-        <p:spPr>
-          <a:xfrm>
-            <a:off x="6583680" y="2103120"/>
-            <a:ext cx="4937760" cy="841248"/>
-          </a:xfrm>
-          <a:prstGeom prst="rect">
-            <a:avLst/>
-          </a:prstGeom>
-          <a:solidFill>
-            <a:srgbClr val="C9603F">
-              <a:alpha val="32000"/>
-            </a:srgbClr>
-          </a:solidFill>
-          <a:ln/>
-        </p:spPr>
-      </p:sp>
-      <p:sp>
-        <p:nvSpPr>
-          <p:cNvPr id="10" name="Text 8"/>
-          <p:cNvSpPr txBox="1"/>
-          <p:nvPr/>
-        </p:nvSpPr>
-        <p:spPr>
-          <a:xfrm>
-            <a:off x="6629400" y="2103120"/>
-            <a:ext cx="4846320" cy="841248"/>
-          </a:xfrm>
-          <a:prstGeom prst="rect">
-            <a:avLst/>
-          </a:prstGeom>
-          <a:noFill/>
-          <a:ln/>
-        </p:spPr>
-        <p:txBody>
-          <a:bodyPr wrap="square" lIns="0" tIns="0" rIns="0" bIns="0" rtlCol="0" anchor="ctr"/>
-          <a:lstStyle/>
-          <a:p>
-            <a:pPr algn="ctr" indent="0" marL="0">
-              <a:buNone/>
-            </a:pPr>
-            <a:r>
-              <a:rPr lang="en-US" sz="1100" b="1" dirty="0">
-                <a:solidFill>
-                  <a:srgbClr val="10233A"/>
-                </a:solidFill>
-                <a:latin typeface="游ゴシック" pitchFamily="34" charset="0"/>
-                <a:ea typeface="游ゴシック" pitchFamily="34" charset="-122"/>
-                <a:cs typeface="游ゴシック" pitchFamily="34" charset="-120"/>
-              </a:rPr>
-              <a:t>全世代・全資産層</a:t>
-            </a:r>
-            <a:endParaRPr lang="en-US" sz="1100" dirty="0"/>
-          </a:p>
-          <a:p>
-            <a:pPr algn="ctr" indent="0" marL="0">
-              <a:buNone/>
-            </a:pPr>
-            <a:r>
-              <a:rPr lang="en-US" sz="1100" b="1" dirty="0">
-                <a:solidFill>
-                  <a:srgbClr val="10233A"/>
-                </a:solidFill>
-                <a:latin typeface="游ゴシック" pitchFamily="34" charset="0"/>
-                <a:ea typeface="游ゴシック" pitchFamily="34" charset="-122"/>
-                <a:cs typeface="游ゴシック" pitchFamily="34" charset="-120"/>
-              </a:rPr>
-              <a:t>（ACP・人生会議）</a:t>
-            </a:r>
-            <a:endParaRPr lang="en-US" sz="1100" dirty="0"/>
-          </a:p>
-        </p:txBody>
-      </p:sp>
-      <p:sp>
-        <p:nvSpPr>
-          <p:cNvPr id="11" name="Shape 9"/>
-          <p:cNvSpPr/>
-          <p:nvPr/>
-        </p:nvSpPr>
-        <p:spPr>
-          <a:xfrm>
-            <a:off x="1737360" y="3035808"/>
-            <a:ext cx="1371600" cy="841248"/>
-          </a:xfrm>
-          <a:prstGeom prst="rect">
-            <a:avLst/>
-          </a:prstGeom>
-          <a:solidFill>
-            <a:srgbClr val="1E3A5F">
-              <a:alpha val="55000"/>
-            </a:srgbClr>
-          </a:solidFill>
-          <a:ln/>
-        </p:spPr>
-      </p:sp>
-      <p:sp>
-        <p:nvSpPr>
-          <p:cNvPr id="12" name="Text 10"/>
-          <p:cNvSpPr txBox="1"/>
-          <p:nvPr/>
-        </p:nvSpPr>
-        <p:spPr>
-          <a:xfrm>
-            <a:off x="1783080" y="3035808"/>
-            <a:ext cx="1280160" cy="841248"/>
-          </a:xfrm>
-          <a:prstGeom prst="rect">
-            <a:avLst/>
-          </a:prstGeom>
-          <a:noFill/>
-          <a:ln/>
-        </p:spPr>
-        <p:txBody>
-          <a:bodyPr wrap="square" lIns="0" tIns="0" rIns="0" bIns="0" rtlCol="0" anchor="ctr"/>
-          <a:lstStyle/>
-          <a:p>
-            <a:pPr algn="ctr" indent="0" marL="0">
-              <a:buNone/>
-            </a:pPr>
-            <a:r>
-              <a:rPr lang="en-US" sz="1050" b="1" dirty="0">
-                <a:solidFill>
-                  <a:srgbClr val="10233A"/>
-                </a:solidFill>
-                <a:latin typeface="游ゴシック" pitchFamily="34" charset="0"/>
-                <a:ea typeface="游ゴシック" pitchFamily="34" charset="-122"/>
-                <a:cs typeface="游ゴシック" pitchFamily="34" charset="-120"/>
-              </a:rPr>
-              <a:t>相続の悩みを自覚</a:t>
-            </a:r>
-            <a:endParaRPr lang="en-US" sz="1050" dirty="0"/>
-          </a:p>
-        </p:txBody>
-      </p:sp>
-      <p:sp>
-        <p:nvSpPr>
-          <p:cNvPr id="13" name="Text 11"/>
-          <p:cNvSpPr txBox="1"/>
-          <p:nvPr/>
-        </p:nvSpPr>
-        <p:spPr>
-          <a:xfrm>
-            <a:off x="4480560" y="3035808"/>
-            <a:ext cx="1920240" cy="841248"/>
-          </a:xfrm>
-          <a:prstGeom prst="rect">
-            <a:avLst/>
-          </a:prstGeom>
-          <a:noFill/>
-          <a:ln/>
-        </p:spPr>
-        <p:txBody>
-          <a:bodyPr wrap="square" lIns="0" tIns="0" rIns="0" bIns="0" rtlCol="0" anchor="ctr"/>
-          <a:lstStyle/>
-          <a:p>
-            <a:pPr algn="ctr" indent="0" marL="0">
-              <a:buNone/>
-            </a:pPr>
-            <a:r>
-              <a:rPr lang="en-US" sz="1200" b="1" dirty="0">
-                <a:solidFill>
-                  <a:srgbClr val="1E3A5F"/>
-                </a:solidFill>
-                <a:latin typeface="游ゴシック" pitchFamily="34" charset="0"/>
-                <a:ea typeface="游ゴシック" pitchFamily="34" charset="-122"/>
-                <a:cs typeface="游ゴシック" pitchFamily="34" charset="-120"/>
-              </a:rPr>
-              <a:t>②認知</a:t>
-            </a:r>
-            <a:endParaRPr lang="en-US" sz="1200" dirty="0"/>
-          </a:p>
-        </p:txBody>
-      </p:sp>
-      <p:sp>
-        <p:nvSpPr>
-          <p:cNvPr id="14" name="Shape 12"/>
-          <p:cNvSpPr/>
-          <p:nvPr/>
-        </p:nvSpPr>
-        <p:spPr>
-          <a:xfrm>
-            <a:off x="7452360" y="3035808"/>
-            <a:ext cx="3200400" cy="841248"/>
-          </a:xfrm>
-          <a:prstGeom prst="rect">
-            <a:avLst/>
-          </a:prstGeom>
-          <a:solidFill>
-            <a:srgbClr val="C9603F">
-              <a:alpha val="55000"/>
-            </a:srgbClr>
-          </a:solidFill>
-          <a:ln/>
-        </p:spPr>
-      </p:sp>
-      <p:sp>
-        <p:nvSpPr>
-          <p:cNvPr id="15" name="Text 13"/>
-          <p:cNvSpPr txBox="1"/>
-          <p:nvPr/>
-        </p:nvSpPr>
-        <p:spPr>
-          <a:xfrm>
-            <a:off x="7498080" y="3035808"/>
-            <a:ext cx="3108960" cy="841248"/>
-          </a:xfrm>
-          <a:prstGeom prst="rect">
-            <a:avLst/>
-          </a:prstGeom>
-          <a:noFill/>
-          <a:ln/>
-        </p:spPr>
-        <p:txBody>
-          <a:bodyPr wrap="square" lIns="0" tIns="0" rIns="0" bIns="0" rtlCol="0" anchor="ctr"/>
-          <a:lstStyle/>
-          <a:p>
-            <a:pPr algn="ctr" indent="0" marL="0">
-              <a:buNone/>
-            </a:pPr>
-            <a:r>
-              <a:rPr lang="en-US" sz="1100" b="1" dirty="0">
-                <a:solidFill>
-                  <a:srgbClr val="10233A"/>
-                </a:solidFill>
-                <a:latin typeface="游ゴシック" pitchFamily="34" charset="0"/>
-                <a:ea typeface="游ゴシック" pitchFamily="34" charset="-122"/>
-                <a:cs typeface="游ゴシック" pitchFamily="34" charset="-120"/>
-              </a:rPr>
-              <a:t>人生会議の実践者</a:t>
-            </a:r>
-            <a:endParaRPr lang="en-US" sz="1100" dirty="0"/>
-          </a:p>
-        </p:txBody>
-      </p:sp>
-      <p:sp>
-        <p:nvSpPr>
-          <p:cNvPr id="16" name="Shape 14"/>
-          <p:cNvSpPr/>
-          <p:nvPr/>
-        </p:nvSpPr>
-        <p:spPr>
-          <a:xfrm>
-            <a:off x="1943100" y="3968496"/>
-            <a:ext cx="960120" cy="841248"/>
-          </a:xfrm>
-          <a:prstGeom prst="rect">
-            <a:avLst/>
-          </a:prstGeom>
-          <a:solidFill>
-            <a:srgbClr val="1E3A5F">
-              <a:alpha val="77000"/>
-            </a:srgbClr>
-          </a:solidFill>
-          <a:ln/>
-        </p:spPr>
-      </p:sp>
-      <p:sp>
-        <p:nvSpPr>
-          <p:cNvPr id="17" name="Text 15"/>
-          <p:cNvSpPr txBox="1"/>
-          <p:nvPr/>
-        </p:nvSpPr>
-        <p:spPr>
-          <a:xfrm>
-            <a:off x="1988820" y="3968496"/>
-            <a:ext cx="868680" cy="841248"/>
-          </a:xfrm>
-          <a:prstGeom prst="rect">
-            <a:avLst/>
-          </a:prstGeom>
-          <a:noFill/>
-          <a:ln/>
-        </p:spPr>
-        <p:txBody>
-          <a:bodyPr wrap="square" lIns="0" tIns="0" rIns="0" bIns="0" rtlCol="0" anchor="ctr"/>
-          <a:lstStyle/>
-          <a:p>
-            <a:pPr algn="ctr" indent="0" marL="0">
-              <a:buNone/>
-            </a:pPr>
-            <a:r>
-              <a:rPr lang="en-US" sz="1050" b="1" dirty="0">
-                <a:solidFill>
-                  <a:srgbClr val="FFFFFF"/>
-                </a:solidFill>
-                <a:latin typeface="游ゴシック" pitchFamily="34" charset="0"/>
-                <a:ea typeface="游ゴシック" pitchFamily="34" charset="-122"/>
-                <a:cs typeface="游ゴシック" pitchFamily="34" charset="-120"/>
-              </a:rPr>
-              <a:t>士業へ相談</a:t>
-            </a:r>
-            <a:endParaRPr lang="en-US" sz="1050" dirty="0"/>
-          </a:p>
-        </p:txBody>
-      </p:sp>
-      <p:sp>
-        <p:nvSpPr>
-          <p:cNvPr id="18" name="Text 16"/>
-          <p:cNvSpPr txBox="1"/>
-          <p:nvPr/>
-        </p:nvSpPr>
-        <p:spPr>
-          <a:xfrm>
-            <a:off x="4480560" y="3968496"/>
-            <a:ext cx="1920240" cy="841248"/>
-          </a:xfrm>
-          <a:prstGeom prst="rect">
-            <a:avLst/>
-          </a:prstGeom>
-          <a:noFill/>
-          <a:ln/>
-        </p:spPr>
-        <p:txBody>
-          <a:bodyPr wrap="square" lIns="0" tIns="0" rIns="0" bIns="0" rtlCol="0" anchor="ctr"/>
-          <a:lstStyle/>
-          <a:p>
-            <a:pPr algn="ctr" indent="0" marL="0">
-              <a:buNone/>
-            </a:pPr>
-            <a:r>
-              <a:rPr lang="en-US" sz="1200" b="1" dirty="0">
-                <a:solidFill>
-                  <a:srgbClr val="1E3A5F"/>
-                </a:solidFill>
-                <a:latin typeface="游ゴシック" pitchFamily="34" charset="0"/>
-                <a:ea typeface="游ゴシック" pitchFamily="34" charset="-122"/>
-                <a:cs typeface="游ゴシック" pitchFamily="34" charset="-120"/>
-              </a:rPr>
-              <a:t>③情報収集</a:t>
-            </a:r>
-            <a:endParaRPr lang="en-US" sz="1200" dirty="0"/>
-          </a:p>
-        </p:txBody>
-      </p:sp>
-      <p:sp>
-        <p:nvSpPr>
-          <p:cNvPr id="19" name="Shape 17"/>
-          <p:cNvSpPr/>
-          <p:nvPr/>
-        </p:nvSpPr>
-        <p:spPr>
-          <a:xfrm>
-            <a:off x="8138160" y="3968496"/>
-            <a:ext cx="1828800" cy="841248"/>
-          </a:xfrm>
-          <a:prstGeom prst="rect">
-            <a:avLst/>
-          </a:prstGeom>
-          <a:solidFill>
-            <a:srgbClr val="C9603F">
-              <a:alpha val="77000"/>
-            </a:srgbClr>
-          </a:solidFill>
-          <a:ln/>
-        </p:spPr>
-      </p:sp>
-      <p:sp>
-        <p:nvSpPr>
-          <p:cNvPr id="20" name="Text 18"/>
-          <p:cNvSpPr txBox="1"/>
-          <p:nvPr/>
-        </p:nvSpPr>
-        <p:spPr>
-          <a:xfrm>
-            <a:off x="8183880" y="3968496"/>
-            <a:ext cx="1737360" cy="841248"/>
-          </a:xfrm>
-          <a:prstGeom prst="rect">
-            <a:avLst/>
-          </a:prstGeom>
-          <a:noFill/>
-          <a:ln/>
-        </p:spPr>
-        <p:txBody>
-          <a:bodyPr wrap="square" lIns="0" tIns="0" rIns="0" bIns="0" rtlCol="0" anchor="ctr"/>
-          <a:lstStyle/>
-          <a:p>
-            <a:pPr algn="ctr" indent="0" marL="0">
-              <a:buNone/>
-            </a:pPr>
-            <a:r>
-              <a:rPr lang="en-US" sz="1100" b="1" dirty="0">
-                <a:solidFill>
-                  <a:srgbClr val="FFFFFF"/>
-                </a:solidFill>
-                <a:latin typeface="游ゴシック" pitchFamily="34" charset="0"/>
-                <a:ea typeface="游ゴシック" pitchFamily="34" charset="-122"/>
-                <a:cs typeface="游ゴシック" pitchFamily="34" charset="-120"/>
-              </a:rPr>
-              <a:t>個別相談</a:t>
-            </a:r>
-            <a:endParaRPr lang="en-US" sz="1100" dirty="0"/>
-          </a:p>
-          <a:p>
-            <a:pPr algn="ctr" indent="0" marL="0">
-              <a:buNone/>
-            </a:pPr>
-            <a:r>
-              <a:rPr lang="en-US" sz="1100" b="1" dirty="0">
-                <a:solidFill>
-                  <a:srgbClr val="FFFFFF"/>
-                </a:solidFill>
-                <a:latin typeface="游ゴシック" pitchFamily="34" charset="0"/>
-                <a:ea typeface="游ゴシック" pitchFamily="34" charset="-122"/>
-                <a:cs typeface="游ゴシック" pitchFamily="34" charset="-120"/>
-              </a:rPr>
-              <a:t>サポートアドバイザー</a:t>
-            </a:r>
-            <a:endParaRPr lang="en-US" sz="1100" dirty="0"/>
-          </a:p>
-        </p:txBody>
-      </p:sp>
-      <p:sp>
-        <p:nvSpPr>
-          <p:cNvPr id="21" name="Shape 19"/>
-          <p:cNvSpPr/>
-          <p:nvPr/>
-        </p:nvSpPr>
-        <p:spPr>
-          <a:xfrm>
-            <a:off x="2125980" y="4901184"/>
-            <a:ext cx="594360" cy="841248"/>
-          </a:xfrm>
-          <a:prstGeom prst="rect">
-            <a:avLst/>
+            <a:off x="6492240" y="5349240"/>
+            <a:ext cx="5029200" cy="777240"/>
+          </a:xfrm>
+          <a:prstGeom prst="roundRect">
+            <a:avLst>
+              <a:gd name="adj" fmla="val 9412"/>
+            </a:avLst>
           </a:prstGeom>
           <a:solidFill>
             <a:srgbClr val="1E3A5F"/>
@@ -10177,90 +10613,14 @@
       </p:sp>
       <p:sp>
         <p:nvSpPr>
-          <p:cNvPr id="22" name="Text 20"/>
-          <p:cNvSpPr txBox="1"/>
-          <p:nvPr/>
-        </p:nvSpPr>
-        <p:spPr>
-          <a:xfrm>
-            <a:off x="4480560" y="4901184"/>
-            <a:ext cx="1920240" cy="841248"/>
-          </a:xfrm>
-          <a:prstGeom prst="rect">
-            <a:avLst/>
-          </a:prstGeom>
-          <a:noFill/>
-          <a:ln/>
-        </p:spPr>
-        <p:txBody>
-          <a:bodyPr wrap="square" lIns="0" tIns="0" rIns="0" bIns="0" rtlCol="0" anchor="ctr"/>
-          <a:lstStyle/>
-          <a:p>
-            <a:pPr algn="ctr" indent="0" marL="0">
-              <a:buNone/>
-            </a:pPr>
-            <a:r>
-              <a:rPr lang="en-US" sz="1200" b="1" dirty="0">
-                <a:solidFill>
-                  <a:srgbClr val="1E3A5F"/>
-                </a:solidFill>
-                <a:latin typeface="游ゴシック" pitchFamily="34" charset="0"/>
-                <a:ea typeface="游ゴシック" pitchFamily="34" charset="-122"/>
-                <a:cs typeface="游ゴシック" pitchFamily="34" charset="-120"/>
-              </a:rPr>
-              <a:t>④比較検討</a:t>
-            </a:r>
-            <a:endParaRPr lang="en-US" sz="1200" dirty="0"/>
-          </a:p>
-          <a:p>
-            <a:pPr algn="ctr" indent="0" marL="0">
-              <a:buNone/>
-            </a:pPr>
-            <a:r>
-              <a:rPr lang="en-US" sz="1200" b="1" dirty="0">
-                <a:solidFill>
-                  <a:srgbClr val="1E3A5F"/>
-                </a:solidFill>
-                <a:latin typeface="游ゴシック" pitchFamily="34" charset="0"/>
-                <a:ea typeface="游ゴシック" pitchFamily="34" charset="-122"/>
-                <a:cs typeface="游ゴシック" pitchFamily="34" charset="-120"/>
-              </a:rPr>
-              <a:t>・成約</a:t>
-            </a:r>
-            <a:endParaRPr lang="en-US" sz="1200" dirty="0"/>
-          </a:p>
-        </p:txBody>
-      </p:sp>
-      <p:sp>
-        <p:nvSpPr>
-          <p:cNvPr id="23" name="Shape 21"/>
-          <p:cNvSpPr/>
-          <p:nvPr/>
-        </p:nvSpPr>
-        <p:spPr>
-          <a:xfrm>
-            <a:off x="8618220" y="4901184"/>
-            <a:ext cx="868680" cy="841248"/>
-          </a:xfrm>
-          <a:prstGeom prst="rect">
-            <a:avLst/>
-          </a:prstGeom>
-          <a:solidFill>
-            <a:srgbClr val="C9603F"/>
-          </a:solidFill>
-          <a:ln/>
-        </p:spPr>
-      </p:sp>
-      <p:sp>
-        <p:nvSpPr>
-          <p:cNvPr id="24" name="Text 22"/>
-          <p:cNvSpPr txBox="1"/>
-          <p:nvPr/>
-        </p:nvSpPr>
-        <p:spPr>
-          <a:xfrm>
-            <a:off x="640080" y="6172200"/>
-            <a:ext cx="10881360" cy="365760"/>
+          <p:cNvPr id="10" name="Text 7"/>
+          <p:cNvSpPr txBox="1"/>
+          <p:nvPr/>
+        </p:nvSpPr>
+        <p:spPr>
+          <a:xfrm>
+            <a:off x="6720840" y="5349240"/>
+            <a:ext cx="4572000" cy="777240"/>
           </a:xfrm>
           <a:prstGeom prst="rect">
             <a:avLst/>
@@ -10276,23 +10636,23 @@
               <a:buNone/>
             </a:pPr>
             <a:r>
-              <a:rPr lang="en-US" sz="1300" i="1" dirty="0">
-                <a:solidFill>
-                  <a:srgbClr val="6B6B6B"/>
-                </a:solidFill>
-                <a:latin typeface="游ゴシック" pitchFamily="34" charset="0"/>
-                <a:ea typeface="游ゴシック" pitchFamily="34" charset="-122"/>
-                <a:cs typeface="游ゴシック" pitchFamily="34" charset="-120"/>
-              </a:rPr>
-              <a:t>入口を「財産」から「人生」に変えたことで、フロント（課題化前）の母数そのものを構造的に拡大している。</a:t>
-            </a:r>
-            <a:endParaRPr lang="en-US" sz="1300" dirty="0"/>
-          </a:p>
-        </p:txBody>
-      </p:sp>
-      <p:sp>
-        <p:nvSpPr>
-          <p:cNvPr id="25" name="Text 23"/>
+              <a:rPr lang="en-US" sz="1400" b="1" dirty="0">
+                <a:solidFill>
+                  <a:srgbClr val="F1DCCF"/>
+                </a:solidFill>
+                <a:latin typeface="游ゴシック" pitchFamily="34" charset="0"/>
+                <a:ea typeface="游ゴシック" pitchFamily="34" charset="-122"/>
+                <a:cs typeface="游ゴシック" pitchFamily="34" charset="-120"/>
+              </a:rPr>
+              <a:t>このノート1冊が、全世代に開かれた「生きる準備」の入口になる。</a:t>
+            </a:r>
+            <a:endParaRPr lang="en-US" sz="1400" dirty="0"/>
+          </a:p>
+        </p:txBody>
+      </p:sp>
+      <p:sp>
+        <p:nvSpPr>
+          <p:cNvPr id="11" name="Text 8"/>
           <p:cNvSpPr txBox="1"/>
           <p:nvPr/>
         </p:nvSpPr>
@@ -10394,7 +10754,7 @@
                 <a:ea typeface="游ゴシック" pitchFamily="34" charset="-122"/>
                 <a:cs typeface="游ゴシック" pitchFamily="34" charset="-120"/>
               </a:rPr>
-              <a:t>MARKET WE CREATED</a:t>
+              <a:t>FUNNEL COMPARISON</a:t>
             </a:r>
             <a:endParaRPr lang="en-US" sz="1300" dirty="0"/>
           </a:p>
@@ -10433,7 +10793,7 @@
                 <a:ea typeface="游ゴシック" pitchFamily="34" charset="-122"/>
                 <a:cs typeface="游ゴシック" pitchFamily="34" charset="-120"/>
               </a:rPr>
-              <a:t>hubとしての3年間 ― 創出した経済圏（想定内訳）</a:t>
+              <a:t>フロントの囲い込みが、違う。</a:t>
             </a:r>
             <a:endParaRPr lang="en-US" sz="2700" dirty="0"/>
           </a:p>
@@ -10441,49 +10801,81 @@
       </p:sp>
       <p:sp>
         <p:nvSpPr>
-          <p:cNvPr id="4" name="Shape 2"/>
-          <p:cNvSpPr/>
-          <p:nvPr/>
-        </p:nvSpPr>
-        <p:spPr>
-          <a:xfrm>
-            <a:off x="5943600" y="2560320"/>
-            <a:ext cx="9144" cy="1417320"/>
-          </a:xfrm>
-          <a:prstGeom prst="line">
-            <a:avLst/>
-          </a:prstGeom>
-          <a:noFill/>
-          <a:ln w="19050">
-            <a:solidFill>
-              <a:srgbClr val="C9C2B6"/>
-            </a:solidFill>
-            <a:prstDash val="sysDot"/>
-          </a:ln>
-        </p:spPr>
-      </p:sp>
-      <p:sp>
-        <p:nvSpPr>
-          <p:cNvPr id="5" name="Shape 3"/>
-          <p:cNvSpPr/>
-          <p:nvPr/>
-        </p:nvSpPr>
-        <p:spPr>
-          <a:xfrm>
-            <a:off x="5943600" y="2975443"/>
-            <a:ext cx="2263025" cy="1002197"/>
-          </a:xfrm>
-          <a:prstGeom prst="line">
-            <a:avLst/>
-          </a:prstGeom>
-          <a:noFill/>
-          <a:ln w="19050">
-            <a:solidFill>
-              <a:srgbClr val="C9C2B6"/>
-            </a:solidFill>
-            <a:prstDash val="sysDot"/>
-          </a:ln>
-        </p:spPr>
+          <p:cNvPr id="4" name="Text 2"/>
+          <p:cNvSpPr txBox="1"/>
+          <p:nvPr/>
+        </p:nvSpPr>
+        <p:spPr>
+          <a:xfrm>
+            <a:off x="457200" y="1627632"/>
+            <a:ext cx="3931920" cy="365760"/>
+          </a:xfrm>
+          <a:prstGeom prst="rect">
+            <a:avLst/>
+          </a:prstGeom>
+          <a:noFill/>
+          <a:ln/>
+        </p:spPr>
+        <p:txBody>
+          <a:bodyPr wrap="square" lIns="0" tIns="0" rIns="0" bIns="0" rtlCol="0" anchor="ctr"/>
+          <a:lstStyle/>
+          <a:p>
+            <a:pPr algn="ctr" indent="0" marL="0">
+              <a:buNone/>
+            </a:pPr>
+            <a:r>
+              <a:rPr lang="en-US" sz="1500" b="1" dirty="0">
+                <a:solidFill>
+                  <a:srgbClr val="1E3A5F"/>
+                </a:solidFill>
+                <a:latin typeface="游ゴシック" pitchFamily="34" charset="0"/>
+                <a:ea typeface="游ゴシック" pitchFamily="34" charset="-122"/>
+                <a:cs typeface="游ゴシック" pitchFamily="34" charset="-120"/>
+              </a:rPr>
+              <a:t>一般的な相続ビジネス</a:t>
+            </a:r>
+            <a:endParaRPr lang="en-US" sz="1500" dirty="0"/>
+          </a:p>
+        </p:txBody>
+      </p:sp>
+      <p:sp>
+        <p:nvSpPr>
+          <p:cNvPr id="5" name="Text 3"/>
+          <p:cNvSpPr txBox="1"/>
+          <p:nvPr/>
+        </p:nvSpPr>
+        <p:spPr>
+          <a:xfrm>
+            <a:off x="6492240" y="1627632"/>
+            <a:ext cx="5120640" cy="365760"/>
+          </a:xfrm>
+          <a:prstGeom prst="rect">
+            <a:avLst/>
+          </a:prstGeom>
+          <a:noFill/>
+          <a:ln/>
+        </p:spPr>
+        <p:txBody>
+          <a:bodyPr wrap="square" lIns="0" tIns="0" rIns="0" bIns="0" rtlCol="0" anchor="ctr"/>
+          <a:lstStyle/>
+          <a:p>
+            <a:pPr algn="ctr" indent="0" marL="0">
+              <a:buNone/>
+            </a:pPr>
+            <a:r>
+              <a:rPr lang="en-US" sz="1600" b="1" dirty="0">
+                <a:solidFill>
+                  <a:srgbClr val="C9603F"/>
+                </a:solidFill>
+                <a:latin typeface="游ゴシック" pitchFamily="34" charset="0"/>
+                <a:ea typeface="游ゴシック" pitchFamily="34" charset="-122"/>
+                <a:cs typeface="游ゴシック" pitchFamily="34" charset="-120"/>
+              </a:rPr>
+              <a:t>繋ぐグループメソッド</a:t>
+            </a:r>
+            <a:endParaRPr lang="en-US" sz="1600" dirty="0"/>
+          </a:p>
+        </p:txBody>
       </p:sp>
       <p:sp>
         <p:nvSpPr>
@@ -10493,66 +10885,114 @@
         </p:nvSpPr>
         <p:spPr>
           <a:xfrm>
-            <a:off x="5943600" y="3977640"/>
-            <a:ext cx="3200400" cy="9144"/>
-          </a:xfrm>
-          <a:prstGeom prst="line">
-            <a:avLst/>
-          </a:prstGeom>
-          <a:noFill/>
-          <a:ln w="19050">
-            <a:solidFill>
-              <a:srgbClr val="C9C2B6"/>
-            </a:solidFill>
-            <a:prstDash val="sysDot"/>
-          </a:ln>
-        </p:spPr>
-      </p:sp>
-      <p:sp>
-        <p:nvSpPr>
-          <p:cNvPr id="7" name="Shape 5"/>
-          <p:cNvSpPr/>
-          <p:nvPr/>
-        </p:nvSpPr>
-        <p:spPr>
-          <a:xfrm>
-            <a:off x="5943600" y="3977640"/>
-            <a:ext cx="2263025" cy="1002197"/>
-          </a:xfrm>
-          <a:prstGeom prst="line">
-            <a:avLst/>
-          </a:prstGeom>
-          <a:noFill/>
-          <a:ln w="19050">
-            <a:solidFill>
-              <a:srgbClr val="C9C2B6"/>
-            </a:solidFill>
-            <a:prstDash val="sysDot"/>
-          </a:ln>
-        </p:spPr>
-      </p:sp>
-      <p:sp>
-        <p:nvSpPr>
-          <p:cNvPr id="8" name="Shape 6"/>
-          <p:cNvSpPr/>
-          <p:nvPr/>
-        </p:nvSpPr>
-        <p:spPr>
-          <a:xfrm>
-            <a:off x="5943600" y="3977640"/>
-            <a:ext cx="9144" cy="1417320"/>
-          </a:xfrm>
-          <a:prstGeom prst="line">
-            <a:avLst/>
-          </a:prstGeom>
-          <a:noFill/>
-          <a:ln w="19050">
-            <a:solidFill>
-              <a:srgbClr val="C9C2B6"/>
-            </a:solidFill>
-            <a:prstDash val="sysDot"/>
-          </a:ln>
-        </p:spPr>
+            <a:off x="1508760" y="2103120"/>
+            <a:ext cx="1828800" cy="841248"/>
+          </a:xfrm>
+          <a:prstGeom prst="rect">
+            <a:avLst/>
+          </a:prstGeom>
+          <a:solidFill>
+            <a:srgbClr val="1E3A5F">
+              <a:alpha val="32000"/>
+            </a:srgbClr>
+          </a:solidFill>
+          <a:ln/>
+        </p:spPr>
+      </p:sp>
+      <p:sp>
+        <p:nvSpPr>
+          <p:cNvPr id="7" name="Text 5"/>
+          <p:cNvSpPr txBox="1"/>
+          <p:nvPr/>
+        </p:nvSpPr>
+        <p:spPr>
+          <a:xfrm>
+            <a:off x="1554480" y="2103120"/>
+            <a:ext cx="1737360" cy="841248"/>
+          </a:xfrm>
+          <a:prstGeom prst="rect">
+            <a:avLst/>
+          </a:prstGeom>
+          <a:noFill/>
+          <a:ln/>
+        </p:spPr>
+        <p:txBody>
+          <a:bodyPr wrap="square" lIns="0" tIns="0" rIns="0" bIns="0" rtlCol="0" anchor="ctr"/>
+          <a:lstStyle/>
+          <a:p>
+            <a:pPr algn="ctr" indent="0" marL="0">
+              <a:buNone/>
+            </a:pPr>
+            <a:r>
+              <a:rPr lang="en-US" sz="1050" b="1" dirty="0">
+                <a:solidFill>
+                  <a:srgbClr val="10233A"/>
+                </a:solidFill>
+                <a:latin typeface="游ゴシック" pitchFamily="34" charset="0"/>
+                <a:ea typeface="游ゴシック" pitchFamily="34" charset="-122"/>
+                <a:cs typeface="游ゴシック" pitchFamily="34" charset="-120"/>
+              </a:rPr>
+              <a:t>財産保有者のみ</a:t>
+            </a:r>
+            <a:endParaRPr lang="en-US" sz="1050" dirty="0"/>
+          </a:p>
+        </p:txBody>
+      </p:sp>
+      <p:sp>
+        <p:nvSpPr>
+          <p:cNvPr id="8" name="Text 6"/>
+          <p:cNvSpPr txBox="1"/>
+          <p:nvPr/>
+        </p:nvSpPr>
+        <p:spPr>
+          <a:xfrm>
+            <a:off x="4480560" y="2103120"/>
+            <a:ext cx="1920240" cy="841248"/>
+          </a:xfrm>
+          <a:prstGeom prst="rect">
+            <a:avLst/>
+          </a:prstGeom>
+          <a:noFill/>
+          <a:ln/>
+        </p:spPr>
+        <p:txBody>
+          <a:bodyPr wrap="square" lIns="0" tIns="0" rIns="0" bIns="0" rtlCol="0" anchor="ctr"/>
+          <a:lstStyle/>
+          <a:p>
+            <a:pPr algn="ctr" indent="0" marL="0">
+              <a:buNone/>
+            </a:pPr>
+            <a:r>
+              <a:rPr lang="en-US" sz="1200" b="1" dirty="0">
+                <a:solidFill>
+                  <a:srgbClr val="1E3A5F"/>
+                </a:solidFill>
+                <a:latin typeface="游ゴシック" pitchFamily="34" charset="0"/>
+                <a:ea typeface="游ゴシック" pitchFamily="34" charset="-122"/>
+                <a:cs typeface="游ゴシック" pitchFamily="34" charset="-120"/>
+              </a:rPr>
+              <a:t>①課題化前</a:t>
+            </a:r>
+            <a:endParaRPr lang="en-US" sz="1200" dirty="0"/>
+          </a:p>
+          <a:p>
+            <a:pPr algn="ctr" indent="0" marL="0">
+              <a:buNone/>
+            </a:pPr>
+            <a:r>
+              <a:rPr lang="en-US" sz="1200" b="1" dirty="0">
+                <a:solidFill>
+                  <a:srgbClr val="1E3A5F"/>
+                </a:solidFill>
+                <a:latin typeface="游ゴシック" pitchFamily="34" charset="0"/>
+                <a:ea typeface="游ゴシック" pitchFamily="34" charset="-122"/>
+                <a:cs typeface="游ゴシック" pitchFamily="34" charset="-120"/>
+              </a:rPr>
+              <a:t>（フロント）</a:t>
+            </a:r>
+            <a:endParaRPr lang="en-US" sz="1200" dirty="0"/>
+          </a:p>
+        </p:txBody>
       </p:sp>
       <p:sp>
         <p:nvSpPr>
@@ -10562,43 +11002,75 @@
         </p:nvSpPr>
         <p:spPr>
           <a:xfrm>
-            <a:off x="3680575" y="3977640"/>
-            <a:ext cx="2263025" cy="1002197"/>
-          </a:xfrm>
-          <a:prstGeom prst="line">
-            <a:avLst/>
-          </a:prstGeom>
-          <a:noFill/>
-          <a:ln w="19050">
-            <a:solidFill>
-              <a:srgbClr val="C9C2B6"/>
-            </a:solidFill>
-            <a:prstDash val="sysDot"/>
-          </a:ln>
-        </p:spPr>
-      </p:sp>
-      <p:sp>
-        <p:nvSpPr>
-          <p:cNvPr id="10" name="Shape 8"/>
-          <p:cNvSpPr/>
-          <p:nvPr/>
-        </p:nvSpPr>
-        <p:spPr>
-          <a:xfrm>
-            <a:off x="2743200" y="3977640"/>
-            <a:ext cx="3200400" cy="9144"/>
-          </a:xfrm>
-          <a:prstGeom prst="line">
-            <a:avLst/>
-          </a:prstGeom>
-          <a:noFill/>
-          <a:ln w="19050">
-            <a:solidFill>
-              <a:srgbClr val="C9C2B6"/>
-            </a:solidFill>
-            <a:prstDash val="sysDot"/>
-          </a:ln>
-        </p:spPr>
+            <a:off x="6583680" y="2103120"/>
+            <a:ext cx="4937760" cy="841248"/>
+          </a:xfrm>
+          <a:prstGeom prst="rect">
+            <a:avLst/>
+          </a:prstGeom>
+          <a:solidFill>
+            <a:srgbClr val="C9603F">
+              <a:alpha val="32000"/>
+            </a:srgbClr>
+          </a:solidFill>
+          <a:ln/>
+        </p:spPr>
+      </p:sp>
+      <p:sp>
+        <p:nvSpPr>
+          <p:cNvPr id="10" name="Text 8"/>
+          <p:cNvSpPr txBox="1"/>
+          <p:nvPr/>
+        </p:nvSpPr>
+        <p:spPr>
+          <a:xfrm>
+            <a:off x="6629400" y="2103120"/>
+            <a:ext cx="4846320" cy="841248"/>
+          </a:xfrm>
+          <a:prstGeom prst="rect">
+            <a:avLst/>
+          </a:prstGeom>
+          <a:noFill/>
+          <a:ln/>
+        </p:spPr>
+        <p:txBody>
+          <a:bodyPr wrap="square" lIns="0" tIns="0" rIns="0" bIns="0" rtlCol="0" anchor="ctr"/>
+          <a:lstStyle/>
+          <a:p>
+            <a:pPr algn="ctr" indent="0" marL="0">
+              <a:buNone/>
+            </a:pPr>
+            <a:r>
+              <a:rPr lang="en-US" sz="1100" b="1" dirty="0">
+                <a:solidFill>
+                  <a:srgbClr val="10233A"/>
+                </a:solidFill>
+                <a:latin typeface="游ゴシック" pitchFamily="34" charset="0"/>
+                <a:ea typeface="游ゴシック" pitchFamily="34" charset="-122"/>
+                <a:cs typeface="游ゴシック" pitchFamily="34" charset="-120"/>
+              </a:rPr>
+              <a:t>全世代・全資産層</a:t>
+            </a:r>
+            <a:endParaRPr lang="en-US" sz="1100" dirty="0"/>
+          </a:p>
+          <a:p>
+            <a:pPr algn="ctr" indent="0" marL="0">
+              <a:buNone/>
+            </a:pPr>
+            <a:r>
+              <a:rPr lang="en-US" sz="1100" b="1" dirty="0">
+                <a:solidFill>
+                  <a:srgbClr val="10233A"/>
+                </a:solidFill>
+                <a:latin typeface="游ゴシック" pitchFamily="34" charset="0"/>
+                <a:ea typeface="游ゴシック" pitchFamily="34" charset="-122"/>
+                <a:cs typeface="游ゴシック" pitchFamily="34" charset="-120"/>
+              </a:rPr>
+              <a:t>（ACP・人生会議）</a:t>
+            </a:r>
+            <a:endParaRPr lang="en-US" sz="1100" dirty="0"/>
+          </a:p>
+        </p:txBody>
       </p:sp>
       <p:sp>
         <p:nvSpPr>
@@ -10608,33 +11080,349 @@
         </p:nvSpPr>
         <p:spPr>
           <a:xfrm>
-            <a:off x="3680575" y="2975443"/>
-            <a:ext cx="2263025" cy="1002197"/>
-          </a:xfrm>
-          <a:prstGeom prst="line">
-            <a:avLst/>
-          </a:prstGeom>
-          <a:noFill/>
-          <a:ln w="19050">
-            <a:solidFill>
-              <a:srgbClr val="C9C2B6"/>
-            </a:solidFill>
-            <a:prstDash val="sysDot"/>
-          </a:ln>
-        </p:spPr>
-      </p:sp>
-      <p:sp>
-        <p:nvSpPr>
-          <p:cNvPr id="12" name="Shape 10"/>
+            <a:off x="1737360" y="3035808"/>
+            <a:ext cx="1371600" cy="841248"/>
+          </a:xfrm>
+          <a:prstGeom prst="rect">
+            <a:avLst/>
+          </a:prstGeom>
+          <a:solidFill>
+            <a:srgbClr val="1E3A5F">
+              <a:alpha val="55000"/>
+            </a:srgbClr>
+          </a:solidFill>
+          <a:ln/>
+        </p:spPr>
+      </p:sp>
+      <p:sp>
+        <p:nvSpPr>
+          <p:cNvPr id="12" name="Text 10"/>
+          <p:cNvSpPr txBox="1"/>
+          <p:nvPr/>
+        </p:nvSpPr>
+        <p:spPr>
+          <a:xfrm>
+            <a:off x="1783080" y="3035808"/>
+            <a:ext cx="1280160" cy="841248"/>
+          </a:xfrm>
+          <a:prstGeom prst="rect">
+            <a:avLst/>
+          </a:prstGeom>
+          <a:noFill/>
+          <a:ln/>
+        </p:spPr>
+        <p:txBody>
+          <a:bodyPr wrap="square" lIns="0" tIns="0" rIns="0" bIns="0" rtlCol="0" anchor="ctr"/>
+          <a:lstStyle/>
+          <a:p>
+            <a:pPr algn="ctr" indent="0" marL="0">
+              <a:buNone/>
+            </a:pPr>
+            <a:r>
+              <a:rPr lang="en-US" sz="1050" b="1" dirty="0">
+                <a:solidFill>
+                  <a:srgbClr val="10233A"/>
+                </a:solidFill>
+                <a:latin typeface="游ゴシック" pitchFamily="34" charset="0"/>
+                <a:ea typeface="游ゴシック" pitchFamily="34" charset="-122"/>
+                <a:cs typeface="游ゴシック" pitchFamily="34" charset="-120"/>
+              </a:rPr>
+              <a:t>相続の悩みを自覚</a:t>
+            </a:r>
+            <a:endParaRPr lang="en-US" sz="1050" dirty="0"/>
+          </a:p>
+        </p:txBody>
+      </p:sp>
+      <p:sp>
+        <p:nvSpPr>
+          <p:cNvPr id="13" name="Text 11"/>
+          <p:cNvSpPr txBox="1"/>
+          <p:nvPr/>
+        </p:nvSpPr>
+        <p:spPr>
+          <a:xfrm>
+            <a:off x="4480560" y="3035808"/>
+            <a:ext cx="1920240" cy="841248"/>
+          </a:xfrm>
+          <a:prstGeom prst="rect">
+            <a:avLst/>
+          </a:prstGeom>
+          <a:noFill/>
+          <a:ln/>
+        </p:spPr>
+        <p:txBody>
+          <a:bodyPr wrap="square" lIns="0" tIns="0" rIns="0" bIns="0" rtlCol="0" anchor="ctr"/>
+          <a:lstStyle/>
+          <a:p>
+            <a:pPr algn="ctr" indent="0" marL="0">
+              <a:buNone/>
+            </a:pPr>
+            <a:r>
+              <a:rPr lang="en-US" sz="1200" b="1" dirty="0">
+                <a:solidFill>
+                  <a:srgbClr val="1E3A5F"/>
+                </a:solidFill>
+                <a:latin typeface="游ゴシック" pitchFamily="34" charset="0"/>
+                <a:ea typeface="游ゴシック" pitchFamily="34" charset="-122"/>
+                <a:cs typeface="游ゴシック" pitchFamily="34" charset="-120"/>
+              </a:rPr>
+              <a:t>②認知</a:t>
+            </a:r>
+            <a:endParaRPr lang="en-US" sz="1200" dirty="0"/>
+          </a:p>
+        </p:txBody>
+      </p:sp>
+      <p:sp>
+        <p:nvSpPr>
+          <p:cNvPr id="14" name="Shape 12"/>
           <p:cNvSpPr/>
           <p:nvPr/>
         </p:nvSpPr>
         <p:spPr>
           <a:xfrm>
-            <a:off x="5052060" y="1668780"/>
-            <a:ext cx="1783080" cy="1783080"/>
-          </a:xfrm>
-          <a:prstGeom prst="ellipse">
+            <a:off x="7452360" y="3035808"/>
+            <a:ext cx="3200400" cy="841248"/>
+          </a:xfrm>
+          <a:prstGeom prst="rect">
+            <a:avLst/>
+          </a:prstGeom>
+          <a:solidFill>
+            <a:srgbClr val="C9603F">
+              <a:alpha val="55000"/>
+            </a:srgbClr>
+          </a:solidFill>
+          <a:ln/>
+        </p:spPr>
+      </p:sp>
+      <p:sp>
+        <p:nvSpPr>
+          <p:cNvPr id="15" name="Text 13"/>
+          <p:cNvSpPr txBox="1"/>
+          <p:nvPr/>
+        </p:nvSpPr>
+        <p:spPr>
+          <a:xfrm>
+            <a:off x="7498080" y="3035808"/>
+            <a:ext cx="3108960" cy="841248"/>
+          </a:xfrm>
+          <a:prstGeom prst="rect">
+            <a:avLst/>
+          </a:prstGeom>
+          <a:noFill/>
+          <a:ln/>
+        </p:spPr>
+        <p:txBody>
+          <a:bodyPr wrap="square" lIns="0" tIns="0" rIns="0" bIns="0" rtlCol="0" anchor="ctr"/>
+          <a:lstStyle/>
+          <a:p>
+            <a:pPr algn="ctr" indent="0" marL="0">
+              <a:buNone/>
+            </a:pPr>
+            <a:r>
+              <a:rPr lang="en-US" sz="1100" b="1" dirty="0">
+                <a:solidFill>
+                  <a:srgbClr val="10233A"/>
+                </a:solidFill>
+                <a:latin typeface="游ゴシック" pitchFamily="34" charset="0"/>
+                <a:ea typeface="游ゴシック" pitchFamily="34" charset="-122"/>
+                <a:cs typeface="游ゴシック" pitchFamily="34" charset="-120"/>
+              </a:rPr>
+              <a:t>人生会議の実践者</a:t>
+            </a:r>
+            <a:endParaRPr lang="en-US" sz="1100" dirty="0"/>
+          </a:p>
+        </p:txBody>
+      </p:sp>
+      <p:sp>
+        <p:nvSpPr>
+          <p:cNvPr id="16" name="Shape 14"/>
+          <p:cNvSpPr/>
+          <p:nvPr/>
+        </p:nvSpPr>
+        <p:spPr>
+          <a:xfrm>
+            <a:off x="1943100" y="3968496"/>
+            <a:ext cx="960120" cy="841248"/>
+          </a:xfrm>
+          <a:prstGeom prst="rect">
+            <a:avLst/>
+          </a:prstGeom>
+          <a:solidFill>
+            <a:srgbClr val="1E3A5F">
+              <a:alpha val="77000"/>
+            </a:srgbClr>
+          </a:solidFill>
+          <a:ln/>
+        </p:spPr>
+      </p:sp>
+      <p:sp>
+        <p:nvSpPr>
+          <p:cNvPr id="17" name="Text 15"/>
+          <p:cNvSpPr txBox="1"/>
+          <p:nvPr/>
+        </p:nvSpPr>
+        <p:spPr>
+          <a:xfrm>
+            <a:off x="1988820" y="3968496"/>
+            <a:ext cx="868680" cy="841248"/>
+          </a:xfrm>
+          <a:prstGeom prst="rect">
+            <a:avLst/>
+          </a:prstGeom>
+          <a:noFill/>
+          <a:ln/>
+        </p:spPr>
+        <p:txBody>
+          <a:bodyPr wrap="square" lIns="0" tIns="0" rIns="0" bIns="0" rtlCol="0" anchor="ctr"/>
+          <a:lstStyle/>
+          <a:p>
+            <a:pPr algn="ctr" indent="0" marL="0">
+              <a:buNone/>
+            </a:pPr>
+            <a:r>
+              <a:rPr lang="en-US" sz="1050" b="1" dirty="0">
+                <a:solidFill>
+                  <a:srgbClr val="FFFFFF"/>
+                </a:solidFill>
+                <a:latin typeface="游ゴシック" pitchFamily="34" charset="0"/>
+                <a:ea typeface="游ゴシック" pitchFamily="34" charset="-122"/>
+                <a:cs typeface="游ゴシック" pitchFamily="34" charset="-120"/>
+              </a:rPr>
+              <a:t>士業へ相談</a:t>
+            </a:r>
+            <a:endParaRPr lang="en-US" sz="1050" dirty="0"/>
+          </a:p>
+        </p:txBody>
+      </p:sp>
+      <p:sp>
+        <p:nvSpPr>
+          <p:cNvPr id="18" name="Text 16"/>
+          <p:cNvSpPr txBox="1"/>
+          <p:nvPr/>
+        </p:nvSpPr>
+        <p:spPr>
+          <a:xfrm>
+            <a:off x="4480560" y="3968496"/>
+            <a:ext cx="1920240" cy="841248"/>
+          </a:xfrm>
+          <a:prstGeom prst="rect">
+            <a:avLst/>
+          </a:prstGeom>
+          <a:noFill/>
+          <a:ln/>
+        </p:spPr>
+        <p:txBody>
+          <a:bodyPr wrap="square" lIns="0" tIns="0" rIns="0" bIns="0" rtlCol="0" anchor="ctr"/>
+          <a:lstStyle/>
+          <a:p>
+            <a:pPr algn="ctr" indent="0" marL="0">
+              <a:buNone/>
+            </a:pPr>
+            <a:r>
+              <a:rPr lang="en-US" sz="1200" b="1" dirty="0">
+                <a:solidFill>
+                  <a:srgbClr val="1E3A5F"/>
+                </a:solidFill>
+                <a:latin typeface="游ゴシック" pitchFamily="34" charset="0"/>
+                <a:ea typeface="游ゴシック" pitchFamily="34" charset="-122"/>
+                <a:cs typeface="游ゴシック" pitchFamily="34" charset="-120"/>
+              </a:rPr>
+              <a:t>③情報収集</a:t>
+            </a:r>
+            <a:endParaRPr lang="en-US" sz="1200" dirty="0"/>
+          </a:p>
+        </p:txBody>
+      </p:sp>
+      <p:sp>
+        <p:nvSpPr>
+          <p:cNvPr id="19" name="Shape 17"/>
+          <p:cNvSpPr/>
+          <p:nvPr/>
+        </p:nvSpPr>
+        <p:spPr>
+          <a:xfrm>
+            <a:off x="8138160" y="3968496"/>
+            <a:ext cx="1828800" cy="841248"/>
+          </a:xfrm>
+          <a:prstGeom prst="rect">
+            <a:avLst/>
+          </a:prstGeom>
+          <a:solidFill>
+            <a:srgbClr val="C9603F">
+              <a:alpha val="77000"/>
+            </a:srgbClr>
+          </a:solidFill>
+          <a:ln/>
+        </p:spPr>
+      </p:sp>
+      <p:sp>
+        <p:nvSpPr>
+          <p:cNvPr id="20" name="Text 18"/>
+          <p:cNvSpPr txBox="1"/>
+          <p:nvPr/>
+        </p:nvSpPr>
+        <p:spPr>
+          <a:xfrm>
+            <a:off x="8183880" y="3968496"/>
+            <a:ext cx="1737360" cy="841248"/>
+          </a:xfrm>
+          <a:prstGeom prst="rect">
+            <a:avLst/>
+          </a:prstGeom>
+          <a:noFill/>
+          <a:ln/>
+        </p:spPr>
+        <p:txBody>
+          <a:bodyPr wrap="square" lIns="0" tIns="0" rIns="0" bIns="0" rtlCol="0" anchor="ctr"/>
+          <a:lstStyle/>
+          <a:p>
+            <a:pPr algn="ctr" indent="0" marL="0">
+              <a:buNone/>
+            </a:pPr>
+            <a:r>
+              <a:rPr lang="en-US" sz="1100" b="1" dirty="0">
+                <a:solidFill>
+                  <a:srgbClr val="FFFFFF"/>
+                </a:solidFill>
+                <a:latin typeface="游ゴシック" pitchFamily="34" charset="0"/>
+                <a:ea typeface="游ゴシック" pitchFamily="34" charset="-122"/>
+                <a:cs typeface="游ゴシック" pitchFamily="34" charset="-120"/>
+              </a:rPr>
+              <a:t>個別相談</a:t>
+            </a:r>
+            <a:endParaRPr lang="en-US" sz="1100" dirty="0"/>
+          </a:p>
+          <a:p>
+            <a:pPr algn="ctr" indent="0" marL="0">
+              <a:buNone/>
+            </a:pPr>
+            <a:r>
+              <a:rPr lang="en-US" sz="1100" b="1" dirty="0">
+                <a:solidFill>
+                  <a:srgbClr val="FFFFFF"/>
+                </a:solidFill>
+                <a:latin typeface="游ゴシック" pitchFamily="34" charset="0"/>
+                <a:ea typeface="游ゴシック" pitchFamily="34" charset="-122"/>
+                <a:cs typeface="游ゴシック" pitchFamily="34" charset="-120"/>
+              </a:rPr>
+              <a:t>サポートアドバイザー</a:t>
+            </a:r>
+            <a:endParaRPr lang="en-US" sz="1100" dirty="0"/>
+          </a:p>
+        </p:txBody>
+      </p:sp>
+      <p:sp>
+        <p:nvSpPr>
+          <p:cNvPr id="21" name="Shape 19"/>
+          <p:cNvSpPr/>
+          <p:nvPr/>
+        </p:nvSpPr>
+        <p:spPr>
+          <a:xfrm>
+            <a:off x="2125980" y="4901184"/>
+            <a:ext cx="594360" cy="841248"/>
+          </a:xfrm>
+          <a:prstGeom prst="rect">
             <a:avLst/>
           </a:prstGeom>
           <a:solidFill>
@@ -10645,14 +11433,14 @@
       </p:sp>
       <p:sp>
         <p:nvSpPr>
-          <p:cNvPr id="13" name="Text 11"/>
-          <p:cNvSpPr txBox="1"/>
-          <p:nvPr/>
-        </p:nvSpPr>
-        <p:spPr>
-          <a:xfrm>
-            <a:off x="4732020" y="1668780"/>
-            <a:ext cx="2423160" cy="1783080"/>
+          <p:cNvPr id="22" name="Text 20"/>
+          <p:cNvSpPr txBox="1"/>
+          <p:nvPr/>
+        </p:nvSpPr>
+        <p:spPr>
+          <a:xfrm>
+            <a:off x="4480560" y="4901184"/>
+            <a:ext cx="1920240" cy="841248"/>
           </a:xfrm>
           <a:prstGeom prst="rect">
             <a:avLst/>
@@ -10668,615 +11456,49 @@
               <a:buNone/>
             </a:pPr>
             <a:r>
-              <a:rPr lang="en-US" sz="1050" b="1" dirty="0">
-                <a:solidFill>
-                  <a:srgbClr val="FFFFFF"/>
-                </a:solidFill>
-                <a:latin typeface="游ゴシック" pitchFamily="34" charset="0"/>
-                <a:ea typeface="游ゴシック" pitchFamily="34" charset="-122"/>
-                <a:cs typeface="游ゴシック" pitchFamily="34" charset="-120"/>
-              </a:rPr>
-              <a:t>金融</a:t>
-            </a:r>
-            <a:endParaRPr lang="en-US" sz="1050" dirty="0"/>
+              <a:rPr lang="en-US" sz="1200" b="1" dirty="0">
+                <a:solidFill>
+                  <a:srgbClr val="1E3A5F"/>
+                </a:solidFill>
+                <a:latin typeface="游ゴシック" pitchFamily="34" charset="0"/>
+                <a:ea typeface="游ゴシック" pitchFamily="34" charset="-122"/>
+                <a:cs typeface="游ゴシック" pitchFamily="34" charset="-120"/>
+              </a:rPr>
+              <a:t>④比較検討</a:t>
+            </a:r>
+            <a:endParaRPr lang="en-US" sz="1200" dirty="0"/>
           </a:p>
           <a:p>
             <a:pPr algn="ctr" indent="0" marL="0">
               <a:buNone/>
             </a:pPr>
             <a:r>
-              <a:rPr lang="en-US" sz="1050" b="1" dirty="0">
-                <a:solidFill>
-                  <a:srgbClr val="FFFFFF"/>
-                </a:solidFill>
-                <a:latin typeface="游ゴシック" pitchFamily="34" charset="0"/>
-                <a:ea typeface="游ゴシック" pitchFamily="34" charset="-122"/>
-                <a:cs typeface="游ゴシック" pitchFamily="34" charset="-120"/>
-              </a:rPr>
-              <a:t>50億円</a:t>
-            </a:r>
-            <a:endParaRPr lang="en-US" sz="1050" dirty="0"/>
-          </a:p>
-        </p:txBody>
-      </p:sp>
-      <p:sp>
-        <p:nvSpPr>
-          <p:cNvPr id="14" name="Shape 12"/>
+              <a:rPr lang="en-US" sz="1200" b="1" dirty="0">
+                <a:solidFill>
+                  <a:srgbClr val="1E3A5F"/>
+                </a:solidFill>
+                <a:latin typeface="游ゴシック" pitchFamily="34" charset="0"/>
+                <a:ea typeface="游ゴシック" pitchFamily="34" charset="-122"/>
+                <a:cs typeface="游ゴシック" pitchFamily="34" charset="-120"/>
+              </a:rPr>
+              <a:t>・成約</a:t>
+            </a:r>
+            <a:endParaRPr lang="en-US" sz="1200" dirty="0"/>
+          </a:p>
+        </p:txBody>
+      </p:sp>
+      <p:sp>
+        <p:nvSpPr>
+          <p:cNvPr id="23" name="Shape 21"/>
           <p:cNvSpPr/>
           <p:nvPr/>
         </p:nvSpPr>
         <p:spPr>
           <a:xfrm>
-            <a:off x="7406525" y="2175343"/>
-            <a:ext cx="1600200" cy="1600200"/>
-          </a:xfrm>
-          <a:prstGeom prst="ellipse">
-            <a:avLst/>
-          </a:prstGeom>
-          <a:solidFill>
-            <a:srgbClr val="1E3A5F"/>
-          </a:solidFill>
-          <a:ln/>
-        </p:spPr>
-      </p:sp>
-      <p:sp>
-        <p:nvSpPr>
-          <p:cNvPr id="15" name="Text 13"/>
-          <p:cNvSpPr txBox="1"/>
-          <p:nvPr/>
-        </p:nvSpPr>
-        <p:spPr>
-          <a:xfrm>
-            <a:off x="7086485" y="2175343"/>
-            <a:ext cx="2240280" cy="1600200"/>
-          </a:xfrm>
-          <a:prstGeom prst="rect">
-            <a:avLst/>
-          </a:prstGeom>
-          <a:noFill/>
-          <a:ln/>
-        </p:spPr>
-        <p:txBody>
-          <a:bodyPr wrap="square" lIns="0" tIns="0" rIns="0" bIns="0" rtlCol="0" anchor="ctr"/>
-          <a:lstStyle/>
-          <a:p>
-            <a:pPr algn="ctr" indent="0" marL="0">
-              <a:buNone/>
-            </a:pPr>
-            <a:r>
-              <a:rPr lang="en-US" sz="1050" b="1" dirty="0">
-                <a:solidFill>
-                  <a:srgbClr val="FFFFFF"/>
-                </a:solidFill>
-                <a:latin typeface="游ゴシック" pitchFamily="34" charset="0"/>
-                <a:ea typeface="游ゴシック" pitchFamily="34" charset="-122"/>
-                <a:cs typeface="游ゴシック" pitchFamily="34" charset="-120"/>
-              </a:rPr>
-              <a:t>不動産</a:t>
-            </a:r>
-            <a:endParaRPr lang="en-US" sz="1050" dirty="0"/>
-          </a:p>
-          <a:p>
-            <a:pPr algn="ctr" indent="0" marL="0">
-              <a:buNone/>
-            </a:pPr>
-            <a:r>
-              <a:rPr lang="en-US" sz="1050" b="1" dirty="0">
-                <a:solidFill>
-                  <a:srgbClr val="FFFFFF"/>
-                </a:solidFill>
-                <a:latin typeface="游ゴシック" pitchFamily="34" charset="0"/>
-                <a:ea typeface="游ゴシック" pitchFamily="34" charset="-122"/>
-                <a:cs typeface="游ゴシック" pitchFamily="34" charset="-120"/>
-              </a:rPr>
-              <a:t>30億円</a:t>
-            </a:r>
-            <a:endParaRPr lang="en-US" sz="1050" dirty="0"/>
-          </a:p>
-        </p:txBody>
-      </p:sp>
-      <p:sp>
-        <p:nvSpPr>
-          <p:cNvPr id="16" name="Shape 14"/>
-          <p:cNvSpPr/>
-          <p:nvPr/>
-        </p:nvSpPr>
-        <p:spPr>
-          <a:xfrm>
-            <a:off x="8549640" y="3383280"/>
-            <a:ext cx="1188720" cy="1188720"/>
-          </a:xfrm>
-          <a:prstGeom prst="ellipse">
-            <a:avLst/>
-          </a:prstGeom>
-          <a:solidFill>
-            <a:srgbClr val="1E3A5F"/>
-          </a:solidFill>
-          <a:ln/>
-        </p:spPr>
-      </p:sp>
-      <p:sp>
-        <p:nvSpPr>
-          <p:cNvPr id="17" name="Text 15"/>
-          <p:cNvSpPr txBox="1"/>
-          <p:nvPr/>
-        </p:nvSpPr>
-        <p:spPr>
-          <a:xfrm>
-            <a:off x="8229600" y="3383280"/>
-            <a:ext cx="1828800" cy="1188720"/>
-          </a:xfrm>
-          <a:prstGeom prst="rect">
-            <a:avLst/>
-          </a:prstGeom>
-          <a:noFill/>
-          <a:ln/>
-        </p:spPr>
-        <p:txBody>
-          <a:bodyPr wrap="square" lIns="0" tIns="0" rIns="0" bIns="0" rtlCol="0" anchor="ctr"/>
-          <a:lstStyle/>
-          <a:p>
-            <a:pPr algn="ctr" indent="0" marL="0">
-              <a:buNone/>
-            </a:pPr>
-            <a:r>
-              <a:rPr lang="en-US" sz="1050" b="1" dirty="0">
-                <a:solidFill>
-                  <a:srgbClr val="FFFFFF"/>
-                </a:solidFill>
-                <a:latin typeface="游ゴシック" pitchFamily="34" charset="0"/>
-                <a:ea typeface="游ゴシック" pitchFamily="34" charset="-122"/>
-                <a:cs typeface="游ゴシック" pitchFamily="34" charset="-120"/>
-              </a:rPr>
-              <a:t>M&amp;A</a:t>
-            </a:r>
-            <a:endParaRPr lang="en-US" sz="1050" dirty="0"/>
-          </a:p>
-          <a:p>
-            <a:pPr algn="ctr" indent="0" marL="0">
-              <a:buNone/>
-            </a:pPr>
-            <a:r>
-              <a:rPr lang="en-US" sz="1050" b="1" dirty="0">
-                <a:solidFill>
-                  <a:srgbClr val="FFFFFF"/>
-                </a:solidFill>
-                <a:latin typeface="游ゴシック" pitchFamily="34" charset="0"/>
-                <a:ea typeface="游ゴシック" pitchFamily="34" charset="-122"/>
-                <a:cs typeface="游ゴシック" pitchFamily="34" charset="-120"/>
-              </a:rPr>
-              <a:t>5億円</a:t>
-            </a:r>
-            <a:endParaRPr lang="en-US" sz="1050" dirty="0"/>
-          </a:p>
-        </p:txBody>
-      </p:sp>
-      <p:sp>
-        <p:nvSpPr>
-          <p:cNvPr id="18" name="Shape 16"/>
-          <p:cNvSpPr/>
-          <p:nvPr/>
-        </p:nvSpPr>
-        <p:spPr>
-          <a:xfrm>
-            <a:off x="7566545" y="4339757"/>
-            <a:ext cx="1280160" cy="1280160"/>
-          </a:xfrm>
-          <a:prstGeom prst="ellipse">
-            <a:avLst/>
-          </a:prstGeom>
-          <a:solidFill>
-            <a:srgbClr val="1E3A5F"/>
-          </a:solidFill>
-          <a:ln/>
-        </p:spPr>
-      </p:sp>
-      <p:sp>
-        <p:nvSpPr>
-          <p:cNvPr id="19" name="Text 17"/>
-          <p:cNvSpPr txBox="1"/>
-          <p:nvPr/>
-        </p:nvSpPr>
-        <p:spPr>
-          <a:xfrm>
-            <a:off x="7246505" y="4339757"/>
-            <a:ext cx="1920240" cy="1280160"/>
-          </a:xfrm>
-          <a:prstGeom prst="rect">
-            <a:avLst/>
-          </a:prstGeom>
-          <a:noFill/>
-          <a:ln/>
-        </p:spPr>
-        <p:txBody>
-          <a:bodyPr wrap="square" lIns="0" tIns="0" rIns="0" bIns="0" rtlCol="0" anchor="ctr"/>
-          <a:lstStyle/>
-          <a:p>
-            <a:pPr algn="ctr" indent="0" marL="0">
-              <a:buNone/>
-            </a:pPr>
-            <a:r>
-              <a:rPr lang="en-US" sz="1050" b="1" dirty="0">
-                <a:solidFill>
-                  <a:srgbClr val="FFFFFF"/>
-                </a:solidFill>
-                <a:latin typeface="游ゴシック" pitchFamily="34" charset="0"/>
-                <a:ea typeface="游ゴシック" pitchFamily="34" charset="-122"/>
-                <a:cs typeface="游ゴシック" pitchFamily="34" charset="-120"/>
-              </a:rPr>
-              <a:t>その他</a:t>
-            </a:r>
-            <a:endParaRPr lang="en-US" sz="1050" dirty="0"/>
-          </a:p>
-          <a:p>
-            <a:pPr algn="ctr" indent="0" marL="0">
-              <a:buNone/>
-            </a:pPr>
-            <a:r>
-              <a:rPr lang="en-US" sz="1050" b="1" dirty="0">
-                <a:solidFill>
-                  <a:srgbClr val="FFFFFF"/>
-                </a:solidFill>
-                <a:latin typeface="游ゴシック" pitchFamily="34" charset="0"/>
-                <a:ea typeface="游ゴシック" pitchFamily="34" charset="-122"/>
-                <a:cs typeface="游ゴシック" pitchFamily="34" charset="-120"/>
-              </a:rPr>
-              <a:t>7億円</a:t>
-            </a:r>
-            <a:endParaRPr lang="en-US" sz="1050" dirty="0"/>
-          </a:p>
-        </p:txBody>
-      </p:sp>
-      <p:sp>
-        <p:nvSpPr>
-          <p:cNvPr id="20" name="Shape 18"/>
-          <p:cNvSpPr/>
-          <p:nvPr/>
-        </p:nvSpPr>
-        <p:spPr>
-          <a:xfrm>
-            <a:off x="5372100" y="4823460"/>
-            <a:ext cx="1143000" cy="1143000"/>
-          </a:xfrm>
-          <a:prstGeom prst="ellipse">
-            <a:avLst/>
-          </a:prstGeom>
-          <a:solidFill>
-            <a:srgbClr val="1E3A5F"/>
-          </a:solidFill>
-          <a:ln/>
-        </p:spPr>
-      </p:sp>
-      <p:sp>
-        <p:nvSpPr>
-          <p:cNvPr id="21" name="Text 19"/>
-          <p:cNvSpPr txBox="1"/>
-          <p:nvPr/>
-        </p:nvSpPr>
-        <p:spPr>
-          <a:xfrm>
-            <a:off x="5052060" y="4823460"/>
-            <a:ext cx="1783080" cy="1143000"/>
-          </a:xfrm>
-          <a:prstGeom prst="rect">
-            <a:avLst/>
-          </a:prstGeom>
-          <a:noFill/>
-          <a:ln/>
-        </p:spPr>
-        <p:txBody>
-          <a:bodyPr wrap="square" lIns="0" tIns="0" rIns="0" bIns="0" rtlCol="0" anchor="ctr"/>
-          <a:lstStyle/>
-          <a:p>
-            <a:pPr algn="ctr" indent="0" marL="0">
-              <a:buNone/>
-            </a:pPr>
-            <a:r>
-              <a:rPr lang="en-US" sz="1050" b="1" dirty="0">
-                <a:solidFill>
-                  <a:srgbClr val="FFFFFF"/>
-                </a:solidFill>
-                <a:latin typeface="游ゴシック" pitchFamily="34" charset="0"/>
-                <a:ea typeface="游ゴシック" pitchFamily="34" charset="-122"/>
-                <a:cs typeface="游ゴシック" pitchFamily="34" charset="-120"/>
-              </a:rPr>
-              <a:t>有料老人</a:t>
-            </a:r>
-            <a:endParaRPr lang="en-US" sz="1050" dirty="0"/>
-          </a:p>
-          <a:p>
-            <a:pPr algn="ctr" indent="0" marL="0">
-              <a:buNone/>
-            </a:pPr>
-            <a:r>
-              <a:rPr lang="en-US" sz="1050" b="1" dirty="0">
-                <a:solidFill>
-                  <a:srgbClr val="FFFFFF"/>
-                </a:solidFill>
-                <a:latin typeface="游ゴシック" pitchFamily="34" charset="0"/>
-                <a:ea typeface="游ゴシック" pitchFamily="34" charset="-122"/>
-                <a:cs typeface="游ゴシック" pitchFamily="34" charset="-120"/>
-              </a:rPr>
-              <a:t>ホーム</a:t>
-            </a:r>
-            <a:endParaRPr lang="en-US" sz="1050" dirty="0"/>
-          </a:p>
-          <a:p>
-            <a:pPr algn="ctr" indent="0" marL="0">
-              <a:buNone/>
-            </a:pPr>
-            <a:r>
-              <a:rPr lang="en-US" sz="1050" b="1" dirty="0">
-                <a:solidFill>
-                  <a:srgbClr val="FFFFFF"/>
-                </a:solidFill>
-                <a:latin typeface="游ゴシック" pitchFamily="34" charset="0"/>
-                <a:ea typeface="游ゴシック" pitchFamily="34" charset="-122"/>
-                <a:cs typeface="游ゴシック" pitchFamily="34" charset="-120"/>
-              </a:rPr>
-              <a:t>3億円</a:t>
-            </a:r>
-            <a:endParaRPr lang="en-US" sz="1050" dirty="0"/>
-          </a:p>
-        </p:txBody>
-      </p:sp>
-      <p:sp>
-        <p:nvSpPr>
-          <p:cNvPr id="22" name="Shape 20"/>
-          <p:cNvSpPr/>
-          <p:nvPr/>
-        </p:nvSpPr>
-        <p:spPr>
-          <a:xfrm>
-            <a:off x="3200515" y="4499777"/>
-            <a:ext cx="960120" cy="960120"/>
-          </a:xfrm>
-          <a:prstGeom prst="ellipse">
-            <a:avLst/>
-          </a:prstGeom>
-          <a:solidFill>
-            <a:srgbClr val="1E3A5F"/>
-          </a:solidFill>
-          <a:ln/>
-        </p:spPr>
-      </p:sp>
-      <p:sp>
-        <p:nvSpPr>
-          <p:cNvPr id="23" name="Text 21"/>
-          <p:cNvSpPr txBox="1"/>
-          <p:nvPr/>
-        </p:nvSpPr>
-        <p:spPr>
-          <a:xfrm>
-            <a:off x="2880475" y="4499777"/>
-            <a:ext cx="1600200" cy="960120"/>
-          </a:xfrm>
-          <a:prstGeom prst="rect">
-            <a:avLst/>
-          </a:prstGeom>
-          <a:noFill/>
-          <a:ln/>
-        </p:spPr>
-        <p:txBody>
-          <a:bodyPr wrap="square" lIns="0" tIns="0" rIns="0" bIns="0" rtlCol="0" anchor="ctr"/>
-          <a:lstStyle/>
-          <a:p>
-            <a:pPr algn="ctr" indent="0" marL="0">
-              <a:buNone/>
-            </a:pPr>
-            <a:r>
-              <a:rPr lang="en-US" sz="1050" b="1" dirty="0">
-                <a:solidFill>
-                  <a:srgbClr val="FFFFFF"/>
-                </a:solidFill>
-                <a:latin typeface="游ゴシック" pitchFamily="34" charset="0"/>
-                <a:ea typeface="游ゴシック" pitchFamily="34" charset="-122"/>
-                <a:cs typeface="游ゴシック" pitchFamily="34" charset="-120"/>
-              </a:rPr>
-              <a:t>弁護士</a:t>
-            </a:r>
-            <a:endParaRPr lang="en-US" sz="1050" dirty="0"/>
-          </a:p>
-          <a:p>
-            <a:pPr algn="ctr" indent="0" marL="0">
-              <a:buNone/>
-            </a:pPr>
-            <a:r>
-              <a:rPr lang="en-US" sz="1050" b="1" dirty="0">
-                <a:solidFill>
-                  <a:srgbClr val="FFFFFF"/>
-                </a:solidFill>
-                <a:latin typeface="游ゴシック" pitchFamily="34" charset="0"/>
-                <a:ea typeface="游ゴシック" pitchFamily="34" charset="-122"/>
-                <a:cs typeface="游ゴシック" pitchFamily="34" charset="-120"/>
-              </a:rPr>
-              <a:t>1億円</a:t>
-            </a:r>
-            <a:endParaRPr lang="en-US" sz="1050" dirty="0"/>
-          </a:p>
-        </p:txBody>
-      </p:sp>
-      <p:sp>
-        <p:nvSpPr>
-          <p:cNvPr id="24" name="Shape 22"/>
-          <p:cNvSpPr/>
-          <p:nvPr/>
-        </p:nvSpPr>
-        <p:spPr>
-          <a:xfrm>
-            <a:off x="2217420" y="3451860"/>
-            <a:ext cx="1051560" cy="1051560"/>
-          </a:xfrm>
-          <a:prstGeom prst="ellipse">
-            <a:avLst/>
-          </a:prstGeom>
-          <a:solidFill>
-            <a:srgbClr val="1E3A5F"/>
-          </a:solidFill>
-          <a:ln/>
-        </p:spPr>
-      </p:sp>
-      <p:sp>
-        <p:nvSpPr>
-          <p:cNvPr id="25" name="Text 23"/>
-          <p:cNvSpPr txBox="1"/>
-          <p:nvPr/>
-        </p:nvSpPr>
-        <p:spPr>
-          <a:xfrm>
-            <a:off x="1897380" y="3451860"/>
-            <a:ext cx="1691640" cy="1051560"/>
-          </a:xfrm>
-          <a:prstGeom prst="rect">
-            <a:avLst/>
-          </a:prstGeom>
-          <a:noFill/>
-          <a:ln/>
-        </p:spPr>
-        <p:txBody>
-          <a:bodyPr wrap="square" lIns="0" tIns="0" rIns="0" bIns="0" rtlCol="0" anchor="ctr"/>
-          <a:lstStyle/>
-          <a:p>
-            <a:pPr algn="ctr" indent="0" marL="0">
-              <a:buNone/>
-            </a:pPr>
-            <a:r>
-              <a:rPr lang="en-US" sz="1050" b="1" dirty="0">
-                <a:solidFill>
-                  <a:srgbClr val="FFFFFF"/>
-                </a:solidFill>
-                <a:latin typeface="游ゴシック" pitchFamily="34" charset="0"/>
-                <a:ea typeface="游ゴシック" pitchFamily="34" charset="-122"/>
-                <a:cs typeface="游ゴシック" pitchFamily="34" charset="-120"/>
-              </a:rPr>
-              <a:t>司法書士・</a:t>
-            </a:r>
-            <a:endParaRPr lang="en-US" sz="1050" dirty="0"/>
-          </a:p>
-          <a:p>
-            <a:pPr algn="ctr" indent="0" marL="0">
-              <a:buNone/>
-            </a:pPr>
-            <a:r>
-              <a:rPr lang="en-US" sz="1050" b="1" dirty="0">
-                <a:solidFill>
-                  <a:srgbClr val="FFFFFF"/>
-                </a:solidFill>
-                <a:latin typeface="游ゴシック" pitchFamily="34" charset="0"/>
-                <a:ea typeface="游ゴシック" pitchFamily="34" charset="-122"/>
-                <a:cs typeface="游ゴシック" pitchFamily="34" charset="-120"/>
-              </a:rPr>
-              <a:t>行政書士</a:t>
-            </a:r>
-            <a:endParaRPr lang="en-US" sz="1050" dirty="0"/>
-          </a:p>
-          <a:p>
-            <a:pPr algn="ctr" indent="0" marL="0">
-              <a:buNone/>
-            </a:pPr>
-            <a:r>
-              <a:rPr lang="en-US" sz="1050" b="1" dirty="0">
-                <a:solidFill>
-                  <a:srgbClr val="FFFFFF"/>
-                </a:solidFill>
-                <a:latin typeface="游ゴシック" pitchFamily="34" charset="0"/>
-                <a:ea typeface="游ゴシック" pitchFamily="34" charset="-122"/>
-                <a:cs typeface="游ゴシック" pitchFamily="34" charset="-120"/>
-              </a:rPr>
-              <a:t>2億円</a:t>
-            </a:r>
-            <a:endParaRPr lang="en-US" sz="1050" dirty="0"/>
-          </a:p>
-        </p:txBody>
-      </p:sp>
-      <p:sp>
-        <p:nvSpPr>
-          <p:cNvPr id="26" name="Shape 24"/>
-          <p:cNvSpPr/>
-          <p:nvPr/>
-        </p:nvSpPr>
-        <p:spPr>
-          <a:xfrm>
-            <a:off x="3154795" y="2449663"/>
-            <a:ext cx="1051560" cy="1051560"/>
-          </a:xfrm>
-          <a:prstGeom prst="ellipse">
-            <a:avLst/>
-          </a:prstGeom>
-          <a:solidFill>
-            <a:srgbClr val="1E3A5F"/>
-          </a:solidFill>
-          <a:ln/>
-        </p:spPr>
-      </p:sp>
-      <p:sp>
-        <p:nvSpPr>
-          <p:cNvPr id="27" name="Text 25"/>
-          <p:cNvSpPr txBox="1"/>
-          <p:nvPr/>
-        </p:nvSpPr>
-        <p:spPr>
-          <a:xfrm>
-            <a:off x="2834755" y="2449663"/>
-            <a:ext cx="1691640" cy="1051560"/>
-          </a:xfrm>
-          <a:prstGeom prst="rect">
-            <a:avLst/>
-          </a:prstGeom>
-          <a:noFill/>
-          <a:ln/>
-        </p:spPr>
-        <p:txBody>
-          <a:bodyPr wrap="square" lIns="0" tIns="0" rIns="0" bIns="0" rtlCol="0" anchor="ctr"/>
-          <a:lstStyle/>
-          <a:p>
-            <a:pPr algn="ctr" indent="0" marL="0">
-              <a:buNone/>
-            </a:pPr>
-            <a:r>
-              <a:rPr lang="en-US" sz="1050" b="1" dirty="0">
-                <a:solidFill>
-                  <a:srgbClr val="FFFFFF"/>
-                </a:solidFill>
-                <a:latin typeface="游ゴシック" pitchFamily="34" charset="0"/>
-                <a:ea typeface="游ゴシック" pitchFamily="34" charset="-122"/>
-                <a:cs typeface="游ゴシック" pitchFamily="34" charset="-120"/>
-              </a:rPr>
-              <a:t>税理士</a:t>
-            </a:r>
-            <a:endParaRPr lang="en-US" sz="1050" dirty="0"/>
-          </a:p>
-          <a:p>
-            <a:pPr algn="ctr" indent="0" marL="0">
-              <a:buNone/>
-            </a:pPr>
-            <a:r>
-              <a:rPr lang="en-US" sz="1050" b="1" dirty="0">
-                <a:solidFill>
-                  <a:srgbClr val="FFFFFF"/>
-                </a:solidFill>
-                <a:latin typeface="游ゴシック" pitchFamily="34" charset="0"/>
-                <a:ea typeface="游ゴシック" pitchFamily="34" charset="-122"/>
-                <a:cs typeface="游ゴシック" pitchFamily="34" charset="-120"/>
-              </a:rPr>
-              <a:t>2億円</a:t>
-            </a:r>
-            <a:endParaRPr lang="en-US" sz="1050" dirty="0"/>
-          </a:p>
-        </p:txBody>
-      </p:sp>
-      <p:sp>
-        <p:nvSpPr>
-          <p:cNvPr id="28" name="Shape 26"/>
-          <p:cNvSpPr/>
-          <p:nvPr/>
-        </p:nvSpPr>
-        <p:spPr>
-          <a:xfrm>
-            <a:off x="5097780" y="3131820"/>
-            <a:ext cx="1691640" cy="1691640"/>
-          </a:xfrm>
-          <a:prstGeom prst="ellipse">
+            <a:off x="8618220" y="4901184"/>
+            <a:ext cx="868680" cy="841248"/>
+          </a:xfrm>
+          <a:prstGeom prst="rect">
             <a:avLst/>
           </a:prstGeom>
           <a:solidFill>
@@ -11287,209 +11509,46 @@
       </p:sp>
       <p:sp>
         <p:nvSpPr>
-          <p:cNvPr id="29" name="Text 27"/>
-          <p:cNvSpPr txBox="1"/>
-          <p:nvPr/>
-        </p:nvSpPr>
-        <p:spPr>
-          <a:xfrm>
-            <a:off x="4777740" y="3131820"/>
-            <a:ext cx="2331720" cy="1691640"/>
-          </a:xfrm>
-          <a:prstGeom prst="rect">
-            <a:avLst/>
-          </a:prstGeom>
-          <a:noFill/>
-          <a:ln/>
-        </p:spPr>
-        <p:txBody>
-          <a:bodyPr wrap="square" lIns="0" tIns="0" rIns="0" bIns="0" rtlCol="0" anchor="ctr"/>
-          <a:lstStyle/>
-          <a:p>
-            <a:pPr algn="ctr" indent="0" marL="0">
-              <a:buNone/>
-            </a:pPr>
-            <a:r>
-              <a:rPr lang="en-US" sz="1300" b="1" dirty="0">
-                <a:solidFill>
-                  <a:srgbClr val="FFFFFF"/>
-                </a:solidFill>
-                <a:latin typeface="游ゴシック" pitchFamily="34" charset="0"/>
-                <a:ea typeface="游ゴシック" pitchFamily="34" charset="-122"/>
-                <a:cs typeface="游ゴシック" pitchFamily="34" charset="-120"/>
-              </a:rPr>
-              <a:t>繋ぐグループ</a:t>
+          <p:cNvPr id="24" name="Text 22"/>
+          <p:cNvSpPr txBox="1"/>
+          <p:nvPr/>
+        </p:nvSpPr>
+        <p:spPr>
+          <a:xfrm>
+            <a:off x="640080" y="6172200"/>
+            <a:ext cx="10881360" cy="365760"/>
+          </a:xfrm>
+          <a:prstGeom prst="rect">
+            <a:avLst/>
+          </a:prstGeom>
+          <a:noFill/>
+          <a:ln/>
+        </p:spPr>
+        <p:txBody>
+          <a:bodyPr wrap="square" lIns="0" tIns="0" rIns="0" bIns="0" rtlCol="0" anchor="ctr"/>
+          <a:lstStyle/>
+          <a:p>
+            <a:pPr indent="0" marL="0">
+              <a:buNone/>
+            </a:pPr>
+            <a:r>
+              <a:rPr lang="en-US" sz="1300" i="1" dirty="0">
+                <a:solidFill>
+                  <a:srgbClr val="6B6B6B"/>
+                </a:solidFill>
+                <a:latin typeface="游ゴシック" pitchFamily="34" charset="0"/>
+                <a:ea typeface="游ゴシック" pitchFamily="34" charset="-122"/>
+                <a:cs typeface="游ゴシック" pitchFamily="34" charset="-120"/>
+              </a:rPr>
+              <a:t>入口を「財産」から「人生」に変えたことで、フロント（課題化前）の母数そのものを構造的に拡大している。</a:t>
             </a:r>
             <a:endParaRPr lang="en-US" sz="1300" dirty="0"/>
           </a:p>
-          <a:p>
-            <a:pPr algn="ctr" indent="0" marL="0">
-              <a:buNone/>
-            </a:pPr>
-            <a:r>
-              <a:rPr lang="en-US" sz="1300" b="1" dirty="0">
-                <a:solidFill>
-                  <a:srgbClr val="FFFFFF"/>
-                </a:solidFill>
-                <a:latin typeface="游ゴシック" pitchFamily="34" charset="0"/>
-                <a:ea typeface="游ゴシック" pitchFamily="34" charset="-122"/>
-                <a:cs typeface="游ゴシック" pitchFamily="34" charset="-120"/>
-              </a:rPr>
-              <a:t>（hub）</a:t>
-            </a:r>
-            <a:endParaRPr lang="en-US" sz="1300" dirty="0"/>
-          </a:p>
-        </p:txBody>
-      </p:sp>
-      <p:sp>
-        <p:nvSpPr>
-          <p:cNvPr id="30" name="Shape 28"/>
-          <p:cNvSpPr/>
-          <p:nvPr/>
-        </p:nvSpPr>
-        <p:spPr>
-          <a:xfrm>
-            <a:off x="9464040" y="1783080"/>
-            <a:ext cx="2103120" cy="1051560"/>
-          </a:xfrm>
-          <a:prstGeom prst="roundRect">
-            <a:avLst>
-              <a:gd name="adj" fmla="val 8696"/>
-            </a:avLst>
-          </a:prstGeom>
-          <a:solidFill>
-            <a:srgbClr val="10233A"/>
-          </a:solidFill>
-          <a:ln/>
-          <a:effectLst>
-            <a:outerShdw sx="100000" sy="100000" kx="0" ky="0" algn="bl" rotWithShape="0" blurRad="101600" dist="38100" dir="5400000">
-              <a:srgbClr val="10233A">
-                <a:alpha val="18000"/>
-              </a:srgbClr>
-            </a:outerShdw>
-          </a:effectLst>
-        </p:spPr>
-      </p:sp>
-      <p:sp>
-        <p:nvSpPr>
-          <p:cNvPr id="31" name="Text 29"/>
-          <p:cNvSpPr txBox="1"/>
-          <p:nvPr/>
-        </p:nvSpPr>
-        <p:spPr>
-          <a:xfrm>
-            <a:off x="9646920" y="1901952"/>
-            <a:ext cx="1737360" cy="274320"/>
-          </a:xfrm>
-          <a:prstGeom prst="rect">
-            <a:avLst/>
-          </a:prstGeom>
-          <a:noFill/>
-          <a:ln/>
-        </p:spPr>
-        <p:txBody>
-          <a:bodyPr wrap="square" lIns="0" tIns="0" rIns="0" bIns="0" rtlCol="0" anchor="ctr"/>
-          <a:lstStyle/>
-          <a:p>
-            <a:pPr indent="0" marL="0">
-              <a:buNone/>
-            </a:pPr>
-            <a:r>
-              <a:rPr lang="en-US" sz="1100" dirty="0">
-                <a:solidFill>
-                  <a:srgbClr val="F1DCCF"/>
-                </a:solidFill>
-                <a:latin typeface="游ゴシック" pitchFamily="34" charset="0"/>
-                <a:ea typeface="游ゴシック" pitchFamily="34" charset="-122"/>
-                <a:cs typeface="游ゴシック" pitchFamily="34" charset="-120"/>
-              </a:rPr>
-              <a:t>想定合計</a:t>
-            </a:r>
-            <a:endParaRPr lang="en-US" sz="1100" dirty="0"/>
-          </a:p>
-        </p:txBody>
-      </p:sp>
-      <p:sp>
-        <p:nvSpPr>
-          <p:cNvPr id="32" name="Text 30"/>
-          <p:cNvSpPr txBox="1"/>
-          <p:nvPr/>
-        </p:nvSpPr>
-        <p:spPr>
-          <a:xfrm>
-            <a:off x="9646920" y="2176272"/>
-            <a:ext cx="1737360" cy="548640"/>
-          </a:xfrm>
-          <a:prstGeom prst="rect">
-            <a:avLst/>
-          </a:prstGeom>
-          <a:noFill/>
-          <a:ln/>
-        </p:spPr>
-        <p:txBody>
-          <a:bodyPr wrap="square" lIns="0" tIns="0" rIns="0" bIns="0" rtlCol="0" anchor="ctr"/>
-          <a:lstStyle/>
-          <a:p>
-            <a:pPr indent="0" marL="0">
-              <a:buNone/>
-            </a:pPr>
-            <a:r>
-              <a:rPr lang="en-US" sz="2400" b="1" dirty="0">
-                <a:solidFill>
-                  <a:srgbClr val="FFFFFF"/>
-                </a:solidFill>
-                <a:latin typeface="游ゴシック" pitchFamily="34" charset="0"/>
-                <a:ea typeface="游ゴシック" pitchFamily="34" charset="-122"/>
-                <a:cs typeface="游ゴシック" pitchFamily="34" charset="-120"/>
-              </a:rPr>
-              <a:t>約100億円</a:t>
-            </a:r>
-            <a:endParaRPr lang="en-US" sz="2400" dirty="0"/>
-          </a:p>
-        </p:txBody>
-      </p:sp>
-      <p:sp>
-        <p:nvSpPr>
-          <p:cNvPr id="33" name="Text 31"/>
-          <p:cNvSpPr txBox="1"/>
-          <p:nvPr/>
-        </p:nvSpPr>
-        <p:spPr>
-          <a:xfrm>
-            <a:off x="640080" y="6263640"/>
-            <a:ext cx="10881360" cy="320040"/>
-          </a:xfrm>
-          <a:prstGeom prst="rect">
-            <a:avLst/>
-          </a:prstGeom>
-          <a:noFill/>
-          <a:ln/>
-        </p:spPr>
-        <p:txBody>
-          <a:bodyPr wrap="square" lIns="0" tIns="0" rIns="0" bIns="0" rtlCol="0" anchor="ctr"/>
-          <a:lstStyle/>
-          <a:p>
-            <a:pPr indent="0" marL="0">
-              <a:buNone/>
-            </a:pPr>
-            <a:r>
-              <a:rPr lang="en-US" sz="1050" i="1" dirty="0">
-                <a:solidFill>
-                  <a:srgbClr val="6B6B6B"/>
-                </a:solidFill>
-                <a:latin typeface="游ゴシック" pitchFamily="34" charset="0"/>
-                <a:ea typeface="游ゴシック" pitchFamily="34" charset="-122"/>
-                <a:cs typeface="游ゴシック" pitchFamily="34" charset="-120"/>
-              </a:rPr>
-              <a:t>金額は現時点の想定値。ファイナル資料で使う際は「概算」「エピソードとして」と位置づけ、根拠の精査を行う。</a:t>
-            </a:r>
-            <a:endParaRPr lang="en-US" sz="1050" dirty="0"/>
-          </a:p>
-        </p:txBody>
-      </p:sp>
-      <p:sp>
-        <p:nvSpPr>
-          <p:cNvPr id="34" name="Text 32"/>
+        </p:txBody>
+      </p:sp>
+      <p:sp>
+        <p:nvSpPr>
+          <p:cNvPr id="25" name="Text 23"/>
           <p:cNvSpPr txBox="1"/>
           <p:nvPr/>
         </p:nvSpPr>
@@ -11591,7 +11650,7 @@
                 <a:ea typeface="游ゴシック" pitchFamily="34" charset="-122"/>
                 <a:cs typeface="游ゴシック" pitchFamily="34" charset="-120"/>
               </a:rPr>
-              <a:t>BREAKDOWN</a:t>
+              <a:t>MARKET WE CREATED</a:t>
             </a:r>
             <a:endParaRPr lang="en-US" sz="1300" dirty="0"/>
           </a:p>
@@ -11630,46 +11689,932 @@
                 <a:ea typeface="游ゴシック" pitchFamily="34" charset="-122"/>
                 <a:cs typeface="游ゴシック" pitchFamily="34" charset="-120"/>
               </a:rPr>
-              <a:t>内訳ランキング ― 金融・不動産で全体の8割</a:t>
+              <a:t>hubとしての3年間 ― 創出した経済圏（想定内訳）</a:t>
             </a:r>
             <a:endParaRPr lang="en-US" sz="2700" dirty="0"/>
           </a:p>
         </p:txBody>
       </p:sp>
-      <p:graphicFrame>
-        <p:nvGraphicFramePr>
-          <p:cNvPr id="4" name="Chart 0" descr=""/>
-          <p:cNvGraphicFramePr/>
-          <p:nvPr/>
-        </p:nvGraphicFramePr>
-        <p:xfrm>
-          <a:off x="640080" y="1691640"/>
-          <a:ext cx="6675120" cy="4297680"/>
-        </p:xfrm>
-        <a:graphic xmlns:a="http://schemas.openxmlformats.org/drawingml/2006/main">
-          <a:graphicData uri="http://schemas.openxmlformats.org/drawingml/2006/chart">
-            <c:chart xmlns:c="http://schemas.openxmlformats.org/drawingml/2006/chart" r:id="rId1"/>
-          </a:graphicData>
-        </a:graphic>
-      </p:graphicFrame>
-      <p:sp>
-        <p:nvSpPr>
-          <p:cNvPr id="5" name="Shape 2"/>
+      <p:sp>
+        <p:nvSpPr>
+          <p:cNvPr id="4" name="Shape 2"/>
           <p:cNvSpPr/>
           <p:nvPr/>
         </p:nvSpPr>
         <p:spPr>
           <a:xfrm>
-            <a:off x="7635240" y="1783080"/>
-            <a:ext cx="3931920" cy="1828800"/>
+            <a:off x="5943600" y="2560320"/>
+            <a:ext cx="9144" cy="1417320"/>
+          </a:xfrm>
+          <a:prstGeom prst="line">
+            <a:avLst/>
+          </a:prstGeom>
+          <a:noFill/>
+          <a:ln w="19050">
+            <a:solidFill>
+              <a:srgbClr val="C9C2B6"/>
+            </a:solidFill>
+            <a:prstDash val="sysDot"/>
+          </a:ln>
+        </p:spPr>
+      </p:sp>
+      <p:sp>
+        <p:nvSpPr>
+          <p:cNvPr id="5" name="Shape 3"/>
+          <p:cNvSpPr/>
+          <p:nvPr/>
+        </p:nvSpPr>
+        <p:spPr>
+          <a:xfrm>
+            <a:off x="5943600" y="2975443"/>
+            <a:ext cx="2263025" cy="1002197"/>
+          </a:xfrm>
+          <a:prstGeom prst="line">
+            <a:avLst/>
+          </a:prstGeom>
+          <a:noFill/>
+          <a:ln w="19050">
+            <a:solidFill>
+              <a:srgbClr val="C9C2B6"/>
+            </a:solidFill>
+            <a:prstDash val="sysDot"/>
+          </a:ln>
+        </p:spPr>
+      </p:sp>
+      <p:sp>
+        <p:nvSpPr>
+          <p:cNvPr id="6" name="Shape 4"/>
+          <p:cNvSpPr/>
+          <p:nvPr/>
+        </p:nvSpPr>
+        <p:spPr>
+          <a:xfrm>
+            <a:off x="5943600" y="3977640"/>
+            <a:ext cx="3200400" cy="9144"/>
+          </a:xfrm>
+          <a:prstGeom prst="line">
+            <a:avLst/>
+          </a:prstGeom>
+          <a:noFill/>
+          <a:ln w="19050">
+            <a:solidFill>
+              <a:srgbClr val="C9C2B6"/>
+            </a:solidFill>
+            <a:prstDash val="sysDot"/>
+          </a:ln>
+        </p:spPr>
+      </p:sp>
+      <p:sp>
+        <p:nvSpPr>
+          <p:cNvPr id="7" name="Shape 5"/>
+          <p:cNvSpPr/>
+          <p:nvPr/>
+        </p:nvSpPr>
+        <p:spPr>
+          <a:xfrm>
+            <a:off x="5943600" y="3977640"/>
+            <a:ext cx="2263025" cy="1002197"/>
+          </a:xfrm>
+          <a:prstGeom prst="line">
+            <a:avLst/>
+          </a:prstGeom>
+          <a:noFill/>
+          <a:ln w="19050">
+            <a:solidFill>
+              <a:srgbClr val="C9C2B6"/>
+            </a:solidFill>
+            <a:prstDash val="sysDot"/>
+          </a:ln>
+        </p:spPr>
+      </p:sp>
+      <p:sp>
+        <p:nvSpPr>
+          <p:cNvPr id="8" name="Shape 6"/>
+          <p:cNvSpPr/>
+          <p:nvPr/>
+        </p:nvSpPr>
+        <p:spPr>
+          <a:xfrm>
+            <a:off x="5943600" y="3977640"/>
+            <a:ext cx="9144" cy="1417320"/>
+          </a:xfrm>
+          <a:prstGeom prst="line">
+            <a:avLst/>
+          </a:prstGeom>
+          <a:noFill/>
+          <a:ln w="19050">
+            <a:solidFill>
+              <a:srgbClr val="C9C2B6"/>
+            </a:solidFill>
+            <a:prstDash val="sysDot"/>
+          </a:ln>
+        </p:spPr>
+      </p:sp>
+      <p:sp>
+        <p:nvSpPr>
+          <p:cNvPr id="9" name="Shape 7"/>
+          <p:cNvSpPr/>
+          <p:nvPr/>
+        </p:nvSpPr>
+        <p:spPr>
+          <a:xfrm>
+            <a:off x="3680575" y="3977640"/>
+            <a:ext cx="2263025" cy="1002197"/>
+          </a:xfrm>
+          <a:prstGeom prst="line">
+            <a:avLst/>
+          </a:prstGeom>
+          <a:noFill/>
+          <a:ln w="19050">
+            <a:solidFill>
+              <a:srgbClr val="C9C2B6"/>
+            </a:solidFill>
+            <a:prstDash val="sysDot"/>
+          </a:ln>
+        </p:spPr>
+      </p:sp>
+      <p:sp>
+        <p:nvSpPr>
+          <p:cNvPr id="10" name="Shape 8"/>
+          <p:cNvSpPr/>
+          <p:nvPr/>
+        </p:nvSpPr>
+        <p:spPr>
+          <a:xfrm>
+            <a:off x="2743200" y="3977640"/>
+            <a:ext cx="3200400" cy="9144"/>
+          </a:xfrm>
+          <a:prstGeom prst="line">
+            <a:avLst/>
+          </a:prstGeom>
+          <a:noFill/>
+          <a:ln w="19050">
+            <a:solidFill>
+              <a:srgbClr val="C9C2B6"/>
+            </a:solidFill>
+            <a:prstDash val="sysDot"/>
+          </a:ln>
+        </p:spPr>
+      </p:sp>
+      <p:sp>
+        <p:nvSpPr>
+          <p:cNvPr id="11" name="Shape 9"/>
+          <p:cNvSpPr/>
+          <p:nvPr/>
+        </p:nvSpPr>
+        <p:spPr>
+          <a:xfrm>
+            <a:off x="3680575" y="2975443"/>
+            <a:ext cx="2263025" cy="1002197"/>
+          </a:xfrm>
+          <a:prstGeom prst="line">
+            <a:avLst/>
+          </a:prstGeom>
+          <a:noFill/>
+          <a:ln w="19050">
+            <a:solidFill>
+              <a:srgbClr val="C9C2B6"/>
+            </a:solidFill>
+            <a:prstDash val="sysDot"/>
+          </a:ln>
+        </p:spPr>
+      </p:sp>
+      <p:sp>
+        <p:nvSpPr>
+          <p:cNvPr id="12" name="Shape 10"/>
+          <p:cNvSpPr/>
+          <p:nvPr/>
+        </p:nvSpPr>
+        <p:spPr>
+          <a:xfrm>
+            <a:off x="5052060" y="1668780"/>
+            <a:ext cx="1783080" cy="1783080"/>
+          </a:xfrm>
+          <a:prstGeom prst="ellipse">
+            <a:avLst/>
+          </a:prstGeom>
+          <a:solidFill>
+            <a:srgbClr val="1E3A5F"/>
+          </a:solidFill>
+          <a:ln/>
+        </p:spPr>
+      </p:sp>
+      <p:sp>
+        <p:nvSpPr>
+          <p:cNvPr id="13" name="Text 11"/>
+          <p:cNvSpPr txBox="1"/>
+          <p:nvPr/>
+        </p:nvSpPr>
+        <p:spPr>
+          <a:xfrm>
+            <a:off x="4732020" y="1668780"/>
+            <a:ext cx="2423160" cy="1783080"/>
+          </a:xfrm>
+          <a:prstGeom prst="rect">
+            <a:avLst/>
+          </a:prstGeom>
+          <a:noFill/>
+          <a:ln/>
+        </p:spPr>
+        <p:txBody>
+          <a:bodyPr wrap="square" lIns="0" tIns="0" rIns="0" bIns="0" rtlCol="0" anchor="ctr"/>
+          <a:lstStyle/>
+          <a:p>
+            <a:pPr algn="ctr" indent="0" marL="0">
+              <a:buNone/>
+            </a:pPr>
+            <a:r>
+              <a:rPr lang="en-US" sz="1050" b="1" dirty="0">
+                <a:solidFill>
+                  <a:srgbClr val="FFFFFF"/>
+                </a:solidFill>
+                <a:latin typeface="游ゴシック" pitchFamily="34" charset="0"/>
+                <a:ea typeface="游ゴシック" pitchFamily="34" charset="-122"/>
+                <a:cs typeface="游ゴシック" pitchFamily="34" charset="-120"/>
+              </a:rPr>
+              <a:t>金融</a:t>
+            </a:r>
+            <a:endParaRPr lang="en-US" sz="1050" dirty="0"/>
+          </a:p>
+          <a:p>
+            <a:pPr algn="ctr" indent="0" marL="0">
+              <a:buNone/>
+            </a:pPr>
+            <a:r>
+              <a:rPr lang="en-US" sz="1050" b="1" dirty="0">
+                <a:solidFill>
+                  <a:srgbClr val="FFFFFF"/>
+                </a:solidFill>
+                <a:latin typeface="游ゴシック" pitchFamily="34" charset="0"/>
+                <a:ea typeface="游ゴシック" pitchFamily="34" charset="-122"/>
+                <a:cs typeface="游ゴシック" pitchFamily="34" charset="-120"/>
+              </a:rPr>
+              <a:t>50億円</a:t>
+            </a:r>
+            <a:endParaRPr lang="en-US" sz="1050" dirty="0"/>
+          </a:p>
+        </p:txBody>
+      </p:sp>
+      <p:sp>
+        <p:nvSpPr>
+          <p:cNvPr id="14" name="Shape 12"/>
+          <p:cNvSpPr/>
+          <p:nvPr/>
+        </p:nvSpPr>
+        <p:spPr>
+          <a:xfrm>
+            <a:off x="7406525" y="2175343"/>
+            <a:ext cx="1600200" cy="1600200"/>
+          </a:xfrm>
+          <a:prstGeom prst="ellipse">
+            <a:avLst/>
+          </a:prstGeom>
+          <a:solidFill>
+            <a:srgbClr val="1E3A5F"/>
+          </a:solidFill>
+          <a:ln/>
+        </p:spPr>
+      </p:sp>
+      <p:sp>
+        <p:nvSpPr>
+          <p:cNvPr id="15" name="Text 13"/>
+          <p:cNvSpPr txBox="1"/>
+          <p:nvPr/>
+        </p:nvSpPr>
+        <p:spPr>
+          <a:xfrm>
+            <a:off x="7086485" y="2175343"/>
+            <a:ext cx="2240280" cy="1600200"/>
+          </a:xfrm>
+          <a:prstGeom prst="rect">
+            <a:avLst/>
+          </a:prstGeom>
+          <a:noFill/>
+          <a:ln/>
+        </p:spPr>
+        <p:txBody>
+          <a:bodyPr wrap="square" lIns="0" tIns="0" rIns="0" bIns="0" rtlCol="0" anchor="ctr"/>
+          <a:lstStyle/>
+          <a:p>
+            <a:pPr algn="ctr" indent="0" marL="0">
+              <a:buNone/>
+            </a:pPr>
+            <a:r>
+              <a:rPr lang="en-US" sz="1050" b="1" dirty="0">
+                <a:solidFill>
+                  <a:srgbClr val="FFFFFF"/>
+                </a:solidFill>
+                <a:latin typeface="游ゴシック" pitchFamily="34" charset="0"/>
+                <a:ea typeface="游ゴシック" pitchFamily="34" charset="-122"/>
+                <a:cs typeface="游ゴシック" pitchFamily="34" charset="-120"/>
+              </a:rPr>
+              <a:t>不動産</a:t>
+            </a:r>
+            <a:endParaRPr lang="en-US" sz="1050" dirty="0"/>
+          </a:p>
+          <a:p>
+            <a:pPr algn="ctr" indent="0" marL="0">
+              <a:buNone/>
+            </a:pPr>
+            <a:r>
+              <a:rPr lang="en-US" sz="1050" b="1" dirty="0">
+                <a:solidFill>
+                  <a:srgbClr val="FFFFFF"/>
+                </a:solidFill>
+                <a:latin typeface="游ゴシック" pitchFamily="34" charset="0"/>
+                <a:ea typeface="游ゴシック" pitchFamily="34" charset="-122"/>
+                <a:cs typeface="游ゴシック" pitchFamily="34" charset="-120"/>
+              </a:rPr>
+              <a:t>30億円</a:t>
+            </a:r>
+            <a:endParaRPr lang="en-US" sz="1050" dirty="0"/>
+          </a:p>
+        </p:txBody>
+      </p:sp>
+      <p:sp>
+        <p:nvSpPr>
+          <p:cNvPr id="16" name="Shape 14"/>
+          <p:cNvSpPr/>
+          <p:nvPr/>
+        </p:nvSpPr>
+        <p:spPr>
+          <a:xfrm>
+            <a:off x="8549640" y="3383280"/>
+            <a:ext cx="1188720" cy="1188720"/>
+          </a:xfrm>
+          <a:prstGeom prst="ellipse">
+            <a:avLst/>
+          </a:prstGeom>
+          <a:solidFill>
+            <a:srgbClr val="1E3A5F"/>
+          </a:solidFill>
+          <a:ln/>
+        </p:spPr>
+      </p:sp>
+      <p:sp>
+        <p:nvSpPr>
+          <p:cNvPr id="17" name="Text 15"/>
+          <p:cNvSpPr txBox="1"/>
+          <p:nvPr/>
+        </p:nvSpPr>
+        <p:spPr>
+          <a:xfrm>
+            <a:off x="8229600" y="3383280"/>
+            <a:ext cx="1828800" cy="1188720"/>
+          </a:xfrm>
+          <a:prstGeom prst="rect">
+            <a:avLst/>
+          </a:prstGeom>
+          <a:noFill/>
+          <a:ln/>
+        </p:spPr>
+        <p:txBody>
+          <a:bodyPr wrap="square" lIns="0" tIns="0" rIns="0" bIns="0" rtlCol="0" anchor="ctr"/>
+          <a:lstStyle/>
+          <a:p>
+            <a:pPr algn="ctr" indent="0" marL="0">
+              <a:buNone/>
+            </a:pPr>
+            <a:r>
+              <a:rPr lang="en-US" sz="1050" b="1" dirty="0">
+                <a:solidFill>
+                  <a:srgbClr val="FFFFFF"/>
+                </a:solidFill>
+                <a:latin typeface="游ゴシック" pitchFamily="34" charset="0"/>
+                <a:ea typeface="游ゴシック" pitchFamily="34" charset="-122"/>
+                <a:cs typeface="游ゴシック" pitchFamily="34" charset="-120"/>
+              </a:rPr>
+              <a:t>M&amp;A</a:t>
+            </a:r>
+            <a:endParaRPr lang="en-US" sz="1050" dirty="0"/>
+          </a:p>
+          <a:p>
+            <a:pPr algn="ctr" indent="0" marL="0">
+              <a:buNone/>
+            </a:pPr>
+            <a:r>
+              <a:rPr lang="en-US" sz="1050" b="1" dirty="0">
+                <a:solidFill>
+                  <a:srgbClr val="FFFFFF"/>
+                </a:solidFill>
+                <a:latin typeface="游ゴシック" pitchFamily="34" charset="0"/>
+                <a:ea typeface="游ゴシック" pitchFamily="34" charset="-122"/>
+                <a:cs typeface="游ゴシック" pitchFamily="34" charset="-120"/>
+              </a:rPr>
+              <a:t>5億円</a:t>
+            </a:r>
+            <a:endParaRPr lang="en-US" sz="1050" dirty="0"/>
+          </a:p>
+        </p:txBody>
+      </p:sp>
+      <p:sp>
+        <p:nvSpPr>
+          <p:cNvPr id="18" name="Shape 16"/>
+          <p:cNvSpPr/>
+          <p:nvPr/>
+        </p:nvSpPr>
+        <p:spPr>
+          <a:xfrm>
+            <a:off x="7566545" y="4339757"/>
+            <a:ext cx="1280160" cy="1280160"/>
+          </a:xfrm>
+          <a:prstGeom prst="ellipse">
+            <a:avLst/>
+          </a:prstGeom>
+          <a:solidFill>
+            <a:srgbClr val="1E3A5F"/>
+          </a:solidFill>
+          <a:ln/>
+        </p:spPr>
+      </p:sp>
+      <p:sp>
+        <p:nvSpPr>
+          <p:cNvPr id="19" name="Text 17"/>
+          <p:cNvSpPr txBox="1"/>
+          <p:nvPr/>
+        </p:nvSpPr>
+        <p:spPr>
+          <a:xfrm>
+            <a:off x="7246505" y="4339757"/>
+            <a:ext cx="1920240" cy="1280160"/>
+          </a:xfrm>
+          <a:prstGeom prst="rect">
+            <a:avLst/>
+          </a:prstGeom>
+          <a:noFill/>
+          <a:ln/>
+        </p:spPr>
+        <p:txBody>
+          <a:bodyPr wrap="square" lIns="0" tIns="0" rIns="0" bIns="0" rtlCol="0" anchor="ctr"/>
+          <a:lstStyle/>
+          <a:p>
+            <a:pPr algn="ctr" indent="0" marL="0">
+              <a:buNone/>
+            </a:pPr>
+            <a:r>
+              <a:rPr lang="en-US" sz="1050" b="1" dirty="0">
+                <a:solidFill>
+                  <a:srgbClr val="FFFFFF"/>
+                </a:solidFill>
+                <a:latin typeface="游ゴシック" pitchFamily="34" charset="0"/>
+                <a:ea typeface="游ゴシック" pitchFamily="34" charset="-122"/>
+                <a:cs typeface="游ゴシック" pitchFamily="34" charset="-120"/>
+              </a:rPr>
+              <a:t>その他</a:t>
+            </a:r>
+            <a:endParaRPr lang="en-US" sz="1050" dirty="0"/>
+          </a:p>
+          <a:p>
+            <a:pPr algn="ctr" indent="0" marL="0">
+              <a:buNone/>
+            </a:pPr>
+            <a:r>
+              <a:rPr lang="en-US" sz="1050" b="1" dirty="0">
+                <a:solidFill>
+                  <a:srgbClr val="FFFFFF"/>
+                </a:solidFill>
+                <a:latin typeface="游ゴシック" pitchFamily="34" charset="0"/>
+                <a:ea typeface="游ゴシック" pitchFamily="34" charset="-122"/>
+                <a:cs typeface="游ゴシック" pitchFamily="34" charset="-120"/>
+              </a:rPr>
+              <a:t>7億円</a:t>
+            </a:r>
+            <a:endParaRPr lang="en-US" sz="1050" dirty="0"/>
+          </a:p>
+        </p:txBody>
+      </p:sp>
+      <p:sp>
+        <p:nvSpPr>
+          <p:cNvPr id="20" name="Shape 18"/>
+          <p:cNvSpPr/>
+          <p:nvPr/>
+        </p:nvSpPr>
+        <p:spPr>
+          <a:xfrm>
+            <a:off x="5372100" y="4823460"/>
+            <a:ext cx="1143000" cy="1143000"/>
+          </a:xfrm>
+          <a:prstGeom prst="ellipse">
+            <a:avLst/>
+          </a:prstGeom>
+          <a:solidFill>
+            <a:srgbClr val="1E3A5F"/>
+          </a:solidFill>
+          <a:ln/>
+        </p:spPr>
+      </p:sp>
+      <p:sp>
+        <p:nvSpPr>
+          <p:cNvPr id="21" name="Text 19"/>
+          <p:cNvSpPr txBox="1"/>
+          <p:nvPr/>
+        </p:nvSpPr>
+        <p:spPr>
+          <a:xfrm>
+            <a:off x="5052060" y="4823460"/>
+            <a:ext cx="1783080" cy="1143000"/>
+          </a:xfrm>
+          <a:prstGeom prst="rect">
+            <a:avLst/>
+          </a:prstGeom>
+          <a:noFill/>
+          <a:ln/>
+        </p:spPr>
+        <p:txBody>
+          <a:bodyPr wrap="square" lIns="0" tIns="0" rIns="0" bIns="0" rtlCol="0" anchor="ctr"/>
+          <a:lstStyle/>
+          <a:p>
+            <a:pPr algn="ctr" indent="0" marL="0">
+              <a:buNone/>
+            </a:pPr>
+            <a:r>
+              <a:rPr lang="en-US" sz="1050" b="1" dirty="0">
+                <a:solidFill>
+                  <a:srgbClr val="FFFFFF"/>
+                </a:solidFill>
+                <a:latin typeface="游ゴシック" pitchFamily="34" charset="0"/>
+                <a:ea typeface="游ゴシック" pitchFamily="34" charset="-122"/>
+                <a:cs typeface="游ゴシック" pitchFamily="34" charset="-120"/>
+              </a:rPr>
+              <a:t>有料老人</a:t>
+            </a:r>
+            <a:endParaRPr lang="en-US" sz="1050" dirty="0"/>
+          </a:p>
+          <a:p>
+            <a:pPr algn="ctr" indent="0" marL="0">
+              <a:buNone/>
+            </a:pPr>
+            <a:r>
+              <a:rPr lang="en-US" sz="1050" b="1" dirty="0">
+                <a:solidFill>
+                  <a:srgbClr val="FFFFFF"/>
+                </a:solidFill>
+                <a:latin typeface="游ゴシック" pitchFamily="34" charset="0"/>
+                <a:ea typeface="游ゴシック" pitchFamily="34" charset="-122"/>
+                <a:cs typeface="游ゴシック" pitchFamily="34" charset="-120"/>
+              </a:rPr>
+              <a:t>ホーム</a:t>
+            </a:r>
+            <a:endParaRPr lang="en-US" sz="1050" dirty="0"/>
+          </a:p>
+          <a:p>
+            <a:pPr algn="ctr" indent="0" marL="0">
+              <a:buNone/>
+            </a:pPr>
+            <a:r>
+              <a:rPr lang="en-US" sz="1050" b="1" dirty="0">
+                <a:solidFill>
+                  <a:srgbClr val="FFFFFF"/>
+                </a:solidFill>
+                <a:latin typeface="游ゴシック" pitchFamily="34" charset="0"/>
+                <a:ea typeface="游ゴシック" pitchFamily="34" charset="-122"/>
+                <a:cs typeface="游ゴシック" pitchFamily="34" charset="-120"/>
+              </a:rPr>
+              <a:t>3億円</a:t>
+            </a:r>
+            <a:endParaRPr lang="en-US" sz="1050" dirty="0"/>
+          </a:p>
+        </p:txBody>
+      </p:sp>
+      <p:sp>
+        <p:nvSpPr>
+          <p:cNvPr id="22" name="Shape 20"/>
+          <p:cNvSpPr/>
+          <p:nvPr/>
+        </p:nvSpPr>
+        <p:spPr>
+          <a:xfrm>
+            <a:off x="3200515" y="4499777"/>
+            <a:ext cx="960120" cy="960120"/>
+          </a:xfrm>
+          <a:prstGeom prst="ellipse">
+            <a:avLst/>
+          </a:prstGeom>
+          <a:solidFill>
+            <a:srgbClr val="1E3A5F"/>
+          </a:solidFill>
+          <a:ln/>
+        </p:spPr>
+      </p:sp>
+      <p:sp>
+        <p:nvSpPr>
+          <p:cNvPr id="23" name="Text 21"/>
+          <p:cNvSpPr txBox="1"/>
+          <p:nvPr/>
+        </p:nvSpPr>
+        <p:spPr>
+          <a:xfrm>
+            <a:off x="2880475" y="4499777"/>
+            <a:ext cx="1600200" cy="960120"/>
+          </a:xfrm>
+          <a:prstGeom prst="rect">
+            <a:avLst/>
+          </a:prstGeom>
+          <a:noFill/>
+          <a:ln/>
+        </p:spPr>
+        <p:txBody>
+          <a:bodyPr wrap="square" lIns="0" tIns="0" rIns="0" bIns="0" rtlCol="0" anchor="ctr"/>
+          <a:lstStyle/>
+          <a:p>
+            <a:pPr algn="ctr" indent="0" marL="0">
+              <a:buNone/>
+            </a:pPr>
+            <a:r>
+              <a:rPr lang="en-US" sz="1050" b="1" dirty="0">
+                <a:solidFill>
+                  <a:srgbClr val="FFFFFF"/>
+                </a:solidFill>
+                <a:latin typeface="游ゴシック" pitchFamily="34" charset="0"/>
+                <a:ea typeface="游ゴシック" pitchFamily="34" charset="-122"/>
+                <a:cs typeface="游ゴシック" pitchFamily="34" charset="-120"/>
+              </a:rPr>
+              <a:t>弁護士</a:t>
+            </a:r>
+            <a:endParaRPr lang="en-US" sz="1050" dirty="0"/>
+          </a:p>
+          <a:p>
+            <a:pPr algn="ctr" indent="0" marL="0">
+              <a:buNone/>
+            </a:pPr>
+            <a:r>
+              <a:rPr lang="en-US" sz="1050" b="1" dirty="0">
+                <a:solidFill>
+                  <a:srgbClr val="FFFFFF"/>
+                </a:solidFill>
+                <a:latin typeface="游ゴシック" pitchFamily="34" charset="0"/>
+                <a:ea typeface="游ゴシック" pitchFamily="34" charset="-122"/>
+                <a:cs typeface="游ゴシック" pitchFamily="34" charset="-120"/>
+              </a:rPr>
+              <a:t>1億円</a:t>
+            </a:r>
+            <a:endParaRPr lang="en-US" sz="1050" dirty="0"/>
+          </a:p>
+        </p:txBody>
+      </p:sp>
+      <p:sp>
+        <p:nvSpPr>
+          <p:cNvPr id="24" name="Shape 22"/>
+          <p:cNvSpPr/>
+          <p:nvPr/>
+        </p:nvSpPr>
+        <p:spPr>
+          <a:xfrm>
+            <a:off x="2217420" y="3451860"/>
+            <a:ext cx="1051560" cy="1051560"/>
+          </a:xfrm>
+          <a:prstGeom prst="ellipse">
+            <a:avLst/>
+          </a:prstGeom>
+          <a:solidFill>
+            <a:srgbClr val="1E3A5F"/>
+          </a:solidFill>
+          <a:ln/>
+        </p:spPr>
+      </p:sp>
+      <p:sp>
+        <p:nvSpPr>
+          <p:cNvPr id="25" name="Text 23"/>
+          <p:cNvSpPr txBox="1"/>
+          <p:nvPr/>
+        </p:nvSpPr>
+        <p:spPr>
+          <a:xfrm>
+            <a:off x="1897380" y="3451860"/>
+            <a:ext cx="1691640" cy="1051560"/>
+          </a:xfrm>
+          <a:prstGeom prst="rect">
+            <a:avLst/>
+          </a:prstGeom>
+          <a:noFill/>
+          <a:ln/>
+        </p:spPr>
+        <p:txBody>
+          <a:bodyPr wrap="square" lIns="0" tIns="0" rIns="0" bIns="0" rtlCol="0" anchor="ctr"/>
+          <a:lstStyle/>
+          <a:p>
+            <a:pPr algn="ctr" indent="0" marL="0">
+              <a:buNone/>
+            </a:pPr>
+            <a:r>
+              <a:rPr lang="en-US" sz="1050" b="1" dirty="0">
+                <a:solidFill>
+                  <a:srgbClr val="FFFFFF"/>
+                </a:solidFill>
+                <a:latin typeface="游ゴシック" pitchFamily="34" charset="0"/>
+                <a:ea typeface="游ゴシック" pitchFamily="34" charset="-122"/>
+                <a:cs typeface="游ゴシック" pitchFamily="34" charset="-120"/>
+              </a:rPr>
+              <a:t>司法書士・</a:t>
+            </a:r>
+            <a:endParaRPr lang="en-US" sz="1050" dirty="0"/>
+          </a:p>
+          <a:p>
+            <a:pPr algn="ctr" indent="0" marL="0">
+              <a:buNone/>
+            </a:pPr>
+            <a:r>
+              <a:rPr lang="en-US" sz="1050" b="1" dirty="0">
+                <a:solidFill>
+                  <a:srgbClr val="FFFFFF"/>
+                </a:solidFill>
+                <a:latin typeface="游ゴシック" pitchFamily="34" charset="0"/>
+                <a:ea typeface="游ゴシック" pitchFamily="34" charset="-122"/>
+                <a:cs typeface="游ゴシック" pitchFamily="34" charset="-120"/>
+              </a:rPr>
+              <a:t>行政書士</a:t>
+            </a:r>
+            <a:endParaRPr lang="en-US" sz="1050" dirty="0"/>
+          </a:p>
+          <a:p>
+            <a:pPr algn="ctr" indent="0" marL="0">
+              <a:buNone/>
+            </a:pPr>
+            <a:r>
+              <a:rPr lang="en-US" sz="1050" b="1" dirty="0">
+                <a:solidFill>
+                  <a:srgbClr val="FFFFFF"/>
+                </a:solidFill>
+                <a:latin typeface="游ゴシック" pitchFamily="34" charset="0"/>
+                <a:ea typeface="游ゴシック" pitchFamily="34" charset="-122"/>
+                <a:cs typeface="游ゴシック" pitchFamily="34" charset="-120"/>
+              </a:rPr>
+              <a:t>2億円</a:t>
+            </a:r>
+            <a:endParaRPr lang="en-US" sz="1050" dirty="0"/>
+          </a:p>
+        </p:txBody>
+      </p:sp>
+      <p:sp>
+        <p:nvSpPr>
+          <p:cNvPr id="26" name="Shape 24"/>
+          <p:cNvSpPr/>
+          <p:nvPr/>
+        </p:nvSpPr>
+        <p:spPr>
+          <a:xfrm>
+            <a:off x="3154795" y="2449663"/>
+            <a:ext cx="1051560" cy="1051560"/>
+          </a:xfrm>
+          <a:prstGeom prst="ellipse">
+            <a:avLst/>
+          </a:prstGeom>
+          <a:solidFill>
+            <a:srgbClr val="1E3A5F"/>
+          </a:solidFill>
+          <a:ln/>
+        </p:spPr>
+      </p:sp>
+      <p:sp>
+        <p:nvSpPr>
+          <p:cNvPr id="27" name="Text 25"/>
+          <p:cNvSpPr txBox="1"/>
+          <p:nvPr/>
+        </p:nvSpPr>
+        <p:spPr>
+          <a:xfrm>
+            <a:off x="2834755" y="2449663"/>
+            <a:ext cx="1691640" cy="1051560"/>
+          </a:xfrm>
+          <a:prstGeom prst="rect">
+            <a:avLst/>
+          </a:prstGeom>
+          <a:noFill/>
+          <a:ln/>
+        </p:spPr>
+        <p:txBody>
+          <a:bodyPr wrap="square" lIns="0" tIns="0" rIns="0" bIns="0" rtlCol="0" anchor="ctr"/>
+          <a:lstStyle/>
+          <a:p>
+            <a:pPr algn="ctr" indent="0" marL="0">
+              <a:buNone/>
+            </a:pPr>
+            <a:r>
+              <a:rPr lang="en-US" sz="1050" b="1" dirty="0">
+                <a:solidFill>
+                  <a:srgbClr val="FFFFFF"/>
+                </a:solidFill>
+                <a:latin typeface="游ゴシック" pitchFamily="34" charset="0"/>
+                <a:ea typeface="游ゴシック" pitchFamily="34" charset="-122"/>
+                <a:cs typeface="游ゴシック" pitchFamily="34" charset="-120"/>
+              </a:rPr>
+              <a:t>税理士</a:t>
+            </a:r>
+            <a:endParaRPr lang="en-US" sz="1050" dirty="0"/>
+          </a:p>
+          <a:p>
+            <a:pPr algn="ctr" indent="0" marL="0">
+              <a:buNone/>
+            </a:pPr>
+            <a:r>
+              <a:rPr lang="en-US" sz="1050" b="1" dirty="0">
+                <a:solidFill>
+                  <a:srgbClr val="FFFFFF"/>
+                </a:solidFill>
+                <a:latin typeface="游ゴシック" pitchFamily="34" charset="0"/>
+                <a:ea typeface="游ゴシック" pitchFamily="34" charset="-122"/>
+                <a:cs typeface="游ゴシック" pitchFamily="34" charset="-120"/>
+              </a:rPr>
+              <a:t>2億円</a:t>
+            </a:r>
+            <a:endParaRPr lang="en-US" sz="1050" dirty="0"/>
+          </a:p>
+        </p:txBody>
+      </p:sp>
+      <p:sp>
+        <p:nvSpPr>
+          <p:cNvPr id="28" name="Shape 26"/>
+          <p:cNvSpPr/>
+          <p:nvPr/>
+        </p:nvSpPr>
+        <p:spPr>
+          <a:xfrm>
+            <a:off x="5097780" y="3131820"/>
+            <a:ext cx="1691640" cy="1691640"/>
+          </a:xfrm>
+          <a:prstGeom prst="ellipse">
+            <a:avLst/>
+          </a:prstGeom>
+          <a:solidFill>
+            <a:srgbClr val="C9603F"/>
+          </a:solidFill>
+          <a:ln/>
+        </p:spPr>
+      </p:sp>
+      <p:sp>
+        <p:nvSpPr>
+          <p:cNvPr id="29" name="Text 27"/>
+          <p:cNvSpPr txBox="1"/>
+          <p:nvPr/>
+        </p:nvSpPr>
+        <p:spPr>
+          <a:xfrm>
+            <a:off x="4777740" y="3131820"/>
+            <a:ext cx="2331720" cy="1691640"/>
+          </a:xfrm>
+          <a:prstGeom prst="rect">
+            <a:avLst/>
+          </a:prstGeom>
+          <a:noFill/>
+          <a:ln/>
+        </p:spPr>
+        <p:txBody>
+          <a:bodyPr wrap="square" lIns="0" tIns="0" rIns="0" bIns="0" rtlCol="0" anchor="ctr"/>
+          <a:lstStyle/>
+          <a:p>
+            <a:pPr algn="ctr" indent="0" marL="0">
+              <a:buNone/>
+            </a:pPr>
+            <a:r>
+              <a:rPr lang="en-US" sz="1300" b="1" dirty="0">
+                <a:solidFill>
+                  <a:srgbClr val="FFFFFF"/>
+                </a:solidFill>
+                <a:latin typeface="游ゴシック" pitchFamily="34" charset="0"/>
+                <a:ea typeface="游ゴシック" pitchFamily="34" charset="-122"/>
+                <a:cs typeface="游ゴシック" pitchFamily="34" charset="-120"/>
+              </a:rPr>
+              <a:t>繋ぐグループ</a:t>
+            </a:r>
+            <a:endParaRPr lang="en-US" sz="1300" dirty="0"/>
+          </a:p>
+          <a:p>
+            <a:pPr algn="ctr" indent="0" marL="0">
+              <a:buNone/>
+            </a:pPr>
+            <a:r>
+              <a:rPr lang="en-US" sz="1300" b="1" dirty="0">
+                <a:solidFill>
+                  <a:srgbClr val="FFFFFF"/>
+                </a:solidFill>
+                <a:latin typeface="游ゴシック" pitchFamily="34" charset="0"/>
+                <a:ea typeface="游ゴシック" pitchFamily="34" charset="-122"/>
+                <a:cs typeface="游ゴシック" pitchFamily="34" charset="-120"/>
+              </a:rPr>
+              <a:t>（hub）</a:t>
+            </a:r>
+            <a:endParaRPr lang="en-US" sz="1300" dirty="0"/>
+          </a:p>
+        </p:txBody>
+      </p:sp>
+      <p:sp>
+        <p:nvSpPr>
+          <p:cNvPr id="30" name="Shape 28"/>
+          <p:cNvSpPr/>
+          <p:nvPr/>
+        </p:nvSpPr>
+        <p:spPr>
+          <a:xfrm>
+            <a:off x="9464040" y="1783080"/>
+            <a:ext cx="2103120" cy="1051560"/>
           </a:xfrm>
           <a:prstGeom prst="roundRect">
             <a:avLst>
-              <a:gd name="adj" fmla="val 5000"/>
+              <a:gd name="adj" fmla="val 8696"/>
             </a:avLst>
           </a:prstGeom>
           <a:solidFill>
-            <a:srgbClr val="F6F1EA"/>
+            <a:srgbClr val="10233A"/>
           </a:solidFill>
           <a:ln/>
           <a:effectLst>
@@ -11683,14 +12628,14 @@
       </p:sp>
       <p:sp>
         <p:nvSpPr>
-          <p:cNvPr id="6" name="Text 3"/>
-          <p:cNvSpPr txBox="1"/>
-          <p:nvPr/>
-        </p:nvSpPr>
-        <p:spPr>
-          <a:xfrm>
-            <a:off x="7863840" y="1965960"/>
-            <a:ext cx="3474720" cy="457200"/>
+          <p:cNvPr id="31" name="Text 29"/>
+          <p:cNvSpPr txBox="1"/>
+          <p:nvPr/>
+        </p:nvSpPr>
+        <p:spPr>
+          <a:xfrm>
+            <a:off x="9646920" y="1901952"/>
+            <a:ext cx="1737360" cy="274320"/>
           </a:xfrm>
           <a:prstGeom prst="rect">
             <a:avLst/>
@@ -11706,101 +12651,69 @@
               <a:buNone/>
             </a:pPr>
             <a:r>
-              <a:rPr lang="en-US" sz="1600" b="1" dirty="0">
-                <a:solidFill>
-                  <a:srgbClr val="C9603F"/>
-                </a:solidFill>
-                <a:latin typeface="游ゴシック" pitchFamily="34" charset="0"/>
-                <a:ea typeface="游ゴシック" pitchFamily="34" charset="-122"/>
-                <a:cs typeface="游ゴシック" pitchFamily="34" charset="-120"/>
-              </a:rPr>
-              <a:t>金融＋不動産　＝　80億円</a:t>
-            </a:r>
-            <a:endParaRPr lang="en-US" sz="1600" dirty="0"/>
-          </a:p>
-        </p:txBody>
-      </p:sp>
-      <p:sp>
-        <p:nvSpPr>
-          <p:cNvPr id="7" name="Text 4"/>
-          <p:cNvSpPr txBox="1"/>
-          <p:nvPr/>
-        </p:nvSpPr>
-        <p:spPr>
-          <a:xfrm>
-            <a:off x="7863840" y="2423160"/>
-            <a:ext cx="3474720" cy="1097280"/>
-          </a:xfrm>
-          <a:prstGeom prst="rect">
-            <a:avLst/>
-          </a:prstGeom>
-          <a:noFill/>
-          <a:ln/>
-        </p:spPr>
-        <p:txBody>
-          <a:bodyPr wrap="square" lIns="0" tIns="0" rIns="0" bIns="0" rtlCol="0" anchor="t"/>
+              <a:rPr lang="en-US" sz="1100" dirty="0">
+                <a:solidFill>
+                  <a:srgbClr val="F1DCCF"/>
+                </a:solidFill>
+                <a:latin typeface="游ゴシック" pitchFamily="34" charset="0"/>
+                <a:ea typeface="游ゴシック" pitchFamily="34" charset="-122"/>
+                <a:cs typeface="游ゴシック" pitchFamily="34" charset="-120"/>
+              </a:rPr>
+              <a:t>想定合計</a:t>
+            </a:r>
+            <a:endParaRPr lang="en-US" sz="1100" dirty="0"/>
+          </a:p>
+        </p:txBody>
+      </p:sp>
+      <p:sp>
+        <p:nvSpPr>
+          <p:cNvPr id="32" name="Text 30"/>
+          <p:cNvSpPr txBox="1"/>
+          <p:nvPr/>
+        </p:nvSpPr>
+        <p:spPr>
+          <a:xfrm>
+            <a:off x="9646920" y="2176272"/>
+            <a:ext cx="1737360" cy="548640"/>
+          </a:xfrm>
+          <a:prstGeom prst="rect">
+            <a:avLst/>
+          </a:prstGeom>
+          <a:noFill/>
+          <a:ln/>
+        </p:spPr>
+        <p:txBody>
+          <a:bodyPr wrap="square" lIns="0" tIns="0" rIns="0" bIns="0" rtlCol="0" anchor="ctr"/>
           <a:lstStyle/>
           <a:p>
             <a:pPr indent="0" marL="0">
-              <a:lnSpc>
-                <a:spcPct val="125000"/>
-              </a:lnSpc>
-              <a:buNone/>
-            </a:pPr>
-            <a:r>
-              <a:rPr lang="en-US" sz="1200" dirty="0">
-                <a:solidFill>
-                  <a:srgbClr val="3A3A3A"/>
-                </a:solidFill>
-                <a:latin typeface="游ゴシック" pitchFamily="34" charset="0"/>
-                <a:ea typeface="游ゴシック" pitchFamily="34" charset="-122"/>
-                <a:cs typeface="游ゴシック" pitchFamily="34" charset="-120"/>
-              </a:rPr>
-              <a:t>全体想定100億円のうち約8割を占める、資産性の高い意思決定支援（相続発生時の資産整理・組み換え）が中核であることを示す。</a:t>
-            </a:r>
-            <a:endParaRPr lang="en-US" sz="1200" dirty="0"/>
-          </a:p>
-        </p:txBody>
-      </p:sp>
-      <p:sp>
-        <p:nvSpPr>
-          <p:cNvPr id="8" name="Shape 5"/>
-          <p:cNvSpPr/>
-          <p:nvPr/>
-        </p:nvSpPr>
-        <p:spPr>
-          <a:xfrm>
-            <a:off x="7635240" y="3794760"/>
-            <a:ext cx="3931920" cy="2194560"/>
-          </a:xfrm>
-          <a:prstGeom prst="roundRect">
-            <a:avLst>
-              <a:gd name="adj" fmla="val 4167"/>
-            </a:avLst>
-          </a:prstGeom>
-          <a:solidFill>
-            <a:srgbClr val="F6F1EA"/>
-          </a:solidFill>
-          <a:ln/>
-          <a:effectLst>
-            <a:outerShdw sx="100000" sy="100000" kx="0" ky="0" algn="bl" rotWithShape="0" blurRad="101600" dist="38100" dir="5400000">
-              <a:srgbClr val="10233A">
-                <a:alpha val="18000"/>
-              </a:srgbClr>
-            </a:outerShdw>
-          </a:effectLst>
-        </p:spPr>
-      </p:sp>
-      <p:sp>
-        <p:nvSpPr>
-          <p:cNvPr id="9" name="Text 6"/>
-          <p:cNvSpPr txBox="1"/>
-          <p:nvPr/>
-        </p:nvSpPr>
-        <p:spPr>
-          <a:xfrm>
-            <a:off x="7863840" y="3977640"/>
-            <a:ext cx="3474720" cy="457200"/>
+              <a:buNone/>
+            </a:pPr>
+            <a:r>
+              <a:rPr lang="en-US" sz="2400" b="1" dirty="0">
+                <a:solidFill>
+                  <a:srgbClr val="FFFFFF"/>
+                </a:solidFill>
+                <a:latin typeface="游ゴシック" pitchFamily="34" charset="0"/>
+                <a:ea typeface="游ゴシック" pitchFamily="34" charset="-122"/>
+                <a:cs typeface="游ゴシック" pitchFamily="34" charset="-120"/>
+              </a:rPr>
+              <a:t>約100億円</a:t>
+            </a:r>
+            <a:endParaRPr lang="en-US" sz="2400" dirty="0"/>
+          </a:p>
+        </p:txBody>
+      </p:sp>
+      <p:sp>
+        <p:nvSpPr>
+          <p:cNvPr id="33" name="Text 31"/>
+          <p:cNvSpPr txBox="1"/>
+          <p:nvPr/>
+        </p:nvSpPr>
+        <p:spPr>
+          <a:xfrm>
+            <a:off x="640080" y="6263640"/>
+            <a:ext cx="10881360" cy="320040"/>
           </a:xfrm>
           <a:prstGeom prst="rect">
             <a:avLst/>
@@ -11816,117 +12729,23 @@
               <a:buNone/>
             </a:pPr>
             <a:r>
-              <a:rPr lang="en-US" sz="1500" b="1" dirty="0">
-                <a:solidFill>
-                  <a:srgbClr val="1E3A5F"/>
-                </a:solidFill>
-                <a:latin typeface="游ゴシック" pitchFamily="34" charset="0"/>
-                <a:ea typeface="游ゴシック" pitchFamily="34" charset="-122"/>
-                <a:cs typeface="游ゴシック" pitchFamily="34" charset="-120"/>
-              </a:rPr>
-              <a:t>残り2割＝士業・施設・M&amp;Aの裾野</a:t>
-            </a:r>
-            <a:endParaRPr lang="en-US" sz="1500" dirty="0"/>
-          </a:p>
-        </p:txBody>
-      </p:sp>
-      <p:sp>
-        <p:nvSpPr>
-          <p:cNvPr id="10" name="Text 7"/>
-          <p:cNvSpPr txBox="1"/>
-          <p:nvPr/>
-        </p:nvSpPr>
-        <p:spPr>
-          <a:xfrm>
-            <a:off x="7863840" y="4434840"/>
-            <a:ext cx="3474720" cy="1463040"/>
-          </a:xfrm>
-          <a:prstGeom prst="rect">
-            <a:avLst/>
-          </a:prstGeom>
-          <a:noFill/>
-          <a:ln/>
-        </p:spPr>
-        <p:txBody>
-          <a:bodyPr wrap="square" lIns="0" tIns="0" rIns="0" bIns="0" rtlCol="0" anchor="t"/>
-          <a:lstStyle/>
-          <a:p>
-            <a:pPr marL="342900" indent="-342900">
-              <a:lnSpc>
-                <a:spcPct val="128000"/>
-              </a:lnSpc>
-              <a:spcAft>
-                <a:spcPts val="800"/>
-              </a:spcAft>
-              <a:buSzPct val="100000"/>
-              <a:buChar char="●"/>
-            </a:pPr>
-            <a:r>
-              <a:rPr lang="en-US" sz="1150" dirty="0">
-                <a:solidFill>
-                  <a:srgbClr val="3A3A3A"/>
-                </a:solidFill>
-                <a:latin typeface="游ゴシック" pitchFamily="34" charset="0"/>
-                <a:ea typeface="游ゴシック" pitchFamily="34" charset="-122"/>
-                <a:cs typeface="游ゴシック" pitchFamily="34" charset="-120"/>
-              </a:rPr>
-              <a:t>税理士・司法書士・行政書士・弁護士＝合計7億円</a:t>
-            </a:r>
-            <a:endParaRPr lang="en-US" sz="1150" dirty="0"/>
-          </a:p>
-          <a:p>
-            <a:pPr marL="342900" indent="-342900">
-              <a:lnSpc>
-                <a:spcPct val="128000"/>
-              </a:lnSpc>
-              <a:spcAft>
-                <a:spcPts val="800"/>
-              </a:spcAft>
-              <a:buSzPct val="100000"/>
-              <a:buChar char="●"/>
-            </a:pPr>
-            <a:r>
-              <a:rPr lang="en-US" sz="1150" dirty="0">
-                <a:solidFill>
-                  <a:srgbClr val="3A3A3A"/>
-                </a:solidFill>
-                <a:latin typeface="游ゴシック" pitchFamily="34" charset="0"/>
-                <a:ea typeface="游ゴシック" pitchFamily="34" charset="-122"/>
-                <a:cs typeface="游ゴシック" pitchFamily="34" charset="-120"/>
-              </a:rPr>
-              <a:t>有料老人ホーム3億円、法人バルクM&amp;A5億円</a:t>
-            </a:r>
-            <a:endParaRPr lang="en-US" sz="1150" dirty="0"/>
-          </a:p>
-          <a:p>
-            <a:pPr marL="342900" indent="-342900">
-              <a:lnSpc>
-                <a:spcPct val="128000"/>
-              </a:lnSpc>
-              <a:spcAft>
-                <a:spcPts val="800"/>
-              </a:spcAft>
-              <a:buSzPct val="100000"/>
-              <a:buChar char="●"/>
-            </a:pPr>
-            <a:r>
-              <a:rPr lang="en-US" sz="1150" dirty="0">
-                <a:solidFill>
-                  <a:srgbClr val="3A3A3A"/>
-                </a:solidFill>
-                <a:latin typeface="游ゴシック" pitchFamily="34" charset="0"/>
-                <a:ea typeface="游ゴシック" pitchFamily="34" charset="-122"/>
-                <a:cs typeface="游ゴシック" pitchFamily="34" charset="-120"/>
-              </a:rPr>
-              <a:t>単発の大型案件だけでなく、裾野の広い専門家連携が常時発生している</a:t>
-            </a:r>
-            <a:endParaRPr lang="en-US" sz="1150" dirty="0"/>
-          </a:p>
-        </p:txBody>
-      </p:sp>
-      <p:sp>
-        <p:nvSpPr>
-          <p:cNvPr id="11" name="Text 8"/>
+              <a:rPr lang="en-US" sz="1050" i="1" dirty="0">
+                <a:solidFill>
+                  <a:srgbClr val="6B6B6B"/>
+                </a:solidFill>
+                <a:latin typeface="游ゴシック" pitchFamily="34" charset="0"/>
+                <a:ea typeface="游ゴシック" pitchFamily="34" charset="-122"/>
+                <a:cs typeface="游ゴシック" pitchFamily="34" charset="-120"/>
+              </a:rPr>
+              <a:t>金額は現時点の想定値。ファイナル資料で使う際は「概算」「エピソードとして」と位置づけ、根拠の精査を行う。</a:t>
+            </a:r>
+            <a:endParaRPr lang="en-US" sz="1050" dirty="0"/>
+          </a:p>
+        </p:txBody>
+      </p:sp>
+      <p:sp>
+        <p:nvSpPr>
+          <p:cNvPr id="34" name="Text 32"/>
           <p:cNvSpPr txBox="1"/>
           <p:nvPr/>
         </p:nvSpPr>
@@ -12028,7 +12847,7 @@
                 <a:ea typeface="游ゴシック" pitchFamily="34" charset="-122"/>
                 <a:cs typeface="游ゴシック" pitchFamily="34" charset="-120"/>
               </a:rPr>
-              <a:t>01 / NOVELTY</a:t>
+              <a:t>BREAKDOWN</a:t>
             </a:r>
             <a:endParaRPr lang="en-US" sz="1300" dirty="0"/>
           </a:p>
@@ -12067,28 +12886,46 @@
                 <a:ea typeface="游ゴシック" pitchFamily="34" charset="-122"/>
                 <a:cs typeface="游ゴシック" pitchFamily="34" charset="-120"/>
               </a:rPr>
-              <a:t>斬新性 ― 「hub」として経済圏を創るという発想</a:t>
+              <a:t>内訳ランキング ― 金融・不動産で全体の8割</a:t>
             </a:r>
             <a:endParaRPr lang="en-US" sz="2700" dirty="0"/>
           </a:p>
         </p:txBody>
       </p:sp>
-      <p:sp>
-        <p:nvSpPr>
-          <p:cNvPr id="4" name="Shape 2"/>
+      <p:graphicFrame>
+        <p:nvGraphicFramePr>
+          <p:cNvPr id="4" name="Chart 0" descr=""/>
+          <p:cNvGraphicFramePr/>
+          <p:nvPr/>
+        </p:nvGraphicFramePr>
+        <p:xfrm>
+          <a:off x="640080" y="1691640"/>
+          <a:ext cx="6675120" cy="4297680"/>
+        </p:xfrm>
+        <a:graphic xmlns:a="http://schemas.openxmlformats.org/drawingml/2006/main">
+          <a:graphicData uri="http://schemas.openxmlformats.org/drawingml/2006/chart">
+            <c:chart xmlns:c="http://schemas.openxmlformats.org/drawingml/2006/chart" r:id="rId1"/>
+          </a:graphicData>
+        </a:graphic>
+      </p:graphicFrame>
+      <p:sp>
+        <p:nvSpPr>
+          <p:cNvPr id="5" name="Shape 2"/>
           <p:cNvSpPr/>
           <p:nvPr/>
         </p:nvSpPr>
         <p:spPr>
           <a:xfrm>
-            <a:off x="10607040" y="502920"/>
-            <a:ext cx="822960" cy="822960"/>
-          </a:xfrm>
-          <a:prstGeom prst="ellipse">
-            <a:avLst/>
+            <a:off x="7635240" y="1783080"/>
+            <a:ext cx="3931920" cy="1828800"/>
+          </a:xfrm>
+          <a:prstGeom prst="roundRect">
+            <a:avLst>
+              <a:gd name="adj" fmla="val 5000"/>
+            </a:avLst>
           </a:prstGeom>
           <a:solidFill>
-            <a:srgbClr val="C9603F"/>
+            <a:srgbClr val="F6F1EA"/>
           </a:solidFill>
           <a:ln/>
           <a:effectLst>
@@ -12102,53 +12939,163 @@
       </p:sp>
       <p:sp>
         <p:nvSpPr>
-          <p:cNvPr id="5" name="Text 3"/>
-          <p:cNvSpPr txBox="1"/>
-          <p:nvPr/>
-        </p:nvSpPr>
-        <p:spPr>
-          <a:xfrm>
-            <a:off x="10607040" y="502920"/>
-            <a:ext cx="822960" cy="822960"/>
-          </a:xfrm>
-          <a:prstGeom prst="rect">
-            <a:avLst/>
-          </a:prstGeom>
-          <a:noFill/>
-          <a:ln/>
-        </p:spPr>
-        <p:txBody>
-          <a:bodyPr wrap="square" lIns="0" tIns="0" rIns="0" bIns="0" rtlCol="0" anchor="ctr"/>
-          <a:lstStyle/>
-          <a:p>
-            <a:pPr algn="ctr" indent="0" marL="0">
-              <a:buNone/>
-            </a:pPr>
-            <a:r>
-              <a:rPr lang="en-US" sz="2880" b="1" dirty="0">
-                <a:solidFill>
-                  <a:srgbClr val="FFFFFF"/>
-                </a:solidFill>
-                <a:latin typeface="游ゴシック" pitchFamily="34" charset="0"/>
-                <a:ea typeface="游ゴシック" pitchFamily="34" charset="-122"/>
-                <a:cs typeface="游ゴシック" pitchFamily="34" charset="-120"/>
-              </a:rPr>
-              <a:t>斬</a:t>
-            </a:r>
-            <a:endParaRPr lang="en-US" sz="2880" dirty="0"/>
-          </a:p>
-        </p:txBody>
-      </p:sp>
-      <p:sp>
-        <p:nvSpPr>
-          <p:cNvPr id="6" name="Text 4"/>
-          <p:cNvSpPr txBox="1"/>
-          <p:nvPr/>
-        </p:nvSpPr>
-        <p:spPr>
-          <a:xfrm>
-            <a:off x="640080" y="1783080"/>
-            <a:ext cx="10881360" cy="4206240"/>
+          <p:cNvPr id="6" name="Text 3"/>
+          <p:cNvSpPr txBox="1"/>
+          <p:nvPr/>
+        </p:nvSpPr>
+        <p:spPr>
+          <a:xfrm>
+            <a:off x="7863840" y="1965960"/>
+            <a:ext cx="3474720" cy="457200"/>
+          </a:xfrm>
+          <a:prstGeom prst="rect">
+            <a:avLst/>
+          </a:prstGeom>
+          <a:noFill/>
+          <a:ln/>
+        </p:spPr>
+        <p:txBody>
+          <a:bodyPr wrap="square" lIns="0" tIns="0" rIns="0" bIns="0" rtlCol="0" anchor="ctr"/>
+          <a:lstStyle/>
+          <a:p>
+            <a:pPr indent="0" marL="0">
+              <a:buNone/>
+            </a:pPr>
+            <a:r>
+              <a:rPr lang="en-US" sz="1600" b="1" dirty="0">
+                <a:solidFill>
+                  <a:srgbClr val="C9603F"/>
+                </a:solidFill>
+                <a:latin typeface="游ゴシック" pitchFamily="34" charset="0"/>
+                <a:ea typeface="游ゴシック" pitchFamily="34" charset="-122"/>
+                <a:cs typeface="游ゴシック" pitchFamily="34" charset="-120"/>
+              </a:rPr>
+              <a:t>金融＋不動産　＝　80億円</a:t>
+            </a:r>
+            <a:endParaRPr lang="en-US" sz="1600" dirty="0"/>
+          </a:p>
+        </p:txBody>
+      </p:sp>
+      <p:sp>
+        <p:nvSpPr>
+          <p:cNvPr id="7" name="Text 4"/>
+          <p:cNvSpPr txBox="1"/>
+          <p:nvPr/>
+        </p:nvSpPr>
+        <p:spPr>
+          <a:xfrm>
+            <a:off x="7863840" y="2423160"/>
+            <a:ext cx="3474720" cy="1097280"/>
+          </a:xfrm>
+          <a:prstGeom prst="rect">
+            <a:avLst/>
+          </a:prstGeom>
+          <a:noFill/>
+          <a:ln/>
+        </p:spPr>
+        <p:txBody>
+          <a:bodyPr wrap="square" lIns="0" tIns="0" rIns="0" bIns="0" rtlCol="0" anchor="t"/>
+          <a:lstStyle/>
+          <a:p>
+            <a:pPr indent="0" marL="0">
+              <a:lnSpc>
+                <a:spcPct val="125000"/>
+              </a:lnSpc>
+              <a:buNone/>
+            </a:pPr>
+            <a:r>
+              <a:rPr lang="en-US" sz="1200" dirty="0">
+                <a:solidFill>
+                  <a:srgbClr val="3A3A3A"/>
+                </a:solidFill>
+                <a:latin typeface="游ゴシック" pitchFamily="34" charset="0"/>
+                <a:ea typeface="游ゴシック" pitchFamily="34" charset="-122"/>
+                <a:cs typeface="游ゴシック" pitchFamily="34" charset="-120"/>
+              </a:rPr>
+              <a:t>全体想定100億円のうち約8割を占める、資産性の高い意思決定支援（相続発生時の資産整理・組み換え）が中核であることを示す。</a:t>
+            </a:r>
+            <a:endParaRPr lang="en-US" sz="1200" dirty="0"/>
+          </a:p>
+        </p:txBody>
+      </p:sp>
+      <p:sp>
+        <p:nvSpPr>
+          <p:cNvPr id="8" name="Shape 5"/>
+          <p:cNvSpPr/>
+          <p:nvPr/>
+        </p:nvSpPr>
+        <p:spPr>
+          <a:xfrm>
+            <a:off x="7635240" y="3794760"/>
+            <a:ext cx="3931920" cy="2194560"/>
+          </a:xfrm>
+          <a:prstGeom prst="roundRect">
+            <a:avLst>
+              <a:gd name="adj" fmla="val 4167"/>
+            </a:avLst>
+          </a:prstGeom>
+          <a:solidFill>
+            <a:srgbClr val="F6F1EA"/>
+          </a:solidFill>
+          <a:ln/>
+          <a:effectLst>
+            <a:outerShdw sx="100000" sy="100000" kx="0" ky="0" algn="bl" rotWithShape="0" blurRad="101600" dist="38100" dir="5400000">
+              <a:srgbClr val="10233A">
+                <a:alpha val="18000"/>
+              </a:srgbClr>
+            </a:outerShdw>
+          </a:effectLst>
+        </p:spPr>
+      </p:sp>
+      <p:sp>
+        <p:nvSpPr>
+          <p:cNvPr id="9" name="Text 6"/>
+          <p:cNvSpPr txBox="1"/>
+          <p:nvPr/>
+        </p:nvSpPr>
+        <p:spPr>
+          <a:xfrm>
+            <a:off x="7863840" y="3977640"/>
+            <a:ext cx="3474720" cy="457200"/>
+          </a:xfrm>
+          <a:prstGeom prst="rect">
+            <a:avLst/>
+          </a:prstGeom>
+          <a:noFill/>
+          <a:ln/>
+        </p:spPr>
+        <p:txBody>
+          <a:bodyPr wrap="square" lIns="0" tIns="0" rIns="0" bIns="0" rtlCol="0" anchor="ctr"/>
+          <a:lstStyle/>
+          <a:p>
+            <a:pPr indent="0" marL="0">
+              <a:buNone/>
+            </a:pPr>
+            <a:r>
+              <a:rPr lang="en-US" sz="1500" b="1" dirty="0">
+                <a:solidFill>
+                  <a:srgbClr val="1E3A5F"/>
+                </a:solidFill>
+                <a:latin typeface="游ゴシック" pitchFamily="34" charset="0"/>
+                <a:ea typeface="游ゴシック" pitchFamily="34" charset="-122"/>
+                <a:cs typeface="游ゴシック" pitchFamily="34" charset="-120"/>
+              </a:rPr>
+              <a:t>残り2割＝士業・施設・M&amp;Aの裾野</a:t>
+            </a:r>
+            <a:endParaRPr lang="en-US" sz="1500" dirty="0"/>
+          </a:p>
+        </p:txBody>
+      </p:sp>
+      <p:sp>
+        <p:nvSpPr>
+          <p:cNvPr id="10" name="Text 7"/>
+          <p:cNvSpPr txBox="1"/>
+          <p:nvPr/>
+        </p:nvSpPr>
+        <p:spPr>
+          <a:xfrm>
+            <a:off x="7863840" y="4434840"/>
+            <a:ext cx="3474720" cy="1463040"/>
           </a:xfrm>
           <a:prstGeom prst="rect">
             <a:avLst/>
@@ -12165,13 +13112,13 @@
                 <a:spcPct val="128000"/>
               </a:lnSpc>
               <a:spcAft>
-                <a:spcPts val="1200"/>
+                <a:spcPts val="800"/>
               </a:spcAft>
               <a:buSzPct val="100000"/>
               <a:buChar char="●"/>
             </a:pPr>
             <a:r>
-              <a:rPr lang="en-US" sz="1500" dirty="0">
+              <a:rPr lang="en-US" sz="1150" dirty="0">
                 <a:solidFill>
                   <a:srgbClr val="3A3A3A"/>
                 </a:solidFill>
@@ -12179,9 +13126,9 @@
                 <a:ea typeface="游ゴシック" pitchFamily="34" charset="-122"/>
                 <a:cs typeface="游ゴシック" pitchFamily="34" charset="-120"/>
               </a:rPr>
-              <a:t>相続コンサルタントが自社の商品を売るのではなく、金融・不動産・士業など周辺専門家の収益の「結節点（hub）」になるという発想そのものが、他に類を見ない（素材①）</a:t>
-            </a:r>
-            <a:endParaRPr lang="en-US" sz="1500" dirty="0"/>
+              <a:t>税理士・司法書士・行政書士・弁護士＝合計7億円</a:t>
+            </a:r>
+            <a:endParaRPr lang="en-US" sz="1150" dirty="0"/>
           </a:p>
           <a:p>
             <a:pPr marL="342900" indent="-342900">
@@ -12189,13 +13136,13 @@
                 <a:spcPct val="128000"/>
               </a:lnSpc>
               <a:spcAft>
-                <a:spcPts val="1200"/>
+                <a:spcPts val="800"/>
               </a:spcAft>
               <a:buSzPct val="100000"/>
               <a:buChar char="●"/>
             </a:pPr>
             <a:r>
-              <a:rPr lang="en-US" sz="1500" dirty="0">
+              <a:rPr lang="en-US" sz="1150" dirty="0">
                 <a:solidFill>
                   <a:srgbClr val="3A3A3A"/>
                 </a:solidFill>
@@ -12203,9 +13150,9 @@
                 <a:ea typeface="游ゴシック" pitchFamily="34" charset="-122"/>
                 <a:cs typeface="游ゴシック" pitchFamily="34" charset="-120"/>
               </a:rPr>
-              <a:t>厚生労働省が既に推進している公的な枠組み（ACP＝人生会議）を、自社の“フロントエンド”として活用するという発想の転換（素材②）</a:t>
-            </a:r>
-            <a:endParaRPr lang="en-US" sz="1500" dirty="0"/>
+              <a:t>有料老人ホーム3億円、法人バルクM&amp;A5億円</a:t>
+            </a:r>
+            <a:endParaRPr lang="en-US" sz="1150" dirty="0"/>
           </a:p>
           <a:p>
             <a:pPr marL="342900" indent="-342900">
@@ -12213,13 +13160,13 @@
                 <a:spcPct val="128000"/>
               </a:lnSpc>
               <a:spcAft>
-                <a:spcPts val="1200"/>
+                <a:spcPts val="800"/>
               </a:spcAft>
               <a:buSzPct val="100000"/>
               <a:buChar char="●"/>
             </a:pPr>
             <a:r>
-              <a:rPr lang="en-US" sz="1500" dirty="0">
+              <a:rPr lang="en-US" sz="1150" dirty="0">
                 <a:solidFill>
                   <a:srgbClr val="3A3A3A"/>
                 </a:solidFill>
@@ -12227,76 +13174,15 @@
                 <a:ea typeface="游ゴシック" pitchFamily="34" charset="-122"/>
                 <a:cs typeface="游ゴシック" pitchFamily="34" charset="-120"/>
               </a:rPr>
-              <a:t>「財産ではなく、家族の抱える“隠れた課題”を見つけに行く」という視点を、育成カリキュラムとして体系化・教材化している（素材③）</a:t>
-            </a:r>
-            <a:endParaRPr lang="en-US" sz="1500" dirty="0"/>
-          </a:p>
-        </p:txBody>
-      </p:sp>
-      <p:sp>
-        <p:nvSpPr>
-          <p:cNvPr id="7" name="Shape 5"/>
-          <p:cNvSpPr/>
-          <p:nvPr/>
-        </p:nvSpPr>
-        <p:spPr>
-          <a:xfrm>
-            <a:off x="640080" y="4846320"/>
-            <a:ext cx="10881360" cy="914400"/>
-          </a:xfrm>
-          <a:prstGeom prst="roundRect">
-            <a:avLst>
-              <a:gd name="adj" fmla="val 8000"/>
-            </a:avLst>
-          </a:prstGeom>
-          <a:solidFill>
-            <a:srgbClr val="1E3A5F"/>
-          </a:solidFill>
-          <a:ln/>
-        </p:spPr>
-      </p:sp>
-      <p:sp>
-        <p:nvSpPr>
-          <p:cNvPr id="8" name="Text 6"/>
-          <p:cNvSpPr txBox="1"/>
-          <p:nvPr/>
-        </p:nvSpPr>
-        <p:spPr>
-          <a:xfrm>
-            <a:off x="914400" y="4846320"/>
-            <a:ext cx="10332720" cy="914400"/>
-          </a:xfrm>
-          <a:prstGeom prst="rect">
-            <a:avLst/>
-          </a:prstGeom>
-          <a:noFill/>
-          <a:ln/>
-        </p:spPr>
-        <p:txBody>
-          <a:bodyPr wrap="square" lIns="0" tIns="0" rIns="0" bIns="0" rtlCol="0" anchor="ctr"/>
-          <a:lstStyle/>
-          <a:p>
-            <a:pPr algn="l" indent="0" marL="0">
-              <a:buNone/>
-            </a:pPr>
-            <a:r>
-              <a:rPr lang="en-US" sz="1700" b="1" dirty="0">
-                <a:solidFill>
-                  <a:srgbClr val="F1DCCF"/>
-                </a:solidFill>
-                <a:latin typeface="游ゴシック" pitchFamily="34" charset="0"/>
-                <a:ea typeface="游ゴシック" pitchFamily="34" charset="-122"/>
-                <a:cs typeface="游ゴシック" pitchFamily="34" charset="-120"/>
-              </a:rPr>
-              <a:t>「ノートを売る」会社ではなく、「専門家たちの収益の結節点になる」会社。</a:t>
-            </a:r>
-            <a:endParaRPr lang="en-US" sz="1700" dirty="0"/>
-          </a:p>
-        </p:txBody>
-      </p:sp>
-      <p:sp>
-        <p:nvSpPr>
-          <p:cNvPr id="9" name="Text 7"/>
+              <a:t>単発の大型案件だけでなく、裾野の広い専門家連携が常時発生している</a:t>
+            </a:r>
+            <a:endParaRPr lang="en-US" sz="1150" dirty="0"/>
+          </a:p>
+        </p:txBody>
+      </p:sp>
+      <p:sp>
+        <p:nvSpPr>
+          <p:cNvPr id="11" name="Text 8"/>
           <p:cNvSpPr txBox="1"/>
           <p:nvPr/>
         </p:nvSpPr>
@@ -12398,7 +13284,7 @@
                 <a:ea typeface="游ゴシック" pitchFamily="34" charset="-122"/>
                 <a:cs typeface="游ゴシック" pitchFamily="34" charset="-120"/>
               </a:rPr>
-              <a:t>02 / PROFITABILITY</a:t>
+              <a:t>01 / NOVELTY</a:t>
             </a:r>
             <a:endParaRPr lang="en-US" sz="1300" dirty="0"/>
           </a:p>
@@ -12437,7 +13323,7 @@
                 <a:ea typeface="游ゴシック" pitchFamily="34" charset="-122"/>
                 <a:cs typeface="游ゴシック" pitchFamily="34" charset="-120"/>
               </a:rPr>
-              <a:t>収益性 ― 自社の売上ではなく、創出した経済圏で語る</a:t>
+              <a:t>斬新性 ― 「hub」として経済圏を創るという発想</a:t>
             </a:r>
             <a:endParaRPr lang="en-US" sz="2700" dirty="0"/>
           </a:p>
@@ -12503,7 +13389,7 @@
                 <a:ea typeface="游ゴシック" pitchFamily="34" charset="-122"/>
                 <a:cs typeface="游ゴシック" pitchFamily="34" charset="-120"/>
               </a:rPr>
-              <a:t>収</a:t>
+              <a:t>斬</a:t>
             </a:r>
             <a:endParaRPr lang="en-US" sz="2880" dirty="0"/>
           </a:p>
@@ -12549,7 +13435,7 @@
                 <a:ea typeface="游ゴシック" pitchFamily="34" charset="-122"/>
                 <a:cs typeface="游ゴシック" pitchFamily="34" charset="-120"/>
               </a:rPr>
-              <a:t>自社単体の売上（約5,000万円）だけを見れば小さく映るが、hubとして周辺専門家にもたらした経済圏は約100億円</a:t>
+              <a:t>相続コンサルタントが自社の商品を売るのではなく、金融・不動産・士業など周辺専門家の収益の「結節点（hub）」になるという発想そのものが、他に類を見ない（素材①）</a:t>
             </a:r>
             <a:endParaRPr lang="en-US" sz="1500" dirty="0"/>
           </a:p>
@@ -12573,7 +13459,7 @@
                 <a:ea typeface="游ゴシック" pitchFamily="34" charset="-122"/>
                 <a:cs typeface="游ゴシック" pitchFamily="34" charset="-120"/>
               </a:rPr>
-              <a:t>信用金庫への新規資金導入 約7億円、法人バルクM&amp;A 2億円など、具体的な実例が裏付け（素材①）</a:t>
+              <a:t>厚生労働省が既に推進している公的な枠組み（ACP＝人生会議）を、自社の“フロントエンド”として活用するという発想の転換（素材②）</a:t>
             </a:r>
             <a:endParaRPr lang="en-US" sz="1500" dirty="0"/>
           </a:p>
@@ -12597,7 +13483,7 @@
                 <a:ea typeface="游ゴシック" pitchFamily="34" charset="-122"/>
                 <a:cs typeface="游ゴシック" pitchFamily="34" charset="-120"/>
               </a:rPr>
-              <a:t>「繋ぐグループ全体の売上」という表現は“事業間シナジー”の指標として使ってよいと事務局（加藤氏）からも確認済み</a:t>
+              <a:t>「財産ではなく、家族の抱える“隠れた課題”を見つけに行く」という視点を、育成カリキュラムとして体系化・教材化している（素材③）</a:t>
             </a:r>
             <a:endParaRPr lang="en-US" sz="1500" dirty="0"/>
           </a:p>
@@ -12611,25 +13497,18 @@
         </p:nvSpPr>
         <p:spPr>
           <a:xfrm>
-            <a:off x="640080" y="4572000"/>
-            <a:ext cx="3200400" cy="1371600"/>
+            <a:off x="640080" y="4846320"/>
+            <a:ext cx="10881360" cy="914400"/>
           </a:xfrm>
           <a:prstGeom prst="roundRect">
             <a:avLst>
-              <a:gd name="adj" fmla="val 6667"/>
+              <a:gd name="adj" fmla="val 8000"/>
             </a:avLst>
           </a:prstGeom>
           <a:solidFill>
-            <a:srgbClr val="F6F1EA"/>
+            <a:srgbClr val="1E3A5F"/>
           </a:solidFill>
           <a:ln/>
-          <a:effectLst>
-            <a:outerShdw sx="100000" sy="100000" kx="0" ky="0" algn="bl" rotWithShape="0" blurRad="101600" dist="38100" dir="5400000">
-              <a:srgbClr val="10233A">
-                <a:alpha val="18000"/>
-              </a:srgbClr>
-            </a:outerShdw>
-          </a:effectLst>
         </p:spPr>
       </p:sp>
       <p:sp>
@@ -12640,371 +13519,40 @@
         </p:nvSpPr>
         <p:spPr>
           <a:xfrm>
-            <a:off x="777240" y="4754880"/>
-            <a:ext cx="2926080" cy="640080"/>
-          </a:xfrm>
-          <a:prstGeom prst="rect">
-            <a:avLst/>
-          </a:prstGeom>
-          <a:noFill/>
-          <a:ln/>
-        </p:spPr>
-        <p:txBody>
-          <a:bodyPr wrap="square" lIns="0" tIns="0" rIns="0" bIns="0" rtlCol="0" anchor="ctr"/>
-          <a:lstStyle/>
-          <a:p>
-            <a:pPr algn="ctr" indent="0" marL="0">
-              <a:buNone/>
-            </a:pPr>
-            <a:r>
-              <a:rPr lang="en-US" sz="2400" b="1" dirty="0">
-                <a:solidFill>
-                  <a:srgbClr val="1E3A5F"/>
-                </a:solidFill>
-                <a:latin typeface="游ゴシック" pitchFamily="34" charset="0"/>
-                <a:ea typeface="游ゴシック" pitchFamily="34" charset="-122"/>
-                <a:cs typeface="游ゴシック" pitchFamily="34" charset="-120"/>
-              </a:rPr>
-              <a:t>5,000万円</a:t>
-            </a:r>
-            <a:endParaRPr lang="en-US" sz="2400" dirty="0"/>
+            <a:off x="914400" y="4846320"/>
+            <a:ext cx="10332720" cy="914400"/>
+          </a:xfrm>
+          <a:prstGeom prst="rect">
+            <a:avLst/>
+          </a:prstGeom>
+          <a:noFill/>
+          <a:ln/>
+        </p:spPr>
+        <p:txBody>
+          <a:bodyPr wrap="square" lIns="0" tIns="0" rIns="0" bIns="0" rtlCol="0" anchor="ctr"/>
+          <a:lstStyle/>
+          <a:p>
+            <a:pPr algn="l" indent="0" marL="0">
+              <a:buNone/>
+            </a:pPr>
+            <a:r>
+              <a:rPr lang="en-US" sz="1700" b="1" dirty="0">
+                <a:solidFill>
+                  <a:srgbClr val="F1DCCF"/>
+                </a:solidFill>
+                <a:latin typeface="游ゴシック" pitchFamily="34" charset="0"/>
+                <a:ea typeface="游ゴシック" pitchFamily="34" charset="-122"/>
+                <a:cs typeface="游ゴシック" pitchFamily="34" charset="-120"/>
+              </a:rPr>
+              <a:t>「ノートを売る」会社ではなく、「専門家たちの収益の結節点になる」会社。</a:t>
+            </a:r>
+            <a:endParaRPr lang="en-US" sz="1700" dirty="0"/>
           </a:p>
         </p:txBody>
       </p:sp>
       <p:sp>
         <p:nvSpPr>
           <p:cNvPr id="9" name="Text 7"/>
-          <p:cNvSpPr txBox="1"/>
-          <p:nvPr/>
-        </p:nvSpPr>
-        <p:spPr>
-          <a:xfrm>
-            <a:off x="777240" y="5440680"/>
-            <a:ext cx="2926080" cy="411480"/>
-          </a:xfrm>
-          <a:prstGeom prst="rect">
-            <a:avLst/>
-          </a:prstGeom>
-          <a:noFill/>
-          <a:ln/>
-        </p:spPr>
-        <p:txBody>
-          <a:bodyPr wrap="square" lIns="0" tIns="0" rIns="0" bIns="0" rtlCol="0" anchor="ctr"/>
-          <a:lstStyle/>
-          <a:p>
-            <a:pPr algn="ctr" indent="0" marL="0">
-              <a:buNone/>
-            </a:pPr>
-            <a:r>
-              <a:rPr lang="en-US" sz="1250" dirty="0">
-                <a:solidFill>
-                  <a:srgbClr val="6B6B6B"/>
-                </a:solidFill>
-                <a:latin typeface="游ゴシック" pitchFamily="34" charset="0"/>
-                <a:ea typeface="游ゴシック" pitchFamily="34" charset="-122"/>
-                <a:cs typeface="游ゴシック" pitchFamily="34" charset="-120"/>
-              </a:rPr>
-              <a:t>自社単体</a:t>
-            </a:r>
-            <a:endParaRPr lang="en-US" sz="1250" dirty="0"/>
-          </a:p>
-        </p:txBody>
-      </p:sp>
-      <p:sp>
-        <p:nvSpPr>
-          <p:cNvPr id="10" name="Text 8"/>
-          <p:cNvSpPr txBox="1"/>
-          <p:nvPr/>
-        </p:nvSpPr>
-        <p:spPr>
-          <a:xfrm>
-            <a:off x="3858768" y="4983480"/>
-            <a:ext cx="374904" cy="548640"/>
-          </a:xfrm>
-          <a:prstGeom prst="rect">
-            <a:avLst/>
-          </a:prstGeom>
-          <a:noFill/>
-          <a:ln/>
-        </p:spPr>
-        <p:txBody>
-          <a:bodyPr wrap="square" lIns="0" tIns="0" rIns="0" bIns="0" rtlCol="0" anchor="ctr"/>
-          <a:lstStyle/>
-          <a:p>
-            <a:pPr algn="ctr" indent="0" marL="0">
-              <a:buNone/>
-            </a:pPr>
-            <a:r>
-              <a:rPr lang="en-US" sz="2000" b="1" dirty="0">
-                <a:solidFill>
-                  <a:srgbClr val="C9603F"/>
-                </a:solidFill>
-                <a:latin typeface="游ゴシック" pitchFamily="34" charset="0"/>
-                <a:ea typeface="游ゴシック" pitchFamily="34" charset="-122"/>
-                <a:cs typeface="游ゴシック" pitchFamily="34" charset="-120"/>
-              </a:rPr>
-              <a:t>→</a:t>
-            </a:r>
-            <a:endParaRPr lang="en-US" sz="2000" dirty="0"/>
-          </a:p>
-        </p:txBody>
-      </p:sp>
-      <p:sp>
-        <p:nvSpPr>
-          <p:cNvPr id="11" name="Shape 9"/>
-          <p:cNvSpPr/>
-          <p:nvPr/>
-        </p:nvSpPr>
-        <p:spPr>
-          <a:xfrm>
-            <a:off x="4251960" y="4572000"/>
-            <a:ext cx="3200400" cy="1371600"/>
-          </a:xfrm>
-          <a:prstGeom prst="roundRect">
-            <a:avLst>
-              <a:gd name="adj" fmla="val 6667"/>
-            </a:avLst>
-          </a:prstGeom>
-          <a:solidFill>
-            <a:srgbClr val="F6F1EA"/>
-          </a:solidFill>
-          <a:ln/>
-          <a:effectLst>
-            <a:outerShdw sx="100000" sy="100000" kx="0" ky="0" algn="bl" rotWithShape="0" blurRad="101600" dist="38100" dir="5400000">
-              <a:srgbClr val="10233A">
-                <a:alpha val="18000"/>
-              </a:srgbClr>
-            </a:outerShdw>
-          </a:effectLst>
-        </p:spPr>
-      </p:sp>
-      <p:sp>
-        <p:nvSpPr>
-          <p:cNvPr id="12" name="Text 10"/>
-          <p:cNvSpPr txBox="1"/>
-          <p:nvPr/>
-        </p:nvSpPr>
-        <p:spPr>
-          <a:xfrm>
-            <a:off x="4389120" y="4754880"/>
-            <a:ext cx="2926080" cy="640080"/>
-          </a:xfrm>
-          <a:prstGeom prst="rect">
-            <a:avLst/>
-          </a:prstGeom>
-          <a:noFill/>
-          <a:ln/>
-        </p:spPr>
-        <p:txBody>
-          <a:bodyPr wrap="square" lIns="0" tIns="0" rIns="0" bIns="0" rtlCol="0" anchor="ctr"/>
-          <a:lstStyle/>
-          <a:p>
-            <a:pPr algn="ctr" indent="0" marL="0">
-              <a:buNone/>
-            </a:pPr>
-            <a:r>
-              <a:rPr lang="en-US" sz="2400" b="1" dirty="0">
-                <a:solidFill>
-                  <a:srgbClr val="1E3A5F"/>
-                </a:solidFill>
-                <a:latin typeface="游ゴシック" pitchFamily="34" charset="0"/>
-                <a:ea typeface="游ゴシック" pitchFamily="34" charset="-122"/>
-                <a:cs typeface="游ゴシック" pitchFamily="34" charset="-120"/>
-              </a:rPr>
-              <a:t>3億円規模</a:t>
-            </a:r>
-            <a:endParaRPr lang="en-US" sz="2400" dirty="0"/>
-          </a:p>
-        </p:txBody>
-      </p:sp>
-      <p:sp>
-        <p:nvSpPr>
-          <p:cNvPr id="13" name="Text 11"/>
-          <p:cNvSpPr txBox="1"/>
-          <p:nvPr/>
-        </p:nvSpPr>
-        <p:spPr>
-          <a:xfrm>
-            <a:off x="4389120" y="5440680"/>
-            <a:ext cx="2926080" cy="411480"/>
-          </a:xfrm>
-          <a:prstGeom prst="rect">
-            <a:avLst/>
-          </a:prstGeom>
-          <a:noFill/>
-          <a:ln/>
-        </p:spPr>
-        <p:txBody>
-          <a:bodyPr wrap="square" lIns="0" tIns="0" rIns="0" bIns="0" rtlCol="0" anchor="ctr"/>
-          <a:lstStyle/>
-          <a:p>
-            <a:pPr algn="ctr" indent="0" marL="0">
-              <a:buNone/>
-            </a:pPr>
-            <a:r>
-              <a:rPr lang="en-US" sz="1250" dirty="0">
-                <a:solidFill>
-                  <a:srgbClr val="6B6B6B"/>
-                </a:solidFill>
-                <a:latin typeface="游ゴシック" pitchFamily="34" charset="0"/>
-                <a:ea typeface="游ゴシック" pitchFamily="34" charset="-122"/>
-                <a:cs typeface="游ゴシック" pitchFamily="34" charset="-120"/>
-              </a:rPr>
-              <a:t>グループ全体</a:t>
-            </a:r>
-            <a:endParaRPr lang="en-US" sz="1250" dirty="0"/>
-          </a:p>
-        </p:txBody>
-      </p:sp>
-      <p:sp>
-        <p:nvSpPr>
-          <p:cNvPr id="14" name="Text 12"/>
-          <p:cNvSpPr txBox="1"/>
-          <p:nvPr/>
-        </p:nvSpPr>
-        <p:spPr>
-          <a:xfrm>
-            <a:off x="7470648" y="4983480"/>
-            <a:ext cx="374904" cy="548640"/>
-          </a:xfrm>
-          <a:prstGeom prst="rect">
-            <a:avLst/>
-          </a:prstGeom>
-          <a:noFill/>
-          <a:ln/>
-        </p:spPr>
-        <p:txBody>
-          <a:bodyPr wrap="square" lIns="0" tIns="0" rIns="0" bIns="0" rtlCol="0" anchor="ctr"/>
-          <a:lstStyle/>
-          <a:p>
-            <a:pPr algn="ctr" indent="0" marL="0">
-              <a:buNone/>
-            </a:pPr>
-            <a:r>
-              <a:rPr lang="en-US" sz="2000" b="1" dirty="0">
-                <a:solidFill>
-                  <a:srgbClr val="C9603F"/>
-                </a:solidFill>
-                <a:latin typeface="游ゴシック" pitchFamily="34" charset="0"/>
-                <a:ea typeface="游ゴシック" pitchFamily="34" charset="-122"/>
-                <a:cs typeface="游ゴシック" pitchFamily="34" charset="-120"/>
-              </a:rPr>
-              <a:t>→</a:t>
-            </a:r>
-            <a:endParaRPr lang="en-US" sz="2000" dirty="0"/>
-          </a:p>
-        </p:txBody>
-      </p:sp>
-      <p:sp>
-        <p:nvSpPr>
-          <p:cNvPr id="15" name="Shape 13"/>
-          <p:cNvSpPr/>
-          <p:nvPr/>
-        </p:nvSpPr>
-        <p:spPr>
-          <a:xfrm>
-            <a:off x="7863840" y="4572000"/>
-            <a:ext cx="3200400" cy="1371600"/>
-          </a:xfrm>
-          <a:prstGeom prst="roundRect">
-            <a:avLst>
-              <a:gd name="adj" fmla="val 6667"/>
-            </a:avLst>
-          </a:prstGeom>
-          <a:solidFill>
-            <a:srgbClr val="C9603F"/>
-          </a:solidFill>
-          <a:ln/>
-          <a:effectLst>
-            <a:outerShdw sx="100000" sy="100000" kx="0" ky="0" algn="bl" rotWithShape="0" blurRad="101600" dist="38100" dir="5400000">
-              <a:srgbClr val="10233A">
-                <a:alpha val="18000"/>
-              </a:srgbClr>
-            </a:outerShdw>
-          </a:effectLst>
-        </p:spPr>
-      </p:sp>
-      <p:sp>
-        <p:nvSpPr>
-          <p:cNvPr id="16" name="Text 14"/>
-          <p:cNvSpPr txBox="1"/>
-          <p:nvPr/>
-        </p:nvSpPr>
-        <p:spPr>
-          <a:xfrm>
-            <a:off x="8001000" y="4754880"/>
-            <a:ext cx="2926080" cy="640080"/>
-          </a:xfrm>
-          <a:prstGeom prst="rect">
-            <a:avLst/>
-          </a:prstGeom>
-          <a:noFill/>
-          <a:ln/>
-        </p:spPr>
-        <p:txBody>
-          <a:bodyPr wrap="square" lIns="0" tIns="0" rIns="0" bIns="0" rtlCol="0" anchor="ctr"/>
-          <a:lstStyle/>
-          <a:p>
-            <a:pPr algn="ctr" indent="0" marL="0">
-              <a:buNone/>
-            </a:pPr>
-            <a:r>
-              <a:rPr lang="en-US" sz="2400" b="1" dirty="0">
-                <a:solidFill>
-                  <a:srgbClr val="FFFFFF"/>
-                </a:solidFill>
-                <a:latin typeface="游ゴシック" pitchFamily="34" charset="0"/>
-                <a:ea typeface="游ゴシック" pitchFamily="34" charset="-122"/>
-                <a:cs typeface="游ゴシック" pitchFamily="34" charset="-120"/>
-              </a:rPr>
-              <a:t>約100億円</a:t>
-            </a:r>
-            <a:endParaRPr lang="en-US" sz="2400" dirty="0"/>
-          </a:p>
-        </p:txBody>
-      </p:sp>
-      <p:sp>
-        <p:nvSpPr>
-          <p:cNvPr id="17" name="Text 15"/>
-          <p:cNvSpPr txBox="1"/>
-          <p:nvPr/>
-        </p:nvSpPr>
-        <p:spPr>
-          <a:xfrm>
-            <a:off x="8001000" y="5440680"/>
-            <a:ext cx="2926080" cy="411480"/>
-          </a:xfrm>
-          <a:prstGeom prst="rect">
-            <a:avLst/>
-          </a:prstGeom>
-          <a:noFill/>
-          <a:ln/>
-        </p:spPr>
-        <p:txBody>
-          <a:bodyPr wrap="square" lIns="0" tIns="0" rIns="0" bIns="0" rtlCol="0" anchor="ctr"/>
-          <a:lstStyle/>
-          <a:p>
-            <a:pPr algn="ctr" indent="0" marL="0">
-              <a:buNone/>
-            </a:pPr>
-            <a:r>
-              <a:rPr lang="en-US" sz="1250" dirty="0">
-                <a:solidFill>
-                  <a:srgbClr val="F1DCCF"/>
-                </a:solidFill>
-                <a:latin typeface="游ゴシック" pitchFamily="34" charset="0"/>
-                <a:ea typeface="游ゴシック" pitchFamily="34" charset="-122"/>
-                <a:cs typeface="游ゴシック" pitchFamily="34" charset="-120"/>
-              </a:rPr>
-              <a:t>周辺経済圏（hub）</a:t>
-            </a:r>
-            <a:endParaRPr lang="en-US" sz="1250" dirty="0"/>
-          </a:p>
-        </p:txBody>
-      </p:sp>
-      <p:sp>
-        <p:nvSpPr>
-          <p:cNvPr id="18" name="Text 16"/>
           <p:cNvSpPr txBox="1"/>
           <p:nvPr/>
         </p:nvSpPr>

--- a/manuscript/革新ビジネスアワード2026_ファイナル_100億市場ストーリー整理.pptx
+++ b/manuscript/革新ビジネスアワード2026_ファイナル_100億市場ストーリー整理.pptx
@@ -21,9 +21,10 @@
     <p:sldId id="269" r:id="rId15"/>
     <p:sldId id="270" r:id="rId16"/>
     <p:sldId id="271" r:id="rId17"/>
+    <p:sldId id="272" r:id="rId18"/>
   </p:sldIdLst>
   <p:notesMasterIdLst>
-    <p:notesMasterId r:id="rId18"/>
+    <p:notesMasterId r:id="rId19"/>
   </p:notesMasterIdLst>
   <p:sldSz cx="12191695" cy="6858000"/>
   <p:notesSz cx="6858000" cy="12191695"/>
@@ -1416,6 +1417,94 @@
             <a:fld id="{F7021451-1387-4CA6-816F-3879F97B5CBC}" type="slidenum">
               <a:rPr lang="en-US"/>
               <a:t>16</a:t>
+            </a:fld>
+            <a:endParaRPr lang="en-US"/>
+          </a:p>
+        </p:txBody>
+      </p:sp>
+    </p:spTree>
+    <p:extLst>
+      <p:ext uri="{BB962C8B-B14F-4D97-AF65-F5344CB8AC3E}">
+        <p14:creationId xmlns:p14="http://schemas.microsoft.com/office/powerpoint/2010/main" val="1024086991"/>
+      </p:ext>
+    </p:extLst>
+  </p:cSld>
+  <p:clrMapOvr>
+    <a:masterClrMapping/>
+  </p:clrMapOvr>
+</p:notes>
+</file>
+
+<file path=ppt/notesSlides/notesSlide17.xml><?xml version="1.0" encoding="utf-8"?>
+<p:notes xmlns:a="http://schemas.openxmlformats.org/drawingml/2006/main" xmlns:r="http://schemas.openxmlformats.org/officeDocument/2006/relationships" xmlns:p="http://schemas.openxmlformats.org/presentationml/2006/main">
+  <p:cSld>
+    <p:spTree>
+      <p:nvGrpSpPr>
+        <p:cNvPr id="1" name=""/>
+        <p:cNvGrpSpPr/>
+        <p:nvPr/>
+      </p:nvGrpSpPr>
+      <p:grpSpPr>
+        <a:xfrm>
+          <a:off x="0" y="0"/>
+          <a:ext cx="0" cy="0"/>
+          <a:chOff x="0" y="0"/>
+          <a:chExt cx="0" cy="0"/>
+        </a:xfrm>
+      </p:grpSpPr>
+      <p:sp>
+        <p:nvSpPr>
+          <p:cNvPr id="2" name="Slide Image Placeholder 1"/>
+          <p:cNvSpPr>
+            <a:spLocks noGrp="1" noRot="1" noChangeAspect="1"/>
+          </p:cNvSpPr>
+          <p:nvPr>
+            <p:ph type="sldImg"/>
+          </p:nvPr>
+        </p:nvSpPr>
+        <p:spPr/>
+      </p:sp>
+      <p:sp>
+        <p:nvSpPr>
+          <p:cNvPr id="3" name="Notes Placeholder 2"/>
+          <p:cNvSpPr>
+            <a:spLocks noGrp="1"/>
+          </p:cNvSpPr>
+          <p:nvPr>
+            <p:ph type="body" idx="1"/>
+          </p:nvPr>
+        </p:nvSpPr>
+        <p:spPr/>
+        <p:txBody>
+          <a:bodyPr/>
+          <a:lstStyle/>
+          <a:p>
+            <a:r>
+              <a:rPr lang="en-US" dirty="0"/>
+              <a:t/>
+            </a:r>
+            <a:endParaRPr lang="en-US" dirty="0"/>
+          </a:p>
+        </p:txBody>
+      </p:sp>
+      <p:sp>
+        <p:nvSpPr>
+          <p:cNvPr id="4" name="Slide Number Placeholder 3"/>
+          <p:cNvSpPr>
+            <a:spLocks noGrp="1"/>
+          </p:cNvSpPr>
+          <p:nvPr>
+            <p:ph type="sldNum" sz="quarter" idx="10"/>
+          </p:nvPr>
+        </p:nvSpPr>
+        <p:spPr/>
+        <p:txBody>
+          <a:bodyPr/>
+          <a:lstStyle/>
+          <a:p>
+            <a:fld id="{F7021451-1387-4CA6-816F-3879F97B5CBC}" type="slidenum">
+              <a:rPr lang="en-US"/>
+              <a:t>17</a:t>
             </a:fld>
             <a:endParaRPr lang="en-US"/>
           </a:p>
@@ -2835,7 +2924,7 @@
                 <a:ea typeface="游ゴシック" pitchFamily="34" charset="-122"/>
                 <a:cs typeface="游ゴシック" pitchFamily="34" charset="-120"/>
               </a:rPr>
-              <a:t>02 / PROFITABILITY</a:t>
+              <a:t>01 / NOVELTY</a:t>
             </a:r>
             <a:endParaRPr lang="en-US" sz="1300" dirty="0"/>
           </a:p>
@@ -2874,7 +2963,7 @@
                 <a:ea typeface="游ゴシック" pitchFamily="34" charset="-122"/>
                 <a:cs typeface="游ゴシック" pitchFamily="34" charset="-120"/>
               </a:rPr>
-              <a:t>収益性 ― 自社の売上ではなく、創出した経済圏で語る</a:t>
+              <a:t>斬新性 ― 「hub」として経済圏を創るという発想</a:t>
             </a:r>
             <a:endParaRPr lang="en-US" sz="2700" dirty="0"/>
           </a:p>
@@ -2940,7 +3029,7 @@
                 <a:ea typeface="游ゴシック" pitchFamily="34" charset="-122"/>
                 <a:cs typeface="游ゴシック" pitchFamily="34" charset="-120"/>
               </a:rPr>
-              <a:t>収</a:t>
+              <a:t>斬</a:t>
             </a:r>
             <a:endParaRPr lang="en-US" sz="2880" dirty="0"/>
           </a:p>
@@ -2986,7 +3075,7 @@
                 <a:ea typeface="游ゴシック" pitchFamily="34" charset="-122"/>
                 <a:cs typeface="游ゴシック" pitchFamily="34" charset="-120"/>
               </a:rPr>
-              <a:t>自社単体の売上（約5,000万円）だけを見れば小さく映るが、hubとして周辺専門家にもたらした経済圏は約100億円</a:t>
+              <a:t>相続コンサルタントが自社の商品を売るのではなく、金融・不動産・士業など周辺専門家の収益の「結節点（hub）」になるという発想そのものが、他に類を見ない（素材①）</a:t>
             </a:r>
             <a:endParaRPr lang="en-US" sz="1500" dirty="0"/>
           </a:p>
@@ -3010,7 +3099,7 @@
                 <a:ea typeface="游ゴシック" pitchFamily="34" charset="-122"/>
                 <a:cs typeface="游ゴシック" pitchFamily="34" charset="-120"/>
               </a:rPr>
-              <a:t>信用金庫への新規資金導入 約7億円、法人バルクM&amp;A 2億円など、具体的な実例が裏付け（素材①）</a:t>
+              <a:t>厚生労働省が既に推進している公的な枠組み（ACP＝人生会議）を、自社の“フロントエンド”として活用するという発想の転換（素材②）</a:t>
             </a:r>
             <a:endParaRPr lang="en-US" sz="1500" dirty="0"/>
           </a:p>
@@ -3034,7 +3123,7 @@
                 <a:ea typeface="游ゴシック" pitchFamily="34" charset="-122"/>
                 <a:cs typeface="游ゴシック" pitchFamily="34" charset="-120"/>
               </a:rPr>
-              <a:t>「繋ぐグループ全体の売上」という表現は“事業間シナジー”の指標として使ってよいと事務局（加藤氏）からも確認済み</a:t>
+              <a:t>「財産ではなく、家族の抱える“隠れた課題”を見つけに行く」という視点を、育成カリキュラムとして体系化・教材化している（素材③）</a:t>
             </a:r>
             <a:endParaRPr lang="en-US" sz="1500" dirty="0"/>
           </a:p>
@@ -3048,25 +3137,18 @@
         </p:nvSpPr>
         <p:spPr>
           <a:xfrm>
-            <a:off x="640080" y="4572000"/>
-            <a:ext cx="3200400" cy="1371600"/>
+            <a:off x="640080" y="4846320"/>
+            <a:ext cx="10881360" cy="914400"/>
           </a:xfrm>
           <a:prstGeom prst="roundRect">
             <a:avLst>
-              <a:gd name="adj" fmla="val 6667"/>
+              <a:gd name="adj" fmla="val 8000"/>
             </a:avLst>
           </a:prstGeom>
           <a:solidFill>
-            <a:srgbClr val="F6F1EA"/>
+            <a:srgbClr val="1E3A5F"/>
           </a:solidFill>
           <a:ln/>
-          <a:effectLst>
-            <a:outerShdw sx="100000" sy="100000" kx="0" ky="0" algn="bl" rotWithShape="0" blurRad="101600" dist="38100" dir="5400000">
-              <a:srgbClr val="10233A">
-                <a:alpha val="18000"/>
-              </a:srgbClr>
-            </a:outerShdw>
-          </a:effectLst>
         </p:spPr>
       </p:sp>
       <p:sp>
@@ -3077,371 +3159,40 @@
         </p:nvSpPr>
         <p:spPr>
           <a:xfrm>
-            <a:off x="777240" y="4754880"/>
-            <a:ext cx="2926080" cy="640080"/>
-          </a:xfrm>
-          <a:prstGeom prst="rect">
-            <a:avLst/>
-          </a:prstGeom>
-          <a:noFill/>
-          <a:ln/>
-        </p:spPr>
-        <p:txBody>
-          <a:bodyPr wrap="square" lIns="0" tIns="0" rIns="0" bIns="0" rtlCol="0" anchor="ctr"/>
-          <a:lstStyle/>
-          <a:p>
-            <a:pPr algn="ctr" indent="0" marL="0">
-              <a:buNone/>
-            </a:pPr>
-            <a:r>
-              <a:rPr lang="en-US" sz="2400" b="1" dirty="0">
-                <a:solidFill>
-                  <a:srgbClr val="1E3A5F"/>
-                </a:solidFill>
-                <a:latin typeface="游ゴシック" pitchFamily="34" charset="0"/>
-                <a:ea typeface="游ゴシック" pitchFamily="34" charset="-122"/>
-                <a:cs typeface="游ゴシック" pitchFamily="34" charset="-120"/>
-              </a:rPr>
-              <a:t>5,000万円</a:t>
-            </a:r>
-            <a:endParaRPr lang="en-US" sz="2400" dirty="0"/>
+            <a:off x="914400" y="4846320"/>
+            <a:ext cx="10332720" cy="914400"/>
+          </a:xfrm>
+          <a:prstGeom prst="rect">
+            <a:avLst/>
+          </a:prstGeom>
+          <a:noFill/>
+          <a:ln/>
+        </p:spPr>
+        <p:txBody>
+          <a:bodyPr wrap="square" lIns="0" tIns="0" rIns="0" bIns="0" rtlCol="0" anchor="ctr"/>
+          <a:lstStyle/>
+          <a:p>
+            <a:pPr algn="l" indent="0" marL="0">
+              <a:buNone/>
+            </a:pPr>
+            <a:r>
+              <a:rPr lang="en-US" sz="1700" b="1" dirty="0">
+                <a:solidFill>
+                  <a:srgbClr val="F1DCCF"/>
+                </a:solidFill>
+                <a:latin typeface="游ゴシック" pitchFamily="34" charset="0"/>
+                <a:ea typeface="游ゴシック" pitchFamily="34" charset="-122"/>
+                <a:cs typeface="游ゴシック" pitchFamily="34" charset="-120"/>
+              </a:rPr>
+              <a:t>「ノートを売る」会社ではなく、「専門家たちの収益の結節点になる」会社。</a:t>
+            </a:r>
+            <a:endParaRPr lang="en-US" sz="1700" dirty="0"/>
           </a:p>
         </p:txBody>
       </p:sp>
       <p:sp>
         <p:nvSpPr>
           <p:cNvPr id="9" name="Text 7"/>
-          <p:cNvSpPr txBox="1"/>
-          <p:nvPr/>
-        </p:nvSpPr>
-        <p:spPr>
-          <a:xfrm>
-            <a:off x="777240" y="5440680"/>
-            <a:ext cx="2926080" cy="411480"/>
-          </a:xfrm>
-          <a:prstGeom prst="rect">
-            <a:avLst/>
-          </a:prstGeom>
-          <a:noFill/>
-          <a:ln/>
-        </p:spPr>
-        <p:txBody>
-          <a:bodyPr wrap="square" lIns="0" tIns="0" rIns="0" bIns="0" rtlCol="0" anchor="ctr"/>
-          <a:lstStyle/>
-          <a:p>
-            <a:pPr algn="ctr" indent="0" marL="0">
-              <a:buNone/>
-            </a:pPr>
-            <a:r>
-              <a:rPr lang="en-US" sz="1250" dirty="0">
-                <a:solidFill>
-                  <a:srgbClr val="6B6B6B"/>
-                </a:solidFill>
-                <a:latin typeface="游ゴシック" pitchFamily="34" charset="0"/>
-                <a:ea typeface="游ゴシック" pitchFamily="34" charset="-122"/>
-                <a:cs typeface="游ゴシック" pitchFamily="34" charset="-120"/>
-              </a:rPr>
-              <a:t>自社単体</a:t>
-            </a:r>
-            <a:endParaRPr lang="en-US" sz="1250" dirty="0"/>
-          </a:p>
-        </p:txBody>
-      </p:sp>
-      <p:sp>
-        <p:nvSpPr>
-          <p:cNvPr id="10" name="Text 8"/>
-          <p:cNvSpPr txBox="1"/>
-          <p:nvPr/>
-        </p:nvSpPr>
-        <p:spPr>
-          <a:xfrm>
-            <a:off x="3858768" y="4983480"/>
-            <a:ext cx="374904" cy="548640"/>
-          </a:xfrm>
-          <a:prstGeom prst="rect">
-            <a:avLst/>
-          </a:prstGeom>
-          <a:noFill/>
-          <a:ln/>
-        </p:spPr>
-        <p:txBody>
-          <a:bodyPr wrap="square" lIns="0" tIns="0" rIns="0" bIns="0" rtlCol="0" anchor="ctr"/>
-          <a:lstStyle/>
-          <a:p>
-            <a:pPr algn="ctr" indent="0" marL="0">
-              <a:buNone/>
-            </a:pPr>
-            <a:r>
-              <a:rPr lang="en-US" sz="2000" b="1" dirty="0">
-                <a:solidFill>
-                  <a:srgbClr val="C9603F"/>
-                </a:solidFill>
-                <a:latin typeface="游ゴシック" pitchFamily="34" charset="0"/>
-                <a:ea typeface="游ゴシック" pitchFamily="34" charset="-122"/>
-                <a:cs typeface="游ゴシック" pitchFamily="34" charset="-120"/>
-              </a:rPr>
-              <a:t>→</a:t>
-            </a:r>
-            <a:endParaRPr lang="en-US" sz="2000" dirty="0"/>
-          </a:p>
-        </p:txBody>
-      </p:sp>
-      <p:sp>
-        <p:nvSpPr>
-          <p:cNvPr id="11" name="Shape 9"/>
-          <p:cNvSpPr/>
-          <p:nvPr/>
-        </p:nvSpPr>
-        <p:spPr>
-          <a:xfrm>
-            <a:off x="4251960" y="4572000"/>
-            <a:ext cx="3200400" cy="1371600"/>
-          </a:xfrm>
-          <a:prstGeom prst="roundRect">
-            <a:avLst>
-              <a:gd name="adj" fmla="val 6667"/>
-            </a:avLst>
-          </a:prstGeom>
-          <a:solidFill>
-            <a:srgbClr val="F6F1EA"/>
-          </a:solidFill>
-          <a:ln/>
-          <a:effectLst>
-            <a:outerShdw sx="100000" sy="100000" kx="0" ky="0" algn="bl" rotWithShape="0" blurRad="101600" dist="38100" dir="5400000">
-              <a:srgbClr val="10233A">
-                <a:alpha val="18000"/>
-              </a:srgbClr>
-            </a:outerShdw>
-          </a:effectLst>
-        </p:spPr>
-      </p:sp>
-      <p:sp>
-        <p:nvSpPr>
-          <p:cNvPr id="12" name="Text 10"/>
-          <p:cNvSpPr txBox="1"/>
-          <p:nvPr/>
-        </p:nvSpPr>
-        <p:spPr>
-          <a:xfrm>
-            <a:off x="4389120" y="4754880"/>
-            <a:ext cx="2926080" cy="640080"/>
-          </a:xfrm>
-          <a:prstGeom prst="rect">
-            <a:avLst/>
-          </a:prstGeom>
-          <a:noFill/>
-          <a:ln/>
-        </p:spPr>
-        <p:txBody>
-          <a:bodyPr wrap="square" lIns="0" tIns="0" rIns="0" bIns="0" rtlCol="0" anchor="ctr"/>
-          <a:lstStyle/>
-          <a:p>
-            <a:pPr algn="ctr" indent="0" marL="0">
-              <a:buNone/>
-            </a:pPr>
-            <a:r>
-              <a:rPr lang="en-US" sz="2400" b="1" dirty="0">
-                <a:solidFill>
-                  <a:srgbClr val="1E3A5F"/>
-                </a:solidFill>
-                <a:latin typeface="游ゴシック" pitchFamily="34" charset="0"/>
-                <a:ea typeface="游ゴシック" pitchFamily="34" charset="-122"/>
-                <a:cs typeface="游ゴシック" pitchFamily="34" charset="-120"/>
-              </a:rPr>
-              <a:t>3億円規模</a:t>
-            </a:r>
-            <a:endParaRPr lang="en-US" sz="2400" dirty="0"/>
-          </a:p>
-        </p:txBody>
-      </p:sp>
-      <p:sp>
-        <p:nvSpPr>
-          <p:cNvPr id="13" name="Text 11"/>
-          <p:cNvSpPr txBox="1"/>
-          <p:nvPr/>
-        </p:nvSpPr>
-        <p:spPr>
-          <a:xfrm>
-            <a:off x="4389120" y="5440680"/>
-            <a:ext cx="2926080" cy="411480"/>
-          </a:xfrm>
-          <a:prstGeom prst="rect">
-            <a:avLst/>
-          </a:prstGeom>
-          <a:noFill/>
-          <a:ln/>
-        </p:spPr>
-        <p:txBody>
-          <a:bodyPr wrap="square" lIns="0" tIns="0" rIns="0" bIns="0" rtlCol="0" anchor="ctr"/>
-          <a:lstStyle/>
-          <a:p>
-            <a:pPr algn="ctr" indent="0" marL="0">
-              <a:buNone/>
-            </a:pPr>
-            <a:r>
-              <a:rPr lang="en-US" sz="1250" dirty="0">
-                <a:solidFill>
-                  <a:srgbClr val="6B6B6B"/>
-                </a:solidFill>
-                <a:latin typeface="游ゴシック" pitchFamily="34" charset="0"/>
-                <a:ea typeface="游ゴシック" pitchFamily="34" charset="-122"/>
-                <a:cs typeface="游ゴシック" pitchFamily="34" charset="-120"/>
-              </a:rPr>
-              <a:t>グループ全体</a:t>
-            </a:r>
-            <a:endParaRPr lang="en-US" sz="1250" dirty="0"/>
-          </a:p>
-        </p:txBody>
-      </p:sp>
-      <p:sp>
-        <p:nvSpPr>
-          <p:cNvPr id="14" name="Text 12"/>
-          <p:cNvSpPr txBox="1"/>
-          <p:nvPr/>
-        </p:nvSpPr>
-        <p:spPr>
-          <a:xfrm>
-            <a:off x="7470648" y="4983480"/>
-            <a:ext cx="374904" cy="548640"/>
-          </a:xfrm>
-          <a:prstGeom prst="rect">
-            <a:avLst/>
-          </a:prstGeom>
-          <a:noFill/>
-          <a:ln/>
-        </p:spPr>
-        <p:txBody>
-          <a:bodyPr wrap="square" lIns="0" tIns="0" rIns="0" bIns="0" rtlCol="0" anchor="ctr"/>
-          <a:lstStyle/>
-          <a:p>
-            <a:pPr algn="ctr" indent="0" marL="0">
-              <a:buNone/>
-            </a:pPr>
-            <a:r>
-              <a:rPr lang="en-US" sz="2000" b="1" dirty="0">
-                <a:solidFill>
-                  <a:srgbClr val="C9603F"/>
-                </a:solidFill>
-                <a:latin typeface="游ゴシック" pitchFamily="34" charset="0"/>
-                <a:ea typeface="游ゴシック" pitchFamily="34" charset="-122"/>
-                <a:cs typeface="游ゴシック" pitchFamily="34" charset="-120"/>
-              </a:rPr>
-              <a:t>→</a:t>
-            </a:r>
-            <a:endParaRPr lang="en-US" sz="2000" dirty="0"/>
-          </a:p>
-        </p:txBody>
-      </p:sp>
-      <p:sp>
-        <p:nvSpPr>
-          <p:cNvPr id="15" name="Shape 13"/>
-          <p:cNvSpPr/>
-          <p:nvPr/>
-        </p:nvSpPr>
-        <p:spPr>
-          <a:xfrm>
-            <a:off x="7863840" y="4572000"/>
-            <a:ext cx="3200400" cy="1371600"/>
-          </a:xfrm>
-          <a:prstGeom prst="roundRect">
-            <a:avLst>
-              <a:gd name="adj" fmla="val 6667"/>
-            </a:avLst>
-          </a:prstGeom>
-          <a:solidFill>
-            <a:srgbClr val="C9603F"/>
-          </a:solidFill>
-          <a:ln/>
-          <a:effectLst>
-            <a:outerShdw sx="100000" sy="100000" kx="0" ky="0" algn="bl" rotWithShape="0" blurRad="101600" dist="38100" dir="5400000">
-              <a:srgbClr val="10233A">
-                <a:alpha val="18000"/>
-              </a:srgbClr>
-            </a:outerShdw>
-          </a:effectLst>
-        </p:spPr>
-      </p:sp>
-      <p:sp>
-        <p:nvSpPr>
-          <p:cNvPr id="16" name="Text 14"/>
-          <p:cNvSpPr txBox="1"/>
-          <p:nvPr/>
-        </p:nvSpPr>
-        <p:spPr>
-          <a:xfrm>
-            <a:off x="8001000" y="4754880"/>
-            <a:ext cx="2926080" cy="640080"/>
-          </a:xfrm>
-          <a:prstGeom prst="rect">
-            <a:avLst/>
-          </a:prstGeom>
-          <a:noFill/>
-          <a:ln/>
-        </p:spPr>
-        <p:txBody>
-          <a:bodyPr wrap="square" lIns="0" tIns="0" rIns="0" bIns="0" rtlCol="0" anchor="ctr"/>
-          <a:lstStyle/>
-          <a:p>
-            <a:pPr algn="ctr" indent="0" marL="0">
-              <a:buNone/>
-            </a:pPr>
-            <a:r>
-              <a:rPr lang="en-US" sz="2400" b="1" dirty="0">
-                <a:solidFill>
-                  <a:srgbClr val="FFFFFF"/>
-                </a:solidFill>
-                <a:latin typeface="游ゴシック" pitchFamily="34" charset="0"/>
-                <a:ea typeface="游ゴシック" pitchFamily="34" charset="-122"/>
-                <a:cs typeface="游ゴシック" pitchFamily="34" charset="-120"/>
-              </a:rPr>
-              <a:t>約100億円</a:t>
-            </a:r>
-            <a:endParaRPr lang="en-US" sz="2400" dirty="0"/>
-          </a:p>
-        </p:txBody>
-      </p:sp>
-      <p:sp>
-        <p:nvSpPr>
-          <p:cNvPr id="17" name="Text 15"/>
-          <p:cNvSpPr txBox="1"/>
-          <p:nvPr/>
-        </p:nvSpPr>
-        <p:spPr>
-          <a:xfrm>
-            <a:off x="8001000" y="5440680"/>
-            <a:ext cx="2926080" cy="411480"/>
-          </a:xfrm>
-          <a:prstGeom prst="rect">
-            <a:avLst/>
-          </a:prstGeom>
-          <a:noFill/>
-          <a:ln/>
-        </p:spPr>
-        <p:txBody>
-          <a:bodyPr wrap="square" lIns="0" tIns="0" rIns="0" bIns="0" rtlCol="0" anchor="ctr"/>
-          <a:lstStyle/>
-          <a:p>
-            <a:pPr algn="ctr" indent="0" marL="0">
-              <a:buNone/>
-            </a:pPr>
-            <a:r>
-              <a:rPr lang="en-US" sz="1250" dirty="0">
-                <a:solidFill>
-                  <a:srgbClr val="F1DCCF"/>
-                </a:solidFill>
-                <a:latin typeface="游ゴシック" pitchFamily="34" charset="0"/>
-                <a:ea typeface="游ゴシック" pitchFamily="34" charset="-122"/>
-                <a:cs typeface="游ゴシック" pitchFamily="34" charset="-120"/>
-              </a:rPr>
-              <a:t>周辺経済圏（hub）</a:t>
-            </a:r>
-            <a:endParaRPr lang="en-US" sz="1250" dirty="0"/>
-          </a:p>
-        </p:txBody>
-      </p:sp>
-      <p:sp>
-        <p:nvSpPr>
-          <p:cNvPr id="18" name="Text 16"/>
           <p:cNvSpPr txBox="1"/>
           <p:nvPr/>
         </p:nvSpPr>
@@ -3543,7 +3294,7 @@
                 <a:ea typeface="游ゴシック" pitchFamily="34" charset="-122"/>
                 <a:cs typeface="游ゴシック" pitchFamily="34" charset="-120"/>
               </a:rPr>
-              <a:t>03 / GROWTH</a:t>
+              <a:t>02 / PROFITABILITY</a:t>
             </a:r>
             <a:endParaRPr lang="en-US" sz="1300" dirty="0"/>
           </a:p>
@@ -3582,7 +3333,7 @@
                 <a:ea typeface="游ゴシック" pitchFamily="34" charset="-122"/>
                 <a:cs typeface="游ゴシック" pitchFamily="34" charset="-120"/>
               </a:rPr>
-              <a:t>成長性 ― 二つのファネルが、経済圏をさらに広げる</a:t>
+              <a:t>収益性 ― 自社の売上ではなく、創出した経済圏で語る</a:t>
             </a:r>
             <a:endParaRPr lang="en-US" sz="2700" dirty="0"/>
           </a:p>
@@ -3648,7 +3399,7 @@
                 <a:ea typeface="游ゴシック" pitchFamily="34" charset="-122"/>
                 <a:cs typeface="游ゴシック" pitchFamily="34" charset="-120"/>
               </a:rPr>
-              <a:t>成</a:t>
+              <a:t>収</a:t>
             </a:r>
             <a:endParaRPr lang="en-US" sz="2880" dirty="0"/>
           </a:p>
@@ -3694,7 +3445,7 @@
                 <a:ea typeface="游ゴシック" pitchFamily="34" charset="-122"/>
                 <a:cs typeface="游ゴシック" pitchFamily="34" charset="-120"/>
               </a:rPr>
-              <a:t>顧客ファネル：ACP（人生会議）をフロントに据え、相続対策に着手する母数を構造的に拡大する仕組み（素材②）</a:t>
+              <a:t>自社単体の売上（約5,000万円）だけを見れば小さく映るが、hubとして周辺専門家にもたらした経済圏は約100億円</a:t>
             </a:r>
             <a:endParaRPr lang="en-US" sz="1500" dirty="0"/>
           </a:p>
@@ -3718,7 +3469,7 @@
                 <a:ea typeface="游ゴシック" pitchFamily="34" charset="-122"/>
                 <a:cs typeface="游ゴシック" pitchFamily="34" charset="-120"/>
               </a:rPr>
-              <a:t>人材ファネル：資格講座の卒業生が「講師デビュー」し、自ら次の集客・紹介導線を生み出す自己増殖構造（素材③）</a:t>
+              <a:t>信用金庫への新規資金導入 約7億円、法人バルクM&amp;A 2億円など、具体的な実例が裏付け（素材①）</a:t>
             </a:r>
             <a:endParaRPr lang="en-US" sz="1500" dirty="0"/>
           </a:p>
@@ -3742,7 +3493,7 @@
                 <a:ea typeface="游ゴシック" pitchFamily="34" charset="-122"/>
                 <a:cs typeface="游ゴシック" pitchFamily="34" charset="-120"/>
               </a:rPr>
-              <a:t>二つのファネルが重なり合うことで、約100億円の経済圏をさらに拡大し、3年後FC100事業所という成長サイクルへつながる</a:t>
+              <a:t>「繋ぐグループ全体の売上」という表現は“事業間シナジー”の指標として使ってよいと事務局（加藤氏）からも確認済み</a:t>
             </a:r>
             <a:endParaRPr lang="en-US" sz="1500" dirty="0"/>
           </a:p>
@@ -3756,8 +3507,8 @@
         </p:nvSpPr>
         <p:spPr>
           <a:xfrm>
-            <a:off x="640080" y="4754880"/>
-            <a:ext cx="3383280" cy="1371600"/>
+            <a:off x="640080" y="4572000"/>
+            <a:ext cx="3200400" cy="1371600"/>
           </a:xfrm>
           <a:prstGeom prst="roundRect">
             <a:avLst>
@@ -3785,7 +3536,46 @@
         </p:nvSpPr>
         <p:spPr>
           <a:xfrm>
-            <a:off x="868680" y="4956048"/>
+            <a:off x="777240" y="4754880"/>
+            <a:ext cx="2926080" cy="640080"/>
+          </a:xfrm>
+          <a:prstGeom prst="rect">
+            <a:avLst/>
+          </a:prstGeom>
+          <a:noFill/>
+          <a:ln/>
+        </p:spPr>
+        <p:txBody>
+          <a:bodyPr wrap="square" lIns="0" tIns="0" rIns="0" bIns="0" rtlCol="0" anchor="ctr"/>
+          <a:lstStyle/>
+          <a:p>
+            <a:pPr algn="ctr" indent="0" marL="0">
+              <a:buNone/>
+            </a:pPr>
+            <a:r>
+              <a:rPr lang="en-US" sz="2400" b="1" dirty="0">
+                <a:solidFill>
+                  <a:srgbClr val="1E3A5F"/>
+                </a:solidFill>
+                <a:latin typeface="游ゴシック" pitchFamily="34" charset="0"/>
+                <a:ea typeface="游ゴシック" pitchFamily="34" charset="-122"/>
+                <a:cs typeface="游ゴシック" pitchFamily="34" charset="-120"/>
+              </a:rPr>
+              <a:t>5,000万円</a:t>
+            </a:r>
+            <a:endParaRPr lang="en-US" sz="2400" dirty="0"/>
+          </a:p>
+        </p:txBody>
+      </p:sp>
+      <p:sp>
+        <p:nvSpPr>
+          <p:cNvPr id="9" name="Text 7"/>
+          <p:cNvSpPr txBox="1"/>
+          <p:nvPr/>
+        </p:nvSpPr>
+        <p:spPr>
+          <a:xfrm>
+            <a:off x="777240" y="5440680"/>
             <a:ext cx="2926080" cy="411480"/>
           </a:xfrm>
           <a:prstGeom prst="rect">
@@ -3798,61 +3588,19 @@
           <a:bodyPr wrap="square" lIns="0" tIns="0" rIns="0" bIns="0" rtlCol="0" anchor="ctr"/>
           <a:lstStyle/>
           <a:p>
-            <a:pPr indent="0" marL="0">
-              <a:buNone/>
-            </a:pPr>
-            <a:r>
-              <a:rPr lang="en-US" sz="1600" b="1" dirty="0">
-                <a:solidFill>
-                  <a:srgbClr val="1E3A5F"/>
-                </a:solidFill>
-                <a:latin typeface="游ゴシック" pitchFamily="34" charset="0"/>
-                <a:ea typeface="游ゴシック" pitchFamily="34" charset="-122"/>
-                <a:cs typeface="游ゴシック" pitchFamily="34" charset="-120"/>
-              </a:rPr>
-              <a:t>顧客ファネル</a:t>
-            </a:r>
-            <a:endParaRPr lang="en-US" sz="1600" dirty="0"/>
-          </a:p>
-        </p:txBody>
-      </p:sp>
-      <p:sp>
-        <p:nvSpPr>
-          <p:cNvPr id="9" name="Text 7"/>
-          <p:cNvSpPr txBox="1"/>
-          <p:nvPr/>
-        </p:nvSpPr>
-        <p:spPr>
-          <a:xfrm>
-            <a:off x="868680" y="5413248"/>
-            <a:ext cx="2926080" cy="594360"/>
-          </a:xfrm>
-          <a:prstGeom prst="rect">
-            <a:avLst/>
-          </a:prstGeom>
-          <a:noFill/>
-          <a:ln/>
-        </p:spPr>
-        <p:txBody>
-          <a:bodyPr wrap="square" lIns="0" tIns="0" rIns="0" bIns="0" rtlCol="0" anchor="t"/>
-          <a:lstStyle/>
-          <a:p>
-            <a:pPr indent="0" marL="0">
-              <a:lnSpc>
-                <a:spcPct val="125000"/>
-              </a:lnSpc>
+            <a:pPr algn="ctr" indent="0" marL="0">
               <a:buNone/>
             </a:pPr>
             <a:r>
               <a:rPr lang="en-US" sz="1250" dirty="0">
                 <a:solidFill>
-                  <a:srgbClr val="3A3A3A"/>
-                </a:solidFill>
-                <a:latin typeface="游ゴシック" pitchFamily="34" charset="0"/>
-                <a:ea typeface="游ゴシック" pitchFamily="34" charset="-122"/>
-                <a:cs typeface="游ゴシック" pitchFamily="34" charset="-120"/>
-              </a:rPr>
-              <a:t>ACP（人生会議）が入口</a:t>
+                  <a:srgbClr val="6B6B6B"/>
+                </a:solidFill>
+                <a:latin typeface="游ゴシック" pitchFamily="34" charset="0"/>
+                <a:ea typeface="游ゴシック" pitchFamily="34" charset="-122"/>
+                <a:cs typeface="游ゴシック" pitchFamily="34" charset="-120"/>
+              </a:rPr>
+              <a:t>自社単体</a:t>
             </a:r>
             <a:endParaRPr lang="en-US" sz="1250" dirty="0"/>
           </a:p>
@@ -3860,14 +3608,53 @@
       </p:sp>
       <p:sp>
         <p:nvSpPr>
-          <p:cNvPr id="10" name="Shape 8"/>
+          <p:cNvPr id="10" name="Text 8"/>
+          <p:cNvSpPr txBox="1"/>
+          <p:nvPr/>
+        </p:nvSpPr>
+        <p:spPr>
+          <a:xfrm>
+            <a:off x="3858768" y="4983480"/>
+            <a:ext cx="374904" cy="548640"/>
+          </a:xfrm>
+          <a:prstGeom prst="rect">
+            <a:avLst/>
+          </a:prstGeom>
+          <a:noFill/>
+          <a:ln/>
+        </p:spPr>
+        <p:txBody>
+          <a:bodyPr wrap="square" lIns="0" tIns="0" rIns="0" bIns="0" rtlCol="0" anchor="ctr"/>
+          <a:lstStyle/>
+          <a:p>
+            <a:pPr algn="ctr" indent="0" marL="0">
+              <a:buNone/>
+            </a:pPr>
+            <a:r>
+              <a:rPr lang="en-US" sz="2000" b="1" dirty="0">
+                <a:solidFill>
+                  <a:srgbClr val="C9603F"/>
+                </a:solidFill>
+                <a:latin typeface="游ゴシック" pitchFamily="34" charset="0"/>
+                <a:ea typeface="游ゴシック" pitchFamily="34" charset="-122"/>
+                <a:cs typeface="游ゴシック" pitchFamily="34" charset="-120"/>
+              </a:rPr>
+              <a:t>→</a:t>
+            </a:r>
+            <a:endParaRPr lang="en-US" sz="2000" dirty="0"/>
+          </a:p>
+        </p:txBody>
+      </p:sp>
+      <p:sp>
+        <p:nvSpPr>
+          <p:cNvPr id="11" name="Shape 9"/>
           <p:cNvSpPr/>
           <p:nvPr/>
         </p:nvSpPr>
         <p:spPr>
           <a:xfrm>
-            <a:off x="4297680" y="4754880"/>
-            <a:ext cx="3383280" cy="1371600"/>
+            <a:off x="4251960" y="4572000"/>
+            <a:ext cx="3200400" cy="1371600"/>
           </a:xfrm>
           <a:prstGeom prst="roundRect">
             <a:avLst>
@@ -3889,13 +3676,52 @@
       </p:sp>
       <p:sp>
         <p:nvSpPr>
-          <p:cNvPr id="11" name="Text 9"/>
-          <p:cNvSpPr txBox="1"/>
-          <p:nvPr/>
-        </p:nvSpPr>
-        <p:spPr>
-          <a:xfrm>
-            <a:off x="4526280" y="4956048"/>
+          <p:cNvPr id="12" name="Text 10"/>
+          <p:cNvSpPr txBox="1"/>
+          <p:nvPr/>
+        </p:nvSpPr>
+        <p:spPr>
+          <a:xfrm>
+            <a:off x="4389120" y="4754880"/>
+            <a:ext cx="2926080" cy="640080"/>
+          </a:xfrm>
+          <a:prstGeom prst="rect">
+            <a:avLst/>
+          </a:prstGeom>
+          <a:noFill/>
+          <a:ln/>
+        </p:spPr>
+        <p:txBody>
+          <a:bodyPr wrap="square" lIns="0" tIns="0" rIns="0" bIns="0" rtlCol="0" anchor="ctr"/>
+          <a:lstStyle/>
+          <a:p>
+            <a:pPr algn="ctr" indent="0" marL="0">
+              <a:buNone/>
+            </a:pPr>
+            <a:r>
+              <a:rPr lang="en-US" sz="2400" b="1" dirty="0">
+                <a:solidFill>
+                  <a:srgbClr val="1E3A5F"/>
+                </a:solidFill>
+                <a:latin typeface="游ゴシック" pitchFamily="34" charset="0"/>
+                <a:ea typeface="游ゴシック" pitchFamily="34" charset="-122"/>
+                <a:cs typeface="游ゴシック" pitchFamily="34" charset="-120"/>
+              </a:rPr>
+              <a:t>3億円規模</a:t>
+            </a:r>
+            <a:endParaRPr lang="en-US" sz="2400" dirty="0"/>
+          </a:p>
+        </p:txBody>
+      </p:sp>
+      <p:sp>
+        <p:nvSpPr>
+          <p:cNvPr id="13" name="Text 11"/>
+          <p:cNvSpPr txBox="1"/>
+          <p:nvPr/>
+        </p:nvSpPr>
+        <p:spPr>
+          <a:xfrm>
+            <a:off x="4389120" y="5440680"/>
             <a:ext cx="2926080" cy="411480"/>
           </a:xfrm>
           <a:prstGeom prst="rect">
@@ -3908,61 +3734,19 @@
           <a:bodyPr wrap="square" lIns="0" tIns="0" rIns="0" bIns="0" rtlCol="0" anchor="ctr"/>
           <a:lstStyle/>
           <a:p>
-            <a:pPr indent="0" marL="0">
-              <a:buNone/>
-            </a:pPr>
-            <a:r>
-              <a:rPr lang="en-US" sz="1600" b="1" dirty="0">
-                <a:solidFill>
-                  <a:srgbClr val="1E3A5F"/>
-                </a:solidFill>
-                <a:latin typeface="游ゴシック" pitchFamily="34" charset="0"/>
-                <a:ea typeface="游ゴシック" pitchFamily="34" charset="-122"/>
-                <a:cs typeface="游ゴシック" pitchFamily="34" charset="-120"/>
-              </a:rPr>
-              <a:t>人材ファネル</a:t>
-            </a:r>
-            <a:endParaRPr lang="en-US" sz="1600" dirty="0"/>
-          </a:p>
-        </p:txBody>
-      </p:sp>
-      <p:sp>
-        <p:nvSpPr>
-          <p:cNvPr id="12" name="Text 10"/>
-          <p:cNvSpPr txBox="1"/>
-          <p:nvPr/>
-        </p:nvSpPr>
-        <p:spPr>
-          <a:xfrm>
-            <a:off x="4526280" y="5413248"/>
-            <a:ext cx="2926080" cy="594360"/>
-          </a:xfrm>
-          <a:prstGeom prst="rect">
-            <a:avLst/>
-          </a:prstGeom>
-          <a:noFill/>
-          <a:ln/>
-        </p:spPr>
-        <p:txBody>
-          <a:bodyPr wrap="square" lIns="0" tIns="0" rIns="0" bIns="0" rtlCol="0" anchor="t"/>
-          <a:lstStyle/>
-          <a:p>
-            <a:pPr indent="0" marL="0">
-              <a:lnSpc>
-                <a:spcPct val="125000"/>
-              </a:lnSpc>
+            <a:pPr algn="ctr" indent="0" marL="0">
               <a:buNone/>
             </a:pPr>
             <a:r>
               <a:rPr lang="en-US" sz="1250" dirty="0">
                 <a:solidFill>
-                  <a:srgbClr val="3A3A3A"/>
-                </a:solidFill>
-                <a:latin typeface="游ゴシック" pitchFamily="34" charset="0"/>
-                <a:ea typeface="游ゴシック" pitchFamily="34" charset="-122"/>
-                <a:cs typeface="游ゴシック" pitchFamily="34" charset="-120"/>
-              </a:rPr>
-              <a:t>講師デビューが入口</a:t>
+                  <a:srgbClr val="6B6B6B"/>
+                </a:solidFill>
+                <a:latin typeface="游ゴシック" pitchFamily="34" charset="0"/>
+                <a:ea typeface="游ゴシック" pitchFamily="34" charset="-122"/>
+                <a:cs typeface="游ゴシック" pitchFamily="34" charset="-120"/>
+              </a:rPr>
+              <a:t>グループ全体</a:t>
             </a:r>
             <a:endParaRPr lang="en-US" sz="1250" dirty="0"/>
           </a:p>
@@ -3970,14 +3754,14 @@
       </p:sp>
       <p:sp>
         <p:nvSpPr>
-          <p:cNvPr id="13" name="Text 11"/>
-          <p:cNvSpPr txBox="1"/>
-          <p:nvPr/>
-        </p:nvSpPr>
-        <p:spPr>
-          <a:xfrm>
-            <a:off x="4023360" y="5074920"/>
-            <a:ext cx="274320" cy="731520"/>
+          <p:cNvPr id="14" name="Text 12"/>
+          <p:cNvSpPr txBox="1"/>
+          <p:nvPr/>
+        </p:nvSpPr>
+        <p:spPr>
+          <a:xfrm>
+            <a:off x="7470648" y="4983480"/>
+            <a:ext cx="374904" cy="548640"/>
           </a:xfrm>
           <a:prstGeom prst="rect">
             <a:avLst/>
@@ -4001,48 +3785,9 @@
                 <a:ea typeface="游ゴシック" pitchFamily="34" charset="-122"/>
                 <a:cs typeface="游ゴシック" pitchFamily="34" charset="-120"/>
               </a:rPr>
-              <a:t>＋</a:t>
+              <a:t>→</a:t>
             </a:r>
             <a:endParaRPr lang="en-US" sz="2000" dirty="0"/>
-          </a:p>
-        </p:txBody>
-      </p:sp>
-      <p:sp>
-        <p:nvSpPr>
-          <p:cNvPr id="14" name="Text 12"/>
-          <p:cNvSpPr txBox="1"/>
-          <p:nvPr/>
-        </p:nvSpPr>
-        <p:spPr>
-          <a:xfrm>
-            <a:off x="7680960" y="5074920"/>
-            <a:ext cx="548640" cy="731520"/>
-          </a:xfrm>
-          <a:prstGeom prst="rect">
-            <a:avLst/>
-          </a:prstGeom>
-          <a:noFill/>
-          <a:ln/>
-        </p:spPr>
-        <p:txBody>
-          <a:bodyPr wrap="square" lIns="0" tIns="0" rIns="0" bIns="0" rtlCol="0" anchor="ctr"/>
-          <a:lstStyle/>
-          <a:p>
-            <a:pPr algn="ctr" indent="0" marL="0">
-              <a:buNone/>
-            </a:pPr>
-            <a:r>
-              <a:rPr lang="en-US" sz="2400" b="1" dirty="0">
-                <a:solidFill>
-                  <a:srgbClr val="C9603F"/>
-                </a:solidFill>
-                <a:latin typeface="游ゴシック" pitchFamily="34" charset="0"/>
-                <a:ea typeface="游ゴシック" pitchFamily="34" charset="-122"/>
-                <a:cs typeface="游ゴシック" pitchFamily="34" charset="-120"/>
-              </a:rPr>
-              <a:t>→</a:t>
-            </a:r>
-            <a:endParaRPr lang="en-US" sz="2400" dirty="0"/>
           </a:p>
         </p:txBody>
       </p:sp>
@@ -4054,8 +3799,8 @@
         </p:nvSpPr>
         <p:spPr>
           <a:xfrm>
-            <a:off x="8229600" y="4754880"/>
-            <a:ext cx="3322015" cy="1371600"/>
+            <a:off x="7863840" y="4572000"/>
+            <a:ext cx="3200400" cy="1371600"/>
           </a:xfrm>
           <a:prstGeom prst="roundRect">
             <a:avLst>
@@ -4083,24 +3828,24 @@
         </p:nvSpPr>
         <p:spPr>
           <a:xfrm>
-            <a:off x="8458200" y="4956048"/>
-            <a:ext cx="3093415" cy="411480"/>
-          </a:xfrm>
-          <a:prstGeom prst="rect">
-            <a:avLst/>
-          </a:prstGeom>
-          <a:noFill/>
-          <a:ln/>
-        </p:spPr>
-        <p:txBody>
-          <a:bodyPr wrap="square" lIns="0" tIns="0" rIns="0" bIns="0" rtlCol="0" anchor="ctr"/>
-          <a:lstStyle/>
-          <a:p>
-            <a:pPr indent="0" marL="0">
-              <a:buNone/>
-            </a:pPr>
-            <a:r>
-              <a:rPr lang="en-US" sz="1550" b="1" dirty="0">
+            <a:off x="8001000" y="4754880"/>
+            <a:ext cx="2926080" cy="640080"/>
+          </a:xfrm>
+          <a:prstGeom prst="rect">
+            <a:avLst/>
+          </a:prstGeom>
+          <a:noFill/>
+          <a:ln/>
+        </p:spPr>
+        <p:txBody>
+          <a:bodyPr wrap="square" lIns="0" tIns="0" rIns="0" bIns="0" rtlCol="0" anchor="ctr"/>
+          <a:lstStyle/>
+          <a:p>
+            <a:pPr algn="ctr" indent="0" marL="0">
+              <a:buNone/>
+            </a:pPr>
+            <a:r>
+              <a:rPr lang="en-US" sz="2400" b="1" dirty="0">
                 <a:solidFill>
                   <a:srgbClr val="FFFFFF"/>
                 </a:solidFill>
@@ -4108,9 +3853,9 @@
                 <a:ea typeface="游ゴシック" pitchFamily="34" charset="-122"/>
                 <a:cs typeface="游ゴシック" pitchFamily="34" charset="-120"/>
               </a:rPr>
-              <a:t>経済圏100億円のさらなる拡大</a:t>
-            </a:r>
-            <a:endParaRPr lang="en-US" sz="1550" dirty="0"/>
+              <a:t>約100億円</a:t>
+            </a:r>
+            <a:endParaRPr lang="en-US" sz="2400" dirty="0"/>
           </a:p>
         </p:txBody>
       </p:sp>
@@ -4122,24 +3867,24 @@
         </p:nvSpPr>
         <p:spPr>
           <a:xfrm>
-            <a:off x="8458200" y="5413248"/>
-            <a:ext cx="3093415" cy="548640"/>
-          </a:xfrm>
-          <a:prstGeom prst="rect">
-            <a:avLst/>
-          </a:prstGeom>
-          <a:noFill/>
-          <a:ln/>
-        </p:spPr>
-        <p:txBody>
-          <a:bodyPr wrap="square" lIns="0" tIns="0" rIns="0" bIns="0" rtlCol="0" anchor="t"/>
-          <a:lstStyle/>
-          <a:p>
-            <a:pPr indent="0" marL="0">
-              <a:buNone/>
-            </a:pPr>
-            <a:r>
-              <a:rPr lang="en-US" sz="1300" dirty="0">
+            <a:off x="8001000" y="5440680"/>
+            <a:ext cx="2926080" cy="411480"/>
+          </a:xfrm>
+          <a:prstGeom prst="rect">
+            <a:avLst/>
+          </a:prstGeom>
+          <a:noFill/>
+          <a:ln/>
+        </p:spPr>
+        <p:txBody>
+          <a:bodyPr wrap="square" lIns="0" tIns="0" rIns="0" bIns="0" rtlCol="0" anchor="ctr"/>
+          <a:lstStyle/>
+          <a:p>
+            <a:pPr algn="ctr" indent="0" marL="0">
+              <a:buNone/>
+            </a:pPr>
+            <a:r>
+              <a:rPr lang="en-US" sz="1250" dirty="0">
                 <a:solidFill>
                   <a:srgbClr val="F1DCCF"/>
                 </a:solidFill>
@@ -4147,9 +3892,9 @@
                 <a:ea typeface="游ゴシック" pitchFamily="34" charset="-122"/>
                 <a:cs typeface="游ゴシック" pitchFamily="34" charset="-120"/>
               </a:rPr>
-              <a:t>→ 3年後 FC100事業所</a:t>
-            </a:r>
-            <a:endParaRPr lang="en-US" sz="1300" dirty="0"/>
+              <a:t>周辺経済圏（hub）</a:t>
+            </a:r>
+            <a:endParaRPr lang="en-US" sz="1250" dirty="0"/>
           </a:p>
         </p:txBody>
       </p:sp>
@@ -4257,7 +4002,7 @@
                 <a:ea typeface="游ゴシック" pitchFamily="34" charset="-122"/>
                 <a:cs typeface="游ゴシック" pitchFamily="34" charset="-120"/>
               </a:rPr>
-              <a:t>BEYOND THE AWARD</a:t>
+              <a:t>03 / GROWTH</a:t>
             </a:r>
             <a:endParaRPr lang="en-US" sz="1300" dirty="0"/>
           </a:p>
@@ -4296,7 +4041,7 @@
                 <a:ea typeface="游ゴシック" pitchFamily="34" charset="-122"/>
                 <a:cs typeface="游ゴシック" pitchFamily="34" charset="-120"/>
               </a:rPr>
-              <a:t>展望 ― 教育コンテンツ事業としての可能性</a:t>
+              <a:t>成長性 ― 二つのファネルが、経済圏をさらに広げる</a:t>
             </a:r>
             <a:endParaRPr lang="en-US" sz="2700" dirty="0"/>
           </a:p>
@@ -4304,14 +4049,80 @@
       </p:sp>
       <p:sp>
         <p:nvSpPr>
-          <p:cNvPr id="4" name="Text 2"/>
+          <p:cNvPr id="4" name="Shape 2"/>
+          <p:cNvSpPr/>
+          <p:nvPr/>
+        </p:nvSpPr>
+        <p:spPr>
+          <a:xfrm>
+            <a:off x="10607040" y="502920"/>
+            <a:ext cx="822960" cy="822960"/>
+          </a:xfrm>
+          <a:prstGeom prst="ellipse">
+            <a:avLst/>
+          </a:prstGeom>
+          <a:solidFill>
+            <a:srgbClr val="C9603F"/>
+          </a:solidFill>
+          <a:ln/>
+          <a:effectLst>
+            <a:outerShdw sx="100000" sy="100000" kx="0" ky="0" algn="bl" rotWithShape="0" blurRad="101600" dist="38100" dir="5400000">
+              <a:srgbClr val="10233A">
+                <a:alpha val="18000"/>
+              </a:srgbClr>
+            </a:outerShdw>
+          </a:effectLst>
+        </p:spPr>
+      </p:sp>
+      <p:sp>
+        <p:nvSpPr>
+          <p:cNvPr id="5" name="Text 3"/>
+          <p:cNvSpPr txBox="1"/>
+          <p:nvPr/>
+        </p:nvSpPr>
+        <p:spPr>
+          <a:xfrm>
+            <a:off x="10607040" y="502920"/>
+            <a:ext cx="822960" cy="822960"/>
+          </a:xfrm>
+          <a:prstGeom prst="rect">
+            <a:avLst/>
+          </a:prstGeom>
+          <a:noFill/>
+          <a:ln/>
+        </p:spPr>
+        <p:txBody>
+          <a:bodyPr wrap="square" lIns="0" tIns="0" rIns="0" bIns="0" rtlCol="0" anchor="ctr"/>
+          <a:lstStyle/>
+          <a:p>
+            <a:pPr algn="ctr" indent="0" marL="0">
+              <a:buNone/>
+            </a:pPr>
+            <a:r>
+              <a:rPr lang="en-US" sz="2880" b="1" dirty="0">
+                <a:solidFill>
+                  <a:srgbClr val="FFFFFF"/>
+                </a:solidFill>
+                <a:latin typeface="游ゴシック" pitchFamily="34" charset="0"/>
+                <a:ea typeface="游ゴシック" pitchFamily="34" charset="-122"/>
+                <a:cs typeface="游ゴシック" pitchFamily="34" charset="-120"/>
+              </a:rPr>
+              <a:t>成</a:t>
+            </a:r>
+            <a:endParaRPr lang="en-US" sz="2880" dirty="0"/>
+          </a:p>
+        </p:txBody>
+      </p:sp>
+      <p:sp>
+        <p:nvSpPr>
+          <p:cNvPr id="6" name="Text 4"/>
           <p:cNvSpPr txBox="1"/>
           <p:nvPr/>
         </p:nvSpPr>
         <p:spPr>
           <a:xfrm>
             <a:off x="640080" y="1783080"/>
-            <a:ext cx="10881360" cy="1371600"/>
+            <a:ext cx="10881360" cy="4206240"/>
           </a:xfrm>
           <a:prstGeom prst="rect">
             <a:avLst/>
@@ -4334,7 +4145,7 @@
               <a:buChar char="●"/>
             </a:pPr>
             <a:r>
-              <a:rPr lang="en-US" sz="1450" dirty="0">
+              <a:rPr lang="en-US" sz="1500" dirty="0">
                 <a:solidFill>
                   <a:srgbClr val="3A3A3A"/>
                 </a:solidFill>
@@ -4342,9 +4153,9 @@
                 <a:ea typeface="游ゴシック" pitchFamily="34" charset="-122"/>
                 <a:cs typeface="游ゴシック" pitchFamily="34" charset="-120"/>
               </a:rPr>
-              <a:t>大賞獲得を目指す先に、「繋ぐ相続サロン®」の人材育成メソッドそのものを、金融機関・不動産業界など相続ビジネスに関わるすべての専門家への教育コンテンツとして展開していく展望を持っている</a:t>
-            </a:r>
-            <a:endParaRPr lang="en-US" sz="1450" dirty="0"/>
+              <a:t>顧客ファネル：ACP（人生会議）をフロントに据え、相続対策に着手する母数を構造的に拡大する仕組み（素材②）</a:t>
+            </a:r>
+            <a:endParaRPr lang="en-US" sz="1500" dirty="0"/>
           </a:p>
           <a:p>
             <a:pPr marL="342900" indent="-342900">
@@ -4358,7 +4169,7 @@
               <a:buChar char="●"/>
             </a:pPr>
             <a:r>
-              <a:rPr lang="en-US" sz="1450" dirty="0">
+              <a:rPr lang="en-US" sz="1500" dirty="0">
                 <a:solidFill>
                   <a:srgbClr val="3A3A3A"/>
                 </a:solidFill>
@@ -4366,30 +4177,54 @@
                 <a:ea typeface="游ゴシック" pitchFamily="34" charset="-122"/>
                 <a:cs typeface="游ゴシック" pitchFamily="34" charset="-120"/>
               </a:rPr>
-              <a:t>これはアイデアではない。「エキスパートコース」全6回分のカリキュラム（素材③）として、既に体系化・顕在化された教材が存在する</a:t>
-            </a:r>
-            <a:endParaRPr lang="en-US" sz="1450" dirty="0"/>
-          </a:p>
-        </p:txBody>
-      </p:sp>
-      <p:sp>
-        <p:nvSpPr>
-          <p:cNvPr id="5" name="Shape 3"/>
+              <a:t>人材ファネル：資格講座の卒業生が「講師デビュー」し、自ら次の集客・紹介導線を生み出す自己増殖構造（素材③）</a:t>
+            </a:r>
+            <a:endParaRPr lang="en-US" sz="1500" dirty="0"/>
+          </a:p>
+          <a:p>
+            <a:pPr marL="342900" indent="-342900">
+              <a:lnSpc>
+                <a:spcPct val="128000"/>
+              </a:lnSpc>
+              <a:spcAft>
+                <a:spcPts val="1200"/>
+              </a:spcAft>
+              <a:buSzPct val="100000"/>
+              <a:buChar char="●"/>
+            </a:pPr>
+            <a:r>
+              <a:rPr lang="en-US" sz="1500" dirty="0">
+                <a:solidFill>
+                  <a:srgbClr val="3A3A3A"/>
+                </a:solidFill>
+                <a:latin typeface="游ゴシック" pitchFamily="34" charset="0"/>
+                <a:ea typeface="游ゴシック" pitchFamily="34" charset="-122"/>
+                <a:cs typeface="游ゴシック" pitchFamily="34" charset="-120"/>
+              </a:rPr>
+              <a:t>二つのファネルが重なり合うことで、約100億円の経済圏をさらに拡大し、3年後FC100事業所という成長サイクルへつながる</a:t>
+            </a:r>
+            <a:endParaRPr lang="en-US" sz="1500" dirty="0"/>
+          </a:p>
+        </p:txBody>
+      </p:sp>
+      <p:sp>
+        <p:nvSpPr>
+          <p:cNvPr id="7" name="Shape 5"/>
           <p:cNvSpPr/>
           <p:nvPr/>
         </p:nvSpPr>
         <p:spPr>
           <a:xfrm>
-            <a:off x="640080" y="3429000"/>
-            <a:ext cx="2487168" cy="1874520"/>
+            <a:off x="640080" y="4754880"/>
+            <a:ext cx="3383280" cy="1371600"/>
           </a:xfrm>
           <a:prstGeom prst="roundRect">
             <a:avLst>
-              <a:gd name="adj" fmla="val 4878"/>
+              <a:gd name="adj" fmla="val 6667"/>
             </a:avLst>
           </a:prstGeom>
           <a:solidFill>
-            <a:srgbClr val="C9603F"/>
+            <a:srgbClr val="F6F1EA"/>
           </a:solidFill>
           <a:ln/>
           <a:effectLst>
@@ -4403,14 +4238,14 @@
       </p:sp>
       <p:sp>
         <p:nvSpPr>
-          <p:cNvPr id="6" name="Text 4"/>
-          <p:cNvSpPr txBox="1"/>
-          <p:nvPr/>
-        </p:nvSpPr>
-        <p:spPr>
-          <a:xfrm>
-            <a:off x="804672" y="3593592"/>
-            <a:ext cx="2157984" cy="274320"/>
+          <p:cNvPr id="8" name="Text 6"/>
+          <p:cNvSpPr txBox="1"/>
+          <p:nvPr/>
+        </p:nvSpPr>
+        <p:spPr>
+          <a:xfrm>
+            <a:off x="868680" y="4956048"/>
+            <a:ext cx="2926080" cy="411480"/>
           </a:xfrm>
           <a:prstGeom prst="rect">
             <a:avLst/>
@@ -4426,69 +4261,30 @@
               <a:buNone/>
             </a:pPr>
             <a:r>
-              <a:rPr lang="en-US" sz="1050" b="1" dirty="0">
-                <a:solidFill>
-                  <a:srgbClr val="F1DCCF"/>
-                </a:solidFill>
-                <a:latin typeface="游ゴシック" pitchFamily="34" charset="0"/>
-                <a:ea typeface="游ゴシック" pitchFamily="34" charset="-122"/>
-                <a:cs typeface="游ゴシック" pitchFamily="34" charset="-120"/>
-              </a:rPr>
-              <a:t>実績（現在）</a:t>
-            </a:r>
-            <a:endParaRPr lang="en-US" sz="1050" dirty="0"/>
-          </a:p>
-        </p:txBody>
-      </p:sp>
-      <p:sp>
-        <p:nvSpPr>
-          <p:cNvPr id="7" name="Text 5"/>
-          <p:cNvSpPr txBox="1"/>
-          <p:nvPr/>
-        </p:nvSpPr>
-        <p:spPr>
-          <a:xfrm>
-            <a:off x="804672" y="3886200"/>
-            <a:ext cx="2157984" cy="594360"/>
-          </a:xfrm>
-          <a:prstGeom prst="rect">
-            <a:avLst/>
-          </a:prstGeom>
-          <a:noFill/>
-          <a:ln/>
-        </p:spPr>
-        <p:txBody>
-          <a:bodyPr wrap="square" lIns="0" tIns="0" rIns="0" bIns="0" rtlCol="0" anchor="t"/>
-          <a:lstStyle/>
-          <a:p>
-            <a:pPr indent="0" marL="0">
-              <a:buNone/>
-            </a:pPr>
-            <a:r>
-              <a:rPr lang="en-US" sz="1400" b="1" dirty="0">
-                <a:solidFill>
-                  <a:srgbClr val="FFFFFF"/>
-                </a:solidFill>
-                <a:latin typeface="游ゴシック" pitchFamily="34" charset="0"/>
-                <a:ea typeface="游ゴシック" pitchFamily="34" charset="-122"/>
-                <a:cs typeface="游ゴシック" pitchFamily="34" charset="-120"/>
-              </a:rPr>
-              <a:t>自社での育成</a:t>
-            </a:r>
-            <a:endParaRPr lang="en-US" sz="1400" dirty="0"/>
-          </a:p>
-        </p:txBody>
-      </p:sp>
-      <p:sp>
-        <p:nvSpPr>
-          <p:cNvPr id="8" name="Text 6"/>
-          <p:cNvSpPr txBox="1"/>
-          <p:nvPr/>
-        </p:nvSpPr>
-        <p:spPr>
-          <a:xfrm>
-            <a:off x="804672" y="4526280"/>
-            <a:ext cx="2157984" cy="685800"/>
+              <a:rPr lang="en-US" sz="1600" b="1" dirty="0">
+                <a:solidFill>
+                  <a:srgbClr val="1E3A5F"/>
+                </a:solidFill>
+                <a:latin typeface="游ゴシック" pitchFamily="34" charset="0"/>
+                <a:ea typeface="游ゴシック" pitchFamily="34" charset="-122"/>
+                <a:cs typeface="游ゴシック" pitchFamily="34" charset="-120"/>
+              </a:rPr>
+              <a:t>顧客ファネル</a:t>
+            </a:r>
+            <a:endParaRPr lang="en-US" sz="1600" dirty="0"/>
+          </a:p>
+        </p:txBody>
+      </p:sp>
+      <p:sp>
+        <p:nvSpPr>
+          <p:cNvPr id="9" name="Text 7"/>
+          <p:cNvSpPr txBox="1"/>
+          <p:nvPr/>
+        </p:nvSpPr>
+        <p:spPr>
+          <a:xfrm>
+            <a:off x="868680" y="5413248"/>
+            <a:ext cx="2926080" cy="594360"/>
           </a:xfrm>
           <a:prstGeom prst="rect">
             <a:avLst/>
@@ -4502,81 +4298,22 @@
           <a:p>
             <a:pPr indent="0" marL="0">
               <a:lnSpc>
-                <a:spcPct val="120000"/>
+                <a:spcPct val="125000"/>
               </a:lnSpc>
               <a:buNone/>
             </a:pPr>
             <a:r>
-              <a:rPr lang="en-US" sz="1100" dirty="0">
-                <a:solidFill>
-                  <a:srgbClr val="F8E9DF"/>
-                </a:solidFill>
-                <a:latin typeface="游ゴシック" pitchFamily="34" charset="0"/>
-                <a:ea typeface="游ゴシック" pitchFamily="34" charset="-122"/>
-                <a:cs typeface="游ゴシック" pitchFamily="34" charset="-120"/>
-              </a:rPr>
-              <a:t>エキスパートコース全6回</a:t>
-            </a:r>
-            <a:endParaRPr lang="en-US" sz="1100" dirty="0"/>
-          </a:p>
-          <a:p>
-            <a:pPr indent="0" marL="0">
-              <a:lnSpc>
-                <a:spcPct val="120000"/>
-              </a:lnSpc>
-              <a:buNone/>
-            </a:pPr>
-            <a:r>
-              <a:rPr lang="en-US" sz="1100" dirty="0">
-                <a:solidFill>
-                  <a:srgbClr val="F8E9DF"/>
-                </a:solidFill>
-                <a:latin typeface="游ゴシック" pitchFamily="34" charset="0"/>
-                <a:ea typeface="游ゴシック" pitchFamily="34" charset="-122"/>
-                <a:cs typeface="游ゴシック" pitchFamily="34" charset="-120"/>
-              </a:rPr>
-              <a:t>資格者50名（2年）</a:t>
-            </a:r>
-            <a:endParaRPr lang="en-US" sz="1100" dirty="0"/>
-          </a:p>
-        </p:txBody>
-      </p:sp>
-      <p:sp>
-        <p:nvSpPr>
-          <p:cNvPr id="9" name="Text 7"/>
-          <p:cNvSpPr txBox="1"/>
-          <p:nvPr/>
-        </p:nvSpPr>
-        <p:spPr>
-          <a:xfrm>
-            <a:off x="3127248" y="4091940"/>
-            <a:ext cx="256032" cy="548640"/>
-          </a:xfrm>
-          <a:prstGeom prst="rect">
-            <a:avLst/>
-          </a:prstGeom>
-          <a:noFill/>
-          <a:ln/>
-        </p:spPr>
-        <p:txBody>
-          <a:bodyPr wrap="square" lIns="0" tIns="0" rIns="0" bIns="0" rtlCol="0" anchor="ctr"/>
-          <a:lstStyle/>
-          <a:p>
-            <a:pPr algn="ctr" indent="0" marL="0">
-              <a:buNone/>
-            </a:pPr>
-            <a:r>
-              <a:rPr lang="en-US" sz="1600" b="1" dirty="0">
-                <a:solidFill>
-                  <a:srgbClr val="C9603F"/>
-                </a:solidFill>
-                <a:latin typeface="游ゴシック" pitchFamily="34" charset="0"/>
-                <a:ea typeface="游ゴシック" pitchFamily="34" charset="-122"/>
-                <a:cs typeface="游ゴシック" pitchFamily="34" charset="-120"/>
-              </a:rPr>
-              <a:t>→</a:t>
-            </a:r>
-            <a:endParaRPr lang="en-US" sz="1600" dirty="0"/>
+              <a:rPr lang="en-US" sz="1250" dirty="0">
+                <a:solidFill>
+                  <a:srgbClr val="3A3A3A"/>
+                </a:solidFill>
+                <a:latin typeface="游ゴシック" pitchFamily="34" charset="0"/>
+                <a:ea typeface="游ゴシック" pitchFamily="34" charset="-122"/>
+                <a:cs typeface="游ゴシック" pitchFamily="34" charset="-120"/>
+              </a:rPr>
+              <a:t>ACP（人生会議）が入口</a:t>
+            </a:r>
+            <a:endParaRPr lang="en-US" sz="1250" dirty="0"/>
           </a:p>
         </p:txBody>
       </p:sp>
@@ -4588,12 +4325,12 @@
         </p:nvSpPr>
         <p:spPr>
           <a:xfrm>
-            <a:off x="3383280" y="3429000"/>
-            <a:ext cx="2487168" cy="1874520"/>
+            <a:off x="4297680" y="4754880"/>
+            <a:ext cx="3383280" cy="1371600"/>
           </a:xfrm>
           <a:prstGeom prst="roundRect">
             <a:avLst>
-              <a:gd name="adj" fmla="val 4878"/>
+              <a:gd name="adj" fmla="val 6667"/>
             </a:avLst>
           </a:prstGeom>
           <a:solidFill>
@@ -4617,8 +4354,8 @@
         </p:nvSpPr>
         <p:spPr>
           <a:xfrm>
-            <a:off x="3547872" y="3593592"/>
-            <a:ext cx="2157984" cy="274320"/>
+            <a:off x="4526280" y="4956048"/>
+            <a:ext cx="2926080" cy="411480"/>
           </a:xfrm>
           <a:prstGeom prst="rect">
             <a:avLst/>
@@ -4634,17 +4371,17 @@
               <a:buNone/>
             </a:pPr>
             <a:r>
-              <a:rPr lang="en-US" sz="1050" b="1" dirty="0">
-                <a:solidFill>
-                  <a:srgbClr val="C9603F"/>
-                </a:solidFill>
-                <a:latin typeface="游ゴシック" pitchFamily="34" charset="0"/>
-                <a:ea typeface="游ゴシック" pitchFamily="34" charset="-122"/>
-                <a:cs typeface="游ゴシック" pitchFamily="34" charset="-120"/>
-              </a:rPr>
-              <a:t>展望①</a:t>
-            </a:r>
-            <a:endParaRPr lang="en-US" sz="1050" dirty="0"/>
+              <a:rPr lang="en-US" sz="1600" b="1" dirty="0">
+                <a:solidFill>
+                  <a:srgbClr val="1E3A5F"/>
+                </a:solidFill>
+                <a:latin typeface="游ゴシック" pitchFamily="34" charset="0"/>
+                <a:ea typeface="游ゴシック" pitchFamily="34" charset="-122"/>
+                <a:cs typeface="游ゴシック" pitchFamily="34" charset="-120"/>
+              </a:rPr>
+              <a:t>人材ファネル</a:t>
+            </a:r>
+            <a:endParaRPr lang="en-US" sz="1600" dirty="0"/>
           </a:p>
         </p:txBody>
       </p:sp>
@@ -4656,47 +4393,8 @@
         </p:nvSpPr>
         <p:spPr>
           <a:xfrm>
-            <a:off x="3547872" y="3886200"/>
-            <a:ext cx="2157984" cy="594360"/>
-          </a:xfrm>
-          <a:prstGeom prst="rect">
-            <a:avLst/>
-          </a:prstGeom>
-          <a:noFill/>
-          <a:ln/>
-        </p:spPr>
-        <p:txBody>
-          <a:bodyPr wrap="square" lIns="0" tIns="0" rIns="0" bIns="0" rtlCol="0" anchor="t"/>
-          <a:lstStyle/>
-          <a:p>
-            <a:pPr indent="0" marL="0">
-              <a:buNone/>
-            </a:pPr>
-            <a:r>
-              <a:rPr lang="en-US" sz="1400" b="1" dirty="0">
-                <a:solidFill>
-                  <a:srgbClr val="1E3A5F"/>
-                </a:solidFill>
-                <a:latin typeface="游ゴシック" pitchFamily="34" charset="0"/>
-                <a:ea typeface="游ゴシック" pitchFamily="34" charset="-122"/>
-                <a:cs typeface="游ゴシック" pitchFamily="34" charset="-120"/>
-              </a:rPr>
-              <a:t>金融機関への採用</a:t>
-            </a:r>
-            <a:endParaRPr lang="en-US" sz="1400" dirty="0"/>
-          </a:p>
-        </p:txBody>
-      </p:sp>
-      <p:sp>
-        <p:nvSpPr>
-          <p:cNvPr id="13" name="Text 11"/>
-          <p:cNvSpPr txBox="1"/>
-          <p:nvPr/>
-        </p:nvSpPr>
-        <p:spPr>
-          <a:xfrm>
-            <a:off x="3547872" y="4526280"/>
-            <a:ext cx="2157984" cy="685800"/>
+            <a:off x="4526280" y="5413248"/>
+            <a:ext cx="2926080" cy="594360"/>
           </a:xfrm>
           <a:prstGeom prst="rect">
             <a:avLst/>
@@ -4710,42 +4408,61 @@
           <a:p>
             <a:pPr indent="0" marL="0">
               <a:lnSpc>
-                <a:spcPct val="120000"/>
+                <a:spcPct val="125000"/>
               </a:lnSpc>
               <a:buNone/>
             </a:pPr>
             <a:r>
-              <a:rPr lang="en-US" sz="1100" dirty="0">
-                <a:solidFill>
-                  <a:srgbClr val="6B6B6B"/>
-                </a:solidFill>
-                <a:latin typeface="游ゴシック" pitchFamily="34" charset="0"/>
-                <a:ea typeface="游ゴシック" pitchFamily="34" charset="-122"/>
-                <a:cs typeface="游ゴシック" pitchFamily="34" charset="-120"/>
-              </a:rPr>
-              <a:t>行員研修プログラム</a:t>
-            </a:r>
-            <a:endParaRPr lang="en-US" sz="1100" dirty="0"/>
-          </a:p>
-          <a:p>
-            <a:pPr indent="0" marL="0">
-              <a:lnSpc>
-                <a:spcPct val="120000"/>
-              </a:lnSpc>
-              <a:buNone/>
-            </a:pPr>
-            <a:r>
-              <a:rPr lang="en-US" sz="1100" dirty="0">
-                <a:solidFill>
-                  <a:srgbClr val="6B6B6B"/>
-                </a:solidFill>
-                <a:latin typeface="游ゴシック" pitchFamily="34" charset="0"/>
-                <a:ea typeface="游ゴシック" pitchFamily="34" charset="-122"/>
-                <a:cs typeface="游ゴシック" pitchFamily="34" charset="-120"/>
-              </a:rPr>
-              <a:t>として導入</a:t>
-            </a:r>
-            <a:endParaRPr lang="en-US" sz="1100" dirty="0"/>
+              <a:rPr lang="en-US" sz="1250" dirty="0">
+                <a:solidFill>
+                  <a:srgbClr val="3A3A3A"/>
+                </a:solidFill>
+                <a:latin typeface="游ゴシック" pitchFamily="34" charset="0"/>
+                <a:ea typeface="游ゴシック" pitchFamily="34" charset="-122"/>
+                <a:cs typeface="游ゴシック" pitchFamily="34" charset="-120"/>
+              </a:rPr>
+              <a:t>講師デビューが入口</a:t>
+            </a:r>
+            <a:endParaRPr lang="en-US" sz="1250" dirty="0"/>
+          </a:p>
+        </p:txBody>
+      </p:sp>
+      <p:sp>
+        <p:nvSpPr>
+          <p:cNvPr id="13" name="Text 11"/>
+          <p:cNvSpPr txBox="1"/>
+          <p:nvPr/>
+        </p:nvSpPr>
+        <p:spPr>
+          <a:xfrm>
+            <a:off x="4023360" y="5074920"/>
+            <a:ext cx="274320" cy="731520"/>
+          </a:xfrm>
+          <a:prstGeom prst="rect">
+            <a:avLst/>
+          </a:prstGeom>
+          <a:noFill/>
+          <a:ln/>
+        </p:spPr>
+        <p:txBody>
+          <a:bodyPr wrap="square" lIns="0" tIns="0" rIns="0" bIns="0" rtlCol="0" anchor="ctr"/>
+          <a:lstStyle/>
+          <a:p>
+            <a:pPr algn="ctr" indent="0" marL="0">
+              <a:buNone/>
+            </a:pPr>
+            <a:r>
+              <a:rPr lang="en-US" sz="2000" b="1" dirty="0">
+                <a:solidFill>
+                  <a:srgbClr val="C9603F"/>
+                </a:solidFill>
+                <a:latin typeface="游ゴシック" pitchFamily="34" charset="0"/>
+                <a:ea typeface="游ゴシック" pitchFamily="34" charset="-122"/>
+                <a:cs typeface="游ゴシック" pitchFamily="34" charset="-120"/>
+              </a:rPr>
+              <a:t>＋</a:t>
+            </a:r>
+            <a:endParaRPr lang="en-US" sz="2000" dirty="0"/>
           </a:p>
         </p:txBody>
       </p:sp>
@@ -4757,8 +4474,8 @@
         </p:nvSpPr>
         <p:spPr>
           <a:xfrm>
-            <a:off x="5870448" y="4091940"/>
-            <a:ext cx="256032" cy="548640"/>
+            <a:off x="7680960" y="5074920"/>
+            <a:ext cx="548640" cy="731520"/>
           </a:xfrm>
           <a:prstGeom prst="rect">
             <a:avLst/>
@@ -4774,7 +4491,7 @@
               <a:buNone/>
             </a:pPr>
             <a:r>
-              <a:rPr lang="en-US" sz="1600" b="1" dirty="0">
+              <a:rPr lang="en-US" sz="2400" b="1" dirty="0">
                 <a:solidFill>
                   <a:srgbClr val="C9603F"/>
                 </a:solidFill>
@@ -4784,7 +4501,7 @@
               </a:rPr>
               <a:t>→</a:t>
             </a:r>
-            <a:endParaRPr lang="en-US" sz="1600" dirty="0"/>
+            <a:endParaRPr lang="en-US" sz="2400" dirty="0"/>
           </a:p>
         </p:txBody>
       </p:sp>
@@ -4796,16 +4513,16 @@
         </p:nvSpPr>
         <p:spPr>
           <a:xfrm>
-            <a:off x="6126480" y="3429000"/>
-            <a:ext cx="2487168" cy="1874520"/>
+            <a:off x="8229600" y="4754880"/>
+            <a:ext cx="3322015" cy="1371600"/>
           </a:xfrm>
           <a:prstGeom prst="roundRect">
             <a:avLst>
-              <a:gd name="adj" fmla="val 4878"/>
+              <a:gd name="adj" fmla="val 6667"/>
             </a:avLst>
           </a:prstGeom>
           <a:solidFill>
-            <a:srgbClr val="F6F1EA"/>
+            <a:srgbClr val="C9603F"/>
           </a:solidFill>
           <a:ln/>
           <a:effectLst>
@@ -4825,8 +4542,8 @@
         </p:nvSpPr>
         <p:spPr>
           <a:xfrm>
-            <a:off x="6291072" y="3593592"/>
-            <a:ext cx="2157984" cy="274320"/>
+            <a:off x="8458200" y="4956048"/>
+            <a:ext cx="3093415" cy="411480"/>
           </a:xfrm>
           <a:prstGeom prst="rect">
             <a:avLst/>
@@ -4842,17 +4559,17 @@
               <a:buNone/>
             </a:pPr>
             <a:r>
-              <a:rPr lang="en-US" sz="1050" b="1" dirty="0">
-                <a:solidFill>
-                  <a:srgbClr val="C9603F"/>
-                </a:solidFill>
-                <a:latin typeface="游ゴシック" pitchFamily="34" charset="0"/>
-                <a:ea typeface="游ゴシック" pitchFamily="34" charset="-122"/>
-                <a:cs typeface="游ゴシック" pitchFamily="34" charset="-120"/>
-              </a:rPr>
-              <a:t>展望②</a:t>
-            </a:r>
-            <a:endParaRPr lang="en-US" sz="1050" dirty="0"/>
+              <a:rPr lang="en-US" sz="1550" b="1" dirty="0">
+                <a:solidFill>
+                  <a:srgbClr val="FFFFFF"/>
+                </a:solidFill>
+                <a:latin typeface="游ゴシック" pitchFamily="34" charset="0"/>
+                <a:ea typeface="游ゴシック" pitchFamily="34" charset="-122"/>
+                <a:cs typeface="游ゴシック" pitchFamily="34" charset="-120"/>
+              </a:rPr>
+              <a:t>経済圏100億円のさらなる拡大</a:t>
+            </a:r>
+            <a:endParaRPr lang="en-US" sz="1550" dirty="0"/>
           </a:p>
         </p:txBody>
       </p:sp>
@@ -4864,8 +4581,8 @@
         </p:nvSpPr>
         <p:spPr>
           <a:xfrm>
-            <a:off x="6291072" y="3886200"/>
-            <a:ext cx="2157984" cy="594360"/>
+            <a:off x="8458200" y="5413248"/>
+            <a:ext cx="3093415" cy="548640"/>
           </a:xfrm>
           <a:prstGeom prst="rect">
             <a:avLst/>
@@ -4881,349 +4598,23 @@
               <a:buNone/>
             </a:pPr>
             <a:r>
-              <a:rPr lang="en-US" sz="1400" b="1" dirty="0">
-                <a:solidFill>
-                  <a:srgbClr val="1E3A5F"/>
-                </a:solidFill>
-                <a:latin typeface="游ゴシック" pitchFamily="34" charset="0"/>
-                <a:ea typeface="游ゴシック" pitchFamily="34" charset="-122"/>
-                <a:cs typeface="游ゴシック" pitchFamily="34" charset="-120"/>
-              </a:rPr>
-              <a:t>不動産・士業への展開</a:t>
-            </a:r>
-            <a:endParaRPr lang="en-US" sz="1400" dirty="0"/>
+              <a:rPr lang="en-US" sz="1300" dirty="0">
+                <a:solidFill>
+                  <a:srgbClr val="F1DCCF"/>
+                </a:solidFill>
+                <a:latin typeface="游ゴシック" pitchFamily="34" charset="0"/>
+                <a:ea typeface="游ゴシック" pitchFamily="34" charset="-122"/>
+                <a:cs typeface="游ゴシック" pitchFamily="34" charset="-120"/>
+              </a:rPr>
+              <a:t>→ 3年後 FC100事業所</a:t>
+            </a:r>
+            <a:endParaRPr lang="en-US" sz="1300" dirty="0"/>
           </a:p>
         </p:txBody>
       </p:sp>
       <p:sp>
         <p:nvSpPr>
           <p:cNvPr id="18" name="Text 16"/>
-          <p:cNvSpPr txBox="1"/>
-          <p:nvPr/>
-        </p:nvSpPr>
-        <p:spPr>
-          <a:xfrm>
-            <a:off x="6291072" y="4526280"/>
-            <a:ext cx="2157984" cy="685800"/>
-          </a:xfrm>
-          <a:prstGeom prst="rect">
-            <a:avLst/>
-          </a:prstGeom>
-          <a:noFill/>
-          <a:ln/>
-        </p:spPr>
-        <p:txBody>
-          <a:bodyPr wrap="square" lIns="0" tIns="0" rIns="0" bIns="0" rtlCol="0" anchor="t"/>
-          <a:lstStyle/>
-          <a:p>
-            <a:pPr indent="0" marL="0">
-              <a:lnSpc>
-                <a:spcPct val="120000"/>
-              </a:lnSpc>
-              <a:buNone/>
-            </a:pPr>
-            <a:r>
-              <a:rPr lang="en-US" sz="1100" dirty="0">
-                <a:solidFill>
-                  <a:srgbClr val="6B6B6B"/>
-                </a:solidFill>
-                <a:latin typeface="游ゴシック" pitchFamily="34" charset="0"/>
-                <a:ea typeface="游ゴシック" pitchFamily="34" charset="-122"/>
-                <a:cs typeface="游ゴシック" pitchFamily="34" charset="-120"/>
-              </a:rPr>
-              <a:t>業界横断の</a:t>
-            </a:r>
-            <a:endParaRPr lang="en-US" sz="1100" dirty="0"/>
-          </a:p>
-          <a:p>
-            <a:pPr indent="0" marL="0">
-              <a:lnSpc>
-                <a:spcPct val="120000"/>
-              </a:lnSpc>
-              <a:buNone/>
-            </a:pPr>
-            <a:r>
-              <a:rPr lang="en-US" sz="1100" dirty="0">
-                <a:solidFill>
-                  <a:srgbClr val="6B6B6B"/>
-                </a:solidFill>
-                <a:latin typeface="游ゴシック" pitchFamily="34" charset="0"/>
-                <a:ea typeface="游ゴシック" pitchFamily="34" charset="-122"/>
-                <a:cs typeface="游ゴシック" pitchFamily="34" charset="-120"/>
-              </a:rPr>
-              <a:t>標準研修へ</a:t>
-            </a:r>
-            <a:endParaRPr lang="en-US" sz="1100" dirty="0"/>
-          </a:p>
-        </p:txBody>
-      </p:sp>
-      <p:sp>
-        <p:nvSpPr>
-          <p:cNvPr id="19" name="Text 17"/>
-          <p:cNvSpPr txBox="1"/>
-          <p:nvPr/>
-        </p:nvSpPr>
-        <p:spPr>
-          <a:xfrm>
-            <a:off x="8613648" y="4091940"/>
-            <a:ext cx="256032" cy="548640"/>
-          </a:xfrm>
-          <a:prstGeom prst="rect">
-            <a:avLst/>
-          </a:prstGeom>
-          <a:noFill/>
-          <a:ln/>
-        </p:spPr>
-        <p:txBody>
-          <a:bodyPr wrap="square" lIns="0" tIns="0" rIns="0" bIns="0" rtlCol="0" anchor="ctr"/>
-          <a:lstStyle/>
-          <a:p>
-            <a:pPr algn="ctr" indent="0" marL="0">
-              <a:buNone/>
-            </a:pPr>
-            <a:r>
-              <a:rPr lang="en-US" sz="1600" b="1" dirty="0">
-                <a:solidFill>
-                  <a:srgbClr val="C9603F"/>
-                </a:solidFill>
-                <a:latin typeface="游ゴシック" pitchFamily="34" charset="0"/>
-                <a:ea typeface="游ゴシック" pitchFamily="34" charset="-122"/>
-                <a:cs typeface="游ゴシック" pitchFamily="34" charset="-120"/>
-              </a:rPr>
-              <a:t>→</a:t>
-            </a:r>
-            <a:endParaRPr lang="en-US" sz="1600" dirty="0"/>
-          </a:p>
-        </p:txBody>
-      </p:sp>
-      <p:sp>
-        <p:nvSpPr>
-          <p:cNvPr id="20" name="Shape 18"/>
-          <p:cNvSpPr/>
-          <p:nvPr/>
-        </p:nvSpPr>
-        <p:spPr>
-          <a:xfrm>
-            <a:off x="8869680" y="3429000"/>
-            <a:ext cx="2487168" cy="1874520"/>
-          </a:xfrm>
-          <a:prstGeom prst="roundRect">
-            <a:avLst>
-              <a:gd name="adj" fmla="val 4878"/>
-            </a:avLst>
-          </a:prstGeom>
-          <a:solidFill>
-            <a:srgbClr val="F6F1EA"/>
-          </a:solidFill>
-          <a:ln/>
-          <a:effectLst>
-            <a:outerShdw sx="100000" sy="100000" kx="0" ky="0" algn="bl" rotWithShape="0" blurRad="101600" dist="38100" dir="5400000">
-              <a:srgbClr val="10233A">
-                <a:alpha val="18000"/>
-              </a:srgbClr>
-            </a:outerShdw>
-          </a:effectLst>
-        </p:spPr>
-      </p:sp>
-      <p:sp>
-        <p:nvSpPr>
-          <p:cNvPr id="21" name="Text 19"/>
-          <p:cNvSpPr txBox="1"/>
-          <p:nvPr/>
-        </p:nvSpPr>
-        <p:spPr>
-          <a:xfrm>
-            <a:off x="9034272" y="3593592"/>
-            <a:ext cx="2157984" cy="274320"/>
-          </a:xfrm>
-          <a:prstGeom prst="rect">
-            <a:avLst/>
-          </a:prstGeom>
-          <a:noFill/>
-          <a:ln/>
-        </p:spPr>
-        <p:txBody>
-          <a:bodyPr wrap="square" lIns="0" tIns="0" rIns="0" bIns="0" rtlCol="0" anchor="ctr"/>
-          <a:lstStyle/>
-          <a:p>
-            <a:pPr indent="0" marL="0">
-              <a:buNone/>
-            </a:pPr>
-            <a:r>
-              <a:rPr lang="en-US" sz="1050" b="1" dirty="0">
-                <a:solidFill>
-                  <a:srgbClr val="C9603F"/>
-                </a:solidFill>
-                <a:latin typeface="游ゴシック" pitchFamily="34" charset="0"/>
-                <a:ea typeface="游ゴシック" pitchFamily="34" charset="-122"/>
-                <a:cs typeface="游ゴシック" pitchFamily="34" charset="-120"/>
-              </a:rPr>
-              <a:t>展望③</a:t>
-            </a:r>
-            <a:endParaRPr lang="en-US" sz="1050" dirty="0"/>
-          </a:p>
-        </p:txBody>
-      </p:sp>
-      <p:sp>
-        <p:nvSpPr>
-          <p:cNvPr id="22" name="Text 20"/>
-          <p:cNvSpPr txBox="1"/>
-          <p:nvPr/>
-        </p:nvSpPr>
-        <p:spPr>
-          <a:xfrm>
-            <a:off x="9034272" y="3886200"/>
-            <a:ext cx="2157984" cy="594360"/>
-          </a:xfrm>
-          <a:prstGeom prst="rect">
-            <a:avLst/>
-          </a:prstGeom>
-          <a:noFill/>
-          <a:ln/>
-        </p:spPr>
-        <p:txBody>
-          <a:bodyPr wrap="square" lIns="0" tIns="0" rIns="0" bIns="0" rtlCol="0" anchor="t"/>
-          <a:lstStyle/>
-          <a:p>
-            <a:pPr indent="0" marL="0">
-              <a:buNone/>
-            </a:pPr>
-            <a:r>
-              <a:rPr lang="en-US" sz="1400" b="1" dirty="0">
-                <a:solidFill>
-                  <a:srgbClr val="1E3A5F"/>
-                </a:solidFill>
-                <a:latin typeface="游ゴシック" pitchFamily="34" charset="0"/>
-                <a:ea typeface="游ゴシック" pitchFamily="34" charset="-122"/>
-                <a:cs typeface="游ゴシック" pitchFamily="34" charset="-120"/>
-              </a:rPr>
-              <a:t>繋ぐノートサポート</a:t>
-            </a:r>
-            <a:endParaRPr lang="en-US" sz="1400" dirty="0"/>
-          </a:p>
-          <a:p>
-            <a:pPr indent="0" marL="0">
-              <a:buNone/>
-            </a:pPr>
-            <a:r>
-              <a:rPr lang="en-US" sz="1400" b="1" dirty="0">
-                <a:solidFill>
-                  <a:srgbClr val="1E3A5F"/>
-                </a:solidFill>
-                <a:latin typeface="游ゴシック" pitchFamily="34" charset="0"/>
-                <a:ea typeface="游ゴシック" pitchFamily="34" charset="-122"/>
-                <a:cs typeface="游ゴシック" pitchFamily="34" charset="-120"/>
-              </a:rPr>
-              <a:t>アドバイザー®の輩出</a:t>
-            </a:r>
-            <a:endParaRPr lang="en-US" sz="1400" dirty="0"/>
-          </a:p>
-        </p:txBody>
-      </p:sp>
-      <p:sp>
-        <p:nvSpPr>
-          <p:cNvPr id="23" name="Text 21"/>
-          <p:cNvSpPr txBox="1"/>
-          <p:nvPr/>
-        </p:nvSpPr>
-        <p:spPr>
-          <a:xfrm>
-            <a:off x="9034272" y="4526280"/>
-            <a:ext cx="2157984" cy="685800"/>
-          </a:xfrm>
-          <a:prstGeom prst="rect">
-            <a:avLst/>
-          </a:prstGeom>
-          <a:noFill/>
-          <a:ln/>
-        </p:spPr>
-        <p:txBody>
-          <a:bodyPr wrap="square" lIns="0" tIns="0" rIns="0" bIns="0" rtlCol="0" anchor="t"/>
-          <a:lstStyle/>
-          <a:p>
-            <a:pPr indent="0" marL="0">
-              <a:lnSpc>
-                <a:spcPct val="120000"/>
-              </a:lnSpc>
-              <a:buNone/>
-            </a:pPr>
-            <a:r>
-              <a:rPr lang="en-US" sz="1100" dirty="0">
-                <a:solidFill>
-                  <a:srgbClr val="6B6B6B"/>
-                </a:solidFill>
-                <a:latin typeface="游ゴシック" pitchFamily="34" charset="0"/>
-                <a:ea typeface="游ゴシック" pitchFamily="34" charset="-122"/>
-                <a:cs typeface="游ゴシック" pitchFamily="34" charset="-120"/>
-              </a:rPr>
-              <a:t>業種を越えて「生きる準備」</a:t>
-            </a:r>
-            <a:endParaRPr lang="en-US" sz="1100" dirty="0"/>
-          </a:p>
-          <a:p>
-            <a:pPr indent="0" marL="0">
-              <a:lnSpc>
-                <a:spcPct val="120000"/>
-              </a:lnSpc>
-              <a:buNone/>
-            </a:pPr>
-            <a:r>
-              <a:rPr lang="en-US" sz="1100" dirty="0">
-                <a:solidFill>
-                  <a:srgbClr val="6B6B6B"/>
-                </a:solidFill>
-                <a:latin typeface="游ゴシック" pitchFamily="34" charset="0"/>
-                <a:ea typeface="游ゴシック" pitchFamily="34" charset="-122"/>
-                <a:cs typeface="游ゴシック" pitchFamily="34" charset="-120"/>
-              </a:rPr>
-              <a:t>を届ける人を全国に</a:t>
-            </a:r>
-            <a:endParaRPr lang="en-US" sz="1100" dirty="0"/>
-          </a:p>
-        </p:txBody>
-      </p:sp>
-      <p:sp>
-        <p:nvSpPr>
-          <p:cNvPr id="24" name="Text 22"/>
-          <p:cNvSpPr txBox="1"/>
-          <p:nvPr/>
-        </p:nvSpPr>
-        <p:spPr>
-          <a:xfrm>
-            <a:off x="640080" y="5577840"/>
-            <a:ext cx="10881360" cy="457200"/>
-          </a:xfrm>
-          <a:prstGeom prst="rect">
-            <a:avLst/>
-          </a:prstGeom>
-          <a:noFill/>
-          <a:ln/>
-        </p:spPr>
-        <p:txBody>
-          <a:bodyPr wrap="square" lIns="0" tIns="0" rIns="0" bIns="0" rtlCol="0" anchor="ctr"/>
-          <a:lstStyle/>
-          <a:p>
-            <a:pPr indent="0" marL="0">
-              <a:buNone/>
-            </a:pPr>
-            <a:r>
-              <a:rPr lang="en-US" sz="1300" i="1" dirty="0">
-                <a:solidFill>
-                  <a:srgbClr val="6B6B6B"/>
-                </a:solidFill>
-                <a:latin typeface="游ゴシック" pitchFamily="34" charset="0"/>
-                <a:ea typeface="游ゴシック" pitchFamily="34" charset="-122"/>
-                <a:cs typeface="游ゴシック" pitchFamily="34" charset="-120"/>
-              </a:rPr>
-              <a:t>「教育コンテンツ」という形のある資産が、相続コンサルティングの提供だけでなく、採用・ライセンスという新しい収益源になりうる。</a:t>
-            </a:r>
-            <a:endParaRPr lang="en-US" sz="1300" dirty="0"/>
-          </a:p>
-        </p:txBody>
-      </p:sp>
-      <p:sp>
-        <p:nvSpPr>
-          <p:cNvPr id="25" name="Text 23"/>
           <p:cNvSpPr txBox="1"/>
           <p:nvPr/>
         </p:nvSpPr>
@@ -5325,7 +4716,7 @@
                 <a:ea typeface="游ゴシック" pitchFamily="34" charset="-122"/>
                 <a:cs typeface="游ゴシック" pitchFamily="34" charset="-120"/>
               </a:rPr>
-              <a:t>04 / MARKET</a:t>
+              <a:t>BEYOND THE AWARD</a:t>
             </a:r>
             <a:endParaRPr lang="en-US" sz="1300" dirty="0"/>
           </a:p>
@@ -5364,7 +4755,7 @@
                 <a:ea typeface="游ゴシック" pitchFamily="34" charset="-122"/>
                 <a:cs typeface="游ゴシック" pitchFamily="34" charset="-120"/>
               </a:rPr>
-              <a:t>市場性 ― 「財産がある人」から、全世代・全業種へ</a:t>
+              <a:t>展望 ― 教育コンテンツ事業としての可能性</a:t>
             </a:r>
             <a:endParaRPr lang="en-US" sz="2700" dirty="0"/>
           </a:p>
@@ -5372,80 +4763,14 @@
       </p:sp>
       <p:sp>
         <p:nvSpPr>
-          <p:cNvPr id="4" name="Shape 2"/>
-          <p:cNvSpPr/>
-          <p:nvPr/>
-        </p:nvSpPr>
-        <p:spPr>
-          <a:xfrm>
-            <a:off x="10607040" y="502920"/>
-            <a:ext cx="822960" cy="822960"/>
-          </a:xfrm>
-          <a:prstGeom prst="ellipse">
-            <a:avLst/>
-          </a:prstGeom>
-          <a:solidFill>
-            <a:srgbClr val="C9603F"/>
-          </a:solidFill>
-          <a:ln/>
-          <a:effectLst>
-            <a:outerShdw sx="100000" sy="100000" kx="0" ky="0" algn="bl" rotWithShape="0" blurRad="101600" dist="38100" dir="5400000">
-              <a:srgbClr val="10233A">
-                <a:alpha val="18000"/>
-              </a:srgbClr>
-            </a:outerShdw>
-          </a:effectLst>
-        </p:spPr>
-      </p:sp>
-      <p:sp>
-        <p:nvSpPr>
-          <p:cNvPr id="5" name="Text 3"/>
-          <p:cNvSpPr txBox="1"/>
-          <p:nvPr/>
-        </p:nvSpPr>
-        <p:spPr>
-          <a:xfrm>
-            <a:off x="10607040" y="502920"/>
-            <a:ext cx="822960" cy="822960"/>
-          </a:xfrm>
-          <a:prstGeom prst="rect">
-            <a:avLst/>
-          </a:prstGeom>
-          <a:noFill/>
-          <a:ln/>
-        </p:spPr>
-        <p:txBody>
-          <a:bodyPr wrap="square" lIns="0" tIns="0" rIns="0" bIns="0" rtlCol="0" anchor="ctr"/>
-          <a:lstStyle/>
-          <a:p>
-            <a:pPr algn="ctr" indent="0" marL="0">
-              <a:buNone/>
-            </a:pPr>
-            <a:r>
-              <a:rPr lang="en-US" sz="2880" b="1" dirty="0">
-                <a:solidFill>
-                  <a:srgbClr val="FFFFFF"/>
-                </a:solidFill>
-                <a:latin typeface="游ゴシック" pitchFamily="34" charset="0"/>
-                <a:ea typeface="游ゴシック" pitchFamily="34" charset="-122"/>
-                <a:cs typeface="游ゴシック" pitchFamily="34" charset="-120"/>
-              </a:rPr>
-              <a:t>市</a:t>
-            </a:r>
-            <a:endParaRPr lang="en-US" sz="2880" dirty="0"/>
-          </a:p>
-        </p:txBody>
-      </p:sp>
-      <p:sp>
-        <p:nvSpPr>
-          <p:cNvPr id="6" name="Text 4"/>
+          <p:cNvPr id="4" name="Text 2"/>
           <p:cNvSpPr txBox="1"/>
           <p:nvPr/>
         </p:nvSpPr>
         <p:spPr>
           <a:xfrm>
             <a:off x="640080" y="1783080"/>
-            <a:ext cx="10881360" cy="4206240"/>
+            <a:ext cx="10881360" cy="1371600"/>
           </a:xfrm>
           <a:prstGeom prst="rect">
             <a:avLst/>
@@ -5468,7 +4793,7 @@
               <a:buChar char="●"/>
             </a:pPr>
             <a:r>
-              <a:rPr lang="en-US" sz="1500" dirty="0">
+              <a:rPr lang="en-US" sz="1450" dirty="0">
                 <a:solidFill>
                   <a:srgbClr val="3A3A3A"/>
                 </a:solidFill>
@@ -5476,9 +4801,9 @@
                 <a:ea typeface="游ゴシック" pitchFamily="34" charset="-122"/>
                 <a:cs typeface="游ゴシック" pitchFamily="34" charset="-120"/>
               </a:rPr>
-              <a:t>直接のターゲット：資産5億円〜10億円超の富裕層・超富裕層（素材①）</a:t>
-            </a:r>
-            <a:endParaRPr lang="en-US" sz="1500" dirty="0"/>
+              <a:t>大賞獲得を目指す先に、「繋ぐ相続サロン®」の人材育成メソッドそのものを、金融機関・不動産業界など相続ビジネスに関わるすべての専門家への教育コンテンツとして展開していく展望を持っている</a:t>
+            </a:r>
+            <a:endParaRPr lang="en-US" sz="1450" dirty="0"/>
           </a:p>
           <a:p>
             <a:pPr marL="342900" indent="-342900">
@@ -5492,7 +4817,7 @@
               <a:buChar char="●"/>
             </a:pPr>
             <a:r>
-              <a:rPr lang="en-US" sz="1500" dirty="0">
+              <a:rPr lang="en-US" sz="1450" dirty="0">
                 <a:solidFill>
                   <a:srgbClr val="3A3A3A"/>
                 </a:solidFill>
@@ -5500,54 +4825,30 @@
                 <a:ea typeface="游ゴシック" pitchFamily="34" charset="-122"/>
                 <a:cs typeface="游ゴシック" pitchFamily="34" charset="-120"/>
               </a:rPr>
-              <a:t>ACPを入口にすることで、財産の有無に関わらず誰もがターゲットになる市場へ構造的に拡大（素材②）</a:t>
-            </a:r>
-            <a:endParaRPr lang="en-US" sz="1500" dirty="0"/>
-          </a:p>
-          <a:p>
-            <a:pPr marL="342900" indent="-342900">
-              <a:lnSpc>
-                <a:spcPct val="128000"/>
-              </a:lnSpc>
-              <a:spcAft>
-                <a:spcPts val="1200"/>
-              </a:spcAft>
-              <a:buSzPct val="100000"/>
-              <a:buChar char="●"/>
-            </a:pPr>
-            <a:r>
-              <a:rPr lang="en-US" sz="1500" dirty="0">
-                <a:solidFill>
-                  <a:srgbClr val="3A3A3A"/>
-                </a:solidFill>
-                <a:latin typeface="游ゴシック" pitchFamily="34" charset="0"/>
-                <a:ea typeface="游ゴシック" pitchFamily="34" charset="-122"/>
-                <a:cs typeface="游ゴシック" pitchFamily="34" charset="-120"/>
-              </a:rPr>
-              <a:t>周辺専門家（税理士・司法書士・行政書士・弁護士・不動産・金融・有料老人ホーム・M&amp;A）を含めれば、市場は相続業界単体にとどまらない</a:t>
-            </a:r>
-            <a:endParaRPr lang="en-US" sz="1500" dirty="0"/>
-          </a:p>
-        </p:txBody>
-      </p:sp>
-      <p:sp>
-        <p:nvSpPr>
-          <p:cNvPr id="7" name="Shape 5"/>
+              <a:t>これはアイデアではない。「エキスパートコース」全6回分のカリキュラム（素材③）として、既に体系化・顕在化された教材が存在する</a:t>
+            </a:r>
+            <a:endParaRPr lang="en-US" sz="1450" dirty="0"/>
+          </a:p>
+        </p:txBody>
+      </p:sp>
+      <p:sp>
+        <p:nvSpPr>
+          <p:cNvPr id="5" name="Shape 3"/>
           <p:cNvSpPr/>
           <p:nvPr/>
         </p:nvSpPr>
         <p:spPr>
           <a:xfrm>
-            <a:off x="640080" y="4709160"/>
-            <a:ext cx="3200400" cy="1280160"/>
+            <a:off x="640080" y="3429000"/>
+            <a:ext cx="2487168" cy="1874520"/>
           </a:xfrm>
           <a:prstGeom prst="roundRect">
             <a:avLst>
-              <a:gd name="adj" fmla="val 7143"/>
+              <a:gd name="adj" fmla="val 4878"/>
             </a:avLst>
           </a:prstGeom>
           <a:solidFill>
-            <a:srgbClr val="F6F1EA"/>
+            <a:srgbClr val="C9603F"/>
           </a:solidFill>
           <a:ln/>
           <a:effectLst>
@@ -5561,14 +4862,154 @@
       </p:sp>
       <p:sp>
         <p:nvSpPr>
+          <p:cNvPr id="6" name="Text 4"/>
+          <p:cNvSpPr txBox="1"/>
+          <p:nvPr/>
+        </p:nvSpPr>
+        <p:spPr>
+          <a:xfrm>
+            <a:off x="804672" y="3593592"/>
+            <a:ext cx="2157984" cy="274320"/>
+          </a:xfrm>
+          <a:prstGeom prst="rect">
+            <a:avLst/>
+          </a:prstGeom>
+          <a:noFill/>
+          <a:ln/>
+        </p:spPr>
+        <p:txBody>
+          <a:bodyPr wrap="square" lIns="0" tIns="0" rIns="0" bIns="0" rtlCol="0" anchor="ctr"/>
+          <a:lstStyle/>
+          <a:p>
+            <a:pPr indent="0" marL="0">
+              <a:buNone/>
+            </a:pPr>
+            <a:r>
+              <a:rPr lang="en-US" sz="1050" b="1" dirty="0">
+                <a:solidFill>
+                  <a:srgbClr val="F1DCCF"/>
+                </a:solidFill>
+                <a:latin typeface="游ゴシック" pitchFamily="34" charset="0"/>
+                <a:ea typeface="游ゴシック" pitchFamily="34" charset="-122"/>
+                <a:cs typeface="游ゴシック" pitchFamily="34" charset="-120"/>
+              </a:rPr>
+              <a:t>実績（現在）</a:t>
+            </a:r>
+            <a:endParaRPr lang="en-US" sz="1050" dirty="0"/>
+          </a:p>
+        </p:txBody>
+      </p:sp>
+      <p:sp>
+        <p:nvSpPr>
+          <p:cNvPr id="7" name="Text 5"/>
+          <p:cNvSpPr txBox="1"/>
+          <p:nvPr/>
+        </p:nvSpPr>
+        <p:spPr>
+          <a:xfrm>
+            <a:off x="804672" y="3886200"/>
+            <a:ext cx="2157984" cy="594360"/>
+          </a:xfrm>
+          <a:prstGeom prst="rect">
+            <a:avLst/>
+          </a:prstGeom>
+          <a:noFill/>
+          <a:ln/>
+        </p:spPr>
+        <p:txBody>
+          <a:bodyPr wrap="square" lIns="0" tIns="0" rIns="0" bIns="0" rtlCol="0" anchor="t"/>
+          <a:lstStyle/>
+          <a:p>
+            <a:pPr indent="0" marL="0">
+              <a:buNone/>
+            </a:pPr>
+            <a:r>
+              <a:rPr lang="en-US" sz="1400" b="1" dirty="0">
+                <a:solidFill>
+                  <a:srgbClr val="FFFFFF"/>
+                </a:solidFill>
+                <a:latin typeface="游ゴシック" pitchFamily="34" charset="0"/>
+                <a:ea typeface="游ゴシック" pitchFamily="34" charset="-122"/>
+                <a:cs typeface="游ゴシック" pitchFamily="34" charset="-120"/>
+              </a:rPr>
+              <a:t>自社での育成</a:t>
+            </a:r>
+            <a:endParaRPr lang="en-US" sz="1400" dirty="0"/>
+          </a:p>
+        </p:txBody>
+      </p:sp>
+      <p:sp>
+        <p:nvSpPr>
           <p:cNvPr id="8" name="Text 6"/>
           <p:cNvSpPr txBox="1"/>
           <p:nvPr/>
         </p:nvSpPr>
         <p:spPr>
           <a:xfrm>
-            <a:off x="777240" y="4873752"/>
-            <a:ext cx="2926080" cy="665683"/>
+            <a:off x="804672" y="4526280"/>
+            <a:ext cx="2157984" cy="685800"/>
+          </a:xfrm>
+          <a:prstGeom prst="rect">
+            <a:avLst/>
+          </a:prstGeom>
+          <a:noFill/>
+          <a:ln/>
+        </p:spPr>
+        <p:txBody>
+          <a:bodyPr wrap="square" lIns="0" tIns="0" rIns="0" bIns="0" rtlCol="0" anchor="t"/>
+          <a:lstStyle/>
+          <a:p>
+            <a:pPr indent="0" marL="0">
+              <a:lnSpc>
+                <a:spcPct val="120000"/>
+              </a:lnSpc>
+              <a:buNone/>
+            </a:pPr>
+            <a:r>
+              <a:rPr lang="en-US" sz="1100" dirty="0">
+                <a:solidFill>
+                  <a:srgbClr val="F8E9DF"/>
+                </a:solidFill>
+                <a:latin typeface="游ゴシック" pitchFamily="34" charset="0"/>
+                <a:ea typeface="游ゴシック" pitchFamily="34" charset="-122"/>
+                <a:cs typeface="游ゴシック" pitchFamily="34" charset="-120"/>
+              </a:rPr>
+              <a:t>エキスパートコース全6回</a:t>
+            </a:r>
+            <a:endParaRPr lang="en-US" sz="1100" dirty="0"/>
+          </a:p>
+          <a:p>
+            <a:pPr indent="0" marL="0">
+              <a:lnSpc>
+                <a:spcPct val="120000"/>
+              </a:lnSpc>
+              <a:buNone/>
+            </a:pPr>
+            <a:r>
+              <a:rPr lang="en-US" sz="1100" dirty="0">
+                <a:solidFill>
+                  <a:srgbClr val="F8E9DF"/>
+                </a:solidFill>
+                <a:latin typeface="游ゴシック" pitchFamily="34" charset="0"/>
+                <a:ea typeface="游ゴシック" pitchFamily="34" charset="-122"/>
+                <a:cs typeface="游ゴシック" pitchFamily="34" charset="-120"/>
+              </a:rPr>
+              <a:t>資格者50名（2年）</a:t>
+            </a:r>
+            <a:endParaRPr lang="en-US" sz="1100" dirty="0"/>
+          </a:p>
+        </p:txBody>
+      </p:sp>
+      <p:sp>
+        <p:nvSpPr>
+          <p:cNvPr id="9" name="Text 7"/>
+          <p:cNvSpPr txBox="1"/>
+          <p:nvPr/>
+        </p:nvSpPr>
+        <p:spPr>
+          <a:xfrm>
+            <a:off x="3127248" y="4091940"/>
+            <a:ext cx="256032" cy="548640"/>
           </a:xfrm>
           <a:prstGeom prst="rect">
             <a:avLst/>
@@ -5584,7 +5025,7 @@
               <a:buNone/>
             </a:pPr>
             <a:r>
-              <a:rPr lang="en-US" sz="2200" b="1" dirty="0">
+              <a:rPr lang="en-US" sz="1600" b="1" dirty="0">
                 <a:solidFill>
                   <a:srgbClr val="C9603F"/>
                 </a:solidFill>
@@ -5592,48 +5033,9 @@
                 <a:ea typeface="游ゴシック" pitchFamily="34" charset="-122"/>
                 <a:cs typeface="游ゴシック" pitchFamily="34" charset="-120"/>
               </a:rPr>
-              <a:t>50事業所</a:t>
-            </a:r>
-            <a:endParaRPr lang="en-US" sz="2200" dirty="0"/>
-          </a:p>
-        </p:txBody>
-      </p:sp>
-      <p:sp>
-        <p:nvSpPr>
-          <p:cNvPr id="9" name="Text 7"/>
-          <p:cNvSpPr txBox="1"/>
-          <p:nvPr/>
-        </p:nvSpPr>
-        <p:spPr>
-          <a:xfrm>
-            <a:off x="731520" y="5426050"/>
-            <a:ext cx="3017520" cy="512064"/>
-          </a:xfrm>
-          <a:prstGeom prst="rect">
-            <a:avLst/>
-          </a:prstGeom>
-          <a:noFill/>
-          <a:ln/>
-        </p:spPr>
-        <p:txBody>
-          <a:bodyPr wrap="square" lIns="0" tIns="0" rIns="0" bIns="0" rtlCol="0" anchor="t"/>
-          <a:lstStyle/>
-          <a:p>
-            <a:pPr algn="ctr" indent="0" marL="0">
-              <a:buNone/>
-            </a:pPr>
-            <a:r>
-              <a:rPr lang="en-US" sz="1100" dirty="0">
-                <a:solidFill>
-                  <a:srgbClr val="1E3A5F"/>
-                </a:solidFill>
-                <a:latin typeface="游ゴシック" pitchFamily="34" charset="0"/>
-                <a:ea typeface="游ゴシック" pitchFamily="34" charset="-122"/>
-                <a:cs typeface="游ゴシック" pitchFamily="34" charset="-120"/>
-              </a:rPr>
-              <a:t>全国の拠点数</a:t>
-            </a:r>
-            <a:endParaRPr lang="en-US" sz="1100" dirty="0"/>
+              <a:t>→</a:t>
+            </a:r>
+            <a:endParaRPr lang="en-US" sz="1600" dirty="0"/>
           </a:p>
         </p:txBody>
       </p:sp>
@@ -5645,12 +5047,12 @@
         </p:nvSpPr>
         <p:spPr>
           <a:xfrm>
-            <a:off x="4251960" y="4709160"/>
-            <a:ext cx="3200400" cy="1280160"/>
+            <a:off x="3383280" y="3429000"/>
+            <a:ext cx="2487168" cy="1874520"/>
           </a:xfrm>
           <a:prstGeom prst="roundRect">
             <a:avLst>
-              <a:gd name="adj" fmla="val 7143"/>
+              <a:gd name="adj" fmla="val 4878"/>
             </a:avLst>
           </a:prstGeom>
           <a:solidFill>
@@ -5674,8 +5076,148 @@
         </p:nvSpPr>
         <p:spPr>
           <a:xfrm>
-            <a:off x="4389120" y="4873752"/>
-            <a:ext cx="2926080" cy="665683"/>
+            <a:off x="3547872" y="3593592"/>
+            <a:ext cx="2157984" cy="274320"/>
+          </a:xfrm>
+          <a:prstGeom prst="rect">
+            <a:avLst/>
+          </a:prstGeom>
+          <a:noFill/>
+          <a:ln/>
+        </p:spPr>
+        <p:txBody>
+          <a:bodyPr wrap="square" lIns="0" tIns="0" rIns="0" bIns="0" rtlCol="0" anchor="ctr"/>
+          <a:lstStyle/>
+          <a:p>
+            <a:pPr indent="0" marL="0">
+              <a:buNone/>
+            </a:pPr>
+            <a:r>
+              <a:rPr lang="en-US" sz="1050" b="1" dirty="0">
+                <a:solidFill>
+                  <a:srgbClr val="C9603F"/>
+                </a:solidFill>
+                <a:latin typeface="游ゴシック" pitchFamily="34" charset="0"/>
+                <a:ea typeface="游ゴシック" pitchFamily="34" charset="-122"/>
+                <a:cs typeface="游ゴシック" pitchFamily="34" charset="-120"/>
+              </a:rPr>
+              <a:t>展望①</a:t>
+            </a:r>
+            <a:endParaRPr lang="en-US" sz="1050" dirty="0"/>
+          </a:p>
+        </p:txBody>
+      </p:sp>
+      <p:sp>
+        <p:nvSpPr>
+          <p:cNvPr id="12" name="Text 10"/>
+          <p:cNvSpPr txBox="1"/>
+          <p:nvPr/>
+        </p:nvSpPr>
+        <p:spPr>
+          <a:xfrm>
+            <a:off x="3547872" y="3886200"/>
+            <a:ext cx="2157984" cy="594360"/>
+          </a:xfrm>
+          <a:prstGeom prst="rect">
+            <a:avLst/>
+          </a:prstGeom>
+          <a:noFill/>
+          <a:ln/>
+        </p:spPr>
+        <p:txBody>
+          <a:bodyPr wrap="square" lIns="0" tIns="0" rIns="0" bIns="0" rtlCol="0" anchor="t"/>
+          <a:lstStyle/>
+          <a:p>
+            <a:pPr indent="0" marL="0">
+              <a:buNone/>
+            </a:pPr>
+            <a:r>
+              <a:rPr lang="en-US" sz="1400" b="1" dirty="0">
+                <a:solidFill>
+                  <a:srgbClr val="1E3A5F"/>
+                </a:solidFill>
+                <a:latin typeface="游ゴシック" pitchFamily="34" charset="0"/>
+                <a:ea typeface="游ゴシック" pitchFamily="34" charset="-122"/>
+                <a:cs typeface="游ゴシック" pitchFamily="34" charset="-120"/>
+              </a:rPr>
+              <a:t>金融機関への採用</a:t>
+            </a:r>
+            <a:endParaRPr lang="en-US" sz="1400" dirty="0"/>
+          </a:p>
+        </p:txBody>
+      </p:sp>
+      <p:sp>
+        <p:nvSpPr>
+          <p:cNvPr id="13" name="Text 11"/>
+          <p:cNvSpPr txBox="1"/>
+          <p:nvPr/>
+        </p:nvSpPr>
+        <p:spPr>
+          <a:xfrm>
+            <a:off x="3547872" y="4526280"/>
+            <a:ext cx="2157984" cy="685800"/>
+          </a:xfrm>
+          <a:prstGeom prst="rect">
+            <a:avLst/>
+          </a:prstGeom>
+          <a:noFill/>
+          <a:ln/>
+        </p:spPr>
+        <p:txBody>
+          <a:bodyPr wrap="square" lIns="0" tIns="0" rIns="0" bIns="0" rtlCol="0" anchor="t"/>
+          <a:lstStyle/>
+          <a:p>
+            <a:pPr indent="0" marL="0">
+              <a:lnSpc>
+                <a:spcPct val="120000"/>
+              </a:lnSpc>
+              <a:buNone/>
+            </a:pPr>
+            <a:r>
+              <a:rPr lang="en-US" sz="1100" dirty="0">
+                <a:solidFill>
+                  <a:srgbClr val="6B6B6B"/>
+                </a:solidFill>
+                <a:latin typeface="游ゴシック" pitchFamily="34" charset="0"/>
+                <a:ea typeface="游ゴシック" pitchFamily="34" charset="-122"/>
+                <a:cs typeface="游ゴシック" pitchFamily="34" charset="-120"/>
+              </a:rPr>
+              <a:t>行員研修プログラム</a:t>
+            </a:r>
+            <a:endParaRPr lang="en-US" sz="1100" dirty="0"/>
+          </a:p>
+          <a:p>
+            <a:pPr indent="0" marL="0">
+              <a:lnSpc>
+                <a:spcPct val="120000"/>
+              </a:lnSpc>
+              <a:buNone/>
+            </a:pPr>
+            <a:r>
+              <a:rPr lang="en-US" sz="1100" dirty="0">
+                <a:solidFill>
+                  <a:srgbClr val="6B6B6B"/>
+                </a:solidFill>
+                <a:latin typeface="游ゴシック" pitchFamily="34" charset="0"/>
+                <a:ea typeface="游ゴシック" pitchFamily="34" charset="-122"/>
+                <a:cs typeface="游ゴシック" pitchFamily="34" charset="-120"/>
+              </a:rPr>
+              <a:t>として導入</a:t>
+            </a:r>
+            <a:endParaRPr lang="en-US" sz="1100" dirty="0"/>
+          </a:p>
+        </p:txBody>
+      </p:sp>
+      <p:sp>
+        <p:nvSpPr>
+          <p:cNvPr id="14" name="Text 12"/>
+          <p:cNvSpPr txBox="1"/>
+          <p:nvPr/>
+        </p:nvSpPr>
+        <p:spPr>
+          <a:xfrm>
+            <a:off x="5870448" y="4091940"/>
+            <a:ext cx="256032" cy="548640"/>
           </a:xfrm>
           <a:prstGeom prst="rect">
             <a:avLst/>
@@ -5691,7 +5233,7 @@
               <a:buNone/>
             </a:pPr>
             <a:r>
-              <a:rPr lang="en-US" sz="2200" b="1" dirty="0">
+              <a:rPr lang="en-US" sz="1600" b="1" dirty="0">
                 <a:solidFill>
                   <a:srgbClr val="C9603F"/>
                 </a:solidFill>
@@ -5699,65 +5241,26 @@
                 <a:ea typeface="游ゴシック" pitchFamily="34" charset="-122"/>
                 <a:cs typeface="游ゴシック" pitchFamily="34" charset="-120"/>
               </a:rPr>
-              <a:t>資産5〜10億円超</a:t>
-            </a:r>
-            <a:endParaRPr lang="en-US" sz="2200" dirty="0"/>
-          </a:p>
-        </p:txBody>
-      </p:sp>
-      <p:sp>
-        <p:nvSpPr>
-          <p:cNvPr id="12" name="Text 10"/>
-          <p:cNvSpPr txBox="1"/>
-          <p:nvPr/>
-        </p:nvSpPr>
-        <p:spPr>
-          <a:xfrm>
-            <a:off x="4343400" y="5426050"/>
-            <a:ext cx="3017520" cy="512064"/>
-          </a:xfrm>
-          <a:prstGeom prst="rect">
-            <a:avLst/>
-          </a:prstGeom>
-          <a:noFill/>
-          <a:ln/>
-        </p:spPr>
-        <p:txBody>
-          <a:bodyPr wrap="square" lIns="0" tIns="0" rIns="0" bIns="0" rtlCol="0" anchor="t"/>
-          <a:lstStyle/>
-          <a:p>
-            <a:pPr algn="ctr" indent="0" marL="0">
-              <a:buNone/>
-            </a:pPr>
-            <a:r>
-              <a:rPr lang="en-US" sz="1100" dirty="0">
-                <a:solidFill>
-                  <a:srgbClr val="1E3A5F"/>
-                </a:solidFill>
-                <a:latin typeface="游ゴシック" pitchFamily="34" charset="0"/>
-                <a:ea typeface="游ゴシック" pitchFamily="34" charset="-122"/>
-                <a:cs typeface="游ゴシック" pitchFamily="34" charset="-120"/>
-              </a:rPr>
-              <a:t>直接の顧客層</a:t>
-            </a:r>
-            <a:endParaRPr lang="en-US" sz="1100" dirty="0"/>
-          </a:p>
-        </p:txBody>
-      </p:sp>
-      <p:sp>
-        <p:nvSpPr>
-          <p:cNvPr id="13" name="Shape 11"/>
+              <a:t>→</a:t>
+            </a:r>
+            <a:endParaRPr lang="en-US" sz="1600" dirty="0"/>
+          </a:p>
+        </p:txBody>
+      </p:sp>
+      <p:sp>
+        <p:nvSpPr>
+          <p:cNvPr id="15" name="Shape 13"/>
           <p:cNvSpPr/>
           <p:nvPr/>
         </p:nvSpPr>
         <p:spPr>
           <a:xfrm>
-            <a:off x="7863840" y="4709160"/>
-            <a:ext cx="3200400" cy="1280160"/>
+            <a:off x="6126480" y="3429000"/>
+            <a:ext cx="2487168" cy="1874520"/>
           </a:xfrm>
           <a:prstGeom prst="roundRect">
             <a:avLst>
-              <a:gd name="adj" fmla="val 7143"/>
+              <a:gd name="adj" fmla="val 4878"/>
             </a:avLst>
           </a:prstGeom>
           <a:solidFill>
@@ -5775,14 +5278,154 @@
       </p:sp>
       <p:sp>
         <p:nvSpPr>
-          <p:cNvPr id="14" name="Text 12"/>
-          <p:cNvSpPr txBox="1"/>
-          <p:nvPr/>
-        </p:nvSpPr>
-        <p:spPr>
-          <a:xfrm>
-            <a:off x="8001000" y="4873752"/>
-            <a:ext cx="2926080" cy="665683"/>
+          <p:cNvPr id="16" name="Text 14"/>
+          <p:cNvSpPr txBox="1"/>
+          <p:nvPr/>
+        </p:nvSpPr>
+        <p:spPr>
+          <a:xfrm>
+            <a:off x="6291072" y="3593592"/>
+            <a:ext cx="2157984" cy="274320"/>
+          </a:xfrm>
+          <a:prstGeom prst="rect">
+            <a:avLst/>
+          </a:prstGeom>
+          <a:noFill/>
+          <a:ln/>
+        </p:spPr>
+        <p:txBody>
+          <a:bodyPr wrap="square" lIns="0" tIns="0" rIns="0" bIns="0" rtlCol="0" anchor="ctr"/>
+          <a:lstStyle/>
+          <a:p>
+            <a:pPr indent="0" marL="0">
+              <a:buNone/>
+            </a:pPr>
+            <a:r>
+              <a:rPr lang="en-US" sz="1050" b="1" dirty="0">
+                <a:solidFill>
+                  <a:srgbClr val="C9603F"/>
+                </a:solidFill>
+                <a:latin typeface="游ゴシック" pitchFamily="34" charset="0"/>
+                <a:ea typeface="游ゴシック" pitchFamily="34" charset="-122"/>
+                <a:cs typeface="游ゴシック" pitchFamily="34" charset="-120"/>
+              </a:rPr>
+              <a:t>展望②</a:t>
+            </a:r>
+            <a:endParaRPr lang="en-US" sz="1050" dirty="0"/>
+          </a:p>
+        </p:txBody>
+      </p:sp>
+      <p:sp>
+        <p:nvSpPr>
+          <p:cNvPr id="17" name="Text 15"/>
+          <p:cNvSpPr txBox="1"/>
+          <p:nvPr/>
+        </p:nvSpPr>
+        <p:spPr>
+          <a:xfrm>
+            <a:off x="6291072" y="3886200"/>
+            <a:ext cx="2157984" cy="594360"/>
+          </a:xfrm>
+          <a:prstGeom prst="rect">
+            <a:avLst/>
+          </a:prstGeom>
+          <a:noFill/>
+          <a:ln/>
+        </p:spPr>
+        <p:txBody>
+          <a:bodyPr wrap="square" lIns="0" tIns="0" rIns="0" bIns="0" rtlCol="0" anchor="t"/>
+          <a:lstStyle/>
+          <a:p>
+            <a:pPr indent="0" marL="0">
+              <a:buNone/>
+            </a:pPr>
+            <a:r>
+              <a:rPr lang="en-US" sz="1400" b="1" dirty="0">
+                <a:solidFill>
+                  <a:srgbClr val="1E3A5F"/>
+                </a:solidFill>
+                <a:latin typeface="游ゴシック" pitchFamily="34" charset="0"/>
+                <a:ea typeface="游ゴシック" pitchFamily="34" charset="-122"/>
+                <a:cs typeface="游ゴシック" pitchFamily="34" charset="-120"/>
+              </a:rPr>
+              <a:t>不動産・士業への展開</a:t>
+            </a:r>
+            <a:endParaRPr lang="en-US" sz="1400" dirty="0"/>
+          </a:p>
+        </p:txBody>
+      </p:sp>
+      <p:sp>
+        <p:nvSpPr>
+          <p:cNvPr id="18" name="Text 16"/>
+          <p:cNvSpPr txBox="1"/>
+          <p:nvPr/>
+        </p:nvSpPr>
+        <p:spPr>
+          <a:xfrm>
+            <a:off x="6291072" y="4526280"/>
+            <a:ext cx="2157984" cy="685800"/>
+          </a:xfrm>
+          <a:prstGeom prst="rect">
+            <a:avLst/>
+          </a:prstGeom>
+          <a:noFill/>
+          <a:ln/>
+        </p:spPr>
+        <p:txBody>
+          <a:bodyPr wrap="square" lIns="0" tIns="0" rIns="0" bIns="0" rtlCol="0" anchor="t"/>
+          <a:lstStyle/>
+          <a:p>
+            <a:pPr indent="0" marL="0">
+              <a:lnSpc>
+                <a:spcPct val="120000"/>
+              </a:lnSpc>
+              <a:buNone/>
+            </a:pPr>
+            <a:r>
+              <a:rPr lang="en-US" sz="1100" dirty="0">
+                <a:solidFill>
+                  <a:srgbClr val="6B6B6B"/>
+                </a:solidFill>
+                <a:latin typeface="游ゴシック" pitchFamily="34" charset="0"/>
+                <a:ea typeface="游ゴシック" pitchFamily="34" charset="-122"/>
+                <a:cs typeface="游ゴシック" pitchFamily="34" charset="-120"/>
+              </a:rPr>
+              <a:t>業界横断の</a:t>
+            </a:r>
+            <a:endParaRPr lang="en-US" sz="1100" dirty="0"/>
+          </a:p>
+          <a:p>
+            <a:pPr indent="0" marL="0">
+              <a:lnSpc>
+                <a:spcPct val="120000"/>
+              </a:lnSpc>
+              <a:buNone/>
+            </a:pPr>
+            <a:r>
+              <a:rPr lang="en-US" sz="1100" dirty="0">
+                <a:solidFill>
+                  <a:srgbClr val="6B6B6B"/>
+                </a:solidFill>
+                <a:latin typeface="游ゴシック" pitchFamily="34" charset="0"/>
+                <a:ea typeface="游ゴシック" pitchFamily="34" charset="-122"/>
+                <a:cs typeface="游ゴシック" pitchFamily="34" charset="-120"/>
+              </a:rPr>
+              <a:t>標準研修へ</a:t>
+            </a:r>
+            <a:endParaRPr lang="en-US" sz="1100" dirty="0"/>
+          </a:p>
+        </p:txBody>
+      </p:sp>
+      <p:sp>
+        <p:nvSpPr>
+          <p:cNvPr id="19" name="Text 17"/>
+          <p:cNvSpPr txBox="1"/>
+          <p:nvPr/>
+        </p:nvSpPr>
+        <p:spPr>
+          <a:xfrm>
+            <a:off x="8613648" y="4091940"/>
+            <a:ext cx="256032" cy="548640"/>
           </a:xfrm>
           <a:prstGeom prst="rect">
             <a:avLst/>
@@ -5798,7 +5441,7 @@
               <a:buNone/>
             </a:pPr>
             <a:r>
-              <a:rPr lang="en-US" sz="2200" b="1" dirty="0">
+              <a:rPr lang="en-US" sz="1600" b="1" dirty="0">
                 <a:solidFill>
                   <a:srgbClr val="C9603F"/>
                 </a:solidFill>
@@ -5806,22 +5449,90 @@
                 <a:ea typeface="游ゴシック" pitchFamily="34" charset="-122"/>
                 <a:cs typeface="游ゴシック" pitchFamily="34" charset="-120"/>
               </a:rPr>
-              <a:t>約100億円</a:t>
-            </a:r>
-            <a:endParaRPr lang="en-US" sz="2200" dirty="0"/>
-          </a:p>
-        </p:txBody>
-      </p:sp>
-      <p:sp>
-        <p:nvSpPr>
-          <p:cNvPr id="15" name="Text 13"/>
-          <p:cNvSpPr txBox="1"/>
-          <p:nvPr/>
-        </p:nvSpPr>
-        <p:spPr>
-          <a:xfrm>
-            <a:off x="7955280" y="5426050"/>
-            <a:ext cx="3017520" cy="512064"/>
+              <a:t>→</a:t>
+            </a:r>
+            <a:endParaRPr lang="en-US" sz="1600" dirty="0"/>
+          </a:p>
+        </p:txBody>
+      </p:sp>
+      <p:sp>
+        <p:nvSpPr>
+          <p:cNvPr id="20" name="Shape 18"/>
+          <p:cNvSpPr/>
+          <p:nvPr/>
+        </p:nvSpPr>
+        <p:spPr>
+          <a:xfrm>
+            <a:off x="8869680" y="3429000"/>
+            <a:ext cx="2487168" cy="1874520"/>
+          </a:xfrm>
+          <a:prstGeom prst="roundRect">
+            <a:avLst>
+              <a:gd name="adj" fmla="val 4878"/>
+            </a:avLst>
+          </a:prstGeom>
+          <a:solidFill>
+            <a:srgbClr val="F6F1EA"/>
+          </a:solidFill>
+          <a:ln/>
+          <a:effectLst>
+            <a:outerShdw sx="100000" sy="100000" kx="0" ky="0" algn="bl" rotWithShape="0" blurRad="101600" dist="38100" dir="5400000">
+              <a:srgbClr val="10233A">
+                <a:alpha val="18000"/>
+              </a:srgbClr>
+            </a:outerShdw>
+          </a:effectLst>
+        </p:spPr>
+      </p:sp>
+      <p:sp>
+        <p:nvSpPr>
+          <p:cNvPr id="21" name="Text 19"/>
+          <p:cNvSpPr txBox="1"/>
+          <p:nvPr/>
+        </p:nvSpPr>
+        <p:spPr>
+          <a:xfrm>
+            <a:off x="9034272" y="3593592"/>
+            <a:ext cx="2157984" cy="274320"/>
+          </a:xfrm>
+          <a:prstGeom prst="rect">
+            <a:avLst/>
+          </a:prstGeom>
+          <a:noFill/>
+          <a:ln/>
+        </p:spPr>
+        <p:txBody>
+          <a:bodyPr wrap="square" lIns="0" tIns="0" rIns="0" bIns="0" rtlCol="0" anchor="ctr"/>
+          <a:lstStyle/>
+          <a:p>
+            <a:pPr indent="0" marL="0">
+              <a:buNone/>
+            </a:pPr>
+            <a:r>
+              <a:rPr lang="en-US" sz="1050" b="1" dirty="0">
+                <a:solidFill>
+                  <a:srgbClr val="C9603F"/>
+                </a:solidFill>
+                <a:latin typeface="游ゴシック" pitchFamily="34" charset="0"/>
+                <a:ea typeface="游ゴシック" pitchFamily="34" charset="-122"/>
+                <a:cs typeface="游ゴシック" pitchFamily="34" charset="-120"/>
+              </a:rPr>
+              <a:t>展望③</a:t>
+            </a:r>
+            <a:endParaRPr lang="en-US" sz="1050" dirty="0"/>
+          </a:p>
+        </p:txBody>
+      </p:sp>
+      <p:sp>
+        <p:nvSpPr>
+          <p:cNvPr id="22" name="Text 20"/>
+          <p:cNvSpPr txBox="1"/>
+          <p:nvPr/>
+        </p:nvSpPr>
+        <p:spPr>
+          <a:xfrm>
+            <a:off x="9034272" y="3886200"/>
+            <a:ext cx="2157984" cy="594360"/>
           </a:xfrm>
           <a:prstGeom prst="rect">
             <a:avLst/>
@@ -5833,27 +5544,145 @@
           <a:bodyPr wrap="square" lIns="0" tIns="0" rIns="0" bIns="0" rtlCol="0" anchor="t"/>
           <a:lstStyle/>
           <a:p>
-            <a:pPr algn="ctr" indent="0" marL="0">
+            <a:pPr indent="0" marL="0">
+              <a:buNone/>
+            </a:pPr>
+            <a:r>
+              <a:rPr lang="en-US" sz="1400" b="1" dirty="0">
+                <a:solidFill>
+                  <a:srgbClr val="1E3A5F"/>
+                </a:solidFill>
+                <a:latin typeface="游ゴシック" pitchFamily="34" charset="0"/>
+                <a:ea typeface="游ゴシック" pitchFamily="34" charset="-122"/>
+                <a:cs typeface="游ゴシック" pitchFamily="34" charset="-120"/>
+              </a:rPr>
+              <a:t>繋ぐノートサポート</a:t>
+            </a:r>
+            <a:endParaRPr lang="en-US" sz="1400" dirty="0"/>
+          </a:p>
+          <a:p>
+            <a:pPr indent="0" marL="0">
+              <a:buNone/>
+            </a:pPr>
+            <a:r>
+              <a:rPr lang="en-US" sz="1400" b="1" dirty="0">
+                <a:solidFill>
+                  <a:srgbClr val="1E3A5F"/>
+                </a:solidFill>
+                <a:latin typeface="游ゴシック" pitchFamily="34" charset="0"/>
+                <a:ea typeface="游ゴシック" pitchFamily="34" charset="-122"/>
+                <a:cs typeface="游ゴシック" pitchFamily="34" charset="-120"/>
+              </a:rPr>
+              <a:t>アドバイザー®の輩出</a:t>
+            </a:r>
+            <a:endParaRPr lang="en-US" sz="1400" dirty="0"/>
+          </a:p>
+        </p:txBody>
+      </p:sp>
+      <p:sp>
+        <p:nvSpPr>
+          <p:cNvPr id="23" name="Text 21"/>
+          <p:cNvSpPr txBox="1"/>
+          <p:nvPr/>
+        </p:nvSpPr>
+        <p:spPr>
+          <a:xfrm>
+            <a:off x="9034272" y="4526280"/>
+            <a:ext cx="2157984" cy="685800"/>
+          </a:xfrm>
+          <a:prstGeom prst="rect">
+            <a:avLst/>
+          </a:prstGeom>
+          <a:noFill/>
+          <a:ln/>
+        </p:spPr>
+        <p:txBody>
+          <a:bodyPr wrap="square" lIns="0" tIns="0" rIns="0" bIns="0" rtlCol="0" anchor="t"/>
+          <a:lstStyle/>
+          <a:p>
+            <a:pPr indent="0" marL="0">
+              <a:lnSpc>
+                <a:spcPct val="120000"/>
+              </a:lnSpc>
               <a:buNone/>
             </a:pPr>
             <a:r>
               <a:rPr lang="en-US" sz="1100" dirty="0">
                 <a:solidFill>
-                  <a:srgbClr val="1E3A5F"/>
-                </a:solidFill>
-                <a:latin typeface="游ゴシック" pitchFamily="34" charset="0"/>
-                <a:ea typeface="游ゴシック" pitchFamily="34" charset="-122"/>
-                <a:cs typeface="游ゴシック" pitchFamily="34" charset="-120"/>
-              </a:rPr>
-              <a:t>周辺経済圏</a:t>
+                  <a:srgbClr val="6B6B6B"/>
+                </a:solidFill>
+                <a:latin typeface="游ゴシック" pitchFamily="34" charset="0"/>
+                <a:ea typeface="游ゴシック" pitchFamily="34" charset="-122"/>
+                <a:cs typeface="游ゴシック" pitchFamily="34" charset="-120"/>
+              </a:rPr>
+              <a:t>業種を越えて「生きる準備」</a:t>
             </a:r>
             <a:endParaRPr lang="en-US" sz="1100" dirty="0"/>
           </a:p>
-        </p:txBody>
-      </p:sp>
-      <p:sp>
-        <p:nvSpPr>
-          <p:cNvPr id="16" name="Text 14"/>
+          <a:p>
+            <a:pPr indent="0" marL="0">
+              <a:lnSpc>
+                <a:spcPct val="120000"/>
+              </a:lnSpc>
+              <a:buNone/>
+            </a:pPr>
+            <a:r>
+              <a:rPr lang="en-US" sz="1100" dirty="0">
+                <a:solidFill>
+                  <a:srgbClr val="6B6B6B"/>
+                </a:solidFill>
+                <a:latin typeface="游ゴシック" pitchFamily="34" charset="0"/>
+                <a:ea typeface="游ゴシック" pitchFamily="34" charset="-122"/>
+                <a:cs typeface="游ゴシック" pitchFamily="34" charset="-120"/>
+              </a:rPr>
+              <a:t>を届ける人を全国に</a:t>
+            </a:r>
+            <a:endParaRPr lang="en-US" sz="1100" dirty="0"/>
+          </a:p>
+        </p:txBody>
+      </p:sp>
+      <p:sp>
+        <p:nvSpPr>
+          <p:cNvPr id="24" name="Text 22"/>
+          <p:cNvSpPr txBox="1"/>
+          <p:nvPr/>
+        </p:nvSpPr>
+        <p:spPr>
+          <a:xfrm>
+            <a:off x="640080" y="5577840"/>
+            <a:ext cx="10881360" cy="457200"/>
+          </a:xfrm>
+          <a:prstGeom prst="rect">
+            <a:avLst/>
+          </a:prstGeom>
+          <a:noFill/>
+          <a:ln/>
+        </p:spPr>
+        <p:txBody>
+          <a:bodyPr wrap="square" lIns="0" tIns="0" rIns="0" bIns="0" rtlCol="0" anchor="ctr"/>
+          <a:lstStyle/>
+          <a:p>
+            <a:pPr indent="0" marL="0">
+              <a:buNone/>
+            </a:pPr>
+            <a:r>
+              <a:rPr lang="en-US" sz="1300" i="1" dirty="0">
+                <a:solidFill>
+                  <a:srgbClr val="6B6B6B"/>
+                </a:solidFill>
+                <a:latin typeface="游ゴシック" pitchFamily="34" charset="0"/>
+                <a:ea typeface="游ゴシック" pitchFamily="34" charset="-122"/>
+                <a:cs typeface="游ゴシック" pitchFamily="34" charset="-120"/>
+              </a:rPr>
+              <a:t>「教育コンテンツ」という形のある資産が、相続コンサルティングの提供だけでなく、採用・ライセンスという新しい収益源になりうる。</a:t>
+            </a:r>
+            <a:endParaRPr lang="en-US" sz="1300" dirty="0"/>
+          </a:p>
+        </p:txBody>
+      </p:sp>
+      <p:sp>
+        <p:nvSpPr>
+          <p:cNvPr id="25" name="Text 23"/>
           <p:cNvSpPr txBox="1"/>
           <p:nvPr/>
         </p:nvSpPr>
@@ -5955,7 +5784,7 @@
                 <a:ea typeface="游ゴシック" pitchFamily="34" charset="-122"/>
                 <a:cs typeface="游ゴシック" pitchFamily="34" charset="-120"/>
               </a:rPr>
-              <a:t>05 / ADVANTAGE</a:t>
+              <a:t>04 / MARKET</a:t>
             </a:r>
             <a:endParaRPr lang="en-US" sz="1300" dirty="0"/>
           </a:p>
@@ -5994,7 +5823,7 @@
                 <a:ea typeface="游ゴシック" pitchFamily="34" charset="-122"/>
                 <a:cs typeface="游ゴシック" pitchFamily="34" charset="-120"/>
               </a:rPr>
-              <a:t>優位性 ― 「バッジのない」からこそ生まれた協業モデル</a:t>
+              <a:t>市場性 ― 「財産がある人」から、全世代・全業種へ</a:t>
             </a:r>
             <a:endParaRPr lang="en-US" sz="2700" dirty="0"/>
           </a:p>
@@ -6060,7 +5889,7 @@
                 <a:ea typeface="游ゴシック" pitchFamily="34" charset="-122"/>
                 <a:cs typeface="游ゴシック" pitchFamily="34" charset="-120"/>
               </a:rPr>
-              <a:t>優</a:t>
+              <a:t>市</a:t>
             </a:r>
             <a:endParaRPr lang="en-US" sz="2880" dirty="0"/>
           </a:p>
@@ -6068,75 +5897,14 @@
       </p:sp>
       <p:sp>
         <p:nvSpPr>
-          <p:cNvPr id="6" name="Shape 4"/>
-          <p:cNvSpPr/>
+          <p:cNvPr id="6" name="Text 4"/>
+          <p:cNvSpPr txBox="1"/>
           <p:nvPr/>
         </p:nvSpPr>
         <p:spPr>
           <a:xfrm>
             <a:off x="640080" y="1783080"/>
-            <a:ext cx="10881360" cy="822960"/>
-          </a:xfrm>
-          <a:prstGeom prst="roundRect">
-            <a:avLst>
-              <a:gd name="adj" fmla="val 8889"/>
-            </a:avLst>
-          </a:prstGeom>
-          <a:solidFill>
-            <a:srgbClr val="1E3A5F"/>
-          </a:solidFill>
-          <a:ln/>
-        </p:spPr>
-      </p:sp>
-      <p:sp>
-        <p:nvSpPr>
-          <p:cNvPr id="7" name="Text 5"/>
-          <p:cNvSpPr txBox="1"/>
-          <p:nvPr/>
-        </p:nvSpPr>
-        <p:spPr>
-          <a:xfrm>
-            <a:off x="914400" y="1783080"/>
-            <a:ext cx="10332720" cy="822960"/>
-          </a:xfrm>
-          <a:prstGeom prst="rect">
-            <a:avLst/>
-          </a:prstGeom>
-          <a:noFill/>
-          <a:ln/>
-        </p:spPr>
-        <p:txBody>
-          <a:bodyPr wrap="square" lIns="0" tIns="0" rIns="0" bIns="0" rtlCol="0" anchor="ctr"/>
-          <a:lstStyle/>
-          <a:p>
-            <a:pPr algn="l" indent="0" marL="0">
-              <a:buNone/>
-            </a:pPr>
-            <a:r>
-              <a:rPr lang="en-US" sz="1450" i="1" dirty="0">
-                <a:solidFill>
-                  <a:srgbClr val="F1DCCF"/>
-                </a:solidFill>
-                <a:latin typeface="游ゴシック" pitchFamily="34" charset="0"/>
-                <a:ea typeface="游ゴシック" pitchFamily="34" charset="-122"/>
-                <a:cs typeface="游ゴシック" pitchFamily="34" charset="-120"/>
-              </a:rPr>
-              <a:t>『バッジのない、コンサルタントに、相続ビジネスの何ができるのか？』―起業当初、ある士業の先生に言われた言葉</a:t>
-            </a:r>
-            <a:endParaRPr lang="en-US" sz="1450" dirty="0"/>
-          </a:p>
-        </p:txBody>
-      </p:sp>
-      <p:sp>
-        <p:nvSpPr>
-          <p:cNvPr id="8" name="Text 6"/>
-          <p:cNvSpPr txBox="1"/>
-          <p:nvPr/>
-        </p:nvSpPr>
-        <p:spPr>
-          <a:xfrm>
-            <a:off x="640080" y="2834640"/>
-            <a:ext cx="10881360" cy="3154680"/>
+            <a:ext cx="10881360" cy="4206240"/>
           </a:xfrm>
           <a:prstGeom prst="rect">
             <a:avLst/>
@@ -6167,7 +5935,7 @@
                 <a:ea typeface="游ゴシック" pitchFamily="34" charset="-122"/>
                 <a:cs typeface="游ゴシック" pitchFamily="34" charset="-120"/>
               </a:rPr>
-              <a:t>その後、「士業の先生が私に足を向けて寝れないくらい」仕事を生み出し続け、自分の収益だけを追わない「本当の協業スタイル」を確立（素材①）</a:t>
+              <a:t>直接のターゲット：資産5億円〜10億円超の富裕層・超富裕層（素材①）</a:t>
             </a:r>
             <a:endParaRPr lang="en-US" sz="1500" dirty="0"/>
           </a:p>
@@ -6191,7 +5959,7 @@
                 <a:ea typeface="游ゴシック" pitchFamily="34" charset="-122"/>
                 <a:cs typeface="游ゴシック" pitchFamily="34" charset="-120"/>
               </a:rPr>
-              <a:t>この協業の仕組みを、第3回（紹介構造）・第4回（“人生の指揮官”モデル）のカリキュラムとして教材化し、再現可能な技術にしている（素材③）</a:t>
+              <a:t>ACPを入口にすることで、財産の有無に関わらず誰もがターゲットになる市場へ構造的に拡大（素材②）</a:t>
             </a:r>
             <a:endParaRPr lang="en-US" sz="1500" dirty="0"/>
           </a:p>
@@ -6215,7 +5983,7 @@
                 <a:ea typeface="游ゴシック" pitchFamily="34" charset="-122"/>
                 <a:cs typeface="游ゴシック" pitchFamily="34" charset="-120"/>
               </a:rPr>
-              <a:t>「財産に着目する」のではなく「家族の隠れた課題を見つけに行く」という視点そのものが、他の相続コンサル・士業・金融機関にはない方法論的な差別化</a:t>
+              <a:t>周辺専門家（税理士・司法書士・行政書士・弁護士・不動産・金融・有料老人ホーム・M&amp;A）を含めれば、市場は相続業界単体にとどまらない</a:t>
             </a:r>
             <a:endParaRPr lang="en-US" sz="1500" dirty="0"/>
           </a:p>
@@ -6223,7 +5991,328 @@
       </p:sp>
       <p:sp>
         <p:nvSpPr>
+          <p:cNvPr id="7" name="Shape 5"/>
+          <p:cNvSpPr/>
+          <p:nvPr/>
+        </p:nvSpPr>
+        <p:spPr>
+          <a:xfrm>
+            <a:off x="640080" y="4709160"/>
+            <a:ext cx="3200400" cy="1280160"/>
+          </a:xfrm>
+          <a:prstGeom prst="roundRect">
+            <a:avLst>
+              <a:gd name="adj" fmla="val 7143"/>
+            </a:avLst>
+          </a:prstGeom>
+          <a:solidFill>
+            <a:srgbClr val="F6F1EA"/>
+          </a:solidFill>
+          <a:ln/>
+          <a:effectLst>
+            <a:outerShdw sx="100000" sy="100000" kx="0" ky="0" algn="bl" rotWithShape="0" blurRad="101600" dist="38100" dir="5400000">
+              <a:srgbClr val="10233A">
+                <a:alpha val="18000"/>
+              </a:srgbClr>
+            </a:outerShdw>
+          </a:effectLst>
+        </p:spPr>
+      </p:sp>
+      <p:sp>
+        <p:nvSpPr>
+          <p:cNvPr id="8" name="Text 6"/>
+          <p:cNvSpPr txBox="1"/>
+          <p:nvPr/>
+        </p:nvSpPr>
+        <p:spPr>
+          <a:xfrm>
+            <a:off x="777240" y="4873752"/>
+            <a:ext cx="2926080" cy="665683"/>
+          </a:xfrm>
+          <a:prstGeom prst="rect">
+            <a:avLst/>
+          </a:prstGeom>
+          <a:noFill/>
+          <a:ln/>
+        </p:spPr>
+        <p:txBody>
+          <a:bodyPr wrap="square" lIns="0" tIns="0" rIns="0" bIns="0" rtlCol="0" anchor="ctr"/>
+          <a:lstStyle/>
+          <a:p>
+            <a:pPr algn="ctr" indent="0" marL="0">
+              <a:buNone/>
+            </a:pPr>
+            <a:r>
+              <a:rPr lang="en-US" sz="2200" b="1" dirty="0">
+                <a:solidFill>
+                  <a:srgbClr val="C9603F"/>
+                </a:solidFill>
+                <a:latin typeface="游ゴシック" pitchFamily="34" charset="0"/>
+                <a:ea typeface="游ゴシック" pitchFamily="34" charset="-122"/>
+                <a:cs typeface="游ゴシック" pitchFamily="34" charset="-120"/>
+              </a:rPr>
+              <a:t>50事業所</a:t>
+            </a:r>
+            <a:endParaRPr lang="en-US" sz="2200" dirty="0"/>
+          </a:p>
+        </p:txBody>
+      </p:sp>
+      <p:sp>
+        <p:nvSpPr>
           <p:cNvPr id="9" name="Text 7"/>
+          <p:cNvSpPr txBox="1"/>
+          <p:nvPr/>
+        </p:nvSpPr>
+        <p:spPr>
+          <a:xfrm>
+            <a:off x="731520" y="5426050"/>
+            <a:ext cx="3017520" cy="512064"/>
+          </a:xfrm>
+          <a:prstGeom prst="rect">
+            <a:avLst/>
+          </a:prstGeom>
+          <a:noFill/>
+          <a:ln/>
+        </p:spPr>
+        <p:txBody>
+          <a:bodyPr wrap="square" lIns="0" tIns="0" rIns="0" bIns="0" rtlCol="0" anchor="t"/>
+          <a:lstStyle/>
+          <a:p>
+            <a:pPr algn="ctr" indent="0" marL="0">
+              <a:buNone/>
+            </a:pPr>
+            <a:r>
+              <a:rPr lang="en-US" sz="1100" dirty="0">
+                <a:solidFill>
+                  <a:srgbClr val="1E3A5F"/>
+                </a:solidFill>
+                <a:latin typeface="游ゴシック" pitchFamily="34" charset="0"/>
+                <a:ea typeface="游ゴシック" pitchFamily="34" charset="-122"/>
+                <a:cs typeface="游ゴシック" pitchFamily="34" charset="-120"/>
+              </a:rPr>
+              <a:t>全国の拠点数</a:t>
+            </a:r>
+            <a:endParaRPr lang="en-US" sz="1100" dirty="0"/>
+          </a:p>
+        </p:txBody>
+      </p:sp>
+      <p:sp>
+        <p:nvSpPr>
+          <p:cNvPr id="10" name="Shape 8"/>
+          <p:cNvSpPr/>
+          <p:nvPr/>
+        </p:nvSpPr>
+        <p:spPr>
+          <a:xfrm>
+            <a:off x="4251960" y="4709160"/>
+            <a:ext cx="3200400" cy="1280160"/>
+          </a:xfrm>
+          <a:prstGeom prst="roundRect">
+            <a:avLst>
+              <a:gd name="adj" fmla="val 7143"/>
+            </a:avLst>
+          </a:prstGeom>
+          <a:solidFill>
+            <a:srgbClr val="F6F1EA"/>
+          </a:solidFill>
+          <a:ln/>
+          <a:effectLst>
+            <a:outerShdw sx="100000" sy="100000" kx="0" ky="0" algn="bl" rotWithShape="0" blurRad="101600" dist="38100" dir="5400000">
+              <a:srgbClr val="10233A">
+                <a:alpha val="18000"/>
+              </a:srgbClr>
+            </a:outerShdw>
+          </a:effectLst>
+        </p:spPr>
+      </p:sp>
+      <p:sp>
+        <p:nvSpPr>
+          <p:cNvPr id="11" name="Text 9"/>
+          <p:cNvSpPr txBox="1"/>
+          <p:nvPr/>
+        </p:nvSpPr>
+        <p:spPr>
+          <a:xfrm>
+            <a:off x="4389120" y="4873752"/>
+            <a:ext cx="2926080" cy="665683"/>
+          </a:xfrm>
+          <a:prstGeom prst="rect">
+            <a:avLst/>
+          </a:prstGeom>
+          <a:noFill/>
+          <a:ln/>
+        </p:spPr>
+        <p:txBody>
+          <a:bodyPr wrap="square" lIns="0" tIns="0" rIns="0" bIns="0" rtlCol="0" anchor="ctr"/>
+          <a:lstStyle/>
+          <a:p>
+            <a:pPr algn="ctr" indent="0" marL="0">
+              <a:buNone/>
+            </a:pPr>
+            <a:r>
+              <a:rPr lang="en-US" sz="2200" b="1" dirty="0">
+                <a:solidFill>
+                  <a:srgbClr val="C9603F"/>
+                </a:solidFill>
+                <a:latin typeface="游ゴシック" pitchFamily="34" charset="0"/>
+                <a:ea typeface="游ゴシック" pitchFamily="34" charset="-122"/>
+                <a:cs typeface="游ゴシック" pitchFamily="34" charset="-120"/>
+              </a:rPr>
+              <a:t>資産5〜10億円超</a:t>
+            </a:r>
+            <a:endParaRPr lang="en-US" sz="2200" dirty="0"/>
+          </a:p>
+        </p:txBody>
+      </p:sp>
+      <p:sp>
+        <p:nvSpPr>
+          <p:cNvPr id="12" name="Text 10"/>
+          <p:cNvSpPr txBox="1"/>
+          <p:nvPr/>
+        </p:nvSpPr>
+        <p:spPr>
+          <a:xfrm>
+            <a:off x="4343400" y="5426050"/>
+            <a:ext cx="3017520" cy="512064"/>
+          </a:xfrm>
+          <a:prstGeom prst="rect">
+            <a:avLst/>
+          </a:prstGeom>
+          <a:noFill/>
+          <a:ln/>
+        </p:spPr>
+        <p:txBody>
+          <a:bodyPr wrap="square" lIns="0" tIns="0" rIns="0" bIns="0" rtlCol="0" anchor="t"/>
+          <a:lstStyle/>
+          <a:p>
+            <a:pPr algn="ctr" indent="0" marL="0">
+              <a:buNone/>
+            </a:pPr>
+            <a:r>
+              <a:rPr lang="en-US" sz="1100" dirty="0">
+                <a:solidFill>
+                  <a:srgbClr val="1E3A5F"/>
+                </a:solidFill>
+                <a:latin typeface="游ゴシック" pitchFamily="34" charset="0"/>
+                <a:ea typeface="游ゴシック" pitchFamily="34" charset="-122"/>
+                <a:cs typeface="游ゴシック" pitchFamily="34" charset="-120"/>
+              </a:rPr>
+              <a:t>直接の顧客層</a:t>
+            </a:r>
+            <a:endParaRPr lang="en-US" sz="1100" dirty="0"/>
+          </a:p>
+        </p:txBody>
+      </p:sp>
+      <p:sp>
+        <p:nvSpPr>
+          <p:cNvPr id="13" name="Shape 11"/>
+          <p:cNvSpPr/>
+          <p:nvPr/>
+        </p:nvSpPr>
+        <p:spPr>
+          <a:xfrm>
+            <a:off x="7863840" y="4709160"/>
+            <a:ext cx="3200400" cy="1280160"/>
+          </a:xfrm>
+          <a:prstGeom prst="roundRect">
+            <a:avLst>
+              <a:gd name="adj" fmla="val 7143"/>
+            </a:avLst>
+          </a:prstGeom>
+          <a:solidFill>
+            <a:srgbClr val="F6F1EA"/>
+          </a:solidFill>
+          <a:ln/>
+          <a:effectLst>
+            <a:outerShdw sx="100000" sy="100000" kx="0" ky="0" algn="bl" rotWithShape="0" blurRad="101600" dist="38100" dir="5400000">
+              <a:srgbClr val="10233A">
+                <a:alpha val="18000"/>
+              </a:srgbClr>
+            </a:outerShdw>
+          </a:effectLst>
+        </p:spPr>
+      </p:sp>
+      <p:sp>
+        <p:nvSpPr>
+          <p:cNvPr id="14" name="Text 12"/>
+          <p:cNvSpPr txBox="1"/>
+          <p:nvPr/>
+        </p:nvSpPr>
+        <p:spPr>
+          <a:xfrm>
+            <a:off x="8001000" y="4873752"/>
+            <a:ext cx="2926080" cy="665683"/>
+          </a:xfrm>
+          <a:prstGeom prst="rect">
+            <a:avLst/>
+          </a:prstGeom>
+          <a:noFill/>
+          <a:ln/>
+        </p:spPr>
+        <p:txBody>
+          <a:bodyPr wrap="square" lIns="0" tIns="0" rIns="0" bIns="0" rtlCol="0" anchor="ctr"/>
+          <a:lstStyle/>
+          <a:p>
+            <a:pPr algn="ctr" indent="0" marL="0">
+              <a:buNone/>
+            </a:pPr>
+            <a:r>
+              <a:rPr lang="en-US" sz="2200" b="1" dirty="0">
+                <a:solidFill>
+                  <a:srgbClr val="C9603F"/>
+                </a:solidFill>
+                <a:latin typeface="游ゴシック" pitchFamily="34" charset="0"/>
+                <a:ea typeface="游ゴシック" pitchFamily="34" charset="-122"/>
+                <a:cs typeface="游ゴシック" pitchFamily="34" charset="-120"/>
+              </a:rPr>
+              <a:t>約100億円</a:t>
+            </a:r>
+            <a:endParaRPr lang="en-US" sz="2200" dirty="0"/>
+          </a:p>
+        </p:txBody>
+      </p:sp>
+      <p:sp>
+        <p:nvSpPr>
+          <p:cNvPr id="15" name="Text 13"/>
+          <p:cNvSpPr txBox="1"/>
+          <p:nvPr/>
+        </p:nvSpPr>
+        <p:spPr>
+          <a:xfrm>
+            <a:off x="7955280" y="5426050"/>
+            <a:ext cx="3017520" cy="512064"/>
+          </a:xfrm>
+          <a:prstGeom prst="rect">
+            <a:avLst/>
+          </a:prstGeom>
+          <a:noFill/>
+          <a:ln/>
+        </p:spPr>
+        <p:txBody>
+          <a:bodyPr wrap="square" lIns="0" tIns="0" rIns="0" bIns="0" rtlCol="0" anchor="t"/>
+          <a:lstStyle/>
+          <a:p>
+            <a:pPr algn="ctr" indent="0" marL="0">
+              <a:buNone/>
+            </a:pPr>
+            <a:r>
+              <a:rPr lang="en-US" sz="1100" dirty="0">
+                <a:solidFill>
+                  <a:srgbClr val="1E3A5F"/>
+                </a:solidFill>
+                <a:latin typeface="游ゴシック" pitchFamily="34" charset="0"/>
+                <a:ea typeface="游ゴシック" pitchFamily="34" charset="-122"/>
+                <a:cs typeface="游ゴシック" pitchFamily="34" charset="-120"/>
+              </a:rPr>
+              <a:t>周辺経済圏</a:t>
+            </a:r>
+            <a:endParaRPr lang="en-US" sz="1100" dirty="0"/>
+          </a:p>
+        </p:txBody>
+      </p:sp>
+      <p:sp>
+        <p:nvSpPr>
+          <p:cNvPr id="16" name="Text 14"/>
           <p:cNvSpPr txBox="1"/>
           <p:nvPr/>
         </p:nvSpPr>
@@ -6325,7 +6414,7 @@
                 <a:ea typeface="游ゴシック" pitchFamily="34" charset="-122"/>
                 <a:cs typeface="游ゴシック" pitchFamily="34" charset="-120"/>
               </a:rPr>
-              <a:t>06 / CONTRIBUTION</a:t>
+              <a:t>05 / ADVANTAGE</a:t>
             </a:r>
             <a:endParaRPr lang="en-US" sz="1300" dirty="0"/>
           </a:p>
@@ -6364,7 +6453,7 @@
                 <a:ea typeface="游ゴシック" pitchFamily="34" charset="-122"/>
                 <a:cs typeface="游ゴシック" pitchFamily="34" charset="-120"/>
               </a:rPr>
-              <a:t>貢献性 ― 100億円の中身は、関わった全員への貢献</a:t>
+              <a:t>優位性 ― 「バッジのない」からこそ生まれた協業モデル</a:t>
             </a:r>
             <a:endParaRPr lang="en-US" sz="2700" dirty="0"/>
           </a:p>
@@ -6430,7 +6519,7 @@
                 <a:ea typeface="游ゴシック" pitchFamily="34" charset="-122"/>
                 <a:cs typeface="游ゴシック" pitchFamily="34" charset="-120"/>
               </a:rPr>
-              <a:t>貢</a:t>
+              <a:t>優</a:t>
             </a:r>
             <a:endParaRPr lang="en-US" sz="2880" dirty="0"/>
           </a:p>
@@ -6438,14 +6527,75 @@
       </p:sp>
       <p:sp>
         <p:nvSpPr>
-          <p:cNvPr id="6" name="Text 4"/>
-          <p:cNvSpPr txBox="1"/>
+          <p:cNvPr id="6" name="Shape 4"/>
+          <p:cNvSpPr/>
           <p:nvPr/>
         </p:nvSpPr>
         <p:spPr>
           <a:xfrm>
             <a:off x="640080" y="1783080"/>
-            <a:ext cx="10881360" cy="4206240"/>
+            <a:ext cx="10881360" cy="822960"/>
+          </a:xfrm>
+          <a:prstGeom prst="roundRect">
+            <a:avLst>
+              <a:gd name="adj" fmla="val 8889"/>
+            </a:avLst>
+          </a:prstGeom>
+          <a:solidFill>
+            <a:srgbClr val="1E3A5F"/>
+          </a:solidFill>
+          <a:ln/>
+        </p:spPr>
+      </p:sp>
+      <p:sp>
+        <p:nvSpPr>
+          <p:cNvPr id="7" name="Text 5"/>
+          <p:cNvSpPr txBox="1"/>
+          <p:nvPr/>
+        </p:nvSpPr>
+        <p:spPr>
+          <a:xfrm>
+            <a:off x="914400" y="1783080"/>
+            <a:ext cx="10332720" cy="822960"/>
+          </a:xfrm>
+          <a:prstGeom prst="rect">
+            <a:avLst/>
+          </a:prstGeom>
+          <a:noFill/>
+          <a:ln/>
+        </p:spPr>
+        <p:txBody>
+          <a:bodyPr wrap="square" lIns="0" tIns="0" rIns="0" bIns="0" rtlCol="0" anchor="ctr"/>
+          <a:lstStyle/>
+          <a:p>
+            <a:pPr algn="l" indent="0" marL="0">
+              <a:buNone/>
+            </a:pPr>
+            <a:r>
+              <a:rPr lang="en-US" sz="1450" i="1" dirty="0">
+                <a:solidFill>
+                  <a:srgbClr val="F1DCCF"/>
+                </a:solidFill>
+                <a:latin typeface="游ゴシック" pitchFamily="34" charset="0"/>
+                <a:ea typeface="游ゴシック" pitchFamily="34" charset="-122"/>
+                <a:cs typeface="游ゴシック" pitchFamily="34" charset="-120"/>
+              </a:rPr>
+              <a:t>『バッジのない、コンサルタントに、相続ビジネスの何ができるのか？』―起業当初、ある士業の先生に言われた言葉</a:t>
+            </a:r>
+            <a:endParaRPr lang="en-US" sz="1450" dirty="0"/>
+          </a:p>
+        </p:txBody>
+      </p:sp>
+      <p:sp>
+        <p:nvSpPr>
+          <p:cNvPr id="8" name="Text 6"/>
+          <p:cNvSpPr txBox="1"/>
+          <p:nvPr/>
+        </p:nvSpPr>
+        <p:spPr>
+          <a:xfrm>
+            <a:off x="640080" y="2834640"/>
+            <a:ext cx="10881360" cy="3154680"/>
           </a:xfrm>
           <a:prstGeom prst="rect">
             <a:avLst/>
@@ -6476,7 +6626,7 @@
                 <a:ea typeface="游ゴシック" pitchFamily="34" charset="-122"/>
                 <a:cs typeface="游ゴシック" pitchFamily="34" charset="-120"/>
               </a:rPr>
-              <a:t>末端の顧客（本人・家族）：財産ではなく「対話」による安心と幸福度の向上（終活×幸福度の各種調査）</a:t>
+              <a:t>その後、「士業の先生が私に足を向けて寝れないくらい」仕事を生み出し続け、自分の収益だけを追わない「本当の協業スタイル」を確立（素材①）</a:t>
             </a:r>
             <a:endParaRPr lang="en-US" sz="1500" dirty="0"/>
           </a:p>
@@ -6500,7 +6650,7 @@
                 <a:ea typeface="游ゴシック" pitchFamily="34" charset="-122"/>
                 <a:cs typeface="游ゴシック" pitchFamily="34" charset="-120"/>
               </a:rPr>
-              <a:t>周辺専門家（税理士・弁護士・不動産・金融等）：新たな受任機会・収益機会の創出（素材①）</a:t>
+              <a:t>この協業の仕組みを、第3回（紹介構造）・第4回（“人生の指揮官”モデル）のカリキュラムとして教材化し、再現可能な技術にしている（素材③）</a:t>
             </a:r>
             <a:endParaRPr lang="en-US" sz="1500" dirty="0"/>
           </a:p>
@@ -6524,479 +6674,15 @@
                 <a:ea typeface="游ゴシック" pitchFamily="34" charset="-122"/>
                 <a:cs typeface="游ゴシック" pitchFamily="34" charset="-120"/>
               </a:rPr>
-              <a:t>企業：福利厚生導入を通じ「従業員を大切にする法人」への進化を支援</a:t>
+              <a:t>「財産に着目する」のではなく「家族の隠れた課題を見つけに行く」という視点そのものが、他の相続コンサル・士業・金融機関にはない方法論的な差別化</a:t>
             </a:r>
             <a:endParaRPr lang="en-US" sz="1500" dirty="0"/>
           </a:p>
-          <a:p>
-            <a:pPr marL="342900" indent="-342900">
-              <a:lnSpc>
-                <a:spcPct val="128000"/>
-              </a:lnSpc>
-              <a:spcAft>
-                <a:spcPts val="1200"/>
-              </a:spcAft>
-              <a:buSzPct val="100000"/>
-              <a:buChar char="●"/>
-            </a:pPr>
-            <a:r>
-              <a:rPr lang="en-US" sz="1500" dirty="0">
-                <a:solidFill>
-                  <a:srgbClr val="3A3A3A"/>
-                </a:solidFill>
-                <a:latin typeface="游ゴシック" pitchFamily="34" charset="0"/>
-                <a:ea typeface="游ゴシック" pitchFamily="34" charset="-122"/>
-                <a:cs typeface="游ゴシック" pitchFamily="34" charset="-120"/>
-              </a:rPr>
-              <a:t>行政・地域：朝来市 → 岸和田市など、一つの街で実証した連携モデルの横展開</a:t>
-            </a:r>
-            <a:endParaRPr lang="en-US" sz="1500" dirty="0"/>
-          </a:p>
-        </p:txBody>
-      </p:sp>
-      <p:sp>
-        <p:nvSpPr>
-          <p:cNvPr id="7" name="Shape 5"/>
-          <p:cNvSpPr/>
-          <p:nvPr/>
-        </p:nvSpPr>
-        <p:spPr>
-          <a:xfrm>
-            <a:off x="640080" y="4754880"/>
-            <a:ext cx="2468880" cy="1325880"/>
-          </a:xfrm>
-          <a:prstGeom prst="roundRect">
-            <a:avLst>
-              <a:gd name="adj" fmla="val 6897"/>
-            </a:avLst>
-          </a:prstGeom>
-          <a:solidFill>
-            <a:srgbClr val="F6F1EA"/>
-          </a:solidFill>
-          <a:ln/>
-          <a:effectLst>
-            <a:outerShdw sx="100000" sy="100000" kx="0" ky="0" algn="bl" rotWithShape="0" blurRad="101600" dist="38100" dir="5400000">
-              <a:srgbClr val="10233A">
-                <a:alpha val="18000"/>
-              </a:srgbClr>
-            </a:outerShdw>
-          </a:effectLst>
-        </p:spPr>
-      </p:sp>
-      <p:sp>
-        <p:nvSpPr>
-          <p:cNvPr id="8" name="Text 6"/>
-          <p:cNvSpPr txBox="1"/>
-          <p:nvPr/>
-        </p:nvSpPr>
-        <p:spPr>
-          <a:xfrm>
-            <a:off x="822960" y="4937760"/>
-            <a:ext cx="2103120" cy="365760"/>
-          </a:xfrm>
-          <a:prstGeom prst="rect">
-            <a:avLst/>
-          </a:prstGeom>
-          <a:noFill/>
-          <a:ln/>
-        </p:spPr>
-        <p:txBody>
-          <a:bodyPr wrap="square" lIns="0" tIns="0" rIns="0" bIns="0" rtlCol="0" anchor="ctr"/>
-          <a:lstStyle/>
-          <a:p>
-            <a:pPr indent="0" marL="0">
-              <a:buNone/>
-            </a:pPr>
-            <a:r>
-              <a:rPr lang="en-US" sz="1500" b="1" dirty="0">
-                <a:solidFill>
-                  <a:srgbClr val="C9603F"/>
-                </a:solidFill>
-                <a:latin typeface="游ゴシック" pitchFamily="34" charset="0"/>
-                <a:ea typeface="游ゴシック" pitchFamily="34" charset="-122"/>
-                <a:cs typeface="游ゴシック" pitchFamily="34" charset="-120"/>
-              </a:rPr>
-              <a:t>顧客</a:t>
-            </a:r>
-            <a:endParaRPr lang="en-US" sz="1500" dirty="0"/>
-          </a:p>
         </p:txBody>
       </p:sp>
       <p:sp>
         <p:nvSpPr>
           <p:cNvPr id="9" name="Text 7"/>
-          <p:cNvSpPr txBox="1"/>
-          <p:nvPr/>
-        </p:nvSpPr>
-        <p:spPr>
-          <a:xfrm>
-            <a:off x="822960" y="5349240"/>
-            <a:ext cx="2103120" cy="640080"/>
-          </a:xfrm>
-          <a:prstGeom prst="rect">
-            <a:avLst/>
-          </a:prstGeom>
-          <a:noFill/>
-          <a:ln/>
-        </p:spPr>
-        <p:txBody>
-          <a:bodyPr wrap="square" lIns="0" tIns="0" rIns="0" bIns="0" rtlCol="0" anchor="t"/>
-          <a:lstStyle/>
-          <a:p>
-            <a:pPr indent="0" marL="0">
-              <a:lnSpc>
-                <a:spcPct val="120000"/>
-              </a:lnSpc>
-              <a:buNone/>
-            </a:pPr>
-            <a:r>
-              <a:rPr lang="en-US" sz="1150" dirty="0">
-                <a:solidFill>
-                  <a:srgbClr val="3A3A3A"/>
-                </a:solidFill>
-                <a:latin typeface="游ゴシック" pitchFamily="34" charset="0"/>
-                <a:ea typeface="游ゴシック" pitchFamily="34" charset="-122"/>
-                <a:cs typeface="游ゴシック" pitchFamily="34" charset="-120"/>
-              </a:rPr>
-              <a:t>対話による安心</a:t>
-            </a:r>
-            <a:endParaRPr lang="en-US" sz="1150" dirty="0"/>
-          </a:p>
-        </p:txBody>
-      </p:sp>
-      <p:sp>
-        <p:nvSpPr>
-          <p:cNvPr id="10" name="Shape 8"/>
-          <p:cNvSpPr/>
-          <p:nvPr/>
-        </p:nvSpPr>
-        <p:spPr>
-          <a:xfrm>
-            <a:off x="3383280" y="4754880"/>
-            <a:ext cx="2468880" cy="1325880"/>
-          </a:xfrm>
-          <a:prstGeom prst="roundRect">
-            <a:avLst>
-              <a:gd name="adj" fmla="val 6897"/>
-            </a:avLst>
-          </a:prstGeom>
-          <a:solidFill>
-            <a:srgbClr val="F6F1EA"/>
-          </a:solidFill>
-          <a:ln/>
-          <a:effectLst>
-            <a:outerShdw sx="100000" sy="100000" kx="0" ky="0" algn="bl" rotWithShape="0" blurRad="101600" dist="38100" dir="5400000">
-              <a:srgbClr val="10233A">
-                <a:alpha val="18000"/>
-              </a:srgbClr>
-            </a:outerShdw>
-          </a:effectLst>
-        </p:spPr>
-      </p:sp>
-      <p:sp>
-        <p:nvSpPr>
-          <p:cNvPr id="11" name="Text 9"/>
-          <p:cNvSpPr txBox="1"/>
-          <p:nvPr/>
-        </p:nvSpPr>
-        <p:spPr>
-          <a:xfrm>
-            <a:off x="3566160" y="4937760"/>
-            <a:ext cx="2103120" cy="365760"/>
-          </a:xfrm>
-          <a:prstGeom prst="rect">
-            <a:avLst/>
-          </a:prstGeom>
-          <a:noFill/>
-          <a:ln/>
-        </p:spPr>
-        <p:txBody>
-          <a:bodyPr wrap="square" lIns="0" tIns="0" rIns="0" bIns="0" rtlCol="0" anchor="ctr"/>
-          <a:lstStyle/>
-          <a:p>
-            <a:pPr indent="0" marL="0">
-              <a:buNone/>
-            </a:pPr>
-            <a:r>
-              <a:rPr lang="en-US" sz="1500" b="1" dirty="0">
-                <a:solidFill>
-                  <a:srgbClr val="C9603F"/>
-                </a:solidFill>
-                <a:latin typeface="游ゴシック" pitchFamily="34" charset="0"/>
-                <a:ea typeface="游ゴシック" pitchFamily="34" charset="-122"/>
-                <a:cs typeface="游ゴシック" pitchFamily="34" charset="-120"/>
-              </a:rPr>
-              <a:t>専門家</a:t>
-            </a:r>
-            <a:endParaRPr lang="en-US" sz="1500" dirty="0"/>
-          </a:p>
-        </p:txBody>
-      </p:sp>
-      <p:sp>
-        <p:nvSpPr>
-          <p:cNvPr id="12" name="Text 10"/>
-          <p:cNvSpPr txBox="1"/>
-          <p:nvPr/>
-        </p:nvSpPr>
-        <p:spPr>
-          <a:xfrm>
-            <a:off x="3566160" y="5349240"/>
-            <a:ext cx="2103120" cy="640080"/>
-          </a:xfrm>
-          <a:prstGeom prst="rect">
-            <a:avLst/>
-          </a:prstGeom>
-          <a:noFill/>
-          <a:ln/>
-        </p:spPr>
-        <p:txBody>
-          <a:bodyPr wrap="square" lIns="0" tIns="0" rIns="0" bIns="0" rtlCol="0" anchor="t"/>
-          <a:lstStyle/>
-          <a:p>
-            <a:pPr indent="0" marL="0">
-              <a:lnSpc>
-                <a:spcPct val="120000"/>
-              </a:lnSpc>
-              <a:buNone/>
-            </a:pPr>
-            <a:r>
-              <a:rPr lang="en-US" sz="1150" dirty="0">
-                <a:solidFill>
-                  <a:srgbClr val="3A3A3A"/>
-                </a:solidFill>
-                <a:latin typeface="游ゴシック" pitchFamily="34" charset="0"/>
-                <a:ea typeface="游ゴシック" pitchFamily="34" charset="-122"/>
-                <a:cs typeface="游ゴシック" pitchFamily="34" charset="-120"/>
-              </a:rPr>
-              <a:t>新たな受任機会</a:t>
-            </a:r>
-            <a:endParaRPr lang="en-US" sz="1150" dirty="0"/>
-          </a:p>
-        </p:txBody>
-      </p:sp>
-      <p:sp>
-        <p:nvSpPr>
-          <p:cNvPr id="13" name="Shape 11"/>
-          <p:cNvSpPr/>
-          <p:nvPr/>
-        </p:nvSpPr>
-        <p:spPr>
-          <a:xfrm>
-            <a:off x="6126480" y="4754880"/>
-            <a:ext cx="2468880" cy="1325880"/>
-          </a:xfrm>
-          <a:prstGeom prst="roundRect">
-            <a:avLst>
-              <a:gd name="adj" fmla="val 6897"/>
-            </a:avLst>
-          </a:prstGeom>
-          <a:solidFill>
-            <a:srgbClr val="F6F1EA"/>
-          </a:solidFill>
-          <a:ln/>
-          <a:effectLst>
-            <a:outerShdw sx="100000" sy="100000" kx="0" ky="0" algn="bl" rotWithShape="0" blurRad="101600" dist="38100" dir="5400000">
-              <a:srgbClr val="10233A">
-                <a:alpha val="18000"/>
-              </a:srgbClr>
-            </a:outerShdw>
-          </a:effectLst>
-        </p:spPr>
-      </p:sp>
-      <p:sp>
-        <p:nvSpPr>
-          <p:cNvPr id="14" name="Text 12"/>
-          <p:cNvSpPr txBox="1"/>
-          <p:nvPr/>
-        </p:nvSpPr>
-        <p:spPr>
-          <a:xfrm>
-            <a:off x="6309360" y="4937760"/>
-            <a:ext cx="2103120" cy="365760"/>
-          </a:xfrm>
-          <a:prstGeom prst="rect">
-            <a:avLst/>
-          </a:prstGeom>
-          <a:noFill/>
-          <a:ln/>
-        </p:spPr>
-        <p:txBody>
-          <a:bodyPr wrap="square" lIns="0" tIns="0" rIns="0" bIns="0" rtlCol="0" anchor="ctr"/>
-          <a:lstStyle/>
-          <a:p>
-            <a:pPr indent="0" marL="0">
-              <a:buNone/>
-            </a:pPr>
-            <a:r>
-              <a:rPr lang="en-US" sz="1500" b="1" dirty="0">
-                <a:solidFill>
-                  <a:srgbClr val="C9603F"/>
-                </a:solidFill>
-                <a:latin typeface="游ゴシック" pitchFamily="34" charset="0"/>
-                <a:ea typeface="游ゴシック" pitchFamily="34" charset="-122"/>
-                <a:cs typeface="游ゴシック" pitchFamily="34" charset="-120"/>
-              </a:rPr>
-              <a:t>企業</a:t>
-            </a:r>
-            <a:endParaRPr lang="en-US" sz="1500" dirty="0"/>
-          </a:p>
-        </p:txBody>
-      </p:sp>
-      <p:sp>
-        <p:nvSpPr>
-          <p:cNvPr id="15" name="Text 13"/>
-          <p:cNvSpPr txBox="1"/>
-          <p:nvPr/>
-        </p:nvSpPr>
-        <p:spPr>
-          <a:xfrm>
-            <a:off x="6309360" y="5349240"/>
-            <a:ext cx="2103120" cy="640080"/>
-          </a:xfrm>
-          <a:prstGeom prst="rect">
-            <a:avLst/>
-          </a:prstGeom>
-          <a:noFill/>
-          <a:ln/>
-        </p:spPr>
-        <p:txBody>
-          <a:bodyPr wrap="square" lIns="0" tIns="0" rIns="0" bIns="0" rtlCol="0" anchor="t"/>
-          <a:lstStyle/>
-          <a:p>
-            <a:pPr indent="0" marL="0">
-              <a:lnSpc>
-                <a:spcPct val="120000"/>
-              </a:lnSpc>
-              <a:buNone/>
-            </a:pPr>
-            <a:r>
-              <a:rPr lang="en-US" sz="1150" dirty="0">
-                <a:solidFill>
-                  <a:srgbClr val="3A3A3A"/>
-                </a:solidFill>
-                <a:latin typeface="游ゴシック" pitchFamily="34" charset="0"/>
-                <a:ea typeface="游ゴシック" pitchFamily="34" charset="-122"/>
-                <a:cs typeface="游ゴシック" pitchFamily="34" charset="-120"/>
-              </a:rPr>
-              <a:t>従業員を大切にする法人へ</a:t>
-            </a:r>
-            <a:endParaRPr lang="en-US" sz="1150" dirty="0"/>
-          </a:p>
-        </p:txBody>
-      </p:sp>
-      <p:sp>
-        <p:nvSpPr>
-          <p:cNvPr id="16" name="Shape 14"/>
-          <p:cNvSpPr/>
-          <p:nvPr/>
-        </p:nvSpPr>
-        <p:spPr>
-          <a:xfrm>
-            <a:off x="8869680" y="4754880"/>
-            <a:ext cx="2468880" cy="1325880"/>
-          </a:xfrm>
-          <a:prstGeom prst="roundRect">
-            <a:avLst>
-              <a:gd name="adj" fmla="val 6897"/>
-            </a:avLst>
-          </a:prstGeom>
-          <a:solidFill>
-            <a:srgbClr val="F6F1EA"/>
-          </a:solidFill>
-          <a:ln/>
-          <a:effectLst>
-            <a:outerShdw sx="100000" sy="100000" kx="0" ky="0" algn="bl" rotWithShape="0" blurRad="101600" dist="38100" dir="5400000">
-              <a:srgbClr val="10233A">
-                <a:alpha val="18000"/>
-              </a:srgbClr>
-            </a:outerShdw>
-          </a:effectLst>
-        </p:spPr>
-      </p:sp>
-      <p:sp>
-        <p:nvSpPr>
-          <p:cNvPr id="17" name="Text 15"/>
-          <p:cNvSpPr txBox="1"/>
-          <p:nvPr/>
-        </p:nvSpPr>
-        <p:spPr>
-          <a:xfrm>
-            <a:off x="9052560" y="4937760"/>
-            <a:ext cx="2103120" cy="365760"/>
-          </a:xfrm>
-          <a:prstGeom prst="rect">
-            <a:avLst/>
-          </a:prstGeom>
-          <a:noFill/>
-          <a:ln/>
-        </p:spPr>
-        <p:txBody>
-          <a:bodyPr wrap="square" lIns="0" tIns="0" rIns="0" bIns="0" rtlCol="0" anchor="ctr"/>
-          <a:lstStyle/>
-          <a:p>
-            <a:pPr indent="0" marL="0">
-              <a:buNone/>
-            </a:pPr>
-            <a:r>
-              <a:rPr lang="en-US" sz="1500" b="1" dirty="0">
-                <a:solidFill>
-                  <a:srgbClr val="C9603F"/>
-                </a:solidFill>
-                <a:latin typeface="游ゴシック" pitchFamily="34" charset="0"/>
-                <a:ea typeface="游ゴシック" pitchFamily="34" charset="-122"/>
-                <a:cs typeface="游ゴシック" pitchFamily="34" charset="-120"/>
-              </a:rPr>
-              <a:t>行政・地域</a:t>
-            </a:r>
-            <a:endParaRPr lang="en-US" sz="1500" dirty="0"/>
-          </a:p>
-        </p:txBody>
-      </p:sp>
-      <p:sp>
-        <p:nvSpPr>
-          <p:cNvPr id="18" name="Text 16"/>
-          <p:cNvSpPr txBox="1"/>
-          <p:nvPr/>
-        </p:nvSpPr>
-        <p:spPr>
-          <a:xfrm>
-            <a:off x="9052560" y="5349240"/>
-            <a:ext cx="2103120" cy="640080"/>
-          </a:xfrm>
-          <a:prstGeom prst="rect">
-            <a:avLst/>
-          </a:prstGeom>
-          <a:noFill/>
-          <a:ln/>
-        </p:spPr>
-        <p:txBody>
-          <a:bodyPr wrap="square" lIns="0" tIns="0" rIns="0" bIns="0" rtlCol="0" anchor="t"/>
-          <a:lstStyle/>
-          <a:p>
-            <a:pPr indent="0" marL="0">
-              <a:lnSpc>
-                <a:spcPct val="120000"/>
-              </a:lnSpc>
-              <a:buNone/>
-            </a:pPr>
-            <a:r>
-              <a:rPr lang="en-US" sz="1150" dirty="0">
-                <a:solidFill>
-                  <a:srgbClr val="3A3A3A"/>
-                </a:solidFill>
-                <a:latin typeface="游ゴシック" pitchFamily="34" charset="0"/>
-                <a:ea typeface="游ゴシック" pitchFamily="34" charset="-122"/>
-                <a:cs typeface="游ゴシック" pitchFamily="34" charset="-120"/>
-              </a:rPr>
-              <a:t>連携モデルの横展開</a:t>
-            </a:r>
-            <a:endParaRPr lang="en-US" sz="1150" dirty="0"/>
-          </a:p>
-        </p:txBody>
-      </p:sp>
-      <p:sp>
-        <p:nvSpPr>
-          <p:cNvPr id="19" name="Text 17"/>
           <p:cNvSpPr txBox="1"/>
           <p:nvPr/>
         </p:nvSpPr>
@@ -7044,6 +6730,779 @@
 <file path=ppt/slides/slide16.xml><?xml version="1.0" encoding="utf-8"?>
 <p:sld xmlns:a="http://schemas.openxmlformats.org/drawingml/2006/main" xmlns:r="http://schemas.openxmlformats.org/officeDocument/2006/relationships" xmlns:p="http://schemas.openxmlformats.org/presentationml/2006/main">
   <p:cSld name="Slide 16">
+    <p:bg>
+      <p:bgPr>
+        <a:solidFill>
+          <a:srgbClr val="FFFFFF"/>
+        </a:solidFill>
+      </p:bgPr>
+    </p:bg>
+    <p:spTree>
+      <p:nvGrpSpPr>
+        <p:cNvPr id="1" name=""/>
+        <p:cNvGrpSpPr/>
+        <p:nvPr/>
+      </p:nvGrpSpPr>
+      <p:grpSpPr>
+        <a:xfrm>
+          <a:off x="0" y="0"/>
+          <a:ext cx="0" cy="0"/>
+          <a:chOff x="0" y="0"/>
+          <a:chExt cx="0" cy="0"/>
+        </a:xfrm>
+      </p:grpSpPr>
+      <p:sp>
+        <p:nvSpPr>
+          <p:cNvPr id="2" name="Text 0"/>
+          <p:cNvSpPr txBox="1"/>
+          <p:nvPr/>
+        </p:nvSpPr>
+        <p:spPr>
+          <a:xfrm>
+            <a:off x="640080" y="411480"/>
+            <a:ext cx="9144000" cy="320040"/>
+          </a:xfrm>
+          <a:prstGeom prst="rect">
+            <a:avLst/>
+          </a:prstGeom>
+          <a:noFill/>
+          <a:ln/>
+        </p:spPr>
+        <p:txBody>
+          <a:bodyPr wrap="square" lIns="0" tIns="0" rIns="0" bIns="0" rtlCol="0" anchor="ctr"/>
+          <a:lstStyle/>
+          <a:p>
+            <a:pPr indent="0" marL="0">
+              <a:buNone/>
+            </a:pPr>
+            <a:r>
+              <a:rPr lang="en-US" sz="1300" b="1" spc="100" kern="0" dirty="0">
+                <a:solidFill>
+                  <a:srgbClr val="C9603F"/>
+                </a:solidFill>
+                <a:latin typeface="游ゴシック" pitchFamily="34" charset="0"/>
+                <a:ea typeface="游ゴシック" pitchFamily="34" charset="-122"/>
+                <a:cs typeface="游ゴシック" pitchFamily="34" charset="-120"/>
+              </a:rPr>
+              <a:t>06 / CONTRIBUTION</a:t>
+            </a:r>
+            <a:endParaRPr lang="en-US" sz="1300" dirty="0"/>
+          </a:p>
+        </p:txBody>
+      </p:sp>
+      <p:sp>
+        <p:nvSpPr>
+          <p:cNvPr id="3" name="Text 1"/>
+          <p:cNvSpPr txBox="1"/>
+          <p:nvPr/>
+        </p:nvSpPr>
+        <p:spPr>
+          <a:xfrm>
+            <a:off x="640080" y="713232"/>
+            <a:ext cx="10881360" cy="731520"/>
+          </a:xfrm>
+          <a:prstGeom prst="rect">
+            <a:avLst/>
+          </a:prstGeom>
+          <a:noFill/>
+          <a:ln/>
+        </p:spPr>
+        <p:txBody>
+          <a:bodyPr wrap="square" lIns="0" tIns="0" rIns="0" bIns="0" rtlCol="0" anchor="ctr"/>
+          <a:lstStyle/>
+          <a:p>
+            <a:pPr indent="0" marL="0">
+              <a:buNone/>
+            </a:pPr>
+            <a:r>
+              <a:rPr lang="en-US" sz="2700" b="1" dirty="0">
+                <a:solidFill>
+                  <a:srgbClr val="1E3A5F"/>
+                </a:solidFill>
+                <a:latin typeface="游ゴシック" pitchFamily="34" charset="0"/>
+                <a:ea typeface="游ゴシック" pitchFamily="34" charset="-122"/>
+                <a:cs typeface="游ゴシック" pitchFamily="34" charset="-120"/>
+              </a:rPr>
+              <a:t>貢献性 ― 100億円の中身は、関わった全員への貢献</a:t>
+            </a:r>
+            <a:endParaRPr lang="en-US" sz="2700" dirty="0"/>
+          </a:p>
+        </p:txBody>
+      </p:sp>
+      <p:sp>
+        <p:nvSpPr>
+          <p:cNvPr id="4" name="Shape 2"/>
+          <p:cNvSpPr/>
+          <p:nvPr/>
+        </p:nvSpPr>
+        <p:spPr>
+          <a:xfrm>
+            <a:off x="10607040" y="502920"/>
+            <a:ext cx="822960" cy="822960"/>
+          </a:xfrm>
+          <a:prstGeom prst="ellipse">
+            <a:avLst/>
+          </a:prstGeom>
+          <a:solidFill>
+            <a:srgbClr val="C9603F"/>
+          </a:solidFill>
+          <a:ln/>
+          <a:effectLst>
+            <a:outerShdw sx="100000" sy="100000" kx="0" ky="0" algn="bl" rotWithShape="0" blurRad="101600" dist="38100" dir="5400000">
+              <a:srgbClr val="10233A">
+                <a:alpha val="18000"/>
+              </a:srgbClr>
+            </a:outerShdw>
+          </a:effectLst>
+        </p:spPr>
+      </p:sp>
+      <p:sp>
+        <p:nvSpPr>
+          <p:cNvPr id="5" name="Text 3"/>
+          <p:cNvSpPr txBox="1"/>
+          <p:nvPr/>
+        </p:nvSpPr>
+        <p:spPr>
+          <a:xfrm>
+            <a:off x="10607040" y="502920"/>
+            <a:ext cx="822960" cy="822960"/>
+          </a:xfrm>
+          <a:prstGeom prst="rect">
+            <a:avLst/>
+          </a:prstGeom>
+          <a:noFill/>
+          <a:ln/>
+        </p:spPr>
+        <p:txBody>
+          <a:bodyPr wrap="square" lIns="0" tIns="0" rIns="0" bIns="0" rtlCol="0" anchor="ctr"/>
+          <a:lstStyle/>
+          <a:p>
+            <a:pPr algn="ctr" indent="0" marL="0">
+              <a:buNone/>
+            </a:pPr>
+            <a:r>
+              <a:rPr lang="en-US" sz="2880" b="1" dirty="0">
+                <a:solidFill>
+                  <a:srgbClr val="FFFFFF"/>
+                </a:solidFill>
+                <a:latin typeface="游ゴシック" pitchFamily="34" charset="0"/>
+                <a:ea typeface="游ゴシック" pitchFamily="34" charset="-122"/>
+                <a:cs typeface="游ゴシック" pitchFamily="34" charset="-120"/>
+              </a:rPr>
+              <a:t>貢</a:t>
+            </a:r>
+            <a:endParaRPr lang="en-US" sz="2880" dirty="0"/>
+          </a:p>
+        </p:txBody>
+      </p:sp>
+      <p:sp>
+        <p:nvSpPr>
+          <p:cNvPr id="6" name="Text 4"/>
+          <p:cNvSpPr txBox="1"/>
+          <p:nvPr/>
+        </p:nvSpPr>
+        <p:spPr>
+          <a:xfrm>
+            <a:off x="640080" y="1783080"/>
+            <a:ext cx="10881360" cy="4206240"/>
+          </a:xfrm>
+          <a:prstGeom prst="rect">
+            <a:avLst/>
+          </a:prstGeom>
+          <a:noFill/>
+          <a:ln/>
+        </p:spPr>
+        <p:txBody>
+          <a:bodyPr wrap="square" lIns="0" tIns="0" rIns="0" bIns="0" rtlCol="0" anchor="t"/>
+          <a:lstStyle/>
+          <a:p>
+            <a:pPr marL="342900" indent="-342900">
+              <a:lnSpc>
+                <a:spcPct val="128000"/>
+              </a:lnSpc>
+              <a:spcAft>
+                <a:spcPts val="1200"/>
+              </a:spcAft>
+              <a:buSzPct val="100000"/>
+              <a:buChar char="●"/>
+            </a:pPr>
+            <a:r>
+              <a:rPr lang="en-US" sz="1500" dirty="0">
+                <a:solidFill>
+                  <a:srgbClr val="3A3A3A"/>
+                </a:solidFill>
+                <a:latin typeface="游ゴシック" pitchFamily="34" charset="0"/>
+                <a:ea typeface="游ゴシック" pitchFamily="34" charset="-122"/>
+                <a:cs typeface="游ゴシック" pitchFamily="34" charset="-120"/>
+              </a:rPr>
+              <a:t>末端の顧客（本人・家族）：財産ではなく「対話」による安心と幸福度の向上（終活×幸福度の各種調査）</a:t>
+            </a:r>
+            <a:endParaRPr lang="en-US" sz="1500" dirty="0"/>
+          </a:p>
+          <a:p>
+            <a:pPr marL="342900" indent="-342900">
+              <a:lnSpc>
+                <a:spcPct val="128000"/>
+              </a:lnSpc>
+              <a:spcAft>
+                <a:spcPts val="1200"/>
+              </a:spcAft>
+              <a:buSzPct val="100000"/>
+              <a:buChar char="●"/>
+            </a:pPr>
+            <a:r>
+              <a:rPr lang="en-US" sz="1500" dirty="0">
+                <a:solidFill>
+                  <a:srgbClr val="3A3A3A"/>
+                </a:solidFill>
+                <a:latin typeface="游ゴシック" pitchFamily="34" charset="0"/>
+                <a:ea typeface="游ゴシック" pitchFamily="34" charset="-122"/>
+                <a:cs typeface="游ゴシック" pitchFamily="34" charset="-120"/>
+              </a:rPr>
+              <a:t>周辺専門家（税理士・弁護士・不動産・金融等）：新たな受任機会・収益機会の創出（素材①）</a:t>
+            </a:r>
+            <a:endParaRPr lang="en-US" sz="1500" dirty="0"/>
+          </a:p>
+          <a:p>
+            <a:pPr marL="342900" indent="-342900">
+              <a:lnSpc>
+                <a:spcPct val="128000"/>
+              </a:lnSpc>
+              <a:spcAft>
+                <a:spcPts val="1200"/>
+              </a:spcAft>
+              <a:buSzPct val="100000"/>
+              <a:buChar char="●"/>
+            </a:pPr>
+            <a:r>
+              <a:rPr lang="en-US" sz="1500" dirty="0">
+                <a:solidFill>
+                  <a:srgbClr val="3A3A3A"/>
+                </a:solidFill>
+                <a:latin typeface="游ゴシック" pitchFamily="34" charset="0"/>
+                <a:ea typeface="游ゴシック" pitchFamily="34" charset="-122"/>
+                <a:cs typeface="游ゴシック" pitchFamily="34" charset="-120"/>
+              </a:rPr>
+              <a:t>企業：福利厚生導入を通じ「従業員を大切にする法人」への進化を支援</a:t>
+            </a:r>
+            <a:endParaRPr lang="en-US" sz="1500" dirty="0"/>
+          </a:p>
+          <a:p>
+            <a:pPr marL="342900" indent="-342900">
+              <a:lnSpc>
+                <a:spcPct val="128000"/>
+              </a:lnSpc>
+              <a:spcAft>
+                <a:spcPts val="1200"/>
+              </a:spcAft>
+              <a:buSzPct val="100000"/>
+              <a:buChar char="●"/>
+            </a:pPr>
+            <a:r>
+              <a:rPr lang="en-US" sz="1500" dirty="0">
+                <a:solidFill>
+                  <a:srgbClr val="3A3A3A"/>
+                </a:solidFill>
+                <a:latin typeface="游ゴシック" pitchFamily="34" charset="0"/>
+                <a:ea typeface="游ゴシック" pitchFamily="34" charset="-122"/>
+                <a:cs typeface="游ゴシック" pitchFamily="34" charset="-120"/>
+              </a:rPr>
+              <a:t>行政・地域：朝来市 → 岸和田市など、一つの街で実証した連携モデルの横展開</a:t>
+            </a:r>
+            <a:endParaRPr lang="en-US" sz="1500" dirty="0"/>
+          </a:p>
+        </p:txBody>
+      </p:sp>
+      <p:sp>
+        <p:nvSpPr>
+          <p:cNvPr id="7" name="Shape 5"/>
+          <p:cNvSpPr/>
+          <p:nvPr/>
+        </p:nvSpPr>
+        <p:spPr>
+          <a:xfrm>
+            <a:off x="640080" y="4754880"/>
+            <a:ext cx="2468880" cy="1325880"/>
+          </a:xfrm>
+          <a:prstGeom prst="roundRect">
+            <a:avLst>
+              <a:gd name="adj" fmla="val 6897"/>
+            </a:avLst>
+          </a:prstGeom>
+          <a:solidFill>
+            <a:srgbClr val="F6F1EA"/>
+          </a:solidFill>
+          <a:ln/>
+          <a:effectLst>
+            <a:outerShdw sx="100000" sy="100000" kx="0" ky="0" algn="bl" rotWithShape="0" blurRad="101600" dist="38100" dir="5400000">
+              <a:srgbClr val="10233A">
+                <a:alpha val="18000"/>
+              </a:srgbClr>
+            </a:outerShdw>
+          </a:effectLst>
+        </p:spPr>
+      </p:sp>
+      <p:sp>
+        <p:nvSpPr>
+          <p:cNvPr id="8" name="Text 6"/>
+          <p:cNvSpPr txBox="1"/>
+          <p:nvPr/>
+        </p:nvSpPr>
+        <p:spPr>
+          <a:xfrm>
+            <a:off x="822960" y="4937760"/>
+            <a:ext cx="2103120" cy="365760"/>
+          </a:xfrm>
+          <a:prstGeom prst="rect">
+            <a:avLst/>
+          </a:prstGeom>
+          <a:noFill/>
+          <a:ln/>
+        </p:spPr>
+        <p:txBody>
+          <a:bodyPr wrap="square" lIns="0" tIns="0" rIns="0" bIns="0" rtlCol="0" anchor="ctr"/>
+          <a:lstStyle/>
+          <a:p>
+            <a:pPr indent="0" marL="0">
+              <a:buNone/>
+            </a:pPr>
+            <a:r>
+              <a:rPr lang="en-US" sz="1500" b="1" dirty="0">
+                <a:solidFill>
+                  <a:srgbClr val="C9603F"/>
+                </a:solidFill>
+                <a:latin typeface="游ゴシック" pitchFamily="34" charset="0"/>
+                <a:ea typeface="游ゴシック" pitchFamily="34" charset="-122"/>
+                <a:cs typeface="游ゴシック" pitchFamily="34" charset="-120"/>
+              </a:rPr>
+              <a:t>顧客</a:t>
+            </a:r>
+            <a:endParaRPr lang="en-US" sz="1500" dirty="0"/>
+          </a:p>
+        </p:txBody>
+      </p:sp>
+      <p:sp>
+        <p:nvSpPr>
+          <p:cNvPr id="9" name="Text 7"/>
+          <p:cNvSpPr txBox="1"/>
+          <p:nvPr/>
+        </p:nvSpPr>
+        <p:spPr>
+          <a:xfrm>
+            <a:off x="822960" y="5349240"/>
+            <a:ext cx="2103120" cy="640080"/>
+          </a:xfrm>
+          <a:prstGeom prst="rect">
+            <a:avLst/>
+          </a:prstGeom>
+          <a:noFill/>
+          <a:ln/>
+        </p:spPr>
+        <p:txBody>
+          <a:bodyPr wrap="square" lIns="0" tIns="0" rIns="0" bIns="0" rtlCol="0" anchor="t"/>
+          <a:lstStyle/>
+          <a:p>
+            <a:pPr indent="0" marL="0">
+              <a:lnSpc>
+                <a:spcPct val="120000"/>
+              </a:lnSpc>
+              <a:buNone/>
+            </a:pPr>
+            <a:r>
+              <a:rPr lang="en-US" sz="1150" dirty="0">
+                <a:solidFill>
+                  <a:srgbClr val="3A3A3A"/>
+                </a:solidFill>
+                <a:latin typeface="游ゴシック" pitchFamily="34" charset="0"/>
+                <a:ea typeface="游ゴシック" pitchFamily="34" charset="-122"/>
+                <a:cs typeface="游ゴシック" pitchFamily="34" charset="-120"/>
+              </a:rPr>
+              <a:t>対話による安心</a:t>
+            </a:r>
+            <a:endParaRPr lang="en-US" sz="1150" dirty="0"/>
+          </a:p>
+        </p:txBody>
+      </p:sp>
+      <p:sp>
+        <p:nvSpPr>
+          <p:cNvPr id="10" name="Shape 8"/>
+          <p:cNvSpPr/>
+          <p:nvPr/>
+        </p:nvSpPr>
+        <p:spPr>
+          <a:xfrm>
+            <a:off x="3383280" y="4754880"/>
+            <a:ext cx="2468880" cy="1325880"/>
+          </a:xfrm>
+          <a:prstGeom prst="roundRect">
+            <a:avLst>
+              <a:gd name="adj" fmla="val 6897"/>
+            </a:avLst>
+          </a:prstGeom>
+          <a:solidFill>
+            <a:srgbClr val="F6F1EA"/>
+          </a:solidFill>
+          <a:ln/>
+          <a:effectLst>
+            <a:outerShdw sx="100000" sy="100000" kx="0" ky="0" algn="bl" rotWithShape="0" blurRad="101600" dist="38100" dir="5400000">
+              <a:srgbClr val="10233A">
+                <a:alpha val="18000"/>
+              </a:srgbClr>
+            </a:outerShdw>
+          </a:effectLst>
+        </p:spPr>
+      </p:sp>
+      <p:sp>
+        <p:nvSpPr>
+          <p:cNvPr id="11" name="Text 9"/>
+          <p:cNvSpPr txBox="1"/>
+          <p:nvPr/>
+        </p:nvSpPr>
+        <p:spPr>
+          <a:xfrm>
+            <a:off x="3566160" y="4937760"/>
+            <a:ext cx="2103120" cy="365760"/>
+          </a:xfrm>
+          <a:prstGeom prst="rect">
+            <a:avLst/>
+          </a:prstGeom>
+          <a:noFill/>
+          <a:ln/>
+        </p:spPr>
+        <p:txBody>
+          <a:bodyPr wrap="square" lIns="0" tIns="0" rIns="0" bIns="0" rtlCol="0" anchor="ctr"/>
+          <a:lstStyle/>
+          <a:p>
+            <a:pPr indent="0" marL="0">
+              <a:buNone/>
+            </a:pPr>
+            <a:r>
+              <a:rPr lang="en-US" sz="1500" b="1" dirty="0">
+                <a:solidFill>
+                  <a:srgbClr val="C9603F"/>
+                </a:solidFill>
+                <a:latin typeface="游ゴシック" pitchFamily="34" charset="0"/>
+                <a:ea typeface="游ゴシック" pitchFamily="34" charset="-122"/>
+                <a:cs typeface="游ゴシック" pitchFamily="34" charset="-120"/>
+              </a:rPr>
+              <a:t>専門家</a:t>
+            </a:r>
+            <a:endParaRPr lang="en-US" sz="1500" dirty="0"/>
+          </a:p>
+        </p:txBody>
+      </p:sp>
+      <p:sp>
+        <p:nvSpPr>
+          <p:cNvPr id="12" name="Text 10"/>
+          <p:cNvSpPr txBox="1"/>
+          <p:nvPr/>
+        </p:nvSpPr>
+        <p:spPr>
+          <a:xfrm>
+            <a:off x="3566160" y="5349240"/>
+            <a:ext cx="2103120" cy="640080"/>
+          </a:xfrm>
+          <a:prstGeom prst="rect">
+            <a:avLst/>
+          </a:prstGeom>
+          <a:noFill/>
+          <a:ln/>
+        </p:spPr>
+        <p:txBody>
+          <a:bodyPr wrap="square" lIns="0" tIns="0" rIns="0" bIns="0" rtlCol="0" anchor="t"/>
+          <a:lstStyle/>
+          <a:p>
+            <a:pPr indent="0" marL="0">
+              <a:lnSpc>
+                <a:spcPct val="120000"/>
+              </a:lnSpc>
+              <a:buNone/>
+            </a:pPr>
+            <a:r>
+              <a:rPr lang="en-US" sz="1150" dirty="0">
+                <a:solidFill>
+                  <a:srgbClr val="3A3A3A"/>
+                </a:solidFill>
+                <a:latin typeface="游ゴシック" pitchFamily="34" charset="0"/>
+                <a:ea typeface="游ゴシック" pitchFamily="34" charset="-122"/>
+                <a:cs typeface="游ゴシック" pitchFamily="34" charset="-120"/>
+              </a:rPr>
+              <a:t>新たな受任機会</a:t>
+            </a:r>
+            <a:endParaRPr lang="en-US" sz="1150" dirty="0"/>
+          </a:p>
+        </p:txBody>
+      </p:sp>
+      <p:sp>
+        <p:nvSpPr>
+          <p:cNvPr id="13" name="Shape 11"/>
+          <p:cNvSpPr/>
+          <p:nvPr/>
+        </p:nvSpPr>
+        <p:spPr>
+          <a:xfrm>
+            <a:off x="6126480" y="4754880"/>
+            <a:ext cx="2468880" cy="1325880"/>
+          </a:xfrm>
+          <a:prstGeom prst="roundRect">
+            <a:avLst>
+              <a:gd name="adj" fmla="val 6897"/>
+            </a:avLst>
+          </a:prstGeom>
+          <a:solidFill>
+            <a:srgbClr val="F6F1EA"/>
+          </a:solidFill>
+          <a:ln/>
+          <a:effectLst>
+            <a:outerShdw sx="100000" sy="100000" kx="0" ky="0" algn="bl" rotWithShape="0" blurRad="101600" dist="38100" dir="5400000">
+              <a:srgbClr val="10233A">
+                <a:alpha val="18000"/>
+              </a:srgbClr>
+            </a:outerShdw>
+          </a:effectLst>
+        </p:spPr>
+      </p:sp>
+      <p:sp>
+        <p:nvSpPr>
+          <p:cNvPr id="14" name="Text 12"/>
+          <p:cNvSpPr txBox="1"/>
+          <p:nvPr/>
+        </p:nvSpPr>
+        <p:spPr>
+          <a:xfrm>
+            <a:off x="6309360" y="4937760"/>
+            <a:ext cx="2103120" cy="365760"/>
+          </a:xfrm>
+          <a:prstGeom prst="rect">
+            <a:avLst/>
+          </a:prstGeom>
+          <a:noFill/>
+          <a:ln/>
+        </p:spPr>
+        <p:txBody>
+          <a:bodyPr wrap="square" lIns="0" tIns="0" rIns="0" bIns="0" rtlCol="0" anchor="ctr"/>
+          <a:lstStyle/>
+          <a:p>
+            <a:pPr indent="0" marL="0">
+              <a:buNone/>
+            </a:pPr>
+            <a:r>
+              <a:rPr lang="en-US" sz="1500" b="1" dirty="0">
+                <a:solidFill>
+                  <a:srgbClr val="C9603F"/>
+                </a:solidFill>
+                <a:latin typeface="游ゴシック" pitchFamily="34" charset="0"/>
+                <a:ea typeface="游ゴシック" pitchFamily="34" charset="-122"/>
+                <a:cs typeface="游ゴシック" pitchFamily="34" charset="-120"/>
+              </a:rPr>
+              <a:t>企業</a:t>
+            </a:r>
+            <a:endParaRPr lang="en-US" sz="1500" dirty="0"/>
+          </a:p>
+        </p:txBody>
+      </p:sp>
+      <p:sp>
+        <p:nvSpPr>
+          <p:cNvPr id="15" name="Text 13"/>
+          <p:cNvSpPr txBox="1"/>
+          <p:nvPr/>
+        </p:nvSpPr>
+        <p:spPr>
+          <a:xfrm>
+            <a:off x="6309360" y="5349240"/>
+            <a:ext cx="2103120" cy="640080"/>
+          </a:xfrm>
+          <a:prstGeom prst="rect">
+            <a:avLst/>
+          </a:prstGeom>
+          <a:noFill/>
+          <a:ln/>
+        </p:spPr>
+        <p:txBody>
+          <a:bodyPr wrap="square" lIns="0" tIns="0" rIns="0" bIns="0" rtlCol="0" anchor="t"/>
+          <a:lstStyle/>
+          <a:p>
+            <a:pPr indent="0" marL="0">
+              <a:lnSpc>
+                <a:spcPct val="120000"/>
+              </a:lnSpc>
+              <a:buNone/>
+            </a:pPr>
+            <a:r>
+              <a:rPr lang="en-US" sz="1150" dirty="0">
+                <a:solidFill>
+                  <a:srgbClr val="3A3A3A"/>
+                </a:solidFill>
+                <a:latin typeface="游ゴシック" pitchFamily="34" charset="0"/>
+                <a:ea typeface="游ゴシック" pitchFamily="34" charset="-122"/>
+                <a:cs typeface="游ゴシック" pitchFamily="34" charset="-120"/>
+              </a:rPr>
+              <a:t>従業員を大切にする法人へ</a:t>
+            </a:r>
+            <a:endParaRPr lang="en-US" sz="1150" dirty="0"/>
+          </a:p>
+        </p:txBody>
+      </p:sp>
+      <p:sp>
+        <p:nvSpPr>
+          <p:cNvPr id="16" name="Shape 14"/>
+          <p:cNvSpPr/>
+          <p:nvPr/>
+        </p:nvSpPr>
+        <p:spPr>
+          <a:xfrm>
+            <a:off x="8869680" y="4754880"/>
+            <a:ext cx="2468880" cy="1325880"/>
+          </a:xfrm>
+          <a:prstGeom prst="roundRect">
+            <a:avLst>
+              <a:gd name="adj" fmla="val 6897"/>
+            </a:avLst>
+          </a:prstGeom>
+          <a:solidFill>
+            <a:srgbClr val="F6F1EA"/>
+          </a:solidFill>
+          <a:ln/>
+          <a:effectLst>
+            <a:outerShdw sx="100000" sy="100000" kx="0" ky="0" algn="bl" rotWithShape="0" blurRad="101600" dist="38100" dir="5400000">
+              <a:srgbClr val="10233A">
+                <a:alpha val="18000"/>
+              </a:srgbClr>
+            </a:outerShdw>
+          </a:effectLst>
+        </p:spPr>
+      </p:sp>
+      <p:sp>
+        <p:nvSpPr>
+          <p:cNvPr id="17" name="Text 15"/>
+          <p:cNvSpPr txBox="1"/>
+          <p:nvPr/>
+        </p:nvSpPr>
+        <p:spPr>
+          <a:xfrm>
+            <a:off x="9052560" y="4937760"/>
+            <a:ext cx="2103120" cy="365760"/>
+          </a:xfrm>
+          <a:prstGeom prst="rect">
+            <a:avLst/>
+          </a:prstGeom>
+          <a:noFill/>
+          <a:ln/>
+        </p:spPr>
+        <p:txBody>
+          <a:bodyPr wrap="square" lIns="0" tIns="0" rIns="0" bIns="0" rtlCol="0" anchor="ctr"/>
+          <a:lstStyle/>
+          <a:p>
+            <a:pPr indent="0" marL="0">
+              <a:buNone/>
+            </a:pPr>
+            <a:r>
+              <a:rPr lang="en-US" sz="1500" b="1" dirty="0">
+                <a:solidFill>
+                  <a:srgbClr val="C9603F"/>
+                </a:solidFill>
+                <a:latin typeface="游ゴシック" pitchFamily="34" charset="0"/>
+                <a:ea typeface="游ゴシック" pitchFamily="34" charset="-122"/>
+                <a:cs typeface="游ゴシック" pitchFamily="34" charset="-120"/>
+              </a:rPr>
+              <a:t>行政・地域</a:t>
+            </a:r>
+            <a:endParaRPr lang="en-US" sz="1500" dirty="0"/>
+          </a:p>
+        </p:txBody>
+      </p:sp>
+      <p:sp>
+        <p:nvSpPr>
+          <p:cNvPr id="18" name="Text 16"/>
+          <p:cNvSpPr txBox="1"/>
+          <p:nvPr/>
+        </p:nvSpPr>
+        <p:spPr>
+          <a:xfrm>
+            <a:off x="9052560" y="5349240"/>
+            <a:ext cx="2103120" cy="640080"/>
+          </a:xfrm>
+          <a:prstGeom prst="rect">
+            <a:avLst/>
+          </a:prstGeom>
+          <a:noFill/>
+          <a:ln/>
+        </p:spPr>
+        <p:txBody>
+          <a:bodyPr wrap="square" lIns="0" tIns="0" rIns="0" bIns="0" rtlCol="0" anchor="t"/>
+          <a:lstStyle/>
+          <a:p>
+            <a:pPr indent="0" marL="0">
+              <a:lnSpc>
+                <a:spcPct val="120000"/>
+              </a:lnSpc>
+              <a:buNone/>
+            </a:pPr>
+            <a:r>
+              <a:rPr lang="en-US" sz="1150" dirty="0">
+                <a:solidFill>
+                  <a:srgbClr val="3A3A3A"/>
+                </a:solidFill>
+                <a:latin typeface="游ゴシック" pitchFamily="34" charset="0"/>
+                <a:ea typeface="游ゴシック" pitchFamily="34" charset="-122"/>
+                <a:cs typeface="游ゴシック" pitchFamily="34" charset="-120"/>
+              </a:rPr>
+              <a:t>連携モデルの横展開</a:t>
+            </a:r>
+            <a:endParaRPr lang="en-US" sz="1150" dirty="0"/>
+          </a:p>
+        </p:txBody>
+      </p:sp>
+      <p:sp>
+        <p:nvSpPr>
+          <p:cNvPr id="19" name="Text 17"/>
+          <p:cNvSpPr txBox="1"/>
+          <p:nvPr/>
+        </p:nvSpPr>
+        <p:spPr>
+          <a:xfrm>
+            <a:off x="11551615" y="6400800"/>
+            <a:ext cx="457200" cy="274320"/>
+          </a:xfrm>
+          <a:prstGeom prst="rect">
+            <a:avLst/>
+          </a:prstGeom>
+          <a:noFill/>
+          <a:ln/>
+        </p:spPr>
+        <p:txBody>
+          <a:bodyPr wrap="square" lIns="0" tIns="0" rIns="0" bIns="0" rtlCol="0" anchor="ctr"/>
+          <a:lstStyle/>
+          <a:p>
+            <a:pPr algn="r" indent="0" marL="0">
+              <a:buNone/>
+            </a:pPr>
+            <a:r>
+              <a:rPr lang="en-US" sz="1000" dirty="0">
+                <a:solidFill>
+                  <a:srgbClr val="6B6B6B"/>
+                </a:solidFill>
+                <a:latin typeface="游ゴシック" pitchFamily="34" charset="0"/>
+                <a:ea typeface="游ゴシック" pitchFamily="34" charset="-122"/>
+                <a:cs typeface="游ゴシック" pitchFamily="34" charset="-120"/>
+              </a:rPr>
+              <a:t>16</a:t>
+            </a:r>
+            <a:endParaRPr lang="en-US" sz="1000" dirty="0"/>
+          </a:p>
+        </p:txBody>
+      </p:sp>
+    </p:spTree>
+  </p:cSld>
+  <p:clrMapOvr>
+    <a:masterClrMapping/>
+  </p:clrMapOvr>
+</p:sld>
+</file>
+
+<file path=ppt/slides/slide17.xml><?xml version="1.0" encoding="utf-8"?>
+<p:sld xmlns:a="http://schemas.openxmlformats.org/drawingml/2006/main" xmlns:r="http://schemas.openxmlformats.org/officeDocument/2006/relationships" xmlns:p="http://schemas.openxmlformats.org/presentationml/2006/main">
+  <p:cSld name="Slide 17">
     <p:bg>
       <p:bgPr>
         <a:solidFill>
@@ -12847,7 +13306,7 @@
                 <a:ea typeface="游ゴシック" pitchFamily="34" charset="-122"/>
                 <a:cs typeface="游ゴシック" pitchFamily="34" charset="-120"/>
               </a:rPr>
-              <a:t>BREAKDOWN</a:t>
+              <a:t>FROM THE FIELD</a:t>
             </a:r>
             <a:endParaRPr lang="en-US" sz="1300" dirty="0"/>
           </a:p>
@@ -12886,46 +13345,30 @@
                 <a:ea typeface="游ゴシック" pitchFamily="34" charset="-122"/>
                 <a:cs typeface="游ゴシック" pitchFamily="34" charset="-120"/>
               </a:rPr>
-              <a:t>内訳ランキング ― 金融・不動産で全体の8割</a:t>
+              <a:t>現場の実際 ― 全国に広がる「経済圏」</a:t>
             </a:r>
             <a:endParaRPr lang="en-US" sz="2700" dirty="0"/>
           </a:p>
         </p:txBody>
       </p:sp>
-      <p:graphicFrame>
-        <p:nvGraphicFramePr>
-          <p:cNvPr id="4" name="Chart 0" descr=""/>
-          <p:cNvGraphicFramePr/>
-          <p:nvPr/>
-        </p:nvGraphicFramePr>
-        <p:xfrm>
-          <a:off x="640080" y="1691640"/>
-          <a:ext cx="6675120" cy="4297680"/>
-        </p:xfrm>
-        <a:graphic xmlns:a="http://schemas.openxmlformats.org/drawingml/2006/main">
-          <a:graphicData uri="http://schemas.openxmlformats.org/drawingml/2006/chart">
-            <c:chart xmlns:c="http://schemas.openxmlformats.org/drawingml/2006/chart" r:id="rId1"/>
-          </a:graphicData>
-        </a:graphic>
-      </p:graphicFrame>
-      <p:sp>
-        <p:nvSpPr>
-          <p:cNvPr id="5" name="Shape 2"/>
+      <p:sp>
+        <p:nvSpPr>
+          <p:cNvPr id="4" name="Shape 2"/>
           <p:cNvSpPr/>
           <p:nvPr/>
         </p:nvSpPr>
         <p:spPr>
           <a:xfrm>
-            <a:off x="7635240" y="1783080"/>
-            <a:ext cx="3931920" cy="1828800"/>
+            <a:off x="3774628" y="1737360"/>
+            <a:ext cx="1395080" cy="1828800"/>
           </a:xfrm>
           <a:prstGeom prst="roundRect">
             <a:avLst>
-              <a:gd name="adj" fmla="val 5000"/>
+              <a:gd name="adj" fmla="val 3277"/>
             </a:avLst>
           </a:prstGeom>
           <a:solidFill>
-            <a:srgbClr val="F6F1EA"/>
+            <a:srgbClr val="FFFFFF"/>
           </a:solidFill>
           <a:ln/>
           <a:effectLst>
@@ -12937,6 +13380,30 @@
           </a:effectLst>
         </p:spPr>
       </p:sp>
+      <p:pic>
+        <p:nvPicPr>
+          <p:cNvPr id="5" name="Image 0" descr="field_shizuoka.jpg">    </p:cNvPr>
+          <p:cNvPicPr>
+            <a:picLocks noChangeAspect="1"/>
+          </p:cNvPicPr>
+          <p:nvPr/>
+        </p:nvPicPr>
+        <p:blipFill>
+          <a:blip r:embed="rId1"/>
+          <a:stretch>
+            <a:fillRect/>
+          </a:stretch>
+        </p:blipFill>
+        <p:spPr>
+          <a:xfrm>
+            <a:off x="3820348" y="1783080"/>
+            <a:ext cx="1303640" cy="1737360"/>
+          </a:xfrm>
+          <a:prstGeom prst="rect">
+            <a:avLst/>
+          </a:prstGeom>
+        </p:spPr>
+      </p:pic>
       <p:sp>
         <p:nvSpPr>
           <p:cNvPr id="6" name="Text 3"/>
@@ -12945,47 +13412,8 @@
         </p:nvSpPr>
         <p:spPr>
           <a:xfrm>
-            <a:off x="7863840" y="1965960"/>
-            <a:ext cx="3474720" cy="457200"/>
-          </a:xfrm>
-          <a:prstGeom prst="rect">
-            <a:avLst/>
-          </a:prstGeom>
-          <a:noFill/>
-          <a:ln/>
-        </p:spPr>
-        <p:txBody>
-          <a:bodyPr wrap="square" lIns="0" tIns="0" rIns="0" bIns="0" rtlCol="0" anchor="ctr"/>
-          <a:lstStyle/>
-          <a:p>
-            <a:pPr indent="0" marL="0">
-              <a:buNone/>
-            </a:pPr>
-            <a:r>
-              <a:rPr lang="en-US" sz="1600" b="1" dirty="0">
-                <a:solidFill>
-                  <a:srgbClr val="C9603F"/>
-                </a:solidFill>
-                <a:latin typeface="游ゴシック" pitchFamily="34" charset="0"/>
-                <a:ea typeface="游ゴシック" pitchFamily="34" charset="-122"/>
-                <a:cs typeface="游ゴシック" pitchFamily="34" charset="-120"/>
-              </a:rPr>
-              <a:t>金融＋不動産　＝　80億円</a:t>
-            </a:r>
-            <a:endParaRPr lang="en-US" sz="1600" dirty="0"/>
-          </a:p>
-        </p:txBody>
-      </p:sp>
-      <p:sp>
-        <p:nvSpPr>
-          <p:cNvPr id="7" name="Text 4"/>
-          <p:cNvSpPr txBox="1"/>
-          <p:nvPr/>
-        </p:nvSpPr>
-        <p:spPr>
-          <a:xfrm>
-            <a:off x="7863840" y="2423160"/>
-            <a:ext cx="3474720" cy="1097280"/>
+            <a:off x="3728908" y="3611880"/>
+            <a:ext cx="1486520" cy="411480"/>
           </a:xfrm>
           <a:prstGeom prst="rect">
             <a:avLst/>
@@ -12997,45 +13425,45 @@
           <a:bodyPr wrap="square" lIns="0" tIns="0" rIns="0" bIns="0" rtlCol="0" anchor="t"/>
           <a:lstStyle/>
           <a:p>
-            <a:pPr indent="0" marL="0">
+            <a:pPr algn="ctr" indent="0" marL="0">
               <a:lnSpc>
-                <a:spcPct val="125000"/>
+                <a:spcPct val="115000"/>
               </a:lnSpc>
               <a:buNone/>
             </a:pPr>
             <a:r>
-              <a:rPr lang="en-US" sz="1200" dirty="0">
-                <a:solidFill>
-                  <a:srgbClr val="3A3A3A"/>
-                </a:solidFill>
-                <a:latin typeface="游ゴシック" pitchFamily="34" charset="0"/>
-                <a:ea typeface="游ゴシック" pitchFamily="34" charset="-122"/>
-                <a:cs typeface="游ゴシック" pitchFamily="34" charset="-120"/>
-              </a:rPr>
-              <a:t>全体想定100億円のうち約8割を占める、資産性の高い意思決定支援（相続発生時の資産整理・組み換え）が中核であることを示す。</a:t>
-            </a:r>
-            <a:endParaRPr lang="en-US" sz="1200" dirty="0"/>
-          </a:p>
-        </p:txBody>
-      </p:sp>
-      <p:sp>
-        <p:nvSpPr>
-          <p:cNvPr id="8" name="Shape 5"/>
+              <a:rPr lang="en-US" sz="1050" dirty="0">
+                <a:solidFill>
+                  <a:srgbClr val="6B6B6B"/>
+                </a:solidFill>
+                <a:latin typeface="游ゴシック" pitchFamily="34" charset="0"/>
+                <a:ea typeface="游ゴシック" pitchFamily="34" charset="-122"/>
+                <a:cs typeface="游ゴシック" pitchFamily="34" charset="-120"/>
+              </a:rPr>
+              <a:t>静岡市生涯学習センター</a:t>
+            </a:r>
+            <a:endParaRPr lang="en-US" sz="1050" dirty="0"/>
+          </a:p>
+        </p:txBody>
+      </p:sp>
+      <p:sp>
+        <p:nvSpPr>
+          <p:cNvPr id="7" name="Shape 4"/>
           <p:cNvSpPr/>
           <p:nvPr/>
         </p:nvSpPr>
         <p:spPr>
           <a:xfrm>
-            <a:off x="7635240" y="3794760"/>
-            <a:ext cx="3931920" cy="2194560"/>
+            <a:off x="5398308" y="1737360"/>
+            <a:ext cx="1395080" cy="1828800"/>
           </a:xfrm>
           <a:prstGeom prst="roundRect">
             <a:avLst>
-              <a:gd name="adj" fmla="val 4167"/>
+              <a:gd name="adj" fmla="val 3277"/>
             </a:avLst>
           </a:prstGeom>
           <a:solidFill>
-            <a:srgbClr val="F6F1EA"/>
+            <a:srgbClr val="FFFFFF"/>
           </a:solidFill>
           <a:ln/>
           <a:effectLst>
@@ -13047,16 +13475,367 @@
           </a:effectLst>
         </p:spPr>
       </p:sp>
-      <p:sp>
-        <p:nvSpPr>
-          <p:cNvPr id="9" name="Text 6"/>
-          <p:cNvSpPr txBox="1"/>
-          <p:nvPr/>
-        </p:nvSpPr>
-        <p:spPr>
-          <a:xfrm>
-            <a:off x="7863840" y="3977640"/>
-            <a:ext cx="3474720" cy="457200"/>
+      <p:pic>
+        <p:nvPicPr>
+          <p:cNvPr id="8" name="Image 1" descr="field_emergency.jpg">    </p:cNvPr>
+          <p:cNvPicPr>
+            <a:picLocks noChangeAspect="1"/>
+          </p:cNvPicPr>
+          <p:nvPr/>
+        </p:nvPicPr>
+        <p:blipFill>
+          <a:blip r:embed="rId2"/>
+          <a:stretch>
+            <a:fillRect/>
+          </a:stretch>
+        </p:blipFill>
+        <p:spPr>
+          <a:xfrm>
+            <a:off x="5444028" y="1783080"/>
+            <a:ext cx="1303640" cy="1737360"/>
+          </a:xfrm>
+          <a:prstGeom prst="rect">
+            <a:avLst/>
+          </a:prstGeom>
+        </p:spPr>
+      </p:pic>
+      <p:sp>
+        <p:nvSpPr>
+          <p:cNvPr id="9" name="Text 5"/>
+          <p:cNvSpPr txBox="1"/>
+          <p:nvPr/>
+        </p:nvSpPr>
+        <p:spPr>
+          <a:xfrm>
+            <a:off x="5352588" y="3611880"/>
+            <a:ext cx="1486520" cy="411480"/>
+          </a:xfrm>
+          <a:prstGeom prst="rect">
+            <a:avLst/>
+          </a:prstGeom>
+          <a:noFill/>
+          <a:ln/>
+        </p:spPr>
+        <p:txBody>
+          <a:bodyPr wrap="square" lIns="0" tIns="0" rIns="0" bIns="0" rtlCol="0" anchor="t"/>
+          <a:lstStyle/>
+          <a:p>
+            <a:pPr algn="ctr" indent="0" marL="0">
+              <a:lnSpc>
+                <a:spcPct val="115000"/>
+              </a:lnSpc>
+              <a:buNone/>
+            </a:pPr>
+            <a:r>
+              <a:rPr lang="en-US" sz="1050" dirty="0">
+                <a:solidFill>
+                  <a:srgbClr val="6B6B6B"/>
+                </a:solidFill>
+                <a:latin typeface="游ゴシック" pitchFamily="34" charset="0"/>
+                <a:ea typeface="游ゴシック" pitchFamily="34" charset="-122"/>
+                <a:cs typeface="游ゴシック" pitchFamily="34" charset="-120"/>
+              </a:rPr>
+              <a:t>消防・救急関係者向け研修</a:t>
+            </a:r>
+            <a:endParaRPr lang="en-US" sz="1050" dirty="0"/>
+          </a:p>
+        </p:txBody>
+      </p:sp>
+      <p:sp>
+        <p:nvSpPr>
+          <p:cNvPr id="10" name="Shape 6"/>
+          <p:cNvSpPr/>
+          <p:nvPr/>
+        </p:nvSpPr>
+        <p:spPr>
+          <a:xfrm>
+            <a:off x="7021987" y="1737360"/>
+            <a:ext cx="1395080" cy="1828800"/>
+          </a:xfrm>
+          <a:prstGeom prst="roundRect">
+            <a:avLst>
+              <a:gd name="adj" fmla="val 3277"/>
+            </a:avLst>
+          </a:prstGeom>
+          <a:solidFill>
+            <a:srgbClr val="FFFFFF"/>
+          </a:solidFill>
+          <a:ln/>
+          <a:effectLst>
+            <a:outerShdw sx="100000" sy="100000" kx="0" ky="0" algn="bl" rotWithShape="0" blurRad="101600" dist="38100" dir="5400000">
+              <a:srgbClr val="10233A">
+                <a:alpha val="18000"/>
+              </a:srgbClr>
+            </a:outerShdw>
+          </a:effectLst>
+        </p:spPr>
+      </p:sp>
+      <p:pic>
+        <p:nvPicPr>
+          <p:cNvPr id="11" name="Image 2" descr="field_workshop.jpg">    </p:cNvPr>
+          <p:cNvPicPr>
+            <a:picLocks noChangeAspect="1"/>
+          </p:cNvPicPr>
+          <p:nvPr/>
+        </p:nvPicPr>
+        <p:blipFill>
+          <a:blip r:embed="rId3"/>
+          <a:stretch>
+            <a:fillRect/>
+          </a:stretch>
+        </p:blipFill>
+        <p:spPr>
+          <a:xfrm>
+            <a:off x="7067707" y="1783080"/>
+            <a:ext cx="1303640" cy="1737360"/>
+          </a:xfrm>
+          <a:prstGeom prst="rect">
+            <a:avLst/>
+          </a:prstGeom>
+        </p:spPr>
+      </p:pic>
+      <p:sp>
+        <p:nvSpPr>
+          <p:cNvPr id="12" name="Text 7"/>
+          <p:cNvSpPr txBox="1"/>
+          <p:nvPr/>
+        </p:nvSpPr>
+        <p:spPr>
+          <a:xfrm>
+            <a:off x="6976267" y="3611880"/>
+            <a:ext cx="1486520" cy="411480"/>
+          </a:xfrm>
+          <a:prstGeom prst="rect">
+            <a:avLst/>
+          </a:prstGeom>
+          <a:noFill/>
+          <a:ln/>
+        </p:spPr>
+        <p:txBody>
+          <a:bodyPr wrap="square" lIns="0" tIns="0" rIns="0" bIns="0" rtlCol="0" anchor="t"/>
+          <a:lstStyle/>
+          <a:p>
+            <a:pPr algn="ctr" indent="0" marL="0">
+              <a:lnSpc>
+                <a:spcPct val="115000"/>
+              </a:lnSpc>
+              <a:buNone/>
+            </a:pPr>
+            <a:r>
+              <a:rPr lang="en-US" sz="1050" dirty="0">
+                <a:solidFill>
+                  <a:srgbClr val="6B6B6B"/>
+                </a:solidFill>
+                <a:latin typeface="游ゴシック" pitchFamily="34" charset="0"/>
+                <a:ea typeface="游ゴシック" pitchFamily="34" charset="-122"/>
+                <a:cs typeface="游ゴシック" pitchFamily="34" charset="-120"/>
+              </a:rPr>
+              <a:t>資格講座・グループワーク</a:t>
+            </a:r>
+            <a:endParaRPr lang="en-US" sz="1050" dirty="0"/>
+          </a:p>
+        </p:txBody>
+      </p:sp>
+      <p:sp>
+        <p:nvSpPr>
+          <p:cNvPr id="13" name="Shape 8"/>
+          <p:cNvSpPr/>
+          <p:nvPr/>
+        </p:nvSpPr>
+        <p:spPr>
+          <a:xfrm>
+            <a:off x="4081626" y="4023360"/>
+            <a:ext cx="1394460" cy="1828800"/>
+          </a:xfrm>
+          <a:prstGeom prst="roundRect">
+            <a:avLst>
+              <a:gd name="adj" fmla="val 3279"/>
+            </a:avLst>
+          </a:prstGeom>
+          <a:solidFill>
+            <a:srgbClr val="FFFFFF"/>
+          </a:solidFill>
+          <a:ln/>
+          <a:effectLst>
+            <a:outerShdw sx="100000" sy="100000" kx="0" ky="0" algn="bl" rotWithShape="0" blurRad="101600" dist="38100" dir="5400000">
+              <a:srgbClr val="10233A">
+                <a:alpha val="18000"/>
+              </a:srgbClr>
+            </a:outerShdw>
+          </a:effectLst>
+        </p:spPr>
+      </p:sp>
+      <p:pic>
+        <p:nvPicPr>
+          <p:cNvPr id="14" name="Image 3" descr="field_newspaper.jpg">    </p:cNvPr>
+          <p:cNvPicPr>
+            <a:picLocks noChangeAspect="1"/>
+          </p:cNvPicPr>
+          <p:nvPr/>
+        </p:nvPicPr>
+        <p:blipFill>
+          <a:blip r:embed="rId4"/>
+          <a:stretch>
+            <a:fillRect/>
+          </a:stretch>
+        </p:blipFill>
+        <p:spPr>
+          <a:xfrm>
+            <a:off x="4127346" y="4069080"/>
+            <a:ext cx="1303020" cy="1737360"/>
+          </a:xfrm>
+          <a:prstGeom prst="rect">
+            <a:avLst/>
+          </a:prstGeom>
+        </p:spPr>
+      </p:pic>
+      <p:sp>
+        <p:nvSpPr>
+          <p:cNvPr id="15" name="Text 9"/>
+          <p:cNvSpPr txBox="1"/>
+          <p:nvPr/>
+        </p:nvSpPr>
+        <p:spPr>
+          <a:xfrm>
+            <a:off x="4035906" y="5897880"/>
+            <a:ext cx="1485900" cy="411480"/>
+          </a:xfrm>
+          <a:prstGeom prst="rect">
+            <a:avLst/>
+          </a:prstGeom>
+          <a:noFill/>
+          <a:ln/>
+        </p:spPr>
+        <p:txBody>
+          <a:bodyPr wrap="square" lIns="0" tIns="0" rIns="0" bIns="0" rtlCol="0" anchor="t"/>
+          <a:lstStyle/>
+          <a:p>
+            <a:pPr algn="ctr" indent="0" marL="0">
+              <a:lnSpc>
+                <a:spcPct val="115000"/>
+              </a:lnSpc>
+              <a:buNone/>
+            </a:pPr>
+            <a:r>
+              <a:rPr lang="en-US" sz="1050" dirty="0">
+                <a:solidFill>
+                  <a:srgbClr val="6B6B6B"/>
+                </a:solidFill>
+                <a:latin typeface="游ゴシック" pitchFamily="34" charset="0"/>
+                <a:ea typeface="游ゴシック" pitchFamily="34" charset="-122"/>
+                <a:cs typeface="游ゴシック" pitchFamily="34" charset="-120"/>
+              </a:rPr>
+              <a:t>北日本新聞社主催セミナー（富山）</a:t>
+            </a:r>
+            <a:endParaRPr lang="en-US" sz="1050" dirty="0"/>
+          </a:p>
+        </p:txBody>
+      </p:sp>
+      <p:sp>
+        <p:nvSpPr>
+          <p:cNvPr id="16" name="Shape 10"/>
+          <p:cNvSpPr/>
+          <p:nvPr/>
+        </p:nvSpPr>
+        <p:spPr>
+          <a:xfrm>
+            <a:off x="5704686" y="4023360"/>
+            <a:ext cx="2405383" cy="1828800"/>
+          </a:xfrm>
+          <a:prstGeom prst="roundRect">
+            <a:avLst>
+              <a:gd name="adj" fmla="val 2500"/>
+            </a:avLst>
+          </a:prstGeom>
+          <a:solidFill>
+            <a:srgbClr val="FFFFFF"/>
+          </a:solidFill>
+          <a:ln/>
+          <a:effectLst>
+            <a:outerShdw sx="100000" sy="100000" kx="0" ky="0" algn="bl" rotWithShape="0" blurRad="101600" dist="38100" dir="5400000">
+              <a:srgbClr val="10233A">
+                <a:alpha val="18000"/>
+              </a:srgbClr>
+            </a:outerShdw>
+          </a:effectLst>
+        </p:spPr>
+      </p:sp>
+      <p:pic>
+        <p:nvPicPr>
+          <p:cNvPr id="17" name="Image 4" descr="field_seminar.jpg">    </p:cNvPr>
+          <p:cNvPicPr>
+            <a:picLocks noChangeAspect="1"/>
+          </p:cNvPicPr>
+          <p:nvPr/>
+        </p:nvPicPr>
+        <p:blipFill>
+          <a:blip r:embed="rId5"/>
+          <a:stretch>
+            <a:fillRect/>
+          </a:stretch>
+        </p:blipFill>
+        <p:spPr>
+          <a:xfrm>
+            <a:off x="5750406" y="4069080"/>
+            <a:ext cx="2313943" cy="1737360"/>
+          </a:xfrm>
+          <a:prstGeom prst="rect">
+            <a:avLst/>
+          </a:prstGeom>
+        </p:spPr>
+      </p:pic>
+      <p:sp>
+        <p:nvSpPr>
+          <p:cNvPr id="18" name="Text 11"/>
+          <p:cNvSpPr txBox="1"/>
+          <p:nvPr/>
+        </p:nvSpPr>
+        <p:spPr>
+          <a:xfrm>
+            <a:off x="5658966" y="5897880"/>
+            <a:ext cx="2496823" cy="411480"/>
+          </a:xfrm>
+          <a:prstGeom prst="rect">
+            <a:avLst/>
+          </a:prstGeom>
+          <a:noFill/>
+          <a:ln/>
+        </p:spPr>
+        <p:txBody>
+          <a:bodyPr wrap="square" lIns="0" tIns="0" rIns="0" bIns="0" rtlCol="0" anchor="t"/>
+          <a:lstStyle/>
+          <a:p>
+            <a:pPr algn="ctr" indent="0" marL="0">
+              <a:lnSpc>
+                <a:spcPct val="115000"/>
+              </a:lnSpc>
+              <a:buNone/>
+            </a:pPr>
+            <a:r>
+              <a:rPr lang="en-US" sz="1050" dirty="0">
+                <a:solidFill>
+                  <a:srgbClr val="6B6B6B"/>
+                </a:solidFill>
+                <a:latin typeface="游ゴシック" pitchFamily="34" charset="0"/>
+                <a:ea typeface="游ゴシック" pitchFamily="34" charset="-122"/>
+                <a:cs typeface="游ゴシック" pitchFamily="34" charset="-120"/>
+              </a:rPr>
+              <a:t>金融機関・専門職向けセミナー</a:t>
+            </a:r>
+            <a:endParaRPr lang="en-US" sz="1050" dirty="0"/>
+          </a:p>
+        </p:txBody>
+      </p:sp>
+      <p:sp>
+        <p:nvSpPr>
+          <p:cNvPr id="19" name="Text 12"/>
+          <p:cNvSpPr txBox="1"/>
+          <p:nvPr/>
+        </p:nvSpPr>
+        <p:spPr>
+          <a:xfrm>
+            <a:off x="640080" y="6309360"/>
+            <a:ext cx="10881360" cy="320040"/>
           </a:xfrm>
           <a:prstGeom prst="rect">
             <a:avLst/>
@@ -13072,117 +13851,23 @@
               <a:buNone/>
             </a:pPr>
             <a:r>
-              <a:rPr lang="en-US" sz="1500" b="1" dirty="0">
-                <a:solidFill>
-                  <a:srgbClr val="1E3A5F"/>
-                </a:solidFill>
-                <a:latin typeface="游ゴシック" pitchFamily="34" charset="0"/>
-                <a:ea typeface="游ゴシック" pitchFamily="34" charset="-122"/>
-                <a:cs typeface="游ゴシック" pitchFamily="34" charset="-120"/>
-              </a:rPr>
-              <a:t>残り2割＝士業・施設・M&amp;Aの裾野</a:t>
-            </a:r>
-            <a:endParaRPr lang="en-US" sz="1500" dirty="0"/>
-          </a:p>
-        </p:txBody>
-      </p:sp>
-      <p:sp>
-        <p:nvSpPr>
-          <p:cNvPr id="10" name="Text 7"/>
-          <p:cNvSpPr txBox="1"/>
-          <p:nvPr/>
-        </p:nvSpPr>
-        <p:spPr>
-          <a:xfrm>
-            <a:off x="7863840" y="4434840"/>
-            <a:ext cx="3474720" cy="1463040"/>
-          </a:xfrm>
-          <a:prstGeom prst="rect">
-            <a:avLst/>
-          </a:prstGeom>
-          <a:noFill/>
-          <a:ln/>
-        </p:spPr>
-        <p:txBody>
-          <a:bodyPr wrap="square" lIns="0" tIns="0" rIns="0" bIns="0" rtlCol="0" anchor="t"/>
-          <a:lstStyle/>
-          <a:p>
-            <a:pPr marL="342900" indent="-342900">
-              <a:lnSpc>
-                <a:spcPct val="128000"/>
-              </a:lnSpc>
-              <a:spcAft>
-                <a:spcPts val="800"/>
-              </a:spcAft>
-              <a:buSzPct val="100000"/>
-              <a:buChar char="●"/>
-            </a:pPr>
-            <a:r>
-              <a:rPr lang="en-US" sz="1150" dirty="0">
-                <a:solidFill>
-                  <a:srgbClr val="3A3A3A"/>
-                </a:solidFill>
-                <a:latin typeface="游ゴシック" pitchFamily="34" charset="0"/>
-                <a:ea typeface="游ゴシック" pitchFamily="34" charset="-122"/>
-                <a:cs typeface="游ゴシック" pitchFamily="34" charset="-120"/>
-              </a:rPr>
-              <a:t>税理士・司法書士・行政書士・弁護士＝合計7億円</a:t>
-            </a:r>
-            <a:endParaRPr lang="en-US" sz="1150" dirty="0"/>
-          </a:p>
-          <a:p>
-            <a:pPr marL="342900" indent="-342900">
-              <a:lnSpc>
-                <a:spcPct val="128000"/>
-              </a:lnSpc>
-              <a:spcAft>
-                <a:spcPts val="800"/>
-              </a:spcAft>
-              <a:buSzPct val="100000"/>
-              <a:buChar char="●"/>
-            </a:pPr>
-            <a:r>
-              <a:rPr lang="en-US" sz="1150" dirty="0">
-                <a:solidFill>
-                  <a:srgbClr val="3A3A3A"/>
-                </a:solidFill>
-                <a:latin typeface="游ゴシック" pitchFamily="34" charset="0"/>
-                <a:ea typeface="游ゴシック" pitchFamily="34" charset="-122"/>
-                <a:cs typeface="游ゴシック" pitchFamily="34" charset="-120"/>
-              </a:rPr>
-              <a:t>有料老人ホーム3億円、法人バルクM&amp;A5億円</a:t>
-            </a:r>
-            <a:endParaRPr lang="en-US" sz="1150" dirty="0"/>
-          </a:p>
-          <a:p>
-            <a:pPr marL="342900" indent="-342900">
-              <a:lnSpc>
-                <a:spcPct val="128000"/>
-              </a:lnSpc>
-              <a:spcAft>
-                <a:spcPts val="800"/>
-              </a:spcAft>
-              <a:buSzPct val="100000"/>
-              <a:buChar char="●"/>
-            </a:pPr>
-            <a:r>
-              <a:rPr lang="en-US" sz="1150" dirty="0">
-                <a:solidFill>
-                  <a:srgbClr val="3A3A3A"/>
-                </a:solidFill>
-                <a:latin typeface="游ゴシック" pitchFamily="34" charset="0"/>
-                <a:ea typeface="游ゴシック" pitchFamily="34" charset="-122"/>
-                <a:cs typeface="游ゴシック" pitchFamily="34" charset="-120"/>
-              </a:rPr>
-              <a:t>単発の大型案件だけでなく、裾野の広い専門家連携が常時発生している</a:t>
-            </a:r>
-            <a:endParaRPr lang="en-US" sz="1150" dirty="0"/>
-          </a:p>
-        </p:txBody>
-      </p:sp>
-      <p:sp>
-        <p:nvSpPr>
-          <p:cNvPr id="11" name="Text 8"/>
+              <a:rPr lang="en-US" sz="1250" i="1" dirty="0">
+                <a:solidFill>
+                  <a:srgbClr val="6B6B6B"/>
+                </a:solidFill>
+                <a:latin typeface="游ゴシック" pitchFamily="34" charset="0"/>
+                <a:ea typeface="游ゴシック" pitchFamily="34" charset="-122"/>
+                <a:cs typeface="游ゴシック" pitchFamily="34" charset="-120"/>
+              </a:rPr>
+              <a:t>消防・医療、金融機関、メディア、自治体まで ― “生きる準備”を届ける現場は、既に全国に広がっている。</a:t>
+            </a:r>
+            <a:endParaRPr lang="en-US" sz="1250" dirty="0"/>
+          </a:p>
+        </p:txBody>
+      </p:sp>
+      <p:sp>
+        <p:nvSpPr>
+          <p:cNvPr id="20" name="Text 13"/>
           <p:cNvSpPr txBox="1"/>
           <p:nvPr/>
         </p:nvSpPr>
@@ -13284,7 +13969,7 @@
                 <a:ea typeface="游ゴシック" pitchFamily="34" charset="-122"/>
                 <a:cs typeface="游ゴシック" pitchFamily="34" charset="-120"/>
               </a:rPr>
-              <a:t>01 / NOVELTY</a:t>
+              <a:t>BREAKDOWN</a:t>
             </a:r>
             <a:endParaRPr lang="en-US" sz="1300" dirty="0"/>
           </a:p>
@@ -13323,28 +14008,46 @@
                 <a:ea typeface="游ゴシック" pitchFamily="34" charset="-122"/>
                 <a:cs typeface="游ゴシック" pitchFamily="34" charset="-120"/>
               </a:rPr>
-              <a:t>斬新性 ― 「hub」として経済圏を創るという発想</a:t>
+              <a:t>内訳ランキング ― 金融・不動産で全体の8割</a:t>
             </a:r>
             <a:endParaRPr lang="en-US" sz="2700" dirty="0"/>
           </a:p>
         </p:txBody>
       </p:sp>
-      <p:sp>
-        <p:nvSpPr>
-          <p:cNvPr id="4" name="Shape 2"/>
+      <p:graphicFrame>
+        <p:nvGraphicFramePr>
+          <p:cNvPr id="4" name="Chart 0" descr=""/>
+          <p:cNvGraphicFramePr/>
+          <p:nvPr/>
+        </p:nvGraphicFramePr>
+        <p:xfrm>
+          <a:off x="640080" y="1691640"/>
+          <a:ext cx="6675120" cy="4297680"/>
+        </p:xfrm>
+        <a:graphic xmlns:a="http://schemas.openxmlformats.org/drawingml/2006/main">
+          <a:graphicData uri="http://schemas.openxmlformats.org/drawingml/2006/chart">
+            <c:chart xmlns:c="http://schemas.openxmlformats.org/drawingml/2006/chart" r:id="rId1"/>
+          </a:graphicData>
+        </a:graphic>
+      </p:graphicFrame>
+      <p:sp>
+        <p:nvSpPr>
+          <p:cNvPr id="5" name="Shape 2"/>
           <p:cNvSpPr/>
           <p:nvPr/>
         </p:nvSpPr>
         <p:spPr>
           <a:xfrm>
-            <a:off x="10607040" y="502920"/>
-            <a:ext cx="822960" cy="822960"/>
-          </a:xfrm>
-          <a:prstGeom prst="ellipse">
-            <a:avLst/>
+            <a:off x="7635240" y="1783080"/>
+            <a:ext cx="3931920" cy="1828800"/>
+          </a:xfrm>
+          <a:prstGeom prst="roundRect">
+            <a:avLst>
+              <a:gd name="adj" fmla="val 5000"/>
+            </a:avLst>
           </a:prstGeom>
           <a:solidFill>
-            <a:srgbClr val="C9603F"/>
+            <a:srgbClr val="F6F1EA"/>
           </a:solidFill>
           <a:ln/>
           <a:effectLst>
@@ -13358,53 +14061,163 @@
       </p:sp>
       <p:sp>
         <p:nvSpPr>
-          <p:cNvPr id="5" name="Text 3"/>
-          <p:cNvSpPr txBox="1"/>
-          <p:nvPr/>
-        </p:nvSpPr>
-        <p:spPr>
-          <a:xfrm>
-            <a:off x="10607040" y="502920"/>
-            <a:ext cx="822960" cy="822960"/>
-          </a:xfrm>
-          <a:prstGeom prst="rect">
-            <a:avLst/>
-          </a:prstGeom>
-          <a:noFill/>
-          <a:ln/>
-        </p:spPr>
-        <p:txBody>
-          <a:bodyPr wrap="square" lIns="0" tIns="0" rIns="0" bIns="0" rtlCol="0" anchor="ctr"/>
-          <a:lstStyle/>
-          <a:p>
-            <a:pPr algn="ctr" indent="0" marL="0">
-              <a:buNone/>
-            </a:pPr>
-            <a:r>
-              <a:rPr lang="en-US" sz="2880" b="1" dirty="0">
-                <a:solidFill>
-                  <a:srgbClr val="FFFFFF"/>
-                </a:solidFill>
-                <a:latin typeface="游ゴシック" pitchFamily="34" charset="0"/>
-                <a:ea typeface="游ゴシック" pitchFamily="34" charset="-122"/>
-                <a:cs typeface="游ゴシック" pitchFamily="34" charset="-120"/>
-              </a:rPr>
-              <a:t>斬</a:t>
-            </a:r>
-            <a:endParaRPr lang="en-US" sz="2880" dirty="0"/>
-          </a:p>
-        </p:txBody>
-      </p:sp>
-      <p:sp>
-        <p:nvSpPr>
-          <p:cNvPr id="6" name="Text 4"/>
-          <p:cNvSpPr txBox="1"/>
-          <p:nvPr/>
-        </p:nvSpPr>
-        <p:spPr>
-          <a:xfrm>
-            <a:off x="640080" y="1783080"/>
-            <a:ext cx="10881360" cy="4206240"/>
+          <p:cNvPr id="6" name="Text 3"/>
+          <p:cNvSpPr txBox="1"/>
+          <p:nvPr/>
+        </p:nvSpPr>
+        <p:spPr>
+          <a:xfrm>
+            <a:off x="7863840" y="1965960"/>
+            <a:ext cx="3474720" cy="457200"/>
+          </a:xfrm>
+          <a:prstGeom prst="rect">
+            <a:avLst/>
+          </a:prstGeom>
+          <a:noFill/>
+          <a:ln/>
+        </p:spPr>
+        <p:txBody>
+          <a:bodyPr wrap="square" lIns="0" tIns="0" rIns="0" bIns="0" rtlCol="0" anchor="ctr"/>
+          <a:lstStyle/>
+          <a:p>
+            <a:pPr indent="0" marL="0">
+              <a:buNone/>
+            </a:pPr>
+            <a:r>
+              <a:rPr lang="en-US" sz="1600" b="1" dirty="0">
+                <a:solidFill>
+                  <a:srgbClr val="C9603F"/>
+                </a:solidFill>
+                <a:latin typeface="游ゴシック" pitchFamily="34" charset="0"/>
+                <a:ea typeface="游ゴシック" pitchFamily="34" charset="-122"/>
+                <a:cs typeface="游ゴシック" pitchFamily="34" charset="-120"/>
+              </a:rPr>
+              <a:t>金融＋不動産　＝　80億円</a:t>
+            </a:r>
+            <a:endParaRPr lang="en-US" sz="1600" dirty="0"/>
+          </a:p>
+        </p:txBody>
+      </p:sp>
+      <p:sp>
+        <p:nvSpPr>
+          <p:cNvPr id="7" name="Text 4"/>
+          <p:cNvSpPr txBox="1"/>
+          <p:nvPr/>
+        </p:nvSpPr>
+        <p:spPr>
+          <a:xfrm>
+            <a:off x="7863840" y="2423160"/>
+            <a:ext cx="3474720" cy="1097280"/>
+          </a:xfrm>
+          <a:prstGeom prst="rect">
+            <a:avLst/>
+          </a:prstGeom>
+          <a:noFill/>
+          <a:ln/>
+        </p:spPr>
+        <p:txBody>
+          <a:bodyPr wrap="square" lIns="0" tIns="0" rIns="0" bIns="0" rtlCol="0" anchor="t"/>
+          <a:lstStyle/>
+          <a:p>
+            <a:pPr indent="0" marL="0">
+              <a:lnSpc>
+                <a:spcPct val="125000"/>
+              </a:lnSpc>
+              <a:buNone/>
+            </a:pPr>
+            <a:r>
+              <a:rPr lang="en-US" sz="1200" dirty="0">
+                <a:solidFill>
+                  <a:srgbClr val="3A3A3A"/>
+                </a:solidFill>
+                <a:latin typeface="游ゴシック" pitchFamily="34" charset="0"/>
+                <a:ea typeface="游ゴシック" pitchFamily="34" charset="-122"/>
+                <a:cs typeface="游ゴシック" pitchFamily="34" charset="-120"/>
+              </a:rPr>
+              <a:t>全体想定100億円のうち約8割を占める、資産性の高い意思決定支援（相続発生時の資産整理・組み換え）が中核であることを示す。</a:t>
+            </a:r>
+            <a:endParaRPr lang="en-US" sz="1200" dirty="0"/>
+          </a:p>
+        </p:txBody>
+      </p:sp>
+      <p:sp>
+        <p:nvSpPr>
+          <p:cNvPr id="8" name="Shape 5"/>
+          <p:cNvSpPr/>
+          <p:nvPr/>
+        </p:nvSpPr>
+        <p:spPr>
+          <a:xfrm>
+            <a:off x="7635240" y="3794760"/>
+            <a:ext cx="3931920" cy="2194560"/>
+          </a:xfrm>
+          <a:prstGeom prst="roundRect">
+            <a:avLst>
+              <a:gd name="adj" fmla="val 4167"/>
+            </a:avLst>
+          </a:prstGeom>
+          <a:solidFill>
+            <a:srgbClr val="F6F1EA"/>
+          </a:solidFill>
+          <a:ln/>
+          <a:effectLst>
+            <a:outerShdw sx="100000" sy="100000" kx="0" ky="0" algn="bl" rotWithShape="0" blurRad="101600" dist="38100" dir="5400000">
+              <a:srgbClr val="10233A">
+                <a:alpha val="18000"/>
+              </a:srgbClr>
+            </a:outerShdw>
+          </a:effectLst>
+        </p:spPr>
+      </p:sp>
+      <p:sp>
+        <p:nvSpPr>
+          <p:cNvPr id="9" name="Text 6"/>
+          <p:cNvSpPr txBox="1"/>
+          <p:nvPr/>
+        </p:nvSpPr>
+        <p:spPr>
+          <a:xfrm>
+            <a:off x="7863840" y="3977640"/>
+            <a:ext cx="3474720" cy="457200"/>
+          </a:xfrm>
+          <a:prstGeom prst="rect">
+            <a:avLst/>
+          </a:prstGeom>
+          <a:noFill/>
+          <a:ln/>
+        </p:spPr>
+        <p:txBody>
+          <a:bodyPr wrap="square" lIns="0" tIns="0" rIns="0" bIns="0" rtlCol="0" anchor="ctr"/>
+          <a:lstStyle/>
+          <a:p>
+            <a:pPr indent="0" marL="0">
+              <a:buNone/>
+            </a:pPr>
+            <a:r>
+              <a:rPr lang="en-US" sz="1500" b="1" dirty="0">
+                <a:solidFill>
+                  <a:srgbClr val="1E3A5F"/>
+                </a:solidFill>
+                <a:latin typeface="游ゴシック" pitchFamily="34" charset="0"/>
+                <a:ea typeface="游ゴシック" pitchFamily="34" charset="-122"/>
+                <a:cs typeface="游ゴシック" pitchFamily="34" charset="-120"/>
+              </a:rPr>
+              <a:t>残り2割＝士業・施設・M&amp;Aの裾野</a:t>
+            </a:r>
+            <a:endParaRPr lang="en-US" sz="1500" dirty="0"/>
+          </a:p>
+        </p:txBody>
+      </p:sp>
+      <p:sp>
+        <p:nvSpPr>
+          <p:cNvPr id="10" name="Text 7"/>
+          <p:cNvSpPr txBox="1"/>
+          <p:nvPr/>
+        </p:nvSpPr>
+        <p:spPr>
+          <a:xfrm>
+            <a:off x="7863840" y="4434840"/>
+            <a:ext cx="3474720" cy="1463040"/>
           </a:xfrm>
           <a:prstGeom prst="rect">
             <a:avLst/>
@@ -13421,13 +14234,13 @@
                 <a:spcPct val="128000"/>
               </a:lnSpc>
               <a:spcAft>
-                <a:spcPts val="1200"/>
+                <a:spcPts val="800"/>
               </a:spcAft>
               <a:buSzPct val="100000"/>
               <a:buChar char="●"/>
             </a:pPr>
             <a:r>
-              <a:rPr lang="en-US" sz="1500" dirty="0">
+              <a:rPr lang="en-US" sz="1150" dirty="0">
                 <a:solidFill>
                   <a:srgbClr val="3A3A3A"/>
                 </a:solidFill>
@@ -13435,9 +14248,9 @@
                 <a:ea typeface="游ゴシック" pitchFamily="34" charset="-122"/>
                 <a:cs typeface="游ゴシック" pitchFamily="34" charset="-120"/>
               </a:rPr>
-              <a:t>相続コンサルタントが自社の商品を売るのではなく、金融・不動産・士業など周辺専門家の収益の「結節点（hub）」になるという発想そのものが、他に類を見ない（素材①）</a:t>
-            </a:r>
-            <a:endParaRPr lang="en-US" sz="1500" dirty="0"/>
+              <a:t>税理士・司法書士・行政書士・弁護士＝合計7億円</a:t>
+            </a:r>
+            <a:endParaRPr lang="en-US" sz="1150" dirty="0"/>
           </a:p>
           <a:p>
             <a:pPr marL="342900" indent="-342900">
@@ -13445,13 +14258,13 @@
                 <a:spcPct val="128000"/>
               </a:lnSpc>
               <a:spcAft>
-                <a:spcPts val="1200"/>
+                <a:spcPts val="800"/>
               </a:spcAft>
               <a:buSzPct val="100000"/>
               <a:buChar char="●"/>
             </a:pPr>
             <a:r>
-              <a:rPr lang="en-US" sz="1500" dirty="0">
+              <a:rPr lang="en-US" sz="1150" dirty="0">
                 <a:solidFill>
                   <a:srgbClr val="3A3A3A"/>
                 </a:solidFill>
@@ -13459,9 +14272,9 @@
                 <a:ea typeface="游ゴシック" pitchFamily="34" charset="-122"/>
                 <a:cs typeface="游ゴシック" pitchFamily="34" charset="-120"/>
               </a:rPr>
-              <a:t>厚生労働省が既に推進している公的な枠組み（ACP＝人生会議）を、自社の“フロントエンド”として活用するという発想の転換（素材②）</a:t>
-            </a:r>
-            <a:endParaRPr lang="en-US" sz="1500" dirty="0"/>
+              <a:t>有料老人ホーム3億円、法人バルクM&amp;A5億円</a:t>
+            </a:r>
+            <a:endParaRPr lang="en-US" sz="1150" dirty="0"/>
           </a:p>
           <a:p>
             <a:pPr marL="342900" indent="-342900">
@@ -13469,13 +14282,13 @@
                 <a:spcPct val="128000"/>
               </a:lnSpc>
               <a:spcAft>
-                <a:spcPts val="1200"/>
+                <a:spcPts val="800"/>
               </a:spcAft>
               <a:buSzPct val="100000"/>
               <a:buChar char="●"/>
             </a:pPr>
             <a:r>
-              <a:rPr lang="en-US" sz="1500" dirty="0">
+              <a:rPr lang="en-US" sz="1150" dirty="0">
                 <a:solidFill>
                   <a:srgbClr val="3A3A3A"/>
                 </a:solidFill>
@@ -13483,76 +14296,15 @@
                 <a:ea typeface="游ゴシック" pitchFamily="34" charset="-122"/>
                 <a:cs typeface="游ゴシック" pitchFamily="34" charset="-120"/>
               </a:rPr>
-              <a:t>「財産ではなく、家族の抱える“隠れた課題”を見つけに行く」という視点を、育成カリキュラムとして体系化・教材化している（素材③）</a:t>
-            </a:r>
-            <a:endParaRPr lang="en-US" sz="1500" dirty="0"/>
-          </a:p>
-        </p:txBody>
-      </p:sp>
-      <p:sp>
-        <p:nvSpPr>
-          <p:cNvPr id="7" name="Shape 5"/>
-          <p:cNvSpPr/>
-          <p:nvPr/>
-        </p:nvSpPr>
-        <p:spPr>
-          <a:xfrm>
-            <a:off x="640080" y="4846320"/>
-            <a:ext cx="10881360" cy="914400"/>
-          </a:xfrm>
-          <a:prstGeom prst="roundRect">
-            <a:avLst>
-              <a:gd name="adj" fmla="val 8000"/>
-            </a:avLst>
-          </a:prstGeom>
-          <a:solidFill>
-            <a:srgbClr val="1E3A5F"/>
-          </a:solidFill>
-          <a:ln/>
-        </p:spPr>
-      </p:sp>
-      <p:sp>
-        <p:nvSpPr>
-          <p:cNvPr id="8" name="Text 6"/>
-          <p:cNvSpPr txBox="1"/>
-          <p:nvPr/>
-        </p:nvSpPr>
-        <p:spPr>
-          <a:xfrm>
-            <a:off x="914400" y="4846320"/>
-            <a:ext cx="10332720" cy="914400"/>
-          </a:xfrm>
-          <a:prstGeom prst="rect">
-            <a:avLst/>
-          </a:prstGeom>
-          <a:noFill/>
-          <a:ln/>
-        </p:spPr>
-        <p:txBody>
-          <a:bodyPr wrap="square" lIns="0" tIns="0" rIns="0" bIns="0" rtlCol="0" anchor="ctr"/>
-          <a:lstStyle/>
-          <a:p>
-            <a:pPr algn="l" indent="0" marL="0">
-              <a:buNone/>
-            </a:pPr>
-            <a:r>
-              <a:rPr lang="en-US" sz="1700" b="1" dirty="0">
-                <a:solidFill>
-                  <a:srgbClr val="F1DCCF"/>
-                </a:solidFill>
-                <a:latin typeface="游ゴシック" pitchFamily="34" charset="0"/>
-                <a:ea typeface="游ゴシック" pitchFamily="34" charset="-122"/>
-                <a:cs typeface="游ゴシック" pitchFamily="34" charset="-120"/>
-              </a:rPr>
-              <a:t>「ノートを売る」会社ではなく、「専門家たちの収益の結節点になる」会社。</a:t>
-            </a:r>
-            <a:endParaRPr lang="en-US" sz="1700" dirty="0"/>
-          </a:p>
-        </p:txBody>
-      </p:sp>
-      <p:sp>
-        <p:nvSpPr>
-          <p:cNvPr id="9" name="Text 7"/>
+              <a:t>単発の大型案件だけでなく、裾野の広い専門家連携が常時発生している</a:t>
+            </a:r>
+            <a:endParaRPr lang="en-US" sz="1150" dirty="0"/>
+          </a:p>
+        </p:txBody>
+      </p:sp>
+      <p:sp>
+        <p:nvSpPr>
+          <p:cNvPr id="11" name="Text 8"/>
           <p:cNvSpPr txBox="1"/>
           <p:nvPr/>
         </p:nvSpPr>
